--- a/Rapport/Chevalier_cuivré.pptx
+++ b/Rapport/Chevalier_cuivré.pptx
@@ -5,7 +5,7 @@
     <p:sldMasterId id="2147483715" r:id="rId1"/>
   </p:sldMasterIdLst>
   <p:notesMasterIdLst>
-    <p:notesMasterId r:id="rId15"/>
+    <p:notesMasterId r:id="rId19"/>
   </p:notesMasterIdLst>
   <p:sldIdLst>
     <p:sldId id="256" r:id="rId2"/>
@@ -21,6 +21,10 @@
     <p:sldId id="267" r:id="rId12"/>
     <p:sldId id="269" r:id="rId13"/>
     <p:sldId id="266" r:id="rId14"/>
+    <p:sldId id="270" r:id="rId15"/>
+    <p:sldId id="271" r:id="rId16"/>
+    <p:sldId id="272" r:id="rId17"/>
+    <p:sldId id="273" r:id="rId18"/>
   </p:sldIdLst>
   <p:sldSz cx="12192000" cy="6858000"/>
   <p:notesSz cx="6858000" cy="9144000"/>
@@ -125,7 +129,7 @@
 <file path=ppt/revisionInfo.xml><?xml version="1.0" encoding="utf-8"?>
 <p1510:revInfo xmlns:a="http://schemas.openxmlformats.org/drawingml/2006/main" xmlns:r="http://schemas.openxmlformats.org/officeDocument/2006/relationships" xmlns:p1510="http://schemas.microsoft.com/office/powerpoint/2015/10/main">
   <p1510:revLst>
-    <p1510:client id="{A04B8DB3-0E07-4C81-8CE6-75F1F7AC2095}" v="32" dt="2026-04-16T01:04:13.455"/>
+    <p1510:client id="{A04B8DB3-0E07-4C81-8CE6-75F1F7AC2095}" v="37" dt="2026-04-16T02:40:09.877"/>
   </p1510:revLst>
 </p1510:revInfo>
 </file>
@@ -135,7 +139,7 @@
   <pc:docChgLst>
     <pc:chgData name="Tristan Plasse" userId="13c698b9-43c4-4271-b359-faaadca0774b" providerId="ADAL" clId="{FE460185-D4AE-4375-BA71-CD1D7F2341F0}"/>
     <pc:docChg chg="undo custSel addSld delSld modSld addMainMaster delMainMaster">
-      <pc:chgData name="Tristan Plasse" userId="13c698b9-43c4-4271-b359-faaadca0774b" providerId="ADAL" clId="{FE460185-D4AE-4375-BA71-CD1D7F2341F0}" dt="2026-04-16T01:28:41.119" v="2608" actId="20577"/>
+      <pc:chgData name="Tristan Plasse" userId="13c698b9-43c4-4271-b359-faaadca0774b" providerId="ADAL" clId="{FE460185-D4AE-4375-BA71-CD1D7F2341F0}" dt="2026-04-16T02:43:18.894" v="4116" actId="108"/>
       <pc:docMkLst>
         <pc:docMk/>
       </pc:docMkLst>
@@ -713,12 +717,28 @@
           </ac:picMkLst>
         </pc:picChg>
       </pc:sldChg>
-      <pc:sldChg chg="new">
-        <pc:chgData name="Tristan Plasse" userId="13c698b9-43c4-4271-b359-faaadca0774b" providerId="ADAL" clId="{FE460185-D4AE-4375-BA71-CD1D7F2341F0}" dt="2026-04-15T23:47:30.642" v="1416" actId="680"/>
+      <pc:sldChg chg="modSp new mod modNotesTx">
+        <pc:chgData name="Tristan Plasse" userId="13c698b9-43c4-4271-b359-faaadca0774b" providerId="ADAL" clId="{FE460185-D4AE-4375-BA71-CD1D7F2341F0}" dt="2026-04-16T02:27:57.490" v="3588"/>
         <pc:sldMkLst>
           <pc:docMk/>
           <pc:sldMk cId="400772557" sldId="266"/>
         </pc:sldMkLst>
+        <pc:spChg chg="mod">
+          <ac:chgData name="Tristan Plasse" userId="13c698b9-43c4-4271-b359-faaadca0774b" providerId="ADAL" clId="{FE460185-D4AE-4375-BA71-CD1D7F2341F0}" dt="2026-04-16T01:36:18.826" v="3023" actId="20577"/>
+          <ac:spMkLst>
+            <pc:docMk/>
+            <pc:sldMk cId="400772557" sldId="266"/>
+            <ac:spMk id="2" creationId="{B602546B-6E81-B2EF-AF4D-70A2BABCE52E}"/>
+          </ac:spMkLst>
+        </pc:spChg>
+        <pc:spChg chg="mod">
+          <ac:chgData name="Tristan Plasse" userId="13c698b9-43c4-4271-b359-faaadca0774b" providerId="ADAL" clId="{FE460185-D4AE-4375-BA71-CD1D7F2341F0}" dt="2026-04-16T02:27:57.490" v="3588"/>
+          <ac:spMkLst>
+            <pc:docMk/>
+            <pc:sldMk cId="400772557" sldId="266"/>
+            <ac:spMk id="3" creationId="{7C8FECE2-37AA-AFF5-7D1E-A6F3BA91F380}"/>
+          </ac:spMkLst>
+        </pc:spChg>
       </pc:sldChg>
       <pc:sldChg chg="addSp delSp modSp add mod">
         <pc:chgData name="Tristan Plasse" userId="13c698b9-43c4-4271-b359-faaadca0774b" providerId="ADAL" clId="{FE460185-D4AE-4375-BA71-CD1D7F2341F0}" dt="2026-04-16T01:21:56.262" v="2594" actId="14100"/>
@@ -806,21 +826,21 @@
         </pc:sldMkLst>
       </pc:sldChg>
       <pc:sldChg chg="addSp delSp modSp add mod">
-        <pc:chgData name="Tristan Plasse" userId="13c698b9-43c4-4271-b359-faaadca0774b" providerId="ADAL" clId="{FE460185-D4AE-4375-BA71-CD1D7F2341F0}" dt="2026-04-16T01:28:41.119" v="2608" actId="20577"/>
+        <pc:chgData name="Tristan Plasse" userId="13c698b9-43c4-4271-b359-faaadca0774b" providerId="ADAL" clId="{FE460185-D4AE-4375-BA71-CD1D7F2341F0}" dt="2026-04-16T01:36:09.232" v="3013" actId="20577"/>
         <pc:sldMkLst>
           <pc:docMk/>
           <pc:sldMk cId="4073645163" sldId="269"/>
         </pc:sldMkLst>
         <pc:spChg chg="mod">
-          <ac:chgData name="Tristan Plasse" userId="13c698b9-43c4-4271-b359-faaadca0774b" providerId="ADAL" clId="{FE460185-D4AE-4375-BA71-CD1D7F2341F0}" dt="2026-04-16T01:28:41.119" v="2608" actId="20577"/>
+          <ac:chgData name="Tristan Plasse" userId="13c698b9-43c4-4271-b359-faaadca0774b" providerId="ADAL" clId="{FE460185-D4AE-4375-BA71-CD1D7F2341F0}" dt="2026-04-16T01:36:09.232" v="3013" actId="20577"/>
           <ac:spMkLst>
             <pc:docMk/>
             <pc:sldMk cId="4073645163" sldId="269"/>
             <ac:spMk id="12" creationId="{C9FAF4E8-FBA0-C1B3-18B7-2833B15C2E5C}"/>
           </ac:spMkLst>
         </pc:spChg>
-        <pc:picChg chg="add mod">
-          <ac:chgData name="Tristan Plasse" userId="13c698b9-43c4-4271-b359-faaadca0774b" providerId="ADAL" clId="{FE460185-D4AE-4375-BA71-CD1D7F2341F0}" dt="2026-04-16T01:28:37.573" v="2605" actId="14100"/>
+        <pc:picChg chg="add del mod">
+          <ac:chgData name="Tristan Plasse" userId="13c698b9-43c4-4271-b359-faaadca0774b" providerId="ADAL" clId="{FE460185-D4AE-4375-BA71-CD1D7F2341F0}" dt="2026-04-16T01:31:08.732" v="2614" actId="478"/>
           <ac:picMkLst>
             <pc:docMk/>
             <pc:sldMk cId="4073645163" sldId="269"/>
@@ -835,6 +855,30 @@
             <ac:picMk id="4" creationId="{F7435F9E-1B68-EADE-849E-E3EDCCD07560}"/>
           </ac:picMkLst>
         </pc:picChg>
+        <pc:picChg chg="add mod">
+          <ac:chgData name="Tristan Plasse" userId="13c698b9-43c4-4271-b359-faaadca0774b" providerId="ADAL" clId="{FE460185-D4AE-4375-BA71-CD1D7F2341F0}" dt="2026-04-16T01:33:17.443" v="2633" actId="14100"/>
+          <ac:picMkLst>
+            <pc:docMk/>
+            <pc:sldMk cId="4073645163" sldId="269"/>
+            <ac:picMk id="6" creationId="{57A977B4-F0B7-1A94-5F50-6DB61D43BE7B}"/>
+          </ac:picMkLst>
+        </pc:picChg>
+        <pc:picChg chg="add del mod">
+          <ac:chgData name="Tristan Plasse" userId="13c698b9-43c4-4271-b359-faaadca0774b" providerId="ADAL" clId="{FE460185-D4AE-4375-BA71-CD1D7F2341F0}" dt="2026-04-16T01:32:08.871" v="2619" actId="478"/>
+          <ac:picMkLst>
+            <pc:docMk/>
+            <pc:sldMk cId="4073645163" sldId="269"/>
+            <ac:picMk id="8" creationId="{3D9401CE-DFEB-73AD-1B71-D0EE61988BBC}"/>
+          </ac:picMkLst>
+        </pc:picChg>
+        <pc:picChg chg="add mod modCrop">
+          <ac:chgData name="Tristan Plasse" userId="13c698b9-43c4-4271-b359-faaadca0774b" providerId="ADAL" clId="{FE460185-D4AE-4375-BA71-CD1D7F2341F0}" dt="2026-04-16T01:33:01.343" v="2631" actId="14100"/>
+          <ac:picMkLst>
+            <pc:docMk/>
+            <pc:sldMk cId="4073645163" sldId="269"/>
+            <ac:picMk id="10" creationId="{8F3BD6FE-B164-B9F2-09BB-32BB144C5117}"/>
+          </ac:picMkLst>
+        </pc:picChg>
         <pc:picChg chg="del">
           <ac:chgData name="Tristan Plasse" userId="13c698b9-43c4-4271-b359-faaadca0774b" providerId="ADAL" clId="{FE460185-D4AE-4375-BA71-CD1D7F2341F0}" dt="2026-04-16T01:28:39.115" v="2606" actId="478"/>
           <ac:picMkLst>
@@ -843,6 +887,146 @@
             <ac:picMk id="13" creationId="{6B8210D3-7887-C695-A074-8C993699513C}"/>
           </ac:picMkLst>
         </pc:picChg>
+      </pc:sldChg>
+      <pc:sldChg chg="addSp modSp new mod setBg">
+        <pc:chgData name="Tristan Plasse" userId="13c698b9-43c4-4271-b359-faaadca0774b" providerId="ADAL" clId="{FE460185-D4AE-4375-BA71-CD1D7F2341F0}" dt="2026-04-16T02:43:18.894" v="4116" actId="108"/>
+        <pc:sldMkLst>
+          <pc:docMk/>
+          <pc:sldMk cId="960806995" sldId="270"/>
+        </pc:sldMkLst>
+        <pc:spChg chg="mod">
+          <ac:chgData name="Tristan Plasse" userId="13c698b9-43c4-4271-b359-faaadca0774b" providerId="ADAL" clId="{FE460185-D4AE-4375-BA71-CD1D7F2341F0}" dt="2026-04-16T02:43:08.632" v="4114" actId="26606"/>
+          <ac:spMkLst>
+            <pc:docMk/>
+            <pc:sldMk cId="960806995" sldId="270"/>
+            <ac:spMk id="2" creationId="{E94E064B-C271-D942-847D-C57AA49309EB}"/>
+          </ac:spMkLst>
+        </pc:spChg>
+        <pc:spChg chg="mod">
+          <ac:chgData name="Tristan Plasse" userId="13c698b9-43c4-4271-b359-faaadca0774b" providerId="ADAL" clId="{FE460185-D4AE-4375-BA71-CD1D7F2341F0}" dt="2026-04-16T02:43:18.894" v="4116" actId="108"/>
+          <ac:spMkLst>
+            <pc:docMk/>
+            <pc:sldMk cId="960806995" sldId="270"/>
+            <ac:spMk id="3" creationId="{985811B9-89CF-1E2E-CD4B-69C7E3D221C2}"/>
+          </ac:spMkLst>
+        </pc:spChg>
+        <pc:spChg chg="add">
+          <ac:chgData name="Tristan Plasse" userId="13c698b9-43c4-4271-b359-faaadca0774b" providerId="ADAL" clId="{FE460185-D4AE-4375-BA71-CD1D7F2341F0}" dt="2026-04-16T02:43:08.632" v="4114" actId="26606"/>
+          <ac:spMkLst>
+            <pc:docMk/>
+            <pc:sldMk cId="960806995" sldId="270"/>
+            <ac:spMk id="8" creationId="{5F710FDB-0919-493E-8539-8240C23F1EB2}"/>
+          </ac:spMkLst>
+        </pc:spChg>
+        <pc:cxnChg chg="add">
+          <ac:chgData name="Tristan Plasse" userId="13c698b9-43c4-4271-b359-faaadca0774b" providerId="ADAL" clId="{FE460185-D4AE-4375-BA71-CD1D7F2341F0}" dt="2026-04-16T02:43:08.632" v="4114" actId="26606"/>
+          <ac:cxnSpMkLst>
+            <pc:docMk/>
+            <pc:sldMk cId="960806995" sldId="270"/>
+            <ac:cxnSpMk id="10" creationId="{0AFF0B6C-73E2-4B40-9280-938C14922C87}"/>
+          </ac:cxnSpMkLst>
+        </pc:cxnChg>
+      </pc:sldChg>
+      <pc:sldChg chg="addSp delSp modSp new mod setBg">
+        <pc:chgData name="Tristan Plasse" userId="13c698b9-43c4-4271-b359-faaadca0774b" providerId="ADAL" clId="{FE460185-D4AE-4375-BA71-CD1D7F2341F0}" dt="2026-04-16T02:43:04.560" v="4113" actId="26606"/>
+        <pc:sldMkLst>
+          <pc:docMk/>
+          <pc:sldMk cId="1896708259" sldId="271"/>
+        </pc:sldMkLst>
+        <pc:spChg chg="mod">
+          <ac:chgData name="Tristan Plasse" userId="13c698b9-43c4-4271-b359-faaadca0774b" providerId="ADAL" clId="{FE460185-D4AE-4375-BA71-CD1D7F2341F0}" dt="2026-04-16T02:43:04.560" v="4113" actId="26606"/>
+          <ac:spMkLst>
+            <pc:docMk/>
+            <pc:sldMk cId="1896708259" sldId="271"/>
+            <ac:spMk id="2" creationId="{8D966DD8-8219-CF1B-134B-3A3C1821891D}"/>
+          </ac:spMkLst>
+        </pc:spChg>
+        <pc:spChg chg="mod">
+          <ac:chgData name="Tristan Plasse" userId="13c698b9-43c4-4271-b359-faaadca0774b" providerId="ADAL" clId="{FE460185-D4AE-4375-BA71-CD1D7F2341F0}" dt="2026-04-16T02:43:04.560" v="4113" actId="26606"/>
+          <ac:spMkLst>
+            <pc:docMk/>
+            <pc:sldMk cId="1896708259" sldId="271"/>
+            <ac:spMk id="3" creationId="{76E70E93-C46E-8BE3-F6AA-2FF55DA44A33}"/>
+          </ac:spMkLst>
+        </pc:spChg>
+        <pc:spChg chg="add del">
+          <ac:chgData name="Tristan Plasse" userId="13c698b9-43c4-4271-b359-faaadca0774b" providerId="ADAL" clId="{FE460185-D4AE-4375-BA71-CD1D7F2341F0}" dt="2026-04-16T02:43:04.560" v="4113" actId="26606"/>
+          <ac:spMkLst>
+            <pc:docMk/>
+            <pc:sldMk cId="1896708259" sldId="271"/>
+            <ac:spMk id="8" creationId="{5F710FDB-0919-493E-8539-8240C23F1EB2}"/>
+          </ac:spMkLst>
+        </pc:spChg>
+        <pc:cxnChg chg="add del">
+          <ac:chgData name="Tristan Plasse" userId="13c698b9-43c4-4271-b359-faaadca0774b" providerId="ADAL" clId="{FE460185-D4AE-4375-BA71-CD1D7F2341F0}" dt="2026-04-16T02:43:04.560" v="4113" actId="26606"/>
+          <ac:cxnSpMkLst>
+            <pc:docMk/>
+            <pc:sldMk cId="1896708259" sldId="271"/>
+            <ac:cxnSpMk id="10" creationId="{0AFF0B6C-73E2-4B40-9280-938C14922C87}"/>
+          </ac:cxnSpMkLst>
+        </pc:cxnChg>
+      </pc:sldChg>
+      <pc:sldChg chg="addSp delSp modSp new mod setBg">
+        <pc:chgData name="Tristan Plasse" userId="13c698b9-43c4-4271-b359-faaadca0774b" providerId="ADAL" clId="{FE460185-D4AE-4375-BA71-CD1D7F2341F0}" dt="2026-04-16T02:42:41.334" v="4108" actId="26606"/>
+        <pc:sldMkLst>
+          <pc:docMk/>
+          <pc:sldMk cId="1681359310" sldId="272"/>
+        </pc:sldMkLst>
+        <pc:spChg chg="mod">
+          <ac:chgData name="Tristan Plasse" userId="13c698b9-43c4-4271-b359-faaadca0774b" providerId="ADAL" clId="{FE460185-D4AE-4375-BA71-CD1D7F2341F0}" dt="2026-04-16T02:42:41.334" v="4108" actId="26606"/>
+          <ac:spMkLst>
+            <pc:docMk/>
+            <pc:sldMk cId="1681359310" sldId="272"/>
+            <ac:spMk id="2" creationId="{C6592201-F93D-A145-140C-4ED4769B3007}"/>
+          </ac:spMkLst>
+        </pc:spChg>
+        <pc:spChg chg="del">
+          <ac:chgData name="Tristan Plasse" userId="13c698b9-43c4-4271-b359-faaadca0774b" providerId="ADAL" clId="{FE460185-D4AE-4375-BA71-CD1D7F2341F0}" dt="2026-04-16T02:42:34.162" v="4107" actId="478"/>
+          <ac:spMkLst>
+            <pc:docMk/>
+            <pc:sldMk cId="1681359310" sldId="272"/>
+            <ac:spMk id="3" creationId="{73F2AA7A-9104-D0E1-A821-0144F482BC91}"/>
+          </ac:spMkLst>
+        </pc:spChg>
+        <pc:spChg chg="add">
+          <ac:chgData name="Tristan Plasse" userId="13c698b9-43c4-4271-b359-faaadca0774b" providerId="ADAL" clId="{FE460185-D4AE-4375-BA71-CD1D7F2341F0}" dt="2026-04-16T02:42:41.334" v="4108" actId="26606"/>
+          <ac:spMkLst>
+            <pc:docMk/>
+            <pc:sldMk cId="1681359310" sldId="272"/>
+            <ac:spMk id="11" creationId="{DEF92653-5D6D-47E6-8744-0DAF76E049C4}"/>
+          </ac:spMkLst>
+        </pc:spChg>
+        <pc:cxnChg chg="add">
+          <ac:chgData name="Tristan Plasse" userId="13c698b9-43c4-4271-b359-faaadca0774b" providerId="ADAL" clId="{FE460185-D4AE-4375-BA71-CD1D7F2341F0}" dt="2026-04-16T02:42:41.334" v="4108" actId="26606"/>
+          <ac:cxnSpMkLst>
+            <pc:docMk/>
+            <pc:sldMk cId="1681359310" sldId="272"/>
+            <ac:cxnSpMk id="7" creationId="{F64F9B95-9045-48D2-B9F3-2927E98F54AA}"/>
+          </ac:cxnSpMkLst>
+        </pc:cxnChg>
+        <pc:cxnChg chg="add">
+          <ac:chgData name="Tristan Plasse" userId="13c698b9-43c4-4271-b359-faaadca0774b" providerId="ADAL" clId="{FE460185-D4AE-4375-BA71-CD1D7F2341F0}" dt="2026-04-16T02:42:41.334" v="4108" actId="26606"/>
+          <ac:cxnSpMkLst>
+            <pc:docMk/>
+            <pc:sldMk cId="1681359310" sldId="272"/>
+            <ac:cxnSpMk id="9" creationId="{085AA86F-6A4D-4BCB-A045-D992CDC2959B}"/>
+          </ac:cxnSpMkLst>
+        </pc:cxnChg>
+        <pc:cxnChg chg="add">
+          <ac:chgData name="Tristan Plasse" userId="13c698b9-43c4-4271-b359-faaadca0774b" providerId="ADAL" clId="{FE460185-D4AE-4375-BA71-CD1D7F2341F0}" dt="2026-04-16T02:42:41.334" v="4108" actId="26606"/>
+          <ac:cxnSpMkLst>
+            <pc:docMk/>
+            <pc:sldMk cId="1681359310" sldId="272"/>
+            <ac:cxnSpMk id="13" creationId="{9CA98CE3-81A7-4FFE-A047-9AA65998D877}"/>
+          </ac:cxnSpMkLst>
+        </pc:cxnChg>
+      </pc:sldChg>
+      <pc:sldChg chg="new">
+        <pc:chgData name="Tristan Plasse" userId="13c698b9-43c4-4271-b359-faaadca0774b" providerId="ADAL" clId="{FE460185-D4AE-4375-BA71-CD1D7F2341F0}" dt="2026-04-16T02:42:48.314" v="4109" actId="680"/>
+        <pc:sldMkLst>
+          <pc:docMk/>
+          <pc:sldMk cId="3744480376" sldId="273"/>
+        </pc:sldMkLst>
       </pc:sldChg>
       <pc:sldMasterChg chg="del delSldLayout">
         <pc:chgData name="Tristan Plasse" userId="13c698b9-43c4-4271-b359-faaadca0774b" providerId="ADAL" clId="{FE460185-D4AE-4375-BA71-CD1D7F2341F0}" dt="2026-04-15T20:11:02.110" v="50" actId="26606"/>
@@ -5309,6 +5493,93 @@
 </p:notes>
 </file>
 
+<file path=ppt/notesSlides/notesSlide2.xml><?xml version="1.0" encoding="utf-8"?>
+<p:notes xmlns:a="http://schemas.openxmlformats.org/drawingml/2006/main" xmlns:r="http://schemas.openxmlformats.org/officeDocument/2006/relationships" xmlns:p="http://schemas.openxmlformats.org/presentationml/2006/main">
+  <p:cSld>
+    <p:spTree>
+      <p:nvGrpSpPr>
+        <p:cNvPr id="1" name=""/>
+        <p:cNvGrpSpPr/>
+        <p:nvPr/>
+      </p:nvGrpSpPr>
+      <p:grpSpPr>
+        <a:xfrm>
+          <a:off x="0" y="0"/>
+          <a:ext cx="0" cy="0"/>
+          <a:chOff x="0" y="0"/>
+          <a:chExt cx="0" cy="0"/>
+        </a:xfrm>
+      </p:grpSpPr>
+      <p:sp>
+        <p:nvSpPr>
+          <p:cNvPr id="2" name="Espace réservé de l'image des diapositives 1"/>
+          <p:cNvSpPr>
+            <a:spLocks noGrp="1" noRot="1" noChangeAspect="1"/>
+          </p:cNvSpPr>
+          <p:nvPr>
+            <p:ph type="sldImg"/>
+          </p:nvPr>
+        </p:nvSpPr>
+        <p:spPr/>
+      </p:sp>
+      <p:sp>
+        <p:nvSpPr>
+          <p:cNvPr id="3" name="Espace réservé des notes 2"/>
+          <p:cNvSpPr>
+            <a:spLocks noGrp="1"/>
+          </p:cNvSpPr>
+          <p:nvPr>
+            <p:ph type="body" idx="1"/>
+          </p:nvPr>
+        </p:nvSpPr>
+        <p:spPr/>
+        <p:txBody>
+          <a:bodyPr/>
+          <a:lstStyle/>
+          <a:p>
+            <a:r>
+              <a:rPr lang="fr-CA" dirty="0"/>
+              <a:t>Ex. les individus stockés pourrait ne pas connaître le lieu de fraie</a:t>
+            </a:r>
+          </a:p>
+        </p:txBody>
+      </p:sp>
+      <p:sp>
+        <p:nvSpPr>
+          <p:cNvPr id="4" name="Espace réservé du numéro de diapositive 3"/>
+          <p:cNvSpPr>
+            <a:spLocks noGrp="1"/>
+          </p:cNvSpPr>
+          <p:nvPr>
+            <p:ph type="sldNum" sz="quarter" idx="5"/>
+          </p:nvPr>
+        </p:nvSpPr>
+        <p:spPr/>
+        <p:txBody>
+          <a:bodyPr/>
+          <a:lstStyle/>
+          <a:p>
+            <a:fld id="{EA5809C9-D391-499D-8A4B-F46E79386DAE}" type="slidenum">
+              <a:rPr lang="fr-CA" smtClean="0"/>
+              <a:t>13</a:t>
+            </a:fld>
+            <a:endParaRPr lang="fr-CA"/>
+          </a:p>
+        </p:txBody>
+      </p:sp>
+    </p:spTree>
+    <p:extLst>
+      <p:ext uri="{BB962C8B-B14F-4D97-AF65-F5344CB8AC3E}">
+        <p14:creationId xmlns:p14="http://schemas.microsoft.com/office/powerpoint/2010/main" val="1322109074"/>
+      </p:ext>
+    </p:extLst>
+  </p:cSld>
+  <p:clrMapOvr>
+    <a:masterClrMapping/>
+  </p:clrMapOvr>
+</p:notes>
+</file>
+
 <file path=ppt/slideLayouts/slideLayout1.xml><?xml version="1.0" encoding="utf-8"?>
 <p:sldLayout xmlns:a="http://schemas.openxmlformats.org/drawingml/2006/main" xmlns:r="http://schemas.openxmlformats.org/officeDocument/2006/relationships" xmlns:p="http://schemas.openxmlformats.org/presentationml/2006/main" type="title" preserve="1">
   <p:cSld name="Title Slide">
@@ -9353,7 +9624,7 @@
         </p:nvSpPr>
         <p:spPr>
           <a:xfrm>
-            <a:off x="1295400" y="4936931"/>
+            <a:off x="1295400" y="4852863"/>
             <a:ext cx="9601200" cy="1077218"/>
           </a:xfrm>
           <a:prstGeom prst="rect">
@@ -9378,22 +9649,21 @@
             </a:r>
             <a:r>
               <a:rPr lang="fr-CA" sz="1600" noProof="0" dirty="0"/>
-              <a:t>-Marchand et al. (2025), à droite, résultats de notre analyse. Est représenté : Les probabilités que les chevaliers cuivrés tombent sous un seuil de population dans les prochaines 100 ans, basé sur nos scénarios dynamique stochastiques de population. Lignes : médiane de 5000 itérations; enveloppes colorées : 70% </a:t>
-            </a:r>
-            <a:r>
-              <a:rPr lang="fr-CA" sz="1600" noProof="0" dirty="0" err="1"/>
-              <a:t>ICs</a:t>
-            </a:r>
-            <a:endParaRPr lang="fr-CA" sz="1600" noProof="0" dirty="0"/>
+              <a:t>-Marchand et al. (2025), à droite, résultats de notre analyse. Est représenté :</a:t>
+            </a:r>
+            <a:r>
+              <a:rPr lang="fr-CA" sz="1600" dirty="0"/>
+              <a:t> L’effet d’augmenter l’ensemencement de larves, alevins, individus d’âges 1, et individus matures (âge 10) sur l’abondance de chevaliers matures sur 100 ans dans notre scénario mesuré. Lors de l’application aux scénarios nulles et menacés, les résultats étaient indistinguables de ceux présentés.</a:t>
+            </a:r>
           </a:p>
         </p:txBody>
       </p:sp>
       <p:pic>
         <p:nvPicPr>
-          <p:cNvPr id="3" name="Image 2">
+          <p:cNvPr id="6" name="Image 5">
             <a:extLst>
               <a:ext uri="{FF2B5EF4-FFF2-40B4-BE49-F238E27FC236}">
-                <a16:creationId xmlns:a16="http://schemas.microsoft.com/office/drawing/2014/main" id="{2E5DD771-C94F-58CD-D9B5-D8BE4032FB62}"/>
+                <a16:creationId xmlns:a16="http://schemas.microsoft.com/office/drawing/2014/main" id="{57A977B4-F0B7-1A94-5F50-6DB61D43BE7B}"/>
               </a:ext>
             </a:extLst>
           </p:cNvPr>
@@ -9403,21 +9673,52 @@
           <p:nvPr/>
         </p:nvPicPr>
         <p:blipFill>
-          <a:blip r:embed="rId2">
-            <a:extLst>
-              <a:ext uri="{28A0092B-C50C-407E-A947-70E740481C1C}">
-                <a14:useLocalDpi xmlns:a14="http://schemas.microsoft.com/office/drawing/2010/main" val="0"/>
-              </a:ext>
-            </a:extLst>
-          </a:blip>
+          <a:blip r:embed="rId2"/>
           <a:stretch>
             <a:fillRect/>
           </a:stretch>
         </p:blipFill>
         <p:spPr>
           <a:xfrm>
-            <a:off x="6410797" y="1030628"/>
-            <a:ext cx="4485803" cy="3738169"/>
+            <a:off x="1133475" y="1149359"/>
+            <a:ext cx="4962525" cy="3417648"/>
+          </a:xfrm>
+          <a:prstGeom prst="rect">
+            <a:avLst/>
+          </a:prstGeom>
+        </p:spPr>
+      </p:pic>
+      <p:pic>
+        <p:nvPicPr>
+          <p:cNvPr id="10" name="Image 9">
+            <a:extLst>
+              <a:ext uri="{FF2B5EF4-FFF2-40B4-BE49-F238E27FC236}">
+                <a16:creationId xmlns:a16="http://schemas.microsoft.com/office/drawing/2014/main" id="{8F3BD6FE-B164-B9F2-09BB-32BB144C5117}"/>
+              </a:ext>
+            </a:extLst>
+          </p:cNvPr>
+          <p:cNvPicPr>
+            <a:picLocks noChangeAspect="1"/>
+          </p:cNvPicPr>
+          <p:nvPr/>
+        </p:nvPicPr>
+        <p:blipFill>
+          <a:blip r:embed="rId3">
+            <a:extLst>
+              <a:ext uri="{28A0092B-C50C-407E-A947-70E740481C1C}">
+                <a14:useLocalDpi xmlns:a14="http://schemas.microsoft.com/office/drawing/2010/main" val="0"/>
+              </a:ext>
+            </a:extLst>
+          </a:blip>
+          <a:srcRect t="7092"/>
+          <a:stretch>
+            <a:fillRect/>
+          </a:stretch>
+        </p:blipFill>
+        <p:spPr>
+          <a:xfrm>
+            <a:off x="6096000" y="927919"/>
+            <a:ext cx="5222494" cy="3639088"/>
           </a:xfrm>
           <a:prstGeom prst="rect">
             <a:avLst/>
@@ -9475,7 +9776,10 @@
           <a:bodyPr/>
           <a:lstStyle/>
           <a:p>
-            <a:endParaRPr lang="fr-CA"/>
+            <a:r>
+              <a:rPr lang="fr-CA" dirty="0"/>
+              <a:t>Discussion</a:t>
+            </a:r>
           </a:p>
         </p:txBody>
       </p:sp>
@@ -9500,7 +9804,52 @@
           <a:bodyPr/>
           <a:lstStyle/>
           <a:p>
-            <a:endParaRPr lang="fr-CA"/>
+            <a:pPr>
+              <a:lnSpc>
+                <a:spcPct val="200000"/>
+              </a:lnSpc>
+            </a:pPr>
+            <a:r>
+              <a:rPr lang="fr-CA" dirty="0"/>
+              <a:t>Augmenté ensemencement niveau proposé par Bernatchez (2004) = effet négligeable</a:t>
+            </a:r>
+          </a:p>
+          <a:p>
+            <a:pPr>
+              <a:lnSpc>
+                <a:spcPct val="200000"/>
+              </a:lnSpc>
+            </a:pPr>
+            <a:r>
+              <a:rPr lang="fr-CA" dirty="0"/>
+              <a:t>Recommandation à mettre en place : ensemencement d’individus plus âgés (en plus)</a:t>
+            </a:r>
+          </a:p>
+          <a:p>
+            <a:pPr>
+              <a:lnSpc>
+                <a:spcPct val="200000"/>
+              </a:lnSpc>
+            </a:pPr>
+            <a:r>
+              <a:rPr lang="fr-CA" dirty="0"/>
+              <a:t>Ensemencement d’âge 10 = théoriquement le mieux, mais…</a:t>
+            </a:r>
+            <a:br>
+              <a:rPr lang="fr-CA" dirty="0"/>
+            </a:br>
+            <a:r>
+              <a:rPr lang="fr-CA" dirty="0"/>
+              <a:t> possibilité de phénotype ou comportements mal adaptés (Roberts et al., 2011)</a:t>
+            </a:r>
+          </a:p>
+          <a:p>
+            <a:pPr>
+              <a:lnSpc>
+                <a:spcPct val="200000"/>
+              </a:lnSpc>
+            </a:pPr>
+            <a:endParaRPr lang="fr-CA" dirty="0"/>
           </a:p>
         </p:txBody>
       </p:sp>
@@ -9508,6 +9857,817 @@
     <p:extLst>
       <p:ext uri="{BB962C8B-B14F-4D97-AF65-F5344CB8AC3E}">
         <p14:creationId xmlns:p14="http://schemas.microsoft.com/office/powerpoint/2010/main" val="400772557"/>
+      </p:ext>
+    </p:extLst>
+  </p:cSld>
+  <p:clrMapOvr>
+    <a:masterClrMapping/>
+  </p:clrMapOvr>
+</p:sld>
+</file>
+
+<file path=ppt/slides/slide14.xml><?xml version="1.0" encoding="utf-8"?>
+<p:sld xmlns:a="http://schemas.openxmlformats.org/drawingml/2006/main" xmlns:r="http://schemas.openxmlformats.org/officeDocument/2006/relationships" xmlns:p="http://schemas.openxmlformats.org/presentationml/2006/main">
+  <p:cSld>
+    <p:bg>
+      <p:bgPr>
+        <a:solidFill>
+          <a:schemeClr val="bg1"/>
+        </a:solidFill>
+        <a:effectLst/>
+      </p:bgPr>
+    </p:bg>
+    <p:spTree>
+      <p:nvGrpSpPr>
+        <p:cNvPr id="1" name=""/>
+        <p:cNvGrpSpPr/>
+        <p:nvPr/>
+      </p:nvGrpSpPr>
+      <p:grpSpPr>
+        <a:xfrm>
+          <a:off x="0" y="0"/>
+          <a:ext cx="0" cy="0"/>
+          <a:chOff x="0" y="0"/>
+          <a:chExt cx="0" cy="0"/>
+        </a:xfrm>
+      </p:grpSpPr>
+      <p:sp useBgFill="1">
+        <p:nvSpPr>
+          <p:cNvPr id="8" name="Rectangle 7">
+            <a:extLst>
+              <a:ext uri="{FF2B5EF4-FFF2-40B4-BE49-F238E27FC236}">
+                <a16:creationId xmlns:a16="http://schemas.microsoft.com/office/drawing/2014/main" id="{5F710FDB-0919-493E-8539-8240C23F1EB2}"/>
+              </a:ext>
+              <a:ext uri="{C183D7F6-B498-43B3-948B-1728B52AA6E4}">
+                <adec:decorative xmlns:adec="http://schemas.microsoft.com/office/drawing/2017/decorative" val="1"/>
+              </a:ext>
+            </a:extLst>
+          </p:cNvPr>
+          <p:cNvSpPr>
+            <a:spLocks noGrp="1" noRot="1" noChangeAspect="1" noMove="1" noResize="1" noEditPoints="1" noAdjustHandles="1" noChangeArrowheads="1" noChangeShapeType="1" noTextEdit="1"/>
+          </p:cNvSpPr>
+          <p:nvPr>
+            <p:extLst>
+              <p:ext uri="{386F3935-93C4-4BCD-93E2-E3B085C9AB24}">
+                <p16:designElem xmlns:p16="http://schemas.microsoft.com/office/powerpoint/2015/main" val="1"/>
+              </p:ext>
+            </p:extLst>
+          </p:nvPr>
+        </p:nvSpPr>
+        <p:spPr>
+          <a:xfrm>
+            <a:off x="0" y="0"/>
+            <a:ext cx="12192000" cy="6858000"/>
+          </a:xfrm>
+          <a:prstGeom prst="rect">
+            <a:avLst/>
+          </a:prstGeom>
+          <a:ln w="12700" cap="flat" cmpd="sng" algn="ctr">
+            <a:noFill/>
+            <a:prstDash val="solid"/>
+            <a:miter lim="800000"/>
+          </a:ln>
+          <a:effectLst/>
+          <a:extLst>
+            <a:ext uri="{91240B29-F687-4F45-9708-019B960494DF}">
+              <a14:hiddenLine xmlns:a14="http://schemas.microsoft.com/office/drawing/2010/main" w="12700" cap="flat" cmpd="sng" algn="ctr">
+                <a:solidFill>
+                  <a:schemeClr val="accent1">
+                    <a:shade val="50000"/>
+                  </a:schemeClr>
+                </a:solidFill>
+                <a:prstDash val="solid"/>
+                <a:miter lim="800000"/>
+              </a14:hiddenLine>
+            </a:ext>
+          </a:extLst>
+        </p:spPr>
+        <p:style>
+          <a:lnRef idx="2">
+            <a:schemeClr val="accent1">
+              <a:shade val="50000"/>
+            </a:schemeClr>
+          </a:lnRef>
+          <a:fillRef idx="1">
+            <a:schemeClr val="accent1"/>
+          </a:fillRef>
+          <a:effectRef idx="0">
+            <a:schemeClr val="accent1"/>
+          </a:effectRef>
+          <a:fontRef idx="minor">
+            <a:schemeClr val="lt1"/>
+          </a:fontRef>
+        </p:style>
+        <p:txBody>
+          <a:bodyPr rtlCol="0" anchor="ctr"/>
+          <a:lstStyle/>
+          <a:p>
+            <a:pPr algn="ctr"/>
+            <a:endParaRPr lang="en-US"/>
+          </a:p>
+        </p:txBody>
+      </p:sp>
+      <p:sp>
+        <p:nvSpPr>
+          <p:cNvPr id="2" name="Titre 1">
+            <a:extLst>
+              <a:ext uri="{FF2B5EF4-FFF2-40B4-BE49-F238E27FC236}">
+                <a16:creationId xmlns:a16="http://schemas.microsoft.com/office/drawing/2014/main" id="{E94E064B-C271-D942-847D-C57AA49309EB}"/>
+              </a:ext>
+            </a:extLst>
+          </p:cNvPr>
+          <p:cNvSpPr>
+            <a:spLocks noGrp="1"/>
+          </p:cNvSpPr>
+          <p:nvPr>
+            <p:ph type="title"/>
+          </p:nvPr>
+        </p:nvSpPr>
+        <p:spPr>
+          <a:xfrm>
+            <a:off x="704087" y="559063"/>
+            <a:ext cx="3306747" cy="5256025"/>
+          </a:xfrm>
+        </p:spPr>
+        <p:txBody>
+          <a:bodyPr>
+            <a:normAutofit/>
+          </a:bodyPr>
+          <a:lstStyle/>
+          <a:p>
+            <a:r>
+              <a:rPr lang="fr-CA" sz="3600"/>
+              <a:t>Impact sur la conservation</a:t>
+            </a:r>
+          </a:p>
+        </p:txBody>
+      </p:sp>
+      <p:sp>
+        <p:nvSpPr>
+          <p:cNvPr id="3" name="Espace réservé du contenu 2">
+            <a:extLst>
+              <a:ext uri="{FF2B5EF4-FFF2-40B4-BE49-F238E27FC236}">
+                <a16:creationId xmlns:a16="http://schemas.microsoft.com/office/drawing/2014/main" id="{985811B9-89CF-1E2E-CD4B-69C7E3D221C2}"/>
+              </a:ext>
+            </a:extLst>
+          </p:cNvPr>
+          <p:cNvSpPr>
+            <a:spLocks noGrp="1"/>
+          </p:cNvSpPr>
+          <p:nvPr>
+            <p:ph idx="1"/>
+          </p:nvPr>
+        </p:nvSpPr>
+        <p:spPr>
+          <a:xfrm>
+            <a:off x="4643022" y="622249"/>
+            <a:ext cx="6844892" cy="5639712"/>
+          </a:xfrm>
+        </p:spPr>
+        <p:txBody>
+          <a:bodyPr>
+            <a:normAutofit/>
+          </a:bodyPr>
+          <a:lstStyle/>
+          <a:p>
+            <a:pPr>
+              <a:lnSpc>
+                <a:spcPct val="200000"/>
+              </a:lnSpc>
+            </a:pPr>
+            <a:r>
+              <a:rPr lang="fr-CA" dirty="0"/>
+              <a:t>Ensemencement encore nécessaire pour l’instant (Figure 2)</a:t>
+            </a:r>
+          </a:p>
+          <a:p>
+            <a:pPr marL="0" indent="0">
+              <a:lnSpc>
+                <a:spcPct val="200000"/>
+              </a:lnSpc>
+              <a:buNone/>
+            </a:pPr>
+            <a:endParaRPr lang="fr-CA" dirty="0"/>
+          </a:p>
+          <a:p>
+            <a:pPr>
+              <a:lnSpc>
+                <a:spcPct val="200000"/>
+              </a:lnSpc>
+            </a:pPr>
+            <a:r>
+              <a:rPr lang="fr-CA" dirty="0"/>
+              <a:t>Déclin potentiel de 80% selon nos résultats donc confirme statut en voie de disparition</a:t>
+            </a:r>
+          </a:p>
+          <a:p>
+            <a:pPr lvl="1">
+              <a:lnSpc>
+                <a:spcPct val="200000"/>
+              </a:lnSpc>
+            </a:pPr>
+            <a:r>
+              <a:rPr lang="fr-CA" sz="2000" dirty="0"/>
+              <a:t>Donc action nécessaire</a:t>
+            </a:r>
+          </a:p>
+        </p:txBody>
+      </p:sp>
+      <p:cxnSp>
+        <p:nvCxnSpPr>
+          <p:cNvPr id="10" name="Straight Connector 9">
+            <a:extLst>
+              <a:ext uri="{FF2B5EF4-FFF2-40B4-BE49-F238E27FC236}">
+                <a16:creationId xmlns:a16="http://schemas.microsoft.com/office/drawing/2014/main" id="{0AFF0B6C-73E2-4B40-9280-938C14922C87}"/>
+              </a:ext>
+              <a:ext uri="{C183D7F6-B498-43B3-948B-1728B52AA6E4}">
+                <adec:decorative xmlns:adec="http://schemas.microsoft.com/office/drawing/2017/decorative" val="1"/>
+              </a:ext>
+            </a:extLst>
+          </p:cNvPr>
+          <p:cNvCxnSpPr>
+            <a:cxnSpLocks noGrp="1" noRot="1" noChangeAspect="1" noMove="1" noResize="1" noEditPoints="1" noAdjustHandles="1" noChangeArrowheads="1" noChangeShapeType="1"/>
+          </p:cNvCxnSpPr>
+          <p:nvPr>
+            <p:extLst>
+              <p:ext uri="{386F3935-93C4-4BCD-93E2-E3B085C9AB24}">
+                <p16:designElem xmlns:p16="http://schemas.microsoft.com/office/powerpoint/2015/main" val="1"/>
+              </p:ext>
+            </p:extLst>
+          </p:nvPr>
+        </p:nvCxnSpPr>
+        <p:spPr>
+          <a:xfrm flipV="1">
+            <a:off x="4223541" y="723900"/>
+            <a:ext cx="15948" cy="5450072"/>
+          </a:xfrm>
+          <a:prstGeom prst="line">
+            <a:avLst/>
+          </a:prstGeom>
+          <a:ln w="12700">
+            <a:solidFill>
+              <a:schemeClr val="tx1"/>
+            </a:solidFill>
+          </a:ln>
+        </p:spPr>
+        <p:style>
+          <a:lnRef idx="1">
+            <a:schemeClr val="accent1"/>
+          </a:lnRef>
+          <a:fillRef idx="0">
+            <a:schemeClr val="accent1"/>
+          </a:fillRef>
+          <a:effectRef idx="0">
+            <a:schemeClr val="accent1"/>
+          </a:effectRef>
+          <a:fontRef idx="minor">
+            <a:schemeClr val="tx1"/>
+          </a:fontRef>
+        </p:style>
+      </p:cxnSp>
+    </p:spTree>
+    <p:extLst>
+      <p:ext uri="{BB962C8B-B14F-4D97-AF65-F5344CB8AC3E}">
+        <p14:creationId xmlns:p14="http://schemas.microsoft.com/office/powerpoint/2010/main" val="960806995"/>
+      </p:ext>
+    </p:extLst>
+  </p:cSld>
+  <p:clrMapOvr>
+    <a:masterClrMapping/>
+  </p:clrMapOvr>
+</p:sld>
+</file>
+
+<file path=ppt/slides/slide15.xml><?xml version="1.0" encoding="utf-8"?>
+<p:sld xmlns:a="http://schemas.openxmlformats.org/drawingml/2006/main" xmlns:r="http://schemas.openxmlformats.org/officeDocument/2006/relationships" xmlns:p="http://schemas.openxmlformats.org/presentationml/2006/main">
+  <p:cSld>
+    <p:spTree>
+      <p:nvGrpSpPr>
+        <p:cNvPr id="1" name=""/>
+        <p:cNvGrpSpPr/>
+        <p:nvPr/>
+      </p:nvGrpSpPr>
+      <p:grpSpPr>
+        <a:xfrm>
+          <a:off x="0" y="0"/>
+          <a:ext cx="0" cy="0"/>
+          <a:chOff x="0" y="0"/>
+          <a:chExt cx="0" cy="0"/>
+        </a:xfrm>
+      </p:grpSpPr>
+      <p:sp>
+        <p:nvSpPr>
+          <p:cNvPr id="2" name="Titre 1">
+            <a:extLst>
+              <a:ext uri="{FF2B5EF4-FFF2-40B4-BE49-F238E27FC236}">
+                <a16:creationId xmlns:a16="http://schemas.microsoft.com/office/drawing/2014/main" id="{8D966DD8-8219-CF1B-134B-3A3C1821891D}"/>
+              </a:ext>
+            </a:extLst>
+          </p:cNvPr>
+          <p:cNvSpPr>
+            <a:spLocks noGrp="1"/>
+          </p:cNvSpPr>
+          <p:nvPr>
+            <p:ph type="title"/>
+          </p:nvPr>
+        </p:nvSpPr>
+        <p:spPr/>
+        <p:txBody>
+          <a:bodyPr/>
+          <a:lstStyle/>
+          <a:p>
+            <a:r>
+              <a:rPr lang="fr-CA"/>
+              <a:t>Limitations de l’étude</a:t>
+            </a:r>
+            <a:endParaRPr lang="fr-CA" dirty="0"/>
+          </a:p>
+        </p:txBody>
+      </p:sp>
+      <p:sp>
+        <p:nvSpPr>
+          <p:cNvPr id="3" name="Espace réservé du contenu 2">
+            <a:extLst>
+              <a:ext uri="{FF2B5EF4-FFF2-40B4-BE49-F238E27FC236}">
+                <a16:creationId xmlns:a16="http://schemas.microsoft.com/office/drawing/2014/main" id="{76E70E93-C46E-8BE3-F6AA-2FF55DA44A33}"/>
+              </a:ext>
+            </a:extLst>
+          </p:cNvPr>
+          <p:cNvSpPr>
+            <a:spLocks noGrp="1"/>
+          </p:cNvSpPr>
+          <p:nvPr>
+            <p:ph idx="1"/>
+          </p:nvPr>
+        </p:nvSpPr>
+        <p:spPr/>
+        <p:txBody>
+          <a:bodyPr/>
+          <a:lstStyle/>
+          <a:p>
+            <a:pPr>
+              <a:lnSpc>
+                <a:spcPct val="200000"/>
+              </a:lnSpc>
+            </a:pPr>
+            <a:r>
+              <a:rPr lang="fr-CA"/>
+              <a:t>N'inclue pas de facteurs de prédation ou de dégradation de l’habitat</a:t>
+            </a:r>
+          </a:p>
+          <a:p>
+            <a:pPr>
+              <a:lnSpc>
+                <a:spcPct val="200000"/>
+              </a:lnSpc>
+            </a:pPr>
+            <a:r>
+              <a:rPr lang="fr-CA"/>
+              <a:t>Valeurs stades juvéniles tirées de Dahlberg (1979) = pas des </a:t>
+            </a:r>
+            <a:r>
+              <a:rPr lang="fr-CA" i="1"/>
+              <a:t>M.</a:t>
+            </a:r>
+            <a:r>
+              <a:rPr lang="fr-CA"/>
+              <a:t> </a:t>
+            </a:r>
+            <a:r>
+              <a:rPr lang="fr-CA" i="1"/>
+              <a:t>hubbsi </a:t>
+            </a:r>
+            <a:r>
+              <a:rPr lang="fr-CA"/>
+              <a:t>(surestimation possible)</a:t>
+            </a:r>
+          </a:p>
+          <a:p>
+            <a:pPr>
+              <a:lnSpc>
+                <a:spcPct val="200000"/>
+              </a:lnSpc>
+            </a:pPr>
+            <a:r>
+              <a:rPr lang="fr-CA"/>
+              <a:t>Survie des ensemencements = survie des sauvages</a:t>
+            </a:r>
+          </a:p>
+          <a:p>
+            <a:pPr>
+              <a:lnSpc>
+                <a:spcPct val="200000"/>
+              </a:lnSpc>
+            </a:pPr>
+            <a:r>
+              <a:rPr lang="fr-CA"/>
+              <a:t>Impossible individus &gt;30 ans</a:t>
+            </a:r>
+          </a:p>
+          <a:p>
+            <a:pPr>
+              <a:lnSpc>
+                <a:spcPct val="200000"/>
+              </a:lnSpc>
+            </a:pPr>
+            <a:r>
+              <a:rPr lang="fr-CA"/>
+              <a:t>Pas d’impact de la génétique</a:t>
+            </a:r>
+            <a:endParaRPr lang="fr-CA" dirty="0"/>
+          </a:p>
+        </p:txBody>
+      </p:sp>
+    </p:spTree>
+    <p:extLst>
+      <p:ext uri="{BB962C8B-B14F-4D97-AF65-F5344CB8AC3E}">
+        <p14:creationId xmlns:p14="http://schemas.microsoft.com/office/powerpoint/2010/main" val="1896708259"/>
+      </p:ext>
+    </p:extLst>
+  </p:cSld>
+  <p:clrMapOvr>
+    <a:masterClrMapping/>
+  </p:clrMapOvr>
+</p:sld>
+</file>
+
+<file path=ppt/slides/slide16.xml><?xml version="1.0" encoding="utf-8"?>
+<p:sld xmlns:a="http://schemas.openxmlformats.org/drawingml/2006/main" xmlns:r="http://schemas.openxmlformats.org/officeDocument/2006/relationships" xmlns:p="http://schemas.openxmlformats.org/presentationml/2006/main">
+  <p:cSld>
+    <p:bg>
+      <p:bgPr>
+        <a:solidFill>
+          <a:schemeClr val="bg1"/>
+        </a:solidFill>
+        <a:effectLst/>
+      </p:bgPr>
+    </p:bg>
+    <p:spTree>
+      <p:nvGrpSpPr>
+        <p:cNvPr id="1" name=""/>
+        <p:cNvGrpSpPr/>
+        <p:nvPr/>
+      </p:nvGrpSpPr>
+      <p:grpSpPr>
+        <a:xfrm>
+          <a:off x="0" y="0"/>
+          <a:ext cx="0" cy="0"/>
+          <a:chOff x="0" y="0"/>
+          <a:chExt cx="0" cy="0"/>
+        </a:xfrm>
+      </p:grpSpPr>
+      <p:cxnSp>
+        <p:nvCxnSpPr>
+          <p:cNvPr id="7" name="Straight Connector 6">
+            <a:extLst>
+              <a:ext uri="{FF2B5EF4-FFF2-40B4-BE49-F238E27FC236}">
+                <a16:creationId xmlns:a16="http://schemas.microsoft.com/office/drawing/2014/main" id="{F64F9B95-9045-48D2-B9F3-2927E98F54AA}"/>
+              </a:ext>
+              <a:ext uri="{C183D7F6-B498-43B3-948B-1728B52AA6E4}">
+                <adec:decorative xmlns:adec="http://schemas.microsoft.com/office/drawing/2017/decorative" val="1"/>
+              </a:ext>
+            </a:extLst>
+          </p:cNvPr>
+          <p:cNvCxnSpPr>
+            <a:cxnSpLocks noGrp="1" noRot="1" noChangeAspect="1" noMove="1" noResize="1" noEditPoints="1" noAdjustHandles="1" noChangeArrowheads="1" noChangeShapeType="1"/>
+          </p:cNvCxnSpPr>
+          <p:nvPr>
+            <p:extLst>
+              <p:ext uri="{386F3935-93C4-4BCD-93E2-E3B085C9AB24}">
+                <p16:designElem xmlns:p16="http://schemas.microsoft.com/office/powerpoint/2015/main" val="1"/>
+              </p:ext>
+            </p:extLst>
+          </p:nvPr>
+        </p:nvCxnSpPr>
+        <p:spPr>
+          <a:xfrm>
+            <a:off x="800100" y="723900"/>
+            <a:ext cx="10591800" cy="0"/>
+          </a:xfrm>
+          <a:prstGeom prst="line">
+            <a:avLst/>
+          </a:prstGeom>
+          <a:ln w="44450">
+            <a:solidFill>
+              <a:schemeClr val="tx1"/>
+            </a:solidFill>
+          </a:ln>
+        </p:spPr>
+        <p:style>
+          <a:lnRef idx="1">
+            <a:schemeClr val="accent1"/>
+          </a:lnRef>
+          <a:fillRef idx="0">
+            <a:schemeClr val="accent1"/>
+          </a:fillRef>
+          <a:effectRef idx="0">
+            <a:schemeClr val="accent1"/>
+          </a:effectRef>
+          <a:fontRef idx="minor">
+            <a:schemeClr val="tx1"/>
+          </a:fontRef>
+        </p:style>
+      </p:cxnSp>
+      <p:cxnSp>
+        <p:nvCxnSpPr>
+          <p:cNvPr id="9" name="Straight Connector 8">
+            <a:extLst>
+              <a:ext uri="{FF2B5EF4-FFF2-40B4-BE49-F238E27FC236}">
+                <a16:creationId xmlns:a16="http://schemas.microsoft.com/office/drawing/2014/main" id="{085AA86F-6A4D-4BCB-A045-D992CDC2959B}"/>
+              </a:ext>
+              <a:ext uri="{C183D7F6-B498-43B3-948B-1728B52AA6E4}">
+                <adec:decorative xmlns:adec="http://schemas.microsoft.com/office/drawing/2017/decorative" val="1"/>
+              </a:ext>
+            </a:extLst>
+          </p:cNvPr>
+          <p:cNvCxnSpPr>
+            <a:cxnSpLocks noGrp="1" noRot="1" noChangeAspect="1" noMove="1" noResize="1" noEditPoints="1" noAdjustHandles="1" noChangeArrowheads="1" noChangeShapeType="1"/>
+          </p:cNvCxnSpPr>
+          <p:nvPr>
+            <p:extLst>
+              <p:ext uri="{386F3935-93C4-4BCD-93E2-E3B085C9AB24}">
+                <p16:designElem xmlns:p16="http://schemas.microsoft.com/office/powerpoint/2015/main" val="1"/>
+              </p:ext>
+            </p:extLst>
+          </p:nvPr>
+        </p:nvCxnSpPr>
+        <p:spPr>
+          <a:xfrm>
+            <a:off x="800100" y="6142781"/>
+            <a:ext cx="10591800" cy="0"/>
+          </a:xfrm>
+          <a:prstGeom prst="line">
+            <a:avLst/>
+          </a:prstGeom>
+          <a:ln w="12700">
+            <a:solidFill>
+              <a:schemeClr val="tx1"/>
+            </a:solidFill>
+          </a:ln>
+        </p:spPr>
+        <p:style>
+          <a:lnRef idx="1">
+            <a:schemeClr val="accent1"/>
+          </a:lnRef>
+          <a:fillRef idx="0">
+            <a:schemeClr val="accent1"/>
+          </a:fillRef>
+          <a:effectRef idx="0">
+            <a:schemeClr val="accent1"/>
+          </a:effectRef>
+          <a:fontRef idx="minor">
+            <a:schemeClr val="tx1"/>
+          </a:fontRef>
+        </p:style>
+      </p:cxnSp>
+      <p:sp useBgFill="1">
+        <p:nvSpPr>
+          <p:cNvPr id="11" name="Rectangle 10">
+            <a:extLst>
+              <a:ext uri="{FF2B5EF4-FFF2-40B4-BE49-F238E27FC236}">
+                <a16:creationId xmlns:a16="http://schemas.microsoft.com/office/drawing/2014/main" id="{DEF92653-5D6D-47E6-8744-0DAF76E049C4}"/>
+              </a:ext>
+              <a:ext uri="{C183D7F6-B498-43B3-948B-1728B52AA6E4}">
+                <adec:decorative xmlns:adec="http://schemas.microsoft.com/office/drawing/2017/decorative" val="1"/>
+              </a:ext>
+            </a:extLst>
+          </p:cNvPr>
+          <p:cNvSpPr>
+            <a:spLocks noGrp="1" noRot="1" noChangeAspect="1" noMove="1" noResize="1" noEditPoints="1" noAdjustHandles="1" noChangeArrowheads="1" noChangeShapeType="1" noTextEdit="1"/>
+          </p:cNvSpPr>
+          <p:nvPr>
+            <p:extLst>
+              <p:ext uri="{386F3935-93C4-4BCD-93E2-E3B085C9AB24}">
+                <p16:designElem xmlns:p16="http://schemas.microsoft.com/office/powerpoint/2015/main" val="1"/>
+              </p:ext>
+            </p:extLst>
+          </p:nvPr>
+        </p:nvSpPr>
+        <p:spPr>
+          <a:xfrm>
+            <a:off x="0" y="0"/>
+            <a:ext cx="12192000" cy="6858000"/>
+          </a:xfrm>
+          <a:prstGeom prst="rect">
+            <a:avLst/>
+          </a:prstGeom>
+          <a:ln w="12700" cap="flat" cmpd="sng" algn="ctr">
+            <a:noFill/>
+            <a:prstDash val="solid"/>
+            <a:miter lim="800000"/>
+          </a:ln>
+          <a:effectLst/>
+          <a:extLst>
+            <a:ext uri="{91240B29-F687-4F45-9708-019B960494DF}">
+              <a14:hiddenLine xmlns:a14="http://schemas.microsoft.com/office/drawing/2010/main" w="12700" cap="flat" cmpd="sng" algn="ctr">
+                <a:solidFill>
+                  <a:schemeClr val="accent1">
+                    <a:shade val="50000"/>
+                  </a:schemeClr>
+                </a:solidFill>
+                <a:prstDash val="solid"/>
+                <a:miter lim="800000"/>
+              </a14:hiddenLine>
+            </a:ext>
+          </a:extLst>
+        </p:spPr>
+        <p:style>
+          <a:lnRef idx="2">
+            <a:schemeClr val="accent1">
+              <a:shade val="50000"/>
+            </a:schemeClr>
+          </a:lnRef>
+          <a:fillRef idx="1">
+            <a:schemeClr val="accent1"/>
+          </a:fillRef>
+          <a:effectRef idx="0">
+            <a:schemeClr val="accent1"/>
+          </a:effectRef>
+          <a:fontRef idx="minor">
+            <a:schemeClr val="lt1"/>
+          </a:fontRef>
+        </p:style>
+        <p:txBody>
+          <a:bodyPr rtlCol="0" anchor="ctr"/>
+          <a:lstStyle/>
+          <a:p>
+            <a:pPr algn="ctr"/>
+            <a:endParaRPr lang="en-US"/>
+          </a:p>
+        </p:txBody>
+      </p:sp>
+      <p:sp>
+        <p:nvSpPr>
+          <p:cNvPr id="2" name="Titre 1">
+            <a:extLst>
+              <a:ext uri="{FF2B5EF4-FFF2-40B4-BE49-F238E27FC236}">
+                <a16:creationId xmlns:a16="http://schemas.microsoft.com/office/drawing/2014/main" id="{C6592201-F93D-A145-140C-4ED4769B3007}"/>
+              </a:ext>
+            </a:extLst>
+          </p:cNvPr>
+          <p:cNvSpPr>
+            <a:spLocks noGrp="1"/>
+          </p:cNvSpPr>
+          <p:nvPr>
+            <p:ph type="title"/>
+          </p:nvPr>
+        </p:nvSpPr>
+        <p:spPr>
+          <a:xfrm>
+            <a:off x="800102" y="960594"/>
+            <a:ext cx="5828114" cy="4936812"/>
+          </a:xfrm>
+        </p:spPr>
+        <p:txBody>
+          <a:bodyPr vert="horz" lIns="91440" tIns="45720" rIns="91440" bIns="45720" rtlCol="0" anchor="ctr">
+            <a:normAutofit/>
+          </a:bodyPr>
+          <a:lstStyle/>
+          <a:p>
+            <a:pPr algn="r"/>
+            <a:r>
+              <a:rPr lang="en-US" sz="6000"/>
+              <a:t>Partie 2</a:t>
+            </a:r>
+          </a:p>
+        </p:txBody>
+      </p:sp>
+      <p:cxnSp>
+        <p:nvCxnSpPr>
+          <p:cNvPr id="13" name="Straight Connector 12">
+            <a:extLst>
+              <a:ext uri="{FF2B5EF4-FFF2-40B4-BE49-F238E27FC236}">
+                <a16:creationId xmlns:a16="http://schemas.microsoft.com/office/drawing/2014/main" id="{9CA98CE3-81A7-4FFE-A047-9AA65998D877}"/>
+              </a:ext>
+              <a:ext uri="{C183D7F6-B498-43B3-948B-1728B52AA6E4}">
+                <adec:decorative xmlns:adec="http://schemas.microsoft.com/office/drawing/2017/decorative" val="1"/>
+              </a:ext>
+            </a:extLst>
+          </p:cNvPr>
+          <p:cNvCxnSpPr>
+            <a:cxnSpLocks noGrp="1" noRot="1" noChangeAspect="1" noMove="1" noResize="1" noEditPoints="1" noAdjustHandles="1" noChangeArrowheads="1" noChangeShapeType="1"/>
+          </p:cNvCxnSpPr>
+          <p:nvPr>
+            <p:extLst>
+              <p:ext uri="{386F3935-93C4-4BCD-93E2-E3B085C9AB24}">
+                <p16:designElem xmlns:p16="http://schemas.microsoft.com/office/powerpoint/2015/main" val="1"/>
+              </p:ext>
+            </p:extLst>
+          </p:nvPr>
+        </p:nvCxnSpPr>
+        <p:spPr>
+          <a:xfrm flipV="1">
+            <a:off x="7315200" y="1733549"/>
+            <a:ext cx="0" cy="3390901"/>
+          </a:xfrm>
+          <a:prstGeom prst="line">
+            <a:avLst/>
+          </a:prstGeom>
+          <a:ln w="44450">
+            <a:solidFill>
+              <a:schemeClr val="tx1"/>
+            </a:solidFill>
+          </a:ln>
+        </p:spPr>
+        <p:style>
+          <a:lnRef idx="1">
+            <a:schemeClr val="accent1"/>
+          </a:lnRef>
+          <a:fillRef idx="0">
+            <a:schemeClr val="accent1"/>
+          </a:fillRef>
+          <a:effectRef idx="0">
+            <a:schemeClr val="accent1"/>
+          </a:effectRef>
+          <a:fontRef idx="minor">
+            <a:schemeClr val="tx1"/>
+          </a:fontRef>
+        </p:style>
+      </p:cxnSp>
+    </p:spTree>
+    <p:extLst>
+      <p:ext uri="{BB962C8B-B14F-4D97-AF65-F5344CB8AC3E}">
+        <p14:creationId xmlns:p14="http://schemas.microsoft.com/office/powerpoint/2010/main" val="1681359310"/>
+      </p:ext>
+    </p:extLst>
+  </p:cSld>
+  <p:clrMapOvr>
+    <a:masterClrMapping/>
+  </p:clrMapOvr>
+</p:sld>
+</file>
+
+<file path=ppt/slides/slide17.xml><?xml version="1.0" encoding="utf-8"?>
+<p:sld xmlns:a="http://schemas.openxmlformats.org/drawingml/2006/main" xmlns:r="http://schemas.openxmlformats.org/officeDocument/2006/relationships" xmlns:p="http://schemas.openxmlformats.org/presentationml/2006/main">
+  <p:cSld>
+    <p:spTree>
+      <p:nvGrpSpPr>
+        <p:cNvPr id="1" name=""/>
+        <p:cNvGrpSpPr/>
+        <p:nvPr/>
+      </p:nvGrpSpPr>
+      <p:grpSpPr>
+        <a:xfrm>
+          <a:off x="0" y="0"/>
+          <a:ext cx="0" cy="0"/>
+          <a:chOff x="0" y="0"/>
+          <a:chExt cx="0" cy="0"/>
+        </a:xfrm>
+      </p:grpSpPr>
+      <p:sp>
+        <p:nvSpPr>
+          <p:cNvPr id="2" name="Titre 1">
+            <a:extLst>
+              <a:ext uri="{FF2B5EF4-FFF2-40B4-BE49-F238E27FC236}">
+                <a16:creationId xmlns:a16="http://schemas.microsoft.com/office/drawing/2014/main" id="{0EC2D6A5-520A-776E-E0CF-3651506DA145}"/>
+              </a:ext>
+            </a:extLst>
+          </p:cNvPr>
+          <p:cNvSpPr>
+            <a:spLocks noGrp="1"/>
+          </p:cNvSpPr>
+          <p:nvPr>
+            <p:ph type="title"/>
+          </p:nvPr>
+        </p:nvSpPr>
+        <p:spPr/>
+        <p:txBody>
+          <a:bodyPr/>
+          <a:lstStyle/>
+          <a:p>
+            <a:endParaRPr lang="fr-CA"/>
+          </a:p>
+        </p:txBody>
+      </p:sp>
+      <p:sp>
+        <p:nvSpPr>
+          <p:cNvPr id="3" name="Espace réservé du contenu 2">
+            <a:extLst>
+              <a:ext uri="{FF2B5EF4-FFF2-40B4-BE49-F238E27FC236}">
+                <a16:creationId xmlns:a16="http://schemas.microsoft.com/office/drawing/2014/main" id="{38AAA12E-716D-5899-9938-9C062F7A14B4}"/>
+              </a:ext>
+            </a:extLst>
+          </p:cNvPr>
+          <p:cNvSpPr>
+            <a:spLocks noGrp="1"/>
+          </p:cNvSpPr>
+          <p:nvPr>
+            <p:ph idx="1"/>
+          </p:nvPr>
+        </p:nvSpPr>
+        <p:spPr/>
+        <p:txBody>
+          <a:bodyPr/>
+          <a:lstStyle/>
+          <a:p>
+            <a:endParaRPr lang="fr-CA"/>
+          </a:p>
+        </p:txBody>
+      </p:sp>
+    </p:spTree>
+    <p:extLst>
+      <p:ext uri="{BB962C8B-B14F-4D97-AF65-F5344CB8AC3E}">
+        <p14:creationId xmlns:p14="http://schemas.microsoft.com/office/powerpoint/2010/main" val="3744480376"/>
       </p:ext>
     </p:extLst>
   </p:cSld>

--- a/Rapport/Chevalier_cuivré.pptx
+++ b/Rapport/Chevalier_cuivré.pptx
@@ -123,6 +123,11 @@
       </a:defRPr>
     </a:lvl9pPr>
   </p:defaultTextStyle>
+  <p:extLst>
+    <p:ext uri="{EFAFB233-063F-42B5-8137-9DF3F51BA10A}">
+      <p15:sldGuideLst xmlns:p15="http://schemas.microsoft.com/office/powerpoint/2012/main"/>
+    </p:ext>
+  </p:extLst>
 </p:presentation>
 </file>
 
@@ -5138,7 +5143,7 @@
           <a:p>
             <a:fld id="{27367624-D205-408C-8B1A-02794C4A4744}" type="datetimeFigureOut">
               <a:rPr lang="fr-CA" smtClean="0"/>
-              <a:t>2026-04-15</a:t>
+              <a:t>2026-04-16</a:t>
             </a:fld>
             <a:endParaRPr lang="fr-CA"/>
           </a:p>
@@ -5297,7 +5302,7 @@
           <a:p>
             <a:fld id="{EA5809C9-D391-499D-8A4B-F46E79386DAE}" type="slidenum">
               <a:rPr lang="fr-CA" smtClean="0"/>
-              <a:t>‹N°›</a:t>
+              <a:t>‹n°›</a:t>
             </a:fld>
             <a:endParaRPr lang="fr-CA"/>
           </a:p>
@@ -5733,7 +5738,7 @@
           <a:p>
             <a:fld id="{D1D1EADE-8E88-4C7C-8AC5-FB148DE4940E}" type="datetime1">
               <a:rPr lang="en-US" smtClean="0"/>
-              <a:t>4/15/2026</a:t>
+              <a:t>4/16/2026</a:t>
             </a:fld>
             <a:endParaRPr lang="en-US"/>
           </a:p>
@@ -5787,7 +5792,7 @@
           <a:p>
             <a:fld id="{87E7843D-FF13-4365-9478-9625B70A2705}" type="slidenum">
               <a:rPr lang="en-US" smtClean="0"/>
-              <a:t>‹N°›</a:t>
+              <a:t>‹n°›</a:t>
             </a:fld>
             <a:endParaRPr lang="en-US"/>
           </a:p>
@@ -5933,7 +5938,7 @@
           <a:p>
             <a:fld id="{EC3C8B9C-477D-492A-96AD-1FC2CC997A73}" type="datetime1">
               <a:rPr lang="en-US" smtClean="0"/>
-              <a:t>4/15/2026</a:t>
+              <a:t>4/16/2026</a:t>
             </a:fld>
             <a:endParaRPr lang="en-US"/>
           </a:p>
@@ -5987,7 +5992,7 @@
           <a:p>
             <a:fld id="{87E7843D-FF13-4365-9478-9625B70A2705}" type="slidenum">
               <a:rPr lang="en-US" smtClean="0"/>
-              <a:t>‹N°›</a:t>
+              <a:t>‹n°›</a:t>
             </a:fld>
             <a:endParaRPr lang="en-US"/>
           </a:p>
@@ -6143,7 +6148,7 @@
           <a:p>
             <a:fld id="{42D3AED5-E26D-4E29-B1B3-7847B6779594}" type="datetime1">
               <a:rPr lang="en-US" smtClean="0"/>
-              <a:t>4/15/2026</a:t>
+              <a:t>4/16/2026</a:t>
             </a:fld>
             <a:endParaRPr lang="en-US"/>
           </a:p>
@@ -6197,7 +6202,7 @@
           <a:p>
             <a:fld id="{87E7843D-FF13-4365-9478-9625B70A2705}" type="slidenum">
               <a:rPr lang="en-US" smtClean="0"/>
-              <a:t>‹N°›</a:t>
+              <a:t>‹n°›</a:t>
             </a:fld>
             <a:endParaRPr lang="en-US"/>
           </a:p>
@@ -6343,7 +6348,7 @@
           <a:p>
             <a:fld id="{157B6794-849E-4626-908B-D15793550EFB}" type="datetime1">
               <a:rPr lang="en-US" smtClean="0"/>
-              <a:t>4/15/2026</a:t>
+              <a:t>4/16/2026</a:t>
             </a:fld>
             <a:endParaRPr lang="en-US"/>
           </a:p>
@@ -6397,7 +6402,7 @@
           <a:p>
             <a:fld id="{87E7843D-FF13-4365-9478-9625B70A2705}" type="slidenum">
               <a:rPr lang="en-US" smtClean="0"/>
-              <a:t>‹N°›</a:t>
+              <a:t>‹n°›</a:t>
             </a:fld>
             <a:endParaRPr lang="en-US"/>
           </a:p>
@@ -6619,7 +6624,7 @@
           <a:p>
             <a:fld id="{63DB64E7-5594-42A3-ADBF-E95A7ACEAD64}" type="datetime1">
               <a:rPr lang="en-US" smtClean="0"/>
-              <a:t>4/15/2026</a:t>
+              <a:t>4/16/2026</a:t>
             </a:fld>
             <a:endParaRPr lang="en-US"/>
           </a:p>
@@ -6673,7 +6678,7 @@
           <a:p>
             <a:fld id="{87E7843D-FF13-4365-9478-9625B70A2705}" type="slidenum">
               <a:rPr lang="en-US" smtClean="0"/>
-              <a:t>‹N°›</a:t>
+              <a:t>‹n°›</a:t>
             </a:fld>
             <a:endParaRPr lang="en-US"/>
           </a:p>
@@ -6892,7 +6897,7 @@
           <a:p>
             <a:fld id="{18462B0B-D248-4FFB-8695-AD7FA4B1284A}" type="datetime1">
               <a:rPr lang="en-US" smtClean="0"/>
-              <a:t>4/15/2026</a:t>
+              <a:t>4/16/2026</a:t>
             </a:fld>
             <a:endParaRPr lang="en-US"/>
           </a:p>
@@ -6946,7 +6951,7 @@
           <a:p>
             <a:fld id="{87E7843D-FF13-4365-9478-9625B70A2705}" type="slidenum">
               <a:rPr lang="en-US" smtClean="0"/>
-              <a:t>‹N°›</a:t>
+              <a:t>‹n°›</a:t>
             </a:fld>
             <a:endParaRPr lang="en-US"/>
           </a:p>
@@ -7315,7 +7320,7 @@
           <a:p>
             <a:fld id="{D0378EFB-9159-4510-B73F-4F0409ADE937}" type="datetime1">
               <a:rPr lang="en-US" smtClean="0"/>
-              <a:t>4/15/2026</a:t>
+              <a:t>4/16/2026</a:t>
             </a:fld>
             <a:endParaRPr lang="en-US"/>
           </a:p>
@@ -7369,7 +7374,7 @@
           <a:p>
             <a:fld id="{87E7843D-FF13-4365-9478-9625B70A2705}" type="slidenum">
               <a:rPr lang="en-US" smtClean="0"/>
-              <a:t>‹N°›</a:t>
+              <a:t>‹n°›</a:t>
             </a:fld>
             <a:endParaRPr lang="en-US"/>
           </a:p>
@@ -7457,7 +7462,7 @@
           <a:p>
             <a:fld id="{89BC9412-2452-4BED-A324-9D8C115361AD}" type="datetime1">
               <a:rPr lang="en-US" smtClean="0"/>
-              <a:t>4/15/2026</a:t>
+              <a:t>4/16/2026</a:t>
             </a:fld>
             <a:endParaRPr lang="en-US"/>
           </a:p>
@@ -7511,7 +7516,7 @@
           <a:p>
             <a:fld id="{87E7843D-FF13-4365-9478-9625B70A2705}" type="slidenum">
               <a:rPr lang="en-US" smtClean="0"/>
-              <a:t>‹N°›</a:t>
+              <a:t>‹n°›</a:t>
             </a:fld>
             <a:endParaRPr lang="en-US"/>
           </a:p>
@@ -7570,7 +7575,7 @@
           <a:p>
             <a:fld id="{F5318F62-D251-40E8-A23C-F4CFE9FEAB41}" type="datetime1">
               <a:rPr lang="en-US" smtClean="0"/>
-              <a:t>4/15/2026</a:t>
+              <a:t>4/16/2026</a:t>
             </a:fld>
             <a:endParaRPr lang="en-US"/>
           </a:p>
@@ -7624,7 +7629,7 @@
           <a:p>
             <a:fld id="{87E7843D-FF13-4365-9478-9625B70A2705}" type="slidenum">
               <a:rPr lang="en-US" smtClean="0"/>
-              <a:t>‹N°›</a:t>
+              <a:t>‹n°›</a:t>
             </a:fld>
             <a:endParaRPr lang="en-US"/>
           </a:p>
@@ -7883,7 +7888,7 @@
           <a:p>
             <a:fld id="{44F76144-149E-4874-93A5-554A0357CF82}" type="datetime1">
               <a:rPr lang="en-US" smtClean="0"/>
-              <a:t>4/15/2026</a:t>
+              <a:t>4/16/2026</a:t>
             </a:fld>
             <a:endParaRPr lang="en-US"/>
           </a:p>
@@ -7937,7 +7942,7 @@
           <a:p>
             <a:fld id="{87E7843D-FF13-4365-9478-9625B70A2705}" type="slidenum">
               <a:rPr lang="en-US" smtClean="0"/>
-              <a:t>‹N°›</a:t>
+              <a:t>‹n°›</a:t>
             </a:fld>
             <a:endParaRPr lang="en-US"/>
           </a:p>
@@ -8176,7 +8181,7 @@
           <a:p>
             <a:fld id="{50BA65D8-0540-4835-AE5C-25D29DBA01BE}" type="datetime1">
               <a:rPr lang="en-US" smtClean="0"/>
-              <a:t>4/15/2026</a:t>
+              <a:t>4/16/2026</a:t>
             </a:fld>
             <a:endParaRPr lang="en-US"/>
           </a:p>
@@ -8230,7 +8235,7 @@
           <a:p>
             <a:fld id="{87E7843D-FF13-4365-9478-9625B70A2705}" type="slidenum">
               <a:rPr lang="en-US" smtClean="0"/>
-              <a:t>‹N°›</a:t>
+              <a:t>‹n°›</a:t>
             </a:fld>
             <a:endParaRPr lang="en-US"/>
           </a:p>
@@ -8418,7 +8423,7 @@
           <a:p>
             <a:fld id="{E31BA835-12AC-4E8F-955A-EA3F4DE2791F}" type="datetime1">
               <a:rPr lang="en-US" smtClean="0"/>
-              <a:t>4/15/2026</a:t>
+              <a:t>4/16/2026</a:t>
             </a:fld>
             <a:endParaRPr lang="en-US"/>
           </a:p>
@@ -8505,7 +8510,7 @@
           <a:p>
             <a:fld id="{87E7843D-FF13-4365-9478-9625B70A2705}" type="slidenum">
               <a:rPr lang="en-US" smtClean="0"/>
-              <a:t>‹N°›</a:t>
+              <a:t>‹n°›</a:t>
             </a:fld>
             <a:endParaRPr lang="en-US"/>
           </a:p>

--- a/Rapport/Chevalier_cuivré.pptx
+++ b/Rapport/Chevalier_cuivré.pptx
@@ -5,7 +5,7 @@
     <p:sldMasterId id="2147483715" r:id="rId1"/>
   </p:sldMasterIdLst>
   <p:notesMasterIdLst>
-    <p:notesMasterId r:id="rId19"/>
+    <p:notesMasterId r:id="rId20"/>
   </p:notesMasterIdLst>
   <p:sldIdLst>
     <p:sldId id="256" r:id="rId2"/>
@@ -17,14 +17,15 @@
     <p:sldId id="262" r:id="rId8"/>
     <p:sldId id="263" r:id="rId9"/>
     <p:sldId id="264" r:id="rId10"/>
-    <p:sldId id="265" r:id="rId11"/>
-    <p:sldId id="267" r:id="rId12"/>
-    <p:sldId id="269" r:id="rId13"/>
-    <p:sldId id="266" r:id="rId14"/>
-    <p:sldId id="270" r:id="rId15"/>
-    <p:sldId id="271" r:id="rId16"/>
-    <p:sldId id="272" r:id="rId17"/>
-    <p:sldId id="273" r:id="rId18"/>
+    <p:sldId id="274" r:id="rId11"/>
+    <p:sldId id="265" r:id="rId12"/>
+    <p:sldId id="267" r:id="rId13"/>
+    <p:sldId id="269" r:id="rId14"/>
+    <p:sldId id="266" r:id="rId15"/>
+    <p:sldId id="270" r:id="rId16"/>
+    <p:sldId id="271" r:id="rId17"/>
+    <p:sldId id="272" r:id="rId18"/>
+    <p:sldId id="273" r:id="rId19"/>
   </p:sldIdLst>
   <p:sldSz cx="12192000" cy="6858000"/>
   <p:notesSz cx="6858000" cy="9144000"/>
@@ -134,7 +135,7 @@
 <file path=ppt/revisionInfo.xml><?xml version="1.0" encoding="utf-8"?>
 <p1510:revInfo xmlns:a="http://schemas.openxmlformats.org/drawingml/2006/main" xmlns:r="http://schemas.openxmlformats.org/officeDocument/2006/relationships" xmlns:p1510="http://schemas.microsoft.com/office/powerpoint/2015/10/main">
   <p1510:revLst>
-    <p1510:client id="{A04B8DB3-0E07-4C81-8CE6-75F1F7AC2095}" v="37" dt="2026-04-16T02:40:09.877"/>
+    <p1510:client id="{A04B8DB3-0E07-4C81-8CE6-75F1F7AC2095}" v="43" dt="2026-04-16T22:11:51.737"/>
   </p1510:revLst>
 </p1510:revInfo>
 </file>
@@ -144,7 +145,7 @@
   <pc:docChgLst>
     <pc:chgData name="Tristan Plasse" userId="13c698b9-43c4-4271-b359-faaadca0774b" providerId="ADAL" clId="{FE460185-D4AE-4375-BA71-CD1D7F2341F0}"/>
     <pc:docChg chg="undo custSel addSld delSld modSld addMainMaster delMainMaster">
-      <pc:chgData name="Tristan Plasse" userId="13c698b9-43c4-4271-b359-faaadca0774b" providerId="ADAL" clId="{FE460185-D4AE-4375-BA71-CD1D7F2341F0}" dt="2026-04-16T02:43:18.894" v="4116" actId="108"/>
+      <pc:chgData name="Tristan Plasse" userId="13c698b9-43c4-4271-b359-faaadca0774b" providerId="ADAL" clId="{FE460185-D4AE-4375-BA71-CD1D7F2341F0}" dt="2026-04-16T22:11:55.941" v="4134" actId="26606"/>
       <pc:docMkLst>
         <pc:docMk/>
       </pc:docMkLst>
@@ -1032,6 +1033,101 @@
           <pc:docMk/>
           <pc:sldMk cId="3744480376" sldId="273"/>
         </pc:sldMkLst>
+      </pc:sldChg>
+      <pc:sldChg chg="addSp delSp modSp new mod setBg">
+        <pc:chgData name="Tristan Plasse" userId="13c698b9-43c4-4271-b359-faaadca0774b" providerId="ADAL" clId="{FE460185-D4AE-4375-BA71-CD1D7F2341F0}" dt="2026-04-16T22:11:55.941" v="4134" actId="26606"/>
+        <pc:sldMkLst>
+          <pc:docMk/>
+          <pc:sldMk cId="3943359794" sldId="274"/>
+        </pc:sldMkLst>
+        <pc:spChg chg="mod">
+          <ac:chgData name="Tristan Plasse" userId="13c698b9-43c4-4271-b359-faaadca0774b" providerId="ADAL" clId="{FE460185-D4AE-4375-BA71-CD1D7F2341F0}" dt="2026-04-16T22:11:55.941" v="4134" actId="26606"/>
+          <ac:spMkLst>
+            <pc:docMk/>
+            <pc:sldMk cId="3943359794" sldId="274"/>
+            <ac:spMk id="2" creationId="{F3A5A10E-A61E-2445-131F-98F4232F9171}"/>
+          </ac:spMkLst>
+        </pc:spChg>
+        <pc:spChg chg="del">
+          <ac:chgData name="Tristan Plasse" userId="13c698b9-43c4-4271-b359-faaadca0774b" providerId="ADAL" clId="{FE460185-D4AE-4375-BA71-CD1D7F2341F0}" dt="2026-04-16T21:59:01.265" v="4124" actId="478"/>
+          <ac:spMkLst>
+            <pc:docMk/>
+            <pc:sldMk cId="3943359794" sldId="274"/>
+            <ac:spMk id="3" creationId="{7D509329-D8E9-DC9D-AA20-8B13EE3B11C5}"/>
+          </ac:spMkLst>
+        </pc:spChg>
+        <pc:spChg chg="add">
+          <ac:chgData name="Tristan Plasse" userId="13c698b9-43c4-4271-b359-faaadca0774b" providerId="ADAL" clId="{FE460185-D4AE-4375-BA71-CD1D7F2341F0}" dt="2026-04-16T21:59:01.625" v="4125"/>
+          <ac:spMkLst>
+            <pc:docMk/>
+            <pc:sldMk cId="3943359794" sldId="274"/>
+            <ac:spMk id="4" creationId="{52175E9E-193B-CABD-0847-D23BEF1F84FC}"/>
+          </ac:spMkLst>
+        </pc:spChg>
+        <pc:spChg chg="add">
+          <ac:chgData name="Tristan Plasse" userId="13c698b9-43c4-4271-b359-faaadca0774b" providerId="ADAL" clId="{FE460185-D4AE-4375-BA71-CD1D7F2341F0}" dt="2026-04-16T21:59:05.947" v="4126"/>
+          <ac:spMkLst>
+            <pc:docMk/>
+            <pc:sldMk cId="3943359794" sldId="274"/>
+            <ac:spMk id="5" creationId="{5C7006F9-8CAE-B5C4-8633-9F7A94BDC7FD}"/>
+          </ac:spMkLst>
+        </pc:spChg>
+        <pc:spChg chg="add">
+          <ac:chgData name="Tristan Plasse" userId="13c698b9-43c4-4271-b359-faaadca0774b" providerId="ADAL" clId="{FE460185-D4AE-4375-BA71-CD1D7F2341F0}" dt="2026-04-16T22:11:50.444" v="4131"/>
+          <ac:spMkLst>
+            <pc:docMk/>
+            <pc:sldMk cId="3943359794" sldId="274"/>
+            <ac:spMk id="8" creationId="{653D6F1D-B915-DB9E-2085-A8CC25F78665}"/>
+          </ac:spMkLst>
+        </pc:spChg>
+        <pc:spChg chg="add">
+          <ac:chgData name="Tristan Plasse" userId="13c698b9-43c4-4271-b359-faaadca0774b" providerId="ADAL" clId="{FE460185-D4AE-4375-BA71-CD1D7F2341F0}" dt="2026-04-16T22:11:55.941" v="4134" actId="26606"/>
+          <ac:spMkLst>
+            <pc:docMk/>
+            <pc:sldMk cId="3943359794" sldId="274"/>
+            <ac:spMk id="19" creationId="{341BFA31-6544-45C2-9DA0-9E1C5E0B1959}"/>
+          </ac:spMkLst>
+        </pc:spChg>
+        <pc:picChg chg="add mod ord">
+          <ac:chgData name="Tristan Plasse" userId="13c698b9-43c4-4271-b359-faaadca0774b" providerId="ADAL" clId="{FE460185-D4AE-4375-BA71-CD1D7F2341F0}" dt="2026-04-16T22:11:55.941" v="4134" actId="26606"/>
+          <ac:picMkLst>
+            <pc:docMk/>
+            <pc:sldMk cId="3943359794" sldId="274"/>
+            <ac:picMk id="7" creationId="{A7047DCF-1E5A-A37A-7B89-E425EBDB3458}"/>
+          </ac:picMkLst>
+        </pc:picChg>
+        <pc:picChg chg="add mod">
+          <ac:chgData name="Tristan Plasse" userId="13c698b9-43c4-4271-b359-faaadca0774b" providerId="ADAL" clId="{FE460185-D4AE-4375-BA71-CD1D7F2341F0}" dt="2026-04-16T22:11:55.941" v="4134" actId="26606"/>
+          <ac:picMkLst>
+            <pc:docMk/>
+            <pc:sldMk cId="3943359794" sldId="274"/>
+            <ac:picMk id="10" creationId="{9D9C65FB-6DB1-A9D5-4232-01BDE010BE4E}"/>
+          </ac:picMkLst>
+        </pc:picChg>
+        <pc:cxnChg chg="add">
+          <ac:chgData name="Tristan Plasse" userId="13c698b9-43c4-4271-b359-faaadca0774b" providerId="ADAL" clId="{FE460185-D4AE-4375-BA71-CD1D7F2341F0}" dt="2026-04-16T22:11:55.941" v="4134" actId="26606"/>
+          <ac:cxnSpMkLst>
+            <pc:docMk/>
+            <pc:sldMk cId="3943359794" sldId="274"/>
+            <ac:cxnSpMk id="15" creationId="{F64F9B95-9045-48D2-B9F3-2927E98F54AA}"/>
+          </ac:cxnSpMkLst>
+        </pc:cxnChg>
+        <pc:cxnChg chg="add">
+          <ac:chgData name="Tristan Plasse" userId="13c698b9-43c4-4271-b359-faaadca0774b" providerId="ADAL" clId="{FE460185-D4AE-4375-BA71-CD1D7F2341F0}" dt="2026-04-16T22:11:55.941" v="4134" actId="26606"/>
+          <ac:cxnSpMkLst>
+            <pc:docMk/>
+            <pc:sldMk cId="3943359794" sldId="274"/>
+            <ac:cxnSpMk id="17" creationId="{085AA86F-6A4D-4BCB-A045-D992CDC2959B}"/>
+          </ac:cxnSpMkLst>
+        </pc:cxnChg>
+        <pc:cxnChg chg="add">
+          <ac:chgData name="Tristan Plasse" userId="13c698b9-43c4-4271-b359-faaadca0774b" providerId="ADAL" clId="{FE460185-D4AE-4375-BA71-CD1D7F2341F0}" dt="2026-04-16T22:11:55.941" v="4134" actId="26606"/>
+          <ac:cxnSpMkLst>
+            <pc:docMk/>
+            <pc:sldMk cId="3943359794" sldId="274"/>
+            <ac:cxnSpMk id="21" creationId="{DC36F877-5419-44C1-A2CD-376BDDDC3E41}"/>
+          </ac:cxnSpMkLst>
+        </pc:cxnChg>
       </pc:sldChg>
       <pc:sldMasterChg chg="del delSldLayout">
         <pc:chgData name="Tristan Plasse" userId="13c698b9-43c4-4271-b359-faaadca0774b" providerId="ADAL" clId="{FE460185-D4AE-4375-BA71-CD1D7F2341F0}" dt="2026-04-15T20:11:02.110" v="50" actId="26606"/>
@@ -5302,7 +5398,7 @@
           <a:p>
             <a:fld id="{EA5809C9-D391-499D-8A4B-F46E79386DAE}" type="slidenum">
               <a:rPr lang="fr-CA" smtClean="0"/>
-              <a:t>‹n°›</a:t>
+              <a:t>‹N°›</a:t>
             </a:fld>
             <a:endParaRPr lang="fr-CA"/>
           </a:p>
@@ -5566,7 +5662,7 @@
           <a:p>
             <a:fld id="{EA5809C9-D391-499D-8A4B-F46E79386DAE}" type="slidenum">
               <a:rPr lang="fr-CA" smtClean="0"/>
-              <a:t>13</a:t>
+              <a:t>14</a:t>
             </a:fld>
             <a:endParaRPr lang="fr-CA"/>
           </a:p>
@@ -5792,7 +5888,7 @@
           <a:p>
             <a:fld id="{87E7843D-FF13-4365-9478-9625B70A2705}" type="slidenum">
               <a:rPr lang="en-US" smtClean="0"/>
-              <a:t>‹n°›</a:t>
+              <a:t>‹N°›</a:t>
             </a:fld>
             <a:endParaRPr lang="en-US"/>
           </a:p>
@@ -5992,7 +6088,7 @@
           <a:p>
             <a:fld id="{87E7843D-FF13-4365-9478-9625B70A2705}" type="slidenum">
               <a:rPr lang="en-US" smtClean="0"/>
-              <a:t>‹n°›</a:t>
+              <a:t>‹N°›</a:t>
             </a:fld>
             <a:endParaRPr lang="en-US"/>
           </a:p>
@@ -6202,7 +6298,7 @@
           <a:p>
             <a:fld id="{87E7843D-FF13-4365-9478-9625B70A2705}" type="slidenum">
               <a:rPr lang="en-US" smtClean="0"/>
-              <a:t>‹n°›</a:t>
+              <a:t>‹N°›</a:t>
             </a:fld>
             <a:endParaRPr lang="en-US"/>
           </a:p>
@@ -6402,7 +6498,7 @@
           <a:p>
             <a:fld id="{87E7843D-FF13-4365-9478-9625B70A2705}" type="slidenum">
               <a:rPr lang="en-US" smtClean="0"/>
-              <a:t>‹n°›</a:t>
+              <a:t>‹N°›</a:t>
             </a:fld>
             <a:endParaRPr lang="en-US"/>
           </a:p>
@@ -6678,7 +6774,7 @@
           <a:p>
             <a:fld id="{87E7843D-FF13-4365-9478-9625B70A2705}" type="slidenum">
               <a:rPr lang="en-US" smtClean="0"/>
-              <a:t>‹n°›</a:t>
+              <a:t>‹N°›</a:t>
             </a:fld>
             <a:endParaRPr lang="en-US"/>
           </a:p>
@@ -6951,7 +7047,7 @@
           <a:p>
             <a:fld id="{87E7843D-FF13-4365-9478-9625B70A2705}" type="slidenum">
               <a:rPr lang="en-US" smtClean="0"/>
-              <a:t>‹n°›</a:t>
+              <a:t>‹N°›</a:t>
             </a:fld>
             <a:endParaRPr lang="en-US"/>
           </a:p>
@@ -7374,7 +7470,7 @@
           <a:p>
             <a:fld id="{87E7843D-FF13-4365-9478-9625B70A2705}" type="slidenum">
               <a:rPr lang="en-US" smtClean="0"/>
-              <a:t>‹n°›</a:t>
+              <a:t>‹N°›</a:t>
             </a:fld>
             <a:endParaRPr lang="en-US"/>
           </a:p>
@@ -7516,7 +7612,7 @@
           <a:p>
             <a:fld id="{87E7843D-FF13-4365-9478-9625B70A2705}" type="slidenum">
               <a:rPr lang="en-US" smtClean="0"/>
-              <a:t>‹n°›</a:t>
+              <a:t>‹N°›</a:t>
             </a:fld>
             <a:endParaRPr lang="en-US"/>
           </a:p>
@@ -7629,7 +7725,7 @@
           <a:p>
             <a:fld id="{87E7843D-FF13-4365-9478-9625B70A2705}" type="slidenum">
               <a:rPr lang="en-US" smtClean="0"/>
-              <a:t>‹n°›</a:t>
+              <a:t>‹N°›</a:t>
             </a:fld>
             <a:endParaRPr lang="en-US"/>
           </a:p>
@@ -7942,7 +8038,7 @@
           <a:p>
             <a:fld id="{87E7843D-FF13-4365-9478-9625B70A2705}" type="slidenum">
               <a:rPr lang="en-US" smtClean="0"/>
-              <a:t>‹n°›</a:t>
+              <a:t>‹N°›</a:t>
             </a:fld>
             <a:endParaRPr lang="en-US"/>
           </a:p>
@@ -8235,7 +8331,7 @@
           <a:p>
             <a:fld id="{87E7843D-FF13-4365-9478-9625B70A2705}" type="slidenum">
               <a:rPr lang="en-US" smtClean="0"/>
-              <a:t>‹n°›</a:t>
+              <a:t>‹N°›</a:t>
             </a:fld>
             <a:endParaRPr lang="en-US"/>
           </a:p>
@@ -8510,7 +8606,7 @@
           <a:p>
             <a:fld id="{87E7843D-FF13-4365-9478-9625B70A2705}" type="slidenum">
               <a:rPr lang="en-US" smtClean="0"/>
-              <a:t>‹n°›</a:t>
+              <a:t>‹N°›</a:t>
             </a:fld>
             <a:endParaRPr lang="en-US"/>
           </a:p>
@@ -9276,604 +9372,6 @@
 <file path=ppt/slides/slide10.xml><?xml version="1.0" encoding="utf-8"?>
 <p:sld xmlns:a="http://schemas.openxmlformats.org/drawingml/2006/main" xmlns:r="http://schemas.openxmlformats.org/officeDocument/2006/relationships" xmlns:p="http://schemas.openxmlformats.org/presentationml/2006/main">
   <p:cSld>
-    <p:spTree>
-      <p:nvGrpSpPr>
-        <p:cNvPr id="1" name=""/>
-        <p:cNvGrpSpPr/>
-        <p:nvPr/>
-      </p:nvGrpSpPr>
-      <p:grpSpPr>
-        <a:xfrm>
-          <a:off x="0" y="0"/>
-          <a:ext cx="0" cy="0"/>
-          <a:chOff x="0" y="0"/>
-          <a:chExt cx="0" cy="0"/>
-        </a:xfrm>
-      </p:grpSpPr>
-      <p:sp>
-        <p:nvSpPr>
-          <p:cNvPr id="2" name="Titre 1">
-            <a:extLst>
-              <a:ext uri="{FF2B5EF4-FFF2-40B4-BE49-F238E27FC236}">
-                <a16:creationId xmlns:a16="http://schemas.microsoft.com/office/drawing/2014/main" id="{FFF627C6-6D47-1F1B-D2BE-90211DF917C7}"/>
-              </a:ext>
-            </a:extLst>
-          </p:cNvPr>
-          <p:cNvSpPr>
-            <a:spLocks noGrp="1"/>
-          </p:cNvSpPr>
-          <p:nvPr>
-            <p:ph type="title"/>
-          </p:nvPr>
-        </p:nvSpPr>
-        <p:spPr/>
-        <p:txBody>
-          <a:bodyPr/>
-          <a:lstStyle/>
-          <a:p>
-            <a:r>
-              <a:rPr lang="fr-CA" dirty="0"/>
-              <a:t>Résultats</a:t>
-            </a:r>
-          </a:p>
-        </p:txBody>
-      </p:sp>
-      <p:pic>
-        <p:nvPicPr>
-          <p:cNvPr id="7" name="Image 6">
-            <a:extLst>
-              <a:ext uri="{FF2B5EF4-FFF2-40B4-BE49-F238E27FC236}">
-                <a16:creationId xmlns:a16="http://schemas.microsoft.com/office/drawing/2014/main" id="{E414B00F-B7F2-AE14-2AD2-468F405D93D9}"/>
-              </a:ext>
-            </a:extLst>
-          </p:cNvPr>
-          <p:cNvPicPr>
-            <a:picLocks noChangeAspect="1"/>
-          </p:cNvPicPr>
-          <p:nvPr/>
-        </p:nvPicPr>
-        <p:blipFill>
-          <a:blip r:embed="rId2"/>
-          <a:stretch>
-            <a:fillRect/>
-          </a:stretch>
-        </p:blipFill>
-        <p:spPr>
-          <a:xfrm>
-            <a:off x="5060418" y="908962"/>
-            <a:ext cx="2857897" cy="5034637"/>
-          </a:xfrm>
-          <a:prstGeom prst="rect">
-            <a:avLst/>
-          </a:prstGeom>
-        </p:spPr>
-      </p:pic>
-      <p:pic>
-        <p:nvPicPr>
-          <p:cNvPr id="11" name="Image 10">
-            <a:extLst>
-              <a:ext uri="{FF2B5EF4-FFF2-40B4-BE49-F238E27FC236}">
-                <a16:creationId xmlns:a16="http://schemas.microsoft.com/office/drawing/2014/main" id="{D1417A4E-6B8F-61D8-4975-C6885ADDFC9B}"/>
-              </a:ext>
-            </a:extLst>
-          </p:cNvPr>
-          <p:cNvPicPr>
-            <a:picLocks noChangeAspect="1"/>
-          </p:cNvPicPr>
-          <p:nvPr/>
-        </p:nvPicPr>
-        <p:blipFill>
-          <a:blip r:embed="rId3">
-            <a:extLst>
-              <a:ext uri="{28A0092B-C50C-407E-A947-70E740481C1C}">
-                <a14:useLocalDpi xmlns:a14="http://schemas.microsoft.com/office/drawing/2010/main" val="0"/>
-              </a:ext>
-            </a:extLst>
-          </a:blip>
-          <a:stretch>
-            <a:fillRect/>
-          </a:stretch>
-        </p:blipFill>
-        <p:spPr>
-          <a:xfrm>
-            <a:off x="8039913" y="908962"/>
-            <a:ext cx="2769050" cy="5034637"/>
-          </a:xfrm>
-          <a:prstGeom prst="rect">
-            <a:avLst/>
-          </a:prstGeom>
-        </p:spPr>
-      </p:pic>
-      <p:sp>
-        <p:nvSpPr>
-          <p:cNvPr id="12" name="ZoneTexte 11">
-            <a:extLst>
-              <a:ext uri="{FF2B5EF4-FFF2-40B4-BE49-F238E27FC236}">
-                <a16:creationId xmlns:a16="http://schemas.microsoft.com/office/drawing/2014/main" id="{3A09E5BF-F72A-1A2E-E135-EC770726F1C8}"/>
-              </a:ext>
-            </a:extLst>
-          </p:cNvPr>
-          <p:cNvSpPr txBox="1"/>
-          <p:nvPr/>
-        </p:nvSpPr>
-        <p:spPr>
-          <a:xfrm>
-            <a:off x="800100" y="1902786"/>
-            <a:ext cx="3677381" cy="3046988"/>
-          </a:xfrm>
-          <a:prstGeom prst="rect">
-            <a:avLst/>
-          </a:prstGeom>
-          <a:noFill/>
-        </p:spPr>
-        <p:txBody>
-          <a:bodyPr wrap="square" rtlCol="0">
-            <a:spAutoFit/>
-          </a:bodyPr>
-          <a:lstStyle/>
-          <a:p>
-            <a:pPr algn="just"/>
-            <a:r>
-              <a:rPr lang="fr-CA" sz="1600" noProof="0" dirty="0"/>
-              <a:t>Figure 2 : À gauche, résultats de l’étude de </a:t>
-            </a:r>
-            <a:r>
-              <a:rPr lang="fr-CA" sz="1600" noProof="0" dirty="0" err="1"/>
-              <a:t>Bannester</a:t>
-            </a:r>
-            <a:r>
-              <a:rPr lang="fr-CA" sz="1600" noProof="0" dirty="0"/>
-              <a:t>-Marchand et al. (2025), à droite, résultats de notre analyse. Est représenté : Abondance médiane de chevaliers cuivrés, basées sur 5000 itérations stochastiques pour les scénarios (a) nulle, (b) menace, (c) mesurée de notre modèle dynamique. Les enveloppes colorées représentent les intervalles de confiance à 95% ; les lignes pleines les abondances médianes d’individus matures</a:t>
-            </a:r>
-          </a:p>
-        </p:txBody>
-      </p:sp>
-    </p:spTree>
-    <p:extLst>
-      <p:ext uri="{BB962C8B-B14F-4D97-AF65-F5344CB8AC3E}">
-        <p14:creationId xmlns:p14="http://schemas.microsoft.com/office/powerpoint/2010/main" val="444677078"/>
-      </p:ext>
-    </p:extLst>
-  </p:cSld>
-  <p:clrMapOvr>
-    <a:masterClrMapping/>
-  </p:clrMapOvr>
-</p:sld>
-</file>
-
-<file path=ppt/slides/slide11.xml><?xml version="1.0" encoding="utf-8"?>
-<p:sld xmlns:a="http://schemas.openxmlformats.org/drawingml/2006/main" xmlns:r="http://schemas.openxmlformats.org/officeDocument/2006/relationships" xmlns:p="http://schemas.openxmlformats.org/presentationml/2006/main">
-  <p:cSld>
-    <p:spTree>
-      <p:nvGrpSpPr>
-        <p:cNvPr id="1" name="">
-          <a:extLst>
-            <a:ext uri="{FF2B5EF4-FFF2-40B4-BE49-F238E27FC236}">
-              <a16:creationId xmlns:a16="http://schemas.microsoft.com/office/drawing/2014/main" id="{FFD00D4D-B5FB-0E8C-F409-EE2FA4E17B92}"/>
-            </a:ext>
-          </a:extLst>
-        </p:cNvPr>
-        <p:cNvGrpSpPr/>
-        <p:nvPr/>
-      </p:nvGrpSpPr>
-      <p:grpSpPr>
-        <a:xfrm>
-          <a:off x="0" y="0"/>
-          <a:ext cx="0" cy="0"/>
-          <a:chOff x="0" y="0"/>
-          <a:chExt cx="0" cy="0"/>
-        </a:xfrm>
-      </p:grpSpPr>
-      <p:sp>
-        <p:nvSpPr>
-          <p:cNvPr id="12" name="ZoneTexte 11">
-            <a:extLst>
-              <a:ext uri="{FF2B5EF4-FFF2-40B4-BE49-F238E27FC236}">
-                <a16:creationId xmlns:a16="http://schemas.microsoft.com/office/drawing/2014/main" id="{1E7DC136-65ED-D17F-5DEC-2F90924CF09D}"/>
-              </a:ext>
-            </a:extLst>
-          </p:cNvPr>
-          <p:cNvSpPr txBox="1"/>
-          <p:nvPr/>
-        </p:nvSpPr>
-        <p:spPr>
-          <a:xfrm>
-            <a:off x="1295400" y="4936931"/>
-            <a:ext cx="9601200" cy="1077218"/>
-          </a:xfrm>
-          <a:prstGeom prst="rect">
-            <a:avLst/>
-          </a:prstGeom>
-          <a:noFill/>
-        </p:spPr>
-        <p:txBody>
-          <a:bodyPr wrap="square" rtlCol="0">
-            <a:spAutoFit/>
-          </a:bodyPr>
-          <a:lstStyle/>
-          <a:p>
-            <a:pPr algn="just"/>
-            <a:r>
-              <a:rPr lang="fr-CA" sz="1600" noProof="0" dirty="0"/>
-              <a:t>Figure 3 : À gauche, résultats de l’étude de </a:t>
-            </a:r>
-            <a:r>
-              <a:rPr lang="fr-CA" sz="1600" noProof="0" dirty="0" err="1"/>
-              <a:t>Bannester</a:t>
-            </a:r>
-            <a:r>
-              <a:rPr lang="fr-CA" sz="1600" noProof="0" dirty="0"/>
-              <a:t>-Marchand et al. (2025), à droite, résultats de notre analyse. Est représenté : Les probabilités que les chevaliers cuivrés tombent sous un seuil de population dans les prochaines 100 ans, basé sur nos scénarios dynamique stochastiques de population. Lignes : médiane de 5000 itérations; enveloppes colorées : 70% </a:t>
-            </a:r>
-            <a:r>
-              <a:rPr lang="fr-CA" sz="1600" noProof="0" dirty="0" err="1"/>
-              <a:t>ICs</a:t>
-            </a:r>
-            <a:endParaRPr lang="fr-CA" sz="1600" noProof="0" dirty="0"/>
-          </a:p>
-        </p:txBody>
-      </p:sp>
-      <p:pic>
-        <p:nvPicPr>
-          <p:cNvPr id="4" name="Image 3">
-            <a:extLst>
-              <a:ext uri="{FF2B5EF4-FFF2-40B4-BE49-F238E27FC236}">
-                <a16:creationId xmlns:a16="http://schemas.microsoft.com/office/drawing/2014/main" id="{C3B9B1F3-DBD8-3F0B-E141-48009D6B0142}"/>
-              </a:ext>
-            </a:extLst>
-          </p:cNvPr>
-          <p:cNvPicPr>
-            <a:picLocks noChangeAspect="1"/>
-          </p:cNvPicPr>
-          <p:nvPr/>
-        </p:nvPicPr>
-        <p:blipFill>
-          <a:blip r:embed="rId2">
-            <a:extLst>
-              <a:ext uri="{28A0092B-C50C-407E-A947-70E740481C1C}">
-                <a14:useLocalDpi xmlns:a14="http://schemas.microsoft.com/office/drawing/2010/main" val="0"/>
-              </a:ext>
-            </a:extLst>
-          </a:blip>
-          <a:stretch>
-            <a:fillRect/>
-          </a:stretch>
-        </p:blipFill>
-        <p:spPr>
-          <a:xfrm>
-            <a:off x="6274208" y="1030628"/>
-            <a:ext cx="4489676" cy="3741396"/>
-          </a:xfrm>
-          <a:prstGeom prst="rect">
-            <a:avLst/>
-          </a:prstGeom>
-        </p:spPr>
-      </p:pic>
-      <p:pic>
-        <p:nvPicPr>
-          <p:cNvPr id="13" name="Image 12">
-            <a:extLst>
-              <a:ext uri="{FF2B5EF4-FFF2-40B4-BE49-F238E27FC236}">
-                <a16:creationId xmlns:a16="http://schemas.microsoft.com/office/drawing/2014/main" id="{C705A886-BFDB-824D-0E37-7B8094A21002}"/>
-              </a:ext>
-            </a:extLst>
-          </p:cNvPr>
-          <p:cNvPicPr>
-            <a:picLocks noChangeAspect="1"/>
-          </p:cNvPicPr>
-          <p:nvPr/>
-        </p:nvPicPr>
-        <p:blipFill>
-          <a:blip r:embed="rId3"/>
-          <a:stretch>
-            <a:fillRect/>
-          </a:stretch>
-        </p:blipFill>
-        <p:spPr>
-          <a:xfrm>
-            <a:off x="1507787" y="1030628"/>
-            <a:ext cx="4410006" cy="3738169"/>
-          </a:xfrm>
-          <a:prstGeom prst="rect">
-            <a:avLst/>
-          </a:prstGeom>
-        </p:spPr>
-      </p:pic>
-    </p:spTree>
-    <p:extLst>
-      <p:ext uri="{BB962C8B-B14F-4D97-AF65-F5344CB8AC3E}">
-        <p14:creationId xmlns:p14="http://schemas.microsoft.com/office/powerpoint/2010/main" val="1162506719"/>
-      </p:ext>
-    </p:extLst>
-  </p:cSld>
-  <p:clrMapOvr>
-    <a:masterClrMapping/>
-  </p:clrMapOvr>
-</p:sld>
-</file>
-
-<file path=ppt/slides/slide12.xml><?xml version="1.0" encoding="utf-8"?>
-<p:sld xmlns:a="http://schemas.openxmlformats.org/drawingml/2006/main" xmlns:r="http://schemas.openxmlformats.org/officeDocument/2006/relationships" xmlns:p="http://schemas.openxmlformats.org/presentationml/2006/main">
-  <p:cSld>
-    <p:spTree>
-      <p:nvGrpSpPr>
-        <p:cNvPr id="1" name="">
-          <a:extLst>
-            <a:ext uri="{FF2B5EF4-FFF2-40B4-BE49-F238E27FC236}">
-              <a16:creationId xmlns:a16="http://schemas.microsoft.com/office/drawing/2014/main" id="{59F1FA62-BF98-FBB0-D20E-CDA7D1E5D981}"/>
-            </a:ext>
-          </a:extLst>
-        </p:cNvPr>
-        <p:cNvGrpSpPr/>
-        <p:nvPr/>
-      </p:nvGrpSpPr>
-      <p:grpSpPr>
-        <a:xfrm>
-          <a:off x="0" y="0"/>
-          <a:ext cx="0" cy="0"/>
-          <a:chOff x="0" y="0"/>
-          <a:chExt cx="0" cy="0"/>
-        </a:xfrm>
-      </p:grpSpPr>
-      <p:sp>
-        <p:nvSpPr>
-          <p:cNvPr id="12" name="ZoneTexte 11">
-            <a:extLst>
-              <a:ext uri="{FF2B5EF4-FFF2-40B4-BE49-F238E27FC236}">
-                <a16:creationId xmlns:a16="http://schemas.microsoft.com/office/drawing/2014/main" id="{C9FAF4E8-FBA0-C1B3-18B7-2833B15C2E5C}"/>
-              </a:ext>
-            </a:extLst>
-          </p:cNvPr>
-          <p:cNvSpPr txBox="1"/>
-          <p:nvPr/>
-        </p:nvSpPr>
-        <p:spPr>
-          <a:xfrm>
-            <a:off x="1295400" y="4852863"/>
-            <a:ext cx="9601200" cy="1077218"/>
-          </a:xfrm>
-          <a:prstGeom prst="rect">
-            <a:avLst/>
-          </a:prstGeom>
-          <a:noFill/>
-        </p:spPr>
-        <p:txBody>
-          <a:bodyPr wrap="square" rtlCol="0">
-            <a:spAutoFit/>
-          </a:bodyPr>
-          <a:lstStyle/>
-          <a:p>
-            <a:pPr algn="just"/>
-            <a:r>
-              <a:rPr lang="fr-CA" sz="1600" noProof="0" dirty="0"/>
-              <a:t>Figure 4 : À gauche, résultats de l’étude de </a:t>
-            </a:r>
-            <a:r>
-              <a:rPr lang="fr-CA" sz="1600" noProof="0" dirty="0" err="1"/>
-              <a:t>Bannester</a:t>
-            </a:r>
-            <a:r>
-              <a:rPr lang="fr-CA" sz="1600" noProof="0" dirty="0"/>
-              <a:t>-Marchand et al. (2025), à droite, résultats de notre analyse. Est représenté :</a:t>
-            </a:r>
-            <a:r>
-              <a:rPr lang="fr-CA" sz="1600" dirty="0"/>
-              <a:t> L’effet d’augmenter l’ensemencement de larves, alevins, individus d’âges 1, et individus matures (âge 10) sur l’abondance de chevaliers matures sur 100 ans dans notre scénario mesuré. Lors de l’application aux scénarios nulles et menacés, les résultats étaient indistinguables de ceux présentés.</a:t>
-            </a:r>
-          </a:p>
-        </p:txBody>
-      </p:sp>
-      <p:pic>
-        <p:nvPicPr>
-          <p:cNvPr id="6" name="Image 5">
-            <a:extLst>
-              <a:ext uri="{FF2B5EF4-FFF2-40B4-BE49-F238E27FC236}">
-                <a16:creationId xmlns:a16="http://schemas.microsoft.com/office/drawing/2014/main" id="{57A977B4-F0B7-1A94-5F50-6DB61D43BE7B}"/>
-              </a:ext>
-            </a:extLst>
-          </p:cNvPr>
-          <p:cNvPicPr>
-            <a:picLocks noChangeAspect="1"/>
-          </p:cNvPicPr>
-          <p:nvPr/>
-        </p:nvPicPr>
-        <p:blipFill>
-          <a:blip r:embed="rId2"/>
-          <a:stretch>
-            <a:fillRect/>
-          </a:stretch>
-        </p:blipFill>
-        <p:spPr>
-          <a:xfrm>
-            <a:off x="1133475" y="1149359"/>
-            <a:ext cx="4962525" cy="3417648"/>
-          </a:xfrm>
-          <a:prstGeom prst="rect">
-            <a:avLst/>
-          </a:prstGeom>
-        </p:spPr>
-      </p:pic>
-      <p:pic>
-        <p:nvPicPr>
-          <p:cNvPr id="10" name="Image 9">
-            <a:extLst>
-              <a:ext uri="{FF2B5EF4-FFF2-40B4-BE49-F238E27FC236}">
-                <a16:creationId xmlns:a16="http://schemas.microsoft.com/office/drawing/2014/main" id="{8F3BD6FE-B164-B9F2-09BB-32BB144C5117}"/>
-              </a:ext>
-            </a:extLst>
-          </p:cNvPr>
-          <p:cNvPicPr>
-            <a:picLocks noChangeAspect="1"/>
-          </p:cNvPicPr>
-          <p:nvPr/>
-        </p:nvPicPr>
-        <p:blipFill>
-          <a:blip r:embed="rId3">
-            <a:extLst>
-              <a:ext uri="{28A0092B-C50C-407E-A947-70E740481C1C}">
-                <a14:useLocalDpi xmlns:a14="http://schemas.microsoft.com/office/drawing/2010/main" val="0"/>
-              </a:ext>
-            </a:extLst>
-          </a:blip>
-          <a:srcRect t="7092"/>
-          <a:stretch>
-            <a:fillRect/>
-          </a:stretch>
-        </p:blipFill>
-        <p:spPr>
-          <a:xfrm>
-            <a:off x="6096000" y="927919"/>
-            <a:ext cx="5222494" cy="3639088"/>
-          </a:xfrm>
-          <a:prstGeom prst="rect">
-            <a:avLst/>
-          </a:prstGeom>
-        </p:spPr>
-      </p:pic>
-    </p:spTree>
-    <p:extLst>
-      <p:ext uri="{BB962C8B-B14F-4D97-AF65-F5344CB8AC3E}">
-        <p14:creationId xmlns:p14="http://schemas.microsoft.com/office/powerpoint/2010/main" val="4073645163"/>
-      </p:ext>
-    </p:extLst>
-  </p:cSld>
-  <p:clrMapOvr>
-    <a:masterClrMapping/>
-  </p:clrMapOvr>
-</p:sld>
-</file>
-
-<file path=ppt/slides/slide13.xml><?xml version="1.0" encoding="utf-8"?>
-<p:sld xmlns:a="http://schemas.openxmlformats.org/drawingml/2006/main" xmlns:r="http://schemas.openxmlformats.org/officeDocument/2006/relationships" xmlns:p="http://schemas.openxmlformats.org/presentationml/2006/main">
-  <p:cSld>
-    <p:spTree>
-      <p:nvGrpSpPr>
-        <p:cNvPr id="1" name=""/>
-        <p:cNvGrpSpPr/>
-        <p:nvPr/>
-      </p:nvGrpSpPr>
-      <p:grpSpPr>
-        <a:xfrm>
-          <a:off x="0" y="0"/>
-          <a:ext cx="0" cy="0"/>
-          <a:chOff x="0" y="0"/>
-          <a:chExt cx="0" cy="0"/>
-        </a:xfrm>
-      </p:grpSpPr>
-      <p:sp>
-        <p:nvSpPr>
-          <p:cNvPr id="2" name="Titre 1">
-            <a:extLst>
-              <a:ext uri="{FF2B5EF4-FFF2-40B4-BE49-F238E27FC236}">
-                <a16:creationId xmlns:a16="http://schemas.microsoft.com/office/drawing/2014/main" id="{B602546B-6E81-B2EF-AF4D-70A2BABCE52E}"/>
-              </a:ext>
-            </a:extLst>
-          </p:cNvPr>
-          <p:cNvSpPr>
-            <a:spLocks noGrp="1"/>
-          </p:cNvSpPr>
-          <p:nvPr>
-            <p:ph type="title"/>
-          </p:nvPr>
-        </p:nvSpPr>
-        <p:spPr/>
-        <p:txBody>
-          <a:bodyPr/>
-          <a:lstStyle/>
-          <a:p>
-            <a:r>
-              <a:rPr lang="fr-CA" dirty="0"/>
-              <a:t>Discussion</a:t>
-            </a:r>
-          </a:p>
-        </p:txBody>
-      </p:sp>
-      <p:sp>
-        <p:nvSpPr>
-          <p:cNvPr id="3" name="Espace réservé du contenu 2">
-            <a:extLst>
-              <a:ext uri="{FF2B5EF4-FFF2-40B4-BE49-F238E27FC236}">
-                <a16:creationId xmlns:a16="http://schemas.microsoft.com/office/drawing/2014/main" id="{7C8FECE2-37AA-AFF5-7D1E-A6F3BA91F380}"/>
-              </a:ext>
-            </a:extLst>
-          </p:cNvPr>
-          <p:cNvSpPr>
-            <a:spLocks noGrp="1"/>
-          </p:cNvSpPr>
-          <p:nvPr>
-            <p:ph idx="1"/>
-          </p:nvPr>
-        </p:nvSpPr>
-        <p:spPr/>
-        <p:txBody>
-          <a:bodyPr/>
-          <a:lstStyle/>
-          <a:p>
-            <a:pPr>
-              <a:lnSpc>
-                <a:spcPct val="200000"/>
-              </a:lnSpc>
-            </a:pPr>
-            <a:r>
-              <a:rPr lang="fr-CA" dirty="0"/>
-              <a:t>Augmenté ensemencement niveau proposé par Bernatchez (2004) = effet négligeable</a:t>
-            </a:r>
-          </a:p>
-          <a:p>
-            <a:pPr>
-              <a:lnSpc>
-                <a:spcPct val="200000"/>
-              </a:lnSpc>
-            </a:pPr>
-            <a:r>
-              <a:rPr lang="fr-CA" dirty="0"/>
-              <a:t>Recommandation à mettre en place : ensemencement d’individus plus âgés (en plus)</a:t>
-            </a:r>
-          </a:p>
-          <a:p>
-            <a:pPr>
-              <a:lnSpc>
-                <a:spcPct val="200000"/>
-              </a:lnSpc>
-            </a:pPr>
-            <a:r>
-              <a:rPr lang="fr-CA" dirty="0"/>
-              <a:t>Ensemencement d’âge 10 = théoriquement le mieux, mais…</a:t>
-            </a:r>
-            <a:br>
-              <a:rPr lang="fr-CA" dirty="0"/>
-            </a:br>
-            <a:r>
-              <a:rPr lang="fr-CA" dirty="0"/>
-              <a:t> possibilité de phénotype ou comportements mal adaptés (Roberts et al., 2011)</a:t>
-            </a:r>
-          </a:p>
-          <a:p>
-            <a:pPr>
-              <a:lnSpc>
-                <a:spcPct val="200000"/>
-              </a:lnSpc>
-            </a:pPr>
-            <a:endParaRPr lang="fr-CA" dirty="0"/>
-          </a:p>
-        </p:txBody>
-      </p:sp>
-    </p:spTree>
-    <p:extLst>
-      <p:ext uri="{BB962C8B-B14F-4D97-AF65-F5344CB8AC3E}">
-        <p14:creationId xmlns:p14="http://schemas.microsoft.com/office/powerpoint/2010/main" val="400772557"/>
-      </p:ext>
-    </p:extLst>
-  </p:cSld>
-  <p:clrMapOvr>
-    <a:masterClrMapping/>
-  </p:clrMapOvr>
-</p:sld>
-</file>
-
-<file path=ppt/slides/slide14.xml><?xml version="1.0" encoding="utf-8"?>
-<p:sld xmlns:a="http://schemas.openxmlformats.org/drawingml/2006/main" xmlns:r="http://schemas.openxmlformats.org/officeDocument/2006/relationships" xmlns:p="http://schemas.openxmlformats.org/presentationml/2006/main">
-  <p:cSld>
     <p:bg>
       <p:bgPr>
         <a:solidFill>
@@ -9896,12 +9394,116 @@
           <a:chExt cx="0" cy="0"/>
         </a:xfrm>
       </p:grpSpPr>
+      <p:cxnSp>
+        <p:nvCxnSpPr>
+          <p:cNvPr id="15" name="Straight Connector 14">
+            <a:extLst>
+              <a:ext uri="{FF2B5EF4-FFF2-40B4-BE49-F238E27FC236}">
+                <a16:creationId xmlns:a16="http://schemas.microsoft.com/office/drawing/2014/main" id="{F64F9B95-9045-48D2-B9F3-2927E98F54AA}"/>
+              </a:ext>
+              <a:ext uri="{C183D7F6-B498-43B3-948B-1728B52AA6E4}">
+                <adec:decorative xmlns:adec="http://schemas.microsoft.com/office/drawing/2017/decorative" val="1"/>
+              </a:ext>
+            </a:extLst>
+          </p:cNvPr>
+          <p:cNvCxnSpPr>
+            <a:cxnSpLocks noGrp="1" noRot="1" noChangeAspect="1" noMove="1" noResize="1" noEditPoints="1" noAdjustHandles="1" noChangeArrowheads="1" noChangeShapeType="1"/>
+          </p:cNvCxnSpPr>
+          <p:nvPr>
+            <p:extLst>
+              <p:ext uri="{386F3935-93C4-4BCD-93E2-E3B085C9AB24}">
+                <p16:designElem xmlns:p16="http://schemas.microsoft.com/office/powerpoint/2015/main" val="1"/>
+              </p:ext>
+            </p:extLst>
+          </p:nvPr>
+        </p:nvCxnSpPr>
+        <p:spPr>
+          <a:xfrm>
+            <a:off x="800100" y="723900"/>
+            <a:ext cx="10591800" cy="0"/>
+          </a:xfrm>
+          <a:prstGeom prst="line">
+            <a:avLst/>
+          </a:prstGeom>
+          <a:ln w="44450">
+            <a:solidFill>
+              <a:schemeClr val="tx1"/>
+            </a:solidFill>
+          </a:ln>
+        </p:spPr>
+        <p:style>
+          <a:lnRef idx="1">
+            <a:schemeClr val="accent1"/>
+          </a:lnRef>
+          <a:fillRef idx="0">
+            <a:schemeClr val="accent1"/>
+          </a:fillRef>
+          <a:effectRef idx="0">
+            <a:schemeClr val="accent1"/>
+          </a:effectRef>
+          <a:fontRef idx="minor">
+            <a:schemeClr val="tx1"/>
+          </a:fontRef>
+        </p:style>
+      </p:cxnSp>
+      <p:cxnSp>
+        <p:nvCxnSpPr>
+          <p:cNvPr id="17" name="Straight Connector 16">
+            <a:extLst>
+              <a:ext uri="{FF2B5EF4-FFF2-40B4-BE49-F238E27FC236}">
+                <a16:creationId xmlns:a16="http://schemas.microsoft.com/office/drawing/2014/main" id="{085AA86F-6A4D-4BCB-A045-D992CDC2959B}"/>
+              </a:ext>
+              <a:ext uri="{C183D7F6-B498-43B3-948B-1728B52AA6E4}">
+                <adec:decorative xmlns:adec="http://schemas.microsoft.com/office/drawing/2017/decorative" val="1"/>
+              </a:ext>
+            </a:extLst>
+          </p:cNvPr>
+          <p:cNvCxnSpPr>
+            <a:cxnSpLocks noGrp="1" noRot="1" noChangeAspect="1" noMove="1" noResize="1" noEditPoints="1" noAdjustHandles="1" noChangeArrowheads="1" noChangeShapeType="1"/>
+          </p:cNvCxnSpPr>
+          <p:nvPr>
+            <p:extLst>
+              <p:ext uri="{386F3935-93C4-4BCD-93E2-E3B085C9AB24}">
+                <p16:designElem xmlns:p16="http://schemas.microsoft.com/office/powerpoint/2015/main" val="1"/>
+              </p:ext>
+            </p:extLst>
+          </p:nvPr>
+        </p:nvCxnSpPr>
+        <p:spPr>
+          <a:xfrm>
+            <a:off x="800100" y="6142781"/>
+            <a:ext cx="10591800" cy="0"/>
+          </a:xfrm>
+          <a:prstGeom prst="line">
+            <a:avLst/>
+          </a:prstGeom>
+          <a:ln w="12700">
+            <a:solidFill>
+              <a:schemeClr val="tx1"/>
+            </a:solidFill>
+          </a:ln>
+        </p:spPr>
+        <p:style>
+          <a:lnRef idx="1">
+            <a:schemeClr val="accent1"/>
+          </a:lnRef>
+          <a:fillRef idx="0">
+            <a:schemeClr val="accent1"/>
+          </a:fillRef>
+          <a:effectRef idx="0">
+            <a:schemeClr val="accent1"/>
+          </a:effectRef>
+          <a:fontRef idx="minor">
+            <a:schemeClr val="tx1"/>
+          </a:fontRef>
+        </p:style>
+      </p:cxnSp>
       <p:sp useBgFill="1">
         <p:nvSpPr>
-          <p:cNvPr id="8" name="Rectangle 7">
+          <p:cNvPr id="19" name="Rectangle 18">
             <a:extLst>
               <a:ext uri="{FF2B5EF4-FFF2-40B4-BE49-F238E27FC236}">
-                <a16:creationId xmlns:a16="http://schemas.microsoft.com/office/drawing/2014/main" id="{5F710FDB-0919-493E-8539-8240C23F1EB2}"/>
+                <a16:creationId xmlns:a16="http://schemas.microsoft.com/office/drawing/2014/main" id="{341BFA31-6544-45C2-9DA0-9E1C5E0B1959}"/>
               </a:ext>
               <a:ext uri="{C183D7F6-B498-43B3-948B-1728B52AA6E4}">
                 <adec:decorative xmlns:adec="http://schemas.microsoft.com/office/drawing/2017/decorative" val="1"/>
@@ -9977,7 +9579,7 @@
           <p:cNvPr id="2" name="Titre 1">
             <a:extLst>
               <a:ext uri="{FF2B5EF4-FFF2-40B4-BE49-F238E27FC236}">
-                <a16:creationId xmlns:a16="http://schemas.microsoft.com/office/drawing/2014/main" id="{E94E064B-C271-D942-847D-C57AA49309EB}"/>
+                <a16:creationId xmlns:a16="http://schemas.microsoft.com/office/drawing/2014/main" id="{F3A5A10E-A61E-2445-131F-98F4232F9171}"/>
               </a:ext>
             </a:extLst>
           </p:cNvPr>
@@ -9990,343 +9592,89 @@
         </p:nvSpPr>
         <p:spPr>
           <a:xfrm>
-            <a:off x="704087" y="559063"/>
-            <a:ext cx="3306747" cy="5256025"/>
+            <a:off x="695326" y="4742029"/>
+            <a:ext cx="10765912" cy="925950"/>
           </a:xfrm>
         </p:spPr>
         <p:txBody>
-          <a:bodyPr>
+          <a:bodyPr vert="horz" lIns="91440" tIns="45720" rIns="91440" bIns="45720" rtlCol="0" anchor="t">
             <a:normAutofit/>
           </a:bodyPr>
           <a:lstStyle/>
           <a:p>
             <a:r>
-              <a:rPr lang="fr-CA" sz="3600"/>
-              <a:t>Impact sur la conservation</a:t>
+              <a:rPr lang="en-US" sz="5400"/>
+              <a:t>Modèle</a:t>
             </a:r>
           </a:p>
         </p:txBody>
       </p:sp>
-      <p:sp>
-        <p:nvSpPr>
-          <p:cNvPr id="3" name="Espace réservé du contenu 2">
+      <p:pic>
+        <p:nvPicPr>
+          <p:cNvPr id="10" name="Image 9">
             <a:extLst>
               <a:ext uri="{FF2B5EF4-FFF2-40B4-BE49-F238E27FC236}">
-                <a16:creationId xmlns:a16="http://schemas.microsoft.com/office/drawing/2014/main" id="{985811B9-89CF-1E2E-CD4B-69C7E3D221C2}"/>
+                <a16:creationId xmlns:a16="http://schemas.microsoft.com/office/drawing/2014/main" id="{9D9C65FB-6DB1-A9D5-4232-01BDE010BE4E}"/>
               </a:ext>
             </a:extLst>
           </p:cNvPr>
-          <p:cNvSpPr>
-            <a:spLocks noGrp="1"/>
-          </p:cNvSpPr>
-          <p:nvPr>
-            <p:ph idx="1"/>
-          </p:nvPr>
-        </p:nvSpPr>
+          <p:cNvPicPr>
+            <a:picLocks noChangeAspect="1"/>
+          </p:cNvPicPr>
+          <p:nvPr/>
+        </p:nvPicPr>
+        <p:blipFill>
+          <a:blip r:embed="rId2"/>
+          <a:stretch>
+            <a:fillRect/>
+          </a:stretch>
+        </p:blipFill>
         <p:spPr>
           <a:xfrm>
-            <a:off x="4643022" y="622249"/>
-            <a:ext cx="6844892" cy="5639712"/>
+            <a:off x="800100" y="1137511"/>
+            <a:ext cx="5134573" cy="3170598"/>
           </a:xfrm>
+          <a:prstGeom prst="rect">
+            <a:avLst/>
+          </a:prstGeom>
         </p:spPr>
-        <p:txBody>
-          <a:bodyPr>
-            <a:normAutofit/>
-          </a:bodyPr>
-          <a:lstStyle/>
-          <a:p>
-            <a:pPr>
-              <a:lnSpc>
-                <a:spcPct val="200000"/>
-              </a:lnSpc>
-            </a:pPr>
-            <a:r>
-              <a:rPr lang="fr-CA" dirty="0"/>
-              <a:t>Ensemencement encore nécessaire pour l’instant (Figure 2)</a:t>
-            </a:r>
-          </a:p>
-          <a:p>
-            <a:pPr marL="0" indent="0">
-              <a:lnSpc>
-                <a:spcPct val="200000"/>
-              </a:lnSpc>
-              <a:buNone/>
-            </a:pPr>
-            <a:endParaRPr lang="fr-CA" dirty="0"/>
-          </a:p>
-          <a:p>
-            <a:pPr>
-              <a:lnSpc>
-                <a:spcPct val="200000"/>
-              </a:lnSpc>
-            </a:pPr>
-            <a:r>
-              <a:rPr lang="fr-CA" dirty="0"/>
-              <a:t>Déclin potentiel de 80% selon nos résultats donc confirme statut en voie de disparition</a:t>
-            </a:r>
-          </a:p>
-          <a:p>
-            <a:pPr lvl="1">
-              <a:lnSpc>
-                <a:spcPct val="200000"/>
-              </a:lnSpc>
-            </a:pPr>
-            <a:r>
-              <a:rPr lang="fr-CA" sz="2000" dirty="0"/>
-              <a:t>Donc action nécessaire</a:t>
-            </a:r>
-          </a:p>
-        </p:txBody>
-      </p:sp>
+      </p:pic>
+      <p:pic>
+        <p:nvPicPr>
+          <p:cNvPr id="7" name="Image 6">
+            <a:extLst>
+              <a:ext uri="{FF2B5EF4-FFF2-40B4-BE49-F238E27FC236}">
+                <a16:creationId xmlns:a16="http://schemas.microsoft.com/office/drawing/2014/main" id="{A7047DCF-1E5A-A37A-7B89-E425EBDB3458}"/>
+              </a:ext>
+            </a:extLst>
+          </p:cNvPr>
+          <p:cNvPicPr>
+            <a:picLocks noChangeAspect="1"/>
+          </p:cNvPicPr>
+          <p:nvPr/>
+        </p:nvPicPr>
+        <p:blipFill>
+          <a:blip r:embed="rId3"/>
+          <a:stretch>
+            <a:fillRect/>
+          </a:stretch>
+        </p:blipFill>
+        <p:spPr>
+          <a:xfrm>
+            <a:off x="6272812" y="1147073"/>
+            <a:ext cx="5119088" cy="3161036"/>
+          </a:xfrm>
+          <a:prstGeom prst="rect">
+            <a:avLst/>
+          </a:prstGeom>
+        </p:spPr>
+      </p:pic>
       <p:cxnSp>
         <p:nvCxnSpPr>
-          <p:cNvPr id="10" name="Straight Connector 9">
+          <p:cNvPr id="21" name="Straight Connector 20">
             <a:extLst>
               <a:ext uri="{FF2B5EF4-FFF2-40B4-BE49-F238E27FC236}">
-                <a16:creationId xmlns:a16="http://schemas.microsoft.com/office/drawing/2014/main" id="{0AFF0B6C-73E2-4B40-9280-938C14922C87}"/>
-              </a:ext>
-              <a:ext uri="{C183D7F6-B498-43B3-948B-1728B52AA6E4}">
-                <adec:decorative xmlns:adec="http://schemas.microsoft.com/office/drawing/2017/decorative" val="1"/>
-              </a:ext>
-            </a:extLst>
-          </p:cNvPr>
-          <p:cNvCxnSpPr>
-            <a:cxnSpLocks noGrp="1" noRot="1" noChangeAspect="1" noMove="1" noResize="1" noEditPoints="1" noAdjustHandles="1" noChangeArrowheads="1" noChangeShapeType="1"/>
-          </p:cNvCxnSpPr>
-          <p:nvPr>
-            <p:extLst>
-              <p:ext uri="{386F3935-93C4-4BCD-93E2-E3B085C9AB24}">
-                <p16:designElem xmlns:p16="http://schemas.microsoft.com/office/powerpoint/2015/main" val="1"/>
-              </p:ext>
-            </p:extLst>
-          </p:nvPr>
-        </p:nvCxnSpPr>
-        <p:spPr>
-          <a:xfrm flipV="1">
-            <a:off x="4223541" y="723900"/>
-            <a:ext cx="15948" cy="5450072"/>
-          </a:xfrm>
-          <a:prstGeom prst="line">
-            <a:avLst/>
-          </a:prstGeom>
-          <a:ln w="12700">
-            <a:solidFill>
-              <a:schemeClr val="tx1"/>
-            </a:solidFill>
-          </a:ln>
-        </p:spPr>
-        <p:style>
-          <a:lnRef idx="1">
-            <a:schemeClr val="accent1"/>
-          </a:lnRef>
-          <a:fillRef idx="0">
-            <a:schemeClr val="accent1"/>
-          </a:fillRef>
-          <a:effectRef idx="0">
-            <a:schemeClr val="accent1"/>
-          </a:effectRef>
-          <a:fontRef idx="minor">
-            <a:schemeClr val="tx1"/>
-          </a:fontRef>
-        </p:style>
-      </p:cxnSp>
-    </p:spTree>
-    <p:extLst>
-      <p:ext uri="{BB962C8B-B14F-4D97-AF65-F5344CB8AC3E}">
-        <p14:creationId xmlns:p14="http://schemas.microsoft.com/office/powerpoint/2010/main" val="960806995"/>
-      </p:ext>
-    </p:extLst>
-  </p:cSld>
-  <p:clrMapOvr>
-    <a:masterClrMapping/>
-  </p:clrMapOvr>
-</p:sld>
-</file>
-
-<file path=ppt/slides/slide15.xml><?xml version="1.0" encoding="utf-8"?>
-<p:sld xmlns:a="http://schemas.openxmlformats.org/drawingml/2006/main" xmlns:r="http://schemas.openxmlformats.org/officeDocument/2006/relationships" xmlns:p="http://schemas.openxmlformats.org/presentationml/2006/main">
-  <p:cSld>
-    <p:spTree>
-      <p:nvGrpSpPr>
-        <p:cNvPr id="1" name=""/>
-        <p:cNvGrpSpPr/>
-        <p:nvPr/>
-      </p:nvGrpSpPr>
-      <p:grpSpPr>
-        <a:xfrm>
-          <a:off x="0" y="0"/>
-          <a:ext cx="0" cy="0"/>
-          <a:chOff x="0" y="0"/>
-          <a:chExt cx="0" cy="0"/>
-        </a:xfrm>
-      </p:grpSpPr>
-      <p:sp>
-        <p:nvSpPr>
-          <p:cNvPr id="2" name="Titre 1">
-            <a:extLst>
-              <a:ext uri="{FF2B5EF4-FFF2-40B4-BE49-F238E27FC236}">
-                <a16:creationId xmlns:a16="http://schemas.microsoft.com/office/drawing/2014/main" id="{8D966DD8-8219-CF1B-134B-3A3C1821891D}"/>
-              </a:ext>
-            </a:extLst>
-          </p:cNvPr>
-          <p:cNvSpPr>
-            <a:spLocks noGrp="1"/>
-          </p:cNvSpPr>
-          <p:nvPr>
-            <p:ph type="title"/>
-          </p:nvPr>
-        </p:nvSpPr>
-        <p:spPr/>
-        <p:txBody>
-          <a:bodyPr/>
-          <a:lstStyle/>
-          <a:p>
-            <a:r>
-              <a:rPr lang="fr-CA"/>
-              <a:t>Limitations de l’étude</a:t>
-            </a:r>
-            <a:endParaRPr lang="fr-CA" dirty="0"/>
-          </a:p>
-        </p:txBody>
-      </p:sp>
-      <p:sp>
-        <p:nvSpPr>
-          <p:cNvPr id="3" name="Espace réservé du contenu 2">
-            <a:extLst>
-              <a:ext uri="{FF2B5EF4-FFF2-40B4-BE49-F238E27FC236}">
-                <a16:creationId xmlns:a16="http://schemas.microsoft.com/office/drawing/2014/main" id="{76E70E93-C46E-8BE3-F6AA-2FF55DA44A33}"/>
-              </a:ext>
-            </a:extLst>
-          </p:cNvPr>
-          <p:cNvSpPr>
-            <a:spLocks noGrp="1"/>
-          </p:cNvSpPr>
-          <p:nvPr>
-            <p:ph idx="1"/>
-          </p:nvPr>
-        </p:nvSpPr>
-        <p:spPr/>
-        <p:txBody>
-          <a:bodyPr/>
-          <a:lstStyle/>
-          <a:p>
-            <a:pPr>
-              <a:lnSpc>
-                <a:spcPct val="200000"/>
-              </a:lnSpc>
-            </a:pPr>
-            <a:r>
-              <a:rPr lang="fr-CA"/>
-              <a:t>N'inclue pas de facteurs de prédation ou de dégradation de l’habitat</a:t>
-            </a:r>
-          </a:p>
-          <a:p>
-            <a:pPr>
-              <a:lnSpc>
-                <a:spcPct val="200000"/>
-              </a:lnSpc>
-            </a:pPr>
-            <a:r>
-              <a:rPr lang="fr-CA"/>
-              <a:t>Valeurs stades juvéniles tirées de Dahlberg (1979) = pas des </a:t>
-            </a:r>
-            <a:r>
-              <a:rPr lang="fr-CA" i="1"/>
-              <a:t>M.</a:t>
-            </a:r>
-            <a:r>
-              <a:rPr lang="fr-CA"/>
-              <a:t> </a:t>
-            </a:r>
-            <a:r>
-              <a:rPr lang="fr-CA" i="1"/>
-              <a:t>hubbsi </a:t>
-            </a:r>
-            <a:r>
-              <a:rPr lang="fr-CA"/>
-              <a:t>(surestimation possible)</a:t>
-            </a:r>
-          </a:p>
-          <a:p>
-            <a:pPr>
-              <a:lnSpc>
-                <a:spcPct val="200000"/>
-              </a:lnSpc>
-            </a:pPr>
-            <a:r>
-              <a:rPr lang="fr-CA"/>
-              <a:t>Survie des ensemencements = survie des sauvages</a:t>
-            </a:r>
-          </a:p>
-          <a:p>
-            <a:pPr>
-              <a:lnSpc>
-                <a:spcPct val="200000"/>
-              </a:lnSpc>
-            </a:pPr>
-            <a:r>
-              <a:rPr lang="fr-CA"/>
-              <a:t>Impossible individus &gt;30 ans</a:t>
-            </a:r>
-          </a:p>
-          <a:p>
-            <a:pPr>
-              <a:lnSpc>
-                <a:spcPct val="200000"/>
-              </a:lnSpc>
-            </a:pPr>
-            <a:r>
-              <a:rPr lang="fr-CA"/>
-              <a:t>Pas d’impact de la génétique</a:t>
-            </a:r>
-            <a:endParaRPr lang="fr-CA" dirty="0"/>
-          </a:p>
-        </p:txBody>
-      </p:sp>
-    </p:spTree>
-    <p:extLst>
-      <p:ext uri="{BB962C8B-B14F-4D97-AF65-F5344CB8AC3E}">
-        <p14:creationId xmlns:p14="http://schemas.microsoft.com/office/powerpoint/2010/main" val="1896708259"/>
-      </p:ext>
-    </p:extLst>
-  </p:cSld>
-  <p:clrMapOvr>
-    <a:masterClrMapping/>
-  </p:clrMapOvr>
-</p:sld>
-</file>
-
-<file path=ppt/slides/slide16.xml><?xml version="1.0" encoding="utf-8"?>
-<p:sld xmlns:a="http://schemas.openxmlformats.org/drawingml/2006/main" xmlns:r="http://schemas.openxmlformats.org/officeDocument/2006/relationships" xmlns:p="http://schemas.openxmlformats.org/presentationml/2006/main">
-  <p:cSld>
-    <p:bg>
-      <p:bgPr>
-        <a:solidFill>
-          <a:schemeClr val="bg1"/>
-        </a:solidFill>
-        <a:effectLst/>
-      </p:bgPr>
-    </p:bg>
-    <p:spTree>
-      <p:nvGrpSpPr>
-        <p:cNvPr id="1" name=""/>
-        <p:cNvGrpSpPr/>
-        <p:nvPr/>
-      </p:nvGrpSpPr>
-      <p:grpSpPr>
-        <a:xfrm>
-          <a:off x="0" y="0"/>
-          <a:ext cx="0" cy="0"/>
-          <a:chOff x="0" y="0"/>
-          <a:chExt cx="0" cy="0"/>
-        </a:xfrm>
-      </p:grpSpPr>
-      <p:cxnSp>
-        <p:nvCxnSpPr>
-          <p:cNvPr id="7" name="Straight Connector 6">
-            <a:extLst>
-              <a:ext uri="{FF2B5EF4-FFF2-40B4-BE49-F238E27FC236}">
-                <a16:creationId xmlns:a16="http://schemas.microsoft.com/office/drawing/2014/main" id="{F64F9B95-9045-48D2-B9F3-2927E98F54AA}"/>
+                <a16:creationId xmlns:a16="http://schemas.microsoft.com/office/drawing/2014/main" id="{DC36F877-5419-44C1-A2CD-376BDDDC3E41}"/>
               </a:ext>
               <a:ext uri="{C183D7F6-B498-43B3-948B-1728B52AA6E4}">
                 <adec:decorative xmlns:adec="http://schemas.microsoft.com/office/drawing/2017/decorative" val="1"/>
@@ -10346,7 +9694,7 @@
         </p:nvCxnSpPr>
         <p:spPr>
           <a:xfrm>
-            <a:off x="800100" y="723900"/>
+            <a:off x="800100" y="4667603"/>
             <a:ext cx="10591800" cy="0"/>
           </a:xfrm>
           <a:prstGeom prst="line">
@@ -10373,64 +9721,648 @@
           </a:fontRef>
         </p:style>
       </p:cxnSp>
-      <p:cxnSp>
-        <p:nvCxnSpPr>
-          <p:cNvPr id="9" name="Straight Connector 8">
+    </p:spTree>
+    <p:extLst>
+      <p:ext uri="{BB962C8B-B14F-4D97-AF65-F5344CB8AC3E}">
+        <p14:creationId xmlns:p14="http://schemas.microsoft.com/office/powerpoint/2010/main" val="3943359794"/>
+      </p:ext>
+    </p:extLst>
+  </p:cSld>
+  <p:clrMapOvr>
+    <a:masterClrMapping/>
+  </p:clrMapOvr>
+</p:sld>
+</file>
+
+<file path=ppt/slides/slide11.xml><?xml version="1.0" encoding="utf-8"?>
+<p:sld xmlns:a="http://schemas.openxmlformats.org/drawingml/2006/main" xmlns:r="http://schemas.openxmlformats.org/officeDocument/2006/relationships" xmlns:p="http://schemas.openxmlformats.org/presentationml/2006/main">
+  <p:cSld>
+    <p:spTree>
+      <p:nvGrpSpPr>
+        <p:cNvPr id="1" name=""/>
+        <p:cNvGrpSpPr/>
+        <p:nvPr/>
+      </p:nvGrpSpPr>
+      <p:grpSpPr>
+        <a:xfrm>
+          <a:off x="0" y="0"/>
+          <a:ext cx="0" cy="0"/>
+          <a:chOff x="0" y="0"/>
+          <a:chExt cx="0" cy="0"/>
+        </a:xfrm>
+      </p:grpSpPr>
+      <p:sp>
+        <p:nvSpPr>
+          <p:cNvPr id="2" name="Titre 1">
             <a:extLst>
               <a:ext uri="{FF2B5EF4-FFF2-40B4-BE49-F238E27FC236}">
-                <a16:creationId xmlns:a16="http://schemas.microsoft.com/office/drawing/2014/main" id="{085AA86F-6A4D-4BCB-A045-D992CDC2959B}"/>
-              </a:ext>
-              <a:ext uri="{C183D7F6-B498-43B3-948B-1728B52AA6E4}">
-                <adec:decorative xmlns:adec="http://schemas.microsoft.com/office/drawing/2017/decorative" val="1"/>
+                <a16:creationId xmlns:a16="http://schemas.microsoft.com/office/drawing/2014/main" id="{FFF627C6-6D47-1F1B-D2BE-90211DF917C7}"/>
               </a:ext>
             </a:extLst>
           </p:cNvPr>
-          <p:cNvCxnSpPr>
-            <a:cxnSpLocks noGrp="1" noRot="1" noChangeAspect="1" noMove="1" noResize="1" noEditPoints="1" noAdjustHandles="1" noChangeArrowheads="1" noChangeShapeType="1"/>
-          </p:cNvCxnSpPr>
+          <p:cNvSpPr>
+            <a:spLocks noGrp="1"/>
+          </p:cNvSpPr>
           <p:nvPr>
-            <p:extLst>
-              <p:ext uri="{386F3935-93C4-4BCD-93E2-E3B085C9AB24}">
-                <p16:designElem xmlns:p16="http://schemas.microsoft.com/office/powerpoint/2015/main" val="1"/>
-              </p:ext>
-            </p:extLst>
+            <p:ph type="title"/>
           </p:nvPr>
-        </p:nvCxnSpPr>
+        </p:nvSpPr>
+        <p:spPr/>
+        <p:txBody>
+          <a:bodyPr/>
+          <a:lstStyle/>
+          <a:p>
+            <a:r>
+              <a:rPr lang="fr-CA" dirty="0"/>
+              <a:t>Résultats</a:t>
+            </a:r>
+          </a:p>
+        </p:txBody>
+      </p:sp>
+      <p:pic>
+        <p:nvPicPr>
+          <p:cNvPr id="7" name="Image 6">
+            <a:extLst>
+              <a:ext uri="{FF2B5EF4-FFF2-40B4-BE49-F238E27FC236}">
+                <a16:creationId xmlns:a16="http://schemas.microsoft.com/office/drawing/2014/main" id="{E414B00F-B7F2-AE14-2AD2-468F405D93D9}"/>
+              </a:ext>
+            </a:extLst>
+          </p:cNvPr>
+          <p:cNvPicPr>
+            <a:picLocks noChangeAspect="1"/>
+          </p:cNvPicPr>
+          <p:nvPr/>
+        </p:nvPicPr>
+        <p:blipFill>
+          <a:blip r:embed="rId2"/>
+          <a:stretch>
+            <a:fillRect/>
+          </a:stretch>
+        </p:blipFill>
         <p:spPr>
           <a:xfrm>
-            <a:off x="800100" y="6142781"/>
-            <a:ext cx="10591800" cy="0"/>
+            <a:off x="5060418" y="908962"/>
+            <a:ext cx="2857897" cy="5034637"/>
           </a:xfrm>
-          <a:prstGeom prst="line">
+          <a:prstGeom prst="rect">
             <a:avLst/>
           </a:prstGeom>
-          <a:ln w="12700">
-            <a:solidFill>
-              <a:schemeClr val="tx1"/>
-            </a:solidFill>
-          </a:ln>
         </p:spPr>
-        <p:style>
-          <a:lnRef idx="1">
-            <a:schemeClr val="accent1"/>
-          </a:lnRef>
-          <a:fillRef idx="0">
-            <a:schemeClr val="accent1"/>
-          </a:fillRef>
-          <a:effectRef idx="0">
-            <a:schemeClr val="accent1"/>
-          </a:effectRef>
-          <a:fontRef idx="minor">
-            <a:schemeClr val="tx1"/>
-          </a:fontRef>
-        </p:style>
-      </p:cxnSp>
+      </p:pic>
+      <p:pic>
+        <p:nvPicPr>
+          <p:cNvPr id="11" name="Image 10">
+            <a:extLst>
+              <a:ext uri="{FF2B5EF4-FFF2-40B4-BE49-F238E27FC236}">
+                <a16:creationId xmlns:a16="http://schemas.microsoft.com/office/drawing/2014/main" id="{D1417A4E-6B8F-61D8-4975-C6885ADDFC9B}"/>
+              </a:ext>
+            </a:extLst>
+          </p:cNvPr>
+          <p:cNvPicPr>
+            <a:picLocks noChangeAspect="1"/>
+          </p:cNvPicPr>
+          <p:nvPr/>
+        </p:nvPicPr>
+        <p:blipFill>
+          <a:blip r:embed="rId3">
+            <a:extLst>
+              <a:ext uri="{28A0092B-C50C-407E-A947-70E740481C1C}">
+                <a14:useLocalDpi xmlns:a14="http://schemas.microsoft.com/office/drawing/2010/main" val="0"/>
+              </a:ext>
+            </a:extLst>
+          </a:blip>
+          <a:stretch>
+            <a:fillRect/>
+          </a:stretch>
+        </p:blipFill>
+        <p:spPr>
+          <a:xfrm>
+            <a:off x="8039913" y="908962"/>
+            <a:ext cx="2769050" cy="5034637"/>
+          </a:xfrm>
+          <a:prstGeom prst="rect">
+            <a:avLst/>
+          </a:prstGeom>
+        </p:spPr>
+      </p:pic>
+      <p:sp>
+        <p:nvSpPr>
+          <p:cNvPr id="12" name="ZoneTexte 11">
+            <a:extLst>
+              <a:ext uri="{FF2B5EF4-FFF2-40B4-BE49-F238E27FC236}">
+                <a16:creationId xmlns:a16="http://schemas.microsoft.com/office/drawing/2014/main" id="{3A09E5BF-F72A-1A2E-E135-EC770726F1C8}"/>
+              </a:ext>
+            </a:extLst>
+          </p:cNvPr>
+          <p:cNvSpPr txBox="1"/>
+          <p:nvPr/>
+        </p:nvSpPr>
+        <p:spPr>
+          <a:xfrm>
+            <a:off x="800100" y="1902786"/>
+            <a:ext cx="3677381" cy="3046988"/>
+          </a:xfrm>
+          <a:prstGeom prst="rect">
+            <a:avLst/>
+          </a:prstGeom>
+          <a:noFill/>
+        </p:spPr>
+        <p:txBody>
+          <a:bodyPr wrap="square" rtlCol="0">
+            <a:spAutoFit/>
+          </a:bodyPr>
+          <a:lstStyle/>
+          <a:p>
+            <a:pPr algn="just"/>
+            <a:r>
+              <a:rPr lang="fr-CA" sz="1600" noProof="0" dirty="0"/>
+              <a:t>Figure 2 : À gauche, résultats de l’étude de </a:t>
+            </a:r>
+            <a:r>
+              <a:rPr lang="fr-CA" sz="1600" noProof="0" dirty="0" err="1"/>
+              <a:t>Bannester</a:t>
+            </a:r>
+            <a:r>
+              <a:rPr lang="fr-CA" sz="1600" noProof="0" dirty="0"/>
+              <a:t>-Marchand et al. (2025), à droite, résultats de notre analyse. Est représenté : Abondance médiane de chevaliers cuivrés, basées sur 5000 itérations stochastiques pour les scénarios (a) nulle, (b) menace, (c) mesurée de notre modèle dynamique. Les enveloppes colorées représentent les intervalles de confiance à 95% ; les lignes pleines les abondances médianes d’individus matures</a:t>
+            </a:r>
+          </a:p>
+        </p:txBody>
+      </p:sp>
+    </p:spTree>
+    <p:extLst>
+      <p:ext uri="{BB962C8B-B14F-4D97-AF65-F5344CB8AC3E}">
+        <p14:creationId xmlns:p14="http://schemas.microsoft.com/office/powerpoint/2010/main" val="444677078"/>
+      </p:ext>
+    </p:extLst>
+  </p:cSld>
+  <p:clrMapOvr>
+    <a:masterClrMapping/>
+  </p:clrMapOvr>
+</p:sld>
+</file>
+
+<file path=ppt/slides/slide12.xml><?xml version="1.0" encoding="utf-8"?>
+<p:sld xmlns:a="http://schemas.openxmlformats.org/drawingml/2006/main" xmlns:r="http://schemas.openxmlformats.org/officeDocument/2006/relationships" xmlns:p="http://schemas.openxmlformats.org/presentationml/2006/main">
+  <p:cSld>
+    <p:spTree>
+      <p:nvGrpSpPr>
+        <p:cNvPr id="1" name="">
+          <a:extLst>
+            <a:ext uri="{FF2B5EF4-FFF2-40B4-BE49-F238E27FC236}">
+              <a16:creationId xmlns:a16="http://schemas.microsoft.com/office/drawing/2014/main" id="{FFD00D4D-B5FB-0E8C-F409-EE2FA4E17B92}"/>
+            </a:ext>
+          </a:extLst>
+        </p:cNvPr>
+        <p:cNvGrpSpPr/>
+        <p:nvPr/>
+      </p:nvGrpSpPr>
+      <p:grpSpPr>
+        <a:xfrm>
+          <a:off x="0" y="0"/>
+          <a:ext cx="0" cy="0"/>
+          <a:chOff x="0" y="0"/>
+          <a:chExt cx="0" cy="0"/>
+        </a:xfrm>
+      </p:grpSpPr>
+      <p:sp>
+        <p:nvSpPr>
+          <p:cNvPr id="12" name="ZoneTexte 11">
+            <a:extLst>
+              <a:ext uri="{FF2B5EF4-FFF2-40B4-BE49-F238E27FC236}">
+                <a16:creationId xmlns:a16="http://schemas.microsoft.com/office/drawing/2014/main" id="{1E7DC136-65ED-D17F-5DEC-2F90924CF09D}"/>
+              </a:ext>
+            </a:extLst>
+          </p:cNvPr>
+          <p:cNvSpPr txBox="1"/>
+          <p:nvPr/>
+        </p:nvSpPr>
+        <p:spPr>
+          <a:xfrm>
+            <a:off x="1295400" y="4936931"/>
+            <a:ext cx="9601200" cy="1077218"/>
+          </a:xfrm>
+          <a:prstGeom prst="rect">
+            <a:avLst/>
+          </a:prstGeom>
+          <a:noFill/>
+        </p:spPr>
+        <p:txBody>
+          <a:bodyPr wrap="square" rtlCol="0">
+            <a:spAutoFit/>
+          </a:bodyPr>
+          <a:lstStyle/>
+          <a:p>
+            <a:pPr algn="just"/>
+            <a:r>
+              <a:rPr lang="fr-CA" sz="1600" noProof="0" dirty="0"/>
+              <a:t>Figure 3 : À gauche, résultats de l’étude de </a:t>
+            </a:r>
+            <a:r>
+              <a:rPr lang="fr-CA" sz="1600" noProof="0" dirty="0" err="1"/>
+              <a:t>Bannester</a:t>
+            </a:r>
+            <a:r>
+              <a:rPr lang="fr-CA" sz="1600" noProof="0" dirty="0"/>
+              <a:t>-Marchand et al. (2025), à droite, résultats de notre analyse. Est représenté : Les probabilités que les chevaliers cuivrés tombent sous un seuil de population dans les prochaines 100 ans, basé sur nos scénarios dynamique stochastiques de population. Lignes : médiane de 5000 itérations; enveloppes colorées : 70% </a:t>
+            </a:r>
+            <a:r>
+              <a:rPr lang="fr-CA" sz="1600" noProof="0" dirty="0" err="1"/>
+              <a:t>ICs</a:t>
+            </a:r>
+            <a:endParaRPr lang="fr-CA" sz="1600" noProof="0" dirty="0"/>
+          </a:p>
+        </p:txBody>
+      </p:sp>
+      <p:pic>
+        <p:nvPicPr>
+          <p:cNvPr id="4" name="Image 3">
+            <a:extLst>
+              <a:ext uri="{FF2B5EF4-FFF2-40B4-BE49-F238E27FC236}">
+                <a16:creationId xmlns:a16="http://schemas.microsoft.com/office/drawing/2014/main" id="{C3B9B1F3-DBD8-3F0B-E141-48009D6B0142}"/>
+              </a:ext>
+            </a:extLst>
+          </p:cNvPr>
+          <p:cNvPicPr>
+            <a:picLocks noChangeAspect="1"/>
+          </p:cNvPicPr>
+          <p:nvPr/>
+        </p:nvPicPr>
+        <p:blipFill>
+          <a:blip r:embed="rId2">
+            <a:extLst>
+              <a:ext uri="{28A0092B-C50C-407E-A947-70E740481C1C}">
+                <a14:useLocalDpi xmlns:a14="http://schemas.microsoft.com/office/drawing/2010/main" val="0"/>
+              </a:ext>
+            </a:extLst>
+          </a:blip>
+          <a:stretch>
+            <a:fillRect/>
+          </a:stretch>
+        </p:blipFill>
+        <p:spPr>
+          <a:xfrm>
+            <a:off x="6274208" y="1030628"/>
+            <a:ext cx="4489676" cy="3741396"/>
+          </a:xfrm>
+          <a:prstGeom prst="rect">
+            <a:avLst/>
+          </a:prstGeom>
+        </p:spPr>
+      </p:pic>
+      <p:pic>
+        <p:nvPicPr>
+          <p:cNvPr id="13" name="Image 12">
+            <a:extLst>
+              <a:ext uri="{FF2B5EF4-FFF2-40B4-BE49-F238E27FC236}">
+                <a16:creationId xmlns:a16="http://schemas.microsoft.com/office/drawing/2014/main" id="{C705A886-BFDB-824D-0E37-7B8094A21002}"/>
+              </a:ext>
+            </a:extLst>
+          </p:cNvPr>
+          <p:cNvPicPr>
+            <a:picLocks noChangeAspect="1"/>
+          </p:cNvPicPr>
+          <p:nvPr/>
+        </p:nvPicPr>
+        <p:blipFill>
+          <a:blip r:embed="rId3"/>
+          <a:stretch>
+            <a:fillRect/>
+          </a:stretch>
+        </p:blipFill>
+        <p:spPr>
+          <a:xfrm>
+            <a:off x="1507787" y="1030628"/>
+            <a:ext cx="4410006" cy="3738169"/>
+          </a:xfrm>
+          <a:prstGeom prst="rect">
+            <a:avLst/>
+          </a:prstGeom>
+        </p:spPr>
+      </p:pic>
+    </p:spTree>
+    <p:extLst>
+      <p:ext uri="{BB962C8B-B14F-4D97-AF65-F5344CB8AC3E}">
+        <p14:creationId xmlns:p14="http://schemas.microsoft.com/office/powerpoint/2010/main" val="1162506719"/>
+      </p:ext>
+    </p:extLst>
+  </p:cSld>
+  <p:clrMapOvr>
+    <a:masterClrMapping/>
+  </p:clrMapOvr>
+</p:sld>
+</file>
+
+<file path=ppt/slides/slide13.xml><?xml version="1.0" encoding="utf-8"?>
+<p:sld xmlns:a="http://schemas.openxmlformats.org/drawingml/2006/main" xmlns:r="http://schemas.openxmlformats.org/officeDocument/2006/relationships" xmlns:p="http://schemas.openxmlformats.org/presentationml/2006/main">
+  <p:cSld>
+    <p:spTree>
+      <p:nvGrpSpPr>
+        <p:cNvPr id="1" name="">
+          <a:extLst>
+            <a:ext uri="{FF2B5EF4-FFF2-40B4-BE49-F238E27FC236}">
+              <a16:creationId xmlns:a16="http://schemas.microsoft.com/office/drawing/2014/main" id="{59F1FA62-BF98-FBB0-D20E-CDA7D1E5D981}"/>
+            </a:ext>
+          </a:extLst>
+        </p:cNvPr>
+        <p:cNvGrpSpPr/>
+        <p:nvPr/>
+      </p:nvGrpSpPr>
+      <p:grpSpPr>
+        <a:xfrm>
+          <a:off x="0" y="0"/>
+          <a:ext cx="0" cy="0"/>
+          <a:chOff x="0" y="0"/>
+          <a:chExt cx="0" cy="0"/>
+        </a:xfrm>
+      </p:grpSpPr>
+      <p:sp>
+        <p:nvSpPr>
+          <p:cNvPr id="12" name="ZoneTexte 11">
+            <a:extLst>
+              <a:ext uri="{FF2B5EF4-FFF2-40B4-BE49-F238E27FC236}">
+                <a16:creationId xmlns:a16="http://schemas.microsoft.com/office/drawing/2014/main" id="{C9FAF4E8-FBA0-C1B3-18B7-2833B15C2E5C}"/>
+              </a:ext>
+            </a:extLst>
+          </p:cNvPr>
+          <p:cNvSpPr txBox="1"/>
+          <p:nvPr/>
+        </p:nvSpPr>
+        <p:spPr>
+          <a:xfrm>
+            <a:off x="1295400" y="4852863"/>
+            <a:ext cx="9601200" cy="1077218"/>
+          </a:xfrm>
+          <a:prstGeom prst="rect">
+            <a:avLst/>
+          </a:prstGeom>
+          <a:noFill/>
+        </p:spPr>
+        <p:txBody>
+          <a:bodyPr wrap="square" rtlCol="0">
+            <a:spAutoFit/>
+          </a:bodyPr>
+          <a:lstStyle/>
+          <a:p>
+            <a:pPr algn="just"/>
+            <a:r>
+              <a:rPr lang="fr-CA" sz="1600" noProof="0" dirty="0"/>
+              <a:t>Figure 4 : À gauche, résultats de l’étude de </a:t>
+            </a:r>
+            <a:r>
+              <a:rPr lang="fr-CA" sz="1600" noProof="0" dirty="0" err="1"/>
+              <a:t>Bannester</a:t>
+            </a:r>
+            <a:r>
+              <a:rPr lang="fr-CA" sz="1600" noProof="0" dirty="0"/>
+              <a:t>-Marchand et al. (2025), à droite, résultats de notre analyse. Est représenté :</a:t>
+            </a:r>
+            <a:r>
+              <a:rPr lang="fr-CA" sz="1600" dirty="0"/>
+              <a:t> L’effet d’augmenter l’ensemencement de larves, alevins, individus d’âges 1, et individus matures (âge 10) sur l’abondance de chevaliers matures sur 100 ans dans notre scénario mesuré. Lors de l’application aux scénarios nulles et menacés, les résultats étaient indistinguables de ceux présentés.</a:t>
+            </a:r>
+          </a:p>
+        </p:txBody>
+      </p:sp>
+      <p:pic>
+        <p:nvPicPr>
+          <p:cNvPr id="6" name="Image 5">
+            <a:extLst>
+              <a:ext uri="{FF2B5EF4-FFF2-40B4-BE49-F238E27FC236}">
+                <a16:creationId xmlns:a16="http://schemas.microsoft.com/office/drawing/2014/main" id="{57A977B4-F0B7-1A94-5F50-6DB61D43BE7B}"/>
+              </a:ext>
+            </a:extLst>
+          </p:cNvPr>
+          <p:cNvPicPr>
+            <a:picLocks noChangeAspect="1"/>
+          </p:cNvPicPr>
+          <p:nvPr/>
+        </p:nvPicPr>
+        <p:blipFill>
+          <a:blip r:embed="rId2"/>
+          <a:stretch>
+            <a:fillRect/>
+          </a:stretch>
+        </p:blipFill>
+        <p:spPr>
+          <a:xfrm>
+            <a:off x="1133475" y="1149359"/>
+            <a:ext cx="4962525" cy="3417648"/>
+          </a:xfrm>
+          <a:prstGeom prst="rect">
+            <a:avLst/>
+          </a:prstGeom>
+        </p:spPr>
+      </p:pic>
+      <p:pic>
+        <p:nvPicPr>
+          <p:cNvPr id="10" name="Image 9">
+            <a:extLst>
+              <a:ext uri="{FF2B5EF4-FFF2-40B4-BE49-F238E27FC236}">
+                <a16:creationId xmlns:a16="http://schemas.microsoft.com/office/drawing/2014/main" id="{8F3BD6FE-B164-B9F2-09BB-32BB144C5117}"/>
+              </a:ext>
+            </a:extLst>
+          </p:cNvPr>
+          <p:cNvPicPr>
+            <a:picLocks noChangeAspect="1"/>
+          </p:cNvPicPr>
+          <p:nvPr/>
+        </p:nvPicPr>
+        <p:blipFill>
+          <a:blip r:embed="rId3">
+            <a:extLst>
+              <a:ext uri="{28A0092B-C50C-407E-A947-70E740481C1C}">
+                <a14:useLocalDpi xmlns:a14="http://schemas.microsoft.com/office/drawing/2010/main" val="0"/>
+              </a:ext>
+            </a:extLst>
+          </a:blip>
+          <a:srcRect t="7092"/>
+          <a:stretch>
+            <a:fillRect/>
+          </a:stretch>
+        </p:blipFill>
+        <p:spPr>
+          <a:xfrm>
+            <a:off x="6096000" y="927919"/>
+            <a:ext cx="5222494" cy="3639088"/>
+          </a:xfrm>
+          <a:prstGeom prst="rect">
+            <a:avLst/>
+          </a:prstGeom>
+        </p:spPr>
+      </p:pic>
+    </p:spTree>
+    <p:extLst>
+      <p:ext uri="{BB962C8B-B14F-4D97-AF65-F5344CB8AC3E}">
+        <p14:creationId xmlns:p14="http://schemas.microsoft.com/office/powerpoint/2010/main" val="4073645163"/>
+      </p:ext>
+    </p:extLst>
+  </p:cSld>
+  <p:clrMapOvr>
+    <a:masterClrMapping/>
+  </p:clrMapOvr>
+</p:sld>
+</file>
+
+<file path=ppt/slides/slide14.xml><?xml version="1.0" encoding="utf-8"?>
+<p:sld xmlns:a="http://schemas.openxmlformats.org/drawingml/2006/main" xmlns:r="http://schemas.openxmlformats.org/officeDocument/2006/relationships" xmlns:p="http://schemas.openxmlformats.org/presentationml/2006/main">
+  <p:cSld>
+    <p:spTree>
+      <p:nvGrpSpPr>
+        <p:cNvPr id="1" name=""/>
+        <p:cNvGrpSpPr/>
+        <p:nvPr/>
+      </p:nvGrpSpPr>
+      <p:grpSpPr>
+        <a:xfrm>
+          <a:off x="0" y="0"/>
+          <a:ext cx="0" cy="0"/>
+          <a:chOff x="0" y="0"/>
+          <a:chExt cx="0" cy="0"/>
+        </a:xfrm>
+      </p:grpSpPr>
+      <p:sp>
+        <p:nvSpPr>
+          <p:cNvPr id="2" name="Titre 1">
+            <a:extLst>
+              <a:ext uri="{FF2B5EF4-FFF2-40B4-BE49-F238E27FC236}">
+                <a16:creationId xmlns:a16="http://schemas.microsoft.com/office/drawing/2014/main" id="{B602546B-6E81-B2EF-AF4D-70A2BABCE52E}"/>
+              </a:ext>
+            </a:extLst>
+          </p:cNvPr>
+          <p:cNvSpPr>
+            <a:spLocks noGrp="1"/>
+          </p:cNvSpPr>
+          <p:nvPr>
+            <p:ph type="title"/>
+          </p:nvPr>
+        </p:nvSpPr>
+        <p:spPr/>
+        <p:txBody>
+          <a:bodyPr/>
+          <a:lstStyle/>
+          <a:p>
+            <a:r>
+              <a:rPr lang="fr-CA" dirty="0"/>
+              <a:t>Discussion</a:t>
+            </a:r>
+          </a:p>
+        </p:txBody>
+      </p:sp>
+      <p:sp>
+        <p:nvSpPr>
+          <p:cNvPr id="3" name="Espace réservé du contenu 2">
+            <a:extLst>
+              <a:ext uri="{FF2B5EF4-FFF2-40B4-BE49-F238E27FC236}">
+                <a16:creationId xmlns:a16="http://schemas.microsoft.com/office/drawing/2014/main" id="{7C8FECE2-37AA-AFF5-7D1E-A6F3BA91F380}"/>
+              </a:ext>
+            </a:extLst>
+          </p:cNvPr>
+          <p:cNvSpPr>
+            <a:spLocks noGrp="1"/>
+          </p:cNvSpPr>
+          <p:nvPr>
+            <p:ph idx="1"/>
+          </p:nvPr>
+        </p:nvSpPr>
+        <p:spPr/>
+        <p:txBody>
+          <a:bodyPr/>
+          <a:lstStyle/>
+          <a:p>
+            <a:pPr>
+              <a:lnSpc>
+                <a:spcPct val="200000"/>
+              </a:lnSpc>
+            </a:pPr>
+            <a:r>
+              <a:rPr lang="fr-CA" dirty="0"/>
+              <a:t>Augmenté ensemencement niveau proposé par Bernatchez (2004) = effet négligeable</a:t>
+            </a:r>
+          </a:p>
+          <a:p>
+            <a:pPr>
+              <a:lnSpc>
+                <a:spcPct val="200000"/>
+              </a:lnSpc>
+            </a:pPr>
+            <a:r>
+              <a:rPr lang="fr-CA" dirty="0"/>
+              <a:t>Recommandation à mettre en place : ensemencement d’individus plus âgés (en plus)</a:t>
+            </a:r>
+          </a:p>
+          <a:p>
+            <a:pPr>
+              <a:lnSpc>
+                <a:spcPct val="200000"/>
+              </a:lnSpc>
+            </a:pPr>
+            <a:r>
+              <a:rPr lang="fr-CA" dirty="0"/>
+              <a:t>Ensemencement d’âge 10 = théoriquement le mieux, mais…</a:t>
+            </a:r>
+            <a:br>
+              <a:rPr lang="fr-CA" dirty="0"/>
+            </a:br>
+            <a:r>
+              <a:rPr lang="fr-CA" dirty="0"/>
+              <a:t> possibilité de phénotype ou comportements mal adaptés (Roberts et al., 2011)</a:t>
+            </a:r>
+          </a:p>
+          <a:p>
+            <a:pPr>
+              <a:lnSpc>
+                <a:spcPct val="200000"/>
+              </a:lnSpc>
+            </a:pPr>
+            <a:endParaRPr lang="fr-CA" dirty="0"/>
+          </a:p>
+        </p:txBody>
+      </p:sp>
+    </p:spTree>
+    <p:extLst>
+      <p:ext uri="{BB962C8B-B14F-4D97-AF65-F5344CB8AC3E}">
+        <p14:creationId xmlns:p14="http://schemas.microsoft.com/office/powerpoint/2010/main" val="400772557"/>
+      </p:ext>
+    </p:extLst>
+  </p:cSld>
+  <p:clrMapOvr>
+    <a:masterClrMapping/>
+  </p:clrMapOvr>
+</p:sld>
+</file>
+
+<file path=ppt/slides/slide15.xml><?xml version="1.0" encoding="utf-8"?>
+<p:sld xmlns:a="http://schemas.openxmlformats.org/drawingml/2006/main" xmlns:r="http://schemas.openxmlformats.org/officeDocument/2006/relationships" xmlns:p="http://schemas.openxmlformats.org/presentationml/2006/main">
+  <p:cSld>
+    <p:bg>
+      <p:bgPr>
+        <a:solidFill>
+          <a:schemeClr val="bg1"/>
+        </a:solidFill>
+        <a:effectLst/>
+      </p:bgPr>
+    </p:bg>
+    <p:spTree>
+      <p:nvGrpSpPr>
+        <p:cNvPr id="1" name=""/>
+        <p:cNvGrpSpPr/>
+        <p:nvPr/>
+      </p:nvGrpSpPr>
+      <p:grpSpPr>
+        <a:xfrm>
+          <a:off x="0" y="0"/>
+          <a:ext cx="0" cy="0"/>
+          <a:chOff x="0" y="0"/>
+          <a:chExt cx="0" cy="0"/>
+        </a:xfrm>
+      </p:grpSpPr>
       <p:sp useBgFill="1">
         <p:nvSpPr>
-          <p:cNvPr id="11" name="Rectangle 10">
+          <p:cNvPr id="8" name="Rectangle 7">
             <a:extLst>
               <a:ext uri="{FF2B5EF4-FFF2-40B4-BE49-F238E27FC236}">
-                <a16:creationId xmlns:a16="http://schemas.microsoft.com/office/drawing/2014/main" id="{DEF92653-5D6D-47E6-8744-0DAF76E049C4}"/>
+                <a16:creationId xmlns:a16="http://schemas.microsoft.com/office/drawing/2014/main" id="{5F710FDB-0919-493E-8539-8240C23F1EB2}"/>
               </a:ext>
               <a:ext uri="{C183D7F6-B498-43B3-948B-1728B52AA6E4}">
                 <adec:decorative xmlns:adec="http://schemas.microsoft.com/office/drawing/2017/decorative" val="1"/>
@@ -10506,6 +10438,535 @@
           <p:cNvPr id="2" name="Titre 1">
             <a:extLst>
               <a:ext uri="{FF2B5EF4-FFF2-40B4-BE49-F238E27FC236}">
+                <a16:creationId xmlns:a16="http://schemas.microsoft.com/office/drawing/2014/main" id="{E94E064B-C271-D942-847D-C57AA49309EB}"/>
+              </a:ext>
+            </a:extLst>
+          </p:cNvPr>
+          <p:cNvSpPr>
+            <a:spLocks noGrp="1"/>
+          </p:cNvSpPr>
+          <p:nvPr>
+            <p:ph type="title"/>
+          </p:nvPr>
+        </p:nvSpPr>
+        <p:spPr>
+          <a:xfrm>
+            <a:off x="704087" y="559063"/>
+            <a:ext cx="3306747" cy="5256025"/>
+          </a:xfrm>
+        </p:spPr>
+        <p:txBody>
+          <a:bodyPr>
+            <a:normAutofit/>
+          </a:bodyPr>
+          <a:lstStyle/>
+          <a:p>
+            <a:r>
+              <a:rPr lang="fr-CA" sz="3600"/>
+              <a:t>Impact sur la conservation</a:t>
+            </a:r>
+          </a:p>
+        </p:txBody>
+      </p:sp>
+      <p:sp>
+        <p:nvSpPr>
+          <p:cNvPr id="3" name="Espace réservé du contenu 2">
+            <a:extLst>
+              <a:ext uri="{FF2B5EF4-FFF2-40B4-BE49-F238E27FC236}">
+                <a16:creationId xmlns:a16="http://schemas.microsoft.com/office/drawing/2014/main" id="{985811B9-89CF-1E2E-CD4B-69C7E3D221C2}"/>
+              </a:ext>
+            </a:extLst>
+          </p:cNvPr>
+          <p:cNvSpPr>
+            <a:spLocks noGrp="1"/>
+          </p:cNvSpPr>
+          <p:nvPr>
+            <p:ph idx="1"/>
+          </p:nvPr>
+        </p:nvSpPr>
+        <p:spPr>
+          <a:xfrm>
+            <a:off x="4643022" y="622249"/>
+            <a:ext cx="6844892" cy="5639712"/>
+          </a:xfrm>
+        </p:spPr>
+        <p:txBody>
+          <a:bodyPr>
+            <a:normAutofit/>
+          </a:bodyPr>
+          <a:lstStyle/>
+          <a:p>
+            <a:pPr>
+              <a:lnSpc>
+                <a:spcPct val="200000"/>
+              </a:lnSpc>
+            </a:pPr>
+            <a:r>
+              <a:rPr lang="fr-CA" dirty="0"/>
+              <a:t>Ensemencement encore nécessaire pour l’instant (Figure 2)</a:t>
+            </a:r>
+          </a:p>
+          <a:p>
+            <a:pPr marL="0" indent="0">
+              <a:lnSpc>
+                <a:spcPct val="200000"/>
+              </a:lnSpc>
+              <a:buNone/>
+            </a:pPr>
+            <a:endParaRPr lang="fr-CA" dirty="0"/>
+          </a:p>
+          <a:p>
+            <a:pPr>
+              <a:lnSpc>
+                <a:spcPct val="200000"/>
+              </a:lnSpc>
+            </a:pPr>
+            <a:r>
+              <a:rPr lang="fr-CA" dirty="0"/>
+              <a:t>Déclin potentiel de 80% selon nos résultats donc confirme statut en voie de disparition</a:t>
+            </a:r>
+          </a:p>
+          <a:p>
+            <a:pPr lvl="1">
+              <a:lnSpc>
+                <a:spcPct val="200000"/>
+              </a:lnSpc>
+            </a:pPr>
+            <a:r>
+              <a:rPr lang="fr-CA" sz="2000" dirty="0"/>
+              <a:t>Donc action nécessaire</a:t>
+            </a:r>
+          </a:p>
+        </p:txBody>
+      </p:sp>
+      <p:cxnSp>
+        <p:nvCxnSpPr>
+          <p:cNvPr id="10" name="Straight Connector 9">
+            <a:extLst>
+              <a:ext uri="{FF2B5EF4-FFF2-40B4-BE49-F238E27FC236}">
+                <a16:creationId xmlns:a16="http://schemas.microsoft.com/office/drawing/2014/main" id="{0AFF0B6C-73E2-4B40-9280-938C14922C87}"/>
+              </a:ext>
+              <a:ext uri="{C183D7F6-B498-43B3-948B-1728B52AA6E4}">
+                <adec:decorative xmlns:adec="http://schemas.microsoft.com/office/drawing/2017/decorative" val="1"/>
+              </a:ext>
+            </a:extLst>
+          </p:cNvPr>
+          <p:cNvCxnSpPr>
+            <a:cxnSpLocks noGrp="1" noRot="1" noChangeAspect="1" noMove="1" noResize="1" noEditPoints="1" noAdjustHandles="1" noChangeArrowheads="1" noChangeShapeType="1"/>
+          </p:cNvCxnSpPr>
+          <p:nvPr>
+            <p:extLst>
+              <p:ext uri="{386F3935-93C4-4BCD-93E2-E3B085C9AB24}">
+                <p16:designElem xmlns:p16="http://schemas.microsoft.com/office/powerpoint/2015/main" val="1"/>
+              </p:ext>
+            </p:extLst>
+          </p:nvPr>
+        </p:nvCxnSpPr>
+        <p:spPr>
+          <a:xfrm flipV="1">
+            <a:off x="4223541" y="723900"/>
+            <a:ext cx="15948" cy="5450072"/>
+          </a:xfrm>
+          <a:prstGeom prst="line">
+            <a:avLst/>
+          </a:prstGeom>
+          <a:ln w="12700">
+            <a:solidFill>
+              <a:schemeClr val="tx1"/>
+            </a:solidFill>
+          </a:ln>
+        </p:spPr>
+        <p:style>
+          <a:lnRef idx="1">
+            <a:schemeClr val="accent1"/>
+          </a:lnRef>
+          <a:fillRef idx="0">
+            <a:schemeClr val="accent1"/>
+          </a:fillRef>
+          <a:effectRef idx="0">
+            <a:schemeClr val="accent1"/>
+          </a:effectRef>
+          <a:fontRef idx="minor">
+            <a:schemeClr val="tx1"/>
+          </a:fontRef>
+        </p:style>
+      </p:cxnSp>
+    </p:spTree>
+    <p:extLst>
+      <p:ext uri="{BB962C8B-B14F-4D97-AF65-F5344CB8AC3E}">
+        <p14:creationId xmlns:p14="http://schemas.microsoft.com/office/powerpoint/2010/main" val="960806995"/>
+      </p:ext>
+    </p:extLst>
+  </p:cSld>
+  <p:clrMapOvr>
+    <a:masterClrMapping/>
+  </p:clrMapOvr>
+</p:sld>
+</file>
+
+<file path=ppt/slides/slide16.xml><?xml version="1.0" encoding="utf-8"?>
+<p:sld xmlns:a="http://schemas.openxmlformats.org/drawingml/2006/main" xmlns:r="http://schemas.openxmlformats.org/officeDocument/2006/relationships" xmlns:p="http://schemas.openxmlformats.org/presentationml/2006/main">
+  <p:cSld>
+    <p:spTree>
+      <p:nvGrpSpPr>
+        <p:cNvPr id="1" name=""/>
+        <p:cNvGrpSpPr/>
+        <p:nvPr/>
+      </p:nvGrpSpPr>
+      <p:grpSpPr>
+        <a:xfrm>
+          <a:off x="0" y="0"/>
+          <a:ext cx="0" cy="0"/>
+          <a:chOff x="0" y="0"/>
+          <a:chExt cx="0" cy="0"/>
+        </a:xfrm>
+      </p:grpSpPr>
+      <p:sp>
+        <p:nvSpPr>
+          <p:cNvPr id="2" name="Titre 1">
+            <a:extLst>
+              <a:ext uri="{FF2B5EF4-FFF2-40B4-BE49-F238E27FC236}">
+                <a16:creationId xmlns:a16="http://schemas.microsoft.com/office/drawing/2014/main" id="{8D966DD8-8219-CF1B-134B-3A3C1821891D}"/>
+              </a:ext>
+            </a:extLst>
+          </p:cNvPr>
+          <p:cNvSpPr>
+            <a:spLocks noGrp="1"/>
+          </p:cNvSpPr>
+          <p:nvPr>
+            <p:ph type="title"/>
+          </p:nvPr>
+        </p:nvSpPr>
+        <p:spPr/>
+        <p:txBody>
+          <a:bodyPr/>
+          <a:lstStyle/>
+          <a:p>
+            <a:r>
+              <a:rPr lang="fr-CA"/>
+              <a:t>Limitations de l’étude</a:t>
+            </a:r>
+            <a:endParaRPr lang="fr-CA" dirty="0"/>
+          </a:p>
+        </p:txBody>
+      </p:sp>
+      <p:sp>
+        <p:nvSpPr>
+          <p:cNvPr id="3" name="Espace réservé du contenu 2">
+            <a:extLst>
+              <a:ext uri="{FF2B5EF4-FFF2-40B4-BE49-F238E27FC236}">
+                <a16:creationId xmlns:a16="http://schemas.microsoft.com/office/drawing/2014/main" id="{76E70E93-C46E-8BE3-F6AA-2FF55DA44A33}"/>
+              </a:ext>
+            </a:extLst>
+          </p:cNvPr>
+          <p:cNvSpPr>
+            <a:spLocks noGrp="1"/>
+          </p:cNvSpPr>
+          <p:nvPr>
+            <p:ph idx="1"/>
+          </p:nvPr>
+        </p:nvSpPr>
+        <p:spPr/>
+        <p:txBody>
+          <a:bodyPr/>
+          <a:lstStyle/>
+          <a:p>
+            <a:pPr>
+              <a:lnSpc>
+                <a:spcPct val="200000"/>
+              </a:lnSpc>
+            </a:pPr>
+            <a:r>
+              <a:rPr lang="fr-CA"/>
+              <a:t>N'inclue pas de facteurs de prédation ou de dégradation de l’habitat</a:t>
+            </a:r>
+          </a:p>
+          <a:p>
+            <a:pPr>
+              <a:lnSpc>
+                <a:spcPct val="200000"/>
+              </a:lnSpc>
+            </a:pPr>
+            <a:r>
+              <a:rPr lang="fr-CA"/>
+              <a:t>Valeurs stades juvéniles tirées de Dahlberg (1979) = pas des </a:t>
+            </a:r>
+            <a:r>
+              <a:rPr lang="fr-CA" i="1"/>
+              <a:t>M.</a:t>
+            </a:r>
+            <a:r>
+              <a:rPr lang="fr-CA"/>
+              <a:t> </a:t>
+            </a:r>
+            <a:r>
+              <a:rPr lang="fr-CA" i="1"/>
+              <a:t>hubbsi </a:t>
+            </a:r>
+            <a:r>
+              <a:rPr lang="fr-CA"/>
+              <a:t>(surestimation possible)</a:t>
+            </a:r>
+          </a:p>
+          <a:p>
+            <a:pPr>
+              <a:lnSpc>
+                <a:spcPct val="200000"/>
+              </a:lnSpc>
+            </a:pPr>
+            <a:r>
+              <a:rPr lang="fr-CA"/>
+              <a:t>Survie des ensemencements = survie des sauvages</a:t>
+            </a:r>
+          </a:p>
+          <a:p>
+            <a:pPr>
+              <a:lnSpc>
+                <a:spcPct val="200000"/>
+              </a:lnSpc>
+            </a:pPr>
+            <a:r>
+              <a:rPr lang="fr-CA"/>
+              <a:t>Impossible individus &gt;30 ans</a:t>
+            </a:r>
+          </a:p>
+          <a:p>
+            <a:pPr>
+              <a:lnSpc>
+                <a:spcPct val="200000"/>
+              </a:lnSpc>
+            </a:pPr>
+            <a:r>
+              <a:rPr lang="fr-CA"/>
+              <a:t>Pas d’impact de la génétique</a:t>
+            </a:r>
+            <a:endParaRPr lang="fr-CA" dirty="0"/>
+          </a:p>
+        </p:txBody>
+      </p:sp>
+    </p:spTree>
+    <p:extLst>
+      <p:ext uri="{BB962C8B-B14F-4D97-AF65-F5344CB8AC3E}">
+        <p14:creationId xmlns:p14="http://schemas.microsoft.com/office/powerpoint/2010/main" val="1896708259"/>
+      </p:ext>
+    </p:extLst>
+  </p:cSld>
+  <p:clrMapOvr>
+    <a:masterClrMapping/>
+  </p:clrMapOvr>
+</p:sld>
+</file>
+
+<file path=ppt/slides/slide17.xml><?xml version="1.0" encoding="utf-8"?>
+<p:sld xmlns:a="http://schemas.openxmlformats.org/drawingml/2006/main" xmlns:r="http://schemas.openxmlformats.org/officeDocument/2006/relationships" xmlns:p="http://schemas.openxmlformats.org/presentationml/2006/main">
+  <p:cSld>
+    <p:bg>
+      <p:bgPr>
+        <a:solidFill>
+          <a:schemeClr val="bg1"/>
+        </a:solidFill>
+        <a:effectLst/>
+      </p:bgPr>
+    </p:bg>
+    <p:spTree>
+      <p:nvGrpSpPr>
+        <p:cNvPr id="1" name=""/>
+        <p:cNvGrpSpPr/>
+        <p:nvPr/>
+      </p:nvGrpSpPr>
+      <p:grpSpPr>
+        <a:xfrm>
+          <a:off x="0" y="0"/>
+          <a:ext cx="0" cy="0"/>
+          <a:chOff x="0" y="0"/>
+          <a:chExt cx="0" cy="0"/>
+        </a:xfrm>
+      </p:grpSpPr>
+      <p:cxnSp>
+        <p:nvCxnSpPr>
+          <p:cNvPr id="7" name="Straight Connector 6">
+            <a:extLst>
+              <a:ext uri="{FF2B5EF4-FFF2-40B4-BE49-F238E27FC236}">
+                <a16:creationId xmlns:a16="http://schemas.microsoft.com/office/drawing/2014/main" id="{F64F9B95-9045-48D2-B9F3-2927E98F54AA}"/>
+              </a:ext>
+              <a:ext uri="{C183D7F6-B498-43B3-948B-1728B52AA6E4}">
+                <adec:decorative xmlns:adec="http://schemas.microsoft.com/office/drawing/2017/decorative" val="1"/>
+              </a:ext>
+            </a:extLst>
+          </p:cNvPr>
+          <p:cNvCxnSpPr>
+            <a:cxnSpLocks noGrp="1" noRot="1" noChangeAspect="1" noMove="1" noResize="1" noEditPoints="1" noAdjustHandles="1" noChangeArrowheads="1" noChangeShapeType="1"/>
+          </p:cNvCxnSpPr>
+          <p:nvPr>
+            <p:extLst>
+              <p:ext uri="{386F3935-93C4-4BCD-93E2-E3B085C9AB24}">
+                <p16:designElem xmlns:p16="http://schemas.microsoft.com/office/powerpoint/2015/main" val="1"/>
+              </p:ext>
+            </p:extLst>
+          </p:nvPr>
+        </p:nvCxnSpPr>
+        <p:spPr>
+          <a:xfrm>
+            <a:off x="800100" y="723900"/>
+            <a:ext cx="10591800" cy="0"/>
+          </a:xfrm>
+          <a:prstGeom prst="line">
+            <a:avLst/>
+          </a:prstGeom>
+          <a:ln w="44450">
+            <a:solidFill>
+              <a:schemeClr val="tx1"/>
+            </a:solidFill>
+          </a:ln>
+        </p:spPr>
+        <p:style>
+          <a:lnRef idx="1">
+            <a:schemeClr val="accent1"/>
+          </a:lnRef>
+          <a:fillRef idx="0">
+            <a:schemeClr val="accent1"/>
+          </a:fillRef>
+          <a:effectRef idx="0">
+            <a:schemeClr val="accent1"/>
+          </a:effectRef>
+          <a:fontRef idx="minor">
+            <a:schemeClr val="tx1"/>
+          </a:fontRef>
+        </p:style>
+      </p:cxnSp>
+      <p:cxnSp>
+        <p:nvCxnSpPr>
+          <p:cNvPr id="9" name="Straight Connector 8">
+            <a:extLst>
+              <a:ext uri="{FF2B5EF4-FFF2-40B4-BE49-F238E27FC236}">
+                <a16:creationId xmlns:a16="http://schemas.microsoft.com/office/drawing/2014/main" id="{085AA86F-6A4D-4BCB-A045-D992CDC2959B}"/>
+              </a:ext>
+              <a:ext uri="{C183D7F6-B498-43B3-948B-1728B52AA6E4}">
+                <adec:decorative xmlns:adec="http://schemas.microsoft.com/office/drawing/2017/decorative" val="1"/>
+              </a:ext>
+            </a:extLst>
+          </p:cNvPr>
+          <p:cNvCxnSpPr>
+            <a:cxnSpLocks noGrp="1" noRot="1" noChangeAspect="1" noMove="1" noResize="1" noEditPoints="1" noAdjustHandles="1" noChangeArrowheads="1" noChangeShapeType="1"/>
+          </p:cNvCxnSpPr>
+          <p:nvPr>
+            <p:extLst>
+              <p:ext uri="{386F3935-93C4-4BCD-93E2-E3B085C9AB24}">
+                <p16:designElem xmlns:p16="http://schemas.microsoft.com/office/powerpoint/2015/main" val="1"/>
+              </p:ext>
+            </p:extLst>
+          </p:nvPr>
+        </p:nvCxnSpPr>
+        <p:spPr>
+          <a:xfrm>
+            <a:off x="800100" y="6142781"/>
+            <a:ext cx="10591800" cy="0"/>
+          </a:xfrm>
+          <a:prstGeom prst="line">
+            <a:avLst/>
+          </a:prstGeom>
+          <a:ln w="12700">
+            <a:solidFill>
+              <a:schemeClr val="tx1"/>
+            </a:solidFill>
+          </a:ln>
+        </p:spPr>
+        <p:style>
+          <a:lnRef idx="1">
+            <a:schemeClr val="accent1"/>
+          </a:lnRef>
+          <a:fillRef idx="0">
+            <a:schemeClr val="accent1"/>
+          </a:fillRef>
+          <a:effectRef idx="0">
+            <a:schemeClr val="accent1"/>
+          </a:effectRef>
+          <a:fontRef idx="minor">
+            <a:schemeClr val="tx1"/>
+          </a:fontRef>
+        </p:style>
+      </p:cxnSp>
+      <p:sp useBgFill="1">
+        <p:nvSpPr>
+          <p:cNvPr id="11" name="Rectangle 10">
+            <a:extLst>
+              <a:ext uri="{FF2B5EF4-FFF2-40B4-BE49-F238E27FC236}">
+                <a16:creationId xmlns:a16="http://schemas.microsoft.com/office/drawing/2014/main" id="{DEF92653-5D6D-47E6-8744-0DAF76E049C4}"/>
+              </a:ext>
+              <a:ext uri="{C183D7F6-B498-43B3-948B-1728B52AA6E4}">
+                <adec:decorative xmlns:adec="http://schemas.microsoft.com/office/drawing/2017/decorative" val="1"/>
+              </a:ext>
+            </a:extLst>
+          </p:cNvPr>
+          <p:cNvSpPr>
+            <a:spLocks noGrp="1" noRot="1" noChangeAspect="1" noMove="1" noResize="1" noEditPoints="1" noAdjustHandles="1" noChangeArrowheads="1" noChangeShapeType="1" noTextEdit="1"/>
+          </p:cNvSpPr>
+          <p:nvPr>
+            <p:extLst>
+              <p:ext uri="{386F3935-93C4-4BCD-93E2-E3B085C9AB24}">
+                <p16:designElem xmlns:p16="http://schemas.microsoft.com/office/powerpoint/2015/main" val="1"/>
+              </p:ext>
+            </p:extLst>
+          </p:nvPr>
+        </p:nvSpPr>
+        <p:spPr>
+          <a:xfrm>
+            <a:off x="0" y="0"/>
+            <a:ext cx="12192000" cy="6858000"/>
+          </a:xfrm>
+          <a:prstGeom prst="rect">
+            <a:avLst/>
+          </a:prstGeom>
+          <a:ln w="12700" cap="flat" cmpd="sng" algn="ctr">
+            <a:noFill/>
+            <a:prstDash val="solid"/>
+            <a:miter lim="800000"/>
+          </a:ln>
+          <a:effectLst/>
+          <a:extLst>
+            <a:ext uri="{91240B29-F687-4F45-9708-019B960494DF}">
+              <a14:hiddenLine xmlns:a14="http://schemas.microsoft.com/office/drawing/2010/main" w="12700" cap="flat" cmpd="sng" algn="ctr">
+                <a:solidFill>
+                  <a:schemeClr val="accent1">
+                    <a:shade val="50000"/>
+                  </a:schemeClr>
+                </a:solidFill>
+                <a:prstDash val="solid"/>
+                <a:miter lim="800000"/>
+              </a14:hiddenLine>
+            </a:ext>
+          </a:extLst>
+        </p:spPr>
+        <p:style>
+          <a:lnRef idx="2">
+            <a:schemeClr val="accent1">
+              <a:shade val="50000"/>
+            </a:schemeClr>
+          </a:lnRef>
+          <a:fillRef idx="1">
+            <a:schemeClr val="accent1"/>
+          </a:fillRef>
+          <a:effectRef idx="0">
+            <a:schemeClr val="accent1"/>
+          </a:effectRef>
+          <a:fontRef idx="minor">
+            <a:schemeClr val="lt1"/>
+          </a:fontRef>
+        </p:style>
+        <p:txBody>
+          <a:bodyPr rtlCol="0" anchor="ctr"/>
+          <a:lstStyle/>
+          <a:p>
+            <a:pPr algn="ctr"/>
+            <a:endParaRPr lang="en-US"/>
+          </a:p>
+        </p:txBody>
+      </p:sp>
+      <p:sp>
+        <p:nvSpPr>
+          <p:cNvPr id="2" name="Titre 1">
+            <a:extLst>
+              <a:ext uri="{FF2B5EF4-FFF2-40B4-BE49-F238E27FC236}">
                 <a16:creationId xmlns:a16="http://schemas.microsoft.com/office/drawing/2014/main" id="{C6592201-F93D-A145-140C-4ED4769B3007}"/>
               </a:ext>
             </a:extLst>
@@ -10602,7 +11063,7 @@
 </p:sld>
 </file>
 
-<file path=ppt/slides/slide17.xml><?xml version="1.0" encoding="utf-8"?>
+<file path=ppt/slides/slide18.xml><?xml version="1.0" encoding="utf-8"?>
 <p:sld xmlns:a="http://schemas.openxmlformats.org/drawingml/2006/main" xmlns:r="http://schemas.openxmlformats.org/officeDocument/2006/relationships" xmlns:p="http://schemas.openxmlformats.org/presentationml/2006/main">
   <p:cSld>
     <p:spTree>

--- a/Rapport/Chevalier_cuivré.pptx
+++ b/Rapport/Chevalier_cuivré.pptx
@@ -5,7 +5,7 @@
     <p:sldMasterId id="2147483715" r:id="rId1"/>
   </p:sldMasterIdLst>
   <p:notesMasterIdLst>
-    <p:notesMasterId r:id="rId20"/>
+    <p:notesMasterId r:id="rId28"/>
   </p:notesMasterIdLst>
   <p:sldIdLst>
     <p:sldId id="256" r:id="rId2"/>
@@ -26,6 +26,14 @@
     <p:sldId id="271" r:id="rId17"/>
     <p:sldId id="272" r:id="rId18"/>
     <p:sldId id="273" r:id="rId19"/>
+    <p:sldId id="275" r:id="rId20"/>
+    <p:sldId id="276" r:id="rId21"/>
+    <p:sldId id="277" r:id="rId22"/>
+    <p:sldId id="279" r:id="rId23"/>
+    <p:sldId id="278" r:id="rId24"/>
+    <p:sldId id="280" r:id="rId25"/>
+    <p:sldId id="281" r:id="rId26"/>
+    <p:sldId id="282" r:id="rId27"/>
   </p:sldIdLst>
   <p:sldSz cx="12192000" cy="6858000"/>
   <p:notesSz cx="6858000" cy="9144000"/>
@@ -135,7 +143,7 @@
 <file path=ppt/revisionInfo.xml><?xml version="1.0" encoding="utf-8"?>
 <p1510:revInfo xmlns:a="http://schemas.openxmlformats.org/drawingml/2006/main" xmlns:r="http://schemas.openxmlformats.org/officeDocument/2006/relationships" xmlns:p1510="http://schemas.microsoft.com/office/powerpoint/2015/10/main">
   <p1510:revLst>
-    <p1510:client id="{A04B8DB3-0E07-4C81-8CE6-75F1F7AC2095}" v="43" dt="2026-04-16T22:11:51.737"/>
+    <p1510:client id="{A04B8DB3-0E07-4C81-8CE6-75F1F7AC2095}" v="70" dt="2026-04-17T01:30:57.318"/>
   </p1510:revLst>
 </p1510:revInfo>
 </file>
@@ -145,7 +153,7 @@
   <pc:docChgLst>
     <pc:chgData name="Tristan Plasse" userId="13c698b9-43c4-4271-b359-faaadca0774b" providerId="ADAL" clId="{FE460185-D4AE-4375-BA71-CD1D7F2341F0}"/>
     <pc:docChg chg="undo custSel addSld delSld modSld addMainMaster delMainMaster">
-      <pc:chgData name="Tristan Plasse" userId="13c698b9-43c4-4271-b359-faaadca0774b" providerId="ADAL" clId="{FE460185-D4AE-4375-BA71-CD1D7F2341F0}" dt="2026-04-16T22:11:55.941" v="4134" actId="26606"/>
+      <pc:chgData name="Tristan Plasse" userId="13c698b9-43c4-4271-b359-faaadca0774b" providerId="ADAL" clId="{FE460185-D4AE-4375-BA71-CD1D7F2341F0}" dt="2026-04-17T01:31:13.276" v="5059" actId="1076"/>
       <pc:docMkLst>
         <pc:docMk/>
       </pc:docMkLst>
@@ -163,36 +171,12 @@
             <ac:spMk id="2" creationId="{0CE52AE1-F528-9ADC-1794-EB43A5F9C6EB}"/>
           </ac:spMkLst>
         </pc:spChg>
-        <pc:spChg chg="del mod">
-          <ac:chgData name="Tristan Plasse" userId="13c698b9-43c4-4271-b359-faaadca0774b" providerId="ADAL" clId="{FE460185-D4AE-4375-BA71-CD1D7F2341F0}" dt="2026-04-15T20:10:54.116" v="49" actId="478"/>
-          <ac:spMkLst>
-            <pc:docMk/>
-            <pc:sldMk cId="3055694646" sldId="256"/>
-            <ac:spMk id="3" creationId="{D5825A9E-4B50-0AAC-F66B-40BEDCEF7DB7}"/>
-          </ac:spMkLst>
-        </pc:spChg>
-        <pc:spChg chg="add del mod">
-          <ac:chgData name="Tristan Plasse" userId="13c698b9-43c4-4271-b359-faaadca0774b" providerId="ADAL" clId="{FE460185-D4AE-4375-BA71-CD1D7F2341F0}" dt="2026-04-15T20:10:51.517" v="48" actId="478"/>
-          <ac:spMkLst>
-            <pc:docMk/>
-            <pc:sldMk cId="3055694646" sldId="256"/>
-            <ac:spMk id="5" creationId="{305E91D6-0A44-DBAE-EB09-7D0D20D592DC}"/>
-          </ac:spMkLst>
-        </pc:spChg>
         <pc:spChg chg="add mod">
           <ac:chgData name="Tristan Plasse" userId="13c698b9-43c4-4271-b359-faaadca0774b" providerId="ADAL" clId="{FE460185-D4AE-4375-BA71-CD1D7F2341F0}" dt="2026-04-15T20:11:43.034" v="71" actId="1076"/>
           <ac:spMkLst>
             <pc:docMk/>
             <pc:sldMk cId="3055694646" sldId="256"/>
             <ac:spMk id="6" creationId="{600198B9-2037-B1E5-2DF2-16A96F60CC76}"/>
-          </ac:spMkLst>
-        </pc:spChg>
-        <pc:spChg chg="add del">
-          <ac:chgData name="Tristan Plasse" userId="13c698b9-43c4-4271-b359-faaadca0774b" providerId="ADAL" clId="{FE460185-D4AE-4375-BA71-CD1D7F2341F0}" dt="2026-04-15T20:11:02.110" v="50" actId="26606"/>
-          <ac:spMkLst>
-            <pc:docMk/>
-            <pc:sldMk cId="3055694646" sldId="256"/>
-            <ac:spMk id="1031" creationId="{D4995BF0-8E87-4ECF-904C-D047955C15CE}"/>
           </ac:spMkLst>
         </pc:spChg>
         <pc:spChg chg="add">
@@ -232,14 +216,6 @@
             <pc:docMk/>
             <pc:sldMk cId="1391683424" sldId="257"/>
             <ac:spMk id="2" creationId="{3966A9B0-B00E-6660-A54E-CFEC48403854}"/>
-          </ac:spMkLst>
-        </pc:spChg>
-        <pc:spChg chg="del">
-          <ac:chgData name="Tristan Plasse" userId="13c698b9-43c4-4271-b359-faaadca0774b" providerId="ADAL" clId="{FE460185-D4AE-4375-BA71-CD1D7F2341F0}" dt="2026-04-15T20:15:01.467" v="104" actId="478"/>
-          <ac:spMkLst>
-            <pc:docMk/>
-            <pc:sldMk cId="1391683424" sldId="257"/>
-            <ac:spMk id="3" creationId="{4F263C79-35EC-4077-2697-18199ECA804D}"/>
           </ac:spMkLst>
         </pc:spChg>
         <pc:spChg chg="add mod">
@@ -344,22 +320,6 @@
             <ac:spMk id="3" creationId="{7BB24C08-EB63-95EB-768C-99638678B5F8}"/>
           </ac:spMkLst>
         </pc:spChg>
-        <pc:spChg chg="add del">
-          <ac:chgData name="Tristan Plasse" userId="13c698b9-43c4-4271-b359-faaadca0774b" providerId="ADAL" clId="{FE460185-D4AE-4375-BA71-CD1D7F2341F0}" dt="2026-04-15T21:43:10.126" v="527" actId="26606"/>
-          <ac:spMkLst>
-            <pc:docMk/>
-            <pc:sldMk cId="2325527580" sldId="259"/>
-            <ac:spMk id="10" creationId="{E49D7415-2F11-44C2-B6AA-13A25B6814B9}"/>
-          </ac:spMkLst>
-        </pc:spChg>
-        <pc:picChg chg="add del mod modCrop">
-          <ac:chgData name="Tristan Plasse" userId="13c698b9-43c4-4271-b359-faaadca0774b" providerId="ADAL" clId="{FE460185-D4AE-4375-BA71-CD1D7F2341F0}" dt="2026-04-15T21:43:48.833" v="531" actId="478"/>
-          <ac:picMkLst>
-            <pc:docMk/>
-            <pc:sldMk cId="2325527580" sldId="259"/>
-            <ac:picMk id="5" creationId="{F5B68427-0CE3-23BE-4CF6-4CD44846B64E}"/>
-          </ac:picMkLst>
-        </pc:picChg>
         <pc:picChg chg="add mod modCrop">
           <ac:chgData name="Tristan Plasse" userId="13c698b9-43c4-4271-b359-faaadca0774b" providerId="ADAL" clId="{FE460185-D4AE-4375-BA71-CD1D7F2341F0}" dt="2026-04-15T21:44:19.349" v="540" actId="1076"/>
           <ac:picMkLst>
@@ -368,22 +328,6 @@
             <ac:picMk id="7" creationId="{AF1EF429-633A-7988-D1D5-91EBC3583ADA}"/>
           </ac:picMkLst>
         </pc:picChg>
-        <pc:cxnChg chg="add del">
-          <ac:chgData name="Tristan Plasse" userId="13c698b9-43c4-4271-b359-faaadca0774b" providerId="ADAL" clId="{FE460185-D4AE-4375-BA71-CD1D7F2341F0}" dt="2026-04-15T21:43:10.126" v="527" actId="26606"/>
-          <ac:cxnSpMkLst>
-            <pc:docMk/>
-            <pc:sldMk cId="2325527580" sldId="259"/>
-            <ac:cxnSpMk id="12" creationId="{BCE733BF-B95F-4869-AB8F-D90C6F595769}"/>
-          </ac:cxnSpMkLst>
-        </pc:cxnChg>
-        <pc:cxnChg chg="add del">
-          <ac:chgData name="Tristan Plasse" userId="13c698b9-43c4-4271-b359-faaadca0774b" providerId="ADAL" clId="{FE460185-D4AE-4375-BA71-CD1D7F2341F0}" dt="2026-04-15T21:43:10.126" v="527" actId="26606"/>
-          <ac:cxnSpMkLst>
-            <pc:docMk/>
-            <pc:sldMk cId="2325527580" sldId="259"/>
-            <ac:cxnSpMk id="14" creationId="{8D1166D6-1A36-41B0-8A82-37761E6F3DF9}"/>
-          </ac:cxnSpMkLst>
-        </pc:cxnChg>
       </pc:sldChg>
       <pc:sldChg chg="addSp modSp new mod">
         <pc:chgData name="Tristan Plasse" userId="13c698b9-43c4-4271-b359-faaadca0774b" providerId="ADAL" clId="{FE460185-D4AE-4375-BA71-CD1D7F2341F0}" dt="2026-04-15T21:49:40.774" v="708" actId="1076"/>
@@ -461,14 +405,6 @@
             <ac:spMk id="2" creationId="{F6B467CA-0C42-6E0A-98D0-B6F643A87434}"/>
           </ac:spMkLst>
         </pc:spChg>
-        <pc:spChg chg="del">
-          <ac:chgData name="Tristan Plasse" userId="13c698b9-43c4-4271-b359-faaadca0774b" providerId="ADAL" clId="{FE460185-D4AE-4375-BA71-CD1D7F2341F0}" dt="2026-04-15T23:10:03.586" v="897" actId="478"/>
-          <ac:spMkLst>
-            <pc:docMk/>
-            <pc:sldMk cId="1893348209" sldId="262"/>
-            <ac:spMk id="3" creationId="{C932A9B9-82DF-3926-3109-1054CAE029A8}"/>
-          </ac:spMkLst>
-        </pc:spChg>
         <pc:spChg chg="add">
           <ac:chgData name="Tristan Plasse" userId="13c698b9-43c4-4271-b359-faaadca0774b" providerId="ADAL" clId="{FE460185-D4AE-4375-BA71-CD1D7F2341F0}" dt="2026-04-15T23:11:02.708" v="973" actId="26606"/>
           <ac:spMkLst>
@@ -516,22 +452,6 @@
             <ac:spMk id="2" creationId="{0A9A72B5-C255-D953-264E-8350AB3C15D2}"/>
           </ac:spMkLst>
         </pc:spChg>
-        <pc:spChg chg="add del mod">
-          <ac:chgData name="Tristan Plasse" userId="13c698b9-43c4-4271-b359-faaadca0774b" providerId="ADAL" clId="{FE460185-D4AE-4375-BA71-CD1D7F2341F0}" dt="2026-04-15T23:32:55.314" v="1202" actId="26606"/>
-          <ac:spMkLst>
-            <pc:docMk/>
-            <pc:sldMk cId="853938190" sldId="263"/>
-            <ac:spMk id="3" creationId="{E06B7521-C1EE-363D-868F-6BFC00341DCD}"/>
-          </ac:spMkLst>
-        </pc:spChg>
-        <pc:spChg chg="add del">
-          <ac:chgData name="Tristan Plasse" userId="13c698b9-43c4-4271-b359-faaadca0774b" providerId="ADAL" clId="{FE460185-D4AE-4375-BA71-CD1D7F2341F0}" dt="2026-04-15T23:32:55.287" v="1201" actId="26606"/>
-          <ac:spMkLst>
-            <pc:docMk/>
-            <pc:sldMk cId="853938190" sldId="263"/>
-            <ac:spMk id="9" creationId="{F68B2C62-7648-4430-90D5-AE0F252AF113}"/>
-          </ac:spMkLst>
-        </pc:spChg>
         <pc:spChg chg="add">
           <ac:chgData name="Tristan Plasse" userId="13c698b9-43c4-4271-b359-faaadca0774b" providerId="ADAL" clId="{FE460185-D4AE-4375-BA71-CD1D7F2341F0}" dt="2026-04-15T23:32:55.314" v="1202" actId="26606"/>
           <ac:spMkLst>
@@ -540,14 +460,6 @@
             <ac:spMk id="15" creationId="{F68B2C62-7648-4430-90D5-AE0F252AF113}"/>
           </ac:spMkLst>
         </pc:spChg>
-        <pc:graphicFrameChg chg="add del">
-          <ac:chgData name="Tristan Plasse" userId="13c698b9-43c4-4271-b359-faaadca0774b" providerId="ADAL" clId="{FE460185-D4AE-4375-BA71-CD1D7F2341F0}" dt="2026-04-15T23:32:55.287" v="1201" actId="26606"/>
-          <ac:graphicFrameMkLst>
-            <pc:docMk/>
-            <pc:sldMk cId="853938190" sldId="263"/>
-            <ac:graphicFrameMk id="5" creationId="{ECA3F23A-78C9-8618-71D1-AE5B228C8715}"/>
-          </ac:graphicFrameMkLst>
-        </pc:graphicFrameChg>
         <pc:graphicFrameChg chg="add">
           <ac:chgData name="Tristan Plasse" userId="13c698b9-43c4-4271-b359-faaadca0774b" providerId="ADAL" clId="{FE460185-D4AE-4375-BA71-CD1D7F2341F0}" dt="2026-04-15T23:32:55.314" v="1202" actId="26606"/>
           <ac:graphicFrameMkLst>
@@ -556,22 +468,6 @@
             <ac:graphicFrameMk id="18" creationId="{9D7866D5-6B49-9FA4-11A1-2FCBB87311CC}"/>
           </ac:graphicFrameMkLst>
         </pc:graphicFrameChg>
-        <pc:cxnChg chg="add del">
-          <ac:chgData name="Tristan Plasse" userId="13c698b9-43c4-4271-b359-faaadca0774b" providerId="ADAL" clId="{FE460185-D4AE-4375-BA71-CD1D7F2341F0}" dt="2026-04-15T23:32:55.287" v="1201" actId="26606"/>
-          <ac:cxnSpMkLst>
-            <pc:docMk/>
-            <pc:sldMk cId="853938190" sldId="263"/>
-            <ac:cxnSpMk id="11" creationId="{AAD0195E-7F27-4D06-9427-0C121D721A14}"/>
-          </ac:cxnSpMkLst>
-        </pc:cxnChg>
-        <pc:cxnChg chg="add del">
-          <ac:chgData name="Tristan Plasse" userId="13c698b9-43c4-4271-b359-faaadca0774b" providerId="ADAL" clId="{FE460185-D4AE-4375-BA71-CD1D7F2341F0}" dt="2026-04-15T23:32:55.287" v="1201" actId="26606"/>
-          <ac:cxnSpMkLst>
-            <pc:docMk/>
-            <pc:sldMk cId="853938190" sldId="263"/>
-            <ac:cxnSpMk id="13" creationId="{9D74C2FC-3228-4FC1-B97B-87AD35508D91}"/>
-          </ac:cxnSpMkLst>
-        </pc:cxnChg>
         <pc:cxnChg chg="add">
           <ac:chgData name="Tristan Plasse" userId="13c698b9-43c4-4271-b359-faaadca0774b" providerId="ADAL" clId="{FE460185-D4AE-4375-BA71-CD1D7F2341F0}" dt="2026-04-15T23:32:55.314" v="1202" actId="26606"/>
           <ac:cxnSpMkLst>
@@ -1027,12 +923,68 @@
           </ac:cxnSpMkLst>
         </pc:cxnChg>
       </pc:sldChg>
-      <pc:sldChg chg="new">
-        <pc:chgData name="Tristan Plasse" userId="13c698b9-43c4-4271-b359-faaadca0774b" providerId="ADAL" clId="{FE460185-D4AE-4375-BA71-CD1D7F2341F0}" dt="2026-04-16T02:42:48.314" v="4109" actId="680"/>
+      <pc:sldChg chg="addSp delSp modSp new mod">
+        <pc:chgData name="Tristan Plasse" userId="13c698b9-43c4-4271-b359-faaadca0774b" providerId="ADAL" clId="{FE460185-D4AE-4375-BA71-CD1D7F2341F0}" dt="2026-04-17T01:04:48.253" v="4499" actId="14100"/>
         <pc:sldMkLst>
           <pc:docMk/>
           <pc:sldMk cId="3744480376" sldId="273"/>
         </pc:sldMkLst>
+        <pc:spChg chg="mod">
+          <ac:chgData name="Tristan Plasse" userId="13c698b9-43c4-4271-b359-faaadca0774b" providerId="ADAL" clId="{FE460185-D4AE-4375-BA71-CD1D7F2341F0}" dt="2026-04-17T00:44:40.484" v="4141" actId="20577"/>
+          <ac:spMkLst>
+            <pc:docMk/>
+            <pc:sldMk cId="3744480376" sldId="273"/>
+            <ac:spMk id="2" creationId="{0EC2D6A5-520A-776E-E0CF-3651506DA145}"/>
+          </ac:spMkLst>
+        </pc:spChg>
+        <pc:spChg chg="mod">
+          <ac:chgData name="Tristan Plasse" userId="13c698b9-43c4-4271-b359-faaadca0774b" providerId="ADAL" clId="{FE460185-D4AE-4375-BA71-CD1D7F2341F0}" dt="2026-04-17T01:03:16.916" v="4483" actId="2710"/>
+          <ac:spMkLst>
+            <pc:docMk/>
+            <pc:sldMk cId="3744480376" sldId="273"/>
+            <ac:spMk id="3" creationId="{38AAA12E-716D-5899-9938-9C062F7A14B4}"/>
+          </ac:spMkLst>
+        </pc:spChg>
+        <pc:spChg chg="add del mod">
+          <ac:chgData name="Tristan Plasse" userId="13c698b9-43c4-4271-b359-faaadca0774b" providerId="ADAL" clId="{FE460185-D4AE-4375-BA71-CD1D7F2341F0}" dt="2026-04-17T01:04:08.852" v="4491" actId="11529"/>
+          <ac:spMkLst>
+            <pc:docMk/>
+            <pc:sldMk cId="3744480376" sldId="273"/>
+            <ac:spMk id="10" creationId="{D0CF86B7-C7F6-1143-ED5A-D2A3BC154518}"/>
+          </ac:spMkLst>
+        </pc:spChg>
+        <pc:spChg chg="add mod">
+          <ac:chgData name="Tristan Plasse" userId="13c698b9-43c4-4271-b359-faaadca0774b" providerId="ADAL" clId="{FE460185-D4AE-4375-BA71-CD1D7F2341F0}" dt="2026-04-17T01:04:48.253" v="4499" actId="14100"/>
+          <ac:spMkLst>
+            <pc:docMk/>
+            <pc:sldMk cId="3744480376" sldId="273"/>
+            <ac:spMk id="11" creationId="{7548656C-186D-3220-0CDB-0A482B5D9824}"/>
+          </ac:spMkLst>
+        </pc:spChg>
+        <pc:picChg chg="add mod">
+          <ac:chgData name="Tristan Plasse" userId="13c698b9-43c4-4271-b359-faaadca0774b" providerId="ADAL" clId="{FE460185-D4AE-4375-BA71-CD1D7F2341F0}" dt="2026-04-17T01:03:20.603" v="4484" actId="1076"/>
+          <ac:picMkLst>
+            <pc:docMk/>
+            <pc:sldMk cId="3744480376" sldId="273"/>
+            <ac:picMk id="5" creationId="{9685D4F2-40A3-6B20-7AD7-ACCE12A4A00F}"/>
+          </ac:picMkLst>
+        </pc:picChg>
+        <pc:picChg chg="add mod">
+          <ac:chgData name="Tristan Plasse" userId="13c698b9-43c4-4271-b359-faaadca0774b" providerId="ADAL" clId="{FE460185-D4AE-4375-BA71-CD1D7F2341F0}" dt="2026-04-17T01:03:23.337" v="4485" actId="1076"/>
+          <ac:picMkLst>
+            <pc:docMk/>
+            <pc:sldMk cId="3744480376" sldId="273"/>
+            <ac:picMk id="7" creationId="{BB415FDE-9E57-650D-4644-A3CC764FDA45}"/>
+          </ac:picMkLst>
+        </pc:picChg>
+        <pc:cxnChg chg="add del mod">
+          <ac:chgData name="Tristan Plasse" userId="13c698b9-43c4-4271-b359-faaadca0774b" providerId="ADAL" clId="{FE460185-D4AE-4375-BA71-CD1D7F2341F0}" dt="2026-04-17T01:03:45.869" v="4487" actId="478"/>
+          <ac:cxnSpMkLst>
+            <pc:docMk/>
+            <pc:sldMk cId="3744480376" sldId="273"/>
+            <ac:cxnSpMk id="9" creationId="{8BE37D1B-F31A-9D61-8C1D-4BC41C8E9CAF}"/>
+          </ac:cxnSpMkLst>
+        </pc:cxnChg>
       </pc:sldChg>
       <pc:sldChg chg="addSp delSp modSp new mod setBg">
         <pc:chgData name="Tristan Plasse" userId="13c698b9-43c4-4271-b359-faaadca0774b" providerId="ADAL" clId="{FE460185-D4AE-4375-BA71-CD1D7F2341F0}" dt="2026-04-16T22:11:55.941" v="4134" actId="26606"/>
@@ -1129,101 +1081,374 @@
           </ac:cxnSpMkLst>
         </pc:cxnChg>
       </pc:sldChg>
-      <pc:sldMasterChg chg="del delSldLayout">
-        <pc:chgData name="Tristan Plasse" userId="13c698b9-43c4-4271-b359-faaadca0774b" providerId="ADAL" clId="{FE460185-D4AE-4375-BA71-CD1D7F2341F0}" dt="2026-04-15T20:11:02.110" v="50" actId="26606"/>
-        <pc:sldMasterMkLst>
+      <pc:sldChg chg="addSp modSp new mod">
+        <pc:chgData name="Tristan Plasse" userId="13c698b9-43c4-4271-b359-faaadca0774b" providerId="ADAL" clId="{FE460185-D4AE-4375-BA71-CD1D7F2341F0}" dt="2026-04-17T01:03:11.754" v="4482" actId="2710"/>
+        <pc:sldMkLst>
           <pc:docMk/>
-          <pc:sldMasterMk cId="1832935048" sldId="2147483677"/>
-        </pc:sldMasterMkLst>
-        <pc:sldLayoutChg chg="del">
-          <pc:chgData name="Tristan Plasse" userId="13c698b9-43c4-4271-b359-faaadca0774b" providerId="ADAL" clId="{FE460185-D4AE-4375-BA71-CD1D7F2341F0}" dt="2026-04-15T20:11:02.110" v="50" actId="26606"/>
-          <pc:sldLayoutMkLst>
+          <pc:sldMk cId="3710197240" sldId="275"/>
+        </pc:sldMkLst>
+        <pc:spChg chg="mod">
+          <ac:chgData name="Tristan Plasse" userId="13c698b9-43c4-4271-b359-faaadca0774b" providerId="ADAL" clId="{FE460185-D4AE-4375-BA71-CD1D7F2341F0}" dt="2026-04-17T00:59:10.373" v="4380" actId="20577"/>
+          <ac:spMkLst>
             <pc:docMk/>
-            <pc:sldMasterMk cId="1832935048" sldId="2147483677"/>
-            <pc:sldLayoutMk cId="1829042309" sldId="2147483678"/>
-          </pc:sldLayoutMkLst>
-        </pc:sldLayoutChg>
-        <pc:sldLayoutChg chg="del">
-          <pc:chgData name="Tristan Plasse" userId="13c698b9-43c4-4271-b359-faaadca0774b" providerId="ADAL" clId="{FE460185-D4AE-4375-BA71-CD1D7F2341F0}" dt="2026-04-15T20:11:02.110" v="50" actId="26606"/>
-          <pc:sldLayoutMkLst>
+            <pc:sldMk cId="3710197240" sldId="275"/>
+            <ac:spMk id="2" creationId="{A4F1E310-7C7B-1E3D-DBA7-78328792D625}"/>
+          </ac:spMkLst>
+        </pc:spChg>
+        <pc:spChg chg="mod">
+          <ac:chgData name="Tristan Plasse" userId="13c698b9-43c4-4271-b359-faaadca0774b" providerId="ADAL" clId="{FE460185-D4AE-4375-BA71-CD1D7F2341F0}" dt="2026-04-17T01:03:11.754" v="4482" actId="2710"/>
+          <ac:spMkLst>
             <pc:docMk/>
-            <pc:sldMasterMk cId="1832935048" sldId="2147483677"/>
-            <pc:sldLayoutMk cId="2849272018" sldId="2147483679"/>
-          </pc:sldLayoutMkLst>
-        </pc:sldLayoutChg>
-        <pc:sldLayoutChg chg="del">
-          <pc:chgData name="Tristan Plasse" userId="13c698b9-43c4-4271-b359-faaadca0774b" providerId="ADAL" clId="{FE460185-D4AE-4375-BA71-CD1D7F2341F0}" dt="2026-04-15T20:11:02.110" v="50" actId="26606"/>
-          <pc:sldLayoutMkLst>
+            <pc:sldMk cId="3710197240" sldId="275"/>
+            <ac:spMk id="3" creationId="{EE1A390D-8519-2554-2768-18698B2C10FF}"/>
+          </ac:spMkLst>
+        </pc:spChg>
+        <pc:spChg chg="add mod">
+          <ac:chgData name="Tristan Plasse" userId="13c698b9-43c4-4271-b359-faaadca0774b" providerId="ADAL" clId="{FE460185-D4AE-4375-BA71-CD1D7F2341F0}" dt="2026-04-17T01:02:47.762" v="4481" actId="164"/>
+          <ac:spMkLst>
             <pc:docMk/>
-            <pc:sldMasterMk cId="1832935048" sldId="2147483677"/>
-            <pc:sldLayoutMk cId="2581990246" sldId="2147483680"/>
-          </pc:sldLayoutMkLst>
-        </pc:sldLayoutChg>
-        <pc:sldLayoutChg chg="del">
-          <pc:chgData name="Tristan Plasse" userId="13c698b9-43c4-4271-b359-faaadca0774b" providerId="ADAL" clId="{FE460185-D4AE-4375-BA71-CD1D7F2341F0}" dt="2026-04-15T20:11:02.110" v="50" actId="26606"/>
-          <pc:sldLayoutMkLst>
+            <pc:sldMk cId="3710197240" sldId="275"/>
+            <ac:spMk id="4" creationId="{769DBEF4-FBE0-6D7D-A4A1-31856EB49A5B}"/>
+          </ac:spMkLst>
+        </pc:spChg>
+        <pc:spChg chg="add mod">
+          <ac:chgData name="Tristan Plasse" userId="13c698b9-43c4-4271-b359-faaadca0774b" providerId="ADAL" clId="{FE460185-D4AE-4375-BA71-CD1D7F2341F0}" dt="2026-04-17T01:02:47.762" v="4481" actId="164"/>
+          <ac:spMkLst>
             <pc:docMk/>
-            <pc:sldMasterMk cId="1832935048" sldId="2147483677"/>
-            <pc:sldLayoutMk cId="3724230670" sldId="2147483681"/>
-          </pc:sldLayoutMkLst>
-        </pc:sldLayoutChg>
-        <pc:sldLayoutChg chg="del">
-          <pc:chgData name="Tristan Plasse" userId="13c698b9-43c4-4271-b359-faaadca0774b" providerId="ADAL" clId="{FE460185-D4AE-4375-BA71-CD1D7F2341F0}" dt="2026-04-15T20:11:02.110" v="50" actId="26606"/>
-          <pc:sldLayoutMkLst>
+            <pc:sldMk cId="3710197240" sldId="275"/>
+            <ac:spMk id="5" creationId="{584A445A-35A4-5CCD-3E0F-1132280B6EBE}"/>
+          </ac:spMkLst>
+        </pc:spChg>
+        <pc:spChg chg="add mod">
+          <ac:chgData name="Tristan Plasse" userId="13c698b9-43c4-4271-b359-faaadca0774b" providerId="ADAL" clId="{FE460185-D4AE-4375-BA71-CD1D7F2341F0}" dt="2026-04-17T01:02:47.762" v="4481" actId="164"/>
+          <ac:spMkLst>
             <pc:docMk/>
-            <pc:sldMasterMk cId="1832935048" sldId="2147483677"/>
-            <pc:sldLayoutMk cId="864735350" sldId="2147483682"/>
-          </pc:sldLayoutMkLst>
-        </pc:sldLayoutChg>
-        <pc:sldLayoutChg chg="del">
-          <pc:chgData name="Tristan Plasse" userId="13c698b9-43c4-4271-b359-faaadca0774b" providerId="ADAL" clId="{FE460185-D4AE-4375-BA71-CD1D7F2341F0}" dt="2026-04-15T20:11:02.110" v="50" actId="26606"/>
-          <pc:sldLayoutMkLst>
+            <pc:sldMk cId="3710197240" sldId="275"/>
+            <ac:spMk id="6" creationId="{88AA4DF5-8C2D-2045-0ED6-5A771E6D2A10}"/>
+          </ac:spMkLst>
+        </pc:spChg>
+        <pc:grpChg chg="add mod">
+          <ac:chgData name="Tristan Plasse" userId="13c698b9-43c4-4271-b359-faaadca0774b" providerId="ADAL" clId="{FE460185-D4AE-4375-BA71-CD1D7F2341F0}" dt="2026-04-17T01:02:47.762" v="4481" actId="164"/>
+          <ac:grpSpMkLst>
             <pc:docMk/>
-            <pc:sldMasterMk cId="1832935048" sldId="2147483677"/>
-            <pc:sldLayoutMk cId="983675851" sldId="2147483683"/>
-          </pc:sldLayoutMkLst>
-        </pc:sldLayoutChg>
-        <pc:sldLayoutChg chg="del">
-          <pc:chgData name="Tristan Plasse" userId="13c698b9-43c4-4271-b359-faaadca0774b" providerId="ADAL" clId="{FE460185-D4AE-4375-BA71-CD1D7F2341F0}" dt="2026-04-15T20:11:02.110" v="50" actId="26606"/>
-          <pc:sldLayoutMkLst>
+            <pc:sldMk cId="3710197240" sldId="275"/>
+            <ac:grpSpMk id="7" creationId="{31604140-0BE4-E83C-1948-7A6E95F7AEB4}"/>
+          </ac:grpSpMkLst>
+        </pc:grpChg>
+      </pc:sldChg>
+      <pc:sldChg chg="modSp new mod">
+        <pc:chgData name="Tristan Plasse" userId="13c698b9-43c4-4271-b359-faaadca0774b" providerId="ADAL" clId="{FE460185-D4AE-4375-BA71-CD1D7F2341F0}" dt="2026-04-17T01:14:19.003" v="4704" actId="20577"/>
+        <pc:sldMkLst>
+          <pc:docMk/>
+          <pc:sldMk cId="1164678962" sldId="276"/>
+        </pc:sldMkLst>
+        <pc:spChg chg="mod">
+          <ac:chgData name="Tristan Plasse" userId="13c698b9-43c4-4271-b359-faaadca0774b" providerId="ADAL" clId="{FE460185-D4AE-4375-BA71-CD1D7F2341F0}" dt="2026-04-17T01:14:04.552" v="4699" actId="20577"/>
+          <ac:spMkLst>
             <pc:docMk/>
-            <pc:sldMasterMk cId="1832935048" sldId="2147483677"/>
-            <pc:sldLayoutMk cId="3855770320" sldId="2147483684"/>
-          </pc:sldLayoutMkLst>
-        </pc:sldLayoutChg>
-        <pc:sldLayoutChg chg="del">
-          <pc:chgData name="Tristan Plasse" userId="13c698b9-43c4-4271-b359-faaadca0774b" providerId="ADAL" clId="{FE460185-D4AE-4375-BA71-CD1D7F2341F0}" dt="2026-04-15T20:11:02.110" v="50" actId="26606"/>
-          <pc:sldLayoutMkLst>
+            <pc:sldMk cId="1164678962" sldId="276"/>
+            <ac:spMk id="2" creationId="{DE69A1AE-572E-D5B4-03BD-F325D0A3E202}"/>
+          </ac:spMkLst>
+        </pc:spChg>
+        <pc:spChg chg="mod">
+          <ac:chgData name="Tristan Plasse" userId="13c698b9-43c4-4271-b359-faaadca0774b" providerId="ADAL" clId="{FE460185-D4AE-4375-BA71-CD1D7F2341F0}" dt="2026-04-17T01:14:19.003" v="4704" actId="20577"/>
+          <ac:spMkLst>
             <pc:docMk/>
-            <pc:sldMasterMk cId="1832935048" sldId="2147483677"/>
-            <pc:sldLayoutMk cId="1453757617" sldId="2147483685"/>
-          </pc:sldLayoutMkLst>
-        </pc:sldLayoutChg>
-        <pc:sldLayoutChg chg="del">
-          <pc:chgData name="Tristan Plasse" userId="13c698b9-43c4-4271-b359-faaadca0774b" providerId="ADAL" clId="{FE460185-D4AE-4375-BA71-CD1D7F2341F0}" dt="2026-04-15T20:11:02.110" v="50" actId="26606"/>
-          <pc:sldLayoutMkLst>
+            <pc:sldMk cId="1164678962" sldId="276"/>
+            <ac:spMk id="3" creationId="{FC01AAB4-81AB-D42D-04AB-96781CB6AC94}"/>
+          </ac:spMkLst>
+        </pc:spChg>
+      </pc:sldChg>
+      <pc:sldChg chg="addSp delSp modSp new mod setBg">
+        <pc:chgData name="Tristan Plasse" userId="13c698b9-43c4-4271-b359-faaadca0774b" providerId="ADAL" clId="{FE460185-D4AE-4375-BA71-CD1D7F2341F0}" dt="2026-04-17T01:25:57.368" v="4728" actId="21"/>
+        <pc:sldMkLst>
+          <pc:docMk/>
+          <pc:sldMk cId="1439899674" sldId="277"/>
+        </pc:sldMkLst>
+        <pc:spChg chg="mod">
+          <ac:chgData name="Tristan Plasse" userId="13c698b9-43c4-4271-b359-faaadca0774b" providerId="ADAL" clId="{FE460185-D4AE-4375-BA71-CD1D7F2341F0}" dt="2026-04-17T01:22:58.783" v="4718" actId="26606"/>
+          <ac:spMkLst>
             <pc:docMk/>
-            <pc:sldMasterMk cId="1832935048" sldId="2147483677"/>
-            <pc:sldLayoutMk cId="4093955479" sldId="2147483686"/>
-          </pc:sldLayoutMkLst>
-        </pc:sldLayoutChg>
-        <pc:sldLayoutChg chg="del">
-          <pc:chgData name="Tristan Plasse" userId="13c698b9-43c4-4271-b359-faaadca0774b" providerId="ADAL" clId="{FE460185-D4AE-4375-BA71-CD1D7F2341F0}" dt="2026-04-15T20:11:02.110" v="50" actId="26606"/>
-          <pc:sldLayoutMkLst>
+            <pc:sldMk cId="1439899674" sldId="277"/>
+            <ac:spMk id="2" creationId="{94F7A99C-0ACF-5557-9578-B80FE0D75B77}"/>
+          </ac:spMkLst>
+        </pc:spChg>
+        <pc:spChg chg="del">
+          <ac:chgData name="Tristan Plasse" userId="13c698b9-43c4-4271-b359-faaadca0774b" providerId="ADAL" clId="{FE460185-D4AE-4375-BA71-CD1D7F2341F0}" dt="2026-04-17T01:22:54.237" v="4716"/>
+          <ac:spMkLst>
             <pc:docMk/>
-            <pc:sldMasterMk cId="1832935048" sldId="2147483677"/>
-            <pc:sldLayoutMk cId="3995575664" sldId="2147483687"/>
-          </pc:sldLayoutMkLst>
-        </pc:sldLayoutChg>
-        <pc:sldLayoutChg chg="del">
-          <pc:chgData name="Tristan Plasse" userId="13c698b9-43c4-4271-b359-faaadca0774b" providerId="ADAL" clId="{FE460185-D4AE-4375-BA71-CD1D7F2341F0}" dt="2026-04-15T20:11:02.110" v="50" actId="26606"/>
-          <pc:sldLayoutMkLst>
+            <pc:sldMk cId="1439899674" sldId="277"/>
+            <ac:spMk id="3" creationId="{F279EAF3-2A2A-BB55-CBFF-6FE1F581B414}"/>
+          </ac:spMkLst>
+        </pc:spChg>
+        <pc:spChg chg="add">
+          <ac:chgData name="Tristan Plasse" userId="13c698b9-43c4-4271-b359-faaadca0774b" providerId="ADAL" clId="{FE460185-D4AE-4375-BA71-CD1D7F2341F0}" dt="2026-04-17T01:22:58.783" v="4718" actId="26606"/>
+          <ac:spMkLst>
             <pc:docMk/>
-            <pc:sldMasterMk cId="1832935048" sldId="2147483677"/>
-            <pc:sldLayoutMk cId="3371583209" sldId="2147483688"/>
-          </pc:sldLayoutMkLst>
-        </pc:sldLayoutChg>
-      </pc:sldMasterChg>
+            <pc:sldMk cId="1439899674" sldId="277"/>
+            <ac:spMk id="14" creationId="{33E93247-6229-44AB-A550-739E971E690B}"/>
+          </ac:spMkLst>
+        </pc:spChg>
+        <pc:picChg chg="add mod ord">
+          <ac:chgData name="Tristan Plasse" userId="13c698b9-43c4-4271-b359-faaadca0774b" providerId="ADAL" clId="{FE460185-D4AE-4375-BA71-CD1D7F2341F0}" dt="2026-04-17T01:22:58.783" v="4718" actId="26606"/>
+          <ac:picMkLst>
+            <pc:docMk/>
+            <pc:sldMk cId="1439899674" sldId="277"/>
+            <ac:picMk id="5" creationId="{DEB15709-306B-BF61-202F-0B24322B33AC}"/>
+          </ac:picMkLst>
+        </pc:picChg>
+        <pc:picChg chg="add del mod">
+          <ac:chgData name="Tristan Plasse" userId="13c698b9-43c4-4271-b359-faaadca0774b" providerId="ADAL" clId="{FE460185-D4AE-4375-BA71-CD1D7F2341F0}" dt="2026-04-17T01:23:54.536" v="4721" actId="478"/>
+          <ac:picMkLst>
+            <pc:docMk/>
+            <pc:sldMk cId="1439899674" sldId="277"/>
+            <ac:picMk id="7" creationId="{93FC3CF0-AD0C-8D8A-5F13-561363CD0342}"/>
+          </ac:picMkLst>
+        </pc:picChg>
+        <pc:picChg chg="add del mod">
+          <ac:chgData name="Tristan Plasse" userId="13c698b9-43c4-4271-b359-faaadca0774b" providerId="ADAL" clId="{FE460185-D4AE-4375-BA71-CD1D7F2341F0}" dt="2026-04-17T01:25:57.368" v="4728" actId="21"/>
+          <ac:picMkLst>
+            <pc:docMk/>
+            <pc:sldMk cId="1439899674" sldId="277"/>
+            <ac:picMk id="9" creationId="{CE99E6EA-6C50-A9AF-63F6-B30BF2E36593}"/>
+          </ac:picMkLst>
+        </pc:picChg>
+        <pc:cxnChg chg="add">
+          <ac:chgData name="Tristan Plasse" userId="13c698b9-43c4-4271-b359-faaadca0774b" providerId="ADAL" clId="{FE460185-D4AE-4375-BA71-CD1D7F2341F0}" dt="2026-04-17T01:22:58.783" v="4718" actId="26606"/>
+          <ac:cxnSpMkLst>
+            <pc:docMk/>
+            <pc:sldMk cId="1439899674" sldId="277"/>
+            <ac:cxnSpMk id="10" creationId="{F64F9B95-9045-48D2-B9F3-2927E98F54AA}"/>
+          </ac:cxnSpMkLst>
+        </pc:cxnChg>
+        <pc:cxnChg chg="add">
+          <ac:chgData name="Tristan Plasse" userId="13c698b9-43c4-4271-b359-faaadca0774b" providerId="ADAL" clId="{FE460185-D4AE-4375-BA71-CD1D7F2341F0}" dt="2026-04-17T01:22:58.783" v="4718" actId="26606"/>
+          <ac:cxnSpMkLst>
+            <pc:docMk/>
+            <pc:sldMk cId="1439899674" sldId="277"/>
+            <ac:cxnSpMk id="12" creationId="{085AA86F-6A4D-4BCB-A045-D992CDC2959B}"/>
+          </ac:cxnSpMkLst>
+        </pc:cxnChg>
+        <pc:cxnChg chg="add">
+          <ac:chgData name="Tristan Plasse" userId="13c698b9-43c4-4271-b359-faaadca0774b" providerId="ADAL" clId="{FE460185-D4AE-4375-BA71-CD1D7F2341F0}" dt="2026-04-17T01:22:58.783" v="4718" actId="26606"/>
+          <ac:cxnSpMkLst>
+            <pc:docMk/>
+            <pc:sldMk cId="1439899674" sldId="277"/>
+            <ac:cxnSpMk id="16" creationId="{EE2E603F-4A95-4FE8-BB06-211DFD75DBEF}"/>
+          </ac:cxnSpMkLst>
+        </pc:cxnChg>
+      </pc:sldChg>
+      <pc:sldChg chg="addSp delSp modSp new mod">
+        <pc:chgData name="Tristan Plasse" userId="13c698b9-43c4-4271-b359-faaadca0774b" providerId="ADAL" clId="{FE460185-D4AE-4375-BA71-CD1D7F2341F0}" dt="2026-04-17T01:26:19.250" v="4736" actId="1076"/>
+        <pc:sldMkLst>
+          <pc:docMk/>
+          <pc:sldMk cId="2449617363" sldId="278"/>
+        </pc:sldMkLst>
+        <pc:spChg chg="del">
+          <ac:chgData name="Tristan Plasse" userId="13c698b9-43c4-4271-b359-faaadca0774b" providerId="ADAL" clId="{FE460185-D4AE-4375-BA71-CD1D7F2341F0}" dt="2026-04-17T01:26:13.185" v="4734" actId="478"/>
+          <ac:spMkLst>
+            <pc:docMk/>
+            <pc:sldMk cId="2449617363" sldId="278"/>
+            <ac:spMk id="2" creationId="{E764F047-4C87-EFC0-5081-C3EBD8EDEF6C}"/>
+          </ac:spMkLst>
+        </pc:spChg>
+        <pc:spChg chg="del">
+          <ac:chgData name="Tristan Plasse" userId="13c698b9-43c4-4271-b359-faaadca0774b" providerId="ADAL" clId="{FE460185-D4AE-4375-BA71-CD1D7F2341F0}" dt="2026-04-17T01:25:53.221" v="4727"/>
+          <ac:spMkLst>
+            <pc:docMk/>
+            <pc:sldMk cId="2449617363" sldId="278"/>
+            <ac:spMk id="3" creationId="{D7FB8DB0-7535-272B-41AF-7265B7F3A2D1}"/>
+          </ac:spMkLst>
+        </pc:spChg>
+        <pc:picChg chg="add mod ord">
+          <ac:chgData name="Tristan Plasse" userId="13c698b9-43c4-4271-b359-faaadca0774b" providerId="ADAL" clId="{FE460185-D4AE-4375-BA71-CD1D7F2341F0}" dt="2026-04-17T01:26:19.250" v="4736" actId="1076"/>
+          <ac:picMkLst>
+            <pc:docMk/>
+            <pc:sldMk cId="2449617363" sldId="278"/>
+            <ac:picMk id="5" creationId="{2894EE87-C10F-C2AC-44DB-1A002CE45605}"/>
+          </ac:picMkLst>
+        </pc:picChg>
+      </pc:sldChg>
+      <pc:sldChg chg="addSp delSp modSp new mod">
+        <pc:chgData name="Tristan Plasse" userId="13c698b9-43c4-4271-b359-faaadca0774b" providerId="ADAL" clId="{FE460185-D4AE-4375-BA71-CD1D7F2341F0}" dt="2026-04-17T01:26:07.372" v="4733" actId="1076"/>
+        <pc:sldMkLst>
+          <pc:docMk/>
+          <pc:sldMk cId="422633496" sldId="279"/>
+        </pc:sldMkLst>
+        <pc:spChg chg="del">
+          <ac:chgData name="Tristan Plasse" userId="13c698b9-43c4-4271-b359-faaadca0774b" providerId="ADAL" clId="{FE460185-D4AE-4375-BA71-CD1D7F2341F0}" dt="2026-04-17T01:26:03.213" v="4730" actId="478"/>
+          <ac:spMkLst>
+            <pc:docMk/>
+            <pc:sldMk cId="422633496" sldId="279"/>
+            <ac:spMk id="2" creationId="{2FA227F2-D8A4-A7C2-5991-3DCDFD82DBCF}"/>
+          </ac:spMkLst>
+        </pc:spChg>
+        <pc:spChg chg="del">
+          <ac:chgData name="Tristan Plasse" userId="13c698b9-43c4-4271-b359-faaadca0774b" providerId="ADAL" clId="{FE460185-D4AE-4375-BA71-CD1D7F2341F0}" dt="2026-04-17T01:26:05.148" v="4731" actId="478"/>
+          <ac:spMkLst>
+            <pc:docMk/>
+            <pc:sldMk cId="422633496" sldId="279"/>
+            <ac:spMk id="3" creationId="{13AA5119-EF1F-9E55-8D24-F3DA2F70A6BD}"/>
+          </ac:spMkLst>
+        </pc:spChg>
+        <pc:picChg chg="add mod">
+          <ac:chgData name="Tristan Plasse" userId="13c698b9-43c4-4271-b359-faaadca0774b" providerId="ADAL" clId="{FE460185-D4AE-4375-BA71-CD1D7F2341F0}" dt="2026-04-17T01:26:07.372" v="4733" actId="1076"/>
+          <ac:picMkLst>
+            <pc:docMk/>
+            <pc:sldMk cId="422633496" sldId="279"/>
+            <ac:picMk id="9" creationId="{CE99E6EA-6C50-A9AF-63F6-B30BF2E36593}"/>
+          </ac:picMkLst>
+        </pc:picChg>
+      </pc:sldChg>
+      <pc:sldChg chg="modSp new mod">
+        <pc:chgData name="Tristan Plasse" userId="13c698b9-43c4-4271-b359-faaadca0774b" providerId="ADAL" clId="{FE460185-D4AE-4375-BA71-CD1D7F2341F0}" dt="2026-04-17T01:26:26.896" v="4747" actId="20577"/>
+        <pc:sldMkLst>
+          <pc:docMk/>
+          <pc:sldMk cId="901628721" sldId="280"/>
+        </pc:sldMkLst>
+        <pc:spChg chg="mod">
+          <ac:chgData name="Tristan Plasse" userId="13c698b9-43c4-4271-b359-faaadca0774b" providerId="ADAL" clId="{FE460185-D4AE-4375-BA71-CD1D7F2341F0}" dt="2026-04-17T01:26:26.896" v="4747" actId="20577"/>
+          <ac:spMkLst>
+            <pc:docMk/>
+            <pc:sldMk cId="901628721" sldId="280"/>
+            <ac:spMk id="2" creationId="{AFD15BD0-D23D-BCDB-DC4F-EC9E34FD8E77}"/>
+          </ac:spMkLst>
+        </pc:spChg>
+      </pc:sldChg>
+      <pc:sldChg chg="addSp modSp new mod setBg">
+        <pc:chgData name="Tristan Plasse" userId="13c698b9-43c4-4271-b359-faaadca0774b" providerId="ADAL" clId="{FE460185-D4AE-4375-BA71-CD1D7F2341F0}" dt="2026-04-17T01:29:55.712" v="5038" actId="14100"/>
+        <pc:sldMkLst>
+          <pc:docMk/>
+          <pc:sldMk cId="1209728823" sldId="281"/>
+        </pc:sldMkLst>
+        <pc:spChg chg="mod">
+          <ac:chgData name="Tristan Plasse" userId="13c698b9-43c4-4271-b359-faaadca0774b" providerId="ADAL" clId="{FE460185-D4AE-4375-BA71-CD1D7F2341F0}" dt="2026-04-17T01:29:12.692" v="5030" actId="26606"/>
+          <ac:spMkLst>
+            <pc:docMk/>
+            <pc:sldMk cId="1209728823" sldId="281"/>
+            <ac:spMk id="2" creationId="{A89A0B66-12A9-A560-B2C3-D5DE68D00757}"/>
+          </ac:spMkLst>
+        </pc:spChg>
+        <pc:spChg chg="mod ord">
+          <ac:chgData name="Tristan Plasse" userId="13c698b9-43c4-4271-b359-faaadca0774b" providerId="ADAL" clId="{FE460185-D4AE-4375-BA71-CD1D7F2341F0}" dt="2026-04-17T01:29:12.692" v="5030" actId="26606"/>
+          <ac:spMkLst>
+            <pc:docMk/>
+            <pc:sldMk cId="1209728823" sldId="281"/>
+            <ac:spMk id="3" creationId="{D5F08C3C-2B07-D167-483B-592FFD9479FB}"/>
+          </ac:spMkLst>
+        </pc:spChg>
+        <pc:spChg chg="add mod">
+          <ac:chgData name="Tristan Plasse" userId="13c698b9-43c4-4271-b359-faaadca0774b" providerId="ADAL" clId="{FE460185-D4AE-4375-BA71-CD1D7F2341F0}" dt="2026-04-17T01:29:55.712" v="5038" actId="14100"/>
+          <ac:spMkLst>
+            <pc:docMk/>
+            <pc:sldMk cId="1209728823" sldId="281"/>
+            <ac:spMk id="4" creationId="{4908DAB4-9378-641C-7822-F8FFCB3F9F8A}"/>
+          </ac:spMkLst>
+        </pc:spChg>
+        <pc:spChg chg="add">
+          <ac:chgData name="Tristan Plasse" userId="13c698b9-43c4-4271-b359-faaadca0774b" providerId="ADAL" clId="{FE460185-D4AE-4375-BA71-CD1D7F2341F0}" dt="2026-04-17T01:29:12.692" v="5030" actId="26606"/>
+          <ac:spMkLst>
+            <pc:docMk/>
+            <pc:sldMk cId="1209728823" sldId="281"/>
+            <ac:spMk id="2055" creationId="{E49D7415-2F11-44C2-B6AA-13A25B6814B9}"/>
+          </ac:spMkLst>
+        </pc:spChg>
+        <pc:picChg chg="add mod">
+          <ac:chgData name="Tristan Plasse" userId="13c698b9-43c4-4271-b359-faaadca0774b" providerId="ADAL" clId="{FE460185-D4AE-4375-BA71-CD1D7F2341F0}" dt="2026-04-17T01:29:21.933" v="5031" actId="18131"/>
+          <ac:picMkLst>
+            <pc:docMk/>
+            <pc:sldMk cId="1209728823" sldId="281"/>
+            <ac:picMk id="2050" creationId="{6E929EB8-0E77-8D30-C757-71AEE670B488}"/>
+          </ac:picMkLst>
+        </pc:picChg>
+        <pc:cxnChg chg="add">
+          <ac:chgData name="Tristan Plasse" userId="13c698b9-43c4-4271-b359-faaadca0774b" providerId="ADAL" clId="{FE460185-D4AE-4375-BA71-CD1D7F2341F0}" dt="2026-04-17T01:29:12.692" v="5030" actId="26606"/>
+          <ac:cxnSpMkLst>
+            <pc:docMk/>
+            <pc:sldMk cId="1209728823" sldId="281"/>
+            <ac:cxnSpMk id="2057" creationId="{8E0104E4-99BC-494F-8342-F250828E574F}"/>
+          </ac:cxnSpMkLst>
+        </pc:cxnChg>
+      </pc:sldChg>
+      <pc:sldChg chg="addSp delSp modSp new mod setBg setClrOvrMap">
+        <pc:chgData name="Tristan Plasse" userId="13c698b9-43c4-4271-b359-faaadca0774b" providerId="ADAL" clId="{FE460185-D4AE-4375-BA71-CD1D7F2341F0}" dt="2026-04-17T01:31:13.276" v="5059" actId="1076"/>
+        <pc:sldMkLst>
+          <pc:docMk/>
+          <pc:sldMk cId="784584029" sldId="282"/>
+        </pc:sldMkLst>
+        <pc:spChg chg="mod ord">
+          <ac:chgData name="Tristan Plasse" userId="13c698b9-43c4-4271-b359-faaadca0774b" providerId="ADAL" clId="{FE460185-D4AE-4375-BA71-CD1D7F2341F0}" dt="2026-04-17T01:30:36.101" v="5052" actId="26606"/>
+          <ac:spMkLst>
+            <pc:docMk/>
+            <pc:sldMk cId="784584029" sldId="282"/>
+            <ac:spMk id="2" creationId="{D1DA8DF0-027D-CBFA-F9E4-EA0F931579EF}"/>
+          </ac:spMkLst>
+        </pc:spChg>
+        <pc:spChg chg="del">
+          <ac:chgData name="Tristan Plasse" userId="13c698b9-43c4-4271-b359-faaadca0774b" providerId="ADAL" clId="{FE460185-D4AE-4375-BA71-CD1D7F2341F0}" dt="2026-04-17T01:30:12.348" v="5047" actId="478"/>
+          <ac:spMkLst>
+            <pc:docMk/>
+            <pc:sldMk cId="784584029" sldId="282"/>
+            <ac:spMk id="3" creationId="{275D4D4A-9F9A-E165-9931-AE7EC6F9609B}"/>
+          </ac:spMkLst>
+        </pc:spChg>
+        <pc:spChg chg="add mod">
+          <ac:chgData name="Tristan Plasse" userId="13c698b9-43c4-4271-b359-faaadca0774b" providerId="ADAL" clId="{FE460185-D4AE-4375-BA71-CD1D7F2341F0}" dt="2026-04-17T01:31:13.276" v="5059" actId="1076"/>
+          <ac:spMkLst>
+            <pc:docMk/>
+            <pc:sldMk cId="784584029" sldId="282"/>
+            <ac:spMk id="4" creationId="{80693467-78F2-1B86-B867-3754098C5644}"/>
+          </ac:spMkLst>
+        </pc:spChg>
+        <pc:spChg chg="add">
+          <ac:chgData name="Tristan Plasse" userId="13c698b9-43c4-4271-b359-faaadca0774b" providerId="ADAL" clId="{FE460185-D4AE-4375-BA71-CD1D7F2341F0}" dt="2026-04-17T01:30:36.101" v="5052" actId="26606"/>
+          <ac:spMkLst>
+            <pc:docMk/>
+            <pc:sldMk cId="784584029" sldId="282"/>
+            <ac:spMk id="3083" creationId="{33E93247-6229-44AB-A550-739E971E690B}"/>
+          </ac:spMkLst>
+        </pc:spChg>
+        <pc:spChg chg="add">
+          <ac:chgData name="Tristan Plasse" userId="13c698b9-43c4-4271-b359-faaadca0774b" providerId="ADAL" clId="{FE460185-D4AE-4375-BA71-CD1D7F2341F0}" dt="2026-04-17T01:30:36.101" v="5052" actId="26606"/>
+          <ac:spMkLst>
+            <pc:docMk/>
+            <pc:sldMk cId="784584029" sldId="282"/>
+            <ac:spMk id="3085" creationId="{6BB6B482-ACCA-4938-8AEA-49D525C17221}"/>
+          </ac:spMkLst>
+        </pc:spChg>
+        <pc:picChg chg="add mod">
+          <ac:chgData name="Tristan Plasse" userId="13c698b9-43c4-4271-b359-faaadca0774b" providerId="ADAL" clId="{FE460185-D4AE-4375-BA71-CD1D7F2341F0}" dt="2026-04-17T01:30:42.128" v="5053" actId="18131"/>
+          <ac:picMkLst>
+            <pc:docMk/>
+            <pc:sldMk cId="784584029" sldId="282"/>
+            <ac:picMk id="3074" creationId="{4C00A1DA-6ED6-C7B3-FAC3-90C08EBD5B83}"/>
+          </ac:picMkLst>
+        </pc:picChg>
+        <pc:cxnChg chg="add">
+          <ac:chgData name="Tristan Plasse" userId="13c698b9-43c4-4271-b359-faaadca0774b" providerId="ADAL" clId="{FE460185-D4AE-4375-BA71-CD1D7F2341F0}" dt="2026-04-17T01:30:36.101" v="5052" actId="26606"/>
+          <ac:cxnSpMkLst>
+            <pc:docMk/>
+            <pc:sldMk cId="784584029" sldId="282"/>
+            <ac:cxnSpMk id="3079" creationId="{F64F9B95-9045-48D2-B9F3-2927E98F54AA}"/>
+          </ac:cxnSpMkLst>
+        </pc:cxnChg>
+        <pc:cxnChg chg="add">
+          <ac:chgData name="Tristan Plasse" userId="13c698b9-43c4-4271-b359-faaadca0774b" providerId="ADAL" clId="{FE460185-D4AE-4375-BA71-CD1D7F2341F0}" dt="2026-04-17T01:30:36.101" v="5052" actId="26606"/>
+          <ac:cxnSpMkLst>
+            <pc:docMk/>
+            <pc:sldMk cId="784584029" sldId="282"/>
+            <ac:cxnSpMk id="3081" creationId="{085AA86F-6A4D-4BCB-A045-D992CDC2959B}"/>
+          </ac:cxnSpMkLst>
+        </pc:cxnChg>
+        <pc:cxnChg chg="add">
+          <ac:chgData name="Tristan Plasse" userId="13c698b9-43c4-4271-b359-faaadca0774b" providerId="ADAL" clId="{FE460185-D4AE-4375-BA71-CD1D7F2341F0}" dt="2026-04-17T01:30:36.101" v="5052" actId="26606"/>
+          <ac:cxnSpMkLst>
+            <pc:docMk/>
+            <pc:sldMk cId="784584029" sldId="282"/>
+            <ac:cxnSpMk id="3087" creationId="{EE2E603F-4A95-4FE8-BB06-211DFD75DBEF}"/>
+          </ac:cxnSpMkLst>
+        </pc:cxnChg>
+      </pc:sldChg>
       <pc:sldMasterChg chg="add addSldLayout">
         <pc:chgData name="Tristan Plasse" userId="13c698b9-43c4-4271-b359-faaadca0774b" providerId="ADAL" clId="{FE460185-D4AE-4375-BA71-CD1D7F2341F0}" dt="2026-04-15T20:11:02.110" v="50" actId="26606"/>
         <pc:sldMasterMkLst>
@@ -11101,7 +11326,10 @@
           <a:bodyPr/>
           <a:lstStyle/>
           <a:p>
-            <a:endParaRPr lang="fr-CA"/>
+            <a:r>
+              <a:rPr lang="fr-CA" dirty="0"/>
+              <a:t>Méthode</a:t>
+            </a:r>
           </a:p>
         </p:txBody>
       </p:sp>
@@ -11126,7 +11354,200 @@
           <a:bodyPr/>
           <a:lstStyle/>
           <a:p>
-            <a:endParaRPr lang="fr-CA"/>
+            <a:pPr>
+              <a:lnSpc>
+                <a:spcPct val="200000"/>
+              </a:lnSpc>
+            </a:pPr>
+            <a:r>
+              <a:rPr lang="fr-CA" dirty="0"/>
+              <a:t>33 stades → 3 :</a:t>
+            </a:r>
+          </a:p>
+          <a:p>
+            <a:pPr lvl="1">
+              <a:lnSpc>
+                <a:spcPct val="200000"/>
+              </a:lnSpc>
+            </a:pPr>
+            <a:r>
+              <a:rPr lang="fr-CA" dirty="0"/>
+              <a:t>Juvéniles (stades 1-3)</a:t>
+            </a:r>
+          </a:p>
+          <a:p>
+            <a:pPr lvl="1">
+              <a:lnSpc>
+                <a:spcPct val="200000"/>
+              </a:lnSpc>
+            </a:pPr>
+            <a:r>
+              <a:rPr lang="fr-CA" dirty="0"/>
+              <a:t>Pré adultes (4-12)</a:t>
+            </a:r>
+          </a:p>
+          <a:p>
+            <a:pPr lvl="1">
+              <a:lnSpc>
+                <a:spcPct val="200000"/>
+              </a:lnSpc>
+            </a:pPr>
+            <a:r>
+              <a:rPr lang="fr-CA" dirty="0"/>
+              <a:t>Adultes (13-32)</a:t>
+            </a:r>
+          </a:p>
+          <a:p>
+            <a:pPr>
+              <a:lnSpc>
+                <a:spcPct val="200000"/>
+              </a:lnSpc>
+            </a:pPr>
+            <a:r>
+              <a:rPr lang="fr-CA" dirty="0"/>
+              <a:t>Utilisation de la méthode présentée dans </a:t>
+            </a:r>
+            <a:r>
+              <a:rPr lang="fr-CA" dirty="0" err="1"/>
+              <a:t>Hinrichsen</a:t>
+            </a:r>
+            <a:r>
+              <a:rPr lang="fr-CA" dirty="0"/>
+              <a:t> et al. (2026)</a:t>
+            </a:r>
+          </a:p>
+        </p:txBody>
+      </p:sp>
+      <p:pic>
+        <p:nvPicPr>
+          <p:cNvPr id="5" name="Image 4">
+            <a:extLst>
+              <a:ext uri="{FF2B5EF4-FFF2-40B4-BE49-F238E27FC236}">
+                <a16:creationId xmlns:a16="http://schemas.microsoft.com/office/drawing/2014/main" id="{9685D4F2-40A3-6B20-7AD7-ACCE12A4A00F}"/>
+              </a:ext>
+            </a:extLst>
+          </p:cNvPr>
+          <p:cNvPicPr>
+            <a:picLocks noChangeAspect="1"/>
+          </p:cNvPicPr>
+          <p:nvPr/>
+        </p:nvPicPr>
+        <p:blipFill>
+          <a:blip r:embed="rId2"/>
+          <a:stretch>
+            <a:fillRect/>
+          </a:stretch>
+        </p:blipFill>
+        <p:spPr>
+          <a:xfrm>
+            <a:off x="6424521" y="3429000"/>
+            <a:ext cx="1305107" cy="371527"/>
+          </a:xfrm>
+          <a:prstGeom prst="rect">
+            <a:avLst/>
+          </a:prstGeom>
+        </p:spPr>
+      </p:pic>
+      <p:pic>
+        <p:nvPicPr>
+          <p:cNvPr id="7" name="Image 6">
+            <a:extLst>
+              <a:ext uri="{FF2B5EF4-FFF2-40B4-BE49-F238E27FC236}">
+                <a16:creationId xmlns:a16="http://schemas.microsoft.com/office/drawing/2014/main" id="{BB415FDE-9E57-650D-4644-A3CC764FDA45}"/>
+              </a:ext>
+            </a:extLst>
+          </p:cNvPr>
+          <p:cNvPicPr>
+            <a:picLocks noChangeAspect="1"/>
+          </p:cNvPicPr>
+          <p:nvPr/>
+        </p:nvPicPr>
+        <p:blipFill>
+          <a:blip r:embed="rId3"/>
+          <a:stretch>
+            <a:fillRect/>
+          </a:stretch>
+        </p:blipFill>
+        <p:spPr>
+          <a:xfrm>
+            <a:off x="8141582" y="3047946"/>
+            <a:ext cx="2648320" cy="1133633"/>
+          </a:xfrm>
+          <a:prstGeom prst="rect">
+            <a:avLst/>
+          </a:prstGeom>
+        </p:spPr>
+      </p:pic>
+      <p:sp>
+        <p:nvSpPr>
+          <p:cNvPr id="11" name="Flèche : courbe vers la droite 10">
+            <a:extLst>
+              <a:ext uri="{FF2B5EF4-FFF2-40B4-BE49-F238E27FC236}">
+                <a16:creationId xmlns:a16="http://schemas.microsoft.com/office/drawing/2014/main" id="{7548656C-186D-3220-0CDB-0A482B5D9824}"/>
+              </a:ext>
+            </a:extLst>
+          </p:cNvPr>
+          <p:cNvSpPr/>
+          <p:nvPr/>
+        </p:nvSpPr>
+        <p:spPr>
+          <a:xfrm rot="13408708">
+            <a:off x="8581230" y="4238713"/>
+            <a:ext cx="799396" cy="1596650"/>
+          </a:xfrm>
+          <a:prstGeom prst="curvedRightArrow">
+            <a:avLst>
+              <a:gd name="adj1" fmla="val 6715"/>
+              <a:gd name="adj2" fmla="val 50000"/>
+              <a:gd name="adj3" fmla="val 53869"/>
+            </a:avLst>
+          </a:prstGeom>
+          <a:ln w="12700" cap="flat" cmpd="sng" algn="ctr">
+            <a:noFill/>
+            <a:prstDash val="solid"/>
+            <a:miter lim="800000"/>
+          </a:ln>
+          <a:effectLst/>
+          <a:extLst>
+            <a:ext uri="{91240B29-F687-4F45-9708-019B960494DF}">
+              <a14:hiddenLine xmlns:a14="http://schemas.microsoft.com/office/drawing/2010/main" w="12700" cap="flat" cmpd="sng" algn="ctr">
+                <a:solidFill>
+                  <a:schemeClr val="accent1">
+                    <a:shade val="50000"/>
+                  </a:schemeClr>
+                </a:solidFill>
+                <a:prstDash val="solid"/>
+                <a:miter lim="800000"/>
+              </a14:hiddenLine>
+            </a:ext>
+          </a:extLst>
+        </p:spPr>
+        <p:style>
+          <a:lnRef idx="2">
+            <a:schemeClr val="accent1">
+              <a:shade val="50000"/>
+            </a:schemeClr>
+          </a:lnRef>
+          <a:fillRef idx="1">
+            <a:schemeClr val="accent1"/>
+          </a:fillRef>
+          <a:effectRef idx="0">
+            <a:schemeClr val="accent1"/>
+          </a:effectRef>
+          <a:fontRef idx="minor">
+            <a:schemeClr val="lt1"/>
+          </a:fontRef>
+        </p:style>
+        <p:txBody>
+          <a:bodyPr rtlCol="0" anchor="ctr"/>
+          <a:lstStyle/>
+          <a:p>
+            <a:pPr algn="ctr"/>
+            <a:endParaRPr lang="fr-CA">
+              <a:solidFill>
+                <a:schemeClr val="tx1"/>
+              </a:solidFill>
+            </a:endParaRPr>
           </a:p>
         </p:txBody>
       </p:sp>
@@ -11134,6 +11555,294 @@
     <p:extLst>
       <p:ext uri="{BB962C8B-B14F-4D97-AF65-F5344CB8AC3E}">
         <p14:creationId xmlns:p14="http://schemas.microsoft.com/office/powerpoint/2010/main" val="3744480376"/>
+      </p:ext>
+    </p:extLst>
+  </p:cSld>
+  <p:clrMapOvr>
+    <a:masterClrMapping/>
+  </p:clrMapOvr>
+</p:sld>
+</file>
+
+<file path=ppt/slides/slide19.xml><?xml version="1.0" encoding="utf-8"?>
+<p:sld xmlns:a="http://schemas.openxmlformats.org/drawingml/2006/main" xmlns:r="http://schemas.openxmlformats.org/officeDocument/2006/relationships" xmlns:p="http://schemas.openxmlformats.org/presentationml/2006/main">
+  <p:cSld>
+    <p:spTree>
+      <p:nvGrpSpPr>
+        <p:cNvPr id="1" name=""/>
+        <p:cNvGrpSpPr/>
+        <p:nvPr/>
+      </p:nvGrpSpPr>
+      <p:grpSpPr>
+        <a:xfrm>
+          <a:off x="0" y="0"/>
+          <a:ext cx="0" cy="0"/>
+          <a:chOff x="0" y="0"/>
+          <a:chExt cx="0" cy="0"/>
+        </a:xfrm>
+      </p:grpSpPr>
+      <p:sp>
+        <p:nvSpPr>
+          <p:cNvPr id="2" name="Titre 1">
+            <a:extLst>
+              <a:ext uri="{FF2B5EF4-FFF2-40B4-BE49-F238E27FC236}">
+                <a16:creationId xmlns:a16="http://schemas.microsoft.com/office/drawing/2014/main" id="{A4F1E310-7C7B-1E3D-DBA7-78328792D625}"/>
+              </a:ext>
+            </a:extLst>
+          </p:cNvPr>
+          <p:cNvSpPr>
+            <a:spLocks noGrp="1"/>
+          </p:cNvSpPr>
+          <p:nvPr>
+            <p:ph type="title"/>
+          </p:nvPr>
+        </p:nvSpPr>
+        <p:spPr/>
+        <p:txBody>
+          <a:bodyPr/>
+          <a:lstStyle/>
+          <a:p>
+            <a:r>
+              <a:rPr lang="fr-CA" dirty="0"/>
+              <a:t>Matrices</a:t>
+            </a:r>
+          </a:p>
+        </p:txBody>
+      </p:sp>
+      <p:sp>
+        <p:nvSpPr>
+          <p:cNvPr id="3" name="Espace réservé du contenu 2">
+            <a:extLst>
+              <a:ext uri="{FF2B5EF4-FFF2-40B4-BE49-F238E27FC236}">
+                <a16:creationId xmlns:a16="http://schemas.microsoft.com/office/drawing/2014/main" id="{EE1A390D-8519-2554-2768-18698B2C10FF}"/>
+              </a:ext>
+            </a:extLst>
+          </p:cNvPr>
+          <p:cNvSpPr>
+            <a:spLocks noGrp="1"/>
+          </p:cNvSpPr>
+          <p:nvPr>
+            <p:ph idx="1"/>
+          </p:nvPr>
+        </p:nvSpPr>
+        <p:spPr/>
+        <p:txBody>
+          <a:bodyPr/>
+          <a:lstStyle/>
+          <a:p>
+            <a:pPr>
+              <a:lnSpc>
+                <a:spcPct val="200000"/>
+              </a:lnSpc>
+            </a:pPr>
+            <a:r>
+              <a:rPr lang="el-GR" dirty="0"/>
+              <a:t>λ</a:t>
+            </a:r>
+            <a:endParaRPr lang="fr-CA" dirty="0"/>
+          </a:p>
+          <a:p>
+            <a:pPr lvl="1">
+              <a:lnSpc>
+                <a:spcPct val="200000"/>
+              </a:lnSpc>
+            </a:pPr>
+            <a:r>
+              <a:rPr lang="fr-CA" dirty="0"/>
+              <a:t>Mesurée 0,957 → 0,953</a:t>
+            </a:r>
+          </a:p>
+          <a:p>
+            <a:pPr lvl="1">
+              <a:lnSpc>
+                <a:spcPct val="200000"/>
+              </a:lnSpc>
+            </a:pPr>
+            <a:r>
+              <a:rPr lang="fr-CA" dirty="0"/>
+              <a:t>Menacée 0,984 → 0,985</a:t>
+            </a:r>
+          </a:p>
+          <a:p>
+            <a:pPr lvl="1">
+              <a:lnSpc>
+                <a:spcPct val="200000"/>
+              </a:lnSpc>
+            </a:pPr>
+            <a:r>
+              <a:rPr lang="fr-CA" dirty="0"/>
+              <a:t>Nulle 1,002 → 1,003</a:t>
+            </a:r>
+          </a:p>
+          <a:p>
+            <a:pPr>
+              <a:lnSpc>
+                <a:spcPct val="200000"/>
+              </a:lnSpc>
+            </a:pPr>
+            <a:endParaRPr lang="fr-CA" dirty="0"/>
+          </a:p>
+        </p:txBody>
+      </p:sp>
+      <p:grpSp>
+        <p:nvGrpSpPr>
+          <p:cNvPr id="7" name="Groupe 6">
+            <a:extLst>
+              <a:ext uri="{FF2B5EF4-FFF2-40B4-BE49-F238E27FC236}">
+                <a16:creationId xmlns:a16="http://schemas.microsoft.com/office/drawing/2014/main" id="{31604140-0BE4-E83C-1948-7A6E95F7AEB4}"/>
+              </a:ext>
+            </a:extLst>
+          </p:cNvPr>
+          <p:cNvGrpSpPr/>
+          <p:nvPr/>
+        </p:nvGrpSpPr>
+        <p:grpSpPr>
+          <a:xfrm>
+            <a:off x="5886450" y="2573894"/>
+            <a:ext cx="5219700" cy="1352550"/>
+            <a:chOff x="5886450" y="2573894"/>
+            <a:chExt cx="5219700" cy="1352550"/>
+          </a:xfrm>
+        </p:grpSpPr>
+        <p:sp>
+          <p:nvSpPr>
+            <p:cNvPr id="4" name="ZoneTexte 3">
+              <a:extLst>
+                <a:ext uri="{FF2B5EF4-FFF2-40B4-BE49-F238E27FC236}">
+                  <a16:creationId xmlns:a16="http://schemas.microsoft.com/office/drawing/2014/main" id="{769DBEF4-FBE0-6D7D-A4A1-31856EB49A5B}"/>
+                </a:ext>
+              </a:extLst>
+            </p:cNvPr>
+            <p:cNvSpPr txBox="1"/>
+            <p:nvPr/>
+          </p:nvSpPr>
+          <p:spPr>
+            <a:xfrm>
+              <a:off x="7343775" y="2789373"/>
+              <a:ext cx="3505200" cy="923330"/>
+            </a:xfrm>
+            <a:prstGeom prst="rect">
+              <a:avLst/>
+            </a:prstGeom>
+            <a:noFill/>
+          </p:spPr>
+          <p:txBody>
+            <a:bodyPr wrap="square" rtlCol="0">
+              <a:spAutoFit/>
+            </a:bodyPr>
+            <a:lstStyle/>
+            <a:p>
+              <a:r>
+                <a:rPr lang="fr-CA" dirty="0"/>
+                <a:t>0			0		34157</a:t>
+              </a:r>
+            </a:p>
+            <a:p>
+              <a:r>
+                <a:rPr lang="fr-CA" dirty="0"/>
+                <a:t>1,21*10</a:t>
+              </a:r>
+              <a:r>
+                <a:rPr lang="fr-CA" baseline="30000" dirty="0"/>
+                <a:t>-5</a:t>
+              </a:r>
+              <a:r>
+                <a:rPr lang="fr-CA" dirty="0"/>
+                <a:t>		0,725	0</a:t>
+              </a:r>
+            </a:p>
+            <a:p>
+              <a:r>
+                <a:rPr lang="fr-CA" dirty="0"/>
+                <a:t>0			0,050	0,905</a:t>
+              </a:r>
+            </a:p>
+          </p:txBody>
+        </p:sp>
+        <p:sp>
+          <p:nvSpPr>
+            <p:cNvPr id="5" name="ZoneTexte 4">
+              <a:extLst>
+                <a:ext uri="{FF2B5EF4-FFF2-40B4-BE49-F238E27FC236}">
+                  <a16:creationId xmlns:a16="http://schemas.microsoft.com/office/drawing/2014/main" id="{584A445A-35A4-5CCD-3E0F-1132280B6EBE}"/>
+                </a:ext>
+              </a:extLst>
+            </p:cNvPr>
+            <p:cNvSpPr txBox="1"/>
+            <p:nvPr/>
+          </p:nvSpPr>
+          <p:spPr>
+            <a:xfrm>
+              <a:off x="5886450" y="3059668"/>
+              <a:ext cx="1343025" cy="369332"/>
+            </a:xfrm>
+            <a:prstGeom prst="rect">
+              <a:avLst/>
+            </a:prstGeom>
+            <a:noFill/>
+          </p:spPr>
+          <p:txBody>
+            <a:bodyPr wrap="square" rtlCol="0">
+              <a:spAutoFit/>
+            </a:bodyPr>
+            <a:lstStyle/>
+            <a:p>
+              <a:r>
+                <a:rPr lang="fr-CA" dirty="0"/>
+                <a:t>Mesurée =</a:t>
+              </a:r>
+            </a:p>
+          </p:txBody>
+        </p:sp>
+        <p:sp>
+          <p:nvSpPr>
+            <p:cNvPr id="6" name="Accolades 5">
+              <a:extLst>
+                <a:ext uri="{FF2B5EF4-FFF2-40B4-BE49-F238E27FC236}">
+                  <a16:creationId xmlns:a16="http://schemas.microsoft.com/office/drawing/2014/main" id="{88AA4DF5-8C2D-2045-0ED6-5A771E6D2A10}"/>
+                </a:ext>
+              </a:extLst>
+            </p:cNvPr>
+            <p:cNvSpPr/>
+            <p:nvPr/>
+          </p:nvSpPr>
+          <p:spPr>
+            <a:xfrm>
+              <a:off x="7134225" y="2573894"/>
+              <a:ext cx="3971925" cy="1352550"/>
+            </a:xfrm>
+            <a:prstGeom prst="bracePair">
+              <a:avLst/>
+            </a:prstGeom>
+          </p:spPr>
+          <p:style>
+            <a:lnRef idx="1">
+              <a:schemeClr val="accent1"/>
+            </a:lnRef>
+            <a:fillRef idx="0">
+              <a:schemeClr val="accent1"/>
+            </a:fillRef>
+            <a:effectRef idx="0">
+              <a:schemeClr val="accent1"/>
+            </a:effectRef>
+            <a:fontRef idx="minor">
+              <a:schemeClr val="tx1"/>
+            </a:fontRef>
+          </p:style>
+          <p:txBody>
+            <a:bodyPr rtlCol="0" anchor="ctr"/>
+            <a:lstStyle/>
+            <a:p>
+              <a:pPr algn="ctr"/>
+              <a:endParaRPr lang="fr-CA"/>
+            </a:p>
+          </p:txBody>
+        </p:sp>
+      </p:grpSp>
+    </p:spTree>
+    <p:extLst>
+      <p:ext uri="{BB962C8B-B14F-4D97-AF65-F5344CB8AC3E}">
+        <p14:creationId xmlns:p14="http://schemas.microsoft.com/office/powerpoint/2010/main" val="3710197240"/>
       </p:ext>
     </p:extLst>
   </p:cSld>
@@ -11533,6 +12242,1542 @@
   </p:cSld>
   <p:clrMapOvr>
     <a:masterClrMapping/>
+  </p:clrMapOvr>
+</p:sld>
+</file>
+
+<file path=ppt/slides/slide20.xml><?xml version="1.0" encoding="utf-8"?>
+<p:sld xmlns:a="http://schemas.openxmlformats.org/drawingml/2006/main" xmlns:r="http://schemas.openxmlformats.org/officeDocument/2006/relationships" xmlns:p="http://schemas.openxmlformats.org/presentationml/2006/main">
+  <p:cSld>
+    <p:spTree>
+      <p:nvGrpSpPr>
+        <p:cNvPr id="1" name=""/>
+        <p:cNvGrpSpPr/>
+        <p:nvPr/>
+      </p:nvGrpSpPr>
+      <p:grpSpPr>
+        <a:xfrm>
+          <a:off x="0" y="0"/>
+          <a:ext cx="0" cy="0"/>
+          <a:chOff x="0" y="0"/>
+          <a:chExt cx="0" cy="0"/>
+        </a:xfrm>
+      </p:grpSpPr>
+      <p:sp>
+        <p:nvSpPr>
+          <p:cNvPr id="2" name="Titre 1">
+            <a:extLst>
+              <a:ext uri="{FF2B5EF4-FFF2-40B4-BE49-F238E27FC236}">
+                <a16:creationId xmlns:a16="http://schemas.microsoft.com/office/drawing/2014/main" id="{DE69A1AE-572E-D5B4-03BD-F325D0A3E202}"/>
+              </a:ext>
+            </a:extLst>
+          </p:cNvPr>
+          <p:cNvSpPr>
+            <a:spLocks noGrp="1"/>
+          </p:cNvSpPr>
+          <p:nvPr>
+            <p:ph type="title"/>
+          </p:nvPr>
+        </p:nvSpPr>
+        <p:spPr/>
+        <p:txBody>
+          <a:bodyPr numCol="2"/>
+          <a:lstStyle/>
+          <a:p>
+            <a:r>
+              <a:rPr lang="fr-CA" dirty="0"/>
+              <a:t>Avantages</a:t>
+            </a:r>
+            <a:br>
+              <a:rPr lang="fr-CA" dirty="0"/>
+            </a:br>
+            <a:r>
+              <a:rPr lang="fr-CA" dirty="0"/>
+              <a:t>Désavantages	</a:t>
+            </a:r>
+          </a:p>
+        </p:txBody>
+      </p:sp>
+      <p:sp>
+        <p:nvSpPr>
+          <p:cNvPr id="3" name="Espace réservé du contenu 2">
+            <a:extLst>
+              <a:ext uri="{FF2B5EF4-FFF2-40B4-BE49-F238E27FC236}">
+                <a16:creationId xmlns:a16="http://schemas.microsoft.com/office/drawing/2014/main" id="{FC01AAB4-81AB-D42D-04AB-96781CB6AC94}"/>
+              </a:ext>
+            </a:extLst>
+          </p:cNvPr>
+          <p:cNvSpPr>
+            <a:spLocks noGrp="1"/>
+          </p:cNvSpPr>
+          <p:nvPr>
+            <p:ph idx="1"/>
+          </p:nvPr>
+        </p:nvSpPr>
+        <p:spPr/>
+        <p:txBody>
+          <a:bodyPr numCol="2"/>
+          <a:lstStyle/>
+          <a:p>
+            <a:pPr>
+              <a:lnSpc>
+                <a:spcPct val="200000"/>
+              </a:lnSpc>
+            </a:pPr>
+            <a:r>
+              <a:rPr lang="fr-CA" dirty="0"/>
+              <a:t>Modification du calcul de la fécondité</a:t>
+            </a:r>
+          </a:p>
+          <a:p>
+            <a:pPr>
+              <a:lnSpc>
+                <a:spcPct val="200000"/>
+              </a:lnSpc>
+            </a:pPr>
+            <a:r>
+              <a:rPr lang="fr-CA" dirty="0"/>
+              <a:t>Possibilité d’individus plus âgés que 30</a:t>
+            </a:r>
+          </a:p>
+          <a:p>
+            <a:pPr>
+              <a:lnSpc>
+                <a:spcPct val="200000"/>
+              </a:lnSpc>
+            </a:pPr>
+            <a:r>
+              <a:rPr lang="fr-CA" dirty="0"/>
+              <a:t>Simplification</a:t>
+            </a:r>
+          </a:p>
+          <a:p>
+            <a:pPr>
+              <a:lnSpc>
+                <a:spcPct val="200000"/>
+              </a:lnSpc>
+            </a:pPr>
+            <a:r>
+              <a:rPr lang="fr-CA" dirty="0"/>
+              <a:t>Diminution des incertitudes</a:t>
+            </a:r>
+          </a:p>
+          <a:p>
+            <a:pPr marL="0" indent="0">
+              <a:lnSpc>
+                <a:spcPct val="200000"/>
+              </a:lnSpc>
+              <a:buNone/>
+            </a:pPr>
+            <a:endParaRPr lang="fr-CA" dirty="0"/>
+          </a:p>
+          <a:p>
+            <a:pPr>
+              <a:lnSpc>
+                <a:spcPct val="200000"/>
+              </a:lnSpc>
+            </a:pPr>
+            <a:r>
+              <a:rPr lang="fr-CA" dirty="0"/>
+              <a:t>Perte d’information</a:t>
+            </a:r>
+          </a:p>
+        </p:txBody>
+      </p:sp>
+    </p:spTree>
+    <p:extLst>
+      <p:ext uri="{BB962C8B-B14F-4D97-AF65-F5344CB8AC3E}">
+        <p14:creationId xmlns:p14="http://schemas.microsoft.com/office/powerpoint/2010/main" val="1164678962"/>
+      </p:ext>
+    </p:extLst>
+  </p:cSld>
+  <p:clrMapOvr>
+    <a:masterClrMapping/>
+  </p:clrMapOvr>
+</p:sld>
+</file>
+
+<file path=ppt/slides/slide21.xml><?xml version="1.0" encoding="utf-8"?>
+<p:sld xmlns:a="http://schemas.openxmlformats.org/drawingml/2006/main" xmlns:r="http://schemas.openxmlformats.org/officeDocument/2006/relationships" xmlns:p="http://schemas.openxmlformats.org/presentationml/2006/main">
+  <p:cSld>
+    <p:bg>
+      <p:bgPr>
+        <a:solidFill>
+          <a:schemeClr val="bg1"/>
+        </a:solidFill>
+        <a:effectLst/>
+      </p:bgPr>
+    </p:bg>
+    <p:spTree>
+      <p:nvGrpSpPr>
+        <p:cNvPr id="1" name=""/>
+        <p:cNvGrpSpPr/>
+        <p:nvPr/>
+      </p:nvGrpSpPr>
+      <p:grpSpPr>
+        <a:xfrm>
+          <a:off x="0" y="0"/>
+          <a:ext cx="0" cy="0"/>
+          <a:chOff x="0" y="0"/>
+          <a:chExt cx="0" cy="0"/>
+        </a:xfrm>
+      </p:grpSpPr>
+      <p:cxnSp>
+        <p:nvCxnSpPr>
+          <p:cNvPr id="10" name="Straight Connector 9">
+            <a:extLst>
+              <a:ext uri="{FF2B5EF4-FFF2-40B4-BE49-F238E27FC236}">
+                <a16:creationId xmlns:a16="http://schemas.microsoft.com/office/drawing/2014/main" id="{F64F9B95-9045-48D2-B9F3-2927E98F54AA}"/>
+              </a:ext>
+              <a:ext uri="{C183D7F6-B498-43B3-948B-1728B52AA6E4}">
+                <adec:decorative xmlns:adec="http://schemas.microsoft.com/office/drawing/2017/decorative" val="1"/>
+              </a:ext>
+            </a:extLst>
+          </p:cNvPr>
+          <p:cNvCxnSpPr>
+            <a:cxnSpLocks noGrp="1" noRot="1" noChangeAspect="1" noMove="1" noResize="1" noEditPoints="1" noAdjustHandles="1" noChangeArrowheads="1" noChangeShapeType="1"/>
+          </p:cNvCxnSpPr>
+          <p:nvPr>
+            <p:extLst>
+              <p:ext uri="{386F3935-93C4-4BCD-93E2-E3B085C9AB24}">
+                <p16:designElem xmlns:p16="http://schemas.microsoft.com/office/powerpoint/2015/main" val="1"/>
+              </p:ext>
+            </p:extLst>
+          </p:nvPr>
+        </p:nvCxnSpPr>
+        <p:spPr>
+          <a:xfrm>
+            <a:off x="800100" y="723900"/>
+            <a:ext cx="10591800" cy="0"/>
+          </a:xfrm>
+          <a:prstGeom prst="line">
+            <a:avLst/>
+          </a:prstGeom>
+          <a:ln w="44450">
+            <a:solidFill>
+              <a:schemeClr val="tx1"/>
+            </a:solidFill>
+          </a:ln>
+        </p:spPr>
+        <p:style>
+          <a:lnRef idx="1">
+            <a:schemeClr val="accent1"/>
+          </a:lnRef>
+          <a:fillRef idx="0">
+            <a:schemeClr val="accent1"/>
+          </a:fillRef>
+          <a:effectRef idx="0">
+            <a:schemeClr val="accent1"/>
+          </a:effectRef>
+          <a:fontRef idx="minor">
+            <a:schemeClr val="tx1"/>
+          </a:fontRef>
+        </p:style>
+      </p:cxnSp>
+      <p:cxnSp>
+        <p:nvCxnSpPr>
+          <p:cNvPr id="12" name="Straight Connector 11">
+            <a:extLst>
+              <a:ext uri="{FF2B5EF4-FFF2-40B4-BE49-F238E27FC236}">
+                <a16:creationId xmlns:a16="http://schemas.microsoft.com/office/drawing/2014/main" id="{085AA86F-6A4D-4BCB-A045-D992CDC2959B}"/>
+              </a:ext>
+              <a:ext uri="{C183D7F6-B498-43B3-948B-1728B52AA6E4}">
+                <adec:decorative xmlns:adec="http://schemas.microsoft.com/office/drawing/2017/decorative" val="1"/>
+              </a:ext>
+            </a:extLst>
+          </p:cNvPr>
+          <p:cNvCxnSpPr>
+            <a:cxnSpLocks noGrp="1" noRot="1" noChangeAspect="1" noMove="1" noResize="1" noEditPoints="1" noAdjustHandles="1" noChangeArrowheads="1" noChangeShapeType="1"/>
+          </p:cNvCxnSpPr>
+          <p:nvPr>
+            <p:extLst>
+              <p:ext uri="{386F3935-93C4-4BCD-93E2-E3B085C9AB24}">
+                <p16:designElem xmlns:p16="http://schemas.microsoft.com/office/powerpoint/2015/main" val="1"/>
+              </p:ext>
+            </p:extLst>
+          </p:nvPr>
+        </p:nvCxnSpPr>
+        <p:spPr>
+          <a:xfrm>
+            <a:off x="800100" y="6142781"/>
+            <a:ext cx="10591800" cy="0"/>
+          </a:xfrm>
+          <a:prstGeom prst="line">
+            <a:avLst/>
+          </a:prstGeom>
+          <a:ln w="12700">
+            <a:solidFill>
+              <a:schemeClr val="tx1"/>
+            </a:solidFill>
+          </a:ln>
+        </p:spPr>
+        <p:style>
+          <a:lnRef idx="1">
+            <a:schemeClr val="accent1"/>
+          </a:lnRef>
+          <a:fillRef idx="0">
+            <a:schemeClr val="accent1"/>
+          </a:fillRef>
+          <a:effectRef idx="0">
+            <a:schemeClr val="accent1"/>
+          </a:effectRef>
+          <a:fontRef idx="minor">
+            <a:schemeClr val="tx1"/>
+          </a:fontRef>
+        </p:style>
+      </p:cxnSp>
+      <p:sp useBgFill="1">
+        <p:nvSpPr>
+          <p:cNvPr id="14" name="Rectangle 13">
+            <a:extLst>
+              <a:ext uri="{FF2B5EF4-FFF2-40B4-BE49-F238E27FC236}">
+                <a16:creationId xmlns:a16="http://schemas.microsoft.com/office/drawing/2014/main" id="{33E93247-6229-44AB-A550-739E971E690B}"/>
+              </a:ext>
+              <a:ext uri="{C183D7F6-B498-43B3-948B-1728B52AA6E4}">
+                <adec:decorative xmlns:adec="http://schemas.microsoft.com/office/drawing/2017/decorative" val="1"/>
+              </a:ext>
+            </a:extLst>
+          </p:cNvPr>
+          <p:cNvSpPr>
+            <a:spLocks noGrp="1" noRot="1" noChangeAspect="1" noMove="1" noResize="1" noEditPoints="1" noAdjustHandles="1" noChangeArrowheads="1" noChangeShapeType="1" noTextEdit="1"/>
+          </p:cNvSpPr>
+          <p:nvPr>
+            <p:extLst>
+              <p:ext uri="{386F3935-93C4-4BCD-93E2-E3B085C9AB24}">
+                <p16:designElem xmlns:p16="http://schemas.microsoft.com/office/powerpoint/2015/main" val="1"/>
+              </p:ext>
+            </p:extLst>
+          </p:nvPr>
+        </p:nvSpPr>
+        <p:spPr>
+          <a:xfrm>
+            <a:off x="0" y="0"/>
+            <a:ext cx="12192000" cy="6858000"/>
+          </a:xfrm>
+          <a:prstGeom prst="rect">
+            <a:avLst/>
+          </a:prstGeom>
+          <a:ln w="12700" cap="flat" cmpd="sng" algn="ctr">
+            <a:noFill/>
+            <a:prstDash val="solid"/>
+            <a:miter lim="800000"/>
+          </a:ln>
+          <a:effectLst/>
+          <a:extLst>
+            <a:ext uri="{91240B29-F687-4F45-9708-019B960494DF}">
+              <a14:hiddenLine xmlns:a14="http://schemas.microsoft.com/office/drawing/2010/main" w="12700" cap="flat" cmpd="sng" algn="ctr">
+                <a:solidFill>
+                  <a:schemeClr val="accent1">
+                    <a:shade val="50000"/>
+                  </a:schemeClr>
+                </a:solidFill>
+                <a:prstDash val="solid"/>
+                <a:miter lim="800000"/>
+              </a14:hiddenLine>
+            </a:ext>
+          </a:extLst>
+        </p:spPr>
+        <p:style>
+          <a:lnRef idx="2">
+            <a:schemeClr val="accent1">
+              <a:shade val="50000"/>
+            </a:schemeClr>
+          </a:lnRef>
+          <a:fillRef idx="1">
+            <a:schemeClr val="accent1"/>
+          </a:fillRef>
+          <a:effectRef idx="0">
+            <a:schemeClr val="accent1"/>
+          </a:effectRef>
+          <a:fontRef idx="minor">
+            <a:schemeClr val="lt1"/>
+          </a:fontRef>
+        </p:style>
+        <p:txBody>
+          <a:bodyPr rtlCol="0" anchor="ctr"/>
+          <a:lstStyle/>
+          <a:p>
+            <a:pPr algn="ctr"/>
+            <a:endParaRPr lang="en-US"/>
+          </a:p>
+        </p:txBody>
+      </p:sp>
+      <p:sp>
+        <p:nvSpPr>
+          <p:cNvPr id="2" name="Titre 1">
+            <a:extLst>
+              <a:ext uri="{FF2B5EF4-FFF2-40B4-BE49-F238E27FC236}">
+                <a16:creationId xmlns:a16="http://schemas.microsoft.com/office/drawing/2014/main" id="{94F7A99C-0ACF-5557-9578-B80FE0D75B77}"/>
+              </a:ext>
+            </a:extLst>
+          </p:cNvPr>
+          <p:cNvSpPr>
+            <a:spLocks noGrp="1"/>
+          </p:cNvSpPr>
+          <p:nvPr>
+            <p:ph type="title"/>
+          </p:nvPr>
+        </p:nvSpPr>
+        <p:spPr>
+          <a:xfrm>
+            <a:off x="685800" y="899024"/>
+            <a:ext cx="3076032" cy="3914947"/>
+          </a:xfrm>
+        </p:spPr>
+        <p:txBody>
+          <a:bodyPr vert="horz" lIns="91440" tIns="45720" rIns="91440" bIns="45720" rtlCol="0" anchor="t">
+            <a:normAutofit/>
+          </a:bodyPr>
+          <a:lstStyle/>
+          <a:p>
+            <a:r>
+              <a:rPr lang="en-US"/>
+              <a:t>Résultats</a:t>
+            </a:r>
+          </a:p>
+        </p:txBody>
+      </p:sp>
+      <p:cxnSp>
+        <p:nvCxnSpPr>
+          <p:cNvPr id="16" name="Straight Connector 15">
+            <a:extLst>
+              <a:ext uri="{FF2B5EF4-FFF2-40B4-BE49-F238E27FC236}">
+                <a16:creationId xmlns:a16="http://schemas.microsoft.com/office/drawing/2014/main" id="{EE2E603F-4A95-4FE8-BB06-211DFD75DBEF}"/>
+              </a:ext>
+              <a:ext uri="{C183D7F6-B498-43B3-948B-1728B52AA6E4}">
+                <adec:decorative xmlns:adec="http://schemas.microsoft.com/office/drawing/2017/decorative" val="1"/>
+              </a:ext>
+            </a:extLst>
+          </p:cNvPr>
+          <p:cNvCxnSpPr>
+            <a:cxnSpLocks noGrp="1" noRot="1" noChangeAspect="1" noMove="1" noResize="1" noEditPoints="1" noAdjustHandles="1" noChangeArrowheads="1" noChangeShapeType="1"/>
+          </p:cNvCxnSpPr>
+          <p:nvPr>
+            <p:extLst>
+              <p:ext uri="{386F3935-93C4-4BCD-93E2-E3B085C9AB24}">
+                <p16:designElem xmlns:p16="http://schemas.microsoft.com/office/powerpoint/2015/main" val="1"/>
+              </p:ext>
+            </p:extLst>
+          </p:nvPr>
+        </p:nvCxnSpPr>
+        <p:spPr>
+          <a:xfrm>
+            <a:off x="800100" y="723900"/>
+            <a:ext cx="1371600" cy="0"/>
+          </a:xfrm>
+          <a:prstGeom prst="line">
+            <a:avLst/>
+          </a:prstGeom>
+          <a:ln w="44450">
+            <a:solidFill>
+              <a:schemeClr val="tx1"/>
+            </a:solidFill>
+          </a:ln>
+        </p:spPr>
+        <p:style>
+          <a:lnRef idx="1">
+            <a:schemeClr val="accent1"/>
+          </a:lnRef>
+          <a:fillRef idx="0">
+            <a:schemeClr val="accent1"/>
+          </a:fillRef>
+          <a:effectRef idx="0">
+            <a:schemeClr val="accent1"/>
+          </a:effectRef>
+          <a:fontRef idx="minor">
+            <a:schemeClr val="tx1"/>
+          </a:fontRef>
+        </p:style>
+      </p:cxnSp>
+      <p:pic>
+        <p:nvPicPr>
+          <p:cNvPr id="5" name="Espace réservé du contenu 4">
+            <a:extLst>
+              <a:ext uri="{FF2B5EF4-FFF2-40B4-BE49-F238E27FC236}">
+                <a16:creationId xmlns:a16="http://schemas.microsoft.com/office/drawing/2014/main" id="{DEB15709-306B-BF61-202F-0B24322B33AC}"/>
+              </a:ext>
+            </a:extLst>
+          </p:cNvPr>
+          <p:cNvPicPr>
+            <a:picLocks noGrp="1" noChangeAspect="1"/>
+          </p:cNvPicPr>
+          <p:nvPr>
+            <p:ph idx="1"/>
+          </p:nvPr>
+        </p:nvPicPr>
+        <p:blipFill>
+          <a:blip r:embed="rId2">
+            <a:extLst>
+              <a:ext uri="{28A0092B-C50C-407E-A947-70E740481C1C}">
+                <a14:useLocalDpi xmlns:a14="http://schemas.microsoft.com/office/drawing/2010/main" val="0"/>
+              </a:ext>
+            </a:extLst>
+          </a:blip>
+          <a:stretch>
+            <a:fillRect/>
+          </a:stretch>
+        </p:blipFill>
+        <p:spPr>
+          <a:xfrm>
+            <a:off x="6362699" y="723901"/>
+            <a:ext cx="2705100" cy="5410200"/>
+          </a:xfrm>
+          <a:prstGeom prst="rect">
+            <a:avLst/>
+          </a:prstGeom>
+        </p:spPr>
+      </p:pic>
+    </p:spTree>
+    <p:extLst>
+      <p:ext uri="{BB962C8B-B14F-4D97-AF65-F5344CB8AC3E}">
+        <p14:creationId xmlns:p14="http://schemas.microsoft.com/office/powerpoint/2010/main" val="1439899674"/>
+      </p:ext>
+    </p:extLst>
+  </p:cSld>
+  <p:clrMapOvr>
+    <a:masterClrMapping/>
+  </p:clrMapOvr>
+</p:sld>
+</file>
+
+<file path=ppt/slides/slide22.xml><?xml version="1.0" encoding="utf-8"?>
+<p:sld xmlns:a="http://schemas.openxmlformats.org/drawingml/2006/main" xmlns:r="http://schemas.openxmlformats.org/officeDocument/2006/relationships" xmlns:p="http://schemas.openxmlformats.org/presentationml/2006/main">
+  <p:cSld>
+    <p:spTree>
+      <p:nvGrpSpPr>
+        <p:cNvPr id="1" name=""/>
+        <p:cNvGrpSpPr/>
+        <p:nvPr/>
+      </p:nvGrpSpPr>
+      <p:grpSpPr>
+        <a:xfrm>
+          <a:off x="0" y="0"/>
+          <a:ext cx="0" cy="0"/>
+          <a:chOff x="0" y="0"/>
+          <a:chExt cx="0" cy="0"/>
+        </a:xfrm>
+      </p:grpSpPr>
+      <p:pic>
+        <p:nvPicPr>
+          <p:cNvPr id="9" name="Image 8">
+            <a:extLst>
+              <a:ext uri="{FF2B5EF4-FFF2-40B4-BE49-F238E27FC236}">
+                <a16:creationId xmlns:a16="http://schemas.microsoft.com/office/drawing/2014/main" id="{CE99E6EA-6C50-A9AF-63F6-B30BF2E36593}"/>
+              </a:ext>
+            </a:extLst>
+          </p:cNvPr>
+          <p:cNvPicPr>
+            <a:picLocks noChangeAspect="1"/>
+          </p:cNvPicPr>
+          <p:nvPr/>
+        </p:nvPicPr>
+        <p:blipFill>
+          <a:blip r:embed="rId2">
+            <a:extLst>
+              <a:ext uri="{28A0092B-C50C-407E-A947-70E740481C1C}">
+                <a14:useLocalDpi xmlns:a14="http://schemas.microsoft.com/office/drawing/2010/main" val="0"/>
+              </a:ext>
+            </a:extLst>
+          </a:blip>
+          <a:stretch>
+            <a:fillRect/>
+          </a:stretch>
+        </p:blipFill>
+        <p:spPr>
+          <a:xfrm>
+            <a:off x="2846955" y="1142995"/>
+            <a:ext cx="5486411" cy="4572009"/>
+          </a:xfrm>
+          <a:prstGeom prst="rect">
+            <a:avLst/>
+          </a:prstGeom>
+        </p:spPr>
+      </p:pic>
+    </p:spTree>
+    <p:extLst>
+      <p:ext uri="{BB962C8B-B14F-4D97-AF65-F5344CB8AC3E}">
+        <p14:creationId xmlns:p14="http://schemas.microsoft.com/office/powerpoint/2010/main" val="422633496"/>
+      </p:ext>
+    </p:extLst>
+  </p:cSld>
+  <p:clrMapOvr>
+    <a:masterClrMapping/>
+  </p:clrMapOvr>
+</p:sld>
+</file>
+
+<file path=ppt/slides/slide23.xml><?xml version="1.0" encoding="utf-8"?>
+<p:sld xmlns:a="http://schemas.openxmlformats.org/drawingml/2006/main" xmlns:r="http://schemas.openxmlformats.org/officeDocument/2006/relationships" xmlns:p="http://schemas.openxmlformats.org/presentationml/2006/main">
+  <p:cSld>
+    <p:spTree>
+      <p:nvGrpSpPr>
+        <p:cNvPr id="1" name=""/>
+        <p:cNvGrpSpPr/>
+        <p:nvPr/>
+      </p:nvGrpSpPr>
+      <p:grpSpPr>
+        <a:xfrm>
+          <a:off x="0" y="0"/>
+          <a:ext cx="0" cy="0"/>
+          <a:chOff x="0" y="0"/>
+          <a:chExt cx="0" cy="0"/>
+        </a:xfrm>
+      </p:grpSpPr>
+      <p:pic>
+        <p:nvPicPr>
+          <p:cNvPr id="5" name="Espace réservé du contenu 4">
+            <a:extLst>
+              <a:ext uri="{FF2B5EF4-FFF2-40B4-BE49-F238E27FC236}">
+                <a16:creationId xmlns:a16="http://schemas.microsoft.com/office/drawing/2014/main" id="{2894EE87-C10F-C2AC-44DB-1A002CE45605}"/>
+              </a:ext>
+            </a:extLst>
+          </p:cNvPr>
+          <p:cNvPicPr>
+            <a:picLocks noGrp="1" noChangeAspect="1"/>
+          </p:cNvPicPr>
+          <p:nvPr>
+            <p:ph idx="1"/>
+          </p:nvPr>
+        </p:nvPicPr>
+        <p:blipFill>
+          <a:blip r:embed="rId2">
+            <a:extLst>
+              <a:ext uri="{28A0092B-C50C-407E-A947-70E740481C1C}">
+                <a14:useLocalDpi xmlns:a14="http://schemas.microsoft.com/office/drawing/2010/main" val="0"/>
+              </a:ext>
+            </a:extLst>
+          </a:blip>
+          <a:stretch>
+            <a:fillRect/>
+          </a:stretch>
+        </p:blipFill>
+        <p:spPr>
+          <a:xfrm>
+            <a:off x="3676813" y="967632"/>
+            <a:ext cx="4488180" cy="3740150"/>
+          </a:xfrm>
+          <a:prstGeom prst="rect">
+            <a:avLst/>
+          </a:prstGeom>
+        </p:spPr>
+      </p:pic>
+    </p:spTree>
+    <p:extLst>
+      <p:ext uri="{BB962C8B-B14F-4D97-AF65-F5344CB8AC3E}">
+        <p14:creationId xmlns:p14="http://schemas.microsoft.com/office/powerpoint/2010/main" val="2449617363"/>
+      </p:ext>
+    </p:extLst>
+  </p:cSld>
+  <p:clrMapOvr>
+    <a:masterClrMapping/>
+  </p:clrMapOvr>
+</p:sld>
+</file>
+
+<file path=ppt/slides/slide24.xml><?xml version="1.0" encoding="utf-8"?>
+<p:sld xmlns:a="http://schemas.openxmlformats.org/drawingml/2006/main" xmlns:r="http://schemas.openxmlformats.org/officeDocument/2006/relationships" xmlns:p="http://schemas.openxmlformats.org/presentationml/2006/main">
+  <p:cSld>
+    <p:spTree>
+      <p:nvGrpSpPr>
+        <p:cNvPr id="1" name=""/>
+        <p:cNvGrpSpPr/>
+        <p:nvPr/>
+      </p:nvGrpSpPr>
+      <p:grpSpPr>
+        <a:xfrm>
+          <a:off x="0" y="0"/>
+          <a:ext cx="0" cy="0"/>
+          <a:chOff x="0" y="0"/>
+          <a:chExt cx="0" cy="0"/>
+        </a:xfrm>
+      </p:grpSpPr>
+      <p:sp>
+        <p:nvSpPr>
+          <p:cNvPr id="2" name="Titre 1">
+            <a:extLst>
+              <a:ext uri="{FF2B5EF4-FFF2-40B4-BE49-F238E27FC236}">
+                <a16:creationId xmlns:a16="http://schemas.microsoft.com/office/drawing/2014/main" id="{AFD15BD0-D23D-BCDB-DC4F-EC9E34FD8E77}"/>
+              </a:ext>
+            </a:extLst>
+          </p:cNvPr>
+          <p:cNvSpPr>
+            <a:spLocks noGrp="1"/>
+          </p:cNvSpPr>
+          <p:nvPr>
+            <p:ph type="title"/>
+          </p:nvPr>
+        </p:nvSpPr>
+        <p:spPr/>
+        <p:txBody>
+          <a:bodyPr/>
+          <a:lstStyle/>
+          <a:p>
+            <a:r>
+              <a:rPr lang="fr-CA" dirty="0"/>
+              <a:t>Discussion</a:t>
+            </a:r>
+          </a:p>
+        </p:txBody>
+      </p:sp>
+      <p:sp>
+        <p:nvSpPr>
+          <p:cNvPr id="3" name="Espace réservé du contenu 2">
+            <a:extLst>
+              <a:ext uri="{FF2B5EF4-FFF2-40B4-BE49-F238E27FC236}">
+                <a16:creationId xmlns:a16="http://schemas.microsoft.com/office/drawing/2014/main" id="{7FDDC518-1F1F-76F1-2545-8D01AE3B32C4}"/>
+              </a:ext>
+            </a:extLst>
+          </p:cNvPr>
+          <p:cNvSpPr>
+            <a:spLocks noGrp="1"/>
+          </p:cNvSpPr>
+          <p:nvPr>
+            <p:ph idx="1"/>
+          </p:nvPr>
+        </p:nvSpPr>
+        <p:spPr/>
+        <p:txBody>
+          <a:bodyPr/>
+          <a:lstStyle/>
+          <a:p>
+            <a:endParaRPr lang="fr-CA"/>
+          </a:p>
+        </p:txBody>
+      </p:sp>
+    </p:spTree>
+    <p:extLst>
+      <p:ext uri="{BB962C8B-B14F-4D97-AF65-F5344CB8AC3E}">
+        <p14:creationId xmlns:p14="http://schemas.microsoft.com/office/powerpoint/2010/main" val="901628721"/>
+      </p:ext>
+    </p:extLst>
+  </p:cSld>
+  <p:clrMapOvr>
+    <a:masterClrMapping/>
+  </p:clrMapOvr>
+</p:sld>
+</file>
+
+<file path=ppt/slides/slide25.xml><?xml version="1.0" encoding="utf-8"?>
+<p:sld xmlns:a="http://schemas.openxmlformats.org/drawingml/2006/main" xmlns:r="http://schemas.openxmlformats.org/officeDocument/2006/relationships" xmlns:p="http://schemas.openxmlformats.org/presentationml/2006/main">
+  <p:cSld>
+    <p:bg>
+      <p:bgPr>
+        <a:solidFill>
+          <a:schemeClr val="bg1"/>
+        </a:solidFill>
+        <a:effectLst/>
+      </p:bgPr>
+    </p:bg>
+    <p:spTree>
+      <p:nvGrpSpPr>
+        <p:cNvPr id="1" name=""/>
+        <p:cNvGrpSpPr/>
+        <p:nvPr/>
+      </p:nvGrpSpPr>
+      <p:grpSpPr>
+        <a:xfrm>
+          <a:off x="0" y="0"/>
+          <a:ext cx="0" cy="0"/>
+          <a:chOff x="0" y="0"/>
+          <a:chExt cx="0" cy="0"/>
+        </a:xfrm>
+      </p:grpSpPr>
+      <p:sp useBgFill="1">
+        <p:nvSpPr>
+          <p:cNvPr id="2055" name="Rectangle 2054">
+            <a:extLst>
+              <a:ext uri="{FF2B5EF4-FFF2-40B4-BE49-F238E27FC236}">
+                <a16:creationId xmlns:a16="http://schemas.microsoft.com/office/drawing/2014/main" id="{E49D7415-2F11-44C2-B6AA-13A25B6814B9}"/>
+              </a:ext>
+              <a:ext uri="{C183D7F6-B498-43B3-948B-1728B52AA6E4}">
+                <adec:decorative xmlns:adec="http://schemas.microsoft.com/office/drawing/2017/decorative" val="1"/>
+              </a:ext>
+            </a:extLst>
+          </p:cNvPr>
+          <p:cNvSpPr>
+            <a:spLocks noGrp="1" noRot="1" noChangeAspect="1" noMove="1" noResize="1" noEditPoints="1" noAdjustHandles="1" noChangeArrowheads="1" noChangeShapeType="1" noTextEdit="1"/>
+          </p:cNvSpPr>
+          <p:nvPr>
+            <p:extLst>
+              <p:ext uri="{386F3935-93C4-4BCD-93E2-E3B085C9AB24}">
+                <p16:designElem xmlns:p16="http://schemas.microsoft.com/office/powerpoint/2015/main" val="1"/>
+              </p:ext>
+            </p:extLst>
+          </p:nvPr>
+        </p:nvSpPr>
+        <p:spPr>
+          <a:xfrm>
+            <a:off x="0" y="0"/>
+            <a:ext cx="12192000" cy="6858000"/>
+          </a:xfrm>
+          <a:prstGeom prst="rect">
+            <a:avLst/>
+          </a:prstGeom>
+          <a:ln w="12700" cap="flat" cmpd="sng" algn="ctr">
+            <a:noFill/>
+            <a:prstDash val="solid"/>
+            <a:miter lim="800000"/>
+          </a:ln>
+          <a:effectLst/>
+          <a:extLst>
+            <a:ext uri="{91240B29-F687-4F45-9708-019B960494DF}">
+              <a14:hiddenLine xmlns:a14="http://schemas.microsoft.com/office/drawing/2010/main" w="12700" cap="flat" cmpd="sng" algn="ctr">
+                <a:solidFill>
+                  <a:schemeClr val="accent1">
+                    <a:shade val="50000"/>
+                  </a:schemeClr>
+                </a:solidFill>
+                <a:prstDash val="solid"/>
+                <a:miter lim="800000"/>
+              </a14:hiddenLine>
+            </a:ext>
+          </a:extLst>
+        </p:spPr>
+        <p:style>
+          <a:lnRef idx="2">
+            <a:schemeClr val="accent1">
+              <a:shade val="50000"/>
+            </a:schemeClr>
+          </a:lnRef>
+          <a:fillRef idx="1">
+            <a:schemeClr val="accent1"/>
+          </a:fillRef>
+          <a:effectRef idx="0">
+            <a:schemeClr val="accent1"/>
+          </a:effectRef>
+          <a:fontRef idx="minor">
+            <a:schemeClr val="lt1"/>
+          </a:fontRef>
+        </p:style>
+        <p:txBody>
+          <a:bodyPr rtlCol="0" anchor="ctr"/>
+          <a:lstStyle/>
+          <a:p>
+            <a:pPr algn="ctr"/>
+            <a:endParaRPr lang="en-US"/>
+          </a:p>
+        </p:txBody>
+      </p:sp>
+      <p:sp>
+        <p:nvSpPr>
+          <p:cNvPr id="2" name="Titre 1">
+            <a:extLst>
+              <a:ext uri="{FF2B5EF4-FFF2-40B4-BE49-F238E27FC236}">
+                <a16:creationId xmlns:a16="http://schemas.microsoft.com/office/drawing/2014/main" id="{A89A0B66-12A9-A560-B2C3-D5DE68D00757}"/>
+              </a:ext>
+            </a:extLst>
+          </p:cNvPr>
+          <p:cNvSpPr>
+            <a:spLocks noGrp="1"/>
+          </p:cNvSpPr>
+          <p:nvPr>
+            <p:ph type="title"/>
+          </p:nvPr>
+        </p:nvSpPr>
+        <p:spPr>
+          <a:xfrm>
+            <a:off x="704088" y="4023657"/>
+            <a:ext cx="3794760" cy="2110444"/>
+          </a:xfrm>
+        </p:spPr>
+        <p:txBody>
+          <a:bodyPr>
+            <a:normAutofit/>
+          </a:bodyPr>
+          <a:lstStyle/>
+          <a:p>
+            <a:r>
+              <a:rPr lang="fr-CA" dirty="0"/>
+              <a:t>Conclusion</a:t>
+            </a:r>
+          </a:p>
+        </p:txBody>
+      </p:sp>
+      <p:pic>
+        <p:nvPicPr>
+          <p:cNvPr id="2050" name="Picture 2" descr="Le chevalier cuivré, un poisson qui fraie à la Saint-Jean-Baptiste |  Radio-Canada">
+            <a:extLst>
+              <a:ext uri="{FF2B5EF4-FFF2-40B4-BE49-F238E27FC236}">
+                <a16:creationId xmlns:a16="http://schemas.microsoft.com/office/drawing/2014/main" id="{6E929EB8-0E77-8D30-C757-71AEE670B488}"/>
+              </a:ext>
+            </a:extLst>
+          </p:cNvPr>
+          <p:cNvPicPr>
+            <a:picLocks noChangeAspect="1" noChangeArrowheads="1"/>
+          </p:cNvPicPr>
+          <p:nvPr/>
+        </p:nvPicPr>
+        <p:blipFill rotWithShape="1">
+          <a:blip r:embed="rId2">
+            <a:extLst>
+              <a:ext uri="{28A0092B-C50C-407E-A947-70E740481C1C}">
+                <a14:useLocalDpi xmlns:a14="http://schemas.microsoft.com/office/drawing/2010/main" val="0"/>
+              </a:ext>
+            </a:extLst>
+          </a:blip>
+          <a:srcRect l="1" t="19251" r="1" b="28952"/>
+          <a:stretch>
+            <a:fillRect/>
+          </a:stretch>
+        </p:blipFill>
+        <p:spPr bwMode="auto">
+          <a:xfrm>
+            <a:off x="800100" y="717656"/>
+            <a:ext cx="10591800" cy="3086100"/>
+          </a:xfrm>
+          <a:prstGeom prst="rect">
+            <a:avLst/>
+          </a:prstGeom>
+          <a:noFill/>
+          <a:extLst>
+            <a:ext uri="{909E8E84-426E-40DD-AFC4-6F175D3DCCD1}">
+              <a14:hiddenFill xmlns:a14="http://schemas.microsoft.com/office/drawing/2010/main">
+                <a:solidFill>
+                  <a:srgbClr val="FFFFFF"/>
+                </a:solidFill>
+              </a14:hiddenFill>
+            </a:ext>
+          </a:extLst>
+        </p:spPr>
+      </p:pic>
+      <p:cxnSp>
+        <p:nvCxnSpPr>
+          <p:cNvPr id="2057" name="Straight Connector 2056">
+            <a:extLst>
+              <a:ext uri="{FF2B5EF4-FFF2-40B4-BE49-F238E27FC236}">
+                <a16:creationId xmlns:a16="http://schemas.microsoft.com/office/drawing/2014/main" id="{8E0104E4-99BC-494F-8342-F250828E574F}"/>
+              </a:ext>
+              <a:ext uri="{C183D7F6-B498-43B3-948B-1728B52AA6E4}">
+                <adec:decorative xmlns:adec="http://schemas.microsoft.com/office/drawing/2017/decorative" val="1"/>
+              </a:ext>
+            </a:extLst>
+          </p:cNvPr>
+          <p:cNvCxnSpPr>
+            <a:cxnSpLocks noGrp="1" noRot="1" noChangeAspect="1" noMove="1" noResize="1" noEditPoints="1" noAdjustHandles="1" noChangeArrowheads="1" noChangeShapeType="1"/>
+          </p:cNvCxnSpPr>
+          <p:nvPr>
+            <p:extLst>
+              <p:ext uri="{386F3935-93C4-4BCD-93E2-E3B085C9AB24}">
+                <p16:designElem xmlns:p16="http://schemas.microsoft.com/office/powerpoint/2015/main" val="1"/>
+              </p:ext>
+            </p:extLst>
+          </p:nvPr>
+        </p:nvCxnSpPr>
+        <p:spPr>
+          <a:xfrm flipV="1">
+            <a:off x="4876800" y="4114590"/>
+            <a:ext cx="9818" cy="2019510"/>
+          </a:xfrm>
+          <a:prstGeom prst="line">
+            <a:avLst/>
+          </a:prstGeom>
+          <a:ln w="12700">
+            <a:solidFill>
+              <a:schemeClr val="tx1"/>
+            </a:solidFill>
+          </a:ln>
+        </p:spPr>
+        <p:style>
+          <a:lnRef idx="1">
+            <a:schemeClr val="accent1"/>
+          </a:lnRef>
+          <a:fillRef idx="0">
+            <a:schemeClr val="accent1"/>
+          </a:fillRef>
+          <a:effectRef idx="0">
+            <a:schemeClr val="accent1"/>
+          </a:effectRef>
+          <a:fontRef idx="minor">
+            <a:schemeClr val="tx1"/>
+          </a:fontRef>
+        </p:style>
+      </p:cxnSp>
+      <p:sp>
+        <p:nvSpPr>
+          <p:cNvPr id="3" name="Espace réservé du contenu 2">
+            <a:extLst>
+              <a:ext uri="{FF2B5EF4-FFF2-40B4-BE49-F238E27FC236}">
+                <a16:creationId xmlns:a16="http://schemas.microsoft.com/office/drawing/2014/main" id="{D5F08C3C-2B07-D167-483B-592FFD9479FB}"/>
+              </a:ext>
+            </a:extLst>
+          </p:cNvPr>
+          <p:cNvSpPr>
+            <a:spLocks noGrp="1"/>
+          </p:cNvSpPr>
+          <p:nvPr>
+            <p:ph idx="1"/>
+          </p:nvPr>
+        </p:nvSpPr>
+        <p:spPr>
+          <a:xfrm>
+            <a:off x="5350933" y="4088705"/>
+            <a:ext cx="6135924" cy="2093976"/>
+          </a:xfrm>
+        </p:spPr>
+        <p:txBody>
+          <a:bodyPr>
+            <a:normAutofit/>
+          </a:bodyPr>
+          <a:lstStyle/>
+          <a:p>
+            <a:r>
+              <a:rPr lang="fr-CA" dirty="0"/>
+              <a:t>Important de continuer à faire efforts</a:t>
+            </a:r>
+            <a:endParaRPr lang="fr-CA"/>
+          </a:p>
+          <a:p>
+            <a:r>
+              <a:rPr lang="fr-CA" dirty="0"/>
+              <a:t>Mise en place d’ensemencement de pré-adultes</a:t>
+            </a:r>
+            <a:endParaRPr lang="fr-CA"/>
+          </a:p>
+          <a:p>
+            <a:r>
+              <a:rPr lang="fr-CA" dirty="0"/>
+              <a:t>Informations supplémentaires et autres études à faire, </a:t>
+            </a:r>
+            <a:br>
+              <a:rPr lang="fr-CA" dirty="0"/>
+            </a:br>
+            <a:r>
+              <a:rPr lang="fr-CA" dirty="0"/>
+              <a:t>car encore beaucoup d’incertitude</a:t>
+            </a:r>
+            <a:endParaRPr lang="fr-CA"/>
+          </a:p>
+        </p:txBody>
+      </p:sp>
+      <p:sp>
+        <p:nvSpPr>
+          <p:cNvPr id="4" name="ZoneTexte 3">
+            <a:extLst>
+              <a:ext uri="{FF2B5EF4-FFF2-40B4-BE49-F238E27FC236}">
+                <a16:creationId xmlns:a16="http://schemas.microsoft.com/office/drawing/2014/main" id="{4908DAB4-9378-641C-7822-F8FFCB3F9F8A}"/>
+              </a:ext>
+            </a:extLst>
+          </p:cNvPr>
+          <p:cNvSpPr txBox="1"/>
+          <p:nvPr/>
+        </p:nvSpPr>
+        <p:spPr>
+          <a:xfrm>
+            <a:off x="904672" y="787940"/>
+            <a:ext cx="2791028" cy="338554"/>
+          </a:xfrm>
+          <a:prstGeom prst="rect">
+            <a:avLst/>
+          </a:prstGeom>
+          <a:noFill/>
+        </p:spPr>
+        <p:txBody>
+          <a:bodyPr wrap="square" rtlCol="0">
+            <a:spAutoFit/>
+          </a:bodyPr>
+          <a:lstStyle/>
+          <a:p>
+            <a:r>
+              <a:rPr lang="fr-CA" sz="800" dirty="0">
+                <a:solidFill>
+                  <a:schemeClr val="tx1">
+                    <a:lumMod val="95000"/>
+                    <a:lumOff val="5000"/>
+                  </a:schemeClr>
+                </a:solidFill>
+              </a:rPr>
+              <a:t>https://ici.radio-canada.ca/nouvelle/1803788/chevalier-cuivre-espece-en-voie-de-disparition-reproduction-artificielle</a:t>
+            </a:r>
+          </a:p>
+        </p:txBody>
+      </p:sp>
+    </p:spTree>
+    <p:extLst>
+      <p:ext uri="{BB962C8B-B14F-4D97-AF65-F5344CB8AC3E}">
+        <p14:creationId xmlns:p14="http://schemas.microsoft.com/office/powerpoint/2010/main" val="1209728823"/>
+      </p:ext>
+    </p:extLst>
+  </p:cSld>
+  <p:clrMapOvr>
+    <a:masterClrMapping/>
+  </p:clrMapOvr>
+</p:sld>
+</file>
+
+<file path=ppt/slides/slide26.xml><?xml version="1.0" encoding="utf-8"?>
+<p:sld xmlns:a="http://schemas.openxmlformats.org/drawingml/2006/main" xmlns:r="http://schemas.openxmlformats.org/officeDocument/2006/relationships" xmlns:p="http://schemas.openxmlformats.org/presentationml/2006/main">
+  <p:cSld>
+    <p:bg>
+      <p:bgPr>
+        <a:solidFill>
+          <a:schemeClr val="bg1"/>
+        </a:solidFill>
+        <a:effectLst/>
+      </p:bgPr>
+    </p:bg>
+    <p:spTree>
+      <p:nvGrpSpPr>
+        <p:cNvPr id="1" name=""/>
+        <p:cNvGrpSpPr/>
+        <p:nvPr/>
+      </p:nvGrpSpPr>
+      <p:grpSpPr>
+        <a:xfrm>
+          <a:off x="0" y="0"/>
+          <a:ext cx="0" cy="0"/>
+          <a:chOff x="0" y="0"/>
+          <a:chExt cx="0" cy="0"/>
+        </a:xfrm>
+      </p:grpSpPr>
+      <p:cxnSp>
+        <p:nvCxnSpPr>
+          <p:cNvPr id="3079" name="Straight Connector 3078">
+            <a:extLst>
+              <a:ext uri="{FF2B5EF4-FFF2-40B4-BE49-F238E27FC236}">
+                <a16:creationId xmlns:a16="http://schemas.microsoft.com/office/drawing/2014/main" id="{F64F9B95-9045-48D2-B9F3-2927E98F54AA}"/>
+              </a:ext>
+              <a:ext uri="{C183D7F6-B498-43B3-948B-1728B52AA6E4}">
+                <adec:decorative xmlns:adec="http://schemas.microsoft.com/office/drawing/2017/decorative" val="1"/>
+              </a:ext>
+            </a:extLst>
+          </p:cNvPr>
+          <p:cNvCxnSpPr>
+            <a:cxnSpLocks noGrp="1" noRot="1" noChangeAspect="1" noMove="1" noResize="1" noEditPoints="1" noAdjustHandles="1" noChangeArrowheads="1" noChangeShapeType="1"/>
+          </p:cNvCxnSpPr>
+          <p:nvPr>
+            <p:extLst>
+              <p:ext uri="{386F3935-93C4-4BCD-93E2-E3B085C9AB24}">
+                <p16:designElem xmlns:p16="http://schemas.microsoft.com/office/powerpoint/2015/main" val="1"/>
+              </p:ext>
+            </p:extLst>
+          </p:nvPr>
+        </p:nvCxnSpPr>
+        <p:spPr>
+          <a:xfrm>
+            <a:off x="800100" y="723900"/>
+            <a:ext cx="10591800" cy="0"/>
+          </a:xfrm>
+          <a:prstGeom prst="line">
+            <a:avLst/>
+          </a:prstGeom>
+          <a:ln w="44450">
+            <a:solidFill>
+              <a:schemeClr val="tx1"/>
+            </a:solidFill>
+          </a:ln>
+        </p:spPr>
+        <p:style>
+          <a:lnRef idx="1">
+            <a:schemeClr val="accent1"/>
+          </a:lnRef>
+          <a:fillRef idx="0">
+            <a:schemeClr val="accent1"/>
+          </a:fillRef>
+          <a:effectRef idx="0">
+            <a:schemeClr val="accent1"/>
+          </a:effectRef>
+          <a:fontRef idx="minor">
+            <a:schemeClr val="tx1"/>
+          </a:fontRef>
+        </p:style>
+      </p:cxnSp>
+      <p:cxnSp>
+        <p:nvCxnSpPr>
+          <p:cNvPr id="3081" name="Straight Connector 3080">
+            <a:extLst>
+              <a:ext uri="{FF2B5EF4-FFF2-40B4-BE49-F238E27FC236}">
+                <a16:creationId xmlns:a16="http://schemas.microsoft.com/office/drawing/2014/main" id="{085AA86F-6A4D-4BCB-A045-D992CDC2959B}"/>
+              </a:ext>
+              <a:ext uri="{C183D7F6-B498-43B3-948B-1728B52AA6E4}">
+                <adec:decorative xmlns:adec="http://schemas.microsoft.com/office/drawing/2017/decorative" val="1"/>
+              </a:ext>
+            </a:extLst>
+          </p:cNvPr>
+          <p:cNvCxnSpPr>
+            <a:cxnSpLocks noGrp="1" noRot="1" noChangeAspect="1" noMove="1" noResize="1" noEditPoints="1" noAdjustHandles="1" noChangeArrowheads="1" noChangeShapeType="1"/>
+          </p:cNvCxnSpPr>
+          <p:nvPr>
+            <p:extLst>
+              <p:ext uri="{386F3935-93C4-4BCD-93E2-E3B085C9AB24}">
+                <p16:designElem xmlns:p16="http://schemas.microsoft.com/office/powerpoint/2015/main" val="1"/>
+              </p:ext>
+            </p:extLst>
+          </p:nvPr>
+        </p:nvCxnSpPr>
+        <p:spPr>
+          <a:xfrm>
+            <a:off x="800100" y="6142781"/>
+            <a:ext cx="10591800" cy="0"/>
+          </a:xfrm>
+          <a:prstGeom prst="line">
+            <a:avLst/>
+          </a:prstGeom>
+          <a:ln w="12700">
+            <a:solidFill>
+              <a:schemeClr val="tx1"/>
+            </a:solidFill>
+          </a:ln>
+        </p:spPr>
+        <p:style>
+          <a:lnRef idx="1">
+            <a:schemeClr val="accent1"/>
+          </a:lnRef>
+          <a:fillRef idx="0">
+            <a:schemeClr val="accent1"/>
+          </a:fillRef>
+          <a:effectRef idx="0">
+            <a:schemeClr val="accent1"/>
+          </a:effectRef>
+          <a:fontRef idx="minor">
+            <a:schemeClr val="tx1"/>
+          </a:fontRef>
+        </p:style>
+      </p:cxnSp>
+      <p:sp useBgFill="1">
+        <p:nvSpPr>
+          <p:cNvPr id="3083" name="Rectangle 3082">
+            <a:extLst>
+              <a:ext uri="{FF2B5EF4-FFF2-40B4-BE49-F238E27FC236}">
+                <a16:creationId xmlns:a16="http://schemas.microsoft.com/office/drawing/2014/main" id="{33E93247-6229-44AB-A550-739E971E690B}"/>
+              </a:ext>
+              <a:ext uri="{C183D7F6-B498-43B3-948B-1728B52AA6E4}">
+                <adec:decorative xmlns:adec="http://schemas.microsoft.com/office/drawing/2017/decorative" val="1"/>
+              </a:ext>
+            </a:extLst>
+          </p:cNvPr>
+          <p:cNvSpPr>
+            <a:spLocks noGrp="1" noRot="1" noChangeAspect="1" noMove="1" noResize="1" noEditPoints="1" noAdjustHandles="1" noChangeArrowheads="1" noChangeShapeType="1" noTextEdit="1"/>
+          </p:cNvSpPr>
+          <p:nvPr>
+            <p:extLst>
+              <p:ext uri="{386F3935-93C4-4BCD-93E2-E3B085C9AB24}">
+                <p16:designElem xmlns:p16="http://schemas.microsoft.com/office/powerpoint/2015/main" val="1"/>
+              </p:ext>
+            </p:extLst>
+          </p:nvPr>
+        </p:nvSpPr>
+        <p:spPr>
+          <a:xfrm>
+            <a:off x="0" y="0"/>
+            <a:ext cx="12192000" cy="6858000"/>
+          </a:xfrm>
+          <a:prstGeom prst="rect">
+            <a:avLst/>
+          </a:prstGeom>
+          <a:ln w="12700" cap="flat" cmpd="sng" algn="ctr">
+            <a:noFill/>
+            <a:prstDash val="solid"/>
+            <a:miter lim="800000"/>
+          </a:ln>
+          <a:effectLst/>
+          <a:extLst>
+            <a:ext uri="{91240B29-F687-4F45-9708-019B960494DF}">
+              <a14:hiddenLine xmlns:a14="http://schemas.microsoft.com/office/drawing/2010/main" w="12700" cap="flat" cmpd="sng" algn="ctr">
+                <a:solidFill>
+                  <a:schemeClr val="accent1">
+                    <a:shade val="50000"/>
+                  </a:schemeClr>
+                </a:solidFill>
+                <a:prstDash val="solid"/>
+                <a:miter lim="800000"/>
+              </a14:hiddenLine>
+            </a:ext>
+          </a:extLst>
+        </p:spPr>
+        <p:style>
+          <a:lnRef idx="2">
+            <a:schemeClr val="accent1">
+              <a:shade val="50000"/>
+            </a:schemeClr>
+          </a:lnRef>
+          <a:fillRef idx="1">
+            <a:schemeClr val="accent1"/>
+          </a:fillRef>
+          <a:effectRef idx="0">
+            <a:schemeClr val="accent1"/>
+          </a:effectRef>
+          <a:fontRef idx="minor">
+            <a:schemeClr val="lt1"/>
+          </a:fontRef>
+        </p:style>
+        <p:txBody>
+          <a:bodyPr rtlCol="0" anchor="ctr"/>
+          <a:lstStyle/>
+          <a:p>
+            <a:pPr algn="ctr"/>
+            <a:endParaRPr lang="en-US"/>
+          </a:p>
+        </p:txBody>
+      </p:sp>
+      <p:pic>
+        <p:nvPicPr>
+          <p:cNvPr id="3074" name="Picture 2" descr="Pleins feux sur... le chevalier cuivré : portrait d'une espèce « en danger  » - Ministère des Forêts, de la Faune et des Parcs">
+            <a:extLst>
+              <a:ext uri="{FF2B5EF4-FFF2-40B4-BE49-F238E27FC236}">
+                <a16:creationId xmlns:a16="http://schemas.microsoft.com/office/drawing/2014/main" id="{4C00A1DA-6ED6-C7B3-FAC3-90C08EBD5B83}"/>
+              </a:ext>
+            </a:extLst>
+          </p:cNvPr>
+          <p:cNvPicPr>
+            <a:picLocks noChangeAspect="1" noChangeArrowheads="1"/>
+          </p:cNvPicPr>
+          <p:nvPr/>
+        </p:nvPicPr>
+        <p:blipFill rotWithShape="1">
+          <a:blip r:embed="rId2">
+            <a:extLst>
+              <a:ext uri="{28A0092B-C50C-407E-A947-70E740481C1C}">
+                <a14:useLocalDpi xmlns:a14="http://schemas.microsoft.com/office/drawing/2010/main" val="0"/>
+              </a:ext>
+            </a:extLst>
+          </a:blip>
+          <a:srcRect l="14444" t="-106" r="14444" b="104"/>
+          <a:stretch>
+            <a:fillRect/>
+          </a:stretch>
+        </p:blipFill>
+        <p:spPr bwMode="auto">
+          <a:xfrm>
+            <a:off x="20" y="10"/>
+            <a:ext cx="12191980" cy="6857990"/>
+          </a:xfrm>
+          <a:prstGeom prst="rect">
+            <a:avLst/>
+          </a:prstGeom>
+          <a:noFill/>
+          <a:extLst>
+            <a:ext uri="{909E8E84-426E-40DD-AFC4-6F175D3DCCD1}">
+              <a14:hiddenFill xmlns:a14="http://schemas.microsoft.com/office/drawing/2010/main">
+                <a:solidFill>
+                  <a:srgbClr val="FFFFFF"/>
+                </a:solidFill>
+              </a14:hiddenFill>
+            </a:ext>
+          </a:extLst>
+        </p:spPr>
+      </p:pic>
+      <p:sp>
+        <p:nvSpPr>
+          <p:cNvPr id="3085" name="Rectangle 3084">
+            <a:extLst>
+              <a:ext uri="{FF2B5EF4-FFF2-40B4-BE49-F238E27FC236}">
+                <a16:creationId xmlns:a16="http://schemas.microsoft.com/office/drawing/2014/main" id="{6BB6B482-ACCA-4938-8AEA-49D525C17221}"/>
+              </a:ext>
+              <a:ext uri="{C183D7F6-B498-43B3-948B-1728B52AA6E4}">
+                <adec:decorative xmlns:adec="http://schemas.microsoft.com/office/drawing/2017/decorative" val="1"/>
+              </a:ext>
+            </a:extLst>
+          </p:cNvPr>
+          <p:cNvSpPr>
+            <a:spLocks noGrp="1" noRot="1" noChangeAspect="1" noMove="1" noResize="1" noEditPoints="1" noAdjustHandles="1" noChangeArrowheads="1" noChangeShapeType="1" noTextEdit="1"/>
+          </p:cNvSpPr>
+          <p:nvPr>
+            <p:extLst>
+              <p:ext uri="{386F3935-93C4-4BCD-93E2-E3B085C9AB24}">
+                <p16:designElem xmlns:p16="http://schemas.microsoft.com/office/powerpoint/2015/main" val="1"/>
+              </p:ext>
+            </p:extLst>
+          </p:nvPr>
+        </p:nvSpPr>
+        <p:spPr>
+          <a:xfrm rot="5400000">
+            <a:off x="-46905" y="46904"/>
+            <a:ext cx="6865150" cy="6771342"/>
+          </a:xfrm>
+          <a:prstGeom prst="rect">
+            <a:avLst/>
+          </a:prstGeom>
+          <a:gradFill>
+            <a:gsLst>
+              <a:gs pos="42000">
+                <a:srgbClr val="000000">
+                  <a:alpha val="18000"/>
+                </a:srgbClr>
+              </a:gs>
+              <a:gs pos="0">
+                <a:srgbClr val="000000">
+                  <a:alpha val="0"/>
+                </a:srgbClr>
+              </a:gs>
+              <a:gs pos="100000">
+                <a:srgbClr val="000000">
+                  <a:alpha val="39000"/>
+                </a:srgbClr>
+              </a:gs>
+            </a:gsLst>
+            <a:lin ang="5400000" scaled="1"/>
+          </a:gradFill>
+          <a:ln>
+            <a:noFill/>
+          </a:ln>
+        </p:spPr>
+        <p:style>
+          <a:lnRef idx="2">
+            <a:schemeClr val="accent1">
+              <a:shade val="50000"/>
+            </a:schemeClr>
+          </a:lnRef>
+          <a:fillRef idx="1">
+            <a:schemeClr val="accent1"/>
+          </a:fillRef>
+          <a:effectRef idx="0">
+            <a:schemeClr val="accent1"/>
+          </a:effectRef>
+          <a:fontRef idx="minor">
+            <a:schemeClr val="lt1"/>
+          </a:fontRef>
+        </p:style>
+        <p:txBody>
+          <a:bodyPr rtlCol="0" anchor="ctr"/>
+          <a:lstStyle/>
+          <a:p>
+            <a:pPr algn="ctr"/>
+            <a:endParaRPr lang="en-US" dirty="0"/>
+          </a:p>
+        </p:txBody>
+      </p:sp>
+      <p:sp>
+        <p:nvSpPr>
+          <p:cNvPr id="2" name="Titre 1">
+            <a:extLst>
+              <a:ext uri="{FF2B5EF4-FFF2-40B4-BE49-F238E27FC236}">
+                <a16:creationId xmlns:a16="http://schemas.microsoft.com/office/drawing/2014/main" id="{D1DA8DF0-027D-CBFA-F9E4-EA0F931579EF}"/>
+              </a:ext>
+            </a:extLst>
+          </p:cNvPr>
+          <p:cNvSpPr>
+            <a:spLocks noGrp="1"/>
+          </p:cNvSpPr>
+          <p:nvPr>
+            <p:ph type="title"/>
+          </p:nvPr>
+        </p:nvSpPr>
+        <p:spPr>
+          <a:xfrm>
+            <a:off x="704088" y="871759"/>
+            <a:ext cx="5067300" cy="3497042"/>
+          </a:xfrm>
+        </p:spPr>
+        <p:txBody>
+          <a:bodyPr vert="horz" lIns="91440" tIns="45720" rIns="91440" bIns="45720" rtlCol="0" anchor="t">
+            <a:normAutofit/>
+          </a:bodyPr>
+          <a:lstStyle/>
+          <a:p>
+            <a:r>
+              <a:rPr lang="en-US" sz="5400" dirty="0">
+                <a:solidFill>
+                  <a:srgbClr val="FFFFFF"/>
+                </a:solidFill>
+              </a:rPr>
+              <a:t>Merci !</a:t>
+            </a:r>
+          </a:p>
+        </p:txBody>
+      </p:sp>
+      <p:cxnSp>
+        <p:nvCxnSpPr>
+          <p:cNvPr id="3087" name="Straight Connector 3086">
+            <a:extLst>
+              <a:ext uri="{FF2B5EF4-FFF2-40B4-BE49-F238E27FC236}">
+                <a16:creationId xmlns:a16="http://schemas.microsoft.com/office/drawing/2014/main" id="{EE2E603F-4A95-4FE8-BB06-211DFD75DBEF}"/>
+              </a:ext>
+              <a:ext uri="{C183D7F6-B498-43B3-948B-1728B52AA6E4}">
+                <adec:decorative xmlns:adec="http://schemas.microsoft.com/office/drawing/2017/decorative" val="1"/>
+              </a:ext>
+            </a:extLst>
+          </p:cNvPr>
+          <p:cNvCxnSpPr>
+            <a:cxnSpLocks noGrp="1" noRot="1" noChangeAspect="1" noMove="1" noResize="1" noEditPoints="1" noAdjustHandles="1" noChangeArrowheads="1" noChangeShapeType="1"/>
+          </p:cNvCxnSpPr>
+          <p:nvPr>
+            <p:extLst>
+              <p:ext uri="{386F3935-93C4-4BCD-93E2-E3B085C9AB24}">
+                <p16:designElem xmlns:p16="http://schemas.microsoft.com/office/powerpoint/2015/main" val="1"/>
+              </p:ext>
+            </p:extLst>
+          </p:nvPr>
+        </p:nvCxnSpPr>
+        <p:spPr>
+          <a:xfrm>
+            <a:off x="800100" y="723900"/>
+            <a:ext cx="1638300" cy="0"/>
+          </a:xfrm>
+          <a:prstGeom prst="line">
+            <a:avLst/>
+          </a:prstGeom>
+          <a:ln w="44450">
+            <a:solidFill>
+              <a:srgbClr val="FFFFFF"/>
+            </a:solidFill>
+          </a:ln>
+          <a:effectLst>
+            <a:outerShdw blurRad="50800" dist="38100" dir="2700000" algn="tl" rotWithShape="0">
+              <a:prstClr val="black">
+                <a:alpha val="13000"/>
+              </a:prstClr>
+            </a:outerShdw>
+          </a:effectLst>
+        </p:spPr>
+        <p:style>
+          <a:lnRef idx="1">
+            <a:schemeClr val="accent1"/>
+          </a:lnRef>
+          <a:fillRef idx="0">
+            <a:schemeClr val="accent1"/>
+          </a:fillRef>
+          <a:effectRef idx="0">
+            <a:schemeClr val="accent1"/>
+          </a:effectRef>
+          <a:fontRef idx="minor">
+            <a:schemeClr val="tx1"/>
+          </a:fontRef>
+        </p:style>
+      </p:cxnSp>
+      <p:sp>
+        <p:nvSpPr>
+          <p:cNvPr id="4" name="ZoneTexte 3">
+            <a:extLst>
+              <a:ext uri="{FF2B5EF4-FFF2-40B4-BE49-F238E27FC236}">
+                <a16:creationId xmlns:a16="http://schemas.microsoft.com/office/drawing/2014/main" id="{80693467-78F2-1B86-B867-3754098C5644}"/>
+              </a:ext>
+            </a:extLst>
+          </p:cNvPr>
+          <p:cNvSpPr txBox="1"/>
+          <p:nvPr/>
+        </p:nvSpPr>
+        <p:spPr>
+          <a:xfrm>
+            <a:off x="0" y="6627158"/>
+            <a:ext cx="4001434" cy="230832"/>
+          </a:xfrm>
+          <a:prstGeom prst="rect">
+            <a:avLst/>
+          </a:prstGeom>
+          <a:noFill/>
+        </p:spPr>
+        <p:txBody>
+          <a:bodyPr wrap="square" rtlCol="0">
+            <a:spAutoFit/>
+          </a:bodyPr>
+          <a:lstStyle/>
+          <a:p>
+            <a:r>
+              <a:rPr lang="fr-CA" sz="900" dirty="0"/>
+              <a:t>https://mffp.gouv.qc.ca/jeunesse/chevalier-cuivre-portrait-espece-danger/</a:t>
+            </a:r>
+          </a:p>
+        </p:txBody>
+      </p:sp>
+    </p:spTree>
+    <p:extLst>
+      <p:ext uri="{BB962C8B-B14F-4D97-AF65-F5344CB8AC3E}">
+        <p14:creationId xmlns:p14="http://schemas.microsoft.com/office/powerpoint/2010/main" val="784584029"/>
+      </p:ext>
+    </p:extLst>
+  </p:cSld>
+  <p:clrMapOvr>
+    <a:overrideClrMapping bg1="dk1" tx1="lt1" bg2="dk2" tx2="lt2" accent1="accent1" accent2="accent2" accent3="accent3" accent4="accent4" accent5="accent5" accent6="accent6" hlink="hlink" folHlink="folHlink"/>
   </p:clrMapOvr>
 </p:sld>
 </file>

--- a/Rapport/Chevalier_cuivré.pptx
+++ b/Rapport/Chevalier_cuivré.pptx
@@ -5,7 +5,7 @@
     <p:sldMasterId id="2147483715" r:id="rId1"/>
   </p:sldMasterIdLst>
   <p:notesMasterIdLst>
-    <p:notesMasterId r:id="rId28"/>
+    <p:notesMasterId r:id="rId30"/>
   </p:notesMasterIdLst>
   <p:sldIdLst>
     <p:sldId id="256" r:id="rId2"/>
@@ -25,15 +25,17 @@
     <p:sldId id="270" r:id="rId16"/>
     <p:sldId id="271" r:id="rId17"/>
     <p:sldId id="272" r:id="rId18"/>
-    <p:sldId id="273" r:id="rId19"/>
-    <p:sldId id="275" r:id="rId20"/>
-    <p:sldId id="276" r:id="rId21"/>
-    <p:sldId id="277" r:id="rId22"/>
-    <p:sldId id="279" r:id="rId23"/>
-    <p:sldId id="278" r:id="rId24"/>
-    <p:sldId id="280" r:id="rId25"/>
-    <p:sldId id="281" r:id="rId26"/>
-    <p:sldId id="282" r:id="rId27"/>
+    <p:sldId id="284" r:id="rId19"/>
+    <p:sldId id="273" r:id="rId20"/>
+    <p:sldId id="275" r:id="rId21"/>
+    <p:sldId id="276" r:id="rId22"/>
+    <p:sldId id="277" r:id="rId23"/>
+    <p:sldId id="279" r:id="rId24"/>
+    <p:sldId id="278" r:id="rId25"/>
+    <p:sldId id="280" r:id="rId26"/>
+    <p:sldId id="281" r:id="rId27"/>
+    <p:sldId id="282" r:id="rId28"/>
+    <p:sldId id="283" r:id="rId29"/>
   </p:sldIdLst>
   <p:sldSz cx="12192000" cy="6858000"/>
   <p:notesSz cx="6858000" cy="9144000"/>
@@ -132,18 +134,14 @@
       </a:defRPr>
     </a:lvl9pPr>
   </p:defaultTextStyle>
-  <p:extLst>
-    <p:ext uri="{EFAFB233-063F-42B5-8137-9DF3F51BA10A}">
-      <p15:sldGuideLst xmlns:p15="http://schemas.microsoft.com/office/powerpoint/2012/main"/>
-    </p:ext>
-  </p:extLst>
 </p:presentation>
 </file>
 
 <file path=ppt/revisionInfo.xml><?xml version="1.0" encoding="utf-8"?>
 <p1510:revInfo xmlns:a="http://schemas.openxmlformats.org/drawingml/2006/main" xmlns:r="http://schemas.openxmlformats.org/officeDocument/2006/relationships" xmlns:p1510="http://schemas.microsoft.com/office/powerpoint/2015/10/main">
   <p1510:revLst>
-    <p1510:client id="{A04B8DB3-0E07-4C81-8CE6-75F1F7AC2095}" v="70" dt="2026-04-17T01:30:57.318"/>
+    <p1510:client id="{1630DD41-0FF5-535A-0B19-7E7866333F2B}" v="749" dt="2026-04-17T03:37:47.448"/>
+    <p1510:client id="{A04B8DB3-0E07-4C81-8CE6-75F1F7AC2095}" v="258" dt="2026-04-17T03:35:32.830"/>
   </p1510:revLst>
 </p1510:revInfo>
 </file>
@@ -152,8 +150,8 @@
 <pc:chgInfo xmlns:a="http://schemas.openxmlformats.org/drawingml/2006/main" xmlns:r="http://schemas.openxmlformats.org/officeDocument/2006/relationships" xmlns:ac="http://schemas.microsoft.com/office/drawing/2013/main/command" xmlns:pc="http://schemas.microsoft.com/office/powerpoint/2013/main/command">
   <pc:docChgLst>
     <pc:chgData name="Tristan Plasse" userId="13c698b9-43c4-4271-b359-faaadca0774b" providerId="ADAL" clId="{FE460185-D4AE-4375-BA71-CD1D7F2341F0}"/>
-    <pc:docChg chg="undo custSel addSld delSld modSld addMainMaster delMainMaster">
-      <pc:chgData name="Tristan Plasse" userId="13c698b9-43c4-4271-b359-faaadca0774b" providerId="ADAL" clId="{FE460185-D4AE-4375-BA71-CD1D7F2341F0}" dt="2026-04-17T01:31:13.276" v="5059" actId="1076"/>
+    <pc:docChg chg="undo custSel addSld delSld modSld sldOrd addMainMaster delMainMaster">
+      <pc:chgData name="Tristan Plasse" userId="13c698b9-43c4-4271-b359-faaadca0774b" providerId="ADAL" clId="{FE460185-D4AE-4375-BA71-CD1D7F2341F0}" dt="2026-04-17T03:35:32.830" v="5673" actId="20577"/>
       <pc:docMkLst>
         <pc:docMk/>
       </pc:docMkLst>
@@ -267,8 +265,8 @@
           </ac:cxnSpMkLst>
         </pc:cxnChg>
       </pc:sldChg>
-      <pc:sldChg chg="addSp modSp new mod">
-        <pc:chgData name="Tristan Plasse" userId="13c698b9-43c4-4271-b359-faaadca0774b" providerId="ADAL" clId="{FE460185-D4AE-4375-BA71-CD1D7F2341F0}" dt="2026-04-15T21:49:45.861" v="709" actId="1076"/>
+      <pc:sldChg chg="addSp delSp modSp new mod">
+        <pc:chgData name="Tristan Plasse" userId="13c698b9-43c4-4271-b359-faaadca0774b" providerId="ADAL" clId="{FE460185-D4AE-4375-BA71-CD1D7F2341F0}" dt="2026-04-17T03:31:41.256" v="5597" actId="26606"/>
         <pc:sldMkLst>
           <pc:docMk/>
           <pc:sldMk cId="2350281507" sldId="258"/>
@@ -281,8 +279,8 @@
             <ac:spMk id="2" creationId="{85F7DF9E-5635-E99D-49EF-F09E563F0FE1}"/>
           </ac:spMkLst>
         </pc:spChg>
-        <pc:spChg chg="mod">
-          <ac:chgData name="Tristan Plasse" userId="13c698b9-43c4-4271-b359-faaadca0774b" providerId="ADAL" clId="{FE460185-D4AE-4375-BA71-CD1D7F2341F0}" dt="2026-04-15T21:42:10.756" v="522" actId="20577"/>
+        <pc:spChg chg="del mod">
+          <ac:chgData name="Tristan Plasse" userId="13c698b9-43c4-4271-b359-faaadca0774b" providerId="ADAL" clId="{FE460185-D4AE-4375-BA71-CD1D7F2341F0}" dt="2026-04-17T03:31:41.256" v="5597" actId="26606"/>
           <ac:spMkLst>
             <pc:docMk/>
             <pc:sldMk cId="2350281507" sldId="258"/>
@@ -297,6 +295,14 @@
             <ac:spMk id="4" creationId="{3C84EBBA-709C-4ACC-BEB0-09511221D222}"/>
           </ac:spMkLst>
         </pc:spChg>
+        <pc:graphicFrameChg chg="add">
+          <ac:chgData name="Tristan Plasse" userId="13c698b9-43c4-4271-b359-faaadca0774b" providerId="ADAL" clId="{FE460185-D4AE-4375-BA71-CD1D7F2341F0}" dt="2026-04-17T03:31:41.256" v="5597" actId="26606"/>
+          <ac:graphicFrameMkLst>
+            <pc:docMk/>
+            <pc:sldMk cId="2350281507" sldId="258"/>
+            <ac:graphicFrameMk id="6" creationId="{5A794BAE-EB09-B02E-F77D-B89EA998F569}"/>
+          </ac:graphicFrameMkLst>
+        </pc:graphicFrameChg>
       </pc:sldChg>
       <pc:sldChg chg="addSp delSp modSp new mod setBg">
         <pc:chgData name="Tristan Plasse" userId="13c698b9-43c4-4271-b359-faaadca0774b" providerId="ADAL" clId="{FE460185-D4AE-4375-BA71-CD1D7F2341F0}" dt="2026-04-15T21:44:19.349" v="540" actId="1076"/>
@@ -557,7 +563,7 @@
         </pc:cxnChg>
       </pc:sldChg>
       <pc:sldChg chg="addSp delSp modSp new mod">
-        <pc:chgData name="Tristan Plasse" userId="13c698b9-43c4-4271-b359-faaadca0774b" providerId="ADAL" clId="{FE460185-D4AE-4375-BA71-CD1D7F2341F0}" dt="2026-04-16T01:19:53.453" v="2430" actId="20577"/>
+        <pc:chgData name="Tristan Plasse" userId="13c698b9-43c4-4271-b359-faaadca0774b" providerId="ADAL" clId="{FE460185-D4AE-4375-BA71-CD1D7F2341F0}" dt="2026-04-17T02:33:59.954" v="5483" actId="20577"/>
         <pc:sldMkLst>
           <pc:docMk/>
           <pc:sldMk cId="444677078" sldId="265"/>
@@ -579,7 +585,7 @@
           </ac:spMkLst>
         </pc:spChg>
         <pc:spChg chg="add mod">
-          <ac:chgData name="Tristan Plasse" userId="13c698b9-43c4-4271-b359-faaadca0774b" providerId="ADAL" clId="{FE460185-D4AE-4375-BA71-CD1D7F2341F0}" dt="2026-04-16T01:19:53.453" v="2430" actId="20577"/>
+          <ac:chgData name="Tristan Plasse" userId="13c698b9-43c4-4271-b359-faaadca0774b" providerId="ADAL" clId="{FE460185-D4AE-4375-BA71-CD1D7F2341F0}" dt="2026-04-17T02:33:59.954" v="5483" actId="20577"/>
           <ac:spMkLst>
             <pc:docMk/>
             <pc:sldMk cId="444677078" sldId="265"/>
@@ -643,7 +649,7 @@
         </pc:spChg>
       </pc:sldChg>
       <pc:sldChg chg="addSp delSp modSp add mod">
-        <pc:chgData name="Tristan Plasse" userId="13c698b9-43c4-4271-b359-faaadca0774b" providerId="ADAL" clId="{FE460185-D4AE-4375-BA71-CD1D7F2341F0}" dt="2026-04-16T01:21:56.262" v="2594" actId="14100"/>
+        <pc:chgData name="Tristan Plasse" userId="13c698b9-43c4-4271-b359-faaadca0774b" providerId="ADAL" clId="{FE460185-D4AE-4375-BA71-CD1D7F2341F0}" dt="2026-04-17T02:34:03.567" v="5485" actId="20577"/>
         <pc:sldMkLst>
           <pc:docMk/>
           <pc:sldMk cId="1162506719" sldId="267"/>
@@ -665,7 +671,7 @@
           </ac:spMkLst>
         </pc:spChg>
         <pc:spChg chg="mod">
-          <ac:chgData name="Tristan Plasse" userId="13c698b9-43c4-4271-b359-faaadca0774b" providerId="ADAL" clId="{FE460185-D4AE-4375-BA71-CD1D7F2341F0}" dt="2026-04-16T01:21:19.761" v="2587" actId="1076"/>
+          <ac:chgData name="Tristan Plasse" userId="13c698b9-43c4-4271-b359-faaadca0774b" providerId="ADAL" clId="{FE460185-D4AE-4375-BA71-CD1D7F2341F0}" dt="2026-04-17T02:34:03.567" v="5485" actId="20577"/>
           <ac:spMkLst>
             <pc:docMk/>
             <pc:sldMk cId="1162506719" sldId="267"/>
@@ -728,13 +734,13 @@
         </pc:sldMkLst>
       </pc:sldChg>
       <pc:sldChg chg="addSp delSp modSp add mod">
-        <pc:chgData name="Tristan Plasse" userId="13c698b9-43c4-4271-b359-faaadca0774b" providerId="ADAL" clId="{FE460185-D4AE-4375-BA71-CD1D7F2341F0}" dt="2026-04-16T01:36:09.232" v="3013" actId="20577"/>
+        <pc:chgData name="Tristan Plasse" userId="13c698b9-43c4-4271-b359-faaadca0774b" providerId="ADAL" clId="{FE460185-D4AE-4375-BA71-CD1D7F2341F0}" dt="2026-04-17T02:34:06.531" v="5487" actId="20577"/>
         <pc:sldMkLst>
           <pc:docMk/>
           <pc:sldMk cId="4073645163" sldId="269"/>
         </pc:sldMkLst>
         <pc:spChg chg="mod">
-          <ac:chgData name="Tristan Plasse" userId="13c698b9-43c4-4271-b359-faaadca0774b" providerId="ADAL" clId="{FE460185-D4AE-4375-BA71-CD1D7F2341F0}" dt="2026-04-16T01:36:09.232" v="3013" actId="20577"/>
+          <ac:chgData name="Tristan Plasse" userId="13c698b9-43c4-4271-b359-faaadca0774b" providerId="ADAL" clId="{FE460185-D4AE-4375-BA71-CD1D7F2341F0}" dt="2026-04-17T02:34:06.531" v="5487" actId="20577"/>
           <ac:spMkLst>
             <pc:docMk/>
             <pc:sldMk cId="4073645163" sldId="269"/>
@@ -791,7 +797,7 @@
         </pc:picChg>
       </pc:sldChg>
       <pc:sldChg chg="addSp modSp new mod setBg">
-        <pc:chgData name="Tristan Plasse" userId="13c698b9-43c4-4271-b359-faaadca0774b" providerId="ADAL" clId="{FE460185-D4AE-4375-BA71-CD1D7F2341F0}" dt="2026-04-16T02:43:18.894" v="4116" actId="108"/>
+        <pc:chgData name="Tristan Plasse" userId="13c698b9-43c4-4271-b359-faaadca0774b" providerId="ADAL" clId="{FE460185-D4AE-4375-BA71-CD1D7F2341F0}" dt="2026-04-17T02:34:17.176" v="5488" actId="20577"/>
         <pc:sldMkLst>
           <pc:docMk/>
           <pc:sldMk cId="960806995" sldId="270"/>
@@ -805,7 +811,7 @@
           </ac:spMkLst>
         </pc:spChg>
         <pc:spChg chg="mod">
-          <ac:chgData name="Tristan Plasse" userId="13c698b9-43c4-4271-b359-faaadca0774b" providerId="ADAL" clId="{FE460185-D4AE-4375-BA71-CD1D7F2341F0}" dt="2026-04-16T02:43:18.894" v="4116" actId="108"/>
+          <ac:chgData name="Tristan Plasse" userId="13c698b9-43c4-4271-b359-faaadca0774b" providerId="ADAL" clId="{FE460185-D4AE-4375-BA71-CD1D7F2341F0}" dt="2026-04-17T02:34:17.176" v="5488" actId="20577"/>
           <ac:spMkLst>
             <pc:docMk/>
             <pc:sldMk cId="960806995" sldId="270"/>
@@ -987,7 +993,7 @@
         </pc:cxnChg>
       </pc:sldChg>
       <pc:sldChg chg="addSp delSp modSp new mod setBg">
-        <pc:chgData name="Tristan Plasse" userId="13c698b9-43c4-4271-b359-faaadca0774b" providerId="ADAL" clId="{FE460185-D4AE-4375-BA71-CD1D7F2341F0}" dt="2026-04-16T22:11:55.941" v="4134" actId="26606"/>
+        <pc:chgData name="Tristan Plasse" userId="13c698b9-43c4-4271-b359-faaadca0774b" providerId="ADAL" clId="{FE460185-D4AE-4375-BA71-CD1D7F2341F0}" dt="2026-04-17T02:33:55.725" v="5481" actId="20577"/>
         <pc:sldMkLst>
           <pc:docMk/>
           <pc:sldMk cId="3943359794" sldId="274"/>
@@ -1000,12 +1006,28 @@
             <ac:spMk id="2" creationId="{F3A5A10E-A61E-2445-131F-98F4232F9171}"/>
           </ac:spMkLst>
         </pc:spChg>
+        <pc:spChg chg="add mod">
+          <ac:chgData name="Tristan Plasse" userId="13c698b9-43c4-4271-b359-faaadca0774b" providerId="ADAL" clId="{FE460185-D4AE-4375-BA71-CD1D7F2341F0}" dt="2026-04-17T02:33:53.673" v="5479" actId="20577"/>
+          <ac:spMkLst>
+            <pc:docMk/>
+            <pc:sldMk cId="3943359794" sldId="274"/>
+            <ac:spMk id="3" creationId="{76DBA5CA-9694-DA50-372E-DE9E5298136C}"/>
+          </ac:spMkLst>
+        </pc:spChg>
         <pc:spChg chg="del">
           <ac:chgData name="Tristan Plasse" userId="13c698b9-43c4-4271-b359-faaadca0774b" providerId="ADAL" clId="{FE460185-D4AE-4375-BA71-CD1D7F2341F0}" dt="2026-04-16T21:59:01.265" v="4124" actId="478"/>
           <ac:spMkLst>
             <pc:docMk/>
             <pc:sldMk cId="3943359794" sldId="274"/>
             <ac:spMk id="3" creationId="{7D509329-D8E9-DC9D-AA20-8B13EE3B11C5}"/>
+          </ac:spMkLst>
+        </pc:spChg>
+        <pc:spChg chg="add mod">
+          <ac:chgData name="Tristan Plasse" userId="13c698b9-43c4-4271-b359-faaadca0774b" providerId="ADAL" clId="{FE460185-D4AE-4375-BA71-CD1D7F2341F0}" dt="2026-04-17T02:33:55.725" v="5481" actId="20577"/>
+          <ac:spMkLst>
+            <pc:docMk/>
+            <pc:sldMk cId="3943359794" sldId="274"/>
+            <ac:spMk id="4" creationId="{0975B400-8C59-591A-0177-77A6A072BEDE}"/>
           </ac:spMkLst>
         </pc:spChg>
         <pc:spChg chg="add">
@@ -1041,7 +1063,7 @@
           </ac:spMkLst>
         </pc:spChg>
         <pc:picChg chg="add mod ord">
-          <ac:chgData name="Tristan Plasse" userId="13c698b9-43c4-4271-b359-faaadca0774b" providerId="ADAL" clId="{FE460185-D4AE-4375-BA71-CD1D7F2341F0}" dt="2026-04-16T22:11:55.941" v="4134" actId="26606"/>
+          <ac:chgData name="Tristan Plasse" userId="13c698b9-43c4-4271-b359-faaadca0774b" providerId="ADAL" clId="{FE460185-D4AE-4375-BA71-CD1D7F2341F0}" dt="2026-04-17T02:33:28.013" v="5473" actId="1076"/>
           <ac:picMkLst>
             <pc:docMk/>
             <pc:sldMk cId="3943359794" sldId="274"/>
@@ -1049,7 +1071,7 @@
           </ac:picMkLst>
         </pc:picChg>
         <pc:picChg chg="add mod">
-          <ac:chgData name="Tristan Plasse" userId="13c698b9-43c4-4271-b359-faaadca0774b" providerId="ADAL" clId="{FE460185-D4AE-4375-BA71-CD1D7F2341F0}" dt="2026-04-16T22:11:55.941" v="4134" actId="26606"/>
+          <ac:chgData name="Tristan Plasse" userId="13c698b9-43c4-4271-b359-faaadca0774b" providerId="ADAL" clId="{FE460185-D4AE-4375-BA71-CD1D7F2341F0}" dt="2026-04-17T02:31:23.145" v="5318" actId="1076"/>
           <ac:picMkLst>
             <pc:docMk/>
             <pc:sldMk cId="3943359794" sldId="274"/>
@@ -1239,7 +1261,7 @@
         </pc:cxnChg>
       </pc:sldChg>
       <pc:sldChg chg="addSp delSp modSp new mod">
-        <pc:chgData name="Tristan Plasse" userId="13c698b9-43c4-4271-b359-faaadca0774b" providerId="ADAL" clId="{FE460185-D4AE-4375-BA71-CD1D7F2341F0}" dt="2026-04-17T01:26:19.250" v="4736" actId="1076"/>
+        <pc:chgData name="Tristan Plasse" userId="13c698b9-43c4-4271-b359-faaadca0774b" providerId="ADAL" clId="{FE460185-D4AE-4375-BA71-CD1D7F2341F0}" dt="2026-04-17T02:46:58.779" v="5560" actId="20577"/>
         <pc:sldMkLst>
           <pc:docMk/>
           <pc:sldMk cId="2449617363" sldId="278"/>
@@ -1252,6 +1274,14 @@
             <ac:spMk id="2" creationId="{E764F047-4C87-EFC0-5081-C3EBD8EDEF6C}"/>
           </ac:spMkLst>
         </pc:spChg>
+        <pc:spChg chg="add del mod">
+          <ac:chgData name="Tristan Plasse" userId="13c698b9-43c4-4271-b359-faaadca0774b" providerId="ADAL" clId="{FE460185-D4AE-4375-BA71-CD1D7F2341F0}" dt="2026-04-17T02:44:37.038" v="5491"/>
+          <ac:spMkLst>
+            <pc:docMk/>
+            <pc:sldMk cId="2449617363" sldId="278"/>
+            <ac:spMk id="3" creationId="{735A5396-163A-4614-7FC3-8135E8EC2D82}"/>
+          </ac:spMkLst>
+        </pc:spChg>
         <pc:spChg chg="del">
           <ac:chgData name="Tristan Plasse" userId="13c698b9-43c4-4271-b359-faaadca0774b" providerId="ADAL" clId="{FE460185-D4AE-4375-BA71-CD1D7F2341F0}" dt="2026-04-17T01:25:53.221" v="4727"/>
           <ac:spMkLst>
@@ -1260,12 +1290,36 @@
             <ac:spMk id="3" creationId="{D7FB8DB0-7535-272B-41AF-7265B7F3A2D1}"/>
           </ac:spMkLst>
         </pc:spChg>
-        <pc:picChg chg="add mod ord">
-          <ac:chgData name="Tristan Plasse" userId="13c698b9-43c4-4271-b359-faaadca0774b" providerId="ADAL" clId="{FE460185-D4AE-4375-BA71-CD1D7F2341F0}" dt="2026-04-17T01:26:19.250" v="4736" actId="1076"/>
+        <pc:spChg chg="add mod">
+          <ac:chgData name="Tristan Plasse" userId="13c698b9-43c4-4271-b359-faaadca0774b" providerId="ADAL" clId="{FE460185-D4AE-4375-BA71-CD1D7F2341F0}" dt="2026-04-17T02:46:58.779" v="5560" actId="20577"/>
+          <ac:spMkLst>
+            <pc:docMk/>
+            <pc:sldMk cId="2449617363" sldId="278"/>
+            <ac:spMk id="8" creationId="{E86FE8AB-8CA2-26C6-1EA0-DD8874CA071A}"/>
+          </ac:spMkLst>
+        </pc:spChg>
+        <pc:picChg chg="add del mod ord">
+          <ac:chgData name="Tristan Plasse" userId="13c698b9-43c4-4271-b359-faaadca0774b" providerId="ADAL" clId="{FE460185-D4AE-4375-BA71-CD1D7F2341F0}" dt="2026-04-17T02:44:36.658" v="5489" actId="478"/>
           <ac:picMkLst>
             <pc:docMk/>
             <pc:sldMk cId="2449617363" sldId="278"/>
             <ac:picMk id="5" creationId="{2894EE87-C10F-C2AC-44DB-1A002CE45605}"/>
+          </ac:picMkLst>
+        </pc:picChg>
+        <pc:picChg chg="add mod ord">
+          <ac:chgData name="Tristan Plasse" userId="13c698b9-43c4-4271-b359-faaadca0774b" providerId="ADAL" clId="{FE460185-D4AE-4375-BA71-CD1D7F2341F0}" dt="2026-04-17T02:44:51.817" v="5495" actId="1076"/>
+          <ac:picMkLst>
+            <pc:docMk/>
+            <pc:sldMk cId="2449617363" sldId="278"/>
+            <ac:picMk id="6" creationId="{9ED18B4D-9AA2-BAA4-64B2-A725FA232668}"/>
+          </ac:picMkLst>
+        </pc:picChg>
+        <pc:picChg chg="add mod modCrop">
+          <ac:chgData name="Tristan Plasse" userId="13c698b9-43c4-4271-b359-faaadca0774b" providerId="ADAL" clId="{FE460185-D4AE-4375-BA71-CD1D7F2341F0}" dt="2026-04-17T02:45:56.147" v="5503" actId="1076"/>
+          <ac:picMkLst>
+            <pc:docMk/>
+            <pc:sldMk cId="2449617363" sldId="278"/>
+            <ac:picMk id="7" creationId="{F7961088-DAF3-40D1-2014-1BE6DA6821BF}"/>
           </ac:picMkLst>
         </pc:picChg>
       </pc:sldChg>
@@ -1301,7 +1355,7 @@
         </pc:picChg>
       </pc:sldChg>
       <pc:sldChg chg="modSp new mod">
-        <pc:chgData name="Tristan Plasse" userId="13c698b9-43c4-4271-b359-faaadca0774b" providerId="ADAL" clId="{FE460185-D4AE-4375-BA71-CD1D7F2341F0}" dt="2026-04-17T01:26:26.896" v="4747" actId="20577"/>
+        <pc:chgData name="Tristan Plasse" userId="13c698b9-43c4-4271-b359-faaadca0774b" providerId="ADAL" clId="{FE460185-D4AE-4375-BA71-CD1D7F2341F0}" dt="2026-04-17T03:17:15.395" v="5595" actId="20577"/>
         <pc:sldMkLst>
           <pc:docMk/>
           <pc:sldMk cId="901628721" sldId="280"/>
@@ -1312,6 +1366,14 @@
             <pc:docMk/>
             <pc:sldMk cId="901628721" sldId="280"/>
             <ac:spMk id="2" creationId="{AFD15BD0-D23D-BCDB-DC4F-EC9E34FD8E77}"/>
+          </ac:spMkLst>
+        </pc:spChg>
+        <pc:spChg chg="mod">
+          <ac:chgData name="Tristan Plasse" userId="13c698b9-43c4-4271-b359-faaadca0774b" providerId="ADAL" clId="{FE460185-D4AE-4375-BA71-CD1D7F2341F0}" dt="2026-04-17T03:17:15.395" v="5595" actId="20577"/>
+          <ac:spMkLst>
+            <pc:docMk/>
+            <pc:sldMk cId="901628721" sldId="280"/>
+            <ac:spMk id="3" creationId="{7FDDC518-1F1F-76F1-2545-8D01AE3B32C4}"/>
           </ac:spMkLst>
         </pc:spChg>
       </pc:sldChg>
@@ -1449,6 +1511,44 @@
           </ac:cxnSpMkLst>
         </pc:cxnChg>
       </pc:sldChg>
+      <pc:sldChg chg="modSp new mod">
+        <pc:chgData name="Tristan Plasse" userId="13c698b9-43c4-4271-b359-faaadca0774b" providerId="ADAL" clId="{FE460185-D4AE-4375-BA71-CD1D7F2341F0}" dt="2026-04-17T02:26:58.645" v="5086" actId="115"/>
+        <pc:sldMkLst>
+          <pc:docMk/>
+          <pc:sldMk cId="3557562823" sldId="283"/>
+        </pc:sldMkLst>
+        <pc:spChg chg="mod">
+          <ac:chgData name="Tristan Plasse" userId="13c698b9-43c4-4271-b359-faaadca0774b" providerId="ADAL" clId="{FE460185-D4AE-4375-BA71-CD1D7F2341F0}" dt="2026-04-17T02:25:39.922" v="5073" actId="20577"/>
+          <ac:spMkLst>
+            <pc:docMk/>
+            <pc:sldMk cId="3557562823" sldId="283"/>
+            <ac:spMk id="2" creationId="{2755F7A0-20BB-EF74-1658-92294AAB1D89}"/>
+          </ac:spMkLst>
+        </pc:spChg>
+        <pc:spChg chg="mod">
+          <ac:chgData name="Tristan Plasse" userId="13c698b9-43c4-4271-b359-faaadca0774b" providerId="ADAL" clId="{FE460185-D4AE-4375-BA71-CD1D7F2341F0}" dt="2026-04-17T02:26:58.645" v="5086" actId="115"/>
+          <ac:spMkLst>
+            <pc:docMk/>
+            <pc:sldMk cId="3557562823" sldId="283"/>
+            <ac:spMk id="3" creationId="{14515BA2-F5BE-2C2A-D48B-418406D8001B}"/>
+          </ac:spMkLst>
+        </pc:spChg>
+      </pc:sldChg>
+      <pc:sldChg chg="modSp add mod ord">
+        <pc:chgData name="Tristan Plasse" userId="13c698b9-43c4-4271-b359-faaadca0774b" providerId="ADAL" clId="{FE460185-D4AE-4375-BA71-CD1D7F2341F0}" dt="2026-04-17T03:35:32.830" v="5673" actId="20577"/>
+        <pc:sldMkLst>
+          <pc:docMk/>
+          <pc:sldMk cId="2393943690" sldId="284"/>
+        </pc:sldMkLst>
+        <pc:spChg chg="mod">
+          <ac:chgData name="Tristan Plasse" userId="13c698b9-43c4-4271-b359-faaadca0774b" providerId="ADAL" clId="{FE460185-D4AE-4375-BA71-CD1D7F2341F0}" dt="2026-04-17T03:35:32.830" v="5673" actId="20577"/>
+          <ac:spMkLst>
+            <pc:docMk/>
+            <pc:sldMk cId="2393943690" sldId="284"/>
+            <ac:spMk id="2" creationId="{17A7EB5A-FA1F-F440-F699-BDAE13D981A1}"/>
+          </ac:spMkLst>
+        </pc:spChg>
+      </pc:sldChg>
       <pc:sldMasterChg chg="add addSldLayout">
         <pc:chgData name="Tristan Plasse" userId="13c698b9-43c4-4271-b359-faaadca0774b" providerId="ADAL" clId="{FE460185-D4AE-4375-BA71-CD1D7F2341F0}" dt="2026-04-15T20:11:02.110" v="50" actId="26606"/>
         <pc:sldMasterMkLst>
@@ -1546,10 +1646,943 @@
       </pc:sldMasterChg>
     </pc:docChg>
   </pc:docChgLst>
+  <pc:docChgLst>
+    <pc:chgData name="Yohan Wegener" userId="S::wegy1101@usherbrooke.ca::153c22c7-a944-4d63-a1e0-3418d5558bb3" providerId="AD" clId="Web-{1630DD41-0FF5-535A-0B19-7E7866333F2B}"/>
+    <pc:docChg chg="modSld">
+      <pc:chgData name="Yohan Wegener" userId="S::wegy1101@usherbrooke.ca::153c22c7-a944-4d63-a1e0-3418d5558bb3" providerId="AD" clId="Web-{1630DD41-0FF5-535A-0B19-7E7866333F2B}" dt="2026-04-17T03:37:46.198" v="671" actId="20577"/>
+      <pc:docMkLst>
+        <pc:docMk/>
+      </pc:docMkLst>
+      <pc:sldChg chg="modSp">
+        <pc:chgData name="Yohan Wegener" userId="S::wegy1101@usherbrooke.ca::153c22c7-a944-4d63-a1e0-3418d5558bb3" providerId="AD" clId="Web-{1630DD41-0FF5-535A-0B19-7E7866333F2B}" dt="2026-04-17T02:51:49.773" v="125" actId="20577"/>
+        <pc:sldMkLst>
+          <pc:docMk/>
+          <pc:sldMk cId="400772557" sldId="266"/>
+        </pc:sldMkLst>
+        <pc:spChg chg="mod">
+          <ac:chgData name="Yohan Wegener" userId="S::wegy1101@usherbrooke.ca::153c22c7-a944-4d63-a1e0-3418d5558bb3" providerId="AD" clId="Web-{1630DD41-0FF5-535A-0B19-7E7866333F2B}" dt="2026-04-17T02:51:49.773" v="125" actId="20577"/>
+          <ac:spMkLst>
+            <pc:docMk/>
+            <pc:sldMk cId="400772557" sldId="266"/>
+            <ac:spMk id="3" creationId="{7C8FECE2-37AA-AFF5-7D1E-A6F3BA91F380}"/>
+          </ac:spMkLst>
+        </pc:spChg>
+      </pc:sldChg>
+      <pc:sldChg chg="addSp modSp">
+        <pc:chgData name="Yohan Wegener" userId="S::wegy1101@usherbrooke.ca::153c22c7-a944-4d63-a1e0-3418d5558bb3" providerId="AD" clId="Web-{1630DD41-0FF5-535A-0B19-7E7866333F2B}" dt="2026-04-17T02:50:00.915" v="122" actId="20577"/>
+        <pc:sldMkLst>
+          <pc:docMk/>
+          <pc:sldMk cId="1439899674" sldId="277"/>
+        </pc:sldMkLst>
+        <pc:spChg chg="add mod">
+          <ac:chgData name="Yohan Wegener" userId="S::wegy1101@usherbrooke.ca::153c22c7-a944-4d63-a1e0-3418d5558bb3" providerId="AD" clId="Web-{1630DD41-0FF5-535A-0B19-7E7866333F2B}" dt="2026-04-17T02:50:00.915" v="122" actId="20577"/>
+          <ac:spMkLst>
+            <pc:docMk/>
+            <pc:sldMk cId="1439899674" sldId="277"/>
+            <ac:spMk id="7" creationId="{0CFDC0D7-A429-9AC3-FCDF-757E320C4F4F}"/>
+          </ac:spMkLst>
+        </pc:spChg>
+        <pc:picChg chg="add mod">
+          <ac:chgData name="Yohan Wegener" userId="S::wegy1101@usherbrooke.ca::153c22c7-a944-4d63-a1e0-3418d5558bb3" providerId="AD" clId="Web-{1630DD41-0FF5-535A-0B19-7E7866333F2B}" dt="2026-04-17T02:49:13.290" v="114" actId="1076"/>
+          <ac:picMkLst>
+            <pc:docMk/>
+            <pc:sldMk cId="1439899674" sldId="277"/>
+            <ac:picMk id="4" creationId="{CE13E1AA-574C-9647-8090-2359241D2563}"/>
+          </ac:picMkLst>
+        </pc:picChg>
+        <pc:picChg chg="mod">
+          <ac:chgData name="Yohan Wegener" userId="S::wegy1101@usherbrooke.ca::153c22c7-a944-4d63-a1e0-3418d5558bb3" providerId="AD" clId="Web-{1630DD41-0FF5-535A-0B19-7E7866333F2B}" dt="2026-04-17T02:43:03.195" v="37" actId="1076"/>
+          <ac:picMkLst>
+            <pc:docMk/>
+            <pc:sldMk cId="1439899674" sldId="277"/>
+            <ac:picMk id="5" creationId="{DEB15709-306B-BF61-202F-0B24322B33AC}"/>
+          </ac:picMkLst>
+        </pc:picChg>
+      </pc:sldChg>
+      <pc:sldChg chg="modSp">
+        <pc:chgData name="Yohan Wegener" userId="S::wegy1101@usherbrooke.ca::153c22c7-a944-4d63-a1e0-3418d5558bb3" providerId="AD" clId="Web-{1630DD41-0FF5-535A-0B19-7E7866333F2B}" dt="2026-04-17T02:48:28.728" v="110" actId="20577"/>
+        <pc:sldMkLst>
+          <pc:docMk/>
+          <pc:sldMk cId="2449617363" sldId="278"/>
+        </pc:sldMkLst>
+        <pc:spChg chg="mod">
+          <ac:chgData name="Yohan Wegener" userId="S::wegy1101@usherbrooke.ca::153c22c7-a944-4d63-a1e0-3418d5558bb3" providerId="AD" clId="Web-{1630DD41-0FF5-535A-0B19-7E7866333F2B}" dt="2026-04-17T02:48:28.728" v="110" actId="20577"/>
+          <ac:spMkLst>
+            <pc:docMk/>
+            <pc:sldMk cId="2449617363" sldId="278"/>
+            <ac:spMk id="8" creationId="{E86FE8AB-8CA2-26C6-1EA0-DD8874CA071A}"/>
+          </ac:spMkLst>
+        </pc:spChg>
+      </pc:sldChg>
+      <pc:sldChg chg="addSp delSp modSp">
+        <pc:chgData name="Yohan Wegener" userId="S::wegy1101@usherbrooke.ca::153c22c7-a944-4d63-a1e0-3418d5558bb3" providerId="AD" clId="Web-{1630DD41-0FF5-535A-0B19-7E7866333F2B}" dt="2026-04-17T02:49:53.821" v="120" actId="20577"/>
+        <pc:sldMkLst>
+          <pc:docMk/>
+          <pc:sldMk cId="422633496" sldId="279"/>
+        </pc:sldMkLst>
+        <pc:spChg chg="add del mod">
+          <ac:chgData name="Yohan Wegener" userId="S::wegy1101@usherbrooke.ca::153c22c7-a944-4d63-a1e0-3418d5558bb3" providerId="AD" clId="Web-{1630DD41-0FF5-535A-0B19-7E7866333F2B}" dt="2026-04-17T02:43:45.554" v="41"/>
+          <ac:spMkLst>
+            <pc:docMk/>
+            <pc:sldMk cId="422633496" sldId="279"/>
+            <ac:spMk id="4" creationId="{26EC10CD-7911-16E9-CF69-E000A2AE26A6}"/>
+          </ac:spMkLst>
+        </pc:spChg>
+        <pc:spChg chg="add del mod">
+          <ac:chgData name="Yohan Wegener" userId="S::wegy1101@usherbrooke.ca::153c22c7-a944-4d63-a1e0-3418d5558bb3" providerId="AD" clId="Web-{1630DD41-0FF5-535A-0B19-7E7866333F2B}" dt="2026-04-17T02:43:49.226" v="43"/>
+          <ac:spMkLst>
+            <pc:docMk/>
+            <pc:sldMk cId="422633496" sldId="279"/>
+            <ac:spMk id="5" creationId="{FA19858B-402C-65F0-70EB-07E3F96A8FAC}"/>
+          </ac:spMkLst>
+        </pc:spChg>
+        <pc:spChg chg="add mod">
+          <ac:chgData name="Yohan Wegener" userId="S::wegy1101@usherbrooke.ca::153c22c7-a944-4d63-a1e0-3418d5558bb3" providerId="AD" clId="Web-{1630DD41-0FF5-535A-0B19-7E7866333F2B}" dt="2026-04-17T02:49:53.821" v="120" actId="20577"/>
+          <ac:spMkLst>
+            <pc:docMk/>
+            <pc:sldMk cId="422633496" sldId="279"/>
+            <ac:spMk id="10" creationId="{AFB3B927-A1C8-2A1B-8DE6-E6D0DA677662}"/>
+          </ac:spMkLst>
+        </pc:spChg>
+        <pc:picChg chg="add del mod">
+          <ac:chgData name="Yohan Wegener" userId="S::wegy1101@usherbrooke.ca::153c22c7-a944-4d63-a1e0-3418d5558bb3" providerId="AD" clId="Web-{1630DD41-0FF5-535A-0B19-7E7866333F2B}" dt="2026-04-17T02:45:31.149" v="54"/>
+          <ac:picMkLst>
+            <pc:docMk/>
+            <pc:sldMk cId="422633496" sldId="279"/>
+            <ac:picMk id="3" creationId="{C95A0799-7064-3DC9-29F6-D7606545B43E}"/>
+          </ac:picMkLst>
+        </pc:picChg>
+        <pc:picChg chg="add del">
+          <ac:chgData name="Yohan Wegener" userId="S::wegy1101@usherbrooke.ca::153c22c7-a944-4d63-a1e0-3418d5558bb3" providerId="AD" clId="Web-{1630DD41-0FF5-535A-0B19-7E7866333F2B}" dt="2026-04-17T02:44:15.945" v="47"/>
+          <ac:picMkLst>
+            <pc:docMk/>
+            <pc:sldMk cId="422633496" sldId="279"/>
+            <ac:picMk id="7" creationId="{C7A65710-073B-0EAC-45B6-44353D06438E}"/>
+          </ac:picMkLst>
+        </pc:picChg>
+        <pc:picChg chg="mod">
+          <ac:chgData name="Yohan Wegener" userId="S::wegy1101@usherbrooke.ca::153c22c7-a944-4d63-a1e0-3418d5558bb3" providerId="AD" clId="Web-{1630DD41-0FF5-535A-0B19-7E7866333F2B}" dt="2026-04-17T02:44:41.335" v="50" actId="14100"/>
+          <ac:picMkLst>
+            <pc:docMk/>
+            <pc:sldMk cId="422633496" sldId="279"/>
+            <ac:picMk id="9" creationId="{CE99E6EA-6C50-A9AF-63F6-B30BF2E36593}"/>
+          </ac:picMkLst>
+        </pc:picChg>
+        <pc:picChg chg="add del mod">
+          <ac:chgData name="Yohan Wegener" userId="S::wegy1101@usherbrooke.ca::153c22c7-a944-4d63-a1e0-3418d5558bb3" providerId="AD" clId="Web-{1630DD41-0FF5-535A-0B19-7E7866333F2B}" dt="2026-04-17T02:46:52.306" v="66"/>
+          <ac:picMkLst>
+            <pc:docMk/>
+            <pc:sldMk cId="422633496" sldId="279"/>
+            <ac:picMk id="12" creationId="{51A5DF42-88B0-F2EB-3D83-5ED0C2C5634C}"/>
+          </ac:picMkLst>
+        </pc:picChg>
+        <pc:picChg chg="add mod">
+          <ac:chgData name="Yohan Wegener" userId="S::wegy1101@usherbrooke.ca::153c22c7-a944-4d63-a1e0-3418d5558bb3" providerId="AD" clId="Web-{1630DD41-0FF5-535A-0B19-7E7866333F2B}" dt="2026-04-17T02:47:07.275" v="69" actId="14100"/>
+          <ac:picMkLst>
+            <pc:docMk/>
+            <pc:sldMk cId="422633496" sldId="279"/>
+            <ac:picMk id="14" creationId="{8452DDBC-4E2F-4D55-51AA-89FCE11E2F02}"/>
+          </ac:picMkLst>
+        </pc:picChg>
+      </pc:sldChg>
+      <pc:sldChg chg="modSp">
+        <pc:chgData name="Yohan Wegener" userId="S::wegy1101@usherbrooke.ca::153c22c7-a944-4d63-a1e0-3418d5558bb3" providerId="AD" clId="Web-{1630DD41-0FF5-535A-0B19-7E7866333F2B}" dt="2026-04-17T03:35:07.726" v="647" actId="20577"/>
+        <pc:sldMkLst>
+          <pc:docMk/>
+          <pc:sldMk cId="901628721" sldId="280"/>
+        </pc:sldMkLst>
+        <pc:spChg chg="mod">
+          <ac:chgData name="Yohan Wegener" userId="S::wegy1101@usherbrooke.ca::153c22c7-a944-4d63-a1e0-3418d5558bb3" providerId="AD" clId="Web-{1630DD41-0FF5-535A-0B19-7E7866333F2B}" dt="2026-04-17T03:35:07.726" v="647" actId="20577"/>
+          <ac:spMkLst>
+            <pc:docMk/>
+            <pc:sldMk cId="901628721" sldId="280"/>
+            <ac:spMk id="3" creationId="{7FDDC518-1F1F-76F1-2545-8D01AE3B32C4}"/>
+          </ac:spMkLst>
+        </pc:spChg>
+      </pc:sldChg>
+      <pc:sldChg chg="modSp">
+        <pc:chgData name="Yohan Wegener" userId="S::wegy1101@usherbrooke.ca::153c22c7-a944-4d63-a1e0-3418d5558bb3" providerId="AD" clId="Web-{1630DD41-0FF5-535A-0B19-7E7866333F2B}" dt="2026-04-17T02:39:23.179" v="5" actId="20577"/>
+        <pc:sldMkLst>
+          <pc:docMk/>
+          <pc:sldMk cId="1209728823" sldId="281"/>
+        </pc:sldMkLst>
+        <pc:spChg chg="mod">
+          <ac:chgData name="Yohan Wegener" userId="S::wegy1101@usherbrooke.ca::153c22c7-a944-4d63-a1e0-3418d5558bb3" providerId="AD" clId="Web-{1630DD41-0FF5-535A-0B19-7E7866333F2B}" dt="2026-04-17T02:39:23.179" v="5" actId="20577"/>
+          <ac:spMkLst>
+            <pc:docMk/>
+            <pc:sldMk cId="1209728823" sldId="281"/>
+            <ac:spMk id="3" creationId="{D5F08C3C-2B07-D167-483B-592FFD9479FB}"/>
+          </ac:spMkLst>
+        </pc:spChg>
+      </pc:sldChg>
+      <pc:sldChg chg="modSp">
+        <pc:chgData name="Yohan Wegener" userId="S::wegy1101@usherbrooke.ca::153c22c7-a944-4d63-a1e0-3418d5558bb3" providerId="AD" clId="Web-{1630DD41-0FF5-535A-0B19-7E7866333F2B}" dt="2026-04-17T03:37:46.198" v="671" actId="20577"/>
+        <pc:sldMkLst>
+          <pc:docMk/>
+          <pc:sldMk cId="2393943690" sldId="284"/>
+        </pc:sldMkLst>
+        <pc:spChg chg="mod">
+          <ac:chgData name="Yohan Wegener" userId="S::wegy1101@usherbrooke.ca::153c22c7-a944-4d63-a1e0-3418d5558bb3" providerId="AD" clId="Web-{1630DD41-0FF5-535A-0B19-7E7866333F2B}" dt="2026-04-17T03:37:46.198" v="671" actId="20577"/>
+          <ac:spMkLst>
+            <pc:docMk/>
+            <pc:sldMk cId="2393943690" sldId="284"/>
+            <ac:spMk id="2" creationId="{17A7EB5A-FA1F-F440-F699-BDAE13D981A1}"/>
+          </ac:spMkLst>
+        </pc:spChg>
+      </pc:sldChg>
+    </pc:docChg>
+  </pc:docChgLst>
 </pc:chgInfo>
 </file>
 
 <file path=ppt/diagrams/colors1.xml><?xml version="1.0" encoding="utf-8"?>
+<dgm:colorsDef xmlns:dgm="http://schemas.openxmlformats.org/drawingml/2006/diagram" xmlns:a="http://schemas.openxmlformats.org/drawingml/2006/main" uniqueId="urn:microsoft.com/office/officeart/2005/8/colors/accent1_2">
+  <dgm:title val=""/>
+  <dgm:desc val=""/>
+  <dgm:catLst>
+    <dgm:cat type="accent1" pri="11200"/>
+  </dgm:catLst>
+  <dgm:styleLbl name="node0">
+    <dgm:fillClrLst meth="repeat">
+      <a:schemeClr val="accent1"/>
+    </dgm:fillClrLst>
+    <dgm:linClrLst meth="repeat">
+      <a:schemeClr val="lt1"/>
+    </dgm:linClrLst>
+    <dgm:effectClrLst/>
+    <dgm:txLinClrLst/>
+    <dgm:txFillClrLst/>
+    <dgm:txEffectClrLst/>
+  </dgm:styleLbl>
+  <dgm:styleLbl name="alignNode1">
+    <dgm:fillClrLst meth="repeat">
+      <a:schemeClr val="accent1"/>
+    </dgm:fillClrLst>
+    <dgm:linClrLst meth="repeat">
+      <a:schemeClr val="accent1"/>
+    </dgm:linClrLst>
+    <dgm:effectClrLst/>
+    <dgm:txLinClrLst/>
+    <dgm:txFillClrLst/>
+    <dgm:txEffectClrLst/>
+  </dgm:styleLbl>
+  <dgm:styleLbl name="node1">
+    <dgm:fillClrLst meth="repeat">
+      <a:schemeClr val="accent1"/>
+    </dgm:fillClrLst>
+    <dgm:linClrLst meth="repeat">
+      <a:schemeClr val="lt1"/>
+    </dgm:linClrLst>
+    <dgm:effectClrLst/>
+    <dgm:txLinClrLst/>
+    <dgm:txFillClrLst/>
+    <dgm:txEffectClrLst/>
+  </dgm:styleLbl>
+  <dgm:styleLbl name="lnNode1">
+    <dgm:fillClrLst meth="repeat">
+      <a:schemeClr val="accent1"/>
+    </dgm:fillClrLst>
+    <dgm:linClrLst meth="repeat">
+      <a:schemeClr val="lt1"/>
+    </dgm:linClrLst>
+    <dgm:effectClrLst/>
+    <dgm:txLinClrLst/>
+    <dgm:txFillClrLst/>
+    <dgm:txEffectClrLst/>
+  </dgm:styleLbl>
+  <dgm:styleLbl name="vennNode1">
+    <dgm:fillClrLst meth="repeat">
+      <a:schemeClr val="accent1">
+        <a:alpha val="50000"/>
+      </a:schemeClr>
+    </dgm:fillClrLst>
+    <dgm:linClrLst meth="repeat">
+      <a:schemeClr val="lt1"/>
+    </dgm:linClrLst>
+    <dgm:effectClrLst/>
+    <dgm:txLinClrLst/>
+    <dgm:txFillClrLst/>
+    <dgm:txEffectClrLst/>
+  </dgm:styleLbl>
+  <dgm:styleLbl name="node2">
+    <dgm:fillClrLst meth="repeat">
+      <a:schemeClr val="accent1"/>
+    </dgm:fillClrLst>
+    <dgm:linClrLst meth="repeat">
+      <a:schemeClr val="lt1"/>
+    </dgm:linClrLst>
+    <dgm:effectClrLst/>
+    <dgm:txLinClrLst/>
+    <dgm:txFillClrLst/>
+    <dgm:txEffectClrLst/>
+  </dgm:styleLbl>
+  <dgm:styleLbl name="node3">
+    <dgm:fillClrLst meth="repeat">
+      <a:schemeClr val="accent1"/>
+    </dgm:fillClrLst>
+    <dgm:linClrLst meth="repeat">
+      <a:schemeClr val="lt1"/>
+    </dgm:linClrLst>
+    <dgm:effectClrLst/>
+    <dgm:txLinClrLst/>
+    <dgm:txFillClrLst/>
+    <dgm:txEffectClrLst/>
+  </dgm:styleLbl>
+  <dgm:styleLbl name="node4">
+    <dgm:fillClrLst meth="repeat">
+      <a:schemeClr val="accent1"/>
+    </dgm:fillClrLst>
+    <dgm:linClrLst meth="repeat">
+      <a:schemeClr val="lt1"/>
+    </dgm:linClrLst>
+    <dgm:effectClrLst/>
+    <dgm:txLinClrLst/>
+    <dgm:txFillClrLst/>
+    <dgm:txEffectClrLst/>
+  </dgm:styleLbl>
+  <dgm:styleLbl name="fgImgPlace1">
+    <dgm:fillClrLst meth="repeat">
+      <a:schemeClr val="accent1">
+        <a:tint val="50000"/>
+      </a:schemeClr>
+    </dgm:fillClrLst>
+    <dgm:linClrLst meth="repeat">
+      <a:schemeClr val="lt1"/>
+    </dgm:linClrLst>
+    <dgm:effectClrLst/>
+    <dgm:txLinClrLst/>
+    <dgm:txFillClrLst meth="repeat">
+      <a:schemeClr val="lt1"/>
+    </dgm:txFillClrLst>
+    <dgm:txEffectClrLst/>
+  </dgm:styleLbl>
+  <dgm:styleLbl name="alignImgPlace1">
+    <dgm:fillClrLst meth="repeat">
+      <a:schemeClr val="accent1">
+        <a:tint val="50000"/>
+      </a:schemeClr>
+    </dgm:fillClrLst>
+    <dgm:linClrLst meth="repeat">
+      <a:schemeClr val="lt1"/>
+    </dgm:linClrLst>
+    <dgm:effectClrLst/>
+    <dgm:txLinClrLst/>
+    <dgm:txFillClrLst meth="repeat">
+      <a:schemeClr val="lt1"/>
+    </dgm:txFillClrLst>
+    <dgm:txEffectClrLst/>
+  </dgm:styleLbl>
+  <dgm:styleLbl name="bgImgPlace1">
+    <dgm:fillClrLst meth="repeat">
+      <a:schemeClr val="accent1">
+        <a:tint val="50000"/>
+      </a:schemeClr>
+    </dgm:fillClrLst>
+    <dgm:linClrLst meth="repeat">
+      <a:schemeClr val="lt1"/>
+    </dgm:linClrLst>
+    <dgm:effectClrLst/>
+    <dgm:txLinClrLst/>
+    <dgm:txFillClrLst meth="repeat">
+      <a:schemeClr val="lt1"/>
+    </dgm:txFillClrLst>
+    <dgm:txEffectClrLst/>
+  </dgm:styleLbl>
+  <dgm:styleLbl name="sibTrans2D1">
+    <dgm:fillClrLst meth="repeat">
+      <a:schemeClr val="accent1">
+        <a:tint val="60000"/>
+      </a:schemeClr>
+    </dgm:fillClrLst>
+    <dgm:linClrLst meth="repeat">
+      <a:schemeClr val="accent1">
+        <a:tint val="60000"/>
+      </a:schemeClr>
+    </dgm:linClrLst>
+    <dgm:effectClrLst/>
+    <dgm:txLinClrLst/>
+    <dgm:txFillClrLst/>
+    <dgm:txEffectClrLst/>
+  </dgm:styleLbl>
+  <dgm:styleLbl name="fgSibTrans2D1">
+    <dgm:fillClrLst meth="repeat">
+      <a:schemeClr val="accent1">
+        <a:tint val="60000"/>
+      </a:schemeClr>
+    </dgm:fillClrLst>
+    <dgm:linClrLst meth="repeat">
+      <a:schemeClr val="accent1">
+        <a:tint val="60000"/>
+      </a:schemeClr>
+    </dgm:linClrLst>
+    <dgm:effectClrLst/>
+    <dgm:txLinClrLst/>
+    <dgm:txFillClrLst/>
+    <dgm:txEffectClrLst/>
+  </dgm:styleLbl>
+  <dgm:styleLbl name="bgSibTrans2D1">
+    <dgm:fillClrLst meth="repeat">
+      <a:schemeClr val="accent1">
+        <a:tint val="60000"/>
+      </a:schemeClr>
+    </dgm:fillClrLst>
+    <dgm:linClrLst meth="repeat">
+      <a:schemeClr val="accent1">
+        <a:tint val="60000"/>
+      </a:schemeClr>
+    </dgm:linClrLst>
+    <dgm:effectClrLst/>
+    <dgm:txLinClrLst/>
+    <dgm:txFillClrLst/>
+    <dgm:txEffectClrLst/>
+  </dgm:styleLbl>
+  <dgm:styleLbl name="sibTrans1D1">
+    <dgm:fillClrLst meth="repeat">
+      <a:schemeClr val="accent1"/>
+    </dgm:fillClrLst>
+    <dgm:linClrLst meth="repeat">
+      <a:schemeClr val="accent1"/>
+    </dgm:linClrLst>
+    <dgm:effectClrLst/>
+    <dgm:txLinClrLst/>
+    <dgm:txFillClrLst meth="repeat">
+      <a:schemeClr val="tx1"/>
+    </dgm:txFillClrLst>
+    <dgm:txEffectClrLst/>
+  </dgm:styleLbl>
+  <dgm:styleLbl name="callout">
+    <dgm:fillClrLst meth="repeat">
+      <a:schemeClr val="accent1"/>
+    </dgm:fillClrLst>
+    <dgm:linClrLst meth="repeat">
+      <a:schemeClr val="accent1">
+        <a:tint val="50000"/>
+      </a:schemeClr>
+    </dgm:linClrLst>
+    <dgm:effectClrLst/>
+    <dgm:txLinClrLst/>
+    <dgm:txFillClrLst meth="repeat">
+      <a:schemeClr val="tx1"/>
+    </dgm:txFillClrLst>
+    <dgm:txEffectClrLst/>
+  </dgm:styleLbl>
+  <dgm:styleLbl name="asst0">
+    <dgm:fillClrLst meth="repeat">
+      <a:schemeClr val="accent1"/>
+    </dgm:fillClrLst>
+    <dgm:linClrLst meth="repeat">
+      <a:schemeClr val="lt1"/>
+    </dgm:linClrLst>
+    <dgm:effectClrLst/>
+    <dgm:txLinClrLst/>
+    <dgm:txFillClrLst/>
+    <dgm:txEffectClrLst/>
+  </dgm:styleLbl>
+  <dgm:styleLbl name="asst1">
+    <dgm:fillClrLst meth="repeat">
+      <a:schemeClr val="accent1"/>
+    </dgm:fillClrLst>
+    <dgm:linClrLst meth="repeat">
+      <a:schemeClr val="lt1"/>
+    </dgm:linClrLst>
+    <dgm:effectClrLst/>
+    <dgm:txLinClrLst/>
+    <dgm:txFillClrLst/>
+    <dgm:txEffectClrLst/>
+  </dgm:styleLbl>
+  <dgm:styleLbl name="asst2">
+    <dgm:fillClrLst meth="repeat">
+      <a:schemeClr val="accent1"/>
+    </dgm:fillClrLst>
+    <dgm:linClrLst meth="repeat">
+      <a:schemeClr val="lt1"/>
+    </dgm:linClrLst>
+    <dgm:effectClrLst/>
+    <dgm:txLinClrLst/>
+    <dgm:txFillClrLst/>
+    <dgm:txEffectClrLst/>
+  </dgm:styleLbl>
+  <dgm:styleLbl name="asst3">
+    <dgm:fillClrLst meth="repeat">
+      <a:schemeClr val="accent1"/>
+    </dgm:fillClrLst>
+    <dgm:linClrLst meth="repeat">
+      <a:schemeClr val="lt1"/>
+    </dgm:linClrLst>
+    <dgm:effectClrLst/>
+    <dgm:txLinClrLst/>
+    <dgm:txFillClrLst/>
+    <dgm:txEffectClrLst/>
+  </dgm:styleLbl>
+  <dgm:styleLbl name="asst4">
+    <dgm:fillClrLst meth="repeat">
+      <a:schemeClr val="accent1"/>
+    </dgm:fillClrLst>
+    <dgm:linClrLst meth="repeat">
+      <a:schemeClr val="lt1"/>
+    </dgm:linClrLst>
+    <dgm:effectClrLst/>
+    <dgm:txLinClrLst/>
+    <dgm:txFillClrLst/>
+    <dgm:txEffectClrLst/>
+  </dgm:styleLbl>
+  <dgm:styleLbl name="parChTrans2D1">
+    <dgm:fillClrLst meth="repeat">
+      <a:schemeClr val="accent1">
+        <a:tint val="60000"/>
+      </a:schemeClr>
+    </dgm:fillClrLst>
+    <dgm:linClrLst meth="repeat">
+      <a:schemeClr val="accent1">
+        <a:tint val="60000"/>
+      </a:schemeClr>
+    </dgm:linClrLst>
+    <dgm:effectClrLst/>
+    <dgm:txLinClrLst/>
+    <dgm:txFillClrLst meth="repeat">
+      <a:schemeClr val="lt1"/>
+    </dgm:txFillClrLst>
+    <dgm:txEffectClrLst/>
+  </dgm:styleLbl>
+  <dgm:styleLbl name="parChTrans2D2">
+    <dgm:fillClrLst meth="repeat">
+      <a:schemeClr val="accent1"/>
+    </dgm:fillClrLst>
+    <dgm:linClrLst meth="repeat">
+      <a:schemeClr val="accent1"/>
+    </dgm:linClrLst>
+    <dgm:effectClrLst/>
+    <dgm:txLinClrLst/>
+    <dgm:txFillClrLst meth="repeat">
+      <a:schemeClr val="lt1"/>
+    </dgm:txFillClrLst>
+    <dgm:txEffectClrLst/>
+  </dgm:styleLbl>
+  <dgm:styleLbl name="parChTrans2D3">
+    <dgm:fillClrLst meth="repeat">
+      <a:schemeClr val="accent1"/>
+    </dgm:fillClrLst>
+    <dgm:linClrLst meth="repeat">
+      <a:schemeClr val="accent1"/>
+    </dgm:linClrLst>
+    <dgm:effectClrLst/>
+    <dgm:txLinClrLst/>
+    <dgm:txFillClrLst meth="repeat">
+      <a:schemeClr val="lt1"/>
+    </dgm:txFillClrLst>
+    <dgm:txEffectClrLst/>
+  </dgm:styleLbl>
+  <dgm:styleLbl name="parChTrans2D4">
+    <dgm:fillClrLst meth="repeat">
+      <a:schemeClr val="accent1"/>
+    </dgm:fillClrLst>
+    <dgm:linClrLst meth="repeat">
+      <a:schemeClr val="accent1"/>
+    </dgm:linClrLst>
+    <dgm:effectClrLst/>
+    <dgm:txLinClrLst/>
+    <dgm:txFillClrLst meth="repeat">
+      <a:schemeClr val="lt1"/>
+    </dgm:txFillClrLst>
+    <dgm:txEffectClrLst/>
+  </dgm:styleLbl>
+  <dgm:styleLbl name="parChTrans1D1">
+    <dgm:fillClrLst meth="repeat">
+      <a:schemeClr val="accent1"/>
+    </dgm:fillClrLst>
+    <dgm:linClrLst meth="repeat">
+      <a:schemeClr val="accent1">
+        <a:shade val="60000"/>
+      </a:schemeClr>
+    </dgm:linClrLst>
+    <dgm:effectClrLst/>
+    <dgm:txLinClrLst/>
+    <dgm:txFillClrLst meth="repeat">
+      <a:schemeClr val="tx1"/>
+    </dgm:txFillClrLst>
+    <dgm:txEffectClrLst/>
+  </dgm:styleLbl>
+  <dgm:styleLbl name="parChTrans1D2">
+    <dgm:fillClrLst meth="repeat">
+      <a:schemeClr val="accent1"/>
+    </dgm:fillClrLst>
+    <dgm:linClrLst meth="repeat">
+      <a:schemeClr val="accent1">
+        <a:shade val="60000"/>
+      </a:schemeClr>
+    </dgm:linClrLst>
+    <dgm:effectClrLst/>
+    <dgm:txLinClrLst/>
+    <dgm:txFillClrLst meth="repeat">
+      <a:schemeClr val="tx1"/>
+    </dgm:txFillClrLst>
+    <dgm:txEffectClrLst/>
+  </dgm:styleLbl>
+  <dgm:styleLbl name="parChTrans1D3">
+    <dgm:fillClrLst meth="repeat">
+      <a:schemeClr val="accent1"/>
+    </dgm:fillClrLst>
+    <dgm:linClrLst meth="repeat">
+      <a:schemeClr val="accent1">
+        <a:shade val="80000"/>
+      </a:schemeClr>
+    </dgm:linClrLst>
+    <dgm:effectClrLst/>
+    <dgm:txLinClrLst/>
+    <dgm:txFillClrLst meth="repeat">
+      <a:schemeClr val="tx1"/>
+    </dgm:txFillClrLst>
+    <dgm:txEffectClrLst/>
+  </dgm:styleLbl>
+  <dgm:styleLbl name="parChTrans1D4">
+    <dgm:fillClrLst meth="repeat">
+      <a:schemeClr val="accent1"/>
+    </dgm:fillClrLst>
+    <dgm:linClrLst meth="repeat">
+      <a:schemeClr val="accent1">
+        <a:shade val="80000"/>
+      </a:schemeClr>
+    </dgm:linClrLst>
+    <dgm:effectClrLst/>
+    <dgm:txLinClrLst/>
+    <dgm:txFillClrLst meth="repeat">
+      <a:schemeClr val="tx1"/>
+    </dgm:txFillClrLst>
+    <dgm:txEffectClrLst/>
+  </dgm:styleLbl>
+  <dgm:styleLbl name="fgAcc1">
+    <dgm:fillClrLst meth="repeat">
+      <a:schemeClr val="lt1">
+        <a:alpha val="90000"/>
+      </a:schemeClr>
+    </dgm:fillClrLst>
+    <dgm:linClrLst meth="repeat">
+      <a:schemeClr val="accent1"/>
+    </dgm:linClrLst>
+    <dgm:effectClrLst/>
+    <dgm:txLinClrLst/>
+    <dgm:txFillClrLst meth="repeat">
+      <a:schemeClr val="dk1"/>
+    </dgm:txFillClrLst>
+    <dgm:txEffectClrLst/>
+  </dgm:styleLbl>
+  <dgm:styleLbl name="conFgAcc1">
+    <dgm:fillClrLst meth="repeat">
+      <a:schemeClr val="lt1">
+        <a:alpha val="90000"/>
+      </a:schemeClr>
+    </dgm:fillClrLst>
+    <dgm:linClrLst meth="repeat">
+      <a:schemeClr val="accent1"/>
+    </dgm:linClrLst>
+    <dgm:effectClrLst/>
+    <dgm:txLinClrLst/>
+    <dgm:txFillClrLst meth="repeat">
+      <a:schemeClr val="dk1"/>
+    </dgm:txFillClrLst>
+    <dgm:txEffectClrLst/>
+  </dgm:styleLbl>
+  <dgm:styleLbl name="alignAcc1">
+    <dgm:fillClrLst meth="repeat">
+      <a:schemeClr val="lt1">
+        <a:alpha val="90000"/>
+      </a:schemeClr>
+    </dgm:fillClrLst>
+    <dgm:linClrLst meth="repeat">
+      <a:schemeClr val="accent1"/>
+    </dgm:linClrLst>
+    <dgm:effectClrLst/>
+    <dgm:txLinClrLst/>
+    <dgm:txFillClrLst meth="repeat">
+      <a:schemeClr val="dk1"/>
+    </dgm:txFillClrLst>
+    <dgm:txEffectClrLst/>
+  </dgm:styleLbl>
+  <dgm:styleLbl name="trAlignAcc1">
+    <dgm:fillClrLst meth="repeat">
+      <a:schemeClr val="lt1">
+        <a:alpha val="40000"/>
+      </a:schemeClr>
+    </dgm:fillClrLst>
+    <dgm:linClrLst meth="repeat">
+      <a:schemeClr val="accent1"/>
+    </dgm:linClrLst>
+    <dgm:effectClrLst/>
+    <dgm:txLinClrLst/>
+    <dgm:txFillClrLst meth="repeat">
+      <a:schemeClr val="dk1"/>
+    </dgm:txFillClrLst>
+    <dgm:txEffectClrLst/>
+  </dgm:styleLbl>
+  <dgm:styleLbl name="bgAcc1">
+    <dgm:fillClrLst meth="repeat">
+      <a:schemeClr val="lt1">
+        <a:alpha val="90000"/>
+      </a:schemeClr>
+    </dgm:fillClrLst>
+    <dgm:linClrLst meth="repeat">
+      <a:schemeClr val="accent1"/>
+    </dgm:linClrLst>
+    <dgm:effectClrLst/>
+    <dgm:txLinClrLst/>
+    <dgm:txFillClrLst meth="repeat">
+      <a:schemeClr val="dk1"/>
+    </dgm:txFillClrLst>
+    <dgm:txEffectClrLst/>
+  </dgm:styleLbl>
+  <dgm:styleLbl name="solidFgAcc1">
+    <dgm:fillClrLst meth="repeat">
+      <a:schemeClr val="lt1"/>
+    </dgm:fillClrLst>
+    <dgm:linClrLst meth="repeat">
+      <a:schemeClr val="accent1"/>
+    </dgm:linClrLst>
+    <dgm:effectClrLst/>
+    <dgm:txLinClrLst/>
+    <dgm:txFillClrLst meth="repeat">
+      <a:schemeClr val="dk1"/>
+    </dgm:txFillClrLst>
+    <dgm:txEffectClrLst/>
+  </dgm:styleLbl>
+  <dgm:styleLbl name="solidAlignAcc1">
+    <dgm:fillClrLst meth="repeat">
+      <a:schemeClr val="lt1"/>
+    </dgm:fillClrLst>
+    <dgm:linClrLst meth="repeat">
+      <a:schemeClr val="accent1"/>
+    </dgm:linClrLst>
+    <dgm:effectClrLst/>
+    <dgm:txLinClrLst/>
+    <dgm:txFillClrLst meth="repeat">
+      <a:schemeClr val="dk1"/>
+    </dgm:txFillClrLst>
+    <dgm:txEffectClrLst/>
+  </dgm:styleLbl>
+  <dgm:styleLbl name="solidBgAcc1">
+    <dgm:fillClrLst meth="repeat">
+      <a:schemeClr val="lt1"/>
+    </dgm:fillClrLst>
+    <dgm:linClrLst meth="repeat">
+      <a:schemeClr val="accent1"/>
+    </dgm:linClrLst>
+    <dgm:effectClrLst/>
+    <dgm:txLinClrLst/>
+    <dgm:txFillClrLst meth="repeat">
+      <a:schemeClr val="dk1"/>
+    </dgm:txFillClrLst>
+    <dgm:txEffectClrLst/>
+  </dgm:styleLbl>
+  <dgm:styleLbl name="fgAccFollowNode1">
+    <dgm:fillClrLst meth="repeat">
+      <a:schemeClr val="accent1">
+        <a:alpha val="90000"/>
+        <a:tint val="40000"/>
+      </a:schemeClr>
+    </dgm:fillClrLst>
+    <dgm:linClrLst meth="repeat">
+      <a:schemeClr val="accent1">
+        <a:alpha val="90000"/>
+        <a:tint val="40000"/>
+      </a:schemeClr>
+    </dgm:linClrLst>
+    <dgm:effectClrLst/>
+    <dgm:txLinClrLst/>
+    <dgm:txFillClrLst meth="repeat">
+      <a:schemeClr val="dk1"/>
+    </dgm:txFillClrLst>
+    <dgm:txEffectClrLst/>
+  </dgm:styleLbl>
+  <dgm:styleLbl name="alignAccFollowNode1">
+    <dgm:fillClrLst meth="repeat">
+      <a:schemeClr val="accent1">
+        <a:alpha val="90000"/>
+        <a:tint val="40000"/>
+      </a:schemeClr>
+    </dgm:fillClrLst>
+    <dgm:linClrLst meth="repeat">
+      <a:schemeClr val="accent1">
+        <a:alpha val="90000"/>
+        <a:tint val="40000"/>
+      </a:schemeClr>
+    </dgm:linClrLst>
+    <dgm:effectClrLst/>
+    <dgm:txLinClrLst/>
+    <dgm:txFillClrLst meth="repeat">
+      <a:schemeClr val="dk1"/>
+    </dgm:txFillClrLst>
+    <dgm:txEffectClrLst/>
+  </dgm:styleLbl>
+  <dgm:styleLbl name="bgAccFollowNode1">
+    <dgm:fillClrLst meth="repeat">
+      <a:schemeClr val="accent1">
+        <a:alpha val="90000"/>
+        <a:tint val="40000"/>
+      </a:schemeClr>
+    </dgm:fillClrLst>
+    <dgm:linClrLst meth="repeat">
+      <a:schemeClr val="accent1">
+        <a:alpha val="90000"/>
+        <a:tint val="40000"/>
+      </a:schemeClr>
+    </dgm:linClrLst>
+    <dgm:effectClrLst/>
+    <dgm:txLinClrLst/>
+    <dgm:txFillClrLst meth="repeat">
+      <a:schemeClr val="dk1"/>
+    </dgm:txFillClrLst>
+    <dgm:txEffectClrLst/>
+  </dgm:styleLbl>
+  <dgm:styleLbl name="fgAcc0">
+    <dgm:fillClrLst meth="repeat">
+      <a:schemeClr val="lt1">
+        <a:alpha val="90000"/>
+      </a:schemeClr>
+    </dgm:fillClrLst>
+    <dgm:linClrLst meth="repeat">
+      <a:schemeClr val="accent1"/>
+    </dgm:linClrLst>
+    <dgm:effectClrLst/>
+    <dgm:txLinClrLst/>
+    <dgm:txFillClrLst meth="repeat">
+      <a:schemeClr val="dk1"/>
+    </dgm:txFillClrLst>
+    <dgm:txEffectClrLst/>
+  </dgm:styleLbl>
+  <dgm:styleLbl name="fgAcc2">
+    <dgm:fillClrLst meth="repeat">
+      <a:schemeClr val="lt1">
+        <a:alpha val="90000"/>
+      </a:schemeClr>
+    </dgm:fillClrLst>
+    <dgm:linClrLst meth="repeat">
+      <a:schemeClr val="accent1"/>
+    </dgm:linClrLst>
+    <dgm:effectClrLst/>
+    <dgm:txLinClrLst/>
+    <dgm:txFillClrLst meth="repeat">
+      <a:schemeClr val="dk1"/>
+    </dgm:txFillClrLst>
+    <dgm:txEffectClrLst/>
+  </dgm:styleLbl>
+  <dgm:styleLbl name="fgAcc3">
+    <dgm:fillClrLst meth="repeat">
+      <a:schemeClr val="lt1">
+        <a:alpha val="90000"/>
+      </a:schemeClr>
+    </dgm:fillClrLst>
+    <dgm:linClrLst meth="repeat">
+      <a:schemeClr val="accent1"/>
+    </dgm:linClrLst>
+    <dgm:effectClrLst/>
+    <dgm:txLinClrLst/>
+    <dgm:txFillClrLst meth="repeat">
+      <a:schemeClr val="dk1"/>
+    </dgm:txFillClrLst>
+    <dgm:txEffectClrLst/>
+  </dgm:styleLbl>
+  <dgm:styleLbl name="fgAcc4">
+    <dgm:fillClrLst meth="repeat">
+      <a:schemeClr val="lt1">
+        <a:alpha val="90000"/>
+      </a:schemeClr>
+    </dgm:fillClrLst>
+    <dgm:linClrLst meth="repeat">
+      <a:schemeClr val="accent1"/>
+    </dgm:linClrLst>
+    <dgm:effectClrLst/>
+    <dgm:txLinClrLst/>
+    <dgm:txFillClrLst meth="repeat">
+      <a:schemeClr val="dk1"/>
+    </dgm:txFillClrLst>
+    <dgm:txEffectClrLst/>
+  </dgm:styleLbl>
+  <dgm:styleLbl name="bgShp">
+    <dgm:fillClrLst meth="repeat">
+      <a:schemeClr val="accent1">
+        <a:tint val="40000"/>
+      </a:schemeClr>
+    </dgm:fillClrLst>
+    <dgm:linClrLst meth="repeat">
+      <a:schemeClr val="accent1"/>
+    </dgm:linClrLst>
+    <dgm:effectClrLst/>
+    <dgm:txLinClrLst/>
+    <dgm:txFillClrLst meth="repeat">
+      <a:schemeClr val="dk1"/>
+    </dgm:txFillClrLst>
+    <dgm:txEffectClrLst/>
+  </dgm:styleLbl>
+  <dgm:styleLbl name="dkBgShp">
+    <dgm:fillClrLst meth="repeat">
+      <a:schemeClr val="accent1">
+        <a:shade val="80000"/>
+      </a:schemeClr>
+    </dgm:fillClrLst>
+    <dgm:linClrLst meth="repeat">
+      <a:schemeClr val="accent1"/>
+    </dgm:linClrLst>
+    <dgm:effectClrLst/>
+    <dgm:txLinClrLst/>
+    <dgm:txFillClrLst meth="repeat">
+      <a:schemeClr val="lt1"/>
+    </dgm:txFillClrLst>
+    <dgm:txEffectClrLst/>
+  </dgm:styleLbl>
+  <dgm:styleLbl name="trBgShp">
+    <dgm:fillClrLst meth="repeat">
+      <a:schemeClr val="accent1">
+        <a:tint val="50000"/>
+        <a:alpha val="40000"/>
+      </a:schemeClr>
+    </dgm:fillClrLst>
+    <dgm:linClrLst meth="repeat">
+      <a:schemeClr val="accent1"/>
+    </dgm:linClrLst>
+    <dgm:effectClrLst/>
+    <dgm:txLinClrLst/>
+    <dgm:txFillClrLst meth="repeat">
+      <a:schemeClr val="lt1"/>
+    </dgm:txFillClrLst>
+    <dgm:txEffectClrLst/>
+  </dgm:styleLbl>
+  <dgm:styleLbl name="fgShp">
+    <dgm:fillClrLst meth="repeat">
+      <a:schemeClr val="accent1">
+        <a:tint val="60000"/>
+      </a:schemeClr>
+    </dgm:fillClrLst>
+    <dgm:linClrLst meth="repeat">
+      <a:schemeClr val="lt1"/>
+    </dgm:linClrLst>
+    <dgm:effectClrLst/>
+    <dgm:txLinClrLst/>
+    <dgm:txFillClrLst meth="repeat">
+      <a:schemeClr val="dk1"/>
+    </dgm:txFillClrLst>
+    <dgm:txEffectClrLst/>
+  </dgm:styleLbl>
+  <dgm:styleLbl name="revTx">
+    <dgm:fillClrLst meth="repeat">
+      <a:schemeClr val="lt1">
+        <a:alpha val="0"/>
+      </a:schemeClr>
+    </dgm:fillClrLst>
+    <dgm:linClrLst meth="repeat">
+      <a:schemeClr val="dk1">
+        <a:alpha val="0"/>
+      </a:schemeClr>
+    </dgm:linClrLst>
+    <dgm:effectClrLst/>
+    <dgm:txLinClrLst/>
+    <dgm:txFillClrLst meth="repeat">
+      <a:schemeClr val="tx1"/>
+    </dgm:txFillClrLst>
+    <dgm:txEffectClrLst/>
+  </dgm:styleLbl>
+</dgm:colorsDef>
+</file>
+
+<file path=ppt/diagrams/colors2.xml><?xml version="1.0" encoding="utf-8"?>
 <dgm:colorsDef xmlns:dgm="http://schemas.openxmlformats.org/drawingml/2006/diagram" xmlns:a="http://schemas.openxmlformats.org/drawingml/2006/main" uniqueId="urn:microsoft.com/office/officeart/2005/8/colors/colorful1">
   <dgm:title val=""/>
   <dgm:desc val=""/>
@@ -2471,6 +3504,250 @@
 <file path=ppt/diagrams/data1.xml><?xml version="1.0" encoding="utf-8"?>
 <dgm:dataModel xmlns:dgm="http://schemas.openxmlformats.org/drawingml/2006/diagram" xmlns:a="http://schemas.openxmlformats.org/drawingml/2006/main">
   <dgm:ptLst>
+    <dgm:pt modelId="{1BA07238-EA0C-4068-B840-BF95B9F0D166}" type="doc">
+      <dgm:prSet loTypeId="urn:microsoft.com/office/officeart/2005/8/layout/hierarchy1" loCatId="hierarchy" qsTypeId="urn:microsoft.com/office/officeart/2005/8/quickstyle/simple1" qsCatId="simple" csTypeId="urn:microsoft.com/office/officeart/2005/8/colors/accent1_2" csCatId="accent1"/>
+      <dgm:spPr/>
+      <dgm:t>
+        <a:bodyPr/>
+        <a:lstStyle/>
+        <a:p>
+          <a:endParaRPr lang="en-US"/>
+        </a:p>
+      </dgm:t>
+    </dgm:pt>
+    <dgm:pt modelId="{FF665B83-1B4D-4C90-98A1-0D3C84EE7012}">
+      <dgm:prSet/>
+      <dgm:spPr/>
+      <dgm:t>
+        <a:bodyPr/>
+        <a:lstStyle/>
+        <a:p>
+          <a:r>
+            <a:rPr lang="fr-CA"/>
+            <a:t>Maturité sexuelle à 10 ans</a:t>
+          </a:r>
+          <a:endParaRPr lang="en-US"/>
+        </a:p>
+      </dgm:t>
+    </dgm:pt>
+    <dgm:pt modelId="{E38D55F2-7934-453C-AFB7-88E5F6DF0F5D}" type="parTrans" cxnId="{BBE6F56C-522C-45F7-974D-F6B65E417936}">
+      <dgm:prSet/>
+      <dgm:spPr/>
+      <dgm:t>
+        <a:bodyPr/>
+        <a:lstStyle/>
+        <a:p>
+          <a:endParaRPr lang="en-US"/>
+        </a:p>
+      </dgm:t>
+    </dgm:pt>
+    <dgm:pt modelId="{F8B8BB7D-45FB-4918-8B57-2B75A9DA775C}" type="sibTrans" cxnId="{BBE6F56C-522C-45F7-974D-F6B65E417936}">
+      <dgm:prSet/>
+      <dgm:spPr/>
+      <dgm:t>
+        <a:bodyPr/>
+        <a:lstStyle/>
+        <a:p>
+          <a:endParaRPr lang="en-US"/>
+        </a:p>
+      </dgm:t>
+    </dgm:pt>
+    <dgm:pt modelId="{59406451-88E5-4A80-8B8D-0DFA00C9C446}">
+      <dgm:prSet/>
+      <dgm:spPr/>
+      <dgm:t>
+        <a:bodyPr/>
+        <a:lstStyle/>
+        <a:p>
+          <a:r>
+            <a:rPr lang="fr-CA"/>
+            <a:t>Espérance de vie &gt;30 ans</a:t>
+          </a:r>
+          <a:endParaRPr lang="en-US"/>
+        </a:p>
+      </dgm:t>
+    </dgm:pt>
+    <dgm:pt modelId="{476D7254-7038-4C7B-AD4E-2E063E9EA71A}" type="parTrans" cxnId="{FA60F33F-057A-46FB-B11B-7FAF09F02157}">
+      <dgm:prSet/>
+      <dgm:spPr/>
+      <dgm:t>
+        <a:bodyPr/>
+        <a:lstStyle/>
+        <a:p>
+          <a:endParaRPr lang="en-US"/>
+        </a:p>
+      </dgm:t>
+    </dgm:pt>
+    <dgm:pt modelId="{9E0892ED-B88A-4B4C-B2C4-C90275E2A200}" type="sibTrans" cxnId="{FA60F33F-057A-46FB-B11B-7FAF09F02157}">
+      <dgm:prSet/>
+      <dgm:spPr/>
+      <dgm:t>
+        <a:bodyPr/>
+        <a:lstStyle/>
+        <a:p>
+          <a:endParaRPr lang="en-US"/>
+        </a:p>
+      </dgm:t>
+    </dgm:pt>
+    <dgm:pt modelId="{0D49BA0D-A3F5-4AEF-B0FD-CA1CAC52E855}">
+      <dgm:prSet/>
+      <dgm:spPr/>
+      <dgm:t>
+        <a:bodyPr/>
+        <a:lstStyle/>
+        <a:p>
+          <a:r>
+            <a:rPr lang="fr-CA"/>
+            <a:t>2 sites de fraie connus</a:t>
+          </a:r>
+          <a:endParaRPr lang="en-US"/>
+        </a:p>
+      </dgm:t>
+    </dgm:pt>
+    <dgm:pt modelId="{376FA331-F4A4-4853-B081-35A8360A80EC}" type="parTrans" cxnId="{C7770ABF-91CA-428C-9702-9B0CAB58B3A9}">
+      <dgm:prSet/>
+      <dgm:spPr/>
+      <dgm:t>
+        <a:bodyPr/>
+        <a:lstStyle/>
+        <a:p>
+          <a:endParaRPr lang="en-US"/>
+        </a:p>
+      </dgm:t>
+    </dgm:pt>
+    <dgm:pt modelId="{41FEBED8-1C7C-4883-87E4-AC4E2E3F6D61}" type="sibTrans" cxnId="{C7770ABF-91CA-428C-9702-9B0CAB58B3A9}">
+      <dgm:prSet/>
+      <dgm:spPr/>
+      <dgm:t>
+        <a:bodyPr/>
+        <a:lstStyle/>
+        <a:p>
+          <a:endParaRPr lang="en-US"/>
+        </a:p>
+      </dgm:t>
+    </dgm:pt>
+    <dgm:pt modelId="{D977E62F-C420-4330-BD96-FCEE8ACC918A}" type="pres">
+      <dgm:prSet presAssocID="{1BA07238-EA0C-4068-B840-BF95B9F0D166}" presName="hierChild1" presStyleCnt="0">
+        <dgm:presLayoutVars>
+          <dgm:chPref val="1"/>
+          <dgm:dir/>
+          <dgm:animOne val="branch"/>
+          <dgm:animLvl val="lvl"/>
+          <dgm:resizeHandles/>
+        </dgm:presLayoutVars>
+      </dgm:prSet>
+      <dgm:spPr/>
+    </dgm:pt>
+    <dgm:pt modelId="{7B435300-3871-4DEB-831D-D2E85F023420}" type="pres">
+      <dgm:prSet presAssocID="{FF665B83-1B4D-4C90-98A1-0D3C84EE7012}" presName="hierRoot1" presStyleCnt="0"/>
+      <dgm:spPr/>
+    </dgm:pt>
+    <dgm:pt modelId="{98E3AD30-22EF-400D-9B28-56C2260CAC7D}" type="pres">
+      <dgm:prSet presAssocID="{FF665B83-1B4D-4C90-98A1-0D3C84EE7012}" presName="composite" presStyleCnt="0"/>
+      <dgm:spPr/>
+    </dgm:pt>
+    <dgm:pt modelId="{B113528B-892E-4BF7-825F-6B4469CA9E9B}" type="pres">
+      <dgm:prSet presAssocID="{FF665B83-1B4D-4C90-98A1-0D3C84EE7012}" presName="background" presStyleLbl="node0" presStyleIdx="0" presStyleCnt="3"/>
+      <dgm:spPr/>
+    </dgm:pt>
+    <dgm:pt modelId="{22D4EF55-42D6-4D17-A853-126DB7644C5A}" type="pres">
+      <dgm:prSet presAssocID="{FF665B83-1B4D-4C90-98A1-0D3C84EE7012}" presName="text" presStyleLbl="fgAcc0" presStyleIdx="0" presStyleCnt="3">
+        <dgm:presLayoutVars>
+          <dgm:chPref val="3"/>
+        </dgm:presLayoutVars>
+      </dgm:prSet>
+      <dgm:spPr/>
+    </dgm:pt>
+    <dgm:pt modelId="{8D0169D6-290E-4764-BF87-C8034F6CE8DE}" type="pres">
+      <dgm:prSet presAssocID="{FF665B83-1B4D-4C90-98A1-0D3C84EE7012}" presName="hierChild2" presStyleCnt="0"/>
+      <dgm:spPr/>
+    </dgm:pt>
+    <dgm:pt modelId="{744AB9BB-6548-4AAB-B7AD-0364CC7EAB8F}" type="pres">
+      <dgm:prSet presAssocID="{59406451-88E5-4A80-8B8D-0DFA00C9C446}" presName="hierRoot1" presStyleCnt="0"/>
+      <dgm:spPr/>
+    </dgm:pt>
+    <dgm:pt modelId="{9DAF401A-CAF0-43EB-BF3F-D35B6C24310D}" type="pres">
+      <dgm:prSet presAssocID="{59406451-88E5-4A80-8B8D-0DFA00C9C446}" presName="composite" presStyleCnt="0"/>
+      <dgm:spPr/>
+    </dgm:pt>
+    <dgm:pt modelId="{3CE72B38-A579-462C-8F08-A93B2B81A81E}" type="pres">
+      <dgm:prSet presAssocID="{59406451-88E5-4A80-8B8D-0DFA00C9C446}" presName="background" presStyleLbl="node0" presStyleIdx="1" presStyleCnt="3"/>
+      <dgm:spPr/>
+    </dgm:pt>
+    <dgm:pt modelId="{B43240E6-B0E2-4B7B-99FD-9CCFC53FA534}" type="pres">
+      <dgm:prSet presAssocID="{59406451-88E5-4A80-8B8D-0DFA00C9C446}" presName="text" presStyleLbl="fgAcc0" presStyleIdx="1" presStyleCnt="3">
+        <dgm:presLayoutVars>
+          <dgm:chPref val="3"/>
+        </dgm:presLayoutVars>
+      </dgm:prSet>
+      <dgm:spPr/>
+    </dgm:pt>
+    <dgm:pt modelId="{92FD71ED-C1E5-4BA0-921D-5D2448686D1F}" type="pres">
+      <dgm:prSet presAssocID="{59406451-88E5-4A80-8B8D-0DFA00C9C446}" presName="hierChild2" presStyleCnt="0"/>
+      <dgm:spPr/>
+    </dgm:pt>
+    <dgm:pt modelId="{7B2EC0C2-5C70-4E47-8144-F553AC894AE5}" type="pres">
+      <dgm:prSet presAssocID="{0D49BA0D-A3F5-4AEF-B0FD-CA1CAC52E855}" presName="hierRoot1" presStyleCnt="0"/>
+      <dgm:spPr/>
+    </dgm:pt>
+    <dgm:pt modelId="{0BC077D5-A4D8-4AEF-8528-92B0953FB518}" type="pres">
+      <dgm:prSet presAssocID="{0D49BA0D-A3F5-4AEF-B0FD-CA1CAC52E855}" presName="composite" presStyleCnt="0"/>
+      <dgm:spPr/>
+    </dgm:pt>
+    <dgm:pt modelId="{2BE4893F-51F5-4377-ABA0-82E5B3E8A7D8}" type="pres">
+      <dgm:prSet presAssocID="{0D49BA0D-A3F5-4AEF-B0FD-CA1CAC52E855}" presName="background" presStyleLbl="node0" presStyleIdx="2" presStyleCnt="3"/>
+      <dgm:spPr/>
+    </dgm:pt>
+    <dgm:pt modelId="{C7220E4E-4EF4-498A-90FB-A280214E27FB}" type="pres">
+      <dgm:prSet presAssocID="{0D49BA0D-A3F5-4AEF-B0FD-CA1CAC52E855}" presName="text" presStyleLbl="fgAcc0" presStyleIdx="2" presStyleCnt="3">
+        <dgm:presLayoutVars>
+          <dgm:chPref val="3"/>
+        </dgm:presLayoutVars>
+      </dgm:prSet>
+      <dgm:spPr/>
+    </dgm:pt>
+    <dgm:pt modelId="{8ABD43AB-23CD-448F-9EC9-55B3F0E236E7}" type="pres">
+      <dgm:prSet presAssocID="{0D49BA0D-A3F5-4AEF-B0FD-CA1CAC52E855}" presName="hierChild2" presStyleCnt="0"/>
+      <dgm:spPr/>
+    </dgm:pt>
+  </dgm:ptLst>
+  <dgm:cxnLst>
+    <dgm:cxn modelId="{FDE90514-0B29-4CE0-8C38-29B77B95779A}" type="presOf" srcId="{FF665B83-1B4D-4C90-98A1-0D3C84EE7012}" destId="{22D4EF55-42D6-4D17-A853-126DB7644C5A}" srcOrd="0" destOrd="0" presId="urn:microsoft.com/office/officeart/2005/8/layout/hierarchy1"/>
+    <dgm:cxn modelId="{FA60F33F-057A-46FB-B11B-7FAF09F02157}" srcId="{1BA07238-EA0C-4068-B840-BF95B9F0D166}" destId="{59406451-88E5-4A80-8B8D-0DFA00C9C446}" srcOrd="1" destOrd="0" parTransId="{476D7254-7038-4C7B-AD4E-2E063E9EA71A}" sibTransId="{9E0892ED-B88A-4B4C-B2C4-C90275E2A200}"/>
+    <dgm:cxn modelId="{7A371547-1CCD-4C14-B4FE-BEF61031A6AF}" type="presOf" srcId="{1BA07238-EA0C-4068-B840-BF95B9F0D166}" destId="{D977E62F-C420-4330-BD96-FCEE8ACC918A}" srcOrd="0" destOrd="0" presId="urn:microsoft.com/office/officeart/2005/8/layout/hierarchy1"/>
+    <dgm:cxn modelId="{419D3F6C-85D0-4EA7-80FC-A94698EA3278}" type="presOf" srcId="{59406451-88E5-4A80-8B8D-0DFA00C9C446}" destId="{B43240E6-B0E2-4B7B-99FD-9CCFC53FA534}" srcOrd="0" destOrd="0" presId="urn:microsoft.com/office/officeart/2005/8/layout/hierarchy1"/>
+    <dgm:cxn modelId="{BBE6F56C-522C-45F7-974D-F6B65E417936}" srcId="{1BA07238-EA0C-4068-B840-BF95B9F0D166}" destId="{FF665B83-1B4D-4C90-98A1-0D3C84EE7012}" srcOrd="0" destOrd="0" parTransId="{E38D55F2-7934-453C-AFB7-88E5F6DF0F5D}" sibTransId="{F8B8BB7D-45FB-4918-8B57-2B75A9DA775C}"/>
+    <dgm:cxn modelId="{C7770ABF-91CA-428C-9702-9B0CAB58B3A9}" srcId="{1BA07238-EA0C-4068-B840-BF95B9F0D166}" destId="{0D49BA0D-A3F5-4AEF-B0FD-CA1CAC52E855}" srcOrd="2" destOrd="0" parTransId="{376FA331-F4A4-4853-B081-35A8360A80EC}" sibTransId="{41FEBED8-1C7C-4883-87E4-AC4E2E3F6D61}"/>
+    <dgm:cxn modelId="{D9D90CC0-18C1-46FE-8634-B2FE37BACFEB}" type="presOf" srcId="{0D49BA0D-A3F5-4AEF-B0FD-CA1CAC52E855}" destId="{C7220E4E-4EF4-498A-90FB-A280214E27FB}" srcOrd="0" destOrd="0" presId="urn:microsoft.com/office/officeart/2005/8/layout/hierarchy1"/>
+    <dgm:cxn modelId="{4F5DEA92-EBD7-4527-8700-35C576EB2937}" type="presParOf" srcId="{D977E62F-C420-4330-BD96-FCEE8ACC918A}" destId="{7B435300-3871-4DEB-831D-D2E85F023420}" srcOrd="0" destOrd="0" presId="urn:microsoft.com/office/officeart/2005/8/layout/hierarchy1"/>
+    <dgm:cxn modelId="{1FA3E027-5233-47C0-8FF7-C3EA938C27C9}" type="presParOf" srcId="{7B435300-3871-4DEB-831D-D2E85F023420}" destId="{98E3AD30-22EF-400D-9B28-56C2260CAC7D}" srcOrd="0" destOrd="0" presId="urn:microsoft.com/office/officeart/2005/8/layout/hierarchy1"/>
+    <dgm:cxn modelId="{122DC65D-807E-4EAB-8E8D-C061A6C2DEA3}" type="presParOf" srcId="{98E3AD30-22EF-400D-9B28-56C2260CAC7D}" destId="{B113528B-892E-4BF7-825F-6B4469CA9E9B}" srcOrd="0" destOrd="0" presId="urn:microsoft.com/office/officeart/2005/8/layout/hierarchy1"/>
+    <dgm:cxn modelId="{AFA076CC-1FF5-4986-9B64-9B3FE62CA9DD}" type="presParOf" srcId="{98E3AD30-22EF-400D-9B28-56C2260CAC7D}" destId="{22D4EF55-42D6-4D17-A853-126DB7644C5A}" srcOrd="1" destOrd="0" presId="urn:microsoft.com/office/officeart/2005/8/layout/hierarchy1"/>
+    <dgm:cxn modelId="{155B22C6-5429-49C7-A8FB-2B25F1BD767B}" type="presParOf" srcId="{7B435300-3871-4DEB-831D-D2E85F023420}" destId="{8D0169D6-290E-4764-BF87-C8034F6CE8DE}" srcOrd="1" destOrd="0" presId="urn:microsoft.com/office/officeart/2005/8/layout/hierarchy1"/>
+    <dgm:cxn modelId="{A8E71190-34F5-4F5A-AFE7-EF6A17AAD227}" type="presParOf" srcId="{D977E62F-C420-4330-BD96-FCEE8ACC918A}" destId="{744AB9BB-6548-4AAB-B7AD-0364CC7EAB8F}" srcOrd="1" destOrd="0" presId="urn:microsoft.com/office/officeart/2005/8/layout/hierarchy1"/>
+    <dgm:cxn modelId="{A9F2BBB8-DD99-43AA-BA25-D29BCEE6E67E}" type="presParOf" srcId="{744AB9BB-6548-4AAB-B7AD-0364CC7EAB8F}" destId="{9DAF401A-CAF0-43EB-BF3F-D35B6C24310D}" srcOrd="0" destOrd="0" presId="urn:microsoft.com/office/officeart/2005/8/layout/hierarchy1"/>
+    <dgm:cxn modelId="{A0AF4870-E5EB-4752-92F8-B21538E6FA1B}" type="presParOf" srcId="{9DAF401A-CAF0-43EB-BF3F-D35B6C24310D}" destId="{3CE72B38-A579-462C-8F08-A93B2B81A81E}" srcOrd="0" destOrd="0" presId="urn:microsoft.com/office/officeart/2005/8/layout/hierarchy1"/>
+    <dgm:cxn modelId="{609655C5-C1F2-4203-AEE4-75D742298821}" type="presParOf" srcId="{9DAF401A-CAF0-43EB-BF3F-D35B6C24310D}" destId="{B43240E6-B0E2-4B7B-99FD-9CCFC53FA534}" srcOrd="1" destOrd="0" presId="urn:microsoft.com/office/officeart/2005/8/layout/hierarchy1"/>
+    <dgm:cxn modelId="{365EFD92-3A35-4989-83DC-D6DBF6430DC4}" type="presParOf" srcId="{744AB9BB-6548-4AAB-B7AD-0364CC7EAB8F}" destId="{92FD71ED-C1E5-4BA0-921D-5D2448686D1F}" srcOrd="1" destOrd="0" presId="urn:microsoft.com/office/officeart/2005/8/layout/hierarchy1"/>
+    <dgm:cxn modelId="{C89C1CC1-3E4C-4242-944D-B5860220F17B}" type="presParOf" srcId="{D977E62F-C420-4330-BD96-FCEE8ACC918A}" destId="{7B2EC0C2-5C70-4E47-8144-F553AC894AE5}" srcOrd="2" destOrd="0" presId="urn:microsoft.com/office/officeart/2005/8/layout/hierarchy1"/>
+    <dgm:cxn modelId="{20BE23C0-B140-47A8-825B-2EA9C826D6BA}" type="presParOf" srcId="{7B2EC0C2-5C70-4E47-8144-F553AC894AE5}" destId="{0BC077D5-A4D8-4AEF-8528-92B0953FB518}" srcOrd="0" destOrd="0" presId="urn:microsoft.com/office/officeart/2005/8/layout/hierarchy1"/>
+    <dgm:cxn modelId="{146785F7-801D-4901-9D0D-C26BD5419B1C}" type="presParOf" srcId="{0BC077D5-A4D8-4AEF-8528-92B0953FB518}" destId="{2BE4893F-51F5-4377-ABA0-82E5B3E8A7D8}" srcOrd="0" destOrd="0" presId="urn:microsoft.com/office/officeart/2005/8/layout/hierarchy1"/>
+    <dgm:cxn modelId="{7A5BD060-C009-43F8-AE84-2B615221114D}" type="presParOf" srcId="{0BC077D5-A4D8-4AEF-8528-92B0953FB518}" destId="{C7220E4E-4EF4-498A-90FB-A280214E27FB}" srcOrd="1" destOrd="0" presId="urn:microsoft.com/office/officeart/2005/8/layout/hierarchy1"/>
+    <dgm:cxn modelId="{6ACA991E-51A7-4FE0-A7A6-D596AC5A9669}" type="presParOf" srcId="{7B2EC0C2-5C70-4E47-8144-F553AC894AE5}" destId="{8ABD43AB-23CD-448F-9EC9-55B3F0E236E7}" srcOrd="1" destOrd="0" presId="urn:microsoft.com/office/officeart/2005/8/layout/hierarchy1"/>
+  </dgm:cxnLst>
+  <dgm:bg/>
+  <dgm:whole/>
+  <dgm:extLst>
+    <a:ext uri="http://schemas.microsoft.com/office/drawing/2008/diagram">
+      <dsp:dataModelExt xmlns:dsp="http://schemas.microsoft.com/office/drawing/2008/diagram" relId="rId6" minVer="http://schemas.openxmlformats.org/drawingml/2006/diagram"/>
+    </a:ext>
+  </dgm:extLst>
+</dgm:dataModel>
+</file>
+
+<file path=ppt/diagrams/data2.xml><?xml version="1.0" encoding="utf-8"?>
+<dgm:dataModel xmlns:dgm="http://schemas.openxmlformats.org/drawingml/2006/diagram" xmlns:a="http://schemas.openxmlformats.org/drawingml/2006/main">
+  <dgm:ptLst>
     <dgm:pt modelId="{49749DE9-9646-447E-BF7B-82D5A2142C32}" type="doc">
       <dgm:prSet loTypeId="urn:microsoft.com/office/officeart/2005/8/layout/vProcess5" loCatId="process" qsTypeId="urn:microsoft.com/office/officeart/2005/8/quickstyle/simple1" qsCatId="simple" csTypeId="urn:microsoft.com/office/officeart/2005/8/colors/colorful1" csCatId="colorful"/>
       <dgm:spPr/>
@@ -2708,6 +3985,414 @@
 </file>
 
 <file path=ppt/diagrams/drawing1.xml><?xml version="1.0" encoding="utf-8"?>
+<dsp:drawing xmlns:dgm="http://schemas.openxmlformats.org/drawingml/2006/diagram" xmlns:dsp="http://schemas.microsoft.com/office/drawing/2008/diagram" xmlns:a="http://schemas.openxmlformats.org/drawingml/2006/main">
+  <dsp:spTree>
+    <dsp:nvGrpSpPr>
+      <dsp:cNvPr id="0" name=""/>
+      <dsp:cNvGrpSpPr/>
+    </dsp:nvGrpSpPr>
+    <dsp:grpSpPr/>
+    <dsp:sp modelId="{B113528B-892E-4BF7-825F-6B4469CA9E9B}">
+      <dsp:nvSpPr>
+        <dsp:cNvPr id="0" name=""/>
+        <dsp:cNvSpPr/>
+      </dsp:nvSpPr>
+      <dsp:spPr>
+        <a:xfrm>
+          <a:off x="0" y="756552"/>
+          <a:ext cx="3006918" cy="1909393"/>
+        </a:xfrm>
+        <a:prstGeom prst="roundRect">
+          <a:avLst>
+            <a:gd name="adj" fmla="val 10000"/>
+          </a:avLst>
+        </a:prstGeom>
+        <a:solidFill>
+          <a:schemeClr val="accent1">
+            <a:hueOff val="0"/>
+            <a:satOff val="0"/>
+            <a:lumOff val="0"/>
+            <a:alphaOff val="0"/>
+          </a:schemeClr>
+        </a:solidFill>
+        <a:ln w="12700" cap="flat" cmpd="sng" algn="ctr">
+          <a:solidFill>
+            <a:schemeClr val="lt1">
+              <a:hueOff val="0"/>
+              <a:satOff val="0"/>
+              <a:lumOff val="0"/>
+              <a:alphaOff val="0"/>
+            </a:schemeClr>
+          </a:solidFill>
+          <a:prstDash val="solid"/>
+          <a:miter lim="800000"/>
+        </a:ln>
+        <a:effectLst/>
+      </dsp:spPr>
+      <dsp:style>
+        <a:lnRef idx="2">
+          <a:scrgbClr r="0" g="0" b="0"/>
+        </a:lnRef>
+        <a:fillRef idx="1">
+          <a:scrgbClr r="0" g="0" b="0"/>
+        </a:fillRef>
+        <a:effectRef idx="0">
+          <a:scrgbClr r="0" g="0" b="0"/>
+        </a:effectRef>
+        <a:fontRef idx="minor">
+          <a:schemeClr val="lt1"/>
+        </a:fontRef>
+      </dsp:style>
+    </dsp:sp>
+    <dsp:sp modelId="{22D4EF55-42D6-4D17-A853-126DB7644C5A}">
+      <dsp:nvSpPr>
+        <dsp:cNvPr id="0" name=""/>
+        <dsp:cNvSpPr/>
+      </dsp:nvSpPr>
+      <dsp:spPr>
+        <a:xfrm>
+          <a:off x="334102" y="1073949"/>
+          <a:ext cx="3006918" cy="1909393"/>
+        </a:xfrm>
+        <a:prstGeom prst="roundRect">
+          <a:avLst>
+            <a:gd name="adj" fmla="val 10000"/>
+          </a:avLst>
+        </a:prstGeom>
+        <a:solidFill>
+          <a:schemeClr val="lt1">
+            <a:alpha val="90000"/>
+            <a:hueOff val="0"/>
+            <a:satOff val="0"/>
+            <a:lumOff val="0"/>
+            <a:alphaOff val="0"/>
+          </a:schemeClr>
+        </a:solidFill>
+        <a:ln w="12700" cap="flat" cmpd="sng" algn="ctr">
+          <a:solidFill>
+            <a:schemeClr val="accent1">
+              <a:hueOff val="0"/>
+              <a:satOff val="0"/>
+              <a:lumOff val="0"/>
+              <a:alphaOff val="0"/>
+            </a:schemeClr>
+          </a:solidFill>
+          <a:prstDash val="solid"/>
+          <a:miter lim="800000"/>
+        </a:ln>
+        <a:effectLst/>
+      </dsp:spPr>
+      <dsp:style>
+        <a:lnRef idx="2">
+          <a:scrgbClr r="0" g="0" b="0"/>
+        </a:lnRef>
+        <a:fillRef idx="1">
+          <a:scrgbClr r="0" g="0" b="0"/>
+        </a:fillRef>
+        <a:effectRef idx="0">
+          <a:scrgbClr r="0" g="0" b="0"/>
+        </a:effectRef>
+        <a:fontRef idx="minor"/>
+      </dsp:style>
+      <dsp:txBody>
+        <a:bodyPr spcFirstLastPara="0" vert="horz" wrap="square" lIns="144780" tIns="144780" rIns="144780" bIns="144780" numCol="1" spcCol="1270" anchor="ctr" anchorCtr="0">
+          <a:noAutofit/>
+        </a:bodyPr>
+        <a:lstStyle/>
+        <a:p>
+          <a:pPr marL="0" lvl="0" indent="0" algn="ctr" defTabSz="1689100">
+            <a:lnSpc>
+              <a:spcPct val="90000"/>
+            </a:lnSpc>
+            <a:spcBef>
+              <a:spcPct val="0"/>
+            </a:spcBef>
+            <a:spcAft>
+              <a:spcPct val="35000"/>
+            </a:spcAft>
+            <a:buNone/>
+          </a:pPr>
+          <a:r>
+            <a:rPr lang="fr-CA" sz="3800" kern="1200"/>
+            <a:t>Maturité sexuelle à 10 ans</a:t>
+          </a:r>
+          <a:endParaRPr lang="en-US" sz="3800" kern="1200"/>
+        </a:p>
+      </dsp:txBody>
+      <dsp:txXfrm>
+        <a:off x="390026" y="1129873"/>
+        <a:ext cx="2895070" cy="1797545"/>
+      </dsp:txXfrm>
+    </dsp:sp>
+    <dsp:sp modelId="{3CE72B38-A579-462C-8F08-A93B2B81A81E}">
+      <dsp:nvSpPr>
+        <dsp:cNvPr id="0" name=""/>
+        <dsp:cNvSpPr/>
+      </dsp:nvSpPr>
+      <dsp:spPr>
+        <a:xfrm>
+          <a:off x="3675122" y="756552"/>
+          <a:ext cx="3006918" cy="1909393"/>
+        </a:xfrm>
+        <a:prstGeom prst="roundRect">
+          <a:avLst>
+            <a:gd name="adj" fmla="val 10000"/>
+          </a:avLst>
+        </a:prstGeom>
+        <a:solidFill>
+          <a:schemeClr val="accent1">
+            <a:hueOff val="0"/>
+            <a:satOff val="0"/>
+            <a:lumOff val="0"/>
+            <a:alphaOff val="0"/>
+          </a:schemeClr>
+        </a:solidFill>
+        <a:ln w="12700" cap="flat" cmpd="sng" algn="ctr">
+          <a:solidFill>
+            <a:schemeClr val="lt1">
+              <a:hueOff val="0"/>
+              <a:satOff val="0"/>
+              <a:lumOff val="0"/>
+              <a:alphaOff val="0"/>
+            </a:schemeClr>
+          </a:solidFill>
+          <a:prstDash val="solid"/>
+          <a:miter lim="800000"/>
+        </a:ln>
+        <a:effectLst/>
+      </dsp:spPr>
+      <dsp:style>
+        <a:lnRef idx="2">
+          <a:scrgbClr r="0" g="0" b="0"/>
+        </a:lnRef>
+        <a:fillRef idx="1">
+          <a:scrgbClr r="0" g="0" b="0"/>
+        </a:fillRef>
+        <a:effectRef idx="0">
+          <a:scrgbClr r="0" g="0" b="0"/>
+        </a:effectRef>
+        <a:fontRef idx="minor">
+          <a:schemeClr val="lt1"/>
+        </a:fontRef>
+      </dsp:style>
+    </dsp:sp>
+    <dsp:sp modelId="{B43240E6-B0E2-4B7B-99FD-9CCFC53FA534}">
+      <dsp:nvSpPr>
+        <dsp:cNvPr id="0" name=""/>
+        <dsp:cNvSpPr/>
+      </dsp:nvSpPr>
+      <dsp:spPr>
+        <a:xfrm>
+          <a:off x="4009224" y="1073949"/>
+          <a:ext cx="3006918" cy="1909393"/>
+        </a:xfrm>
+        <a:prstGeom prst="roundRect">
+          <a:avLst>
+            <a:gd name="adj" fmla="val 10000"/>
+          </a:avLst>
+        </a:prstGeom>
+        <a:solidFill>
+          <a:schemeClr val="lt1">
+            <a:alpha val="90000"/>
+            <a:hueOff val="0"/>
+            <a:satOff val="0"/>
+            <a:lumOff val="0"/>
+            <a:alphaOff val="0"/>
+          </a:schemeClr>
+        </a:solidFill>
+        <a:ln w="12700" cap="flat" cmpd="sng" algn="ctr">
+          <a:solidFill>
+            <a:schemeClr val="accent1">
+              <a:hueOff val="0"/>
+              <a:satOff val="0"/>
+              <a:lumOff val="0"/>
+              <a:alphaOff val="0"/>
+            </a:schemeClr>
+          </a:solidFill>
+          <a:prstDash val="solid"/>
+          <a:miter lim="800000"/>
+        </a:ln>
+        <a:effectLst/>
+      </dsp:spPr>
+      <dsp:style>
+        <a:lnRef idx="2">
+          <a:scrgbClr r="0" g="0" b="0"/>
+        </a:lnRef>
+        <a:fillRef idx="1">
+          <a:scrgbClr r="0" g="0" b="0"/>
+        </a:fillRef>
+        <a:effectRef idx="0">
+          <a:scrgbClr r="0" g="0" b="0"/>
+        </a:effectRef>
+        <a:fontRef idx="minor"/>
+      </dsp:style>
+      <dsp:txBody>
+        <a:bodyPr spcFirstLastPara="0" vert="horz" wrap="square" lIns="144780" tIns="144780" rIns="144780" bIns="144780" numCol="1" spcCol="1270" anchor="ctr" anchorCtr="0">
+          <a:noAutofit/>
+        </a:bodyPr>
+        <a:lstStyle/>
+        <a:p>
+          <a:pPr marL="0" lvl="0" indent="0" algn="ctr" defTabSz="1689100">
+            <a:lnSpc>
+              <a:spcPct val="90000"/>
+            </a:lnSpc>
+            <a:spcBef>
+              <a:spcPct val="0"/>
+            </a:spcBef>
+            <a:spcAft>
+              <a:spcPct val="35000"/>
+            </a:spcAft>
+            <a:buNone/>
+          </a:pPr>
+          <a:r>
+            <a:rPr lang="fr-CA" sz="3800" kern="1200"/>
+            <a:t>Espérance de vie &gt;30 ans</a:t>
+          </a:r>
+          <a:endParaRPr lang="en-US" sz="3800" kern="1200"/>
+        </a:p>
+      </dsp:txBody>
+      <dsp:txXfrm>
+        <a:off x="4065148" y="1129873"/>
+        <a:ext cx="2895070" cy="1797545"/>
+      </dsp:txXfrm>
+    </dsp:sp>
+    <dsp:sp modelId="{2BE4893F-51F5-4377-ABA0-82E5B3E8A7D8}">
+      <dsp:nvSpPr>
+        <dsp:cNvPr id="0" name=""/>
+        <dsp:cNvSpPr/>
+      </dsp:nvSpPr>
+      <dsp:spPr>
+        <a:xfrm>
+          <a:off x="7350244" y="756552"/>
+          <a:ext cx="3006918" cy="1909393"/>
+        </a:xfrm>
+        <a:prstGeom prst="roundRect">
+          <a:avLst>
+            <a:gd name="adj" fmla="val 10000"/>
+          </a:avLst>
+        </a:prstGeom>
+        <a:solidFill>
+          <a:schemeClr val="accent1">
+            <a:hueOff val="0"/>
+            <a:satOff val="0"/>
+            <a:lumOff val="0"/>
+            <a:alphaOff val="0"/>
+          </a:schemeClr>
+        </a:solidFill>
+        <a:ln w="12700" cap="flat" cmpd="sng" algn="ctr">
+          <a:solidFill>
+            <a:schemeClr val="lt1">
+              <a:hueOff val="0"/>
+              <a:satOff val="0"/>
+              <a:lumOff val="0"/>
+              <a:alphaOff val="0"/>
+            </a:schemeClr>
+          </a:solidFill>
+          <a:prstDash val="solid"/>
+          <a:miter lim="800000"/>
+        </a:ln>
+        <a:effectLst/>
+      </dsp:spPr>
+      <dsp:style>
+        <a:lnRef idx="2">
+          <a:scrgbClr r="0" g="0" b="0"/>
+        </a:lnRef>
+        <a:fillRef idx="1">
+          <a:scrgbClr r="0" g="0" b="0"/>
+        </a:fillRef>
+        <a:effectRef idx="0">
+          <a:scrgbClr r="0" g="0" b="0"/>
+        </a:effectRef>
+        <a:fontRef idx="minor">
+          <a:schemeClr val="lt1"/>
+        </a:fontRef>
+      </dsp:style>
+    </dsp:sp>
+    <dsp:sp modelId="{C7220E4E-4EF4-498A-90FB-A280214E27FB}">
+      <dsp:nvSpPr>
+        <dsp:cNvPr id="0" name=""/>
+        <dsp:cNvSpPr/>
+      </dsp:nvSpPr>
+      <dsp:spPr>
+        <a:xfrm>
+          <a:off x="7684346" y="1073949"/>
+          <a:ext cx="3006918" cy="1909393"/>
+        </a:xfrm>
+        <a:prstGeom prst="roundRect">
+          <a:avLst>
+            <a:gd name="adj" fmla="val 10000"/>
+          </a:avLst>
+        </a:prstGeom>
+        <a:solidFill>
+          <a:schemeClr val="lt1">
+            <a:alpha val="90000"/>
+            <a:hueOff val="0"/>
+            <a:satOff val="0"/>
+            <a:lumOff val="0"/>
+            <a:alphaOff val="0"/>
+          </a:schemeClr>
+        </a:solidFill>
+        <a:ln w="12700" cap="flat" cmpd="sng" algn="ctr">
+          <a:solidFill>
+            <a:schemeClr val="accent1">
+              <a:hueOff val="0"/>
+              <a:satOff val="0"/>
+              <a:lumOff val="0"/>
+              <a:alphaOff val="0"/>
+            </a:schemeClr>
+          </a:solidFill>
+          <a:prstDash val="solid"/>
+          <a:miter lim="800000"/>
+        </a:ln>
+        <a:effectLst/>
+      </dsp:spPr>
+      <dsp:style>
+        <a:lnRef idx="2">
+          <a:scrgbClr r="0" g="0" b="0"/>
+        </a:lnRef>
+        <a:fillRef idx="1">
+          <a:scrgbClr r="0" g="0" b="0"/>
+        </a:fillRef>
+        <a:effectRef idx="0">
+          <a:scrgbClr r="0" g="0" b="0"/>
+        </a:effectRef>
+        <a:fontRef idx="minor"/>
+      </dsp:style>
+      <dsp:txBody>
+        <a:bodyPr spcFirstLastPara="0" vert="horz" wrap="square" lIns="144780" tIns="144780" rIns="144780" bIns="144780" numCol="1" spcCol="1270" anchor="ctr" anchorCtr="0">
+          <a:noAutofit/>
+        </a:bodyPr>
+        <a:lstStyle/>
+        <a:p>
+          <a:pPr marL="0" lvl="0" indent="0" algn="ctr" defTabSz="1689100">
+            <a:lnSpc>
+              <a:spcPct val="90000"/>
+            </a:lnSpc>
+            <a:spcBef>
+              <a:spcPct val="0"/>
+            </a:spcBef>
+            <a:spcAft>
+              <a:spcPct val="35000"/>
+            </a:spcAft>
+            <a:buNone/>
+          </a:pPr>
+          <a:r>
+            <a:rPr lang="fr-CA" sz="3800" kern="1200"/>
+            <a:t>2 sites de fraie connus</a:t>
+          </a:r>
+          <a:endParaRPr lang="en-US" sz="3800" kern="1200"/>
+        </a:p>
+      </dsp:txBody>
+      <dsp:txXfrm>
+        <a:off x="7740270" y="1129873"/>
+        <a:ext cx="2895070" cy="1797545"/>
+      </dsp:txXfrm>
+    </dsp:sp>
+  </dsp:spTree>
+</dsp:drawing>
+</file>
+
+<file path=ppt/diagrams/drawing2.xml><?xml version="1.0" encoding="utf-8"?>
 <dsp:drawing xmlns:dgm="http://schemas.openxmlformats.org/drawingml/2006/diagram" xmlns:dsp="http://schemas.microsoft.com/office/drawing/2008/diagram" xmlns:a="http://schemas.openxmlformats.org/drawingml/2006/main">
   <dsp:spTree>
     <dsp:nvGrpSpPr>
@@ -3123,6 +4808,569 @@
 </file>
 
 <file path=ppt/diagrams/layout1.xml><?xml version="1.0" encoding="utf-8"?>
+<dgm:layoutDef xmlns:dgm="http://schemas.openxmlformats.org/drawingml/2006/diagram" xmlns:a="http://schemas.openxmlformats.org/drawingml/2006/main" uniqueId="urn:microsoft.com/office/officeart/2005/8/layout/hierarchy1">
+  <dgm:title val=""/>
+  <dgm:desc val=""/>
+  <dgm:catLst>
+    <dgm:cat type="hierarchy" pri="2000"/>
+  </dgm:catLst>
+  <dgm:sampData>
+    <dgm:dataModel>
+      <dgm:ptLst>
+        <dgm:pt modelId="0" type="doc"/>
+        <dgm:pt modelId="1">
+          <dgm:prSet phldr="1"/>
+        </dgm:pt>
+        <dgm:pt modelId="2">
+          <dgm:prSet phldr="1"/>
+        </dgm:pt>
+        <dgm:pt modelId="21">
+          <dgm:prSet phldr="1"/>
+        </dgm:pt>
+        <dgm:pt modelId="22">
+          <dgm:prSet phldr="1"/>
+        </dgm:pt>
+        <dgm:pt modelId="3">
+          <dgm:prSet phldr="1"/>
+        </dgm:pt>
+        <dgm:pt modelId="31">
+          <dgm:prSet phldr="1"/>
+        </dgm:pt>
+      </dgm:ptLst>
+      <dgm:cxnLst>
+        <dgm:cxn modelId="4" srcId="0" destId="1" srcOrd="0" destOrd="0"/>
+        <dgm:cxn modelId="5" srcId="1" destId="2" srcOrd="0" destOrd="0"/>
+        <dgm:cxn modelId="6" srcId="1" destId="3" srcOrd="1" destOrd="0"/>
+        <dgm:cxn modelId="23" srcId="2" destId="21" srcOrd="0" destOrd="0"/>
+        <dgm:cxn modelId="24" srcId="2" destId="22" srcOrd="1" destOrd="0"/>
+        <dgm:cxn modelId="33" srcId="3" destId="31" srcOrd="0" destOrd="0"/>
+      </dgm:cxnLst>
+      <dgm:bg/>
+      <dgm:whole/>
+    </dgm:dataModel>
+  </dgm:sampData>
+  <dgm:styleData>
+    <dgm:dataModel>
+      <dgm:ptLst>
+        <dgm:pt modelId="0" type="doc"/>
+        <dgm:pt modelId="1"/>
+        <dgm:pt modelId="11"/>
+        <dgm:pt modelId="12"/>
+      </dgm:ptLst>
+      <dgm:cxnLst>
+        <dgm:cxn modelId="2" srcId="0" destId="1" srcOrd="0" destOrd="0"/>
+        <dgm:cxn modelId="13" srcId="1" destId="11" srcOrd="0" destOrd="0"/>
+        <dgm:cxn modelId="14" srcId="1" destId="12" srcOrd="1" destOrd="0"/>
+      </dgm:cxnLst>
+      <dgm:bg/>
+      <dgm:whole/>
+    </dgm:dataModel>
+  </dgm:styleData>
+  <dgm:clrData>
+    <dgm:dataModel>
+      <dgm:ptLst>
+        <dgm:pt modelId="0" type="doc"/>
+        <dgm:pt modelId="1"/>
+        <dgm:pt modelId="2"/>
+        <dgm:pt modelId="21"/>
+        <dgm:pt modelId="211"/>
+        <dgm:pt modelId="3"/>
+        <dgm:pt modelId="31"/>
+        <dgm:pt modelId="311"/>
+      </dgm:ptLst>
+      <dgm:cxnLst>
+        <dgm:cxn modelId="4" srcId="0" destId="1" srcOrd="0" destOrd="0"/>
+        <dgm:cxn modelId="5" srcId="1" destId="2" srcOrd="0" destOrd="0"/>
+        <dgm:cxn modelId="6" srcId="1" destId="3" srcOrd="1" destOrd="0"/>
+        <dgm:cxn modelId="23" srcId="2" destId="21" srcOrd="0" destOrd="0"/>
+        <dgm:cxn modelId="24" srcId="21" destId="211" srcOrd="0" destOrd="0"/>
+        <dgm:cxn modelId="33" srcId="3" destId="31" srcOrd="0" destOrd="0"/>
+        <dgm:cxn modelId="34" srcId="31" destId="311" srcOrd="0" destOrd="0"/>
+      </dgm:cxnLst>
+      <dgm:bg/>
+      <dgm:whole/>
+    </dgm:dataModel>
+  </dgm:clrData>
+  <dgm:layoutNode name="hierChild1">
+    <dgm:varLst>
+      <dgm:chPref val="1"/>
+      <dgm:dir/>
+      <dgm:animOne val="branch"/>
+      <dgm:animLvl val="lvl"/>
+      <dgm:resizeHandles/>
+    </dgm:varLst>
+    <dgm:choose name="Name0">
+      <dgm:if name="Name1" func="var" arg="dir" op="equ" val="norm">
+        <dgm:alg type="hierChild">
+          <dgm:param type="linDir" val="fromL"/>
+        </dgm:alg>
+      </dgm:if>
+      <dgm:else name="Name2">
+        <dgm:alg type="hierChild">
+          <dgm:param type="linDir" val="fromR"/>
+        </dgm:alg>
+      </dgm:else>
+    </dgm:choose>
+    <dgm:shape xmlns:r="http://schemas.openxmlformats.org/officeDocument/2006/relationships" r:blip="">
+      <dgm:adjLst/>
+    </dgm:shape>
+    <dgm:presOf/>
+    <dgm:constrLst>
+      <dgm:constr type="primFontSz" for="des" ptType="node" op="equ" val="65"/>
+      <dgm:constr type="w" for="des" forName="composite" refType="w"/>
+      <dgm:constr type="h" for="des" forName="composite" refType="w" refFor="des" refForName="composite" fact="0.667"/>
+      <dgm:constr type="w" for="des" forName="composite2" refType="w" refFor="des" refForName="composite"/>
+      <dgm:constr type="h" for="des" forName="composite2" refType="h" refFor="des" refForName="composite"/>
+      <dgm:constr type="w" for="des" forName="composite3" refType="w" refFor="des" refForName="composite"/>
+      <dgm:constr type="h" for="des" forName="composite3" refType="h" refFor="des" refForName="composite"/>
+      <dgm:constr type="w" for="des" forName="composite4" refType="w" refFor="des" refForName="composite"/>
+      <dgm:constr type="h" for="des" forName="composite4" refType="h" refFor="des" refForName="composite"/>
+      <dgm:constr type="w" for="des" forName="composite5" refType="w" refFor="des" refForName="composite"/>
+      <dgm:constr type="h" for="des" forName="composite5" refType="h" refFor="des" refForName="composite"/>
+      <dgm:constr type="sibSp" refType="w" refFor="des" refForName="composite" fact="0.1"/>
+      <dgm:constr type="sibSp" for="des" forName="hierChild2" refType="sibSp"/>
+      <dgm:constr type="sibSp" for="des" forName="hierChild3" refType="sibSp"/>
+      <dgm:constr type="sibSp" for="des" forName="hierChild4" refType="sibSp"/>
+      <dgm:constr type="sibSp" for="des" forName="hierChild5" refType="sibSp"/>
+      <dgm:constr type="sibSp" for="des" forName="hierChild6" refType="sibSp"/>
+      <dgm:constr type="sp" for="des" forName="hierRoot1" refType="h" refFor="des" refForName="composite" fact="0.25"/>
+      <dgm:constr type="sp" for="des" forName="hierRoot2" refType="sp" refFor="des" refForName="hierRoot1"/>
+      <dgm:constr type="sp" for="des" forName="hierRoot3" refType="sp" refFor="des" refForName="hierRoot1"/>
+      <dgm:constr type="sp" for="des" forName="hierRoot4" refType="sp" refFor="des" refForName="hierRoot1"/>
+      <dgm:constr type="sp" for="des" forName="hierRoot5" refType="sp" refFor="des" refForName="hierRoot1"/>
+    </dgm:constrLst>
+    <dgm:ruleLst/>
+    <dgm:forEach name="Name3" axis="ch">
+      <dgm:forEach name="Name4" axis="self" ptType="node">
+        <dgm:layoutNode name="hierRoot1">
+          <dgm:alg type="hierRoot"/>
+          <dgm:shape xmlns:r="http://schemas.openxmlformats.org/officeDocument/2006/relationships" r:blip="">
+            <dgm:adjLst/>
+          </dgm:shape>
+          <dgm:presOf/>
+          <dgm:constrLst>
+            <dgm:constr type="bendDist" for="des" ptType="parTrans" refType="sp" fact="0.5"/>
+          </dgm:constrLst>
+          <dgm:ruleLst/>
+          <dgm:layoutNode name="composite">
+            <dgm:alg type="composite"/>
+            <dgm:shape xmlns:r="http://schemas.openxmlformats.org/officeDocument/2006/relationships" r:blip="">
+              <dgm:adjLst/>
+            </dgm:shape>
+            <dgm:presOf/>
+            <dgm:constrLst>
+              <dgm:constr type="w" for="ch" forName="background" refType="w" fact="0.9"/>
+              <dgm:constr type="h" for="ch" forName="background" refType="w" refFor="ch" refForName="background" fact="0.635"/>
+              <dgm:constr type="t" for="ch" forName="background"/>
+              <dgm:constr type="l" for="ch" forName="background"/>
+              <dgm:constr type="w" for="ch" forName="text" refType="w" fact="0.9"/>
+              <dgm:constr type="h" for="ch" forName="text" refType="w" refFor="ch" refForName="text" fact="0.635"/>
+              <dgm:constr type="t" for="ch" forName="text" refType="w" fact="0.095"/>
+              <dgm:constr type="l" for="ch" forName="text" refType="w" fact="0.1"/>
+            </dgm:constrLst>
+            <dgm:ruleLst/>
+            <dgm:layoutNode name="background" styleLbl="node0" moveWith="text">
+              <dgm:alg type="sp"/>
+              <dgm:shape xmlns:r="http://schemas.openxmlformats.org/officeDocument/2006/relationships" type="roundRect" r:blip="">
+                <dgm:adjLst>
+                  <dgm:adj idx="1" val="0.1"/>
+                </dgm:adjLst>
+              </dgm:shape>
+              <dgm:presOf/>
+              <dgm:constrLst/>
+              <dgm:ruleLst/>
+            </dgm:layoutNode>
+            <dgm:layoutNode name="text" styleLbl="fgAcc0">
+              <dgm:varLst>
+                <dgm:chPref val="3"/>
+              </dgm:varLst>
+              <dgm:alg type="tx"/>
+              <dgm:shape xmlns:r="http://schemas.openxmlformats.org/officeDocument/2006/relationships" type="roundRect" r:blip="">
+                <dgm:adjLst>
+                  <dgm:adj idx="1" val="0.1"/>
+                </dgm:adjLst>
+              </dgm:shape>
+              <dgm:presOf axis="self"/>
+              <dgm:constrLst>
+                <dgm:constr type="tMarg" refType="primFontSz" fact="0.3"/>
+                <dgm:constr type="bMarg" refType="primFontSz" fact="0.3"/>
+                <dgm:constr type="lMarg" refType="primFontSz" fact="0.3"/>
+                <dgm:constr type="rMarg" refType="primFontSz" fact="0.3"/>
+              </dgm:constrLst>
+              <dgm:ruleLst>
+                <dgm:rule type="primFontSz" val="5" fact="NaN" max="NaN"/>
+              </dgm:ruleLst>
+            </dgm:layoutNode>
+          </dgm:layoutNode>
+          <dgm:layoutNode name="hierChild2">
+            <dgm:choose name="Name5">
+              <dgm:if name="Name6" func="var" arg="dir" op="equ" val="norm">
+                <dgm:alg type="hierChild">
+                  <dgm:param type="linDir" val="fromL"/>
+                </dgm:alg>
+              </dgm:if>
+              <dgm:else name="Name7">
+                <dgm:alg type="hierChild">
+                  <dgm:param type="linDir" val="fromR"/>
+                </dgm:alg>
+              </dgm:else>
+            </dgm:choose>
+            <dgm:shape xmlns:r="http://schemas.openxmlformats.org/officeDocument/2006/relationships" r:blip="">
+              <dgm:adjLst/>
+            </dgm:shape>
+            <dgm:presOf/>
+            <dgm:constrLst/>
+            <dgm:ruleLst/>
+            <dgm:forEach name="Name8" axis="ch">
+              <dgm:forEach name="Name9" axis="self" ptType="parTrans" cnt="1">
+                <dgm:layoutNode name="Name10">
+                  <dgm:alg type="conn">
+                    <dgm:param type="dim" val="1D"/>
+                    <dgm:param type="endSty" val="noArr"/>
+                    <dgm:param type="connRout" val="bend"/>
+                    <dgm:param type="bendPt" val="end"/>
+                    <dgm:param type="begPts" val="bCtr"/>
+                    <dgm:param type="endPts" val="tCtr"/>
+                    <dgm:param type="srcNode" val="background"/>
+                    <dgm:param type="dstNode" val="background2"/>
+                  </dgm:alg>
+                  <dgm:shape xmlns:r="http://schemas.openxmlformats.org/officeDocument/2006/relationships" type="conn" r:blip="" zOrderOff="-999">
+                    <dgm:adjLst/>
+                  </dgm:shape>
+                  <dgm:presOf axis="self"/>
+                  <dgm:constrLst>
+                    <dgm:constr type="begPad"/>
+                    <dgm:constr type="endPad"/>
+                  </dgm:constrLst>
+                  <dgm:ruleLst/>
+                </dgm:layoutNode>
+              </dgm:forEach>
+              <dgm:forEach name="Name11" axis="self" ptType="node">
+                <dgm:layoutNode name="hierRoot2">
+                  <dgm:alg type="hierRoot"/>
+                  <dgm:shape xmlns:r="http://schemas.openxmlformats.org/officeDocument/2006/relationships" r:blip="">
+                    <dgm:adjLst/>
+                  </dgm:shape>
+                  <dgm:presOf/>
+                  <dgm:constrLst>
+                    <dgm:constr type="bendDist" for="des" ptType="parTrans" refType="sp" fact="0.5"/>
+                  </dgm:constrLst>
+                  <dgm:ruleLst/>
+                  <dgm:layoutNode name="composite2">
+                    <dgm:alg type="composite"/>
+                    <dgm:shape xmlns:r="http://schemas.openxmlformats.org/officeDocument/2006/relationships" r:blip="">
+                      <dgm:adjLst/>
+                    </dgm:shape>
+                    <dgm:presOf/>
+                    <dgm:constrLst>
+                      <dgm:constr type="w" for="ch" forName="background2" refType="w" fact="0.9"/>
+                      <dgm:constr type="h" for="ch" forName="background2" refType="w" refFor="ch" refForName="background2" fact="0.635"/>
+                      <dgm:constr type="t" for="ch" forName="background2"/>
+                      <dgm:constr type="l" for="ch" forName="background2"/>
+                      <dgm:constr type="w" for="ch" forName="text2" refType="w" fact="0.9"/>
+                      <dgm:constr type="h" for="ch" forName="text2" refType="w" refFor="ch" refForName="text2" fact="0.635"/>
+                      <dgm:constr type="t" for="ch" forName="text2" refType="w" fact="0.095"/>
+                      <dgm:constr type="l" for="ch" forName="text2" refType="w" fact="0.1"/>
+                    </dgm:constrLst>
+                    <dgm:ruleLst/>
+                    <dgm:layoutNode name="background2" moveWith="text2">
+                      <dgm:alg type="sp"/>
+                      <dgm:shape xmlns:r="http://schemas.openxmlformats.org/officeDocument/2006/relationships" type="roundRect" r:blip="">
+                        <dgm:adjLst>
+                          <dgm:adj idx="1" val="0.1"/>
+                        </dgm:adjLst>
+                      </dgm:shape>
+                      <dgm:presOf/>
+                      <dgm:constrLst/>
+                      <dgm:ruleLst/>
+                    </dgm:layoutNode>
+                    <dgm:layoutNode name="text2" styleLbl="fgAcc2">
+                      <dgm:varLst>
+                        <dgm:chPref val="3"/>
+                      </dgm:varLst>
+                      <dgm:alg type="tx"/>
+                      <dgm:shape xmlns:r="http://schemas.openxmlformats.org/officeDocument/2006/relationships" type="roundRect" r:blip="">
+                        <dgm:adjLst>
+                          <dgm:adj idx="1" val="0.1"/>
+                        </dgm:adjLst>
+                      </dgm:shape>
+                      <dgm:presOf axis="self"/>
+                      <dgm:constrLst>
+                        <dgm:constr type="tMarg" refType="primFontSz" fact="0.3"/>
+                        <dgm:constr type="bMarg" refType="primFontSz" fact="0.3"/>
+                        <dgm:constr type="lMarg" refType="primFontSz" fact="0.3"/>
+                        <dgm:constr type="rMarg" refType="primFontSz" fact="0.3"/>
+                      </dgm:constrLst>
+                      <dgm:ruleLst>
+                        <dgm:rule type="primFontSz" val="5" fact="NaN" max="NaN"/>
+                      </dgm:ruleLst>
+                    </dgm:layoutNode>
+                  </dgm:layoutNode>
+                  <dgm:layoutNode name="hierChild3">
+                    <dgm:choose name="Name12">
+                      <dgm:if name="Name13" func="var" arg="dir" op="equ" val="norm">
+                        <dgm:alg type="hierChild">
+                          <dgm:param type="linDir" val="fromL"/>
+                        </dgm:alg>
+                      </dgm:if>
+                      <dgm:else name="Name14">
+                        <dgm:alg type="hierChild">
+                          <dgm:param type="linDir" val="fromR"/>
+                        </dgm:alg>
+                      </dgm:else>
+                    </dgm:choose>
+                    <dgm:shape xmlns:r="http://schemas.openxmlformats.org/officeDocument/2006/relationships" r:blip="">
+                      <dgm:adjLst/>
+                    </dgm:shape>
+                    <dgm:presOf/>
+                    <dgm:constrLst/>
+                    <dgm:ruleLst/>
+                    <dgm:forEach name="Name15" axis="ch">
+                      <dgm:forEach name="Name16" axis="self" ptType="parTrans" cnt="1">
+                        <dgm:layoutNode name="Name17">
+                          <dgm:alg type="conn">
+                            <dgm:param type="dim" val="1D"/>
+                            <dgm:param type="endSty" val="noArr"/>
+                            <dgm:param type="connRout" val="bend"/>
+                            <dgm:param type="bendPt" val="end"/>
+                            <dgm:param type="begPts" val="bCtr"/>
+                            <dgm:param type="endPts" val="tCtr"/>
+                            <dgm:param type="srcNode" val="background2"/>
+                            <dgm:param type="dstNode" val="background3"/>
+                          </dgm:alg>
+                          <dgm:shape xmlns:r="http://schemas.openxmlformats.org/officeDocument/2006/relationships" type="conn" r:blip="" zOrderOff="-999">
+                            <dgm:adjLst/>
+                          </dgm:shape>
+                          <dgm:presOf axis="self"/>
+                          <dgm:constrLst>
+                            <dgm:constr type="begPad"/>
+                            <dgm:constr type="endPad"/>
+                          </dgm:constrLst>
+                          <dgm:ruleLst/>
+                        </dgm:layoutNode>
+                      </dgm:forEach>
+                      <dgm:forEach name="Name18" axis="self" ptType="node">
+                        <dgm:layoutNode name="hierRoot3">
+                          <dgm:alg type="hierRoot"/>
+                          <dgm:shape xmlns:r="http://schemas.openxmlformats.org/officeDocument/2006/relationships" r:blip="">
+                            <dgm:adjLst/>
+                          </dgm:shape>
+                          <dgm:presOf/>
+                          <dgm:constrLst>
+                            <dgm:constr type="bendDist" for="des" ptType="parTrans" refType="sp" fact="0.5"/>
+                          </dgm:constrLst>
+                          <dgm:ruleLst/>
+                          <dgm:layoutNode name="composite3">
+                            <dgm:alg type="composite"/>
+                            <dgm:shape xmlns:r="http://schemas.openxmlformats.org/officeDocument/2006/relationships" r:blip="">
+                              <dgm:adjLst/>
+                            </dgm:shape>
+                            <dgm:presOf/>
+                            <dgm:constrLst>
+                              <dgm:constr type="w" for="ch" forName="background3" refType="w" fact="0.9"/>
+                              <dgm:constr type="h" for="ch" forName="background3" refType="w" refFor="ch" refForName="background3" fact="0.635"/>
+                              <dgm:constr type="t" for="ch" forName="background3"/>
+                              <dgm:constr type="l" for="ch" forName="background3"/>
+                              <dgm:constr type="w" for="ch" forName="text3" refType="w" fact="0.9"/>
+                              <dgm:constr type="h" for="ch" forName="text3" refType="w" refFor="ch" refForName="text3" fact="0.635"/>
+                              <dgm:constr type="t" for="ch" forName="text3" refType="w" fact="0.095"/>
+                              <dgm:constr type="l" for="ch" forName="text3" refType="w" fact="0.1"/>
+                            </dgm:constrLst>
+                            <dgm:ruleLst/>
+                            <dgm:layoutNode name="background3" moveWith="text3">
+                              <dgm:alg type="sp"/>
+                              <dgm:shape xmlns:r="http://schemas.openxmlformats.org/officeDocument/2006/relationships" type="roundRect" r:blip="">
+                                <dgm:adjLst>
+                                  <dgm:adj idx="1" val="0.1"/>
+                                </dgm:adjLst>
+                              </dgm:shape>
+                              <dgm:presOf/>
+                              <dgm:constrLst/>
+                              <dgm:ruleLst/>
+                            </dgm:layoutNode>
+                            <dgm:layoutNode name="text3" styleLbl="fgAcc3">
+                              <dgm:varLst>
+                                <dgm:chPref val="3"/>
+                              </dgm:varLst>
+                              <dgm:alg type="tx"/>
+                              <dgm:shape xmlns:r="http://schemas.openxmlformats.org/officeDocument/2006/relationships" type="roundRect" r:blip="">
+                                <dgm:adjLst>
+                                  <dgm:adj idx="1" val="0.1"/>
+                                </dgm:adjLst>
+                              </dgm:shape>
+                              <dgm:presOf axis="self"/>
+                              <dgm:constrLst>
+                                <dgm:constr type="tMarg" refType="primFontSz" fact="0.3"/>
+                                <dgm:constr type="bMarg" refType="primFontSz" fact="0.3"/>
+                                <dgm:constr type="lMarg" refType="primFontSz" fact="0.3"/>
+                                <dgm:constr type="rMarg" refType="primFontSz" fact="0.3"/>
+                              </dgm:constrLst>
+                              <dgm:ruleLst>
+                                <dgm:rule type="primFontSz" val="5" fact="NaN" max="NaN"/>
+                              </dgm:ruleLst>
+                            </dgm:layoutNode>
+                          </dgm:layoutNode>
+                          <dgm:layoutNode name="hierChild4">
+                            <dgm:choose name="Name19">
+                              <dgm:if name="Name20" func="var" arg="dir" op="equ" val="norm">
+                                <dgm:alg type="hierChild">
+                                  <dgm:param type="linDir" val="fromL"/>
+                                </dgm:alg>
+                              </dgm:if>
+                              <dgm:else name="Name21">
+                                <dgm:alg type="hierChild">
+                                  <dgm:param type="linDir" val="fromR"/>
+                                </dgm:alg>
+                              </dgm:else>
+                            </dgm:choose>
+                            <dgm:shape xmlns:r="http://schemas.openxmlformats.org/officeDocument/2006/relationships" r:blip="">
+                              <dgm:adjLst/>
+                            </dgm:shape>
+                            <dgm:presOf/>
+                            <dgm:constrLst/>
+                            <dgm:ruleLst/>
+                            <dgm:forEach name="repeat" axis="ch">
+                              <dgm:forEach name="Name22" axis="self" ptType="parTrans" cnt="1">
+                                <dgm:layoutNode name="Name23">
+                                  <dgm:choose name="Name24">
+                                    <dgm:if name="Name25" axis="self" func="depth" op="lte" val="4">
+                                      <dgm:alg type="conn">
+                                        <dgm:param type="dim" val="1D"/>
+                                        <dgm:param type="endSty" val="noArr"/>
+                                        <dgm:param type="connRout" val="bend"/>
+                                        <dgm:param type="bendPt" val="end"/>
+                                        <dgm:param type="begPts" val="bCtr"/>
+                                        <dgm:param type="endPts" val="tCtr"/>
+                                        <dgm:param type="srcNode" val="background3"/>
+                                        <dgm:param type="dstNode" val="background4"/>
+                                      </dgm:alg>
+                                    </dgm:if>
+                                    <dgm:else name="Name26">
+                                      <dgm:alg type="conn">
+                                        <dgm:param type="dim" val="1D"/>
+                                        <dgm:param type="endSty" val="noArr"/>
+                                        <dgm:param type="connRout" val="bend"/>
+                                        <dgm:param type="bendPt" val="end"/>
+                                        <dgm:param type="begPts" val="bCtr"/>
+                                        <dgm:param type="endPts" val="tCtr"/>
+                                        <dgm:param type="srcNode" val="background4"/>
+                                        <dgm:param type="dstNode" val="background4"/>
+                                      </dgm:alg>
+                                    </dgm:else>
+                                  </dgm:choose>
+                                  <dgm:shape xmlns:r="http://schemas.openxmlformats.org/officeDocument/2006/relationships" type="conn" r:blip="" zOrderOff="-999">
+                                    <dgm:adjLst/>
+                                  </dgm:shape>
+                                  <dgm:presOf axis="self"/>
+                                  <dgm:constrLst>
+                                    <dgm:constr type="begPad"/>
+                                    <dgm:constr type="endPad"/>
+                                  </dgm:constrLst>
+                                  <dgm:ruleLst/>
+                                </dgm:layoutNode>
+                              </dgm:forEach>
+                              <dgm:forEach name="Name27" axis="self" ptType="node">
+                                <dgm:layoutNode name="hierRoot4">
+                                  <dgm:alg type="hierRoot"/>
+                                  <dgm:shape xmlns:r="http://schemas.openxmlformats.org/officeDocument/2006/relationships" r:blip="">
+                                    <dgm:adjLst/>
+                                  </dgm:shape>
+                                  <dgm:presOf/>
+                                  <dgm:constrLst>
+                                    <dgm:constr type="bendDist" for="des" ptType="parTrans" refType="sp" fact="0.5"/>
+                                  </dgm:constrLst>
+                                  <dgm:ruleLst/>
+                                  <dgm:layoutNode name="composite4">
+                                    <dgm:alg type="composite"/>
+                                    <dgm:shape xmlns:r="http://schemas.openxmlformats.org/officeDocument/2006/relationships" r:blip="">
+                                      <dgm:adjLst/>
+                                    </dgm:shape>
+                                    <dgm:presOf/>
+                                    <dgm:constrLst>
+                                      <dgm:constr type="w" for="ch" forName="background4" refType="w" fact="0.9"/>
+                                      <dgm:constr type="h" for="ch" forName="background4" refType="w" refFor="ch" refForName="background4" fact="0.635"/>
+                                      <dgm:constr type="t" for="ch" forName="background4"/>
+                                      <dgm:constr type="l" for="ch" forName="background4"/>
+                                      <dgm:constr type="w" for="ch" forName="text4" refType="w" fact="0.9"/>
+                                      <dgm:constr type="h" for="ch" forName="text4" refType="w" refFor="ch" refForName="text4" fact="0.635"/>
+                                      <dgm:constr type="t" for="ch" forName="text4" refType="w" fact="0.095"/>
+                                      <dgm:constr type="l" for="ch" forName="text4" refType="w" fact="0.1"/>
+                                    </dgm:constrLst>
+                                    <dgm:ruleLst/>
+                                    <dgm:layoutNode name="background4" moveWith="text4">
+                                      <dgm:alg type="sp"/>
+                                      <dgm:shape xmlns:r="http://schemas.openxmlformats.org/officeDocument/2006/relationships" type="roundRect" r:blip="">
+                                        <dgm:adjLst>
+                                          <dgm:adj idx="1" val="0.1"/>
+                                        </dgm:adjLst>
+                                      </dgm:shape>
+                                      <dgm:presOf/>
+                                      <dgm:constrLst/>
+                                      <dgm:ruleLst/>
+                                    </dgm:layoutNode>
+                                    <dgm:layoutNode name="text4" styleLbl="fgAcc4">
+                                      <dgm:varLst>
+                                        <dgm:chPref val="3"/>
+                                      </dgm:varLst>
+                                      <dgm:alg type="tx"/>
+                                      <dgm:shape xmlns:r="http://schemas.openxmlformats.org/officeDocument/2006/relationships" type="roundRect" r:blip="">
+                                        <dgm:adjLst>
+                                          <dgm:adj idx="1" val="0.1"/>
+                                        </dgm:adjLst>
+                                      </dgm:shape>
+                                      <dgm:presOf axis="self"/>
+                                      <dgm:constrLst>
+                                        <dgm:constr type="tMarg" refType="primFontSz" fact="0.3"/>
+                                        <dgm:constr type="bMarg" refType="primFontSz" fact="0.3"/>
+                                        <dgm:constr type="lMarg" refType="primFontSz" fact="0.3"/>
+                                        <dgm:constr type="rMarg" refType="primFontSz" fact="0.3"/>
+                                      </dgm:constrLst>
+                                      <dgm:ruleLst>
+                                        <dgm:rule type="primFontSz" val="5" fact="NaN" max="NaN"/>
+                                      </dgm:ruleLst>
+                                    </dgm:layoutNode>
+                                  </dgm:layoutNode>
+                                  <dgm:layoutNode name="hierChild5">
+                                    <dgm:choose name="Name28">
+                                      <dgm:if name="Name29" func="var" arg="dir" op="equ" val="norm">
+                                        <dgm:alg type="hierChild">
+                                          <dgm:param type="linDir" val="fromL"/>
+                                        </dgm:alg>
+                                      </dgm:if>
+                                      <dgm:else name="Name30">
+                                        <dgm:alg type="hierChild">
+                                          <dgm:param type="linDir" val="fromR"/>
+                                        </dgm:alg>
+                                      </dgm:else>
+                                    </dgm:choose>
+                                    <dgm:shape xmlns:r="http://schemas.openxmlformats.org/officeDocument/2006/relationships" r:blip="">
+                                      <dgm:adjLst/>
+                                    </dgm:shape>
+                                    <dgm:presOf/>
+                                    <dgm:constrLst/>
+                                    <dgm:ruleLst/>
+                                    <dgm:forEach name="Name31" ref="repeat"/>
+                                  </dgm:layoutNode>
+                                </dgm:layoutNode>
+                              </dgm:forEach>
+                            </dgm:forEach>
+                          </dgm:layoutNode>
+                        </dgm:layoutNode>
+                      </dgm:forEach>
+                    </dgm:forEach>
+                  </dgm:layoutNode>
+                </dgm:layoutNode>
+              </dgm:forEach>
+            </dgm:forEach>
+          </dgm:layoutNode>
+        </dgm:layoutNode>
+      </dgm:forEach>
+    </dgm:forEach>
+  </dgm:layoutNode>
+</dgm:layoutDef>
+</file>
+
+<file path=ppt/diagrams/layout2.xml><?xml version="1.0" encoding="utf-8"?>
 <dgm:layoutDef xmlns:dgm="http://schemas.openxmlformats.org/drawingml/2006/diagram" xmlns:a="http://schemas.openxmlformats.org/drawingml/2006/main" uniqueId="urn:microsoft.com/office/officeart/2005/8/layout/vProcess5">
   <dgm:title val=""/>
   <dgm:desc val=""/>
@@ -5382,6 +7630,1040 @@
 </dgm:styleDef>
 </file>
 
+<file path=ppt/diagrams/quickStyle2.xml><?xml version="1.0" encoding="utf-8"?>
+<dgm:styleDef xmlns:dgm="http://schemas.openxmlformats.org/drawingml/2006/diagram" xmlns:a="http://schemas.openxmlformats.org/drawingml/2006/main" uniqueId="urn:microsoft.com/office/officeart/2005/8/quickstyle/simple1">
+  <dgm:title val=""/>
+  <dgm:desc val=""/>
+  <dgm:catLst>
+    <dgm:cat type="simple" pri="10100"/>
+  </dgm:catLst>
+  <dgm:scene3d>
+    <a:camera prst="orthographicFront"/>
+    <a:lightRig rig="threePt" dir="t"/>
+  </dgm:scene3d>
+  <dgm:styleLbl name="node0">
+    <dgm:scene3d>
+      <a:camera prst="orthographicFront"/>
+      <a:lightRig rig="threePt" dir="t"/>
+    </dgm:scene3d>
+    <dgm:sp3d/>
+    <dgm:txPr/>
+    <dgm:style>
+      <a:lnRef idx="2">
+        <a:scrgbClr r="0" g="0" b="0"/>
+      </a:lnRef>
+      <a:fillRef idx="1">
+        <a:scrgbClr r="0" g="0" b="0"/>
+      </a:fillRef>
+      <a:effectRef idx="0">
+        <a:scrgbClr r="0" g="0" b="0"/>
+      </a:effectRef>
+      <a:fontRef idx="minor">
+        <a:schemeClr val="lt1"/>
+      </a:fontRef>
+    </dgm:style>
+  </dgm:styleLbl>
+  <dgm:styleLbl name="lnNode1">
+    <dgm:scene3d>
+      <a:camera prst="orthographicFront"/>
+      <a:lightRig rig="threePt" dir="t"/>
+    </dgm:scene3d>
+    <dgm:sp3d/>
+    <dgm:txPr/>
+    <dgm:style>
+      <a:lnRef idx="2">
+        <a:scrgbClr r="0" g="0" b="0"/>
+      </a:lnRef>
+      <a:fillRef idx="1">
+        <a:scrgbClr r="0" g="0" b="0"/>
+      </a:fillRef>
+      <a:effectRef idx="0">
+        <a:scrgbClr r="0" g="0" b="0"/>
+      </a:effectRef>
+      <a:fontRef idx="minor">
+        <a:schemeClr val="lt1"/>
+      </a:fontRef>
+    </dgm:style>
+  </dgm:styleLbl>
+  <dgm:styleLbl name="vennNode1">
+    <dgm:scene3d>
+      <a:camera prst="orthographicFront"/>
+      <a:lightRig rig="threePt" dir="t"/>
+    </dgm:scene3d>
+    <dgm:sp3d/>
+    <dgm:txPr/>
+    <dgm:style>
+      <a:lnRef idx="2">
+        <a:scrgbClr r="0" g="0" b="0"/>
+      </a:lnRef>
+      <a:fillRef idx="1">
+        <a:scrgbClr r="0" g="0" b="0"/>
+      </a:fillRef>
+      <a:effectRef idx="0">
+        <a:scrgbClr r="0" g="0" b="0"/>
+      </a:effectRef>
+      <a:fontRef idx="minor">
+        <a:schemeClr val="tx1"/>
+      </a:fontRef>
+    </dgm:style>
+  </dgm:styleLbl>
+  <dgm:styleLbl name="alignNode1">
+    <dgm:scene3d>
+      <a:camera prst="orthographicFront"/>
+      <a:lightRig rig="threePt" dir="t"/>
+    </dgm:scene3d>
+    <dgm:sp3d/>
+    <dgm:txPr/>
+    <dgm:style>
+      <a:lnRef idx="2">
+        <a:scrgbClr r="0" g="0" b="0"/>
+      </a:lnRef>
+      <a:fillRef idx="1">
+        <a:scrgbClr r="0" g="0" b="0"/>
+      </a:fillRef>
+      <a:effectRef idx="0">
+        <a:scrgbClr r="0" g="0" b="0"/>
+      </a:effectRef>
+      <a:fontRef idx="minor">
+        <a:schemeClr val="lt1"/>
+      </a:fontRef>
+    </dgm:style>
+  </dgm:styleLbl>
+  <dgm:styleLbl name="node1">
+    <dgm:scene3d>
+      <a:camera prst="orthographicFront"/>
+      <a:lightRig rig="threePt" dir="t"/>
+    </dgm:scene3d>
+    <dgm:sp3d/>
+    <dgm:txPr/>
+    <dgm:style>
+      <a:lnRef idx="2">
+        <a:scrgbClr r="0" g="0" b="0"/>
+      </a:lnRef>
+      <a:fillRef idx="1">
+        <a:scrgbClr r="0" g="0" b="0"/>
+      </a:fillRef>
+      <a:effectRef idx="0">
+        <a:scrgbClr r="0" g="0" b="0"/>
+      </a:effectRef>
+      <a:fontRef idx="minor">
+        <a:schemeClr val="lt1"/>
+      </a:fontRef>
+    </dgm:style>
+  </dgm:styleLbl>
+  <dgm:styleLbl name="node2">
+    <dgm:scene3d>
+      <a:camera prst="orthographicFront"/>
+      <a:lightRig rig="threePt" dir="t"/>
+    </dgm:scene3d>
+    <dgm:sp3d/>
+    <dgm:txPr/>
+    <dgm:style>
+      <a:lnRef idx="2">
+        <a:scrgbClr r="0" g="0" b="0"/>
+      </a:lnRef>
+      <a:fillRef idx="1">
+        <a:scrgbClr r="0" g="0" b="0"/>
+      </a:fillRef>
+      <a:effectRef idx="0">
+        <a:scrgbClr r="0" g="0" b="0"/>
+      </a:effectRef>
+      <a:fontRef idx="minor">
+        <a:schemeClr val="lt1"/>
+      </a:fontRef>
+    </dgm:style>
+  </dgm:styleLbl>
+  <dgm:styleLbl name="node3">
+    <dgm:scene3d>
+      <a:camera prst="orthographicFront"/>
+      <a:lightRig rig="threePt" dir="t"/>
+    </dgm:scene3d>
+    <dgm:sp3d/>
+    <dgm:txPr/>
+    <dgm:style>
+      <a:lnRef idx="2">
+        <a:scrgbClr r="0" g="0" b="0"/>
+      </a:lnRef>
+      <a:fillRef idx="1">
+        <a:scrgbClr r="0" g="0" b="0"/>
+      </a:fillRef>
+      <a:effectRef idx="0">
+        <a:scrgbClr r="0" g="0" b="0"/>
+      </a:effectRef>
+      <a:fontRef idx="minor">
+        <a:schemeClr val="lt1"/>
+      </a:fontRef>
+    </dgm:style>
+  </dgm:styleLbl>
+  <dgm:styleLbl name="node4">
+    <dgm:scene3d>
+      <a:camera prst="orthographicFront"/>
+      <a:lightRig rig="threePt" dir="t"/>
+    </dgm:scene3d>
+    <dgm:sp3d/>
+    <dgm:txPr/>
+    <dgm:style>
+      <a:lnRef idx="2">
+        <a:scrgbClr r="0" g="0" b="0"/>
+      </a:lnRef>
+      <a:fillRef idx="1">
+        <a:scrgbClr r="0" g="0" b="0"/>
+      </a:fillRef>
+      <a:effectRef idx="0">
+        <a:scrgbClr r="0" g="0" b="0"/>
+      </a:effectRef>
+      <a:fontRef idx="minor">
+        <a:schemeClr val="lt1"/>
+      </a:fontRef>
+    </dgm:style>
+  </dgm:styleLbl>
+  <dgm:styleLbl name="fgImgPlace1">
+    <dgm:scene3d>
+      <a:camera prst="orthographicFront"/>
+      <a:lightRig rig="threePt" dir="t"/>
+    </dgm:scene3d>
+    <dgm:sp3d/>
+    <dgm:txPr/>
+    <dgm:style>
+      <a:lnRef idx="2">
+        <a:scrgbClr r="0" g="0" b="0"/>
+      </a:lnRef>
+      <a:fillRef idx="1">
+        <a:scrgbClr r="0" g="0" b="0"/>
+      </a:fillRef>
+      <a:effectRef idx="0">
+        <a:scrgbClr r="0" g="0" b="0"/>
+      </a:effectRef>
+      <a:fontRef idx="minor"/>
+    </dgm:style>
+  </dgm:styleLbl>
+  <dgm:styleLbl name="alignImgPlace1">
+    <dgm:scene3d>
+      <a:camera prst="orthographicFront"/>
+      <a:lightRig rig="threePt" dir="t"/>
+    </dgm:scene3d>
+    <dgm:sp3d/>
+    <dgm:txPr/>
+    <dgm:style>
+      <a:lnRef idx="2">
+        <a:scrgbClr r="0" g="0" b="0"/>
+      </a:lnRef>
+      <a:fillRef idx="1">
+        <a:scrgbClr r="0" g="0" b="0"/>
+      </a:fillRef>
+      <a:effectRef idx="0">
+        <a:scrgbClr r="0" g="0" b="0"/>
+      </a:effectRef>
+      <a:fontRef idx="minor"/>
+    </dgm:style>
+  </dgm:styleLbl>
+  <dgm:styleLbl name="bgImgPlace1">
+    <dgm:scene3d>
+      <a:camera prst="orthographicFront"/>
+      <a:lightRig rig="threePt" dir="t"/>
+    </dgm:scene3d>
+    <dgm:sp3d/>
+    <dgm:txPr/>
+    <dgm:style>
+      <a:lnRef idx="2">
+        <a:scrgbClr r="0" g="0" b="0"/>
+      </a:lnRef>
+      <a:fillRef idx="1">
+        <a:scrgbClr r="0" g="0" b="0"/>
+      </a:fillRef>
+      <a:effectRef idx="0">
+        <a:scrgbClr r="0" g="0" b="0"/>
+      </a:effectRef>
+      <a:fontRef idx="minor"/>
+    </dgm:style>
+  </dgm:styleLbl>
+  <dgm:styleLbl name="sibTrans2D1">
+    <dgm:scene3d>
+      <a:camera prst="orthographicFront"/>
+      <a:lightRig rig="threePt" dir="t"/>
+    </dgm:scene3d>
+    <dgm:sp3d/>
+    <dgm:txPr/>
+    <dgm:style>
+      <a:lnRef idx="0">
+        <a:scrgbClr r="0" g="0" b="0"/>
+      </a:lnRef>
+      <a:fillRef idx="1">
+        <a:scrgbClr r="0" g="0" b="0"/>
+      </a:fillRef>
+      <a:effectRef idx="0">
+        <a:scrgbClr r="0" g="0" b="0"/>
+      </a:effectRef>
+      <a:fontRef idx="minor">
+        <a:schemeClr val="lt1"/>
+      </a:fontRef>
+    </dgm:style>
+  </dgm:styleLbl>
+  <dgm:styleLbl name="fgSibTrans2D1">
+    <dgm:scene3d>
+      <a:camera prst="orthographicFront"/>
+      <a:lightRig rig="threePt" dir="t"/>
+    </dgm:scene3d>
+    <dgm:sp3d/>
+    <dgm:txPr/>
+    <dgm:style>
+      <a:lnRef idx="0">
+        <a:scrgbClr r="0" g="0" b="0"/>
+      </a:lnRef>
+      <a:fillRef idx="1">
+        <a:scrgbClr r="0" g="0" b="0"/>
+      </a:fillRef>
+      <a:effectRef idx="0">
+        <a:scrgbClr r="0" g="0" b="0"/>
+      </a:effectRef>
+      <a:fontRef idx="minor">
+        <a:schemeClr val="lt1"/>
+      </a:fontRef>
+    </dgm:style>
+  </dgm:styleLbl>
+  <dgm:styleLbl name="bgSibTrans2D1">
+    <dgm:scene3d>
+      <a:camera prst="orthographicFront"/>
+      <a:lightRig rig="threePt" dir="t"/>
+    </dgm:scene3d>
+    <dgm:sp3d/>
+    <dgm:txPr/>
+    <dgm:style>
+      <a:lnRef idx="0">
+        <a:scrgbClr r="0" g="0" b="0"/>
+      </a:lnRef>
+      <a:fillRef idx="1">
+        <a:scrgbClr r="0" g="0" b="0"/>
+      </a:fillRef>
+      <a:effectRef idx="0">
+        <a:scrgbClr r="0" g="0" b="0"/>
+      </a:effectRef>
+      <a:fontRef idx="minor">
+        <a:schemeClr val="lt1"/>
+      </a:fontRef>
+    </dgm:style>
+  </dgm:styleLbl>
+  <dgm:styleLbl name="sibTrans1D1">
+    <dgm:scene3d>
+      <a:camera prst="orthographicFront"/>
+      <a:lightRig rig="threePt" dir="t"/>
+    </dgm:scene3d>
+    <dgm:sp3d/>
+    <dgm:txPr/>
+    <dgm:style>
+      <a:lnRef idx="1">
+        <a:scrgbClr r="0" g="0" b="0"/>
+      </a:lnRef>
+      <a:fillRef idx="0">
+        <a:scrgbClr r="0" g="0" b="0"/>
+      </a:fillRef>
+      <a:effectRef idx="0">
+        <a:scrgbClr r="0" g="0" b="0"/>
+      </a:effectRef>
+      <a:fontRef idx="minor"/>
+    </dgm:style>
+  </dgm:styleLbl>
+  <dgm:styleLbl name="callout">
+    <dgm:scene3d>
+      <a:camera prst="orthographicFront"/>
+      <a:lightRig rig="threePt" dir="t"/>
+    </dgm:scene3d>
+    <dgm:sp3d/>
+    <dgm:txPr/>
+    <dgm:style>
+      <a:lnRef idx="2">
+        <a:scrgbClr r="0" g="0" b="0"/>
+      </a:lnRef>
+      <a:fillRef idx="1">
+        <a:scrgbClr r="0" g="0" b="0"/>
+      </a:fillRef>
+      <a:effectRef idx="0">
+        <a:scrgbClr r="0" g="0" b="0"/>
+      </a:effectRef>
+      <a:fontRef idx="minor"/>
+    </dgm:style>
+  </dgm:styleLbl>
+  <dgm:styleLbl name="asst0">
+    <dgm:scene3d>
+      <a:camera prst="orthographicFront"/>
+      <a:lightRig rig="threePt" dir="t"/>
+    </dgm:scene3d>
+    <dgm:sp3d/>
+    <dgm:txPr/>
+    <dgm:style>
+      <a:lnRef idx="2">
+        <a:scrgbClr r="0" g="0" b="0"/>
+      </a:lnRef>
+      <a:fillRef idx="1">
+        <a:scrgbClr r="0" g="0" b="0"/>
+      </a:fillRef>
+      <a:effectRef idx="0">
+        <a:scrgbClr r="0" g="0" b="0"/>
+      </a:effectRef>
+      <a:fontRef idx="minor">
+        <a:schemeClr val="lt1"/>
+      </a:fontRef>
+    </dgm:style>
+  </dgm:styleLbl>
+  <dgm:styleLbl name="asst1">
+    <dgm:scene3d>
+      <a:camera prst="orthographicFront"/>
+      <a:lightRig rig="threePt" dir="t"/>
+    </dgm:scene3d>
+    <dgm:sp3d/>
+    <dgm:txPr/>
+    <dgm:style>
+      <a:lnRef idx="2">
+        <a:scrgbClr r="0" g="0" b="0"/>
+      </a:lnRef>
+      <a:fillRef idx="1">
+        <a:scrgbClr r="0" g="0" b="0"/>
+      </a:fillRef>
+      <a:effectRef idx="0">
+        <a:scrgbClr r="0" g="0" b="0"/>
+      </a:effectRef>
+      <a:fontRef idx="minor">
+        <a:schemeClr val="lt1"/>
+      </a:fontRef>
+    </dgm:style>
+  </dgm:styleLbl>
+  <dgm:styleLbl name="asst2">
+    <dgm:scene3d>
+      <a:camera prst="orthographicFront"/>
+      <a:lightRig rig="threePt" dir="t"/>
+    </dgm:scene3d>
+    <dgm:sp3d/>
+    <dgm:txPr/>
+    <dgm:style>
+      <a:lnRef idx="2">
+        <a:scrgbClr r="0" g="0" b="0"/>
+      </a:lnRef>
+      <a:fillRef idx="1">
+        <a:scrgbClr r="0" g="0" b="0"/>
+      </a:fillRef>
+      <a:effectRef idx="0">
+        <a:scrgbClr r="0" g="0" b="0"/>
+      </a:effectRef>
+      <a:fontRef idx="minor">
+        <a:schemeClr val="lt1"/>
+      </a:fontRef>
+    </dgm:style>
+  </dgm:styleLbl>
+  <dgm:styleLbl name="asst3">
+    <dgm:scene3d>
+      <a:camera prst="orthographicFront"/>
+      <a:lightRig rig="threePt" dir="t"/>
+    </dgm:scene3d>
+    <dgm:sp3d/>
+    <dgm:txPr/>
+    <dgm:style>
+      <a:lnRef idx="2">
+        <a:scrgbClr r="0" g="0" b="0"/>
+      </a:lnRef>
+      <a:fillRef idx="1">
+        <a:scrgbClr r="0" g="0" b="0"/>
+      </a:fillRef>
+      <a:effectRef idx="0">
+        <a:scrgbClr r="0" g="0" b="0"/>
+      </a:effectRef>
+      <a:fontRef idx="minor">
+        <a:schemeClr val="lt1"/>
+      </a:fontRef>
+    </dgm:style>
+  </dgm:styleLbl>
+  <dgm:styleLbl name="asst4">
+    <dgm:scene3d>
+      <a:camera prst="orthographicFront"/>
+      <a:lightRig rig="threePt" dir="t"/>
+    </dgm:scene3d>
+    <dgm:sp3d/>
+    <dgm:txPr/>
+    <dgm:style>
+      <a:lnRef idx="2">
+        <a:scrgbClr r="0" g="0" b="0"/>
+      </a:lnRef>
+      <a:fillRef idx="1">
+        <a:scrgbClr r="0" g="0" b="0"/>
+      </a:fillRef>
+      <a:effectRef idx="0">
+        <a:scrgbClr r="0" g="0" b="0"/>
+      </a:effectRef>
+      <a:fontRef idx="minor">
+        <a:schemeClr val="lt1"/>
+      </a:fontRef>
+    </dgm:style>
+  </dgm:styleLbl>
+  <dgm:styleLbl name="parChTrans2D1">
+    <dgm:scene3d>
+      <a:camera prst="orthographicFront"/>
+      <a:lightRig rig="threePt" dir="t"/>
+    </dgm:scene3d>
+    <dgm:sp3d/>
+    <dgm:txPr/>
+    <dgm:style>
+      <a:lnRef idx="2">
+        <a:scrgbClr r="0" g="0" b="0"/>
+      </a:lnRef>
+      <a:fillRef idx="1">
+        <a:scrgbClr r="0" g="0" b="0"/>
+      </a:fillRef>
+      <a:effectRef idx="0">
+        <a:scrgbClr r="0" g="0" b="0"/>
+      </a:effectRef>
+      <a:fontRef idx="minor">
+        <a:schemeClr val="lt1"/>
+      </a:fontRef>
+    </dgm:style>
+  </dgm:styleLbl>
+  <dgm:styleLbl name="parChTrans2D2">
+    <dgm:scene3d>
+      <a:camera prst="orthographicFront"/>
+      <a:lightRig rig="threePt" dir="t"/>
+    </dgm:scene3d>
+    <dgm:sp3d/>
+    <dgm:txPr/>
+    <dgm:style>
+      <a:lnRef idx="2">
+        <a:scrgbClr r="0" g="0" b="0"/>
+      </a:lnRef>
+      <a:fillRef idx="1">
+        <a:scrgbClr r="0" g="0" b="0"/>
+      </a:fillRef>
+      <a:effectRef idx="0">
+        <a:scrgbClr r="0" g="0" b="0"/>
+      </a:effectRef>
+      <a:fontRef idx="minor">
+        <a:schemeClr val="lt1"/>
+      </a:fontRef>
+    </dgm:style>
+  </dgm:styleLbl>
+  <dgm:styleLbl name="parChTrans2D3">
+    <dgm:scene3d>
+      <a:camera prst="orthographicFront"/>
+      <a:lightRig rig="threePt" dir="t"/>
+    </dgm:scene3d>
+    <dgm:sp3d/>
+    <dgm:txPr/>
+    <dgm:style>
+      <a:lnRef idx="2">
+        <a:scrgbClr r="0" g="0" b="0"/>
+      </a:lnRef>
+      <a:fillRef idx="1">
+        <a:scrgbClr r="0" g="0" b="0"/>
+      </a:fillRef>
+      <a:effectRef idx="0">
+        <a:scrgbClr r="0" g="0" b="0"/>
+      </a:effectRef>
+      <a:fontRef idx="minor">
+        <a:schemeClr val="lt1"/>
+      </a:fontRef>
+    </dgm:style>
+  </dgm:styleLbl>
+  <dgm:styleLbl name="parChTrans2D4">
+    <dgm:scene3d>
+      <a:camera prst="orthographicFront"/>
+      <a:lightRig rig="threePt" dir="t"/>
+    </dgm:scene3d>
+    <dgm:sp3d/>
+    <dgm:txPr/>
+    <dgm:style>
+      <a:lnRef idx="2">
+        <a:scrgbClr r="0" g="0" b="0"/>
+      </a:lnRef>
+      <a:fillRef idx="1">
+        <a:scrgbClr r="0" g="0" b="0"/>
+      </a:fillRef>
+      <a:effectRef idx="0">
+        <a:scrgbClr r="0" g="0" b="0"/>
+      </a:effectRef>
+      <a:fontRef idx="minor">
+        <a:schemeClr val="lt1"/>
+      </a:fontRef>
+    </dgm:style>
+  </dgm:styleLbl>
+  <dgm:styleLbl name="parChTrans1D1">
+    <dgm:scene3d>
+      <a:camera prst="orthographicFront"/>
+      <a:lightRig rig="threePt" dir="t"/>
+    </dgm:scene3d>
+    <dgm:sp3d/>
+    <dgm:txPr/>
+    <dgm:style>
+      <a:lnRef idx="2">
+        <a:scrgbClr r="0" g="0" b="0"/>
+      </a:lnRef>
+      <a:fillRef idx="0">
+        <a:scrgbClr r="0" g="0" b="0"/>
+      </a:fillRef>
+      <a:effectRef idx="0">
+        <a:scrgbClr r="0" g="0" b="0"/>
+      </a:effectRef>
+      <a:fontRef idx="minor"/>
+    </dgm:style>
+  </dgm:styleLbl>
+  <dgm:styleLbl name="parChTrans1D2">
+    <dgm:scene3d>
+      <a:camera prst="orthographicFront"/>
+      <a:lightRig rig="threePt" dir="t"/>
+    </dgm:scene3d>
+    <dgm:sp3d/>
+    <dgm:txPr/>
+    <dgm:style>
+      <a:lnRef idx="2">
+        <a:scrgbClr r="0" g="0" b="0"/>
+      </a:lnRef>
+      <a:fillRef idx="0">
+        <a:scrgbClr r="0" g="0" b="0"/>
+      </a:fillRef>
+      <a:effectRef idx="0">
+        <a:scrgbClr r="0" g="0" b="0"/>
+      </a:effectRef>
+      <a:fontRef idx="minor"/>
+    </dgm:style>
+  </dgm:styleLbl>
+  <dgm:styleLbl name="parChTrans1D3">
+    <dgm:scene3d>
+      <a:camera prst="orthographicFront"/>
+      <a:lightRig rig="threePt" dir="t"/>
+    </dgm:scene3d>
+    <dgm:sp3d/>
+    <dgm:txPr/>
+    <dgm:style>
+      <a:lnRef idx="2">
+        <a:scrgbClr r="0" g="0" b="0"/>
+      </a:lnRef>
+      <a:fillRef idx="0">
+        <a:scrgbClr r="0" g="0" b="0"/>
+      </a:fillRef>
+      <a:effectRef idx="0">
+        <a:scrgbClr r="0" g="0" b="0"/>
+      </a:effectRef>
+      <a:fontRef idx="minor"/>
+    </dgm:style>
+  </dgm:styleLbl>
+  <dgm:styleLbl name="parChTrans1D4">
+    <dgm:scene3d>
+      <a:camera prst="orthographicFront"/>
+      <a:lightRig rig="threePt" dir="t"/>
+    </dgm:scene3d>
+    <dgm:sp3d/>
+    <dgm:txPr/>
+    <dgm:style>
+      <a:lnRef idx="2">
+        <a:scrgbClr r="0" g="0" b="0"/>
+      </a:lnRef>
+      <a:fillRef idx="0">
+        <a:scrgbClr r="0" g="0" b="0"/>
+      </a:fillRef>
+      <a:effectRef idx="0">
+        <a:scrgbClr r="0" g="0" b="0"/>
+      </a:effectRef>
+      <a:fontRef idx="minor"/>
+    </dgm:style>
+  </dgm:styleLbl>
+  <dgm:styleLbl name="fgAcc1">
+    <dgm:scene3d>
+      <a:camera prst="orthographicFront"/>
+      <a:lightRig rig="threePt" dir="t"/>
+    </dgm:scene3d>
+    <dgm:sp3d/>
+    <dgm:txPr/>
+    <dgm:style>
+      <a:lnRef idx="2">
+        <a:scrgbClr r="0" g="0" b="0"/>
+      </a:lnRef>
+      <a:fillRef idx="1">
+        <a:scrgbClr r="0" g="0" b="0"/>
+      </a:fillRef>
+      <a:effectRef idx="0">
+        <a:scrgbClr r="0" g="0" b="0"/>
+      </a:effectRef>
+      <a:fontRef idx="minor"/>
+    </dgm:style>
+  </dgm:styleLbl>
+  <dgm:styleLbl name="conFgAcc1">
+    <dgm:scene3d>
+      <a:camera prst="orthographicFront"/>
+      <a:lightRig rig="threePt" dir="t"/>
+    </dgm:scene3d>
+    <dgm:sp3d/>
+    <dgm:txPr/>
+    <dgm:style>
+      <a:lnRef idx="2">
+        <a:scrgbClr r="0" g="0" b="0"/>
+      </a:lnRef>
+      <a:fillRef idx="1">
+        <a:scrgbClr r="0" g="0" b="0"/>
+      </a:fillRef>
+      <a:effectRef idx="0">
+        <a:scrgbClr r="0" g="0" b="0"/>
+      </a:effectRef>
+      <a:fontRef idx="minor"/>
+    </dgm:style>
+  </dgm:styleLbl>
+  <dgm:styleLbl name="alignAcc1">
+    <dgm:scene3d>
+      <a:camera prst="orthographicFront"/>
+      <a:lightRig rig="threePt" dir="t"/>
+    </dgm:scene3d>
+    <dgm:sp3d/>
+    <dgm:txPr/>
+    <dgm:style>
+      <a:lnRef idx="2">
+        <a:scrgbClr r="0" g="0" b="0"/>
+      </a:lnRef>
+      <a:fillRef idx="1">
+        <a:scrgbClr r="0" g="0" b="0"/>
+      </a:fillRef>
+      <a:effectRef idx="0">
+        <a:scrgbClr r="0" g="0" b="0"/>
+      </a:effectRef>
+      <a:fontRef idx="minor"/>
+    </dgm:style>
+  </dgm:styleLbl>
+  <dgm:styleLbl name="trAlignAcc1">
+    <dgm:scene3d>
+      <a:camera prst="orthographicFront"/>
+      <a:lightRig rig="threePt" dir="t"/>
+    </dgm:scene3d>
+    <dgm:sp3d/>
+    <dgm:txPr/>
+    <dgm:style>
+      <a:lnRef idx="1">
+        <a:scrgbClr r="0" g="0" b="0"/>
+      </a:lnRef>
+      <a:fillRef idx="1">
+        <a:scrgbClr r="0" g="0" b="0"/>
+      </a:fillRef>
+      <a:effectRef idx="0">
+        <a:scrgbClr r="0" g="0" b="0"/>
+      </a:effectRef>
+      <a:fontRef idx="minor"/>
+    </dgm:style>
+  </dgm:styleLbl>
+  <dgm:styleLbl name="bgAcc1">
+    <dgm:scene3d>
+      <a:camera prst="orthographicFront"/>
+      <a:lightRig rig="threePt" dir="t"/>
+    </dgm:scene3d>
+    <dgm:sp3d/>
+    <dgm:txPr/>
+    <dgm:style>
+      <a:lnRef idx="2">
+        <a:scrgbClr r="0" g="0" b="0"/>
+      </a:lnRef>
+      <a:fillRef idx="1">
+        <a:scrgbClr r="0" g="0" b="0"/>
+      </a:fillRef>
+      <a:effectRef idx="0">
+        <a:scrgbClr r="0" g="0" b="0"/>
+      </a:effectRef>
+      <a:fontRef idx="minor"/>
+    </dgm:style>
+  </dgm:styleLbl>
+  <dgm:styleLbl name="solidFgAcc1">
+    <dgm:scene3d>
+      <a:camera prst="orthographicFront"/>
+      <a:lightRig rig="threePt" dir="t"/>
+    </dgm:scene3d>
+    <dgm:sp3d/>
+    <dgm:txPr/>
+    <dgm:style>
+      <a:lnRef idx="2">
+        <a:scrgbClr r="0" g="0" b="0"/>
+      </a:lnRef>
+      <a:fillRef idx="1">
+        <a:scrgbClr r="0" g="0" b="0"/>
+      </a:fillRef>
+      <a:effectRef idx="0">
+        <a:scrgbClr r="0" g="0" b="0"/>
+      </a:effectRef>
+      <a:fontRef idx="minor"/>
+    </dgm:style>
+  </dgm:styleLbl>
+  <dgm:styleLbl name="solidAlignAcc1">
+    <dgm:scene3d>
+      <a:camera prst="orthographicFront"/>
+      <a:lightRig rig="threePt" dir="t"/>
+    </dgm:scene3d>
+    <dgm:sp3d/>
+    <dgm:txPr/>
+    <dgm:style>
+      <a:lnRef idx="2">
+        <a:scrgbClr r="0" g="0" b="0"/>
+      </a:lnRef>
+      <a:fillRef idx="1">
+        <a:scrgbClr r="0" g="0" b="0"/>
+      </a:fillRef>
+      <a:effectRef idx="0">
+        <a:scrgbClr r="0" g="0" b="0"/>
+      </a:effectRef>
+      <a:fontRef idx="minor"/>
+    </dgm:style>
+  </dgm:styleLbl>
+  <dgm:styleLbl name="solidBgAcc1">
+    <dgm:scene3d>
+      <a:camera prst="orthographicFront"/>
+      <a:lightRig rig="threePt" dir="t"/>
+    </dgm:scene3d>
+    <dgm:sp3d/>
+    <dgm:txPr/>
+    <dgm:style>
+      <a:lnRef idx="2">
+        <a:scrgbClr r="0" g="0" b="0"/>
+      </a:lnRef>
+      <a:fillRef idx="1">
+        <a:scrgbClr r="0" g="0" b="0"/>
+      </a:fillRef>
+      <a:effectRef idx="0">
+        <a:scrgbClr r="0" g="0" b="0"/>
+      </a:effectRef>
+      <a:fontRef idx="minor"/>
+    </dgm:style>
+  </dgm:styleLbl>
+  <dgm:styleLbl name="fgAccFollowNode1">
+    <dgm:scene3d>
+      <a:camera prst="orthographicFront"/>
+      <a:lightRig rig="threePt" dir="t"/>
+    </dgm:scene3d>
+    <dgm:sp3d/>
+    <dgm:txPr/>
+    <dgm:style>
+      <a:lnRef idx="2">
+        <a:scrgbClr r="0" g="0" b="0"/>
+      </a:lnRef>
+      <a:fillRef idx="1">
+        <a:scrgbClr r="0" g="0" b="0"/>
+      </a:fillRef>
+      <a:effectRef idx="0">
+        <a:scrgbClr r="0" g="0" b="0"/>
+      </a:effectRef>
+      <a:fontRef idx="minor"/>
+    </dgm:style>
+  </dgm:styleLbl>
+  <dgm:styleLbl name="alignAccFollowNode1">
+    <dgm:scene3d>
+      <a:camera prst="orthographicFront"/>
+      <a:lightRig rig="threePt" dir="t"/>
+    </dgm:scene3d>
+    <dgm:sp3d/>
+    <dgm:txPr/>
+    <dgm:style>
+      <a:lnRef idx="2">
+        <a:scrgbClr r="0" g="0" b="0"/>
+      </a:lnRef>
+      <a:fillRef idx="1">
+        <a:scrgbClr r="0" g="0" b="0"/>
+      </a:fillRef>
+      <a:effectRef idx="0">
+        <a:scrgbClr r="0" g="0" b="0"/>
+      </a:effectRef>
+      <a:fontRef idx="minor"/>
+    </dgm:style>
+  </dgm:styleLbl>
+  <dgm:styleLbl name="bgAccFollowNode1">
+    <dgm:scene3d>
+      <a:camera prst="orthographicFront"/>
+      <a:lightRig rig="threePt" dir="t"/>
+    </dgm:scene3d>
+    <dgm:sp3d/>
+    <dgm:txPr/>
+    <dgm:style>
+      <a:lnRef idx="2">
+        <a:scrgbClr r="0" g="0" b="0"/>
+      </a:lnRef>
+      <a:fillRef idx="1">
+        <a:scrgbClr r="0" g="0" b="0"/>
+      </a:fillRef>
+      <a:effectRef idx="0">
+        <a:scrgbClr r="0" g="0" b="0"/>
+      </a:effectRef>
+      <a:fontRef idx="minor"/>
+    </dgm:style>
+  </dgm:styleLbl>
+  <dgm:styleLbl name="fgAcc0">
+    <dgm:scene3d>
+      <a:camera prst="orthographicFront"/>
+      <a:lightRig rig="threePt" dir="t"/>
+    </dgm:scene3d>
+    <dgm:sp3d/>
+    <dgm:txPr/>
+    <dgm:style>
+      <a:lnRef idx="2">
+        <a:scrgbClr r="0" g="0" b="0"/>
+      </a:lnRef>
+      <a:fillRef idx="1">
+        <a:scrgbClr r="0" g="0" b="0"/>
+      </a:fillRef>
+      <a:effectRef idx="0">
+        <a:scrgbClr r="0" g="0" b="0"/>
+      </a:effectRef>
+      <a:fontRef idx="minor"/>
+    </dgm:style>
+  </dgm:styleLbl>
+  <dgm:styleLbl name="fgAcc2">
+    <dgm:scene3d>
+      <a:camera prst="orthographicFront"/>
+      <a:lightRig rig="threePt" dir="t"/>
+    </dgm:scene3d>
+    <dgm:sp3d/>
+    <dgm:txPr/>
+    <dgm:style>
+      <a:lnRef idx="2">
+        <a:scrgbClr r="0" g="0" b="0"/>
+      </a:lnRef>
+      <a:fillRef idx="1">
+        <a:scrgbClr r="0" g="0" b="0"/>
+      </a:fillRef>
+      <a:effectRef idx="0">
+        <a:scrgbClr r="0" g="0" b="0"/>
+      </a:effectRef>
+      <a:fontRef idx="minor"/>
+    </dgm:style>
+  </dgm:styleLbl>
+  <dgm:styleLbl name="fgAcc3">
+    <dgm:scene3d>
+      <a:camera prst="orthographicFront"/>
+      <a:lightRig rig="threePt" dir="t"/>
+    </dgm:scene3d>
+    <dgm:sp3d/>
+    <dgm:txPr/>
+    <dgm:style>
+      <a:lnRef idx="2">
+        <a:scrgbClr r="0" g="0" b="0"/>
+      </a:lnRef>
+      <a:fillRef idx="1">
+        <a:scrgbClr r="0" g="0" b="0"/>
+      </a:fillRef>
+      <a:effectRef idx="0">
+        <a:scrgbClr r="0" g="0" b="0"/>
+      </a:effectRef>
+      <a:fontRef idx="minor"/>
+    </dgm:style>
+  </dgm:styleLbl>
+  <dgm:styleLbl name="fgAcc4">
+    <dgm:scene3d>
+      <a:camera prst="orthographicFront"/>
+      <a:lightRig rig="threePt" dir="t"/>
+    </dgm:scene3d>
+    <dgm:sp3d/>
+    <dgm:txPr/>
+    <dgm:style>
+      <a:lnRef idx="2">
+        <a:scrgbClr r="0" g="0" b="0"/>
+      </a:lnRef>
+      <a:fillRef idx="1">
+        <a:scrgbClr r="0" g="0" b="0"/>
+      </a:fillRef>
+      <a:effectRef idx="0">
+        <a:scrgbClr r="0" g="0" b="0"/>
+      </a:effectRef>
+      <a:fontRef idx="minor"/>
+    </dgm:style>
+  </dgm:styleLbl>
+  <dgm:styleLbl name="bgShp">
+    <dgm:scene3d>
+      <a:camera prst="orthographicFront"/>
+      <a:lightRig rig="threePt" dir="t"/>
+    </dgm:scene3d>
+    <dgm:sp3d/>
+    <dgm:txPr/>
+    <dgm:style>
+      <a:lnRef idx="0">
+        <a:scrgbClr r="0" g="0" b="0"/>
+      </a:lnRef>
+      <a:fillRef idx="1">
+        <a:scrgbClr r="0" g="0" b="0"/>
+      </a:fillRef>
+      <a:effectRef idx="0">
+        <a:scrgbClr r="0" g="0" b="0"/>
+      </a:effectRef>
+      <a:fontRef idx="minor"/>
+    </dgm:style>
+  </dgm:styleLbl>
+  <dgm:styleLbl name="dkBgShp">
+    <dgm:scene3d>
+      <a:camera prst="orthographicFront"/>
+      <a:lightRig rig="threePt" dir="t"/>
+    </dgm:scene3d>
+    <dgm:sp3d/>
+    <dgm:txPr/>
+    <dgm:style>
+      <a:lnRef idx="0">
+        <a:scrgbClr r="0" g="0" b="0"/>
+      </a:lnRef>
+      <a:fillRef idx="1">
+        <a:scrgbClr r="0" g="0" b="0"/>
+      </a:fillRef>
+      <a:effectRef idx="0">
+        <a:scrgbClr r="0" g="0" b="0"/>
+      </a:effectRef>
+      <a:fontRef idx="minor"/>
+    </dgm:style>
+  </dgm:styleLbl>
+  <dgm:styleLbl name="trBgShp">
+    <dgm:scene3d>
+      <a:camera prst="orthographicFront"/>
+      <a:lightRig rig="threePt" dir="t"/>
+    </dgm:scene3d>
+    <dgm:sp3d/>
+    <dgm:txPr/>
+    <dgm:style>
+      <a:lnRef idx="0">
+        <a:scrgbClr r="0" g="0" b="0"/>
+      </a:lnRef>
+      <a:fillRef idx="1">
+        <a:scrgbClr r="0" g="0" b="0"/>
+      </a:fillRef>
+      <a:effectRef idx="0">
+        <a:scrgbClr r="0" g="0" b="0"/>
+      </a:effectRef>
+      <a:fontRef idx="minor"/>
+    </dgm:style>
+  </dgm:styleLbl>
+  <dgm:styleLbl name="fgShp">
+    <dgm:scene3d>
+      <a:camera prst="orthographicFront"/>
+      <a:lightRig rig="threePt" dir="t"/>
+    </dgm:scene3d>
+    <dgm:sp3d/>
+    <dgm:txPr/>
+    <dgm:style>
+      <a:lnRef idx="2">
+        <a:scrgbClr r="0" g="0" b="0"/>
+      </a:lnRef>
+      <a:fillRef idx="1">
+        <a:scrgbClr r="0" g="0" b="0"/>
+      </a:fillRef>
+      <a:effectRef idx="0">
+        <a:scrgbClr r="0" g="0" b="0"/>
+      </a:effectRef>
+      <a:fontRef idx="minor"/>
+    </dgm:style>
+  </dgm:styleLbl>
+  <dgm:styleLbl name="revTx">
+    <dgm:scene3d>
+      <a:camera prst="orthographicFront"/>
+      <a:lightRig rig="threePt" dir="t"/>
+    </dgm:scene3d>
+    <dgm:sp3d/>
+    <dgm:txPr/>
+    <dgm:style>
+      <a:lnRef idx="0">
+        <a:scrgbClr r="0" g="0" b="0"/>
+      </a:lnRef>
+      <a:fillRef idx="0">
+        <a:scrgbClr r="0" g="0" b="0"/>
+      </a:fillRef>
+      <a:effectRef idx="0">
+        <a:scrgbClr r="0" g="0" b="0"/>
+      </a:effectRef>
+      <a:fontRef idx="minor"/>
+    </dgm:style>
+  </dgm:styleLbl>
+</dgm:styleDef>
+</file>
+
 <file path=ppt/notesMasters/notesMaster1.xml><?xml version="1.0" encoding="utf-8"?>
 <p:notesMaster xmlns:a="http://schemas.openxmlformats.org/drawingml/2006/main" xmlns:r="http://schemas.openxmlformats.org/officeDocument/2006/relationships" xmlns:p="http://schemas.openxmlformats.org/presentationml/2006/main">
   <p:cSld>
@@ -5777,7 +9059,7 @@
           <a:lstStyle/>
           <a:p>
             <a:r>
-              <a:rPr lang="fr-CA" dirty="0"/>
+              <a:rPr lang="fr-CA"/>
               <a:t>Parler du critère du COSEPAC avec les analyses de viabilité pour 100 ans</a:t>
             </a:r>
           </a:p>
@@ -5864,7 +9146,7 @@
           <a:lstStyle/>
           <a:p>
             <a:r>
-              <a:rPr lang="fr-CA" dirty="0"/>
+              <a:rPr lang="fr-CA"/>
               <a:t>Ex. les individus stockés pourrait ne pas connaître le lieu de fraie</a:t>
             </a:r>
           </a:p>
@@ -5897,6 +9179,124 @@
     <p:extLst>
       <p:ext uri="{BB962C8B-B14F-4D97-AF65-F5344CB8AC3E}">
         <p14:creationId xmlns:p14="http://schemas.microsoft.com/office/powerpoint/2010/main" val="1322109074"/>
+      </p:ext>
+    </p:extLst>
+  </p:cSld>
+  <p:clrMapOvr>
+    <a:masterClrMapping/>
+  </p:clrMapOvr>
+</p:notes>
+</file>
+
+<file path=ppt/notesSlides/notesSlide3.xml><?xml version="1.0" encoding="utf-8"?>
+<p:notes xmlns:a="http://schemas.openxmlformats.org/drawingml/2006/main" xmlns:r="http://schemas.openxmlformats.org/officeDocument/2006/relationships" xmlns:p="http://schemas.openxmlformats.org/presentationml/2006/main">
+  <p:cSld>
+    <p:spTree>
+      <p:nvGrpSpPr>
+        <p:cNvPr id="1" name="">
+          <a:extLst>
+            <a:ext uri="{FF2B5EF4-FFF2-40B4-BE49-F238E27FC236}">
+              <a16:creationId xmlns:a16="http://schemas.microsoft.com/office/drawing/2014/main" id="{1B19D15B-114A-3505-8E5F-15BA8B48C21E}"/>
+            </a:ext>
+          </a:extLst>
+        </p:cNvPr>
+        <p:cNvGrpSpPr/>
+        <p:nvPr/>
+      </p:nvGrpSpPr>
+      <p:grpSpPr>
+        <a:xfrm>
+          <a:off x="0" y="0"/>
+          <a:ext cx="0" cy="0"/>
+          <a:chOff x="0" y="0"/>
+          <a:chExt cx="0" cy="0"/>
+        </a:xfrm>
+      </p:grpSpPr>
+      <p:sp>
+        <p:nvSpPr>
+          <p:cNvPr id="2" name="Espace réservé de l'image des diapositives 1">
+            <a:extLst>
+              <a:ext uri="{FF2B5EF4-FFF2-40B4-BE49-F238E27FC236}">
+                <a16:creationId xmlns:a16="http://schemas.microsoft.com/office/drawing/2014/main" id="{F57BFEFD-5229-4463-8239-9870EE864B6B}"/>
+              </a:ext>
+            </a:extLst>
+          </p:cNvPr>
+          <p:cNvSpPr>
+            <a:spLocks noGrp="1" noRot="1" noChangeAspect="1"/>
+          </p:cNvSpPr>
+          <p:nvPr>
+            <p:ph type="sldImg"/>
+          </p:nvPr>
+        </p:nvSpPr>
+        <p:spPr/>
+        <p:txBody>
+          <a:bodyPr/>
+          <a:lstStyle/>
+          <a:p>
+            <a:endParaRPr lang="fr-CA"/>
+          </a:p>
+        </p:txBody>
+      </p:sp>
+      <p:sp>
+        <p:nvSpPr>
+          <p:cNvPr id="3" name="Espace réservé des notes 2">
+            <a:extLst>
+              <a:ext uri="{FF2B5EF4-FFF2-40B4-BE49-F238E27FC236}">
+                <a16:creationId xmlns:a16="http://schemas.microsoft.com/office/drawing/2014/main" id="{864C426F-8D61-023B-4BEE-F0F2B01F5A8C}"/>
+              </a:ext>
+            </a:extLst>
+          </p:cNvPr>
+          <p:cNvSpPr>
+            <a:spLocks noGrp="1"/>
+          </p:cNvSpPr>
+          <p:nvPr>
+            <p:ph type="body" idx="1"/>
+          </p:nvPr>
+        </p:nvSpPr>
+        <p:spPr/>
+        <p:txBody>
+          <a:bodyPr/>
+          <a:lstStyle/>
+          <a:p>
+            <a:r>
+              <a:rPr lang="fr-CA"/>
+              <a:t>Parler du critère du COSEPAC avec les analyses de viabilité pour 100 ans</a:t>
+            </a:r>
+          </a:p>
+        </p:txBody>
+      </p:sp>
+      <p:sp>
+        <p:nvSpPr>
+          <p:cNvPr id="4" name="Espace réservé du numéro de diapositive 3">
+            <a:extLst>
+              <a:ext uri="{FF2B5EF4-FFF2-40B4-BE49-F238E27FC236}">
+                <a16:creationId xmlns:a16="http://schemas.microsoft.com/office/drawing/2014/main" id="{646BE399-D1BF-B6D7-C969-EE318936F089}"/>
+              </a:ext>
+            </a:extLst>
+          </p:cNvPr>
+          <p:cNvSpPr>
+            <a:spLocks noGrp="1"/>
+          </p:cNvSpPr>
+          <p:nvPr>
+            <p:ph type="sldNum" sz="quarter" idx="5"/>
+          </p:nvPr>
+        </p:nvSpPr>
+        <p:spPr/>
+        <p:txBody>
+          <a:bodyPr/>
+          <a:lstStyle/>
+          <a:p>
+            <a:fld id="{EA5809C9-D391-499D-8A4B-F46E79386DAE}" type="slidenum">
+              <a:rPr lang="fr-CA" smtClean="0"/>
+              <a:t>18</a:t>
+            </a:fld>
+            <a:endParaRPr lang="fr-CA"/>
+          </a:p>
+        </p:txBody>
+      </p:sp>
+    </p:spTree>
+    <p:extLst>
+      <p:ext uri="{BB962C8B-B14F-4D97-AF65-F5344CB8AC3E}">
+        <p14:creationId xmlns:p14="http://schemas.microsoft.com/office/powerpoint/2010/main" val="1380242359"/>
       </p:ext>
     </p:extLst>
   </p:cSld>
@@ -5959,7 +9359,6 @@
               <a:rPr lang="en-US"/>
               <a:t>Click to edit Master title style</a:t>
             </a:r>
-            <a:endParaRPr lang="en-US" dirty="0"/>
           </a:p>
         </p:txBody>
       </p:sp>
@@ -6032,7 +9431,6 @@
               <a:rPr lang="en-US"/>
               <a:t>Click to edit Master subtitle style</a:t>
             </a:r>
-            <a:endParaRPr lang="en-US" dirty="0"/>
           </a:p>
         </p:txBody>
       </p:sp>
@@ -6086,7 +9484,7 @@
           <a:bodyPr/>
           <a:lstStyle/>
           <a:p>
-            <a:endParaRPr lang="en-US" dirty="0"/>
+            <a:endParaRPr lang="en-US"/>
           </a:p>
         </p:txBody>
       </p:sp>
@@ -6174,7 +9572,6 @@
               <a:rPr lang="en-US"/>
               <a:t>Click to edit Master title style</a:t>
             </a:r>
-            <a:endParaRPr lang="en-US" dirty="0"/>
           </a:p>
         </p:txBody>
       </p:sp>
@@ -6232,7 +9629,6 @@
               <a:rPr lang="en-US"/>
               <a:t>Fifth level</a:t>
             </a:r>
-            <a:endParaRPr lang="en-US" dirty="0"/>
           </a:p>
         </p:txBody>
       </p:sp>
@@ -6286,7 +9682,7 @@
           <a:bodyPr/>
           <a:lstStyle/>
           <a:p>
-            <a:endParaRPr lang="en-US" dirty="0"/>
+            <a:endParaRPr lang="en-US"/>
           </a:p>
         </p:txBody>
       </p:sp>
@@ -6379,7 +9775,6 @@
               <a:rPr lang="en-US"/>
               <a:t>Click to edit Master title style</a:t>
             </a:r>
-            <a:endParaRPr lang="en-US" dirty="0"/>
           </a:p>
         </p:txBody>
       </p:sp>
@@ -6442,7 +9837,6 @@
               <a:rPr lang="en-US"/>
               <a:t>Fifth level</a:t>
             </a:r>
-            <a:endParaRPr lang="en-US" dirty="0"/>
           </a:p>
         </p:txBody>
       </p:sp>
@@ -6496,7 +9890,7 @@
           <a:bodyPr/>
           <a:lstStyle/>
           <a:p>
-            <a:endParaRPr lang="en-US" dirty="0"/>
+            <a:endParaRPr lang="en-US"/>
           </a:p>
         </p:txBody>
       </p:sp>
@@ -6584,7 +9978,6 @@
               <a:rPr lang="en-US"/>
               <a:t>Click to edit Master title style</a:t>
             </a:r>
-            <a:endParaRPr lang="en-US" dirty="0"/>
           </a:p>
         </p:txBody>
       </p:sp>
@@ -6642,7 +10035,6 @@
               <a:rPr lang="en-US"/>
               <a:t>Fifth level</a:t>
             </a:r>
-            <a:endParaRPr lang="en-US" dirty="0"/>
           </a:p>
         </p:txBody>
       </p:sp>
@@ -6696,7 +10088,7 @@
           <a:bodyPr/>
           <a:lstStyle/>
           <a:p>
-            <a:endParaRPr lang="en-US" dirty="0"/>
+            <a:endParaRPr lang="en-US"/>
           </a:p>
         </p:txBody>
       </p:sp>
@@ -6793,7 +10185,6 @@
               <a:rPr lang="en-US"/>
               <a:t>Click to edit Master title style</a:t>
             </a:r>
-            <a:endParaRPr lang="en-US" dirty="0"/>
           </a:p>
         </p:txBody>
       </p:sp>
@@ -6972,7 +10363,7 @@
           <a:bodyPr/>
           <a:lstStyle/>
           <a:p>
-            <a:endParaRPr lang="en-US" dirty="0"/>
+            <a:endParaRPr lang="en-US"/>
           </a:p>
         </p:txBody>
       </p:sp>
@@ -7065,7 +10456,6 @@
               <a:rPr lang="en-US"/>
               <a:t>Click to edit Master title style</a:t>
             </a:r>
-            <a:endParaRPr lang="en-US" dirty="0"/>
           </a:p>
         </p:txBody>
       </p:sp>
@@ -7128,7 +10518,6 @@
               <a:rPr lang="en-US"/>
               <a:t>Fifth level</a:t>
             </a:r>
-            <a:endParaRPr lang="en-US" dirty="0"/>
           </a:p>
         </p:txBody>
       </p:sp>
@@ -7191,7 +10580,6 @@
               <a:rPr lang="en-US"/>
               <a:t>Fifth level</a:t>
             </a:r>
-            <a:endParaRPr lang="en-US" dirty="0"/>
           </a:p>
         </p:txBody>
       </p:sp>
@@ -7245,7 +10633,7 @@
           <a:bodyPr/>
           <a:lstStyle/>
           <a:p>
-            <a:endParaRPr lang="en-US" dirty="0"/>
+            <a:endParaRPr lang="en-US"/>
           </a:p>
         </p:txBody>
       </p:sp>
@@ -7338,7 +10726,6 @@
               <a:rPr lang="en-US"/>
               <a:t>Click to edit Master title style</a:t>
             </a:r>
-            <a:endParaRPr lang="en-US" dirty="0"/>
           </a:p>
         </p:txBody>
       </p:sp>
@@ -7476,7 +10863,6 @@
               <a:rPr lang="en-US"/>
               <a:t>Fifth level</a:t>
             </a:r>
-            <a:endParaRPr lang="en-US" dirty="0"/>
           </a:p>
         </p:txBody>
       </p:sp>
@@ -7614,7 +11000,6 @@
               <a:rPr lang="en-US"/>
               <a:t>Fifth level</a:t>
             </a:r>
-            <a:endParaRPr lang="en-US" dirty="0"/>
           </a:p>
         </p:txBody>
       </p:sp>
@@ -7668,7 +11053,7 @@
           <a:bodyPr/>
           <a:lstStyle/>
           <a:p>
-            <a:endParaRPr lang="en-US" dirty="0"/>
+            <a:endParaRPr lang="en-US"/>
           </a:p>
         </p:txBody>
       </p:sp>
@@ -7756,7 +11141,6 @@
               <a:rPr lang="en-US"/>
               <a:t>Click to edit Master title style</a:t>
             </a:r>
-            <a:endParaRPr lang="en-US" dirty="0"/>
           </a:p>
         </p:txBody>
       </p:sp>
@@ -7810,7 +11194,7 @@
           <a:bodyPr/>
           <a:lstStyle/>
           <a:p>
-            <a:endParaRPr lang="en-US" dirty="0"/>
+            <a:endParaRPr lang="en-US"/>
           </a:p>
         </p:txBody>
       </p:sp>
@@ -7923,7 +11307,7 @@
           <a:bodyPr/>
           <a:lstStyle/>
           <a:p>
-            <a:endParaRPr lang="en-US" dirty="0"/>
+            <a:endParaRPr lang="en-US"/>
           </a:p>
         </p:txBody>
       </p:sp>
@@ -8020,7 +11404,6 @@
               <a:rPr lang="en-US"/>
               <a:t>Click to edit Master title style</a:t>
             </a:r>
-            <a:endParaRPr lang="en-US" dirty="0"/>
           </a:p>
         </p:txBody>
       </p:sp>
@@ -8111,7 +11494,6 @@
               <a:rPr lang="en-US"/>
               <a:t>Fifth level</a:t>
             </a:r>
-            <a:endParaRPr lang="en-US" dirty="0"/>
           </a:p>
         </p:txBody>
       </p:sp>
@@ -8236,7 +11618,7 @@
           <a:bodyPr/>
           <a:lstStyle/>
           <a:p>
-            <a:endParaRPr lang="en-US" dirty="0"/>
+            <a:endParaRPr lang="en-US"/>
           </a:p>
         </p:txBody>
       </p:sp>
@@ -8333,7 +11715,6 @@
               <a:rPr lang="en-US"/>
               <a:t>Click to edit Master title style</a:t>
             </a:r>
-            <a:endParaRPr lang="en-US" dirty="0"/>
           </a:p>
         </p:txBody>
       </p:sp>
@@ -8404,7 +11785,6 @@
               <a:rPr lang="en-US"/>
               <a:t>Click icon to add picture</a:t>
             </a:r>
-            <a:endParaRPr lang="en-US" dirty="0"/>
           </a:p>
         </p:txBody>
       </p:sp>
@@ -8529,7 +11909,7 @@
           <a:bodyPr/>
           <a:lstStyle/>
           <a:p>
-            <a:endParaRPr lang="en-US" dirty="0"/>
+            <a:endParaRPr lang="en-US"/>
           </a:p>
         </p:txBody>
       </p:sp>
@@ -8632,7 +12012,6 @@
               <a:rPr lang="en-US"/>
               <a:t>Click to edit Master title style</a:t>
             </a:r>
-            <a:endParaRPr lang="en-US" dirty="0"/>
           </a:p>
         </p:txBody>
       </p:sp>
@@ -8700,7 +12079,6 @@
               <a:rPr lang="en-US"/>
               <a:t>Fifth level</a:t>
             </a:r>
-            <a:endParaRPr lang="en-US" dirty="0"/>
           </a:p>
         </p:txBody>
       </p:sp>
@@ -8788,7 +12166,7 @@
             </a:lvl1pPr>
           </a:lstStyle>
           <a:p>
-            <a:endParaRPr lang="en-US" dirty="0"/>
+            <a:endParaRPr lang="en-US"/>
           </a:p>
         </p:txBody>
       </p:sp>
@@ -9539,7 +12917,7 @@
               </a:lnSpc>
             </a:pPr>
             <a:r>
-              <a:rPr lang="fr-CA" sz="3100" dirty="0"/>
+              <a:rPr lang="fr-CA" sz="3100"/>
               <a:t>État de la situation du chevalier cuivré </a:t>
             </a:r>
           </a:p>
@@ -9575,7 +12953,7 @@
           <a:p>
             <a:pPr algn="r"/>
             <a:r>
-              <a:rPr lang="fr-CA" sz="600" dirty="0"/>
+              <a:rPr lang="fr-CA" sz="600"/>
               <a:t>https://www.quebec.ca/agriculture-environnement-et-ressources-naturelles/faune/animaux-sauvages-quebec/fiches-especes-fauniques/chevalier-cuivre</a:t>
             </a:r>
           </a:p>
@@ -9856,7 +13234,7 @@
         </p:blipFill>
         <p:spPr>
           <a:xfrm>
-            <a:off x="800100" y="1137511"/>
+            <a:off x="800100" y="422072"/>
             <a:ext cx="5134573" cy="3170598"/>
           </a:xfrm>
           <a:prstGeom prst="rect">
@@ -9886,7 +13264,7 @@
         </p:blipFill>
         <p:spPr>
           <a:xfrm>
-            <a:off x="6272812" y="1147073"/>
+            <a:off x="6272812" y="422072"/>
             <a:ext cx="5119088" cy="3161036"/>
           </a:xfrm>
           <a:prstGeom prst="rect">
@@ -9946,6 +13324,109 @@
           </a:fontRef>
         </p:style>
       </p:cxnSp>
+      <p:sp>
+        <p:nvSpPr>
+          <p:cNvPr id="3" name="ZoneTexte 2">
+            <a:extLst>
+              <a:ext uri="{FF2B5EF4-FFF2-40B4-BE49-F238E27FC236}">
+                <a16:creationId xmlns:a16="http://schemas.microsoft.com/office/drawing/2014/main" id="{76DBA5CA-9694-DA50-372E-DE9E5298136C}"/>
+              </a:ext>
+            </a:extLst>
+          </p:cNvPr>
+          <p:cNvSpPr txBox="1"/>
+          <p:nvPr/>
+        </p:nvSpPr>
+        <p:spPr>
+          <a:xfrm>
+            <a:off x="782382" y="3670239"/>
+            <a:ext cx="5295900" cy="646331"/>
+          </a:xfrm>
+          <a:prstGeom prst="rect">
+            <a:avLst/>
+          </a:prstGeom>
+          <a:noFill/>
+        </p:spPr>
+        <p:txBody>
+          <a:bodyPr wrap="square" rtlCol="0">
+            <a:spAutoFit/>
+          </a:bodyPr>
+          <a:lstStyle/>
+          <a:p>
+            <a:pPr algn="just"/>
+            <a:r>
+              <a:rPr lang="fr-CA" sz="1200"/>
+              <a:t>Figure 2 : Exemples de distributions Beta selon des valeurs de Beta utilisées dans notre analyse. Le paramètre Alpha est déterminé selon </a:t>
+            </a:r>
+          </a:p>
+          <a:p>
+            <a:pPr algn="just"/>
+            <a:r>
+              <a:rPr lang="fr-CA" sz="1200"/>
+              <a:t>(</a:t>
+            </a:r>
+            <a:r>
+              <a:rPr lang="fr-CA" sz="1200" err="1"/>
+              <a:t>Survie</a:t>
+            </a:r>
+            <a:r>
+              <a:rPr lang="fr-CA" sz="1200" baseline="-25000" err="1"/>
+              <a:t>stade</a:t>
+            </a:r>
+            <a:r>
+              <a:rPr lang="fr-CA" sz="1200"/>
+              <a:t> * Beta) / (1 – </a:t>
+            </a:r>
+            <a:r>
+              <a:rPr lang="fr-CA" sz="1200" err="1"/>
+              <a:t>Survie</a:t>
+            </a:r>
+            <a:r>
+              <a:rPr lang="fr-CA" sz="1200" baseline="-25000" err="1"/>
+              <a:t>stade</a:t>
+            </a:r>
+            <a:r>
+              <a:rPr lang="fr-CA" sz="1200"/>
+              <a:t>)</a:t>
+            </a:r>
+          </a:p>
+        </p:txBody>
+      </p:sp>
+      <p:sp>
+        <p:nvSpPr>
+          <p:cNvPr id="4" name="ZoneTexte 3">
+            <a:extLst>
+              <a:ext uri="{FF2B5EF4-FFF2-40B4-BE49-F238E27FC236}">
+                <a16:creationId xmlns:a16="http://schemas.microsoft.com/office/drawing/2014/main" id="{0975B400-8C59-591A-0177-77A6A072BEDE}"/>
+              </a:ext>
+            </a:extLst>
+          </p:cNvPr>
+          <p:cNvSpPr txBox="1"/>
+          <p:nvPr/>
+        </p:nvSpPr>
+        <p:spPr>
+          <a:xfrm>
+            <a:off x="6272812" y="3654103"/>
+            <a:ext cx="5119088" cy="461665"/>
+          </a:xfrm>
+          <a:prstGeom prst="rect">
+            <a:avLst/>
+          </a:prstGeom>
+          <a:noFill/>
+        </p:spPr>
+        <p:txBody>
+          <a:bodyPr wrap="square" rtlCol="0">
+            <a:spAutoFit/>
+          </a:bodyPr>
+          <a:lstStyle/>
+          <a:p>
+            <a:pPr algn="just"/>
+            <a:r>
+              <a:rPr lang="fr-CA" sz="1200"/>
+              <a:t>Figure 3 : Exemple de distribution normale d’écart-type égal à 0,25, tel qu’utilisé dans un but de stochasticité de la fécondité dans notre modèle</a:t>
+            </a:r>
+          </a:p>
+        </p:txBody>
+      </p:sp>
     </p:spTree>
     <p:extLst>
       <p:ext uri="{BB962C8B-B14F-4D97-AF65-F5344CB8AC3E}">
@@ -9998,7 +13479,7 @@
           <a:lstStyle/>
           <a:p>
             <a:r>
-              <a:rPr lang="fr-CA" dirty="0"/>
+              <a:rPr lang="fr-CA"/>
               <a:t>Résultats</a:t>
             </a:r>
           </a:p>
@@ -10100,15 +13581,23 @@
           <a:p>
             <a:pPr algn="just"/>
             <a:r>
-              <a:rPr lang="fr-CA" sz="1600" noProof="0" dirty="0"/>
-              <a:t>Figure 2 : À gauche, résultats de l’étude de </a:t>
-            </a:r>
-            <a:r>
-              <a:rPr lang="fr-CA" sz="1600" noProof="0" dirty="0" err="1"/>
+              <a:rPr lang="fr-CA" sz="1600" noProof="0"/>
+              <a:t>Figure </a:t>
+            </a:r>
+            <a:r>
+              <a:rPr lang="fr-CA" sz="1600"/>
+              <a:t>4</a:t>
+            </a:r>
+            <a:r>
+              <a:rPr lang="fr-CA" sz="1600" noProof="0"/>
+              <a:t> : À gauche, résultats de l’étude de </a:t>
+            </a:r>
+            <a:r>
+              <a:rPr lang="fr-CA" sz="1600" noProof="0" err="1"/>
               <a:t>Bannester</a:t>
             </a:r>
             <a:r>
-              <a:rPr lang="fr-CA" sz="1600" noProof="0" dirty="0"/>
+              <a:rPr lang="fr-CA" sz="1600" noProof="0"/>
               <a:t>-Marchand et al. (2025), à droite, résultats de notre analyse. Est représenté : Abondance médiane de chevaliers cuivrés, basées sur 5000 itérations stochastiques pour les scénarios (a) nulle, (b) menace, (c) mesurée de notre modèle dynamique. Les enveloppes colorées représentent les intervalles de confiance à 95% ; les lignes pleines les abondances médianes d’individus matures</a:t>
             </a:r>
           </a:p>
@@ -10180,22 +13669,22 @@
           <a:p>
             <a:pPr algn="just"/>
             <a:r>
-              <a:rPr lang="fr-CA" sz="1600" noProof="0" dirty="0"/>
-              <a:t>Figure 3 : À gauche, résultats de l’étude de </a:t>
-            </a:r>
-            <a:r>
-              <a:rPr lang="fr-CA" sz="1600" noProof="0" dirty="0" err="1"/>
+              <a:rPr lang="fr-CA" sz="1600" noProof="0"/>
+              <a:t>Figure 5 : À gauche, résultats de l’étude de </a:t>
+            </a:r>
+            <a:r>
+              <a:rPr lang="fr-CA" sz="1600" noProof="0" err="1"/>
               <a:t>Bannester</a:t>
             </a:r>
             <a:r>
-              <a:rPr lang="fr-CA" sz="1600" noProof="0" dirty="0"/>
+              <a:rPr lang="fr-CA" sz="1600" noProof="0"/>
               <a:t>-Marchand et al. (2025), à droite, résultats de notre analyse. Est représenté : Les probabilités que les chevaliers cuivrés tombent sous un seuil de population dans les prochaines 100 ans, basé sur nos scénarios dynamique stochastiques de population. Lignes : médiane de 5000 itérations; enveloppes colorées : 70% </a:t>
             </a:r>
             <a:r>
-              <a:rPr lang="fr-CA" sz="1600" noProof="0" dirty="0" err="1"/>
+              <a:rPr lang="fr-CA" sz="1600" noProof="0" err="1"/>
               <a:t>ICs</a:t>
             </a:r>
-            <a:endParaRPr lang="fr-CA" sz="1600" noProof="0" dirty="0"/>
+            <a:endParaRPr lang="fr-CA" sz="1600" noProof="0"/>
           </a:p>
         </p:txBody>
       </p:sp>
@@ -10331,19 +13820,19 @@
           <a:p>
             <a:pPr algn="just"/>
             <a:r>
-              <a:rPr lang="fr-CA" sz="1600" noProof="0" dirty="0"/>
-              <a:t>Figure 4 : À gauche, résultats de l’étude de </a:t>
-            </a:r>
-            <a:r>
-              <a:rPr lang="fr-CA" sz="1600" noProof="0" dirty="0" err="1"/>
+              <a:rPr lang="fr-CA" sz="1600" noProof="0"/>
+              <a:t>Figure 6 : À gauche, résultats de l’étude de </a:t>
+            </a:r>
+            <a:r>
+              <a:rPr lang="fr-CA" sz="1600" noProof="0" err="1"/>
               <a:t>Bannester</a:t>
             </a:r>
             <a:r>
-              <a:rPr lang="fr-CA" sz="1600" noProof="0" dirty="0"/>
+              <a:rPr lang="fr-CA" sz="1600" noProof="0"/>
               <a:t>-Marchand et al. (2025), à droite, résultats de notre analyse. Est représenté :</a:t>
             </a:r>
             <a:r>
-              <a:rPr lang="fr-CA" sz="1600" dirty="0"/>
+              <a:rPr lang="fr-CA" sz="1600"/>
               <a:t> L’effet d’augmenter l’ensemencement de larves, alevins, individus d’âges 1, et individus matures (âge 10) sur l’abondance de chevaliers matures sur 100 ans dans notre scénario mesuré. Lors de l’application aux scénarios nulles et menacés, les résultats étaient indistinguables de ceux présentés.</a:t>
             </a:r>
           </a:p>
@@ -10468,7 +13957,7 @@
           <a:lstStyle/>
           <a:p>
             <a:r>
-              <a:rPr lang="fr-CA" dirty="0"/>
+              <a:rPr lang="fr-CA"/>
               <a:t>Discussion</a:t>
             </a:r>
           </a:p>
@@ -10492,7 +13981,9 @@
         </p:nvSpPr>
         <p:spPr/>
         <p:txBody>
-          <a:bodyPr/>
+          <a:bodyPr vert="horz" lIns="91440" tIns="45720" rIns="91440" bIns="45720" rtlCol="0" anchor="t">
+            <a:normAutofit/>
+          </a:bodyPr>
           <a:lstStyle/>
           <a:p>
             <a:pPr>
@@ -10501,8 +13992,8 @@
               </a:lnSpc>
             </a:pPr>
             <a:r>
-              <a:rPr lang="fr-CA" dirty="0"/>
-              <a:t>Augmenté ensemencement niveau proposé par Bernatchez (2004) = effet négligeable</a:t>
+              <a:rPr lang="fr-CA"/>
+              <a:t>Augmenter ensemencement niveau proposé par Bernatchez (2004) = effet négligeable</a:t>
             </a:r>
           </a:p>
           <a:p>
@@ -10512,7 +14003,7 @@
               </a:lnSpc>
             </a:pPr>
             <a:r>
-              <a:rPr lang="fr-CA" dirty="0"/>
+              <a:rPr lang="fr-CA"/>
               <a:t>Recommandation à mettre en place : ensemencement d’individus plus âgés (en plus)</a:t>
             </a:r>
           </a:p>
@@ -10523,14 +14014,14 @@
               </a:lnSpc>
             </a:pPr>
             <a:r>
-              <a:rPr lang="fr-CA" dirty="0"/>
+              <a:rPr lang="fr-CA"/>
               <a:t>Ensemencement d’âge 10 = théoriquement le mieux, mais…</a:t>
             </a:r>
             <a:br>
-              <a:rPr lang="fr-CA" dirty="0"/>
+              <a:rPr lang="fr-CA"/>
             </a:br>
             <a:r>
-              <a:rPr lang="fr-CA" dirty="0"/>
+              <a:rPr lang="fr-CA"/>
               <a:t> possibilité de phénotype ou comportements mal adaptés (Roberts et al., 2011)</a:t>
             </a:r>
           </a:p>
@@ -10540,7 +14031,7 @@
                 <a:spcPct val="200000"/>
               </a:lnSpc>
             </a:pPr>
-            <a:endParaRPr lang="fr-CA" dirty="0"/>
+            <a:endParaRPr lang="fr-CA"/>
           </a:p>
         </p:txBody>
       </p:sp>
@@ -10727,8 +14218,8 @@
               </a:lnSpc>
             </a:pPr>
             <a:r>
-              <a:rPr lang="fr-CA" dirty="0"/>
-              <a:t>Ensemencement encore nécessaire pour l’instant (Figure 2)</a:t>
+              <a:rPr lang="fr-CA"/>
+              <a:t>Ensemencement encore nécessaire pour l’instant (Figure 4)</a:t>
             </a:r>
           </a:p>
           <a:p>
@@ -10738,7 +14229,7 @@
               </a:lnSpc>
               <a:buNone/>
             </a:pPr>
-            <a:endParaRPr lang="fr-CA" dirty="0"/>
+            <a:endParaRPr lang="fr-CA"/>
           </a:p>
           <a:p>
             <a:pPr>
@@ -10747,7 +14238,7 @@
               </a:lnSpc>
             </a:pPr>
             <a:r>
-              <a:rPr lang="fr-CA" dirty="0"/>
+              <a:rPr lang="fr-CA"/>
               <a:t>Déclin potentiel de 80% selon nos résultats donc confirme statut en voie de disparition</a:t>
             </a:r>
           </a:p>
@@ -10758,7 +14249,7 @@
               </a:lnSpc>
             </a:pPr>
             <a:r>
-              <a:rPr lang="fr-CA" sz="2000" dirty="0"/>
+              <a:rPr lang="fr-CA" sz="2000"/>
               <a:t>Donc action nécessaire</a:t>
             </a:r>
           </a:p>
@@ -10871,7 +14362,6 @@
               <a:rPr lang="fr-CA"/>
               <a:t>Limitations de l’étude</a:t>
             </a:r>
-            <a:endParaRPr lang="fr-CA" dirty="0"/>
           </a:p>
         </p:txBody>
       </p:sp>
@@ -10965,7 +14455,6 @@
               <a:rPr lang="fr-CA"/>
               <a:t>Pas d’impact de la génétique</a:t>
             </a:r>
-            <a:endParaRPr lang="fr-CA" dirty="0"/>
           </a:p>
         </p:txBody>
       </p:sp>
@@ -11291,6 +14780,342 @@
 <file path=ppt/slides/slide18.xml><?xml version="1.0" encoding="utf-8"?>
 <p:sld xmlns:a="http://schemas.openxmlformats.org/drawingml/2006/main" xmlns:r="http://schemas.openxmlformats.org/officeDocument/2006/relationships" xmlns:p="http://schemas.openxmlformats.org/presentationml/2006/main">
   <p:cSld>
+    <p:bg>
+      <p:bgPr>
+        <a:solidFill>
+          <a:schemeClr val="bg1"/>
+        </a:solidFill>
+        <a:effectLst/>
+      </p:bgPr>
+    </p:bg>
+    <p:spTree>
+      <p:nvGrpSpPr>
+        <p:cNvPr id="1" name="">
+          <a:extLst>
+            <a:ext uri="{FF2B5EF4-FFF2-40B4-BE49-F238E27FC236}">
+              <a16:creationId xmlns:a16="http://schemas.microsoft.com/office/drawing/2014/main" id="{E31C7F8A-0557-FFDE-1AE9-469E5043F96A}"/>
+            </a:ext>
+          </a:extLst>
+        </p:cNvPr>
+        <p:cNvGrpSpPr/>
+        <p:nvPr/>
+      </p:nvGrpSpPr>
+      <p:grpSpPr>
+        <a:xfrm>
+          <a:off x="0" y="0"/>
+          <a:ext cx="0" cy="0"/>
+          <a:chOff x="0" y="0"/>
+          <a:chExt cx="0" cy="0"/>
+        </a:xfrm>
+      </p:grpSpPr>
+      <p:cxnSp>
+        <p:nvCxnSpPr>
+          <p:cNvPr id="7" name="Straight Connector 6">
+            <a:extLst>
+              <a:ext uri="{FF2B5EF4-FFF2-40B4-BE49-F238E27FC236}">
+                <a16:creationId xmlns:a16="http://schemas.microsoft.com/office/drawing/2014/main" id="{DEE23635-D68A-9CD7-1CEF-D2ABFA254CCA}"/>
+              </a:ext>
+              <a:ext uri="{C183D7F6-B498-43B3-948B-1728B52AA6E4}">
+                <adec:decorative xmlns:adec="http://schemas.microsoft.com/office/drawing/2017/decorative" val="1"/>
+              </a:ext>
+            </a:extLst>
+          </p:cNvPr>
+          <p:cNvCxnSpPr>
+            <a:cxnSpLocks noGrp="1" noRot="1" noChangeAspect="1" noMove="1" noResize="1" noEditPoints="1" noAdjustHandles="1" noChangeArrowheads="1" noChangeShapeType="1"/>
+          </p:cNvCxnSpPr>
+          <p:nvPr>
+            <p:extLst>
+              <p:ext uri="{386F3935-93C4-4BCD-93E2-E3B085C9AB24}">
+                <p16:designElem xmlns:p16="http://schemas.microsoft.com/office/powerpoint/2015/main" val="1"/>
+              </p:ext>
+            </p:extLst>
+          </p:nvPr>
+        </p:nvCxnSpPr>
+        <p:spPr>
+          <a:xfrm>
+            <a:off x="800100" y="723900"/>
+            <a:ext cx="10591800" cy="0"/>
+          </a:xfrm>
+          <a:prstGeom prst="line">
+            <a:avLst/>
+          </a:prstGeom>
+          <a:ln w="44450">
+            <a:solidFill>
+              <a:schemeClr val="tx1"/>
+            </a:solidFill>
+          </a:ln>
+        </p:spPr>
+        <p:style>
+          <a:lnRef idx="1">
+            <a:schemeClr val="accent1"/>
+          </a:lnRef>
+          <a:fillRef idx="0">
+            <a:schemeClr val="accent1"/>
+          </a:fillRef>
+          <a:effectRef idx="0">
+            <a:schemeClr val="accent1"/>
+          </a:effectRef>
+          <a:fontRef idx="minor">
+            <a:schemeClr val="tx1"/>
+          </a:fontRef>
+        </p:style>
+      </p:cxnSp>
+      <p:cxnSp>
+        <p:nvCxnSpPr>
+          <p:cNvPr id="9" name="Straight Connector 8">
+            <a:extLst>
+              <a:ext uri="{FF2B5EF4-FFF2-40B4-BE49-F238E27FC236}">
+                <a16:creationId xmlns:a16="http://schemas.microsoft.com/office/drawing/2014/main" id="{65C4AC6B-B2EE-A7DF-385F-291C8C677DAC}"/>
+              </a:ext>
+              <a:ext uri="{C183D7F6-B498-43B3-948B-1728B52AA6E4}">
+                <adec:decorative xmlns:adec="http://schemas.microsoft.com/office/drawing/2017/decorative" val="1"/>
+              </a:ext>
+            </a:extLst>
+          </p:cNvPr>
+          <p:cNvCxnSpPr>
+            <a:cxnSpLocks noGrp="1" noRot="1" noChangeAspect="1" noMove="1" noResize="1" noEditPoints="1" noAdjustHandles="1" noChangeArrowheads="1" noChangeShapeType="1"/>
+          </p:cNvCxnSpPr>
+          <p:nvPr>
+            <p:extLst>
+              <p:ext uri="{386F3935-93C4-4BCD-93E2-E3B085C9AB24}">
+                <p16:designElem xmlns:p16="http://schemas.microsoft.com/office/powerpoint/2015/main" val="1"/>
+              </p:ext>
+            </p:extLst>
+          </p:nvPr>
+        </p:nvCxnSpPr>
+        <p:spPr>
+          <a:xfrm>
+            <a:off x="800100" y="6142781"/>
+            <a:ext cx="10591800" cy="0"/>
+          </a:xfrm>
+          <a:prstGeom prst="line">
+            <a:avLst/>
+          </a:prstGeom>
+          <a:ln w="12700">
+            <a:solidFill>
+              <a:schemeClr val="tx1"/>
+            </a:solidFill>
+          </a:ln>
+        </p:spPr>
+        <p:style>
+          <a:lnRef idx="1">
+            <a:schemeClr val="accent1"/>
+          </a:lnRef>
+          <a:fillRef idx="0">
+            <a:schemeClr val="accent1"/>
+          </a:fillRef>
+          <a:effectRef idx="0">
+            <a:schemeClr val="accent1"/>
+          </a:effectRef>
+          <a:fontRef idx="minor">
+            <a:schemeClr val="tx1"/>
+          </a:fontRef>
+        </p:style>
+      </p:cxnSp>
+      <p:sp useBgFill="1">
+        <p:nvSpPr>
+          <p:cNvPr id="11" name="Rectangle 10">
+            <a:extLst>
+              <a:ext uri="{FF2B5EF4-FFF2-40B4-BE49-F238E27FC236}">
+                <a16:creationId xmlns:a16="http://schemas.microsoft.com/office/drawing/2014/main" id="{5ACD05F8-EE2D-EEE4-4810-825223389956}"/>
+              </a:ext>
+              <a:ext uri="{C183D7F6-B498-43B3-948B-1728B52AA6E4}">
+                <adec:decorative xmlns:adec="http://schemas.microsoft.com/office/drawing/2017/decorative" val="1"/>
+              </a:ext>
+            </a:extLst>
+          </p:cNvPr>
+          <p:cNvSpPr>
+            <a:spLocks noGrp="1" noRot="1" noChangeAspect="1" noMove="1" noResize="1" noEditPoints="1" noAdjustHandles="1" noChangeArrowheads="1" noChangeShapeType="1" noTextEdit="1"/>
+          </p:cNvSpPr>
+          <p:nvPr>
+            <p:extLst>
+              <p:ext uri="{386F3935-93C4-4BCD-93E2-E3B085C9AB24}">
+                <p16:designElem xmlns:p16="http://schemas.microsoft.com/office/powerpoint/2015/main" val="1"/>
+              </p:ext>
+            </p:extLst>
+          </p:nvPr>
+        </p:nvSpPr>
+        <p:spPr>
+          <a:xfrm>
+            <a:off x="0" y="0"/>
+            <a:ext cx="12192000" cy="6858000"/>
+          </a:xfrm>
+          <a:prstGeom prst="rect">
+            <a:avLst/>
+          </a:prstGeom>
+          <a:ln w="12700" cap="flat" cmpd="sng" algn="ctr">
+            <a:noFill/>
+            <a:prstDash val="solid"/>
+            <a:miter lim="800000"/>
+          </a:ln>
+          <a:effectLst/>
+          <a:extLst>
+            <a:ext uri="{91240B29-F687-4F45-9708-019B960494DF}">
+              <a14:hiddenLine xmlns:a14="http://schemas.microsoft.com/office/drawing/2010/main" w="12700" cap="flat" cmpd="sng" algn="ctr">
+                <a:solidFill>
+                  <a:schemeClr val="accent1">
+                    <a:shade val="50000"/>
+                  </a:schemeClr>
+                </a:solidFill>
+                <a:prstDash val="solid"/>
+                <a:miter lim="800000"/>
+              </a14:hiddenLine>
+            </a:ext>
+          </a:extLst>
+        </p:spPr>
+        <p:style>
+          <a:lnRef idx="2">
+            <a:schemeClr val="accent1">
+              <a:shade val="50000"/>
+            </a:schemeClr>
+          </a:lnRef>
+          <a:fillRef idx="1">
+            <a:schemeClr val="accent1"/>
+          </a:fillRef>
+          <a:effectRef idx="0">
+            <a:schemeClr val="accent1"/>
+          </a:effectRef>
+          <a:fontRef idx="minor">
+            <a:schemeClr val="lt1"/>
+          </a:fontRef>
+        </p:style>
+        <p:txBody>
+          <a:bodyPr rtlCol="0" anchor="ctr"/>
+          <a:lstStyle/>
+          <a:p>
+            <a:pPr algn="ctr"/>
+            <a:endParaRPr lang="en-US"/>
+          </a:p>
+        </p:txBody>
+      </p:sp>
+      <p:sp>
+        <p:nvSpPr>
+          <p:cNvPr id="2" name="Titre 1">
+            <a:extLst>
+              <a:ext uri="{FF2B5EF4-FFF2-40B4-BE49-F238E27FC236}">
+                <a16:creationId xmlns:a16="http://schemas.microsoft.com/office/drawing/2014/main" id="{17A7EB5A-FA1F-F440-F699-BDAE13D981A1}"/>
+              </a:ext>
+            </a:extLst>
+          </p:cNvPr>
+          <p:cNvSpPr>
+            <a:spLocks noGrp="1"/>
+          </p:cNvSpPr>
+          <p:nvPr>
+            <p:ph type="title"/>
+          </p:nvPr>
+        </p:nvSpPr>
+        <p:spPr>
+          <a:xfrm>
+            <a:off x="800102" y="960594"/>
+            <a:ext cx="5828114" cy="4936812"/>
+          </a:xfrm>
+        </p:spPr>
+        <p:txBody>
+          <a:bodyPr vert="horz" lIns="91440" tIns="45720" rIns="91440" bIns="45720" rtlCol="0" anchor="ctr">
+            <a:normAutofit/>
+          </a:bodyPr>
+          <a:lstStyle/>
+          <a:p>
+            <a:pPr algn="r"/>
+            <a:r>
+              <a:rPr lang="en-US" sz="6000"/>
+              <a:t>Un </a:t>
+            </a:r>
+            <a:r>
+              <a:rPr lang="en-US" sz="6000" err="1"/>
+              <a:t>modèle</a:t>
+            </a:r>
+            <a:r>
+              <a:rPr lang="en-US" sz="6000"/>
+              <a:t> plus simple </a:t>
+            </a:r>
+            <a:r>
+              <a:rPr lang="en-US" sz="6000" err="1"/>
+              <a:t>peut</a:t>
+            </a:r>
+            <a:r>
+              <a:rPr lang="en-US" sz="6000"/>
+              <a:t>-il représenter la </a:t>
+            </a:r>
+            <a:r>
+              <a:rPr lang="en-US" sz="6000" err="1"/>
+              <a:t>réalité</a:t>
+            </a:r>
+            <a:r>
+              <a:rPr lang="en-US" sz="6000"/>
+              <a:t>?</a:t>
+            </a:r>
+          </a:p>
+        </p:txBody>
+      </p:sp>
+      <p:cxnSp>
+        <p:nvCxnSpPr>
+          <p:cNvPr id="13" name="Straight Connector 12">
+            <a:extLst>
+              <a:ext uri="{FF2B5EF4-FFF2-40B4-BE49-F238E27FC236}">
+                <a16:creationId xmlns:a16="http://schemas.microsoft.com/office/drawing/2014/main" id="{7AFACF4A-BD98-A79D-280A-35C1F17AC7DD}"/>
+              </a:ext>
+              <a:ext uri="{C183D7F6-B498-43B3-948B-1728B52AA6E4}">
+                <adec:decorative xmlns:adec="http://schemas.microsoft.com/office/drawing/2017/decorative" val="1"/>
+              </a:ext>
+            </a:extLst>
+          </p:cNvPr>
+          <p:cNvCxnSpPr>
+            <a:cxnSpLocks noGrp="1" noRot="1" noChangeAspect="1" noMove="1" noResize="1" noEditPoints="1" noAdjustHandles="1" noChangeArrowheads="1" noChangeShapeType="1"/>
+          </p:cNvCxnSpPr>
+          <p:nvPr>
+            <p:extLst>
+              <p:ext uri="{386F3935-93C4-4BCD-93E2-E3B085C9AB24}">
+                <p16:designElem xmlns:p16="http://schemas.microsoft.com/office/powerpoint/2015/main" val="1"/>
+              </p:ext>
+            </p:extLst>
+          </p:nvPr>
+        </p:nvCxnSpPr>
+        <p:spPr>
+          <a:xfrm flipV="1">
+            <a:off x="7315200" y="1733549"/>
+            <a:ext cx="0" cy="3390901"/>
+          </a:xfrm>
+          <a:prstGeom prst="line">
+            <a:avLst/>
+          </a:prstGeom>
+          <a:ln w="44450">
+            <a:solidFill>
+              <a:schemeClr val="tx1"/>
+            </a:solidFill>
+          </a:ln>
+        </p:spPr>
+        <p:style>
+          <a:lnRef idx="1">
+            <a:schemeClr val="accent1"/>
+          </a:lnRef>
+          <a:fillRef idx="0">
+            <a:schemeClr val="accent1"/>
+          </a:fillRef>
+          <a:effectRef idx="0">
+            <a:schemeClr val="accent1"/>
+          </a:effectRef>
+          <a:fontRef idx="minor">
+            <a:schemeClr val="tx1"/>
+          </a:fontRef>
+        </p:style>
+      </p:cxnSp>
+    </p:spTree>
+    <p:extLst>
+      <p:ext uri="{BB962C8B-B14F-4D97-AF65-F5344CB8AC3E}">
+        <p14:creationId xmlns:p14="http://schemas.microsoft.com/office/powerpoint/2010/main" val="2393943690"/>
+      </p:ext>
+    </p:extLst>
+  </p:cSld>
+  <p:clrMapOvr>
+    <a:masterClrMapping/>
+  </p:clrMapOvr>
+</p:sld>
+</file>
+
+<file path=ppt/slides/slide19.xml><?xml version="1.0" encoding="utf-8"?>
+<p:sld xmlns:a="http://schemas.openxmlformats.org/drawingml/2006/main" xmlns:r="http://schemas.openxmlformats.org/officeDocument/2006/relationships" xmlns:p="http://schemas.openxmlformats.org/presentationml/2006/main">
+  <p:cSld>
     <p:spTree>
       <p:nvGrpSpPr>
         <p:cNvPr id="1" name=""/>
@@ -11327,7 +15152,7 @@
           <a:lstStyle/>
           <a:p>
             <a:r>
-              <a:rPr lang="fr-CA" dirty="0"/>
+              <a:rPr lang="fr-CA"/>
               <a:t>Méthode</a:t>
             </a:r>
           </a:p>
@@ -11360,7 +15185,7 @@
               </a:lnSpc>
             </a:pPr>
             <a:r>
-              <a:rPr lang="fr-CA" dirty="0"/>
+              <a:rPr lang="fr-CA"/>
               <a:t>33 stades → 3 :</a:t>
             </a:r>
           </a:p>
@@ -11371,7 +15196,7 @@
               </a:lnSpc>
             </a:pPr>
             <a:r>
-              <a:rPr lang="fr-CA" dirty="0"/>
+              <a:rPr lang="fr-CA"/>
               <a:t>Juvéniles (stades 1-3)</a:t>
             </a:r>
           </a:p>
@@ -11382,7 +15207,7 @@
               </a:lnSpc>
             </a:pPr>
             <a:r>
-              <a:rPr lang="fr-CA" dirty="0"/>
+              <a:rPr lang="fr-CA"/>
               <a:t>Pré adultes (4-12)</a:t>
             </a:r>
           </a:p>
@@ -11393,7 +15218,7 @@
               </a:lnSpc>
             </a:pPr>
             <a:r>
-              <a:rPr lang="fr-CA" dirty="0"/>
+              <a:rPr lang="fr-CA"/>
               <a:t>Adultes (13-32)</a:t>
             </a:r>
           </a:p>
@@ -11404,15 +15229,15 @@
               </a:lnSpc>
             </a:pPr>
             <a:r>
-              <a:rPr lang="fr-CA" dirty="0"/>
+              <a:rPr lang="fr-CA"/>
               <a:t>Utilisation de la méthode présentée dans </a:t>
             </a:r>
             <a:r>
-              <a:rPr lang="fr-CA" dirty="0" err="1"/>
+              <a:rPr lang="fr-CA" err="1"/>
               <a:t>Hinrichsen</a:t>
             </a:r>
             <a:r>
-              <a:rPr lang="fr-CA" dirty="0"/>
+              <a:rPr lang="fr-CA"/>
               <a:t> et al. (2026)</a:t>
             </a:r>
           </a:p>
@@ -11564,7 +15389,401 @@
 </p:sld>
 </file>
 
-<file path=ppt/slides/slide19.xml><?xml version="1.0" encoding="utf-8"?>
+<file path=ppt/slides/slide2.xml><?xml version="1.0" encoding="utf-8"?>
+<p:sld xmlns:a="http://schemas.openxmlformats.org/drawingml/2006/main" xmlns:r="http://schemas.openxmlformats.org/officeDocument/2006/relationships" xmlns:p="http://schemas.openxmlformats.org/presentationml/2006/main">
+  <p:cSld>
+    <p:bg>
+      <p:bgPr>
+        <a:solidFill>
+          <a:schemeClr val="bg1"/>
+        </a:solidFill>
+        <a:effectLst/>
+      </p:bgPr>
+    </p:bg>
+    <p:spTree>
+      <p:nvGrpSpPr>
+        <p:cNvPr id="1" name=""/>
+        <p:cNvGrpSpPr/>
+        <p:nvPr/>
+      </p:nvGrpSpPr>
+      <p:grpSpPr>
+        <a:xfrm>
+          <a:off x="0" y="0"/>
+          <a:ext cx="0" cy="0"/>
+          <a:chOff x="0" y="0"/>
+          <a:chExt cx="0" cy="0"/>
+        </a:xfrm>
+      </p:grpSpPr>
+      <p:cxnSp>
+        <p:nvCxnSpPr>
+          <p:cNvPr id="10" name="Straight Connector 9">
+            <a:extLst>
+              <a:ext uri="{FF2B5EF4-FFF2-40B4-BE49-F238E27FC236}">
+                <a16:creationId xmlns:a16="http://schemas.microsoft.com/office/drawing/2014/main" id="{F64F9B95-9045-48D2-B9F3-2927E98F54AA}"/>
+              </a:ext>
+              <a:ext uri="{C183D7F6-B498-43B3-948B-1728B52AA6E4}">
+                <adec:decorative xmlns:adec="http://schemas.microsoft.com/office/drawing/2017/decorative" val="1"/>
+              </a:ext>
+            </a:extLst>
+          </p:cNvPr>
+          <p:cNvCxnSpPr>
+            <a:cxnSpLocks noGrp="1" noRot="1" noChangeAspect="1" noMove="1" noResize="1" noEditPoints="1" noAdjustHandles="1" noChangeArrowheads="1" noChangeShapeType="1"/>
+          </p:cNvCxnSpPr>
+          <p:nvPr>
+            <p:extLst>
+              <p:ext uri="{386F3935-93C4-4BCD-93E2-E3B085C9AB24}">
+                <p16:designElem xmlns:p16="http://schemas.microsoft.com/office/powerpoint/2015/main" val="1"/>
+              </p:ext>
+            </p:extLst>
+          </p:nvPr>
+        </p:nvCxnSpPr>
+        <p:spPr>
+          <a:xfrm>
+            <a:off x="800100" y="723900"/>
+            <a:ext cx="10591800" cy="0"/>
+          </a:xfrm>
+          <a:prstGeom prst="line">
+            <a:avLst/>
+          </a:prstGeom>
+          <a:ln w="44450">
+            <a:solidFill>
+              <a:schemeClr val="tx1"/>
+            </a:solidFill>
+          </a:ln>
+        </p:spPr>
+        <p:style>
+          <a:lnRef idx="1">
+            <a:schemeClr val="accent1"/>
+          </a:lnRef>
+          <a:fillRef idx="0">
+            <a:schemeClr val="accent1"/>
+          </a:fillRef>
+          <a:effectRef idx="0">
+            <a:schemeClr val="accent1"/>
+          </a:effectRef>
+          <a:fontRef idx="minor">
+            <a:schemeClr val="tx1"/>
+          </a:fontRef>
+        </p:style>
+      </p:cxnSp>
+      <p:cxnSp>
+        <p:nvCxnSpPr>
+          <p:cNvPr id="12" name="Straight Connector 11">
+            <a:extLst>
+              <a:ext uri="{FF2B5EF4-FFF2-40B4-BE49-F238E27FC236}">
+                <a16:creationId xmlns:a16="http://schemas.microsoft.com/office/drawing/2014/main" id="{085AA86F-6A4D-4BCB-A045-D992CDC2959B}"/>
+              </a:ext>
+              <a:ext uri="{C183D7F6-B498-43B3-948B-1728B52AA6E4}">
+                <adec:decorative xmlns:adec="http://schemas.microsoft.com/office/drawing/2017/decorative" val="1"/>
+              </a:ext>
+            </a:extLst>
+          </p:cNvPr>
+          <p:cNvCxnSpPr>
+            <a:cxnSpLocks noGrp="1" noRot="1" noChangeAspect="1" noMove="1" noResize="1" noEditPoints="1" noAdjustHandles="1" noChangeArrowheads="1" noChangeShapeType="1"/>
+          </p:cNvCxnSpPr>
+          <p:nvPr>
+            <p:extLst>
+              <p:ext uri="{386F3935-93C4-4BCD-93E2-E3B085C9AB24}">
+                <p16:designElem xmlns:p16="http://schemas.microsoft.com/office/powerpoint/2015/main" val="1"/>
+              </p:ext>
+            </p:extLst>
+          </p:nvPr>
+        </p:nvCxnSpPr>
+        <p:spPr>
+          <a:xfrm>
+            <a:off x="800100" y="6142781"/>
+            <a:ext cx="10591800" cy="0"/>
+          </a:xfrm>
+          <a:prstGeom prst="line">
+            <a:avLst/>
+          </a:prstGeom>
+          <a:ln w="12700">
+            <a:solidFill>
+              <a:schemeClr val="tx1"/>
+            </a:solidFill>
+          </a:ln>
+        </p:spPr>
+        <p:style>
+          <a:lnRef idx="1">
+            <a:schemeClr val="accent1"/>
+          </a:lnRef>
+          <a:fillRef idx="0">
+            <a:schemeClr val="accent1"/>
+          </a:fillRef>
+          <a:effectRef idx="0">
+            <a:schemeClr val="accent1"/>
+          </a:effectRef>
+          <a:fontRef idx="minor">
+            <a:schemeClr val="tx1"/>
+          </a:fontRef>
+        </p:style>
+      </p:cxnSp>
+      <p:sp useBgFill="1">
+        <p:nvSpPr>
+          <p:cNvPr id="14" name="Rectangle 13">
+            <a:extLst>
+              <a:ext uri="{FF2B5EF4-FFF2-40B4-BE49-F238E27FC236}">
+                <a16:creationId xmlns:a16="http://schemas.microsoft.com/office/drawing/2014/main" id="{33E93247-6229-44AB-A550-739E971E690B}"/>
+              </a:ext>
+              <a:ext uri="{C183D7F6-B498-43B3-948B-1728B52AA6E4}">
+                <adec:decorative xmlns:adec="http://schemas.microsoft.com/office/drawing/2017/decorative" val="1"/>
+              </a:ext>
+            </a:extLst>
+          </p:cNvPr>
+          <p:cNvSpPr>
+            <a:spLocks noGrp="1" noRot="1" noChangeAspect="1" noMove="1" noResize="1" noEditPoints="1" noAdjustHandles="1" noChangeArrowheads="1" noChangeShapeType="1" noTextEdit="1"/>
+          </p:cNvSpPr>
+          <p:nvPr>
+            <p:extLst>
+              <p:ext uri="{386F3935-93C4-4BCD-93E2-E3B085C9AB24}">
+                <p16:designElem xmlns:p16="http://schemas.microsoft.com/office/powerpoint/2015/main" val="1"/>
+              </p:ext>
+            </p:extLst>
+          </p:nvPr>
+        </p:nvSpPr>
+        <p:spPr>
+          <a:xfrm>
+            <a:off x="0" y="0"/>
+            <a:ext cx="12192000" cy="6858000"/>
+          </a:xfrm>
+          <a:prstGeom prst="rect">
+            <a:avLst/>
+          </a:prstGeom>
+          <a:ln w="12700" cap="flat" cmpd="sng" algn="ctr">
+            <a:noFill/>
+            <a:prstDash val="solid"/>
+            <a:miter lim="800000"/>
+          </a:ln>
+          <a:effectLst/>
+          <a:extLst>
+            <a:ext uri="{91240B29-F687-4F45-9708-019B960494DF}">
+              <a14:hiddenLine xmlns:a14="http://schemas.microsoft.com/office/drawing/2010/main" w="12700" cap="flat" cmpd="sng" algn="ctr">
+                <a:solidFill>
+                  <a:schemeClr val="accent1">
+                    <a:shade val="50000"/>
+                  </a:schemeClr>
+                </a:solidFill>
+                <a:prstDash val="solid"/>
+                <a:miter lim="800000"/>
+              </a14:hiddenLine>
+            </a:ext>
+          </a:extLst>
+        </p:spPr>
+        <p:style>
+          <a:lnRef idx="2">
+            <a:schemeClr val="accent1">
+              <a:shade val="50000"/>
+            </a:schemeClr>
+          </a:lnRef>
+          <a:fillRef idx="1">
+            <a:schemeClr val="accent1"/>
+          </a:fillRef>
+          <a:effectRef idx="0">
+            <a:schemeClr val="accent1"/>
+          </a:effectRef>
+          <a:fontRef idx="minor">
+            <a:schemeClr val="lt1"/>
+          </a:fontRef>
+        </p:style>
+        <p:txBody>
+          <a:bodyPr rtlCol="0" anchor="ctr"/>
+          <a:lstStyle/>
+          <a:p>
+            <a:pPr algn="ctr"/>
+            <a:endParaRPr lang="en-US"/>
+          </a:p>
+        </p:txBody>
+      </p:sp>
+      <p:sp>
+        <p:nvSpPr>
+          <p:cNvPr id="2" name="Titre 1">
+            <a:extLst>
+              <a:ext uri="{FF2B5EF4-FFF2-40B4-BE49-F238E27FC236}">
+                <a16:creationId xmlns:a16="http://schemas.microsoft.com/office/drawing/2014/main" id="{3966A9B0-B00E-6660-A54E-CFEC48403854}"/>
+              </a:ext>
+            </a:extLst>
+          </p:cNvPr>
+          <p:cNvSpPr>
+            <a:spLocks noGrp="1"/>
+          </p:cNvSpPr>
+          <p:nvPr>
+            <p:ph type="title"/>
+          </p:nvPr>
+        </p:nvSpPr>
+        <p:spPr>
+          <a:xfrm>
+            <a:off x="685800" y="899024"/>
+            <a:ext cx="3076032" cy="3914947"/>
+          </a:xfrm>
+        </p:spPr>
+        <p:txBody>
+          <a:bodyPr vert="horz" lIns="91440" tIns="45720" rIns="91440" bIns="45720" rtlCol="0" anchor="t">
+            <a:normAutofit/>
+          </a:bodyPr>
+          <a:lstStyle/>
+          <a:p>
+            <a:r>
+              <a:rPr lang="en-US" sz="3100"/>
+              <a:t>Distribution géographique</a:t>
+            </a:r>
+          </a:p>
+        </p:txBody>
+      </p:sp>
+      <p:cxnSp>
+        <p:nvCxnSpPr>
+          <p:cNvPr id="16" name="Straight Connector 15">
+            <a:extLst>
+              <a:ext uri="{FF2B5EF4-FFF2-40B4-BE49-F238E27FC236}">
+                <a16:creationId xmlns:a16="http://schemas.microsoft.com/office/drawing/2014/main" id="{EE2E603F-4A95-4FE8-BB06-211DFD75DBEF}"/>
+              </a:ext>
+              <a:ext uri="{C183D7F6-B498-43B3-948B-1728B52AA6E4}">
+                <adec:decorative xmlns:adec="http://schemas.microsoft.com/office/drawing/2017/decorative" val="1"/>
+              </a:ext>
+            </a:extLst>
+          </p:cNvPr>
+          <p:cNvCxnSpPr>
+            <a:cxnSpLocks noGrp="1" noRot="1" noChangeAspect="1" noMove="1" noResize="1" noEditPoints="1" noAdjustHandles="1" noChangeArrowheads="1" noChangeShapeType="1"/>
+          </p:cNvCxnSpPr>
+          <p:nvPr>
+            <p:extLst>
+              <p:ext uri="{386F3935-93C4-4BCD-93E2-E3B085C9AB24}">
+                <p16:designElem xmlns:p16="http://schemas.microsoft.com/office/powerpoint/2015/main" val="1"/>
+              </p:ext>
+            </p:extLst>
+          </p:nvPr>
+        </p:nvCxnSpPr>
+        <p:spPr>
+          <a:xfrm>
+            <a:off x="800100" y="723900"/>
+            <a:ext cx="1371600" cy="0"/>
+          </a:xfrm>
+          <a:prstGeom prst="line">
+            <a:avLst/>
+          </a:prstGeom>
+          <a:ln w="44450">
+            <a:solidFill>
+              <a:schemeClr val="tx1"/>
+            </a:solidFill>
+          </a:ln>
+        </p:spPr>
+        <p:style>
+          <a:lnRef idx="1">
+            <a:schemeClr val="accent1"/>
+          </a:lnRef>
+          <a:fillRef idx="0">
+            <a:schemeClr val="accent1"/>
+          </a:fillRef>
+          <a:effectRef idx="0">
+            <a:schemeClr val="accent1"/>
+          </a:effectRef>
+          <a:fontRef idx="minor">
+            <a:schemeClr val="tx1"/>
+          </a:fontRef>
+        </p:style>
+      </p:cxnSp>
+      <p:pic>
+        <p:nvPicPr>
+          <p:cNvPr id="5" name="Image 4">
+            <a:extLst>
+              <a:ext uri="{FF2B5EF4-FFF2-40B4-BE49-F238E27FC236}">
+                <a16:creationId xmlns:a16="http://schemas.microsoft.com/office/drawing/2014/main" id="{65DA162E-E9CE-5AEB-BBA2-D5769AD0C527}"/>
+              </a:ext>
+            </a:extLst>
+          </p:cNvPr>
+          <p:cNvPicPr>
+            <a:picLocks noChangeAspect="1"/>
+          </p:cNvPicPr>
+          <p:nvPr/>
+        </p:nvPicPr>
+        <p:blipFill>
+          <a:blip r:embed="rId2"/>
+          <a:stretch>
+            <a:fillRect/>
+          </a:stretch>
+        </p:blipFill>
+        <p:spPr>
+          <a:xfrm>
+            <a:off x="4120432" y="723901"/>
+            <a:ext cx="7189635" cy="5410200"/>
+          </a:xfrm>
+          <a:prstGeom prst="rect">
+            <a:avLst/>
+          </a:prstGeom>
+        </p:spPr>
+      </p:pic>
+      <p:sp>
+        <p:nvSpPr>
+          <p:cNvPr id="6" name="ZoneTexte 5">
+            <a:extLst>
+              <a:ext uri="{FF2B5EF4-FFF2-40B4-BE49-F238E27FC236}">
+                <a16:creationId xmlns:a16="http://schemas.microsoft.com/office/drawing/2014/main" id="{124E7EEB-9B05-0948-3014-4C918A1E1AF7}"/>
+              </a:ext>
+            </a:extLst>
+          </p:cNvPr>
+          <p:cNvSpPr txBox="1"/>
+          <p:nvPr/>
+        </p:nvSpPr>
+        <p:spPr>
+          <a:xfrm>
+            <a:off x="4086225" y="6142781"/>
+            <a:ext cx="7305675" cy="461665"/>
+          </a:xfrm>
+          <a:prstGeom prst="rect">
+            <a:avLst/>
+          </a:prstGeom>
+          <a:noFill/>
+        </p:spPr>
+        <p:txBody>
+          <a:bodyPr wrap="square" rtlCol="0">
+            <a:spAutoFit/>
+          </a:bodyPr>
+          <a:lstStyle/>
+          <a:p>
+            <a:r>
+              <a:rPr lang="fr-CA" sz="1200"/>
+              <a:t>Figure 1 : Distribution courante et historique du chevalier cuivré (</a:t>
+            </a:r>
+            <a:r>
+              <a:rPr lang="fr-CA" sz="1200" i="1" err="1"/>
+              <a:t>Moxostoma</a:t>
+            </a:r>
+            <a:r>
+              <a:rPr lang="fr-CA" sz="1200" i="1"/>
+              <a:t> </a:t>
+            </a:r>
+            <a:r>
+              <a:rPr lang="fr-CA" sz="1200" i="1" err="1"/>
+              <a:t>hubbsi</a:t>
+            </a:r>
+            <a:r>
+              <a:rPr lang="fr-CA" sz="1200"/>
+              <a:t>) au Québec, Canada ; tiré de </a:t>
+            </a:r>
+            <a:r>
+              <a:rPr lang="fr-CA" sz="1200" err="1"/>
+              <a:t>Bannester</a:t>
+            </a:r>
+            <a:r>
+              <a:rPr lang="fr-CA" sz="1200"/>
+              <a:t>-Marchand et al. (2025). </a:t>
+            </a:r>
+          </a:p>
+        </p:txBody>
+      </p:sp>
+    </p:spTree>
+    <p:extLst>
+      <p:ext uri="{BB962C8B-B14F-4D97-AF65-F5344CB8AC3E}">
+        <p14:creationId xmlns:p14="http://schemas.microsoft.com/office/powerpoint/2010/main" val="1391683424"/>
+      </p:ext>
+    </p:extLst>
+  </p:cSld>
+  <p:clrMapOvr>
+    <a:masterClrMapping/>
+  </p:clrMapOvr>
+</p:sld>
+</file>
+
+<file path=ppt/slides/slide20.xml><?xml version="1.0" encoding="utf-8"?>
 <p:sld xmlns:a="http://schemas.openxmlformats.org/drawingml/2006/main" xmlns:r="http://schemas.openxmlformats.org/officeDocument/2006/relationships" xmlns:p="http://schemas.openxmlformats.org/presentationml/2006/main">
   <p:cSld>
     <p:spTree>
@@ -11603,7 +15822,7 @@
           <a:lstStyle/>
           <a:p>
             <a:r>
-              <a:rPr lang="fr-CA" dirty="0"/>
+              <a:rPr lang="fr-CA"/>
               <a:t>Matrices</a:t>
             </a:r>
           </a:p>
@@ -11636,10 +15855,10 @@
               </a:lnSpc>
             </a:pPr>
             <a:r>
-              <a:rPr lang="el-GR" dirty="0"/>
+              <a:rPr lang="el-GR"/>
               <a:t>λ</a:t>
             </a:r>
-            <a:endParaRPr lang="fr-CA" dirty="0"/>
+            <a:endParaRPr lang="fr-CA"/>
           </a:p>
           <a:p>
             <a:pPr lvl="1">
@@ -11648,7 +15867,7 @@
               </a:lnSpc>
             </a:pPr>
             <a:r>
-              <a:rPr lang="fr-CA" dirty="0"/>
+              <a:rPr lang="fr-CA"/>
               <a:t>Mesurée 0,957 → 0,953</a:t>
             </a:r>
           </a:p>
@@ -11659,7 +15878,7 @@
               </a:lnSpc>
             </a:pPr>
             <a:r>
-              <a:rPr lang="fr-CA" dirty="0"/>
+              <a:rPr lang="fr-CA"/>
               <a:t>Menacée 0,984 → 0,985</a:t>
             </a:r>
           </a:p>
@@ -11670,7 +15889,7 @@
               </a:lnSpc>
             </a:pPr>
             <a:r>
-              <a:rPr lang="fr-CA" dirty="0"/>
+              <a:rPr lang="fr-CA"/>
               <a:t>Nulle 1,002 → 1,003</a:t>
             </a:r>
           </a:p>
@@ -11680,7 +15899,7 @@
                 <a:spcPct val="200000"/>
               </a:lnSpc>
             </a:pPr>
-            <a:endParaRPr lang="fr-CA" dirty="0"/>
+            <a:endParaRPr lang="fr-CA"/>
           </a:p>
         </p:txBody>
       </p:sp>
@@ -11733,27 +15952,27 @@
             <a:lstStyle/>
             <a:p>
               <a:r>
-                <a:rPr lang="fr-CA" dirty="0"/>
+                <a:rPr lang="fr-CA"/>
                 <a:t>0			0		34157</a:t>
               </a:r>
             </a:p>
             <a:p>
               <a:r>
-                <a:rPr lang="fr-CA" dirty="0"/>
+                <a:rPr lang="fr-CA"/>
                 <a:t>1,21*10</a:t>
               </a:r>
               <a:r>
-                <a:rPr lang="fr-CA" baseline="30000" dirty="0"/>
+                <a:rPr lang="fr-CA" baseline="30000"/>
                 <a:t>-5</a:t>
               </a:r>
               <a:r>
-                <a:rPr lang="fr-CA" dirty="0"/>
+                <a:rPr lang="fr-CA"/>
                 <a:t>		0,725	0</a:t>
               </a:r>
             </a:p>
             <a:p>
               <a:r>
-                <a:rPr lang="fr-CA" dirty="0"/>
+                <a:rPr lang="fr-CA"/>
                 <a:t>0			0,050	0,905</a:t>
               </a:r>
             </a:p>
@@ -11788,7 +16007,7 @@
             <a:lstStyle/>
             <a:p>
               <a:r>
-                <a:rPr lang="fr-CA" dirty="0"/>
+                <a:rPr lang="fr-CA"/>
                 <a:t>Mesurée =</a:t>
               </a:r>
             </a:p>
@@ -11852,7 +16071,158 @@
 </p:sld>
 </file>
 
-<file path=ppt/slides/slide2.xml><?xml version="1.0" encoding="utf-8"?>
+<file path=ppt/slides/slide21.xml><?xml version="1.0" encoding="utf-8"?>
+<p:sld xmlns:a="http://schemas.openxmlformats.org/drawingml/2006/main" xmlns:r="http://schemas.openxmlformats.org/officeDocument/2006/relationships" xmlns:p="http://schemas.openxmlformats.org/presentationml/2006/main">
+  <p:cSld>
+    <p:spTree>
+      <p:nvGrpSpPr>
+        <p:cNvPr id="1" name=""/>
+        <p:cNvGrpSpPr/>
+        <p:nvPr/>
+      </p:nvGrpSpPr>
+      <p:grpSpPr>
+        <a:xfrm>
+          <a:off x="0" y="0"/>
+          <a:ext cx="0" cy="0"/>
+          <a:chOff x="0" y="0"/>
+          <a:chExt cx="0" cy="0"/>
+        </a:xfrm>
+      </p:grpSpPr>
+      <p:sp>
+        <p:nvSpPr>
+          <p:cNvPr id="2" name="Titre 1">
+            <a:extLst>
+              <a:ext uri="{FF2B5EF4-FFF2-40B4-BE49-F238E27FC236}">
+                <a16:creationId xmlns:a16="http://schemas.microsoft.com/office/drawing/2014/main" id="{DE69A1AE-572E-D5B4-03BD-F325D0A3E202}"/>
+              </a:ext>
+            </a:extLst>
+          </p:cNvPr>
+          <p:cNvSpPr>
+            <a:spLocks noGrp="1"/>
+          </p:cNvSpPr>
+          <p:nvPr>
+            <p:ph type="title"/>
+          </p:nvPr>
+        </p:nvSpPr>
+        <p:spPr/>
+        <p:txBody>
+          <a:bodyPr numCol="2"/>
+          <a:lstStyle/>
+          <a:p>
+            <a:r>
+              <a:rPr lang="fr-CA"/>
+              <a:t>Avantages</a:t>
+            </a:r>
+            <a:br>
+              <a:rPr lang="fr-CA"/>
+            </a:br>
+            <a:r>
+              <a:rPr lang="fr-CA"/>
+              <a:t>Désavantages	</a:t>
+            </a:r>
+          </a:p>
+        </p:txBody>
+      </p:sp>
+      <p:sp>
+        <p:nvSpPr>
+          <p:cNvPr id="3" name="Espace réservé du contenu 2">
+            <a:extLst>
+              <a:ext uri="{FF2B5EF4-FFF2-40B4-BE49-F238E27FC236}">
+                <a16:creationId xmlns:a16="http://schemas.microsoft.com/office/drawing/2014/main" id="{FC01AAB4-81AB-D42D-04AB-96781CB6AC94}"/>
+              </a:ext>
+            </a:extLst>
+          </p:cNvPr>
+          <p:cNvSpPr>
+            <a:spLocks noGrp="1"/>
+          </p:cNvSpPr>
+          <p:nvPr>
+            <p:ph idx="1"/>
+          </p:nvPr>
+        </p:nvSpPr>
+        <p:spPr/>
+        <p:txBody>
+          <a:bodyPr numCol="2"/>
+          <a:lstStyle/>
+          <a:p>
+            <a:pPr>
+              <a:lnSpc>
+                <a:spcPct val="200000"/>
+              </a:lnSpc>
+            </a:pPr>
+            <a:r>
+              <a:rPr lang="fr-CA"/>
+              <a:t>Modification du calcul de la fécondité</a:t>
+            </a:r>
+          </a:p>
+          <a:p>
+            <a:pPr>
+              <a:lnSpc>
+                <a:spcPct val="200000"/>
+              </a:lnSpc>
+            </a:pPr>
+            <a:r>
+              <a:rPr lang="fr-CA"/>
+              <a:t>Possibilité d’individus plus âgés que 30</a:t>
+            </a:r>
+          </a:p>
+          <a:p>
+            <a:pPr>
+              <a:lnSpc>
+                <a:spcPct val="200000"/>
+              </a:lnSpc>
+            </a:pPr>
+            <a:r>
+              <a:rPr lang="fr-CA"/>
+              <a:t>Simplification</a:t>
+            </a:r>
+          </a:p>
+          <a:p>
+            <a:pPr>
+              <a:lnSpc>
+                <a:spcPct val="200000"/>
+              </a:lnSpc>
+            </a:pPr>
+            <a:r>
+              <a:rPr lang="fr-CA"/>
+              <a:t>Diminution des incertitudes</a:t>
+            </a:r>
+          </a:p>
+          <a:p>
+            <a:pPr marL="0" indent="0">
+              <a:lnSpc>
+                <a:spcPct val="200000"/>
+              </a:lnSpc>
+              <a:buNone/>
+            </a:pPr>
+            <a:endParaRPr lang="fr-CA"/>
+          </a:p>
+          <a:p>
+            <a:pPr>
+              <a:lnSpc>
+                <a:spcPct val="200000"/>
+              </a:lnSpc>
+            </a:pPr>
+            <a:r>
+              <a:rPr lang="fr-CA"/>
+              <a:t>Perte d’information</a:t>
+            </a:r>
+          </a:p>
+        </p:txBody>
+      </p:sp>
+    </p:spTree>
+    <p:extLst>
+      <p:ext uri="{BB962C8B-B14F-4D97-AF65-F5344CB8AC3E}">
+        <p14:creationId xmlns:p14="http://schemas.microsoft.com/office/powerpoint/2010/main" val="1164678962"/>
+      </p:ext>
+    </p:extLst>
+  </p:cSld>
+  <p:clrMapOvr>
+    <a:masterClrMapping/>
+  </p:clrMapOvr>
+</p:sld>
+</file>
+
+<file path=ppt/slides/slide22.xml><?xml version="1.0" encoding="utf-8"?>
 <p:sld xmlns:a="http://schemas.openxmlformats.org/drawingml/2006/main" xmlns:r="http://schemas.openxmlformats.org/officeDocument/2006/relationships" xmlns:p="http://schemas.openxmlformats.org/presentationml/2006/main">
   <p:cSld>
     <p:bg>
@@ -12062,7 +16432,7 @@
           <p:cNvPr id="2" name="Titre 1">
             <a:extLst>
               <a:ext uri="{FF2B5EF4-FFF2-40B4-BE49-F238E27FC236}">
-                <a16:creationId xmlns:a16="http://schemas.microsoft.com/office/drawing/2014/main" id="{3966A9B0-B00E-6660-A54E-CFEC48403854}"/>
+                <a16:creationId xmlns:a16="http://schemas.microsoft.com/office/drawing/2014/main" id="{94F7A99C-0ACF-5557-9578-B80FE0D75B77}"/>
               </a:ext>
             </a:extLst>
           </p:cNvPr>
@@ -12086,8 +16456,8 @@
           <a:lstStyle/>
           <a:p>
             <a:r>
-              <a:rPr lang="en-US" sz="3100"/>
-              <a:t>Distribution géographique</a:t>
+              <a:rPr lang="en-US"/>
+              <a:t>Résultats</a:t>
             </a:r>
           </a:p>
         </p:txBody>
@@ -12146,10 +16516,48 @@
       </p:cxnSp>
       <p:pic>
         <p:nvPicPr>
-          <p:cNvPr id="5" name="Image 4">
+          <p:cNvPr id="5" name="Espace réservé du contenu 4">
             <a:extLst>
               <a:ext uri="{FF2B5EF4-FFF2-40B4-BE49-F238E27FC236}">
-                <a16:creationId xmlns:a16="http://schemas.microsoft.com/office/drawing/2014/main" id="{65DA162E-E9CE-5AEB-BBA2-D5769AD0C527}"/>
+                <a16:creationId xmlns:a16="http://schemas.microsoft.com/office/drawing/2014/main" id="{DEB15709-306B-BF61-202F-0B24322B33AC}"/>
+              </a:ext>
+            </a:extLst>
+          </p:cNvPr>
+          <p:cNvPicPr>
+            <a:picLocks noGrp="1" noChangeAspect="1"/>
+          </p:cNvPicPr>
+          <p:nvPr>
+            <p:ph idx="1"/>
+          </p:nvPr>
+        </p:nvPicPr>
+        <p:blipFill>
+          <a:blip r:embed="rId2">
+            <a:extLst>
+              <a:ext uri="{28A0092B-C50C-407E-A947-70E740481C1C}">
+                <a14:useLocalDpi xmlns:a14="http://schemas.microsoft.com/office/drawing/2010/main" val="0"/>
+              </a:ext>
+            </a:extLst>
+          </a:blip>
+          <a:stretch>
+            <a:fillRect/>
+          </a:stretch>
+        </p:blipFill>
+        <p:spPr>
+          <a:xfrm>
+            <a:off x="8704728" y="1071283"/>
+            <a:ext cx="2705100" cy="5410200"/>
+          </a:xfrm>
+          <a:prstGeom prst="rect">
+            <a:avLst/>
+          </a:prstGeom>
+        </p:spPr>
+      </p:pic>
+      <p:pic>
+        <p:nvPicPr>
+          <p:cNvPr id="4" name="Image 3">
+            <a:extLst>
+              <a:ext uri="{FF2B5EF4-FFF2-40B4-BE49-F238E27FC236}">
+                <a16:creationId xmlns:a16="http://schemas.microsoft.com/office/drawing/2014/main" id="{CE13E1AA-574C-9647-8090-2359241D2563}"/>
               </a:ext>
             </a:extLst>
           </p:cNvPr>
@@ -12159,15 +16567,21 @@
           <p:nvPr/>
         </p:nvPicPr>
         <p:blipFill>
-          <a:blip r:embed="rId2"/>
+          <a:blip r:embed="rId3">
+            <a:extLst>
+              <a:ext uri="{28A0092B-C50C-407E-A947-70E740481C1C}">
+                <a14:useLocalDpi xmlns:a14="http://schemas.microsoft.com/office/drawing/2010/main" val="0"/>
+              </a:ext>
+            </a:extLst>
+          </a:blip>
           <a:stretch>
             <a:fillRect/>
           </a:stretch>
         </p:blipFill>
         <p:spPr>
           <a:xfrm>
-            <a:off x="4120432" y="723901"/>
-            <a:ext cx="7189635" cy="5410200"/>
+            <a:off x="5428942" y="1133079"/>
+            <a:ext cx="2993167" cy="5426842"/>
           </a:xfrm>
           <a:prstGeom prst="rect">
             <a:avLst/>
@@ -12176,10 +16590,10 @@
       </p:pic>
       <p:sp>
         <p:nvSpPr>
-          <p:cNvPr id="6" name="ZoneTexte 5">
+          <p:cNvPr id="7" name="ZoneTexte 6">
             <a:extLst>
               <a:ext uri="{FF2B5EF4-FFF2-40B4-BE49-F238E27FC236}">
-                <a16:creationId xmlns:a16="http://schemas.microsoft.com/office/drawing/2014/main" id="{124E7EEB-9B05-0948-3014-4C918A1E1AF7}"/>
+                <a16:creationId xmlns:a16="http://schemas.microsoft.com/office/drawing/2014/main" id="{0CFDC0D7-A429-9AC3-FCDF-757E320C4F4F}"/>
               </a:ext>
             </a:extLst>
           </p:cNvPr>
@@ -12188,8 +16602,8 @@
         </p:nvSpPr>
         <p:spPr>
           <a:xfrm>
-            <a:off x="4086225" y="6142781"/>
-            <a:ext cx="7305675" cy="461665"/>
+            <a:off x="800100" y="1902786"/>
+            <a:ext cx="3677381" cy="3293209"/>
           </a:xfrm>
           <a:prstGeom prst="rect">
             <a:avLst/>
@@ -12197,38 +16611,71 @@
           <a:noFill/>
         </p:spPr>
         <p:txBody>
-          <a:bodyPr wrap="square" rtlCol="0">
+          <a:bodyPr wrap="square" lIns="91440" tIns="45720" rIns="91440" bIns="45720" rtlCol="0" anchor="t">
             <a:spAutoFit/>
           </a:bodyPr>
           <a:lstStyle/>
           <a:p>
-            <a:r>
-              <a:rPr lang="fr-CA" sz="1200" dirty="0"/>
-              <a:t>Figure 1 : Distribution courante et historique du chevalier cuivré (</a:t>
-            </a:r>
-            <a:r>
-              <a:rPr lang="fr-CA" sz="1200" i="1" dirty="0" err="1"/>
-              <a:t>Moxostoma</a:t>
-            </a:r>
-            <a:r>
-              <a:rPr lang="fr-CA" sz="1200" i="1" dirty="0"/>
-              <a:t> </a:t>
-            </a:r>
-            <a:r>
-              <a:rPr lang="fr-CA" sz="1200" i="1" dirty="0" err="1"/>
-              <a:t>hubbsi</a:t>
-            </a:r>
-            <a:r>
-              <a:rPr lang="fr-CA" sz="1200" dirty="0"/>
-              <a:t>) au Québec, Canada ; tiré de </a:t>
-            </a:r>
-            <a:r>
-              <a:rPr lang="fr-CA" sz="1200" dirty="0" err="1"/>
-              <a:t>Bannester</a:t>
-            </a:r>
-            <a:r>
-              <a:rPr lang="fr-CA" sz="1200" dirty="0"/>
-              <a:t>-Marchand et al. (2025). </a:t>
+            <a:pPr algn="just"/>
+            <a:r>
+              <a:rPr lang="fr-CA" sz="1600" noProof="0"/>
+              <a:t>Figure </a:t>
+            </a:r>
+            <a:r>
+              <a:rPr lang="fr-CA" sz="1600"/>
+              <a:t>7 </a:t>
+            </a:r>
+            <a:r>
+              <a:rPr lang="fr-CA" sz="1600" noProof="0"/>
+              <a:t>:</a:t>
+            </a:r>
+            <a:r>
+              <a:rPr lang="fr-CA" sz="1600"/>
+              <a:t> </a:t>
+            </a:r>
+            <a:r>
+              <a:rPr lang="fr-CA" sz="1600" noProof="0"/>
+              <a:t>À gauche, résultats </a:t>
+            </a:r>
+            <a:r>
+              <a:rPr lang="fr-CA" sz="1600"/>
+              <a:t>obtenus à l'aide </a:t>
+            </a:r>
+            <a:r>
+              <a:rPr lang="fr-CA" sz="1600" noProof="0"/>
+              <a:t>de </a:t>
+            </a:r>
+            <a:r>
+              <a:rPr lang="fr-CA" sz="1600"/>
+              <a:t>la matrice à 33 stades, </a:t>
+            </a:r>
+            <a:r>
+              <a:rPr lang="fr-CA" sz="1600" noProof="0"/>
+              <a:t>à droite, résultats </a:t>
+            </a:r>
+            <a:r>
+              <a:rPr lang="fr-CA" sz="1600"/>
+              <a:t>obtenus à l’aide </a:t>
+            </a:r>
+            <a:r>
+              <a:rPr lang="fr-CA" sz="1600" noProof="0"/>
+              <a:t>de </a:t>
+            </a:r>
+            <a:r>
+              <a:rPr lang="fr-CA" sz="1600"/>
+              <a:t>la matrice mesurée à 3 stades</a:t>
+            </a:r>
+            <a:r>
+              <a:rPr lang="fr-CA" sz="1600" noProof="0"/>
+              <a:t>.</a:t>
+            </a:r>
+            <a:r>
+              <a:rPr lang="fr-CA" sz="1600"/>
+              <a:t> </a:t>
+            </a:r>
+            <a:r>
+              <a:rPr lang="fr-CA" sz="1600" noProof="0"/>
+              <a:t>Est représenté : Abondance médiane de chevaliers cuivrés, basées sur 5000 itérations stochastiques pour les scénarios (a) nulle, (b) menace, (c) mesurée de notre modèle dynamique. Les enveloppes colorées représentent les intervalles de confiance à 95% ; les lignes pleines les abondances médianes d’individus matures</a:t>
             </a:r>
           </a:p>
         </p:txBody>
@@ -12236,7 +16683,7 @@
     </p:spTree>
     <p:extLst>
       <p:ext uri="{BB962C8B-B14F-4D97-AF65-F5344CB8AC3E}">
-        <p14:creationId xmlns:p14="http://schemas.microsoft.com/office/powerpoint/2010/main" val="1391683424"/>
+        <p14:creationId xmlns:p14="http://schemas.microsoft.com/office/powerpoint/2010/main" val="1439899674"/>
       </p:ext>
     </p:extLst>
   </p:cSld>
@@ -12246,7 +16693,351 @@
 </p:sld>
 </file>
 
-<file path=ppt/slides/slide20.xml><?xml version="1.0" encoding="utf-8"?>
+<file path=ppt/slides/slide23.xml><?xml version="1.0" encoding="utf-8"?>
+<p:sld xmlns:a="http://schemas.openxmlformats.org/drawingml/2006/main" xmlns:r="http://schemas.openxmlformats.org/officeDocument/2006/relationships" xmlns:p="http://schemas.openxmlformats.org/presentationml/2006/main">
+  <p:cSld>
+    <p:spTree>
+      <p:nvGrpSpPr>
+        <p:cNvPr id="1" name=""/>
+        <p:cNvGrpSpPr/>
+        <p:nvPr/>
+      </p:nvGrpSpPr>
+      <p:grpSpPr>
+        <a:xfrm>
+          <a:off x="0" y="0"/>
+          <a:ext cx="0" cy="0"/>
+          <a:chOff x="0" y="0"/>
+          <a:chExt cx="0" cy="0"/>
+        </a:xfrm>
+      </p:grpSpPr>
+      <p:pic>
+        <p:nvPicPr>
+          <p:cNvPr id="9" name="Image 8">
+            <a:extLst>
+              <a:ext uri="{FF2B5EF4-FFF2-40B4-BE49-F238E27FC236}">
+                <a16:creationId xmlns:a16="http://schemas.microsoft.com/office/drawing/2014/main" id="{CE99E6EA-6C50-A9AF-63F6-B30BF2E36593}"/>
+              </a:ext>
+            </a:extLst>
+          </p:cNvPr>
+          <p:cNvPicPr>
+            <a:picLocks noChangeAspect="1"/>
+          </p:cNvPicPr>
+          <p:nvPr/>
+        </p:nvPicPr>
+        <p:blipFill>
+          <a:blip r:embed="rId2">
+            <a:extLst>
+              <a:ext uri="{28A0092B-C50C-407E-A947-70E740481C1C}">
+                <a14:useLocalDpi xmlns:a14="http://schemas.microsoft.com/office/drawing/2010/main" val="0"/>
+              </a:ext>
+            </a:extLst>
+          </a:blip>
+          <a:stretch>
+            <a:fillRect/>
+          </a:stretch>
+        </p:blipFill>
+        <p:spPr>
+          <a:xfrm>
+            <a:off x="6096661" y="818024"/>
+            <a:ext cx="5038176" cy="4134980"/>
+          </a:xfrm>
+          <a:prstGeom prst="rect">
+            <a:avLst/>
+          </a:prstGeom>
+        </p:spPr>
+      </p:pic>
+      <p:sp>
+        <p:nvSpPr>
+          <p:cNvPr id="10" name="ZoneTexte 9">
+            <a:extLst>
+              <a:ext uri="{FF2B5EF4-FFF2-40B4-BE49-F238E27FC236}">
+                <a16:creationId xmlns:a16="http://schemas.microsoft.com/office/drawing/2014/main" id="{AFB3B927-A1C8-2A1B-8DE6-E6D0DA677662}"/>
+              </a:ext>
+            </a:extLst>
+          </p:cNvPr>
+          <p:cNvSpPr txBox="1"/>
+          <p:nvPr/>
+        </p:nvSpPr>
+        <p:spPr>
+          <a:xfrm>
+            <a:off x="1295400" y="4936931"/>
+            <a:ext cx="9601200" cy="1077218"/>
+          </a:xfrm>
+          <a:prstGeom prst="rect">
+            <a:avLst/>
+          </a:prstGeom>
+          <a:noFill/>
+        </p:spPr>
+        <p:txBody>
+          <a:bodyPr wrap="square" lIns="91440" tIns="45720" rIns="91440" bIns="45720" rtlCol="0" anchor="t">
+            <a:spAutoFit/>
+          </a:bodyPr>
+          <a:lstStyle/>
+          <a:p>
+            <a:pPr algn="just"/>
+            <a:r>
+              <a:rPr lang="fr-CA" sz="1600" noProof="0"/>
+              <a:t>Figure </a:t>
+            </a:r>
+            <a:r>
+              <a:rPr lang="fr-CA" sz="1600"/>
+              <a:t>8 </a:t>
+            </a:r>
+            <a:r>
+              <a:rPr lang="fr-CA" sz="1600" noProof="0"/>
+              <a:t>: À gauche, résultats </a:t>
+            </a:r>
+            <a:r>
+              <a:rPr lang="fr-CA" sz="1600"/>
+              <a:t>obtenus à l'aide de la matrice à 33 stades, </a:t>
+            </a:r>
+            <a:r>
+              <a:rPr lang="fr-CA" sz="1600" noProof="0"/>
+              <a:t>à droite, résultats </a:t>
+            </a:r>
+            <a:r>
+              <a:rPr lang="fr-CA" sz="1600"/>
+              <a:t>obtenus à l’aide </a:t>
+            </a:r>
+            <a:r>
+              <a:rPr lang="fr-CA" sz="1600" noProof="0"/>
+              <a:t>de </a:t>
+            </a:r>
+            <a:r>
+              <a:rPr lang="fr-CA" sz="1600"/>
+              <a:t>la matrice mesurée à 3 stades. </a:t>
+            </a:r>
+            <a:r>
+              <a:rPr lang="fr-CA" sz="1600" noProof="0"/>
+              <a:t>Est représenté : Les probabilités que les chevaliers cuivrés tombent sous un seuil de population dans les prochaines 100 ans, basé sur nos scénarios dynamique stochastiques de population. Lignes : médiane de 5000 itérations; enveloppes colorées : 70% </a:t>
+            </a:r>
+            <a:r>
+              <a:rPr lang="fr-CA" sz="1600" noProof="0" err="1"/>
+              <a:t>ICs</a:t>
+            </a:r>
+            <a:endParaRPr lang="fr-CA" sz="1600" noProof="0"/>
+          </a:p>
+        </p:txBody>
+      </p:sp>
+      <p:pic>
+        <p:nvPicPr>
+          <p:cNvPr id="14" name="Image 13">
+            <a:extLst>
+              <a:ext uri="{FF2B5EF4-FFF2-40B4-BE49-F238E27FC236}">
+                <a16:creationId xmlns:a16="http://schemas.microsoft.com/office/drawing/2014/main" id="{8452DDBC-4E2F-4D55-51AA-89FCE11E2F02}"/>
+              </a:ext>
+            </a:extLst>
+          </p:cNvPr>
+          <p:cNvPicPr>
+            <a:picLocks noChangeAspect="1"/>
+          </p:cNvPicPr>
+          <p:nvPr/>
+        </p:nvPicPr>
+        <p:blipFill>
+          <a:blip r:embed="rId3">
+            <a:extLst>
+              <a:ext uri="{28A0092B-C50C-407E-A947-70E740481C1C}">
+                <a14:useLocalDpi xmlns:a14="http://schemas.microsoft.com/office/drawing/2010/main" val="0"/>
+              </a:ext>
+            </a:extLst>
+          </a:blip>
+          <a:stretch>
+            <a:fillRect/>
+          </a:stretch>
+        </p:blipFill>
+        <p:spPr>
+          <a:xfrm>
+            <a:off x="1287591" y="817716"/>
+            <a:ext cx="4803440" cy="4122396"/>
+          </a:xfrm>
+          <a:prstGeom prst="rect">
+            <a:avLst/>
+          </a:prstGeom>
+        </p:spPr>
+      </p:pic>
+    </p:spTree>
+    <p:extLst>
+      <p:ext uri="{BB962C8B-B14F-4D97-AF65-F5344CB8AC3E}">
+        <p14:creationId xmlns:p14="http://schemas.microsoft.com/office/powerpoint/2010/main" val="422633496"/>
+      </p:ext>
+    </p:extLst>
+  </p:cSld>
+  <p:clrMapOvr>
+    <a:masterClrMapping/>
+  </p:clrMapOvr>
+</p:sld>
+</file>
+
+<file path=ppt/slides/slide24.xml><?xml version="1.0" encoding="utf-8"?>
+<p:sld xmlns:a="http://schemas.openxmlformats.org/drawingml/2006/main" xmlns:r="http://schemas.openxmlformats.org/officeDocument/2006/relationships" xmlns:p="http://schemas.openxmlformats.org/presentationml/2006/main">
+  <p:cSld>
+    <p:spTree>
+      <p:nvGrpSpPr>
+        <p:cNvPr id="1" name=""/>
+        <p:cNvGrpSpPr/>
+        <p:nvPr/>
+      </p:nvGrpSpPr>
+      <p:grpSpPr>
+        <a:xfrm>
+          <a:off x="0" y="0"/>
+          <a:ext cx="0" cy="0"/>
+          <a:chOff x="0" y="0"/>
+          <a:chExt cx="0" cy="0"/>
+        </a:xfrm>
+      </p:grpSpPr>
+      <p:pic>
+        <p:nvPicPr>
+          <p:cNvPr id="6" name="Espace réservé du contenu 5">
+            <a:extLst>
+              <a:ext uri="{FF2B5EF4-FFF2-40B4-BE49-F238E27FC236}">
+                <a16:creationId xmlns:a16="http://schemas.microsoft.com/office/drawing/2014/main" id="{9ED18B4D-9AA2-BAA4-64B2-A725FA232668}"/>
+              </a:ext>
+            </a:extLst>
+          </p:cNvPr>
+          <p:cNvPicPr>
+            <a:picLocks noGrp="1" noChangeAspect="1"/>
+          </p:cNvPicPr>
+          <p:nvPr>
+            <p:ph idx="1"/>
+          </p:nvPr>
+        </p:nvPicPr>
+        <p:blipFill>
+          <a:blip r:embed="rId2">
+            <a:extLst>
+              <a:ext uri="{28A0092B-C50C-407E-A947-70E740481C1C}">
+                <a14:useLocalDpi xmlns:a14="http://schemas.microsoft.com/office/drawing/2010/main" val="0"/>
+              </a:ext>
+            </a:extLst>
+          </a:blip>
+          <a:stretch>
+            <a:fillRect/>
+          </a:stretch>
+        </p:blipFill>
+        <p:spPr>
+          <a:xfrm>
+            <a:off x="6257255" y="1020729"/>
+            <a:ext cx="4986866" cy="3740150"/>
+          </a:xfrm>
+          <a:prstGeom prst="rect">
+            <a:avLst/>
+          </a:prstGeom>
+        </p:spPr>
+      </p:pic>
+      <p:pic>
+        <p:nvPicPr>
+          <p:cNvPr id="7" name="Image 6">
+            <a:extLst>
+              <a:ext uri="{FF2B5EF4-FFF2-40B4-BE49-F238E27FC236}">
+                <a16:creationId xmlns:a16="http://schemas.microsoft.com/office/drawing/2014/main" id="{F7961088-DAF3-40D1-2014-1BE6DA6821BF}"/>
+              </a:ext>
+            </a:extLst>
+          </p:cNvPr>
+          <p:cNvPicPr>
+            <a:picLocks noChangeAspect="1"/>
+          </p:cNvPicPr>
+          <p:nvPr/>
+        </p:nvPicPr>
+        <p:blipFill>
+          <a:blip r:embed="rId3">
+            <a:extLst>
+              <a:ext uri="{28A0092B-C50C-407E-A947-70E740481C1C}">
+                <a14:useLocalDpi xmlns:a14="http://schemas.microsoft.com/office/drawing/2010/main" val="0"/>
+              </a:ext>
+            </a:extLst>
+          </a:blip>
+          <a:srcRect/>
+          <a:stretch>
+            <a:fillRect/>
+          </a:stretch>
+        </p:blipFill>
+        <p:spPr>
+          <a:xfrm>
+            <a:off x="947879" y="1020728"/>
+            <a:ext cx="4986867" cy="3740151"/>
+          </a:xfrm>
+          <a:prstGeom prst="rect">
+            <a:avLst/>
+          </a:prstGeom>
+        </p:spPr>
+      </p:pic>
+      <p:sp>
+        <p:nvSpPr>
+          <p:cNvPr id="8" name="ZoneTexte 7">
+            <a:extLst>
+              <a:ext uri="{FF2B5EF4-FFF2-40B4-BE49-F238E27FC236}">
+                <a16:creationId xmlns:a16="http://schemas.microsoft.com/office/drawing/2014/main" id="{E86FE8AB-8CA2-26C6-1EA0-DD8874CA071A}"/>
+              </a:ext>
+            </a:extLst>
+          </p:cNvPr>
+          <p:cNvSpPr txBox="1"/>
+          <p:nvPr/>
+        </p:nvSpPr>
+        <p:spPr>
+          <a:xfrm>
+            <a:off x="1295400" y="4852863"/>
+            <a:ext cx="9601200" cy="1323439"/>
+          </a:xfrm>
+          <a:prstGeom prst="rect">
+            <a:avLst/>
+          </a:prstGeom>
+          <a:noFill/>
+        </p:spPr>
+        <p:txBody>
+          <a:bodyPr wrap="square" lIns="91440" tIns="45720" rIns="91440" bIns="45720" rtlCol="0" anchor="t">
+            <a:spAutoFit/>
+          </a:bodyPr>
+          <a:lstStyle/>
+          <a:p>
+            <a:pPr algn="just"/>
+            <a:r>
+              <a:rPr lang="fr-CA" sz="1600" noProof="0"/>
+              <a:t>Figure </a:t>
+            </a:r>
+            <a:r>
+              <a:rPr lang="fr-CA" sz="1600"/>
+              <a:t>9 </a:t>
+            </a:r>
+            <a:r>
+              <a:rPr lang="fr-CA" sz="1600" noProof="0"/>
+              <a:t>: À gauche, résultats obtenus à l’aide de </a:t>
+            </a:r>
+            <a:r>
+              <a:rPr lang="fr-CA" sz="1600"/>
+              <a:t>la matrice</a:t>
+            </a:r>
+            <a:r>
+              <a:rPr lang="fr-CA" sz="1600" noProof="0"/>
+              <a:t> mesurée à 33 stades, à droite, </a:t>
+            </a:r>
+            <a:r>
+              <a:rPr lang="fr-CA" sz="1600"/>
+              <a:t>résultats obtenus à l’aide de la matrice mesurée à 3 stades</a:t>
+            </a:r>
+            <a:r>
+              <a:rPr lang="fr-CA" sz="1600" noProof="0"/>
+              <a:t>. Est représenté :</a:t>
+            </a:r>
+            <a:r>
+              <a:rPr lang="fr-CA" sz="1600"/>
+              <a:t> L’effet d’augmenter l’ensemencement de larves, alevins, individus d’âges 1, et individus matures (âge 10) sur l’abondance de chevaliers matures sur 100 ans dans notre scénario mesuré. Lors de l’application aux scénarios nulles et menacés, les résultats étaient indistinguables de ceux présentés.</a:t>
+            </a:r>
+          </a:p>
+        </p:txBody>
+      </p:sp>
+    </p:spTree>
+    <p:extLst>
+      <p:ext uri="{BB962C8B-B14F-4D97-AF65-F5344CB8AC3E}">
+        <p14:creationId xmlns:p14="http://schemas.microsoft.com/office/powerpoint/2010/main" val="2449617363"/>
+      </p:ext>
+    </p:extLst>
+  </p:cSld>
+  <p:clrMapOvr>
+    <a:masterClrMapping/>
+  </p:clrMapOvr>
+</p:sld>
+</file>
+
+<file path=ppt/slides/slide25.xml><?xml version="1.0" encoding="utf-8"?>
 <p:sld xmlns:a="http://schemas.openxmlformats.org/drawingml/2006/main" xmlns:r="http://schemas.openxmlformats.org/officeDocument/2006/relationships" xmlns:p="http://schemas.openxmlformats.org/presentationml/2006/main">
   <p:cSld>
     <p:spTree>
@@ -12268,7 +17059,7 @@
           <p:cNvPr id="2" name="Titre 1">
             <a:extLst>
               <a:ext uri="{FF2B5EF4-FFF2-40B4-BE49-F238E27FC236}">
-                <a16:creationId xmlns:a16="http://schemas.microsoft.com/office/drawing/2014/main" id="{DE69A1AE-572E-D5B4-03BD-F325D0A3E202}"/>
+                <a16:creationId xmlns:a16="http://schemas.microsoft.com/office/drawing/2014/main" id="{AFD15BD0-D23D-BCDB-DC4F-EC9E34FD8E77}"/>
               </a:ext>
             </a:extLst>
           </p:cNvPr>
@@ -12281,19 +17072,12 @@
         </p:nvSpPr>
         <p:spPr/>
         <p:txBody>
-          <a:bodyPr numCol="2"/>
+          <a:bodyPr/>
           <a:lstStyle/>
           <a:p>
             <a:r>
-              <a:rPr lang="fr-CA" dirty="0"/>
-              <a:t>Avantages</a:t>
-            </a:r>
-            <a:br>
-              <a:rPr lang="fr-CA" dirty="0"/>
-            </a:br>
-            <a:r>
-              <a:rPr lang="fr-CA" dirty="0"/>
-              <a:t>Désavantages	</a:t>
+              <a:rPr lang="fr-CA"/>
+              <a:t>Discussion</a:t>
             </a:r>
           </a:p>
         </p:txBody>
@@ -12303,7 +17087,7 @@
           <p:cNvPr id="3" name="Espace réservé du contenu 2">
             <a:extLst>
               <a:ext uri="{FF2B5EF4-FFF2-40B4-BE49-F238E27FC236}">
-                <a16:creationId xmlns:a16="http://schemas.microsoft.com/office/drawing/2014/main" id="{FC01AAB4-81AB-D42D-04AB-96781CB6AC94}"/>
+                <a16:creationId xmlns:a16="http://schemas.microsoft.com/office/drawing/2014/main" id="{7FDDC518-1F1F-76F1-2545-8D01AE3B32C4}"/>
               </a:ext>
             </a:extLst>
           </p:cNvPr>
@@ -12314,72 +17098,125 @@
             <p:ph idx="1"/>
           </p:nvPr>
         </p:nvSpPr>
-        <p:spPr/>
+        <p:spPr>
+          <a:xfrm>
+            <a:off x="750367" y="1733057"/>
+            <a:ext cx="10691265" cy="4210543"/>
+          </a:xfrm>
+        </p:spPr>
         <p:txBody>
-          <a:bodyPr numCol="2"/>
+          <a:bodyPr vert="horz" lIns="91440" tIns="45720" rIns="91440" bIns="45720" rtlCol="0" anchor="t">
+            <a:normAutofit lnSpcReduction="10000"/>
+          </a:bodyPr>
           <a:lstStyle/>
           <a:p>
             <a:pPr>
               <a:lnSpc>
-                <a:spcPct val="200000"/>
+                <a:spcPct val="150000"/>
               </a:lnSpc>
             </a:pPr>
             <a:r>
-              <a:rPr lang="fr-CA" dirty="0"/>
-              <a:t>Modification du calcul de la fécondité</a:t>
-            </a:r>
+              <a:rPr lang="fr-FR"/>
+              <a:t>Résultats similaires mais...</a:t>
+            </a:r>
+          </a:p>
+          <a:p>
+            <a:pPr lvl="1">
+              <a:lnSpc>
+                <a:spcPct val="150000"/>
+              </a:lnSpc>
+            </a:pPr>
+            <a:r>
+              <a:rPr lang="fr-FR"/>
+              <a:t>Effondrement plus rapide de la population</a:t>
+            </a:r>
+          </a:p>
+          <a:p>
+            <a:pPr lvl="1">
+              <a:lnSpc>
+                <a:spcPct val="150000"/>
+              </a:lnSpc>
+            </a:pPr>
+            <a:r>
+              <a:rPr lang="fr-FR"/>
+              <a:t>Paramètres de </a:t>
+            </a:r>
+            <a:r>
+              <a:rPr lang="fr-FR" err="1"/>
+              <a:t>stochasticité</a:t>
+            </a:r>
+            <a:r>
+              <a:rPr lang="fr-FR"/>
+              <a:t> difficiles à intégrer</a:t>
+            </a:r>
+          </a:p>
+          <a:p>
+            <a:pPr lvl="1">
+              <a:lnSpc>
+                <a:spcPct val="150000"/>
+              </a:lnSpc>
+            </a:pPr>
+            <a:r>
+              <a:rPr lang="fr-FR"/>
+              <a:t>Plus petits intervalles de confiance</a:t>
+            </a:r>
+            <a:br>
+              <a:rPr lang="fr-FR"/>
+            </a:br>
+            <a:endParaRPr lang="fr-FR"/>
           </a:p>
           <a:p>
             <a:pPr>
               <a:lnSpc>
-                <a:spcPct val="200000"/>
+                <a:spcPct val="150000"/>
               </a:lnSpc>
             </a:pPr>
             <a:r>
-              <a:rPr lang="fr-CA" dirty="0"/>
-              <a:t>Possibilité d’individus plus âgés que 30</a:t>
-            </a:r>
-          </a:p>
-          <a:p>
-            <a:pPr>
+              <a:rPr lang="fr-FR"/>
+              <a:t>Dans ce contexte, une matrice complète donne des résultats plus fiables: </a:t>
+            </a:r>
+          </a:p>
+          <a:p>
+            <a:pPr lvl="1">
               <a:lnSpc>
-                <a:spcPct val="200000"/>
+                <a:spcPct val="150000"/>
               </a:lnSpc>
             </a:pPr>
             <a:r>
-              <a:rPr lang="fr-CA" dirty="0"/>
-              <a:t>Simplification</a:t>
-            </a:r>
-          </a:p>
-          <a:p>
-            <a:pPr>
+              <a:rPr lang="fr-FR"/>
+              <a:t>Aucune agrégation des informations essentielles</a:t>
+            </a:r>
+          </a:p>
+          <a:p>
+            <a:pPr lvl="1">
               <a:lnSpc>
-                <a:spcPct val="200000"/>
+                <a:spcPct val="150000"/>
               </a:lnSpc>
             </a:pPr>
             <a:r>
-              <a:rPr lang="fr-CA" dirty="0"/>
-              <a:t>Diminution des incertitudes</a:t>
-            </a:r>
-          </a:p>
-          <a:p>
-            <a:pPr marL="0" indent="0">
+              <a:rPr lang="fr-FR" err="1">
+                <a:solidFill>
+                  <a:srgbClr val="000000"/>
+                </a:solidFill>
+                <a:ea typeface="+mn-lt"/>
+                <a:cs typeface="+mn-lt"/>
+              </a:rPr>
+              <a:t>Stochasticité</a:t>
+            </a:r>
+            <a:r>
+              <a:rPr lang="fr-FR"/>
+              <a:t> plus réaliste</a:t>
+            </a:r>
+          </a:p>
+          <a:p>
+            <a:pPr lvl="1">
               <a:lnSpc>
-                <a:spcPct val="200000"/>
-              </a:lnSpc>
-              <a:buNone/>
-            </a:pPr>
-            <a:endParaRPr lang="fr-CA" dirty="0"/>
-          </a:p>
-          <a:p>
-            <a:pPr>
-              <a:lnSpc>
-                <a:spcPct val="200000"/>
+                <a:spcPct val="150000"/>
               </a:lnSpc>
             </a:pPr>
             <a:r>
-              <a:rPr lang="fr-CA" dirty="0"/>
-              <a:t>Perte d’information</a:t>
+              <a:rPr lang="fr-FR"/>
+              <a:t>Les potentiels individus &gt;30 ans n'ont pas ou peu d'impact</a:t>
             </a:r>
           </a:p>
         </p:txBody>
@@ -12387,7 +17224,7 @@
     </p:spTree>
     <p:extLst>
       <p:ext uri="{BB962C8B-B14F-4D97-AF65-F5344CB8AC3E}">
-        <p14:creationId xmlns:p14="http://schemas.microsoft.com/office/powerpoint/2010/main" val="1164678962"/>
+        <p14:creationId xmlns:p14="http://schemas.microsoft.com/office/powerpoint/2010/main" val="901628721"/>
       </p:ext>
     </p:extLst>
   </p:cSld>
@@ -12397,7 +17234,7 @@
 </p:sld>
 </file>
 
-<file path=ppt/slides/slide21.xml><?xml version="1.0" encoding="utf-8"?>
+<file path=ppt/slides/slide26.xml><?xml version="1.0" encoding="utf-8"?>
 <p:sld xmlns:a="http://schemas.openxmlformats.org/drawingml/2006/main" xmlns:r="http://schemas.openxmlformats.org/officeDocument/2006/relationships" xmlns:p="http://schemas.openxmlformats.org/presentationml/2006/main">
   <p:cSld>
     <p:bg>
@@ -12422,116 +17259,12 @@
           <a:chExt cx="0" cy="0"/>
         </a:xfrm>
       </p:grpSpPr>
-      <p:cxnSp>
-        <p:nvCxnSpPr>
-          <p:cNvPr id="10" name="Straight Connector 9">
+      <p:sp useBgFill="1">
+        <p:nvSpPr>
+          <p:cNvPr id="2055" name="Rectangle 2054">
             <a:extLst>
               <a:ext uri="{FF2B5EF4-FFF2-40B4-BE49-F238E27FC236}">
-                <a16:creationId xmlns:a16="http://schemas.microsoft.com/office/drawing/2014/main" id="{F64F9B95-9045-48D2-B9F3-2927E98F54AA}"/>
-              </a:ext>
-              <a:ext uri="{C183D7F6-B498-43B3-948B-1728B52AA6E4}">
-                <adec:decorative xmlns:adec="http://schemas.microsoft.com/office/drawing/2017/decorative" val="1"/>
-              </a:ext>
-            </a:extLst>
-          </p:cNvPr>
-          <p:cNvCxnSpPr>
-            <a:cxnSpLocks noGrp="1" noRot="1" noChangeAspect="1" noMove="1" noResize="1" noEditPoints="1" noAdjustHandles="1" noChangeArrowheads="1" noChangeShapeType="1"/>
-          </p:cNvCxnSpPr>
-          <p:nvPr>
-            <p:extLst>
-              <p:ext uri="{386F3935-93C4-4BCD-93E2-E3B085C9AB24}">
-                <p16:designElem xmlns:p16="http://schemas.microsoft.com/office/powerpoint/2015/main" val="1"/>
-              </p:ext>
-            </p:extLst>
-          </p:nvPr>
-        </p:nvCxnSpPr>
-        <p:spPr>
-          <a:xfrm>
-            <a:off x="800100" y="723900"/>
-            <a:ext cx="10591800" cy="0"/>
-          </a:xfrm>
-          <a:prstGeom prst="line">
-            <a:avLst/>
-          </a:prstGeom>
-          <a:ln w="44450">
-            <a:solidFill>
-              <a:schemeClr val="tx1"/>
-            </a:solidFill>
-          </a:ln>
-        </p:spPr>
-        <p:style>
-          <a:lnRef idx="1">
-            <a:schemeClr val="accent1"/>
-          </a:lnRef>
-          <a:fillRef idx="0">
-            <a:schemeClr val="accent1"/>
-          </a:fillRef>
-          <a:effectRef idx="0">
-            <a:schemeClr val="accent1"/>
-          </a:effectRef>
-          <a:fontRef idx="minor">
-            <a:schemeClr val="tx1"/>
-          </a:fontRef>
-        </p:style>
-      </p:cxnSp>
-      <p:cxnSp>
-        <p:nvCxnSpPr>
-          <p:cNvPr id="12" name="Straight Connector 11">
-            <a:extLst>
-              <a:ext uri="{FF2B5EF4-FFF2-40B4-BE49-F238E27FC236}">
-                <a16:creationId xmlns:a16="http://schemas.microsoft.com/office/drawing/2014/main" id="{085AA86F-6A4D-4BCB-A045-D992CDC2959B}"/>
-              </a:ext>
-              <a:ext uri="{C183D7F6-B498-43B3-948B-1728B52AA6E4}">
-                <adec:decorative xmlns:adec="http://schemas.microsoft.com/office/drawing/2017/decorative" val="1"/>
-              </a:ext>
-            </a:extLst>
-          </p:cNvPr>
-          <p:cNvCxnSpPr>
-            <a:cxnSpLocks noGrp="1" noRot="1" noChangeAspect="1" noMove="1" noResize="1" noEditPoints="1" noAdjustHandles="1" noChangeArrowheads="1" noChangeShapeType="1"/>
-          </p:cNvCxnSpPr>
-          <p:nvPr>
-            <p:extLst>
-              <p:ext uri="{386F3935-93C4-4BCD-93E2-E3B085C9AB24}">
-                <p16:designElem xmlns:p16="http://schemas.microsoft.com/office/powerpoint/2015/main" val="1"/>
-              </p:ext>
-            </p:extLst>
-          </p:nvPr>
-        </p:nvCxnSpPr>
-        <p:spPr>
-          <a:xfrm>
-            <a:off x="800100" y="6142781"/>
-            <a:ext cx="10591800" cy="0"/>
-          </a:xfrm>
-          <a:prstGeom prst="line">
-            <a:avLst/>
-          </a:prstGeom>
-          <a:ln w="12700">
-            <a:solidFill>
-              <a:schemeClr val="tx1"/>
-            </a:solidFill>
-          </a:ln>
-        </p:spPr>
-        <p:style>
-          <a:lnRef idx="1">
-            <a:schemeClr val="accent1"/>
-          </a:lnRef>
-          <a:fillRef idx="0">
-            <a:schemeClr val="accent1"/>
-          </a:fillRef>
-          <a:effectRef idx="0">
-            <a:schemeClr val="accent1"/>
-          </a:effectRef>
-          <a:fontRef idx="minor">
-            <a:schemeClr val="tx1"/>
-          </a:fontRef>
-        </p:style>
-      </p:cxnSp>
-      <p:sp useBgFill="1">
-        <p:nvSpPr>
-          <p:cNvPr id="14" name="Rectangle 13">
-            <a:extLst>
-              <a:ext uri="{FF2B5EF4-FFF2-40B4-BE49-F238E27FC236}">
-                <a16:creationId xmlns:a16="http://schemas.microsoft.com/office/drawing/2014/main" id="{33E93247-6229-44AB-A550-739E971E690B}"/>
+                <a16:creationId xmlns:a16="http://schemas.microsoft.com/office/drawing/2014/main" id="{E49D7415-2F11-44C2-B6AA-13A25B6814B9}"/>
               </a:ext>
               <a:ext uri="{C183D7F6-B498-43B3-948B-1728B52AA6E4}">
                 <adec:decorative xmlns:adec="http://schemas.microsoft.com/office/drawing/2017/decorative" val="1"/>
@@ -12607,462 +17340,6 @@
           <p:cNvPr id="2" name="Titre 1">
             <a:extLst>
               <a:ext uri="{FF2B5EF4-FFF2-40B4-BE49-F238E27FC236}">
-                <a16:creationId xmlns:a16="http://schemas.microsoft.com/office/drawing/2014/main" id="{94F7A99C-0ACF-5557-9578-B80FE0D75B77}"/>
-              </a:ext>
-            </a:extLst>
-          </p:cNvPr>
-          <p:cNvSpPr>
-            <a:spLocks noGrp="1"/>
-          </p:cNvSpPr>
-          <p:nvPr>
-            <p:ph type="title"/>
-          </p:nvPr>
-        </p:nvSpPr>
-        <p:spPr>
-          <a:xfrm>
-            <a:off x="685800" y="899024"/>
-            <a:ext cx="3076032" cy="3914947"/>
-          </a:xfrm>
-        </p:spPr>
-        <p:txBody>
-          <a:bodyPr vert="horz" lIns="91440" tIns="45720" rIns="91440" bIns="45720" rtlCol="0" anchor="t">
-            <a:normAutofit/>
-          </a:bodyPr>
-          <a:lstStyle/>
-          <a:p>
-            <a:r>
-              <a:rPr lang="en-US"/>
-              <a:t>Résultats</a:t>
-            </a:r>
-          </a:p>
-        </p:txBody>
-      </p:sp>
-      <p:cxnSp>
-        <p:nvCxnSpPr>
-          <p:cNvPr id="16" name="Straight Connector 15">
-            <a:extLst>
-              <a:ext uri="{FF2B5EF4-FFF2-40B4-BE49-F238E27FC236}">
-                <a16:creationId xmlns:a16="http://schemas.microsoft.com/office/drawing/2014/main" id="{EE2E603F-4A95-4FE8-BB06-211DFD75DBEF}"/>
-              </a:ext>
-              <a:ext uri="{C183D7F6-B498-43B3-948B-1728B52AA6E4}">
-                <adec:decorative xmlns:adec="http://schemas.microsoft.com/office/drawing/2017/decorative" val="1"/>
-              </a:ext>
-            </a:extLst>
-          </p:cNvPr>
-          <p:cNvCxnSpPr>
-            <a:cxnSpLocks noGrp="1" noRot="1" noChangeAspect="1" noMove="1" noResize="1" noEditPoints="1" noAdjustHandles="1" noChangeArrowheads="1" noChangeShapeType="1"/>
-          </p:cNvCxnSpPr>
-          <p:nvPr>
-            <p:extLst>
-              <p:ext uri="{386F3935-93C4-4BCD-93E2-E3B085C9AB24}">
-                <p16:designElem xmlns:p16="http://schemas.microsoft.com/office/powerpoint/2015/main" val="1"/>
-              </p:ext>
-            </p:extLst>
-          </p:nvPr>
-        </p:nvCxnSpPr>
-        <p:spPr>
-          <a:xfrm>
-            <a:off x="800100" y="723900"/>
-            <a:ext cx="1371600" cy="0"/>
-          </a:xfrm>
-          <a:prstGeom prst="line">
-            <a:avLst/>
-          </a:prstGeom>
-          <a:ln w="44450">
-            <a:solidFill>
-              <a:schemeClr val="tx1"/>
-            </a:solidFill>
-          </a:ln>
-        </p:spPr>
-        <p:style>
-          <a:lnRef idx="1">
-            <a:schemeClr val="accent1"/>
-          </a:lnRef>
-          <a:fillRef idx="0">
-            <a:schemeClr val="accent1"/>
-          </a:fillRef>
-          <a:effectRef idx="0">
-            <a:schemeClr val="accent1"/>
-          </a:effectRef>
-          <a:fontRef idx="minor">
-            <a:schemeClr val="tx1"/>
-          </a:fontRef>
-        </p:style>
-      </p:cxnSp>
-      <p:pic>
-        <p:nvPicPr>
-          <p:cNvPr id="5" name="Espace réservé du contenu 4">
-            <a:extLst>
-              <a:ext uri="{FF2B5EF4-FFF2-40B4-BE49-F238E27FC236}">
-                <a16:creationId xmlns:a16="http://schemas.microsoft.com/office/drawing/2014/main" id="{DEB15709-306B-BF61-202F-0B24322B33AC}"/>
-              </a:ext>
-            </a:extLst>
-          </p:cNvPr>
-          <p:cNvPicPr>
-            <a:picLocks noGrp="1" noChangeAspect="1"/>
-          </p:cNvPicPr>
-          <p:nvPr>
-            <p:ph idx="1"/>
-          </p:nvPr>
-        </p:nvPicPr>
-        <p:blipFill>
-          <a:blip r:embed="rId2">
-            <a:extLst>
-              <a:ext uri="{28A0092B-C50C-407E-A947-70E740481C1C}">
-                <a14:useLocalDpi xmlns:a14="http://schemas.microsoft.com/office/drawing/2010/main" val="0"/>
-              </a:ext>
-            </a:extLst>
-          </a:blip>
-          <a:stretch>
-            <a:fillRect/>
-          </a:stretch>
-        </p:blipFill>
-        <p:spPr>
-          <a:xfrm>
-            <a:off x="6362699" y="723901"/>
-            <a:ext cx="2705100" cy="5410200"/>
-          </a:xfrm>
-          <a:prstGeom prst="rect">
-            <a:avLst/>
-          </a:prstGeom>
-        </p:spPr>
-      </p:pic>
-    </p:spTree>
-    <p:extLst>
-      <p:ext uri="{BB962C8B-B14F-4D97-AF65-F5344CB8AC3E}">
-        <p14:creationId xmlns:p14="http://schemas.microsoft.com/office/powerpoint/2010/main" val="1439899674"/>
-      </p:ext>
-    </p:extLst>
-  </p:cSld>
-  <p:clrMapOvr>
-    <a:masterClrMapping/>
-  </p:clrMapOvr>
-</p:sld>
-</file>
-
-<file path=ppt/slides/slide22.xml><?xml version="1.0" encoding="utf-8"?>
-<p:sld xmlns:a="http://schemas.openxmlformats.org/drawingml/2006/main" xmlns:r="http://schemas.openxmlformats.org/officeDocument/2006/relationships" xmlns:p="http://schemas.openxmlformats.org/presentationml/2006/main">
-  <p:cSld>
-    <p:spTree>
-      <p:nvGrpSpPr>
-        <p:cNvPr id="1" name=""/>
-        <p:cNvGrpSpPr/>
-        <p:nvPr/>
-      </p:nvGrpSpPr>
-      <p:grpSpPr>
-        <a:xfrm>
-          <a:off x="0" y="0"/>
-          <a:ext cx="0" cy="0"/>
-          <a:chOff x="0" y="0"/>
-          <a:chExt cx="0" cy="0"/>
-        </a:xfrm>
-      </p:grpSpPr>
-      <p:pic>
-        <p:nvPicPr>
-          <p:cNvPr id="9" name="Image 8">
-            <a:extLst>
-              <a:ext uri="{FF2B5EF4-FFF2-40B4-BE49-F238E27FC236}">
-                <a16:creationId xmlns:a16="http://schemas.microsoft.com/office/drawing/2014/main" id="{CE99E6EA-6C50-A9AF-63F6-B30BF2E36593}"/>
-              </a:ext>
-            </a:extLst>
-          </p:cNvPr>
-          <p:cNvPicPr>
-            <a:picLocks noChangeAspect="1"/>
-          </p:cNvPicPr>
-          <p:nvPr/>
-        </p:nvPicPr>
-        <p:blipFill>
-          <a:blip r:embed="rId2">
-            <a:extLst>
-              <a:ext uri="{28A0092B-C50C-407E-A947-70E740481C1C}">
-                <a14:useLocalDpi xmlns:a14="http://schemas.microsoft.com/office/drawing/2010/main" val="0"/>
-              </a:ext>
-            </a:extLst>
-          </a:blip>
-          <a:stretch>
-            <a:fillRect/>
-          </a:stretch>
-        </p:blipFill>
-        <p:spPr>
-          <a:xfrm>
-            <a:off x="2846955" y="1142995"/>
-            <a:ext cx="5486411" cy="4572009"/>
-          </a:xfrm>
-          <a:prstGeom prst="rect">
-            <a:avLst/>
-          </a:prstGeom>
-        </p:spPr>
-      </p:pic>
-    </p:spTree>
-    <p:extLst>
-      <p:ext uri="{BB962C8B-B14F-4D97-AF65-F5344CB8AC3E}">
-        <p14:creationId xmlns:p14="http://schemas.microsoft.com/office/powerpoint/2010/main" val="422633496"/>
-      </p:ext>
-    </p:extLst>
-  </p:cSld>
-  <p:clrMapOvr>
-    <a:masterClrMapping/>
-  </p:clrMapOvr>
-</p:sld>
-</file>
-
-<file path=ppt/slides/slide23.xml><?xml version="1.0" encoding="utf-8"?>
-<p:sld xmlns:a="http://schemas.openxmlformats.org/drawingml/2006/main" xmlns:r="http://schemas.openxmlformats.org/officeDocument/2006/relationships" xmlns:p="http://schemas.openxmlformats.org/presentationml/2006/main">
-  <p:cSld>
-    <p:spTree>
-      <p:nvGrpSpPr>
-        <p:cNvPr id="1" name=""/>
-        <p:cNvGrpSpPr/>
-        <p:nvPr/>
-      </p:nvGrpSpPr>
-      <p:grpSpPr>
-        <a:xfrm>
-          <a:off x="0" y="0"/>
-          <a:ext cx="0" cy="0"/>
-          <a:chOff x="0" y="0"/>
-          <a:chExt cx="0" cy="0"/>
-        </a:xfrm>
-      </p:grpSpPr>
-      <p:pic>
-        <p:nvPicPr>
-          <p:cNvPr id="5" name="Espace réservé du contenu 4">
-            <a:extLst>
-              <a:ext uri="{FF2B5EF4-FFF2-40B4-BE49-F238E27FC236}">
-                <a16:creationId xmlns:a16="http://schemas.microsoft.com/office/drawing/2014/main" id="{2894EE87-C10F-C2AC-44DB-1A002CE45605}"/>
-              </a:ext>
-            </a:extLst>
-          </p:cNvPr>
-          <p:cNvPicPr>
-            <a:picLocks noGrp="1" noChangeAspect="1"/>
-          </p:cNvPicPr>
-          <p:nvPr>
-            <p:ph idx="1"/>
-          </p:nvPr>
-        </p:nvPicPr>
-        <p:blipFill>
-          <a:blip r:embed="rId2">
-            <a:extLst>
-              <a:ext uri="{28A0092B-C50C-407E-A947-70E740481C1C}">
-                <a14:useLocalDpi xmlns:a14="http://schemas.microsoft.com/office/drawing/2010/main" val="0"/>
-              </a:ext>
-            </a:extLst>
-          </a:blip>
-          <a:stretch>
-            <a:fillRect/>
-          </a:stretch>
-        </p:blipFill>
-        <p:spPr>
-          <a:xfrm>
-            <a:off x="3676813" y="967632"/>
-            <a:ext cx="4488180" cy="3740150"/>
-          </a:xfrm>
-          <a:prstGeom prst="rect">
-            <a:avLst/>
-          </a:prstGeom>
-        </p:spPr>
-      </p:pic>
-    </p:spTree>
-    <p:extLst>
-      <p:ext uri="{BB962C8B-B14F-4D97-AF65-F5344CB8AC3E}">
-        <p14:creationId xmlns:p14="http://schemas.microsoft.com/office/powerpoint/2010/main" val="2449617363"/>
-      </p:ext>
-    </p:extLst>
-  </p:cSld>
-  <p:clrMapOvr>
-    <a:masterClrMapping/>
-  </p:clrMapOvr>
-</p:sld>
-</file>
-
-<file path=ppt/slides/slide24.xml><?xml version="1.0" encoding="utf-8"?>
-<p:sld xmlns:a="http://schemas.openxmlformats.org/drawingml/2006/main" xmlns:r="http://schemas.openxmlformats.org/officeDocument/2006/relationships" xmlns:p="http://schemas.openxmlformats.org/presentationml/2006/main">
-  <p:cSld>
-    <p:spTree>
-      <p:nvGrpSpPr>
-        <p:cNvPr id="1" name=""/>
-        <p:cNvGrpSpPr/>
-        <p:nvPr/>
-      </p:nvGrpSpPr>
-      <p:grpSpPr>
-        <a:xfrm>
-          <a:off x="0" y="0"/>
-          <a:ext cx="0" cy="0"/>
-          <a:chOff x="0" y="0"/>
-          <a:chExt cx="0" cy="0"/>
-        </a:xfrm>
-      </p:grpSpPr>
-      <p:sp>
-        <p:nvSpPr>
-          <p:cNvPr id="2" name="Titre 1">
-            <a:extLst>
-              <a:ext uri="{FF2B5EF4-FFF2-40B4-BE49-F238E27FC236}">
-                <a16:creationId xmlns:a16="http://schemas.microsoft.com/office/drawing/2014/main" id="{AFD15BD0-D23D-BCDB-DC4F-EC9E34FD8E77}"/>
-              </a:ext>
-            </a:extLst>
-          </p:cNvPr>
-          <p:cNvSpPr>
-            <a:spLocks noGrp="1"/>
-          </p:cNvSpPr>
-          <p:nvPr>
-            <p:ph type="title"/>
-          </p:nvPr>
-        </p:nvSpPr>
-        <p:spPr/>
-        <p:txBody>
-          <a:bodyPr/>
-          <a:lstStyle/>
-          <a:p>
-            <a:r>
-              <a:rPr lang="fr-CA" dirty="0"/>
-              <a:t>Discussion</a:t>
-            </a:r>
-          </a:p>
-        </p:txBody>
-      </p:sp>
-      <p:sp>
-        <p:nvSpPr>
-          <p:cNvPr id="3" name="Espace réservé du contenu 2">
-            <a:extLst>
-              <a:ext uri="{FF2B5EF4-FFF2-40B4-BE49-F238E27FC236}">
-                <a16:creationId xmlns:a16="http://schemas.microsoft.com/office/drawing/2014/main" id="{7FDDC518-1F1F-76F1-2545-8D01AE3B32C4}"/>
-              </a:ext>
-            </a:extLst>
-          </p:cNvPr>
-          <p:cNvSpPr>
-            <a:spLocks noGrp="1"/>
-          </p:cNvSpPr>
-          <p:nvPr>
-            <p:ph idx="1"/>
-          </p:nvPr>
-        </p:nvSpPr>
-        <p:spPr/>
-        <p:txBody>
-          <a:bodyPr/>
-          <a:lstStyle/>
-          <a:p>
-            <a:endParaRPr lang="fr-CA"/>
-          </a:p>
-        </p:txBody>
-      </p:sp>
-    </p:spTree>
-    <p:extLst>
-      <p:ext uri="{BB962C8B-B14F-4D97-AF65-F5344CB8AC3E}">
-        <p14:creationId xmlns:p14="http://schemas.microsoft.com/office/powerpoint/2010/main" val="901628721"/>
-      </p:ext>
-    </p:extLst>
-  </p:cSld>
-  <p:clrMapOvr>
-    <a:masterClrMapping/>
-  </p:clrMapOvr>
-</p:sld>
-</file>
-
-<file path=ppt/slides/slide25.xml><?xml version="1.0" encoding="utf-8"?>
-<p:sld xmlns:a="http://schemas.openxmlformats.org/drawingml/2006/main" xmlns:r="http://schemas.openxmlformats.org/officeDocument/2006/relationships" xmlns:p="http://schemas.openxmlformats.org/presentationml/2006/main">
-  <p:cSld>
-    <p:bg>
-      <p:bgPr>
-        <a:solidFill>
-          <a:schemeClr val="bg1"/>
-        </a:solidFill>
-        <a:effectLst/>
-      </p:bgPr>
-    </p:bg>
-    <p:spTree>
-      <p:nvGrpSpPr>
-        <p:cNvPr id="1" name=""/>
-        <p:cNvGrpSpPr/>
-        <p:nvPr/>
-      </p:nvGrpSpPr>
-      <p:grpSpPr>
-        <a:xfrm>
-          <a:off x="0" y="0"/>
-          <a:ext cx="0" cy="0"/>
-          <a:chOff x="0" y="0"/>
-          <a:chExt cx="0" cy="0"/>
-        </a:xfrm>
-      </p:grpSpPr>
-      <p:sp useBgFill="1">
-        <p:nvSpPr>
-          <p:cNvPr id="2055" name="Rectangle 2054">
-            <a:extLst>
-              <a:ext uri="{FF2B5EF4-FFF2-40B4-BE49-F238E27FC236}">
-                <a16:creationId xmlns:a16="http://schemas.microsoft.com/office/drawing/2014/main" id="{E49D7415-2F11-44C2-B6AA-13A25B6814B9}"/>
-              </a:ext>
-              <a:ext uri="{C183D7F6-B498-43B3-948B-1728B52AA6E4}">
-                <adec:decorative xmlns:adec="http://schemas.microsoft.com/office/drawing/2017/decorative" val="1"/>
-              </a:ext>
-            </a:extLst>
-          </p:cNvPr>
-          <p:cNvSpPr>
-            <a:spLocks noGrp="1" noRot="1" noChangeAspect="1" noMove="1" noResize="1" noEditPoints="1" noAdjustHandles="1" noChangeArrowheads="1" noChangeShapeType="1" noTextEdit="1"/>
-          </p:cNvSpPr>
-          <p:nvPr>
-            <p:extLst>
-              <p:ext uri="{386F3935-93C4-4BCD-93E2-E3B085C9AB24}">
-                <p16:designElem xmlns:p16="http://schemas.microsoft.com/office/powerpoint/2015/main" val="1"/>
-              </p:ext>
-            </p:extLst>
-          </p:nvPr>
-        </p:nvSpPr>
-        <p:spPr>
-          <a:xfrm>
-            <a:off x="0" y="0"/>
-            <a:ext cx="12192000" cy="6858000"/>
-          </a:xfrm>
-          <a:prstGeom prst="rect">
-            <a:avLst/>
-          </a:prstGeom>
-          <a:ln w="12700" cap="flat" cmpd="sng" algn="ctr">
-            <a:noFill/>
-            <a:prstDash val="solid"/>
-            <a:miter lim="800000"/>
-          </a:ln>
-          <a:effectLst/>
-          <a:extLst>
-            <a:ext uri="{91240B29-F687-4F45-9708-019B960494DF}">
-              <a14:hiddenLine xmlns:a14="http://schemas.microsoft.com/office/drawing/2010/main" w="12700" cap="flat" cmpd="sng" algn="ctr">
-                <a:solidFill>
-                  <a:schemeClr val="accent1">
-                    <a:shade val="50000"/>
-                  </a:schemeClr>
-                </a:solidFill>
-                <a:prstDash val="solid"/>
-                <a:miter lim="800000"/>
-              </a14:hiddenLine>
-            </a:ext>
-          </a:extLst>
-        </p:spPr>
-        <p:style>
-          <a:lnRef idx="2">
-            <a:schemeClr val="accent1">
-              <a:shade val="50000"/>
-            </a:schemeClr>
-          </a:lnRef>
-          <a:fillRef idx="1">
-            <a:schemeClr val="accent1"/>
-          </a:fillRef>
-          <a:effectRef idx="0">
-            <a:schemeClr val="accent1"/>
-          </a:effectRef>
-          <a:fontRef idx="minor">
-            <a:schemeClr val="lt1"/>
-          </a:fontRef>
-        </p:style>
-        <p:txBody>
-          <a:bodyPr rtlCol="0" anchor="ctr"/>
-          <a:lstStyle/>
-          <a:p>
-            <a:pPr algn="ctr"/>
-            <a:endParaRPr lang="en-US"/>
-          </a:p>
-        </p:txBody>
-      </p:sp>
-      <p:sp>
-        <p:nvSpPr>
-          <p:cNvPr id="2" name="Titre 1">
-            <a:extLst>
-              <a:ext uri="{FF2B5EF4-FFF2-40B4-BE49-F238E27FC236}">
                 <a16:creationId xmlns:a16="http://schemas.microsoft.com/office/drawing/2014/main" id="{A89A0B66-12A9-A560-B2C3-D5DE68D00757}"/>
               </a:ext>
             </a:extLst>
@@ -13087,7 +17364,7 @@
           <a:lstStyle/>
           <a:p>
             <a:r>
-              <a:rPr lang="fr-CA" dirty="0"/>
+              <a:rPr lang="fr-CA"/>
               <a:t>Conclusion</a:t>
             </a:r>
           </a:p>
@@ -13215,37 +17492,34 @@
           </a:xfrm>
         </p:spPr>
         <p:txBody>
-          <a:bodyPr>
+          <a:bodyPr vert="horz" lIns="91440" tIns="45720" rIns="91440" bIns="45720" rtlCol="0" anchor="t">
             <a:normAutofit/>
           </a:bodyPr>
           <a:lstStyle/>
           <a:p>
             <a:r>
-              <a:rPr lang="fr-CA" dirty="0"/>
-              <a:t>Important de continuer à faire efforts</a:t>
-            </a:r>
-            <a:endParaRPr lang="fr-CA"/>
-          </a:p>
-          <a:p>
-            <a:r>
-              <a:rPr lang="fr-CA" dirty="0"/>
+              <a:rPr lang="fr-CA"/>
+              <a:t>Important de continuer à faire des efforts</a:t>
+            </a:r>
+          </a:p>
+          <a:p>
+            <a:r>
+              <a:rPr lang="fr-CA"/>
               <a:t>Mise en place d’ensemencement de pré-adultes</a:t>
             </a:r>
-            <a:endParaRPr lang="fr-CA"/>
-          </a:p>
-          <a:p>
-            <a:r>
-              <a:rPr lang="fr-CA" dirty="0"/>
-              <a:t>Informations supplémentaires et autres études à faire, </a:t>
+          </a:p>
+          <a:p>
+            <a:r>
+              <a:rPr lang="fr-CA"/>
+              <a:t>Informations supplémentaires et autres études à faire,</a:t>
             </a:r>
             <a:br>
-              <a:rPr lang="fr-CA" dirty="0"/>
+              <a:rPr lang="fr-CA"/>
             </a:br>
             <a:r>
-              <a:rPr lang="fr-CA" dirty="0"/>
+              <a:rPr lang="fr-CA"/>
               <a:t>car encore beaucoup d’incertitude</a:t>
             </a:r>
-            <a:endParaRPr lang="fr-CA"/>
           </a:p>
         </p:txBody>
       </p:sp>
@@ -13278,7 +17552,7 @@
           <a:lstStyle/>
           <a:p>
             <a:r>
-              <a:rPr lang="fr-CA" sz="800" dirty="0">
+              <a:rPr lang="fr-CA" sz="800">
                 <a:solidFill>
                   <a:schemeClr val="tx1">
                     <a:lumMod val="95000"/>
@@ -13304,7 +17578,7 @@
 </p:sld>
 </file>
 
-<file path=ppt/slides/slide26.xml><?xml version="1.0" encoding="utf-8"?>
+<file path=ppt/slides/slide27.xml><?xml version="1.0" encoding="utf-8"?>
 <p:sld xmlns:a="http://schemas.openxmlformats.org/drawingml/2006/main" xmlns:r="http://schemas.openxmlformats.org/officeDocument/2006/relationships" xmlns:p="http://schemas.openxmlformats.org/presentationml/2006/main">
   <p:cSld>
     <p:bg>
@@ -13632,7 +17906,7 @@
           <a:lstStyle/>
           <a:p>
             <a:pPr algn="ctr"/>
-            <a:endParaRPr lang="en-US" dirty="0"/>
+            <a:endParaRPr lang="en-US"/>
           </a:p>
         </p:txBody>
       </p:sp>
@@ -13665,7 +17939,7 @@
           <a:lstStyle/>
           <a:p>
             <a:r>
-              <a:rPr lang="en-US" sz="5400" dirty="0">
+              <a:rPr lang="en-US" sz="5400">
                 <a:solidFill>
                   <a:srgbClr val="FFFFFF"/>
                 </a:solidFill>
@@ -13763,7 +18037,7 @@
           <a:lstStyle/>
           <a:p>
             <a:r>
-              <a:rPr lang="fr-CA" sz="900" dirty="0"/>
+              <a:rPr lang="fr-CA" sz="900"/>
               <a:t>https://mffp.gouv.qc.ca/jeunesse/chevalier-cuivre-portrait-espece-danger/</a:t>
             </a:r>
           </a:p>
@@ -13778,6 +18052,1014 @@
   </p:cSld>
   <p:clrMapOvr>
     <a:overrideClrMapping bg1="dk1" tx1="lt1" bg2="dk2" tx2="lt2" accent1="accent1" accent2="accent2" accent3="accent3" accent4="accent4" accent5="accent5" accent6="accent6" hlink="hlink" folHlink="folHlink"/>
+  </p:clrMapOvr>
+</p:sld>
+</file>
+
+<file path=ppt/slides/slide28.xml><?xml version="1.0" encoding="utf-8"?>
+<p:sld xmlns:a="http://schemas.openxmlformats.org/drawingml/2006/main" xmlns:r="http://schemas.openxmlformats.org/officeDocument/2006/relationships" xmlns:p="http://schemas.openxmlformats.org/presentationml/2006/main">
+  <p:cSld>
+    <p:spTree>
+      <p:nvGrpSpPr>
+        <p:cNvPr id="1" name=""/>
+        <p:cNvGrpSpPr/>
+        <p:nvPr/>
+      </p:nvGrpSpPr>
+      <p:grpSpPr>
+        <a:xfrm>
+          <a:off x="0" y="0"/>
+          <a:ext cx="0" cy="0"/>
+          <a:chOff x="0" y="0"/>
+          <a:chExt cx="0" cy="0"/>
+        </a:xfrm>
+      </p:grpSpPr>
+      <p:sp>
+        <p:nvSpPr>
+          <p:cNvPr id="2" name="Titre 1">
+            <a:extLst>
+              <a:ext uri="{FF2B5EF4-FFF2-40B4-BE49-F238E27FC236}">
+                <a16:creationId xmlns:a16="http://schemas.microsoft.com/office/drawing/2014/main" id="{2755F7A0-20BB-EF74-1658-92294AAB1D89}"/>
+              </a:ext>
+            </a:extLst>
+          </p:cNvPr>
+          <p:cNvSpPr>
+            <a:spLocks noGrp="1"/>
+          </p:cNvSpPr>
+          <p:nvPr>
+            <p:ph type="title"/>
+          </p:nvPr>
+        </p:nvSpPr>
+        <p:spPr/>
+        <p:txBody>
+          <a:bodyPr/>
+          <a:lstStyle/>
+          <a:p>
+            <a:r>
+              <a:rPr lang="fr-CA"/>
+              <a:t>Bibliographie</a:t>
+            </a:r>
+          </a:p>
+        </p:txBody>
+      </p:sp>
+      <p:sp>
+        <p:nvSpPr>
+          <p:cNvPr id="3" name="Espace réservé du contenu 2">
+            <a:extLst>
+              <a:ext uri="{FF2B5EF4-FFF2-40B4-BE49-F238E27FC236}">
+                <a16:creationId xmlns:a16="http://schemas.microsoft.com/office/drawing/2014/main" id="{14515BA2-F5BE-2C2A-D48B-418406D8001B}"/>
+              </a:ext>
+            </a:extLst>
+          </p:cNvPr>
+          <p:cNvSpPr>
+            <a:spLocks noGrp="1"/>
+          </p:cNvSpPr>
+          <p:nvPr>
+            <p:ph idx="1"/>
+          </p:nvPr>
+        </p:nvSpPr>
+        <p:spPr/>
+        <p:txBody>
+          <a:bodyPr>
+            <a:normAutofit fontScale="32500" lnSpcReduction="20000"/>
+          </a:bodyPr>
+          <a:lstStyle/>
+          <a:p>
+            <a:pPr marL="180975" indent="-180975">
+              <a:buNone/>
+            </a:pPr>
+            <a:r>
+              <a:rPr lang="fr-CA" err="1"/>
+              <a:t>Bannester</a:t>
+            </a:r>
+            <a:r>
+              <a:rPr lang="fr-CA"/>
+              <a:t>-Marchand, N., Vachon, N., </a:t>
+            </a:r>
+            <a:r>
+              <a:rPr lang="fr-CA" err="1"/>
+              <a:t>Mandrak</a:t>
+            </a:r>
+            <a:r>
+              <a:rPr lang="fr-CA"/>
+              <a:t>, N. et Blanchet, F. (2025). Population </a:t>
+            </a:r>
+            <a:r>
+              <a:rPr lang="fr-CA" err="1"/>
+              <a:t>viability</a:t>
+            </a:r>
+            <a:r>
+              <a:rPr lang="fr-CA"/>
+              <a:t> </a:t>
+            </a:r>
+            <a:r>
+              <a:rPr lang="fr-CA" err="1"/>
+              <a:t>analysis</a:t>
+            </a:r>
+            <a:r>
+              <a:rPr lang="fr-CA"/>
+              <a:t> of the </a:t>
+            </a:r>
+            <a:r>
+              <a:rPr lang="fr-CA" err="1"/>
+              <a:t>endangered</a:t>
+            </a:r>
+            <a:r>
+              <a:rPr lang="fr-CA"/>
+              <a:t> </a:t>
+            </a:r>
+            <a:r>
+              <a:rPr lang="fr-CA" err="1"/>
+              <a:t>copper</a:t>
+            </a:r>
+            <a:r>
+              <a:rPr lang="fr-CA"/>
+              <a:t> </a:t>
+            </a:r>
+            <a:r>
+              <a:rPr lang="fr-CA" err="1"/>
+              <a:t>redhorse</a:t>
+            </a:r>
+            <a:r>
+              <a:rPr lang="fr-CA"/>
+              <a:t> </a:t>
+            </a:r>
+            <a:r>
+              <a:rPr lang="fr-CA" i="1" err="1"/>
+              <a:t>Moxostoma</a:t>
+            </a:r>
+            <a:r>
+              <a:rPr lang="fr-CA" i="1"/>
+              <a:t> </a:t>
+            </a:r>
+            <a:r>
+              <a:rPr lang="fr-CA" i="1" err="1"/>
+              <a:t>hubbsi</a:t>
+            </a:r>
+            <a:r>
+              <a:rPr lang="fr-CA"/>
+              <a:t>. </a:t>
+            </a:r>
+            <a:r>
+              <a:rPr lang="fr-CA" i="1" err="1"/>
+              <a:t>Endangered</a:t>
+            </a:r>
+            <a:r>
+              <a:rPr lang="fr-CA" i="1"/>
+              <a:t> </a:t>
+            </a:r>
+            <a:r>
+              <a:rPr lang="fr-CA" i="1" err="1"/>
+              <a:t>Species</a:t>
+            </a:r>
+            <a:r>
+              <a:rPr lang="fr-CA" i="1"/>
+              <a:t> </a:t>
+            </a:r>
+            <a:r>
+              <a:rPr lang="fr-CA" i="1" err="1"/>
+              <a:t>Research</a:t>
+            </a:r>
+            <a:r>
+              <a:rPr lang="fr-CA"/>
+              <a:t>, </a:t>
+            </a:r>
+            <a:r>
+              <a:rPr lang="fr-CA" i="1"/>
+              <a:t>57</a:t>
+            </a:r>
+            <a:r>
+              <a:rPr lang="fr-CA"/>
+              <a:t>, 21‑31. </a:t>
+            </a:r>
+            <a:r>
+              <a:rPr lang="fr-CA">
+                <a:hlinkClick r:id="rId2">
+                  <a:extLst>
+                    <a:ext uri="{A12FA001-AC4F-418D-AE19-62706E023703}">
+                      <ahyp:hlinkClr xmlns:ahyp="http://schemas.microsoft.com/office/drawing/2018/hyperlinkcolor" val="tx"/>
+                    </a:ext>
+                  </a:extLst>
+                </a:hlinkClick>
+              </a:rPr>
+              <a:t>https://doi.org/10.3354/esr01395</a:t>
+            </a:r>
+            <a:endParaRPr lang="fr-CA"/>
+          </a:p>
+          <a:p>
+            <a:pPr marL="180975" indent="-180975">
+              <a:buNone/>
+            </a:pPr>
+            <a:r>
+              <a:rPr lang="fr-CA"/>
+              <a:t>Bernatchez, L. (2004). </a:t>
+            </a:r>
+            <a:r>
+              <a:rPr lang="fr-CA" i="1"/>
+              <a:t>Considérations génétiques et protocole de reproduction relatifs au plan de rétablissement du chevalier cuivré (</a:t>
+            </a:r>
+            <a:r>
+              <a:rPr lang="fr-CA" err="1"/>
+              <a:t>Moxostoma</a:t>
+            </a:r>
+            <a:r>
+              <a:rPr lang="fr-CA"/>
+              <a:t> </a:t>
+            </a:r>
+            <a:r>
+              <a:rPr lang="fr-CA" err="1"/>
+              <a:t>hubbsi</a:t>
+            </a:r>
+            <a:r>
+              <a:rPr lang="fr-CA" i="1"/>
+              <a:t>)</a:t>
+            </a:r>
+            <a:r>
+              <a:rPr lang="fr-CA"/>
+              <a:t> ( [Technique]). Ministère des Ressources naturelles, de la Faune et des Parcs, direction de l’aménagement de la faune de Montréal, de Laval et de la Montérégie, Longueuil et Pêches et Océans Canada. </a:t>
+            </a:r>
+            <a:r>
+              <a:rPr lang="fr-CA">
+                <a:hlinkClick r:id="rId3">
+                  <a:extLst>
+                    <a:ext uri="{A12FA001-AC4F-418D-AE19-62706E023703}">
+                      <ahyp:hlinkClr xmlns:ahyp="http://schemas.microsoft.com/office/drawing/2018/hyperlinkcolor" val="tx"/>
+                    </a:ext>
+                  </a:extLst>
+                </a:hlinkClick>
+              </a:rPr>
+              <a:t>https://numerique.banq.qc.ca/patrimoine/details/52327/66775</a:t>
+            </a:r>
+            <a:endParaRPr lang="fr-CA"/>
+          </a:p>
+          <a:p>
+            <a:pPr marL="180975" indent="-180975">
+              <a:buNone/>
+            </a:pPr>
+            <a:r>
+              <a:rPr lang="fr-CA" i="1"/>
+              <a:t>Chevalier cuivré</a:t>
+            </a:r>
+            <a:r>
+              <a:rPr lang="fr-CA"/>
+              <a:t>. (s. d.). Gouvernement du Québec. </a:t>
+            </a:r>
+            <a:r>
+              <a:rPr lang="fr-CA">
+                <a:hlinkClick r:id="rId4">
+                  <a:extLst>
+                    <a:ext uri="{A12FA001-AC4F-418D-AE19-62706E023703}">
+                      <ahyp:hlinkClr xmlns:ahyp="http://schemas.microsoft.com/office/drawing/2018/hyperlinkcolor" val="tx"/>
+                    </a:ext>
+                  </a:extLst>
+                </a:hlinkClick>
+              </a:rPr>
+              <a:t>https://www.quebec.ca/agriculture-environnement-et-ressources-naturelles/faune/animaux-sauvages-quebec/fiches-especes-fauniques/chevalier-cuivre</a:t>
+            </a:r>
+            <a:endParaRPr lang="fr-CA"/>
+          </a:p>
+          <a:p>
+            <a:pPr marL="180975" indent="-180975">
+              <a:buNone/>
+            </a:pPr>
+            <a:r>
+              <a:rPr lang="fr-CA"/>
+              <a:t>COSEPAC. (2014). Évaluation et Rapport de situation du COSEPAC sur le chevalier cuivré (</a:t>
+            </a:r>
+            <a:r>
+              <a:rPr lang="fr-CA" i="1" err="1"/>
+              <a:t>Moxostoma</a:t>
+            </a:r>
+            <a:r>
+              <a:rPr lang="fr-CA" i="1"/>
+              <a:t> </a:t>
+            </a:r>
+            <a:r>
+              <a:rPr lang="fr-CA" i="1" err="1"/>
+              <a:t>hubbsi</a:t>
+            </a:r>
+            <a:r>
+              <a:rPr lang="fr-CA"/>
+              <a:t>) au Canada. </a:t>
+            </a:r>
+            <a:r>
+              <a:rPr lang="fr-CA" i="1"/>
+              <a:t>Comité sur la situation des espèces en péril au Canada</a:t>
+            </a:r>
+            <a:r>
+              <a:rPr lang="fr-CA"/>
+              <a:t>, xiii + 81.</a:t>
+            </a:r>
+          </a:p>
+          <a:p>
+            <a:pPr marL="180975" indent="-180975">
+              <a:buNone/>
+            </a:pPr>
+            <a:r>
+              <a:rPr lang="fr-CA" err="1"/>
+              <a:t>Dahlberg</a:t>
+            </a:r>
+            <a:r>
+              <a:rPr lang="fr-CA"/>
+              <a:t>, M. D. (1979). A </a:t>
+            </a:r>
+            <a:r>
+              <a:rPr lang="fr-CA" err="1"/>
+              <a:t>review</a:t>
+            </a:r>
+            <a:r>
+              <a:rPr lang="fr-CA"/>
+              <a:t> of </a:t>
+            </a:r>
+            <a:r>
+              <a:rPr lang="fr-CA" err="1"/>
+              <a:t>survival</a:t>
+            </a:r>
+            <a:r>
+              <a:rPr lang="fr-CA"/>
+              <a:t> rates of </a:t>
+            </a:r>
+            <a:r>
+              <a:rPr lang="fr-CA" err="1"/>
+              <a:t>fish</a:t>
+            </a:r>
+            <a:r>
+              <a:rPr lang="fr-CA"/>
+              <a:t> </a:t>
+            </a:r>
+            <a:r>
+              <a:rPr lang="fr-CA" err="1"/>
+              <a:t>eggs</a:t>
+            </a:r>
+            <a:r>
+              <a:rPr lang="fr-CA"/>
+              <a:t> and </a:t>
+            </a:r>
+            <a:r>
+              <a:rPr lang="fr-CA" err="1"/>
+              <a:t>larvae</a:t>
+            </a:r>
+            <a:r>
+              <a:rPr lang="fr-CA"/>
+              <a:t> in relation to impact </a:t>
+            </a:r>
+            <a:r>
+              <a:rPr lang="fr-CA" err="1"/>
+              <a:t>assessments</a:t>
+            </a:r>
+            <a:r>
+              <a:rPr lang="fr-CA"/>
+              <a:t>. </a:t>
+            </a:r>
+            <a:r>
+              <a:rPr lang="fr-CA" i="1"/>
+              <a:t>Marine </a:t>
+            </a:r>
+            <a:r>
+              <a:rPr lang="fr-CA" i="1" err="1"/>
+              <a:t>Fisheries</a:t>
+            </a:r>
+            <a:r>
+              <a:rPr lang="fr-CA" i="1"/>
+              <a:t> </a:t>
+            </a:r>
+            <a:r>
+              <a:rPr lang="fr-CA" i="1" err="1"/>
+              <a:t>Review</a:t>
+            </a:r>
+            <a:r>
+              <a:rPr lang="fr-CA"/>
+              <a:t>, </a:t>
+            </a:r>
+            <a:r>
+              <a:rPr lang="fr-CA" i="1"/>
+              <a:t>41</a:t>
+            </a:r>
+            <a:r>
+              <a:rPr lang="fr-CA"/>
+              <a:t>(3).</a:t>
+            </a:r>
+          </a:p>
+          <a:p>
+            <a:pPr marL="180975" indent="-180975">
+              <a:buNone/>
+            </a:pPr>
+            <a:r>
+              <a:rPr lang="fr-CA" err="1"/>
+              <a:t>Hinrichsen</a:t>
+            </a:r>
+            <a:r>
+              <a:rPr lang="fr-CA"/>
+              <a:t>, R. A., </a:t>
+            </a:r>
+            <a:r>
+              <a:rPr lang="fr-CA" err="1"/>
+              <a:t>Yokomizo</a:t>
+            </a:r>
+            <a:r>
+              <a:rPr lang="fr-CA"/>
+              <a:t>, H. et </a:t>
+            </a:r>
+            <a:r>
+              <a:rPr lang="fr-CA" err="1"/>
+              <a:t>Salguero</a:t>
+            </a:r>
+            <a:r>
+              <a:rPr lang="fr-CA"/>
+              <a:t>-Gómez, R. (2026, 6 février). </a:t>
+            </a:r>
+            <a:r>
+              <a:rPr lang="fr-CA" err="1"/>
+              <a:t>From</a:t>
+            </a:r>
+            <a:r>
+              <a:rPr lang="fr-CA"/>
+              <a:t> </a:t>
+            </a:r>
+            <a:r>
+              <a:rPr lang="fr-CA" err="1"/>
+              <a:t>theory</a:t>
+            </a:r>
+            <a:r>
+              <a:rPr lang="fr-CA"/>
+              <a:t> to application: </a:t>
+            </a:r>
+            <a:r>
+              <a:rPr lang="fr-CA" err="1"/>
+              <a:t>Elasticity</a:t>
+            </a:r>
+            <a:r>
+              <a:rPr lang="fr-CA"/>
+              <a:t>-consistent </a:t>
+            </a:r>
+            <a:r>
+              <a:rPr lang="fr-CA" err="1"/>
+              <a:t>aggregation</a:t>
+            </a:r>
+            <a:r>
+              <a:rPr lang="fr-CA"/>
+              <a:t> of Leslie matrix population </a:t>
+            </a:r>
+            <a:r>
+              <a:rPr lang="fr-CA" err="1"/>
+              <a:t>models</a:t>
+            </a:r>
+            <a:r>
+              <a:rPr lang="fr-CA"/>
+              <a:t> for comparative </a:t>
+            </a:r>
+            <a:r>
+              <a:rPr lang="fr-CA" err="1"/>
+              <a:t>demography</a:t>
+            </a:r>
+            <a:r>
+              <a:rPr lang="fr-CA"/>
+              <a:t>. </a:t>
+            </a:r>
+            <a:r>
+              <a:rPr lang="fr-CA" err="1"/>
+              <a:t>bioRxiv</a:t>
+            </a:r>
+            <a:r>
+              <a:rPr lang="fr-CA"/>
+              <a:t>. </a:t>
+            </a:r>
+            <a:r>
+              <a:rPr lang="fr-CA">
+                <a:hlinkClick r:id="rId5">
+                  <a:extLst>
+                    <a:ext uri="{A12FA001-AC4F-418D-AE19-62706E023703}">
+                      <ahyp:hlinkClr xmlns:ahyp="http://schemas.microsoft.com/office/drawing/2018/hyperlinkcolor" val="tx"/>
+                    </a:ext>
+                  </a:extLst>
+                </a:hlinkClick>
+              </a:rPr>
+              <a:t>https://doi.org/10.64898/2026.02.04.703802</a:t>
+            </a:r>
+            <a:endParaRPr lang="fr-CA"/>
+          </a:p>
+          <a:p>
+            <a:pPr marL="180975" indent="-180975">
+              <a:buNone/>
+            </a:pPr>
+            <a:r>
+              <a:rPr lang="fr-CA" err="1"/>
+              <a:t>Mongeau</a:t>
+            </a:r>
+            <a:r>
+              <a:rPr lang="fr-CA"/>
+              <a:t>, J. R., Dumont, P. et Cloutier, L. (1986). </a:t>
+            </a:r>
+            <a:r>
+              <a:rPr lang="fr-CA" i="1"/>
+              <a:t>La biologie du Suceur cuivré, </a:t>
+            </a:r>
+            <a:r>
+              <a:rPr lang="fr-CA" err="1"/>
+              <a:t>Moxostoma</a:t>
+            </a:r>
+            <a:r>
+              <a:rPr lang="fr-CA"/>
+              <a:t> </a:t>
+            </a:r>
+            <a:r>
+              <a:rPr lang="fr-CA" err="1"/>
+              <a:t>hubbsi</a:t>
+            </a:r>
+            <a:r>
+              <a:rPr lang="fr-CA" i="1"/>
+              <a:t>, une espèce rare et endémique à la région de Montréal, Québec, Canada</a:t>
+            </a:r>
+            <a:r>
+              <a:rPr lang="fr-CA"/>
+              <a:t>. </a:t>
+            </a:r>
+            <a:r>
+              <a:rPr lang="fr-CA">
+                <a:hlinkClick r:id="rId6">
+                  <a:extLst>
+                    <a:ext uri="{A12FA001-AC4F-418D-AE19-62706E023703}">
+                      <ahyp:hlinkClr xmlns:ahyp="http://schemas.microsoft.com/office/drawing/2018/hyperlinkcolor" val="tx"/>
+                    </a:ext>
+                  </a:extLst>
+                </a:hlinkClick>
+              </a:rPr>
+              <a:t>https://portals.iucn.org/library/node/15279</a:t>
+            </a:r>
+            <a:endParaRPr lang="fr-CA"/>
+          </a:p>
+          <a:p>
+            <a:pPr marL="180975" indent="-180975">
+              <a:buNone/>
+            </a:pPr>
+            <a:r>
+              <a:rPr lang="fr-CA" err="1"/>
+              <a:t>Mongeau</a:t>
+            </a:r>
+            <a:r>
+              <a:rPr lang="fr-CA"/>
+              <a:t>, J.-R., Dumont, P. et Cloutier, L. (1992). La biologie du suceur cuivré (</a:t>
+            </a:r>
+            <a:r>
+              <a:rPr lang="fr-CA" i="1" err="1"/>
+              <a:t>Moxostoma</a:t>
+            </a:r>
+            <a:r>
+              <a:rPr lang="fr-CA" i="1"/>
+              <a:t> </a:t>
+            </a:r>
+            <a:r>
+              <a:rPr lang="fr-CA" i="1" err="1"/>
+              <a:t>hubbsi</a:t>
+            </a:r>
+            <a:r>
+              <a:rPr lang="fr-CA"/>
+              <a:t>) comparée à celle de quatre autres espèces de </a:t>
+            </a:r>
+            <a:r>
+              <a:rPr lang="fr-CA" i="1" err="1"/>
+              <a:t>Moxostoma</a:t>
+            </a:r>
+            <a:r>
+              <a:rPr lang="fr-CA"/>
+              <a:t> (</a:t>
+            </a:r>
+            <a:r>
+              <a:rPr lang="fr-CA" i="1"/>
+              <a:t>M. </a:t>
+            </a:r>
+            <a:r>
+              <a:rPr lang="fr-CA" i="1" err="1"/>
+              <a:t>anisurum</a:t>
+            </a:r>
+            <a:r>
+              <a:rPr lang="fr-CA" i="1"/>
+              <a:t>, M. </a:t>
+            </a:r>
+            <a:r>
+              <a:rPr lang="fr-CA" i="1" err="1"/>
+              <a:t>carinatum</a:t>
+            </a:r>
+            <a:r>
+              <a:rPr lang="fr-CA" i="1"/>
+              <a:t>, M. </a:t>
+            </a:r>
+            <a:r>
+              <a:rPr lang="fr-CA" i="1" err="1"/>
+              <a:t>macrolepidotum</a:t>
+            </a:r>
+            <a:r>
+              <a:rPr lang="fr-CA"/>
+              <a:t> et</a:t>
+            </a:r>
+            <a:r>
+              <a:rPr lang="fr-CA" i="1"/>
+              <a:t> M. </a:t>
+            </a:r>
+            <a:r>
+              <a:rPr lang="fr-CA" i="1" err="1"/>
+              <a:t>valenciennesi</a:t>
+            </a:r>
+            <a:r>
+              <a:rPr lang="fr-CA"/>
+              <a:t>). </a:t>
+            </a:r>
+            <a:r>
+              <a:rPr lang="fr-CA" i="1"/>
+              <a:t>Canadian Journal of </a:t>
+            </a:r>
+            <a:r>
+              <a:rPr lang="fr-CA" i="1" err="1"/>
+              <a:t>Zoology</a:t>
+            </a:r>
+            <a:r>
+              <a:rPr lang="fr-CA"/>
+              <a:t>, </a:t>
+            </a:r>
+            <a:r>
+              <a:rPr lang="fr-CA" i="1"/>
+              <a:t>70</a:t>
+            </a:r>
+            <a:r>
+              <a:rPr lang="fr-CA"/>
+              <a:t>(7), 1354‑1363. </a:t>
+            </a:r>
+            <a:r>
+              <a:rPr lang="fr-CA">
+                <a:hlinkClick r:id="rId7">
+                  <a:extLst>
+                    <a:ext uri="{A12FA001-AC4F-418D-AE19-62706E023703}">
+                      <ahyp:hlinkClr xmlns:ahyp="http://schemas.microsoft.com/office/drawing/2018/hyperlinkcolor" val="tx"/>
+                    </a:ext>
+                  </a:extLst>
+                </a:hlinkClick>
+              </a:rPr>
+              <a:t>https://doi.org/10.1139/z92-191</a:t>
+            </a:r>
+            <a:endParaRPr lang="fr-CA"/>
+          </a:p>
+          <a:p>
+            <a:pPr marL="180975" indent="-180975">
+              <a:buNone/>
+            </a:pPr>
+            <a:r>
+              <a:rPr lang="fr-CA" err="1"/>
+              <a:t>NatureServe</a:t>
+            </a:r>
+            <a:r>
+              <a:rPr lang="fr-CA"/>
+              <a:t>. (2014). </a:t>
+            </a:r>
+            <a:r>
+              <a:rPr lang="fr-CA" i="1" err="1"/>
+              <a:t>Moxostoma</a:t>
+            </a:r>
+            <a:r>
+              <a:rPr lang="fr-CA" i="1"/>
+              <a:t> </a:t>
+            </a:r>
+            <a:r>
+              <a:rPr lang="fr-CA" i="1" err="1"/>
+              <a:t>hubbsi</a:t>
+            </a:r>
+            <a:r>
+              <a:rPr lang="fr-CA"/>
+              <a:t>. The IUCN Red List of </a:t>
+            </a:r>
+            <a:r>
+              <a:rPr lang="fr-CA" err="1"/>
+              <a:t>Threatened</a:t>
+            </a:r>
+            <a:r>
+              <a:rPr lang="fr-CA"/>
+              <a:t> </a:t>
+            </a:r>
+            <a:r>
+              <a:rPr lang="fr-CA" err="1"/>
+              <a:t>Species</a:t>
+            </a:r>
+            <a:r>
+              <a:rPr lang="fr-CA"/>
+              <a:t>. </a:t>
+            </a:r>
+            <a:r>
+              <a:rPr lang="fr-CA">
+                <a:hlinkClick r:id="rId8">
+                  <a:extLst>
+                    <a:ext uri="{A12FA001-AC4F-418D-AE19-62706E023703}">
+                      <ahyp:hlinkClr xmlns:ahyp="http://schemas.microsoft.com/office/drawing/2018/hyperlinkcolor" val="tx"/>
+                    </a:ext>
+                  </a:extLst>
+                </a:hlinkClick>
+              </a:rPr>
+              <a:t>https://doi.org/10.2305/IUCN.UK.2014-1.RLTS.T13917A58135857.en</a:t>
+            </a:r>
+            <a:endParaRPr lang="fr-CA"/>
+          </a:p>
+          <a:p>
+            <a:pPr marL="180975" indent="-180975">
+              <a:buNone/>
+            </a:pPr>
+            <a:r>
+              <a:rPr lang="fr-CA"/>
+              <a:t>Roberts, L. J., Taylor, J. et Garcia de </a:t>
+            </a:r>
+            <a:r>
+              <a:rPr lang="fr-CA" err="1"/>
+              <a:t>Leaniz</a:t>
+            </a:r>
+            <a:r>
+              <a:rPr lang="fr-CA"/>
+              <a:t>, C. (2011). </a:t>
+            </a:r>
+            <a:r>
+              <a:rPr lang="fr-CA" err="1"/>
+              <a:t>Environmental</a:t>
+            </a:r>
+            <a:r>
+              <a:rPr lang="fr-CA"/>
+              <a:t> </a:t>
+            </a:r>
+            <a:r>
+              <a:rPr lang="fr-CA" err="1"/>
+              <a:t>enrichment</a:t>
+            </a:r>
+            <a:r>
+              <a:rPr lang="fr-CA"/>
+              <a:t> </a:t>
+            </a:r>
+            <a:r>
+              <a:rPr lang="fr-CA" err="1"/>
+              <a:t>reduces</a:t>
+            </a:r>
+            <a:r>
+              <a:rPr lang="fr-CA"/>
+              <a:t> </a:t>
+            </a:r>
+            <a:r>
+              <a:rPr lang="fr-CA" err="1"/>
+              <a:t>maladaptive</a:t>
+            </a:r>
+            <a:r>
+              <a:rPr lang="fr-CA"/>
+              <a:t> </a:t>
+            </a:r>
+            <a:r>
+              <a:rPr lang="fr-CA" err="1"/>
+              <a:t>risk-taking</a:t>
+            </a:r>
+            <a:r>
+              <a:rPr lang="fr-CA"/>
+              <a:t> </a:t>
+            </a:r>
+            <a:r>
+              <a:rPr lang="fr-CA" err="1"/>
+              <a:t>behavior</a:t>
+            </a:r>
+            <a:r>
+              <a:rPr lang="fr-CA"/>
+              <a:t> in </a:t>
+            </a:r>
+            <a:r>
+              <a:rPr lang="fr-CA" err="1"/>
+              <a:t>salmon</a:t>
+            </a:r>
+            <a:r>
+              <a:rPr lang="fr-CA"/>
+              <a:t> </a:t>
+            </a:r>
+            <a:r>
+              <a:rPr lang="fr-CA" err="1"/>
+              <a:t>reared</a:t>
+            </a:r>
+            <a:r>
+              <a:rPr lang="fr-CA"/>
+              <a:t> for conservation. </a:t>
+            </a:r>
+            <a:r>
+              <a:rPr lang="fr-CA" i="1" err="1"/>
+              <a:t>Biological</a:t>
+            </a:r>
+            <a:r>
+              <a:rPr lang="fr-CA" i="1"/>
+              <a:t> Conservation</a:t>
+            </a:r>
+            <a:r>
+              <a:rPr lang="fr-CA"/>
+              <a:t>, </a:t>
+            </a:r>
+            <a:r>
+              <a:rPr lang="fr-CA" i="1"/>
+              <a:t>144</a:t>
+            </a:r>
+            <a:r>
+              <a:rPr lang="fr-CA"/>
+              <a:t>(7), 1972‑1979. </a:t>
+            </a:r>
+            <a:r>
+              <a:rPr lang="fr-CA">
+                <a:hlinkClick r:id="rId9">
+                  <a:extLst>
+                    <a:ext uri="{A12FA001-AC4F-418D-AE19-62706E023703}">
+                      <ahyp:hlinkClr xmlns:ahyp="http://schemas.microsoft.com/office/drawing/2018/hyperlinkcolor" val="tx"/>
+                    </a:ext>
+                  </a:extLst>
+                </a:hlinkClick>
+              </a:rPr>
+              <a:t>https://doi.org/10.1016/j.biocon.2011.04.017</a:t>
+            </a:r>
+            <a:endParaRPr lang="fr-CA"/>
+          </a:p>
+          <a:p>
+            <a:pPr marL="180975" indent="-180975">
+              <a:buNone/>
+            </a:pPr>
+            <a:r>
+              <a:rPr lang="fr-CA"/>
+              <a:t>Vachon, N. (2010). </a:t>
+            </a:r>
+            <a:r>
+              <a:rPr lang="fr-CA" i="1"/>
+              <a:t>Reproduction artificielle, ensemencements et suivi du recrutement du chevalier cuivré en 2009</a:t>
+            </a:r>
+            <a:r>
+              <a:rPr lang="fr-CA"/>
+              <a:t>. Ministère des Ressources naturelles et de la Faune.</a:t>
+            </a:r>
+          </a:p>
+          <a:p>
+            <a:pPr marL="180975" indent="-180975">
+              <a:buNone/>
+            </a:pPr>
+            <a:r>
+              <a:rPr lang="fr-CA"/>
+              <a:t>Vachon, N. (2020). </a:t>
+            </a:r>
+            <a:r>
+              <a:rPr lang="fr-CA" i="1"/>
+              <a:t>Recherche de subadultes du chevalier cuivré et suivi du recrutement en 2016</a:t>
+            </a:r>
+            <a:r>
+              <a:rPr lang="fr-CA"/>
+              <a:t>. </a:t>
+            </a:r>
+            <a:r>
+              <a:rPr lang="fr-CA">
+                <a:hlinkClick r:id="rId10">
+                  <a:extLst>
+                    <a:ext uri="{A12FA001-AC4F-418D-AE19-62706E023703}">
+                      <ahyp:hlinkClr xmlns:ahyp="http://schemas.microsoft.com/office/drawing/2018/hyperlinkcolor" val="tx"/>
+                    </a:ext>
+                  </a:extLst>
+                </a:hlinkClick>
+              </a:rPr>
+              <a:t>https://doi.org/10.13140/RG.2.2.33614.79689</a:t>
+            </a:r>
+            <a:endParaRPr lang="fr-CA"/>
+          </a:p>
+          <a:p>
+            <a:pPr marL="180975" indent="-180975">
+              <a:buNone/>
+            </a:pPr>
+            <a:r>
+              <a:rPr lang="fr-CA"/>
+              <a:t>Vachon, N. (2021a). </a:t>
+            </a:r>
+            <a:r>
+              <a:rPr lang="fr-CA" i="1"/>
+              <a:t>Reproduction artificielle, ensemencement et suivi de la population du chevalier cuivré (</a:t>
+            </a:r>
+            <a:r>
+              <a:rPr lang="fr-CA" err="1"/>
+              <a:t>Moxostoma</a:t>
+            </a:r>
+            <a:r>
+              <a:rPr lang="fr-CA"/>
+              <a:t> </a:t>
+            </a:r>
+            <a:r>
+              <a:rPr lang="fr-CA" err="1"/>
+              <a:t>hubbsi</a:t>
+            </a:r>
+            <a:r>
+              <a:rPr lang="fr-CA" i="1"/>
+              <a:t>) en 2017</a:t>
+            </a:r>
+            <a:r>
+              <a:rPr lang="fr-CA"/>
+              <a:t>.</a:t>
+            </a:r>
+          </a:p>
+          <a:p>
+            <a:pPr marL="180975" indent="-180975">
+              <a:buNone/>
+            </a:pPr>
+            <a:r>
+              <a:rPr lang="fr-CA"/>
+              <a:t>Vachon, N. (2021b). </a:t>
+            </a:r>
+            <a:r>
+              <a:rPr lang="fr-CA" i="1"/>
+              <a:t>Reproduction artificielle, ensemencements et suivi de la population du chevalier cuivré (</a:t>
+            </a:r>
+            <a:r>
+              <a:rPr lang="fr-CA" err="1"/>
+              <a:t>Moxostoma</a:t>
+            </a:r>
+            <a:r>
+              <a:rPr lang="fr-CA"/>
+              <a:t> </a:t>
+            </a:r>
+            <a:r>
+              <a:rPr lang="fr-CA" err="1"/>
+              <a:t>hubbsi</a:t>
+            </a:r>
+            <a:r>
+              <a:rPr lang="fr-CA" i="1"/>
+              <a:t>) en 2018</a:t>
+            </a:r>
+            <a:r>
+              <a:rPr lang="fr-CA"/>
+              <a:t>.</a:t>
+            </a:r>
+          </a:p>
+          <a:p>
+            <a:pPr marL="180975" indent="-180975">
+              <a:buNone/>
+            </a:pPr>
+            <a:r>
+              <a:rPr lang="fr-CA"/>
+              <a:t>Vachon, N. (2021c). </a:t>
+            </a:r>
+            <a:r>
+              <a:rPr lang="fr-CA" i="1"/>
+              <a:t>Reproduction artificielle, ensemencements et suivi de la population du chevalier cuivré (</a:t>
+            </a:r>
+            <a:r>
+              <a:rPr lang="fr-CA" err="1"/>
+              <a:t>Moxostoma</a:t>
+            </a:r>
+            <a:r>
+              <a:rPr lang="fr-CA"/>
+              <a:t> </a:t>
+            </a:r>
+            <a:r>
+              <a:rPr lang="fr-CA" err="1"/>
+              <a:t>hubbsi</a:t>
+            </a:r>
+            <a:r>
+              <a:rPr lang="fr-CA" i="1"/>
+              <a:t>) en 2019</a:t>
+            </a:r>
+            <a:r>
+              <a:rPr lang="fr-CA"/>
+              <a:t>. </a:t>
+            </a:r>
+            <a:r>
+              <a:rPr lang="fr-CA">
+                <a:solidFill>
+                  <a:srgbClr val="778BA2"/>
+                </a:solidFill>
+                <a:hlinkClick r:id="rId11">
+                  <a:extLst>
+                    <a:ext uri="{A12FA001-AC4F-418D-AE19-62706E023703}">
+                      <ahyp:hlinkClr xmlns:ahyp="http://schemas.microsoft.com/office/drawing/2018/hyperlinkcolor" val="tx"/>
+                    </a:ext>
+                  </a:extLst>
+                </a:hlinkClick>
+              </a:rPr>
+              <a:t>https://www.researchgate.net/publication/356970163_Reproduction_artificielle_ensemencements_et_suivi_de_la_population_du_chevalier_cuivre_Moxostoma_hubbsi_en_</a:t>
+            </a:r>
+            <a:r>
+              <a:rPr lang="fr-CA">
+                <a:hlinkClick r:id="rId11">
+                  <a:extLst>
+                    <a:ext uri="{A12FA001-AC4F-418D-AE19-62706E023703}">
+                      <ahyp:hlinkClr xmlns:ahyp="http://schemas.microsoft.com/office/drawing/2018/hyperlinkcolor" val="tx"/>
+                    </a:ext>
+                  </a:extLst>
+                </a:hlinkClick>
+              </a:rPr>
+              <a:t>2019</a:t>
+            </a:r>
+            <a:endParaRPr lang="fr-CA"/>
+          </a:p>
+          <a:p>
+            <a:pPr marL="180975" indent="-180975">
+              <a:buNone/>
+            </a:pPr>
+            <a:endParaRPr lang="fr-CA"/>
+          </a:p>
+        </p:txBody>
+      </p:sp>
+    </p:spTree>
+    <p:extLst>
+      <p:ext uri="{BB962C8B-B14F-4D97-AF65-F5344CB8AC3E}">
+        <p14:creationId xmlns:p14="http://schemas.microsoft.com/office/powerpoint/2010/main" val="3557562823"/>
+      </p:ext>
+    </p:extLst>
+  </p:cSld>
+  <p:clrMapOvr>
+    <a:masterClrMapping/>
   </p:clrMapOvr>
 </p:sld>
 </file>
@@ -13821,78 +19103,38 @@
           <a:lstStyle/>
           <a:p>
             <a:r>
-              <a:rPr lang="fr-CA" dirty="0"/>
+              <a:rPr lang="fr-CA"/>
               <a:t>Traits d’histoire de vie</a:t>
             </a:r>
           </a:p>
         </p:txBody>
       </p:sp>
-      <p:sp>
-        <p:nvSpPr>
-          <p:cNvPr id="3" name="Espace réservé du contenu 2">
+      <p:graphicFrame>
+        <p:nvGraphicFramePr>
+          <p:cNvPr id="6" name="Espace réservé du contenu 2">
             <a:extLst>
               <a:ext uri="{FF2B5EF4-FFF2-40B4-BE49-F238E27FC236}">
-                <a16:creationId xmlns:a16="http://schemas.microsoft.com/office/drawing/2014/main" id="{08F967FB-148E-F4FA-95FA-17BCCB19C653}"/>
+                <a16:creationId xmlns:a16="http://schemas.microsoft.com/office/drawing/2014/main" id="{5A794BAE-EB09-B02E-F77D-B89EA998F569}"/>
               </a:ext>
             </a:extLst>
           </p:cNvPr>
-          <p:cNvSpPr>
-            <a:spLocks noGrp="1"/>
-          </p:cNvSpPr>
+          <p:cNvGraphicFramePr>
+            <a:graphicFrameLocks noGrp="1"/>
+          </p:cNvGraphicFramePr>
           <p:nvPr>
             <p:ph idx="1"/>
           </p:nvPr>
-        </p:nvSpPr>
-        <p:spPr/>
-        <p:txBody>
-          <a:bodyPr/>
-          <a:lstStyle/>
-          <a:p>
-            <a:pPr>
-              <a:lnSpc>
-                <a:spcPct val="200000"/>
-              </a:lnSpc>
-            </a:pPr>
-            <a:r>
-              <a:rPr lang="fr-CA" dirty="0"/>
-              <a:t>Maturité sexuelle à 10 ans</a:t>
-            </a:r>
-          </a:p>
-          <a:p>
-            <a:pPr>
-              <a:lnSpc>
-                <a:spcPct val="200000"/>
-              </a:lnSpc>
-            </a:pPr>
-            <a:r>
-              <a:rPr lang="fr-CA" dirty="0"/>
-              <a:t>Espérance de vie &gt;30 ans</a:t>
-            </a:r>
-          </a:p>
-          <a:p>
-            <a:pPr>
-              <a:lnSpc>
-                <a:spcPct val="200000"/>
-              </a:lnSpc>
-            </a:pPr>
-            <a:r>
-              <a:rPr lang="fr-CA" dirty="0"/>
-              <a:t>Produit plus d’œufs par kg de tous chevaliers</a:t>
-            </a:r>
-          </a:p>
-          <a:p>
-            <a:pPr>
-              <a:lnSpc>
-                <a:spcPct val="200000"/>
-              </a:lnSpc>
-            </a:pPr>
-            <a:r>
-              <a:rPr lang="fr-CA" dirty="0"/>
-              <a:t>2 sites de fraie connus</a:t>
-            </a:r>
-          </a:p>
-        </p:txBody>
-      </p:sp>
+        </p:nvGraphicFramePr>
+        <p:xfrm>
+          <a:off x="700635" y="2221992"/>
+          <a:ext cx="10691265" cy="3739896"/>
+        </p:xfrm>
+        <a:graphic>
+          <a:graphicData uri="http://schemas.openxmlformats.org/drawingml/2006/diagram">
+            <dgm:relIds xmlns:dgm="http://schemas.openxmlformats.org/drawingml/2006/diagram" xmlns:r="http://schemas.openxmlformats.org/officeDocument/2006/relationships" r:dm="rId2" r:lo="rId3" r:qs="rId4" r:cs="rId5"/>
+          </a:graphicData>
+        </a:graphic>
+      </p:graphicFrame>
       <p:sp>
         <p:nvSpPr>
           <p:cNvPr id="4" name="ZoneTexte 3">
@@ -13923,15 +19165,15 @@
           <a:p>
             <a:pPr algn="r"/>
             <a:r>
-              <a:rPr lang="fr-CA" sz="1200" dirty="0"/>
+              <a:rPr lang="fr-CA" sz="1200"/>
               <a:t>(</a:t>
             </a:r>
             <a:r>
-              <a:rPr lang="fr-CA" sz="1200" dirty="0" err="1"/>
+              <a:rPr lang="fr-CA" sz="1200" err="1"/>
               <a:t>Mongeau</a:t>
             </a:r>
             <a:r>
-              <a:rPr lang="fr-CA" sz="1200" dirty="0"/>
+              <a:rPr lang="fr-CA" sz="1200"/>
               <a:t> et al., 1992)</a:t>
             </a:r>
           </a:p>
@@ -13989,7 +19231,7 @@
           <a:lstStyle/>
           <a:p>
             <a:r>
-              <a:rPr lang="fr-CA" dirty="0"/>
+              <a:rPr lang="fr-CA"/>
               <a:t>État Légal</a:t>
             </a:r>
           </a:p>
@@ -14055,7 +19297,6 @@
               <a:rPr lang="fr-CA"/>
               <a:t>Menacée (IUCN) (NatureServe, 2014)</a:t>
             </a:r>
-            <a:endParaRPr lang="fr-CA" dirty="0"/>
           </a:p>
         </p:txBody>
       </p:sp>
@@ -14142,7 +19383,7 @@
           <a:lstStyle/>
           <a:p>
             <a:r>
-              <a:rPr lang="fr-CA" dirty="0"/>
+              <a:rPr lang="fr-CA"/>
               <a:t>Menaces</a:t>
             </a:r>
           </a:p>
@@ -14175,7 +19416,7 @@
               </a:lnSpc>
             </a:pPr>
             <a:r>
-              <a:rPr lang="fr-CA" dirty="0"/>
+              <a:rPr lang="fr-CA"/>
               <a:t>Fragmentation de l’habitat</a:t>
             </a:r>
           </a:p>
@@ -14186,7 +19427,7 @@
               </a:lnSpc>
             </a:pPr>
             <a:r>
-              <a:rPr lang="fr-CA" dirty="0"/>
+              <a:rPr lang="fr-CA"/>
               <a:t>Pollution</a:t>
             </a:r>
           </a:p>
@@ -14197,7 +19438,7 @@
               </a:lnSpc>
             </a:pPr>
             <a:r>
-              <a:rPr lang="fr-CA" dirty="0"/>
+              <a:rPr lang="fr-CA"/>
               <a:t>Espèces envahissantes (Tanche et Gobie à taches noires) </a:t>
             </a:r>
           </a:p>
@@ -14208,7 +19449,7 @@
               </a:lnSpc>
             </a:pPr>
             <a:r>
-              <a:rPr lang="fr-CA" dirty="0"/>
+              <a:rPr lang="fr-CA"/>
               <a:t>Changements climatiques</a:t>
             </a:r>
           </a:p>
@@ -14218,7 +19459,7 @@
                 <a:spcPct val="200000"/>
               </a:lnSpc>
             </a:pPr>
-            <a:endParaRPr lang="fr-CA" dirty="0"/>
+            <a:endParaRPr lang="fr-CA"/>
           </a:p>
         </p:txBody>
       </p:sp>
@@ -14252,7 +19493,7 @@
           <a:p>
             <a:pPr algn="r"/>
             <a:r>
-              <a:rPr lang="fr-CA" sz="1200" dirty="0"/>
+              <a:rPr lang="fr-CA" sz="1200"/>
               <a:t>(COSEPAC, 2014)</a:t>
             </a:r>
           </a:p>
@@ -14310,7 +19551,7 @@
           <a:lstStyle/>
           <a:p>
             <a:r>
-              <a:rPr lang="fr-CA" dirty="0"/>
+              <a:rPr lang="fr-CA"/>
               <a:t>Mesures établies</a:t>
             </a:r>
           </a:p>
@@ -14343,7 +19584,7 @@
               </a:lnSpc>
             </a:pPr>
             <a:r>
-              <a:rPr lang="fr-CA" dirty="0"/>
+              <a:rPr lang="fr-CA"/>
               <a:t>Passe à poisson au Canal Saint-Ours</a:t>
             </a:r>
           </a:p>
@@ -14354,7 +19595,7 @@
               </a:lnSpc>
             </a:pPr>
             <a:r>
-              <a:rPr lang="fr-CA" dirty="0"/>
+              <a:rPr lang="fr-CA"/>
               <a:t>Protection du site de fraie de Chambly</a:t>
             </a:r>
           </a:p>
@@ -14365,7 +19606,7 @@
               </a:lnSpc>
             </a:pPr>
             <a:r>
-              <a:rPr lang="fr-CA" dirty="0"/>
+              <a:rPr lang="fr-CA"/>
               <a:t>Changement à la loi sur la pêche</a:t>
             </a:r>
           </a:p>
@@ -14376,7 +19617,7 @@
               </a:lnSpc>
             </a:pPr>
             <a:r>
-              <a:rPr lang="fr-CA" dirty="0"/>
+              <a:rPr lang="fr-CA"/>
               <a:t>Reproduction assistée</a:t>
             </a:r>
           </a:p>
@@ -14412,7 +19653,7 @@
           <a:p>
             <a:pPr algn="r"/>
             <a:r>
-              <a:rPr lang="fr-CA" sz="1200" dirty="0"/>
+              <a:rPr lang="fr-CA" sz="1200"/>
               <a:t>( COSEPAC, 2014 ;Vachon, 2010) </a:t>
             </a:r>
           </a:p>
@@ -14874,7 +20115,7 @@
           <a:lstStyle/>
           <a:p>
             <a:r>
-              <a:rPr lang="fr-CA" dirty="0"/>
+              <a:rPr lang="fr-CA"/>
               <a:t>Méthode</a:t>
             </a:r>
           </a:p>
@@ -15158,7 +20399,7 @@
           <a:lstStyle/>
           <a:p>
             <a:r>
-              <a:rPr lang="fr-CA" dirty="0"/>
+              <a:rPr lang="fr-CA"/>
               <a:t>Données </a:t>
             </a:r>
           </a:p>
@@ -15245,88 +20486,88 @@
           <a:lstStyle/>
           <a:p>
             <a:r>
-              <a:rPr lang="fr-CA" dirty="0"/>
+              <a:rPr lang="fr-CA"/>
               <a:t>Adultes : Étude avec tailles et fécondités (</a:t>
             </a:r>
             <a:r>
-              <a:rPr lang="fr-CA" dirty="0" err="1"/>
+              <a:rPr lang="fr-CA" err="1"/>
               <a:t>Mongeau</a:t>
             </a:r>
             <a:r>
-              <a:rPr lang="fr-CA" dirty="0"/>
+              <a:rPr lang="fr-CA"/>
               <a:t> et al., 1986 ; </a:t>
             </a:r>
             <a:r>
-              <a:rPr lang="fr-CA" dirty="0" err="1"/>
+              <a:rPr lang="fr-CA" err="1"/>
               <a:t>Mongeau</a:t>
             </a:r>
             <a:r>
-              <a:rPr lang="fr-CA" dirty="0"/>
+              <a:rPr lang="fr-CA"/>
               <a:t> et al., 1992)</a:t>
             </a:r>
           </a:p>
           <a:p>
             <a:r>
-              <a:rPr lang="fr-CA" dirty="0"/>
+              <a:rPr lang="fr-CA"/>
               <a:t>Subadultes : Proviennent des chevaliers élevés en captivité (Vachon 2020, 2021b,c)</a:t>
             </a:r>
           </a:p>
           <a:p>
             <a:pPr lvl="1"/>
-            <a:endParaRPr lang="fr-CA" dirty="0"/>
+            <a:endParaRPr lang="fr-CA"/>
           </a:p>
           <a:p>
             <a:pPr lvl="1"/>
-            <a:endParaRPr lang="fr-CA" dirty="0"/>
-          </a:p>
-          <a:p>
-            <a:r>
-              <a:rPr lang="fr-CA" dirty="0"/>
+            <a:endParaRPr lang="fr-CA"/>
+          </a:p>
+          <a:p>
+            <a:r>
+              <a:rPr lang="fr-CA"/>
               <a:t>Résultat : 3 Matrice de Leslie</a:t>
             </a:r>
           </a:p>
           <a:p>
             <a:pPr lvl="1"/>
             <a:r>
-              <a:rPr lang="fr-CA" dirty="0"/>
+              <a:rPr lang="fr-CA"/>
               <a:t>Mesurée (</a:t>
             </a:r>
             <a:r>
-              <a:rPr lang="el-GR" dirty="0"/>
+              <a:rPr lang="el-GR"/>
               <a:t>λ </a:t>
             </a:r>
             <a:r>
-              <a:rPr lang="fr-CA" dirty="0"/>
+              <a:rPr lang="fr-CA"/>
               <a:t>= 0.957)</a:t>
             </a:r>
           </a:p>
           <a:p>
             <a:pPr lvl="1"/>
             <a:r>
-              <a:rPr lang="fr-CA" dirty="0"/>
+              <a:rPr lang="fr-CA"/>
               <a:t>Menacée (</a:t>
             </a:r>
             <a:r>
-              <a:rPr lang="el-GR" dirty="0"/>
+              <a:rPr lang="el-GR"/>
               <a:t>λ </a:t>
             </a:r>
             <a:r>
-              <a:rPr lang="fr-CA" dirty="0"/>
+              <a:rPr lang="fr-CA"/>
               <a:t>= 0.984)</a:t>
             </a:r>
           </a:p>
           <a:p>
             <a:pPr lvl="1"/>
             <a:r>
-              <a:rPr lang="fr-CA" dirty="0"/>
+              <a:rPr lang="fr-CA"/>
               <a:t>Nulle (</a:t>
             </a:r>
             <a:r>
-              <a:rPr lang="el-GR" dirty="0"/>
+              <a:rPr lang="el-GR"/>
               <a:t>λ </a:t>
             </a:r>
             <a:r>
-              <a:rPr lang="fr-CA" dirty="0"/>
+              <a:rPr lang="fr-CA"/>
               <a:t>= 1)</a:t>
             </a:r>
           </a:p>
@@ -15397,15 +20638,15 @@
           <a:lstStyle/>
           <a:p>
             <a:r>
-              <a:rPr lang="fr-CA" sz="1200" dirty="0"/>
+              <a:rPr lang="fr-CA" sz="1200"/>
               <a:t>Tableau 1 : Valeurs de la matrice de Leslie mesurées. Tiré de </a:t>
             </a:r>
             <a:r>
-              <a:rPr lang="fr-CA" sz="1200" dirty="0" err="1"/>
+              <a:rPr lang="fr-CA" sz="1200" err="1"/>
               <a:t>Bannester</a:t>
             </a:r>
             <a:r>
-              <a:rPr lang="fr-CA" sz="1200" dirty="0"/>
+              <a:rPr lang="fr-CA" sz="1200"/>
               <a:t>-Marchand et al. (2025). </a:t>
             </a:r>
           </a:p>

--- a/Rapport/Chevalier_cuivré.pptx
+++ b/Rapport/Chevalier_cuivré.pptx
@@ -134,14 +134,19 @@
       </a:defRPr>
     </a:lvl9pPr>
   </p:defaultTextStyle>
+  <p:extLst>
+    <p:ext uri="{EFAFB233-063F-42B5-8137-9DF3F51BA10A}">
+      <p15:sldGuideLst xmlns:p15="http://schemas.microsoft.com/office/powerpoint/2012/main"/>
+    </p:ext>
+  </p:extLst>
 </p:presentation>
 </file>
 
 <file path=ppt/revisionInfo.xml><?xml version="1.0" encoding="utf-8"?>
 <p1510:revInfo xmlns:a="http://schemas.openxmlformats.org/drawingml/2006/main" xmlns:r="http://schemas.openxmlformats.org/officeDocument/2006/relationships" xmlns:p1510="http://schemas.microsoft.com/office/powerpoint/2015/10/main">
   <p1510:revLst>
-    <p1510:client id="{1630DD41-0FF5-535A-0B19-7E7866333F2B}" v="749" dt="2026-04-17T03:37:47.448"/>
-    <p1510:client id="{A04B8DB3-0E07-4C81-8CE6-75F1F7AC2095}" v="258" dt="2026-04-17T03:35:32.830"/>
+    <p1510:client id="{1630DD41-0FF5-535A-0B19-7E7866333F2B}" v="754" dt="2026-04-17T03:46:39.059"/>
+    <p1510:client id="{A04B8DB3-0E07-4C81-8CE6-75F1F7AC2095}" v="444" dt="2026-04-17T03:52:44.575"/>
   </p1510:revLst>
 </p1510:revInfo>
 </file>
@@ -149,1507 +154,9 @@
 <file path=ppt/changesInfos/changesInfo1.xml><?xml version="1.0" encoding="utf-8"?>
 <pc:chgInfo xmlns:a="http://schemas.openxmlformats.org/drawingml/2006/main" xmlns:r="http://schemas.openxmlformats.org/officeDocument/2006/relationships" xmlns:ac="http://schemas.microsoft.com/office/drawing/2013/main/command" xmlns:pc="http://schemas.microsoft.com/office/powerpoint/2013/main/command">
   <pc:docChgLst>
-    <pc:chgData name="Tristan Plasse" userId="13c698b9-43c4-4271-b359-faaadca0774b" providerId="ADAL" clId="{FE460185-D4AE-4375-BA71-CD1D7F2341F0}"/>
-    <pc:docChg chg="undo custSel addSld delSld modSld sldOrd addMainMaster delMainMaster">
-      <pc:chgData name="Tristan Plasse" userId="13c698b9-43c4-4271-b359-faaadca0774b" providerId="ADAL" clId="{FE460185-D4AE-4375-BA71-CD1D7F2341F0}" dt="2026-04-17T03:35:32.830" v="5673" actId="20577"/>
-      <pc:docMkLst>
-        <pc:docMk/>
-      </pc:docMkLst>
-      <pc:sldChg chg="addSp delSp modSp mod setBg modClrScheme setClrOvrMap chgLayout">
-        <pc:chgData name="Tristan Plasse" userId="13c698b9-43c4-4271-b359-faaadca0774b" providerId="ADAL" clId="{FE460185-D4AE-4375-BA71-CD1D7F2341F0}" dt="2026-04-15T20:11:43.034" v="71" actId="1076"/>
-        <pc:sldMkLst>
-          <pc:docMk/>
-          <pc:sldMk cId="3055694646" sldId="256"/>
-        </pc:sldMkLst>
-        <pc:spChg chg="add del mod ord">
-          <ac:chgData name="Tristan Plasse" userId="13c698b9-43c4-4271-b359-faaadca0774b" providerId="ADAL" clId="{FE460185-D4AE-4375-BA71-CD1D7F2341F0}" dt="2026-04-15T20:11:02.110" v="50" actId="26606"/>
-          <ac:spMkLst>
-            <pc:docMk/>
-            <pc:sldMk cId="3055694646" sldId="256"/>
-            <ac:spMk id="2" creationId="{0CE52AE1-F528-9ADC-1794-EB43A5F9C6EB}"/>
-          </ac:spMkLst>
-        </pc:spChg>
-        <pc:spChg chg="add mod">
-          <ac:chgData name="Tristan Plasse" userId="13c698b9-43c4-4271-b359-faaadca0774b" providerId="ADAL" clId="{FE460185-D4AE-4375-BA71-CD1D7F2341F0}" dt="2026-04-15T20:11:43.034" v="71" actId="1076"/>
-          <ac:spMkLst>
-            <pc:docMk/>
-            <pc:sldMk cId="3055694646" sldId="256"/>
-            <ac:spMk id="6" creationId="{600198B9-2037-B1E5-2DF2-16A96F60CC76}"/>
-          </ac:spMkLst>
-        </pc:spChg>
-        <pc:spChg chg="add">
-          <ac:chgData name="Tristan Plasse" userId="13c698b9-43c4-4271-b359-faaadca0774b" providerId="ADAL" clId="{FE460185-D4AE-4375-BA71-CD1D7F2341F0}" dt="2026-04-15T20:11:02.110" v="50" actId="26606"/>
-          <ac:spMkLst>
-            <pc:docMk/>
-            <pc:sldMk cId="3055694646" sldId="256"/>
-            <ac:spMk id="1036" creationId="{0EECA69B-4C2A-7F31-8019-E90DB3BD49CB}"/>
-          </ac:spMkLst>
-        </pc:spChg>
-        <pc:spChg chg="add">
-          <ac:chgData name="Tristan Plasse" userId="13c698b9-43c4-4271-b359-faaadca0774b" providerId="ADAL" clId="{FE460185-D4AE-4375-BA71-CD1D7F2341F0}" dt="2026-04-15T20:11:02.110" v="50" actId="26606"/>
-          <ac:spMkLst>
-            <pc:docMk/>
-            <pc:sldMk cId="3055694646" sldId="256"/>
-            <ac:spMk id="1038" creationId="{857DEAC1-B3AA-6569-0A44-A191DF2F3C67}"/>
-          </ac:spMkLst>
-        </pc:spChg>
-        <pc:picChg chg="mod">
-          <ac:chgData name="Tristan Plasse" userId="13c698b9-43c4-4271-b359-faaadca0774b" providerId="ADAL" clId="{FE460185-D4AE-4375-BA71-CD1D7F2341F0}" dt="2026-04-15T20:11:02.110" v="50" actId="26606"/>
-          <ac:picMkLst>
-            <pc:docMk/>
-            <pc:sldMk cId="3055694646" sldId="256"/>
-            <ac:picMk id="1026" creationId="{0CB3B93C-FECB-E6B1-0F9A-DA4D100674A8}"/>
-          </ac:picMkLst>
-        </pc:picChg>
-      </pc:sldChg>
-      <pc:sldChg chg="addSp delSp modSp new mod setBg">
-        <pc:chgData name="Tristan Plasse" userId="13c698b9-43c4-4271-b359-faaadca0774b" providerId="ADAL" clId="{FE460185-D4AE-4375-BA71-CD1D7F2341F0}" dt="2026-04-15T20:39:46.867" v="256" actId="20577"/>
-        <pc:sldMkLst>
-          <pc:docMk/>
-          <pc:sldMk cId="1391683424" sldId="257"/>
-        </pc:sldMkLst>
-        <pc:spChg chg="mod">
-          <ac:chgData name="Tristan Plasse" userId="13c698b9-43c4-4271-b359-faaadca0774b" providerId="ADAL" clId="{FE460185-D4AE-4375-BA71-CD1D7F2341F0}" dt="2026-04-15T20:15:07.032" v="106" actId="26606"/>
-          <ac:spMkLst>
-            <pc:docMk/>
-            <pc:sldMk cId="1391683424" sldId="257"/>
-            <ac:spMk id="2" creationId="{3966A9B0-B00E-6660-A54E-CFEC48403854}"/>
-          </ac:spMkLst>
-        </pc:spChg>
-        <pc:spChg chg="add mod">
-          <ac:chgData name="Tristan Plasse" userId="13c698b9-43c4-4271-b359-faaadca0774b" providerId="ADAL" clId="{FE460185-D4AE-4375-BA71-CD1D7F2341F0}" dt="2026-04-15T20:39:46.867" v="256" actId="20577"/>
-          <ac:spMkLst>
-            <pc:docMk/>
-            <pc:sldMk cId="1391683424" sldId="257"/>
-            <ac:spMk id="6" creationId="{124E7EEB-9B05-0948-3014-4C918A1E1AF7}"/>
-          </ac:spMkLst>
-        </pc:spChg>
-        <pc:spChg chg="add">
-          <ac:chgData name="Tristan Plasse" userId="13c698b9-43c4-4271-b359-faaadca0774b" providerId="ADAL" clId="{FE460185-D4AE-4375-BA71-CD1D7F2341F0}" dt="2026-04-15T20:15:07.032" v="106" actId="26606"/>
-          <ac:spMkLst>
-            <pc:docMk/>
-            <pc:sldMk cId="1391683424" sldId="257"/>
-            <ac:spMk id="14" creationId="{33E93247-6229-44AB-A550-739E971E690B}"/>
-          </ac:spMkLst>
-        </pc:spChg>
-        <pc:picChg chg="add mod">
-          <ac:chgData name="Tristan Plasse" userId="13c698b9-43c4-4271-b359-faaadca0774b" providerId="ADAL" clId="{FE460185-D4AE-4375-BA71-CD1D7F2341F0}" dt="2026-04-15T20:15:07.032" v="106" actId="26606"/>
-          <ac:picMkLst>
-            <pc:docMk/>
-            <pc:sldMk cId="1391683424" sldId="257"/>
-            <ac:picMk id="5" creationId="{65DA162E-E9CE-5AEB-BBA2-D5769AD0C527}"/>
-          </ac:picMkLst>
-        </pc:picChg>
-        <pc:cxnChg chg="add">
-          <ac:chgData name="Tristan Plasse" userId="13c698b9-43c4-4271-b359-faaadca0774b" providerId="ADAL" clId="{FE460185-D4AE-4375-BA71-CD1D7F2341F0}" dt="2026-04-15T20:15:07.032" v="106" actId="26606"/>
-          <ac:cxnSpMkLst>
-            <pc:docMk/>
-            <pc:sldMk cId="1391683424" sldId="257"/>
-            <ac:cxnSpMk id="10" creationId="{F64F9B95-9045-48D2-B9F3-2927E98F54AA}"/>
-          </ac:cxnSpMkLst>
-        </pc:cxnChg>
-        <pc:cxnChg chg="add">
-          <ac:chgData name="Tristan Plasse" userId="13c698b9-43c4-4271-b359-faaadca0774b" providerId="ADAL" clId="{FE460185-D4AE-4375-BA71-CD1D7F2341F0}" dt="2026-04-15T20:15:07.032" v="106" actId="26606"/>
-          <ac:cxnSpMkLst>
-            <pc:docMk/>
-            <pc:sldMk cId="1391683424" sldId="257"/>
-            <ac:cxnSpMk id="12" creationId="{085AA86F-6A4D-4BCB-A045-D992CDC2959B}"/>
-          </ac:cxnSpMkLst>
-        </pc:cxnChg>
-        <pc:cxnChg chg="add">
-          <ac:chgData name="Tristan Plasse" userId="13c698b9-43c4-4271-b359-faaadca0774b" providerId="ADAL" clId="{FE460185-D4AE-4375-BA71-CD1D7F2341F0}" dt="2026-04-15T20:15:07.032" v="106" actId="26606"/>
-          <ac:cxnSpMkLst>
-            <pc:docMk/>
-            <pc:sldMk cId="1391683424" sldId="257"/>
-            <ac:cxnSpMk id="16" creationId="{EE2E603F-4A95-4FE8-BB06-211DFD75DBEF}"/>
-          </ac:cxnSpMkLst>
-        </pc:cxnChg>
-      </pc:sldChg>
-      <pc:sldChg chg="addSp delSp modSp new mod">
-        <pc:chgData name="Tristan Plasse" userId="13c698b9-43c4-4271-b359-faaadca0774b" providerId="ADAL" clId="{FE460185-D4AE-4375-BA71-CD1D7F2341F0}" dt="2026-04-17T03:31:41.256" v="5597" actId="26606"/>
-        <pc:sldMkLst>
-          <pc:docMk/>
-          <pc:sldMk cId="2350281507" sldId="258"/>
-        </pc:sldMkLst>
-        <pc:spChg chg="mod">
-          <ac:chgData name="Tristan Plasse" userId="13c698b9-43c4-4271-b359-faaadca0774b" providerId="ADAL" clId="{FE460185-D4AE-4375-BA71-CD1D7F2341F0}" dt="2026-04-15T20:40:14.005" v="282" actId="20577"/>
-          <ac:spMkLst>
-            <pc:docMk/>
-            <pc:sldMk cId="2350281507" sldId="258"/>
-            <ac:spMk id="2" creationId="{85F7DF9E-5635-E99D-49EF-F09E563F0FE1}"/>
-          </ac:spMkLst>
-        </pc:spChg>
-        <pc:spChg chg="del mod">
-          <ac:chgData name="Tristan Plasse" userId="13c698b9-43c4-4271-b359-faaadca0774b" providerId="ADAL" clId="{FE460185-D4AE-4375-BA71-CD1D7F2341F0}" dt="2026-04-17T03:31:41.256" v="5597" actId="26606"/>
-          <ac:spMkLst>
-            <pc:docMk/>
-            <pc:sldMk cId="2350281507" sldId="258"/>
-            <ac:spMk id="3" creationId="{08F967FB-148E-F4FA-95FA-17BCCB19C653}"/>
-          </ac:spMkLst>
-        </pc:spChg>
-        <pc:spChg chg="add mod">
-          <ac:chgData name="Tristan Plasse" userId="13c698b9-43c4-4271-b359-faaadca0774b" providerId="ADAL" clId="{FE460185-D4AE-4375-BA71-CD1D7F2341F0}" dt="2026-04-15T21:49:45.861" v="709" actId="1076"/>
-          <ac:spMkLst>
-            <pc:docMk/>
-            <pc:sldMk cId="2350281507" sldId="258"/>
-            <ac:spMk id="4" creationId="{3C84EBBA-709C-4ACC-BEB0-09511221D222}"/>
-          </ac:spMkLst>
-        </pc:spChg>
-        <pc:graphicFrameChg chg="add">
-          <ac:chgData name="Tristan Plasse" userId="13c698b9-43c4-4271-b359-faaadca0774b" providerId="ADAL" clId="{FE460185-D4AE-4375-BA71-CD1D7F2341F0}" dt="2026-04-17T03:31:41.256" v="5597" actId="26606"/>
-          <ac:graphicFrameMkLst>
-            <pc:docMk/>
-            <pc:sldMk cId="2350281507" sldId="258"/>
-            <ac:graphicFrameMk id="6" creationId="{5A794BAE-EB09-B02E-F77D-B89EA998F569}"/>
-          </ac:graphicFrameMkLst>
-        </pc:graphicFrameChg>
-      </pc:sldChg>
-      <pc:sldChg chg="addSp delSp modSp new mod setBg">
-        <pc:chgData name="Tristan Plasse" userId="13c698b9-43c4-4271-b359-faaadca0774b" providerId="ADAL" clId="{FE460185-D4AE-4375-BA71-CD1D7F2341F0}" dt="2026-04-15T21:44:19.349" v="540" actId="1076"/>
-        <pc:sldMkLst>
-          <pc:docMk/>
-          <pc:sldMk cId="2325527580" sldId="259"/>
-        </pc:sldMkLst>
-        <pc:spChg chg="mod">
-          <ac:chgData name="Tristan Plasse" userId="13c698b9-43c4-4271-b359-faaadca0774b" providerId="ADAL" clId="{FE460185-D4AE-4375-BA71-CD1D7F2341F0}" dt="2026-04-15T21:43:10.126" v="527" actId="26606"/>
-          <ac:spMkLst>
-            <pc:docMk/>
-            <pc:sldMk cId="2325527580" sldId="259"/>
-            <ac:spMk id="2" creationId="{99FA08C0-86C6-2EC3-99EB-1F5428E7314C}"/>
-          </ac:spMkLst>
-        </pc:spChg>
-        <pc:spChg chg="mod ord">
-          <ac:chgData name="Tristan Plasse" userId="13c698b9-43c4-4271-b359-faaadca0774b" providerId="ADAL" clId="{FE460185-D4AE-4375-BA71-CD1D7F2341F0}" dt="2026-04-15T21:43:10.126" v="527" actId="26606"/>
-          <ac:spMkLst>
-            <pc:docMk/>
-            <pc:sldMk cId="2325527580" sldId="259"/>
-            <ac:spMk id="3" creationId="{7BB24C08-EB63-95EB-768C-99638678B5F8}"/>
-          </ac:spMkLst>
-        </pc:spChg>
-        <pc:picChg chg="add mod modCrop">
-          <ac:chgData name="Tristan Plasse" userId="13c698b9-43c4-4271-b359-faaadca0774b" providerId="ADAL" clId="{FE460185-D4AE-4375-BA71-CD1D7F2341F0}" dt="2026-04-15T21:44:19.349" v="540" actId="1076"/>
-          <ac:picMkLst>
-            <pc:docMk/>
-            <pc:sldMk cId="2325527580" sldId="259"/>
-            <ac:picMk id="7" creationId="{AF1EF429-633A-7988-D1D5-91EBC3583ADA}"/>
-          </ac:picMkLst>
-        </pc:picChg>
-      </pc:sldChg>
-      <pc:sldChg chg="addSp modSp new mod">
-        <pc:chgData name="Tristan Plasse" userId="13c698b9-43c4-4271-b359-faaadca0774b" providerId="ADAL" clId="{FE460185-D4AE-4375-BA71-CD1D7F2341F0}" dt="2026-04-15T21:49:40.774" v="708" actId="1076"/>
-        <pc:sldMkLst>
-          <pc:docMk/>
-          <pc:sldMk cId="1599520098" sldId="260"/>
-        </pc:sldMkLst>
-        <pc:spChg chg="mod">
-          <ac:chgData name="Tristan Plasse" userId="13c698b9-43c4-4271-b359-faaadca0774b" providerId="ADAL" clId="{FE460185-D4AE-4375-BA71-CD1D7F2341F0}" dt="2026-04-15T21:45:24.613" v="548" actId="20577"/>
-          <ac:spMkLst>
-            <pc:docMk/>
-            <pc:sldMk cId="1599520098" sldId="260"/>
-            <ac:spMk id="2" creationId="{E7C3E5AF-0986-10C7-5B5A-31AFD32351E0}"/>
-          </ac:spMkLst>
-        </pc:spChg>
-        <pc:spChg chg="mod">
-          <ac:chgData name="Tristan Plasse" userId="13c698b9-43c4-4271-b359-faaadca0774b" providerId="ADAL" clId="{FE460185-D4AE-4375-BA71-CD1D7F2341F0}" dt="2026-04-15T21:48:26.450" v="701" actId="2710"/>
-          <ac:spMkLst>
-            <pc:docMk/>
-            <pc:sldMk cId="1599520098" sldId="260"/>
-            <ac:spMk id="3" creationId="{F6627DAA-C04C-19E3-39BE-69C18BACE455}"/>
-          </ac:spMkLst>
-        </pc:spChg>
-        <pc:spChg chg="add mod">
-          <ac:chgData name="Tristan Plasse" userId="13c698b9-43c4-4271-b359-faaadca0774b" providerId="ADAL" clId="{FE460185-D4AE-4375-BA71-CD1D7F2341F0}" dt="2026-04-15T21:49:40.774" v="708" actId="1076"/>
-          <ac:spMkLst>
-            <pc:docMk/>
-            <pc:sldMk cId="1599520098" sldId="260"/>
-            <ac:spMk id="4" creationId="{33A4A1E8-3978-9829-02B8-61A4FC6F24CA}"/>
-          </ac:spMkLst>
-        </pc:spChg>
-      </pc:sldChg>
-      <pc:sldChg chg="addSp modSp new mod">
-        <pc:chgData name="Tristan Plasse" userId="13c698b9-43c4-4271-b359-faaadca0774b" providerId="ADAL" clId="{FE460185-D4AE-4375-BA71-CD1D7F2341F0}" dt="2026-04-15T21:54:55.805" v="895" actId="2710"/>
-        <pc:sldMkLst>
-          <pc:docMk/>
-          <pc:sldMk cId="168328588" sldId="261"/>
-        </pc:sldMkLst>
-        <pc:spChg chg="mod">
-          <ac:chgData name="Tristan Plasse" userId="13c698b9-43c4-4271-b359-faaadca0774b" providerId="ADAL" clId="{FE460185-D4AE-4375-BA71-CD1D7F2341F0}" dt="2026-04-15T21:50:55.598" v="726" actId="20577"/>
-          <ac:spMkLst>
-            <pc:docMk/>
-            <pc:sldMk cId="168328588" sldId="261"/>
-            <ac:spMk id="2" creationId="{AEE04216-6D2E-A2C1-A5AA-428D85FBE4CC}"/>
-          </ac:spMkLst>
-        </pc:spChg>
-        <pc:spChg chg="mod">
-          <ac:chgData name="Tristan Plasse" userId="13c698b9-43c4-4271-b359-faaadca0774b" providerId="ADAL" clId="{FE460185-D4AE-4375-BA71-CD1D7F2341F0}" dt="2026-04-15T21:54:55.805" v="895" actId="2710"/>
-          <ac:spMkLst>
-            <pc:docMk/>
-            <pc:sldMk cId="168328588" sldId="261"/>
-            <ac:spMk id="3" creationId="{A014C97A-8C97-1B8C-F372-DA9FF8D7DB66}"/>
-          </ac:spMkLst>
-        </pc:spChg>
-        <pc:spChg chg="add mod">
-          <ac:chgData name="Tristan Plasse" userId="13c698b9-43c4-4271-b359-faaadca0774b" providerId="ADAL" clId="{FE460185-D4AE-4375-BA71-CD1D7F2341F0}" dt="2026-04-15T21:54:48.029" v="894" actId="1076"/>
-          <ac:spMkLst>
-            <pc:docMk/>
-            <pc:sldMk cId="168328588" sldId="261"/>
-            <ac:spMk id="4" creationId="{8087E245-C941-CE6D-30E8-F3BF687A91FC}"/>
-          </ac:spMkLst>
-        </pc:spChg>
-      </pc:sldChg>
-      <pc:sldChg chg="addSp delSp modSp new mod setBg modNotesTx">
-        <pc:chgData name="Tristan Plasse" userId="13c698b9-43c4-4271-b359-faaadca0774b" providerId="ADAL" clId="{FE460185-D4AE-4375-BA71-CD1D7F2341F0}" dt="2026-04-15T23:11:54.897" v="1052" actId="20577"/>
-        <pc:sldMkLst>
-          <pc:docMk/>
-          <pc:sldMk cId="1893348209" sldId="262"/>
-        </pc:sldMkLst>
-        <pc:spChg chg="mod">
-          <ac:chgData name="Tristan Plasse" userId="13c698b9-43c4-4271-b359-faaadca0774b" providerId="ADAL" clId="{FE460185-D4AE-4375-BA71-CD1D7F2341F0}" dt="2026-04-15T23:11:02.708" v="973" actId="26606"/>
-          <ac:spMkLst>
-            <pc:docMk/>
-            <pc:sldMk cId="1893348209" sldId="262"/>
-            <ac:spMk id="2" creationId="{F6B467CA-0C42-6E0A-98D0-B6F643A87434}"/>
-          </ac:spMkLst>
-        </pc:spChg>
-        <pc:spChg chg="add">
-          <ac:chgData name="Tristan Plasse" userId="13c698b9-43c4-4271-b359-faaadca0774b" providerId="ADAL" clId="{FE460185-D4AE-4375-BA71-CD1D7F2341F0}" dt="2026-04-15T23:11:02.708" v="973" actId="26606"/>
-          <ac:spMkLst>
-            <pc:docMk/>
-            <pc:sldMk cId="1893348209" sldId="262"/>
-            <ac:spMk id="11" creationId="{DEF92653-5D6D-47E6-8744-0DAF76E049C4}"/>
-          </ac:spMkLst>
-        </pc:spChg>
-        <pc:cxnChg chg="add">
-          <ac:chgData name="Tristan Plasse" userId="13c698b9-43c4-4271-b359-faaadca0774b" providerId="ADAL" clId="{FE460185-D4AE-4375-BA71-CD1D7F2341F0}" dt="2026-04-15T23:11:02.708" v="973" actId="26606"/>
-          <ac:cxnSpMkLst>
-            <pc:docMk/>
-            <pc:sldMk cId="1893348209" sldId="262"/>
-            <ac:cxnSpMk id="7" creationId="{F64F9B95-9045-48D2-B9F3-2927E98F54AA}"/>
-          </ac:cxnSpMkLst>
-        </pc:cxnChg>
-        <pc:cxnChg chg="add">
-          <ac:chgData name="Tristan Plasse" userId="13c698b9-43c4-4271-b359-faaadca0774b" providerId="ADAL" clId="{FE460185-D4AE-4375-BA71-CD1D7F2341F0}" dt="2026-04-15T23:11:02.708" v="973" actId="26606"/>
-          <ac:cxnSpMkLst>
-            <pc:docMk/>
-            <pc:sldMk cId="1893348209" sldId="262"/>
-            <ac:cxnSpMk id="9" creationId="{085AA86F-6A4D-4BCB-A045-D992CDC2959B}"/>
-          </ac:cxnSpMkLst>
-        </pc:cxnChg>
-        <pc:cxnChg chg="add">
-          <ac:chgData name="Tristan Plasse" userId="13c698b9-43c4-4271-b359-faaadca0774b" providerId="ADAL" clId="{FE460185-D4AE-4375-BA71-CD1D7F2341F0}" dt="2026-04-15T23:11:02.708" v="973" actId="26606"/>
-          <ac:cxnSpMkLst>
-            <pc:docMk/>
-            <pc:sldMk cId="1893348209" sldId="262"/>
-            <ac:cxnSpMk id="13" creationId="{9CA98CE3-81A7-4FFE-A047-9AA65998D877}"/>
-          </ac:cxnSpMkLst>
-        </pc:cxnChg>
-      </pc:sldChg>
-      <pc:sldChg chg="addSp delSp modSp new mod setBg">
-        <pc:chgData name="Tristan Plasse" userId="13c698b9-43c4-4271-b359-faaadca0774b" providerId="ADAL" clId="{FE460185-D4AE-4375-BA71-CD1D7F2341F0}" dt="2026-04-15T23:32:55.314" v="1202" actId="26606"/>
-        <pc:sldMkLst>
-          <pc:docMk/>
-          <pc:sldMk cId="853938190" sldId="263"/>
-        </pc:sldMkLst>
-        <pc:spChg chg="mod">
-          <ac:chgData name="Tristan Plasse" userId="13c698b9-43c4-4271-b359-faaadca0774b" providerId="ADAL" clId="{FE460185-D4AE-4375-BA71-CD1D7F2341F0}" dt="2026-04-15T23:32:55.314" v="1202" actId="26606"/>
-          <ac:spMkLst>
-            <pc:docMk/>
-            <pc:sldMk cId="853938190" sldId="263"/>
-            <ac:spMk id="2" creationId="{0A9A72B5-C255-D953-264E-8350AB3C15D2}"/>
-          </ac:spMkLst>
-        </pc:spChg>
-        <pc:spChg chg="add">
-          <ac:chgData name="Tristan Plasse" userId="13c698b9-43c4-4271-b359-faaadca0774b" providerId="ADAL" clId="{FE460185-D4AE-4375-BA71-CD1D7F2341F0}" dt="2026-04-15T23:32:55.314" v="1202" actId="26606"/>
-          <ac:spMkLst>
-            <pc:docMk/>
-            <pc:sldMk cId="853938190" sldId="263"/>
-            <ac:spMk id="15" creationId="{F68B2C62-7648-4430-90D5-AE0F252AF113}"/>
-          </ac:spMkLst>
-        </pc:spChg>
-        <pc:graphicFrameChg chg="add">
-          <ac:chgData name="Tristan Plasse" userId="13c698b9-43c4-4271-b359-faaadca0774b" providerId="ADAL" clId="{FE460185-D4AE-4375-BA71-CD1D7F2341F0}" dt="2026-04-15T23:32:55.314" v="1202" actId="26606"/>
-          <ac:graphicFrameMkLst>
-            <pc:docMk/>
-            <pc:sldMk cId="853938190" sldId="263"/>
-            <ac:graphicFrameMk id="18" creationId="{9D7866D5-6B49-9FA4-11A1-2FCBB87311CC}"/>
-          </ac:graphicFrameMkLst>
-        </pc:graphicFrameChg>
-        <pc:cxnChg chg="add">
-          <ac:chgData name="Tristan Plasse" userId="13c698b9-43c4-4271-b359-faaadca0774b" providerId="ADAL" clId="{FE460185-D4AE-4375-BA71-CD1D7F2341F0}" dt="2026-04-15T23:32:55.314" v="1202" actId="26606"/>
-          <ac:cxnSpMkLst>
-            <pc:docMk/>
-            <pc:sldMk cId="853938190" sldId="263"/>
-            <ac:cxnSpMk id="16" creationId="{AAD0195E-7F27-4D06-9427-0C121D721A14}"/>
-          </ac:cxnSpMkLst>
-        </pc:cxnChg>
-        <pc:cxnChg chg="add">
-          <ac:chgData name="Tristan Plasse" userId="13c698b9-43c4-4271-b359-faaadca0774b" providerId="ADAL" clId="{FE460185-D4AE-4375-BA71-CD1D7F2341F0}" dt="2026-04-15T23:32:55.314" v="1202" actId="26606"/>
-          <ac:cxnSpMkLst>
-            <pc:docMk/>
-            <pc:sldMk cId="853938190" sldId="263"/>
-            <ac:cxnSpMk id="17" creationId="{9D74C2FC-3228-4FC1-B97B-87AD35508D91}"/>
-          </ac:cxnSpMkLst>
-        </pc:cxnChg>
-      </pc:sldChg>
-      <pc:sldChg chg="addSp delSp modSp new mod setBg">
-        <pc:chgData name="Tristan Plasse" userId="13c698b9-43c4-4271-b359-faaadca0774b" providerId="ADAL" clId="{FE460185-D4AE-4375-BA71-CD1D7F2341F0}" dt="2026-04-16T00:37:23.329" v="1596" actId="20577"/>
-        <pc:sldMkLst>
-          <pc:docMk/>
-          <pc:sldMk cId="1986804065" sldId="264"/>
-        </pc:sldMkLst>
-        <pc:spChg chg="mod">
-          <ac:chgData name="Tristan Plasse" userId="13c698b9-43c4-4271-b359-faaadca0774b" providerId="ADAL" clId="{FE460185-D4AE-4375-BA71-CD1D7F2341F0}" dt="2026-04-16T00:29:44.509" v="1419" actId="26606"/>
-          <ac:spMkLst>
-            <pc:docMk/>
-            <pc:sldMk cId="1986804065" sldId="264"/>
-            <ac:spMk id="2" creationId="{DF3B35E5-60C7-1A5E-189B-80DD3CF8C49C}"/>
-          </ac:spMkLst>
-        </pc:spChg>
-        <pc:spChg chg="mod">
-          <ac:chgData name="Tristan Plasse" userId="13c698b9-43c4-4271-b359-faaadca0774b" providerId="ADAL" clId="{FE460185-D4AE-4375-BA71-CD1D7F2341F0}" dt="2026-04-16T00:37:23.329" v="1596" actId="20577"/>
-          <ac:spMkLst>
-            <pc:docMk/>
-            <pc:sldMk cId="1986804065" sldId="264"/>
-            <ac:spMk id="3" creationId="{948D2D04-6AA7-999B-92B0-8A9D5A8E52BD}"/>
-          </ac:spMkLst>
-        </pc:spChg>
-        <pc:spChg chg="add mod">
-          <ac:chgData name="Tristan Plasse" userId="13c698b9-43c4-4271-b359-faaadca0774b" providerId="ADAL" clId="{FE460185-D4AE-4375-BA71-CD1D7F2341F0}" dt="2026-04-16T00:33:45.498" v="1503" actId="1076"/>
-          <ac:spMkLst>
-            <pc:docMk/>
-            <pc:sldMk cId="1986804065" sldId="264"/>
-            <ac:spMk id="6" creationId="{6375CB8C-208E-349E-7561-A0A695BD91BD}"/>
-          </ac:spMkLst>
-        </pc:spChg>
-        <pc:spChg chg="add del">
-          <ac:chgData name="Tristan Plasse" userId="13c698b9-43c4-4271-b359-faaadca0774b" providerId="ADAL" clId="{FE460185-D4AE-4375-BA71-CD1D7F2341F0}" dt="2026-04-16T00:29:44.509" v="1419" actId="26606"/>
-          <ac:spMkLst>
-            <pc:docMk/>
-            <pc:sldMk cId="1986804065" sldId="264"/>
-            <ac:spMk id="8" creationId="{EEF92585-7A99-6108-9663-8C59032742EC}"/>
-          </ac:spMkLst>
-        </pc:spChg>
-        <pc:spChg chg="add">
-          <ac:chgData name="Tristan Plasse" userId="13c698b9-43c4-4271-b359-faaadca0774b" providerId="ADAL" clId="{FE460185-D4AE-4375-BA71-CD1D7F2341F0}" dt="2026-04-16T00:29:44.509" v="1419" actId="26606"/>
-          <ac:spMkLst>
-            <pc:docMk/>
-            <pc:sldMk cId="1986804065" sldId="264"/>
-            <ac:spMk id="15" creationId="{E49D7415-2F11-44C2-B6AA-13A25B6814B9}"/>
-          </ac:spMkLst>
-        </pc:spChg>
-        <pc:picChg chg="add mod">
-          <ac:chgData name="Tristan Plasse" userId="13c698b9-43c4-4271-b359-faaadca0774b" providerId="ADAL" clId="{FE460185-D4AE-4375-BA71-CD1D7F2341F0}" dt="2026-04-16T00:30:02.948" v="1422" actId="1076"/>
-          <ac:picMkLst>
-            <pc:docMk/>
-            <pc:sldMk cId="1986804065" sldId="264"/>
-            <ac:picMk id="5" creationId="{F5E6D3CC-F1EF-27B3-F856-FF38AC72410C}"/>
-          </ac:picMkLst>
-        </pc:picChg>
-        <pc:cxnChg chg="add del">
-          <ac:chgData name="Tristan Plasse" userId="13c698b9-43c4-4271-b359-faaadca0774b" providerId="ADAL" clId="{FE460185-D4AE-4375-BA71-CD1D7F2341F0}" dt="2026-04-16T00:29:44.509" v="1419" actId="26606"/>
-          <ac:cxnSpMkLst>
-            <pc:docMk/>
-            <pc:sldMk cId="1986804065" sldId="264"/>
-            <ac:cxnSpMk id="10" creationId="{78F0A063-5253-8DF5-3B7B-12FE096705F1}"/>
-          </ac:cxnSpMkLst>
-        </pc:cxnChg>
-        <pc:cxnChg chg="add">
-          <ac:chgData name="Tristan Plasse" userId="13c698b9-43c4-4271-b359-faaadca0774b" providerId="ADAL" clId="{FE460185-D4AE-4375-BA71-CD1D7F2341F0}" dt="2026-04-16T00:29:44.509" v="1419" actId="26606"/>
-          <ac:cxnSpMkLst>
-            <pc:docMk/>
-            <pc:sldMk cId="1986804065" sldId="264"/>
-            <ac:cxnSpMk id="17" creationId="{4583FD9E-C5A7-96F7-951D-7D292013CD58}"/>
-          </ac:cxnSpMkLst>
-        </pc:cxnChg>
-      </pc:sldChg>
-      <pc:sldChg chg="addSp delSp modSp new mod">
-        <pc:chgData name="Tristan Plasse" userId="13c698b9-43c4-4271-b359-faaadca0774b" providerId="ADAL" clId="{FE460185-D4AE-4375-BA71-CD1D7F2341F0}" dt="2026-04-17T02:33:59.954" v="5483" actId="20577"/>
-        <pc:sldMkLst>
-          <pc:docMk/>
-          <pc:sldMk cId="444677078" sldId="265"/>
-        </pc:sldMkLst>
-        <pc:spChg chg="mod">
-          <ac:chgData name="Tristan Plasse" userId="13c698b9-43c4-4271-b359-faaadca0774b" providerId="ADAL" clId="{FE460185-D4AE-4375-BA71-CD1D7F2341F0}" dt="2026-04-16T00:37:51.243" v="1605" actId="20577"/>
-          <ac:spMkLst>
-            <pc:docMk/>
-            <pc:sldMk cId="444677078" sldId="265"/>
-            <ac:spMk id="2" creationId="{FFF627C6-6D47-1F1B-D2BE-90211DF917C7}"/>
-          </ac:spMkLst>
-        </pc:spChg>
-        <pc:spChg chg="del">
-          <ac:chgData name="Tristan Plasse" userId="13c698b9-43c4-4271-b359-faaadca0774b" providerId="ADAL" clId="{FE460185-D4AE-4375-BA71-CD1D7F2341F0}" dt="2026-04-16T00:52:04.908" v="1606" actId="478"/>
-          <ac:spMkLst>
-            <pc:docMk/>
-            <pc:sldMk cId="444677078" sldId="265"/>
-            <ac:spMk id="3" creationId="{DC799142-257A-3168-9C81-800A7BA7F93E}"/>
-          </ac:spMkLst>
-        </pc:spChg>
-        <pc:spChg chg="add mod">
-          <ac:chgData name="Tristan Plasse" userId="13c698b9-43c4-4271-b359-faaadca0774b" providerId="ADAL" clId="{FE460185-D4AE-4375-BA71-CD1D7F2341F0}" dt="2026-04-17T02:33:59.954" v="5483" actId="20577"/>
-          <ac:spMkLst>
-            <pc:docMk/>
-            <pc:sldMk cId="444677078" sldId="265"/>
-            <ac:spMk id="12" creationId="{3A09E5BF-F72A-1A2E-E135-EC770726F1C8}"/>
-          </ac:spMkLst>
-        </pc:spChg>
-        <pc:picChg chg="add del mod">
-          <ac:chgData name="Tristan Plasse" userId="13c698b9-43c4-4271-b359-faaadca0774b" providerId="ADAL" clId="{FE460185-D4AE-4375-BA71-CD1D7F2341F0}" dt="2026-04-16T01:00:17.358" v="1621" actId="478"/>
-          <ac:picMkLst>
-            <pc:docMk/>
-            <pc:sldMk cId="444677078" sldId="265"/>
-            <ac:picMk id="5" creationId="{20B0F317-66BD-A5E6-A014-CDA777F9CFE0}"/>
-          </ac:picMkLst>
-        </pc:picChg>
-        <pc:picChg chg="add mod">
-          <ac:chgData name="Tristan Plasse" userId="13c698b9-43c4-4271-b359-faaadca0774b" providerId="ADAL" clId="{FE460185-D4AE-4375-BA71-CD1D7F2341F0}" dt="2026-04-16T01:03:00.381" v="1636" actId="1076"/>
-          <ac:picMkLst>
-            <pc:docMk/>
-            <pc:sldMk cId="444677078" sldId="265"/>
-            <ac:picMk id="7" creationId="{E414B00F-B7F2-AE14-2AD2-468F405D93D9}"/>
-          </ac:picMkLst>
-        </pc:picChg>
-        <pc:picChg chg="add del mod">
-          <ac:chgData name="Tristan Plasse" userId="13c698b9-43c4-4271-b359-faaadca0774b" providerId="ADAL" clId="{FE460185-D4AE-4375-BA71-CD1D7F2341F0}" dt="2026-04-16T01:02:35.265" v="1629" actId="478"/>
-          <ac:picMkLst>
-            <pc:docMk/>
-            <pc:sldMk cId="444677078" sldId="265"/>
-            <ac:picMk id="9" creationId="{AA70A428-69E9-1A63-4881-73DC5E2E3A92}"/>
-          </ac:picMkLst>
-        </pc:picChg>
-        <pc:picChg chg="add mod">
-          <ac:chgData name="Tristan Plasse" userId="13c698b9-43c4-4271-b359-faaadca0774b" providerId="ADAL" clId="{FE460185-D4AE-4375-BA71-CD1D7F2341F0}" dt="2026-04-16T01:10:19.476" v="2226" actId="1076"/>
-          <ac:picMkLst>
-            <pc:docMk/>
-            <pc:sldMk cId="444677078" sldId="265"/>
-            <ac:picMk id="11" creationId="{D1417A4E-6B8F-61D8-4975-C6885ADDFC9B}"/>
-          </ac:picMkLst>
-        </pc:picChg>
-      </pc:sldChg>
-      <pc:sldChg chg="modSp new mod modNotesTx">
-        <pc:chgData name="Tristan Plasse" userId="13c698b9-43c4-4271-b359-faaadca0774b" providerId="ADAL" clId="{FE460185-D4AE-4375-BA71-CD1D7F2341F0}" dt="2026-04-16T02:27:57.490" v="3588"/>
-        <pc:sldMkLst>
-          <pc:docMk/>
-          <pc:sldMk cId="400772557" sldId="266"/>
-        </pc:sldMkLst>
-        <pc:spChg chg="mod">
-          <ac:chgData name="Tristan Plasse" userId="13c698b9-43c4-4271-b359-faaadca0774b" providerId="ADAL" clId="{FE460185-D4AE-4375-BA71-CD1D7F2341F0}" dt="2026-04-16T01:36:18.826" v="3023" actId="20577"/>
-          <ac:spMkLst>
-            <pc:docMk/>
-            <pc:sldMk cId="400772557" sldId="266"/>
-            <ac:spMk id="2" creationId="{B602546B-6E81-B2EF-AF4D-70A2BABCE52E}"/>
-          </ac:spMkLst>
-        </pc:spChg>
-        <pc:spChg chg="mod">
-          <ac:chgData name="Tristan Plasse" userId="13c698b9-43c4-4271-b359-faaadca0774b" providerId="ADAL" clId="{FE460185-D4AE-4375-BA71-CD1D7F2341F0}" dt="2026-04-16T02:27:57.490" v="3588"/>
-          <ac:spMkLst>
-            <pc:docMk/>
-            <pc:sldMk cId="400772557" sldId="266"/>
-            <ac:spMk id="3" creationId="{7C8FECE2-37AA-AFF5-7D1E-A6F3BA91F380}"/>
-          </ac:spMkLst>
-        </pc:spChg>
-      </pc:sldChg>
-      <pc:sldChg chg="addSp delSp modSp add mod">
-        <pc:chgData name="Tristan Plasse" userId="13c698b9-43c4-4271-b359-faaadca0774b" providerId="ADAL" clId="{FE460185-D4AE-4375-BA71-CD1D7F2341F0}" dt="2026-04-17T02:34:03.567" v="5485" actId="20577"/>
-        <pc:sldMkLst>
-          <pc:docMk/>
-          <pc:sldMk cId="1162506719" sldId="267"/>
-        </pc:sldMkLst>
-        <pc:spChg chg="del">
-          <ac:chgData name="Tristan Plasse" userId="13c698b9-43c4-4271-b359-faaadca0774b" providerId="ADAL" clId="{FE460185-D4AE-4375-BA71-CD1D7F2341F0}" dt="2026-04-16T01:18:10.170" v="2262" actId="478"/>
-          <ac:spMkLst>
-            <pc:docMk/>
-            <pc:sldMk cId="1162506719" sldId="267"/>
-            <ac:spMk id="2" creationId="{996E97C5-B6B8-AC6F-B841-CDDD941E1848}"/>
-          </ac:spMkLst>
-        </pc:spChg>
-        <pc:spChg chg="add del mod">
-          <ac:chgData name="Tristan Plasse" userId="13c698b9-43c4-4271-b359-faaadca0774b" providerId="ADAL" clId="{FE460185-D4AE-4375-BA71-CD1D7F2341F0}" dt="2026-04-16T01:18:12.112" v="2263" actId="478"/>
-          <ac:spMkLst>
-            <pc:docMk/>
-            <pc:sldMk cId="1162506719" sldId="267"/>
-            <ac:spMk id="9" creationId="{DACFA005-2A1C-5693-B364-5DC1828017A0}"/>
-          </ac:spMkLst>
-        </pc:spChg>
-        <pc:spChg chg="mod">
-          <ac:chgData name="Tristan Plasse" userId="13c698b9-43c4-4271-b359-faaadca0774b" providerId="ADAL" clId="{FE460185-D4AE-4375-BA71-CD1D7F2341F0}" dt="2026-04-17T02:34:03.567" v="5485" actId="20577"/>
-          <ac:spMkLst>
-            <pc:docMk/>
-            <pc:sldMk cId="1162506719" sldId="267"/>
-            <ac:spMk id="12" creationId="{1E7DC136-65ED-D17F-5DEC-2F90924CF09D}"/>
-          </ac:spMkLst>
-        </pc:spChg>
-        <pc:picChg chg="add mod">
-          <ac:chgData name="Tristan Plasse" userId="13c698b9-43c4-4271-b359-faaadca0774b" providerId="ADAL" clId="{FE460185-D4AE-4375-BA71-CD1D7F2341F0}" dt="2026-04-16T01:21:28.624" v="2589" actId="14100"/>
-          <ac:picMkLst>
-            <pc:docMk/>
-            <pc:sldMk cId="1162506719" sldId="267"/>
-            <ac:picMk id="4" creationId="{C3B9B1F3-DBD8-3F0B-E141-48009D6B0142}"/>
-          </ac:picMkLst>
-        </pc:picChg>
-        <pc:picChg chg="add del mod modCrop">
-          <ac:chgData name="Tristan Plasse" userId="13c698b9-43c4-4271-b359-faaadca0774b" providerId="ADAL" clId="{FE460185-D4AE-4375-BA71-CD1D7F2341F0}" dt="2026-04-16T01:21:45.395" v="2590" actId="478"/>
-          <ac:picMkLst>
-            <pc:docMk/>
-            <pc:sldMk cId="1162506719" sldId="267"/>
-            <ac:picMk id="6" creationId="{239E3CC3-05C6-1C0D-925A-F3CFDBB3CCBC}"/>
-          </ac:picMkLst>
-        </pc:picChg>
-        <pc:picChg chg="del">
-          <ac:chgData name="Tristan Plasse" userId="13c698b9-43c4-4271-b359-faaadca0774b" providerId="ADAL" clId="{FE460185-D4AE-4375-BA71-CD1D7F2341F0}" dt="2026-04-16T01:17:06.011" v="2249" actId="478"/>
-          <ac:picMkLst>
-            <pc:docMk/>
-            <pc:sldMk cId="1162506719" sldId="267"/>
-            <ac:picMk id="7" creationId="{362CD478-FEA5-8845-C2F6-99CF702C9B93}"/>
-          </ac:picMkLst>
-        </pc:picChg>
-        <pc:picChg chg="del">
-          <ac:chgData name="Tristan Plasse" userId="13c698b9-43c4-4271-b359-faaadca0774b" providerId="ADAL" clId="{FE460185-D4AE-4375-BA71-CD1D7F2341F0}" dt="2026-04-16T01:14:05.799" v="2242" actId="478"/>
-          <ac:picMkLst>
-            <pc:docMk/>
-            <pc:sldMk cId="1162506719" sldId="267"/>
-            <ac:picMk id="11" creationId="{BB926E12-AE6F-B487-5484-F28319FF13A2}"/>
-          </ac:picMkLst>
-        </pc:picChg>
-        <pc:picChg chg="add mod">
-          <ac:chgData name="Tristan Plasse" userId="13c698b9-43c4-4271-b359-faaadca0774b" providerId="ADAL" clId="{FE460185-D4AE-4375-BA71-CD1D7F2341F0}" dt="2026-04-16T01:21:56.262" v="2594" actId="14100"/>
-          <ac:picMkLst>
-            <pc:docMk/>
-            <pc:sldMk cId="1162506719" sldId="267"/>
-            <ac:picMk id="13" creationId="{C705A886-BFDB-824D-0E37-7B8094A21002}"/>
-          </ac:picMkLst>
-        </pc:picChg>
-      </pc:sldChg>
-      <pc:sldChg chg="add del">
-        <pc:chgData name="Tristan Plasse" userId="13c698b9-43c4-4271-b359-faaadca0774b" providerId="ADAL" clId="{FE460185-D4AE-4375-BA71-CD1D7F2341F0}" dt="2026-04-16T01:28:21.210" v="2598" actId="2696"/>
-        <pc:sldMkLst>
-          <pc:docMk/>
-          <pc:sldMk cId="3071220066" sldId="268"/>
-        </pc:sldMkLst>
-      </pc:sldChg>
-      <pc:sldChg chg="new del">
-        <pc:chgData name="Tristan Plasse" userId="13c698b9-43c4-4271-b359-faaadca0774b" providerId="ADAL" clId="{FE460185-D4AE-4375-BA71-CD1D7F2341F0}" dt="2026-04-16T01:28:16.570" v="2596" actId="680"/>
-        <pc:sldMkLst>
-          <pc:docMk/>
-          <pc:sldMk cId="1698036767" sldId="269"/>
-        </pc:sldMkLst>
-      </pc:sldChg>
-      <pc:sldChg chg="addSp delSp modSp add mod">
-        <pc:chgData name="Tristan Plasse" userId="13c698b9-43c4-4271-b359-faaadca0774b" providerId="ADAL" clId="{FE460185-D4AE-4375-BA71-CD1D7F2341F0}" dt="2026-04-17T02:34:06.531" v="5487" actId="20577"/>
-        <pc:sldMkLst>
-          <pc:docMk/>
-          <pc:sldMk cId="4073645163" sldId="269"/>
-        </pc:sldMkLst>
-        <pc:spChg chg="mod">
-          <ac:chgData name="Tristan Plasse" userId="13c698b9-43c4-4271-b359-faaadca0774b" providerId="ADAL" clId="{FE460185-D4AE-4375-BA71-CD1D7F2341F0}" dt="2026-04-17T02:34:06.531" v="5487" actId="20577"/>
-          <ac:spMkLst>
-            <pc:docMk/>
-            <pc:sldMk cId="4073645163" sldId="269"/>
-            <ac:spMk id="12" creationId="{C9FAF4E8-FBA0-C1B3-18B7-2833B15C2E5C}"/>
-          </ac:spMkLst>
-        </pc:spChg>
-        <pc:picChg chg="add del mod">
-          <ac:chgData name="Tristan Plasse" userId="13c698b9-43c4-4271-b359-faaadca0774b" providerId="ADAL" clId="{FE460185-D4AE-4375-BA71-CD1D7F2341F0}" dt="2026-04-16T01:31:08.732" v="2614" actId="478"/>
-          <ac:picMkLst>
-            <pc:docMk/>
-            <pc:sldMk cId="4073645163" sldId="269"/>
-            <ac:picMk id="3" creationId="{2E5DD771-C94F-58CD-D9B5-D8BE4032FB62}"/>
-          </ac:picMkLst>
-        </pc:picChg>
-        <pc:picChg chg="del">
-          <ac:chgData name="Tristan Plasse" userId="13c698b9-43c4-4271-b359-faaadca0774b" providerId="ADAL" clId="{FE460185-D4AE-4375-BA71-CD1D7F2341F0}" dt="2026-04-16T01:28:23" v="2599" actId="478"/>
-          <ac:picMkLst>
-            <pc:docMk/>
-            <pc:sldMk cId="4073645163" sldId="269"/>
-            <ac:picMk id="4" creationId="{F7435F9E-1B68-EADE-849E-E3EDCCD07560}"/>
-          </ac:picMkLst>
-        </pc:picChg>
-        <pc:picChg chg="add mod">
-          <ac:chgData name="Tristan Plasse" userId="13c698b9-43c4-4271-b359-faaadca0774b" providerId="ADAL" clId="{FE460185-D4AE-4375-BA71-CD1D7F2341F0}" dt="2026-04-16T01:33:17.443" v="2633" actId="14100"/>
-          <ac:picMkLst>
-            <pc:docMk/>
-            <pc:sldMk cId="4073645163" sldId="269"/>
-            <ac:picMk id="6" creationId="{57A977B4-F0B7-1A94-5F50-6DB61D43BE7B}"/>
-          </ac:picMkLst>
-        </pc:picChg>
-        <pc:picChg chg="add del mod">
-          <ac:chgData name="Tristan Plasse" userId="13c698b9-43c4-4271-b359-faaadca0774b" providerId="ADAL" clId="{FE460185-D4AE-4375-BA71-CD1D7F2341F0}" dt="2026-04-16T01:32:08.871" v="2619" actId="478"/>
-          <ac:picMkLst>
-            <pc:docMk/>
-            <pc:sldMk cId="4073645163" sldId="269"/>
-            <ac:picMk id="8" creationId="{3D9401CE-DFEB-73AD-1B71-D0EE61988BBC}"/>
-          </ac:picMkLst>
-        </pc:picChg>
-        <pc:picChg chg="add mod modCrop">
-          <ac:chgData name="Tristan Plasse" userId="13c698b9-43c4-4271-b359-faaadca0774b" providerId="ADAL" clId="{FE460185-D4AE-4375-BA71-CD1D7F2341F0}" dt="2026-04-16T01:33:01.343" v="2631" actId="14100"/>
-          <ac:picMkLst>
-            <pc:docMk/>
-            <pc:sldMk cId="4073645163" sldId="269"/>
-            <ac:picMk id="10" creationId="{8F3BD6FE-B164-B9F2-09BB-32BB144C5117}"/>
-          </ac:picMkLst>
-        </pc:picChg>
-        <pc:picChg chg="del">
-          <ac:chgData name="Tristan Plasse" userId="13c698b9-43c4-4271-b359-faaadca0774b" providerId="ADAL" clId="{FE460185-D4AE-4375-BA71-CD1D7F2341F0}" dt="2026-04-16T01:28:39.115" v="2606" actId="478"/>
-          <ac:picMkLst>
-            <pc:docMk/>
-            <pc:sldMk cId="4073645163" sldId="269"/>
-            <ac:picMk id="13" creationId="{6B8210D3-7887-C695-A074-8C993699513C}"/>
-          </ac:picMkLst>
-        </pc:picChg>
-      </pc:sldChg>
-      <pc:sldChg chg="addSp modSp new mod setBg">
-        <pc:chgData name="Tristan Plasse" userId="13c698b9-43c4-4271-b359-faaadca0774b" providerId="ADAL" clId="{FE460185-D4AE-4375-BA71-CD1D7F2341F0}" dt="2026-04-17T02:34:17.176" v="5488" actId="20577"/>
-        <pc:sldMkLst>
-          <pc:docMk/>
-          <pc:sldMk cId="960806995" sldId="270"/>
-        </pc:sldMkLst>
-        <pc:spChg chg="mod">
-          <ac:chgData name="Tristan Plasse" userId="13c698b9-43c4-4271-b359-faaadca0774b" providerId="ADAL" clId="{FE460185-D4AE-4375-BA71-CD1D7F2341F0}" dt="2026-04-16T02:43:08.632" v="4114" actId="26606"/>
-          <ac:spMkLst>
-            <pc:docMk/>
-            <pc:sldMk cId="960806995" sldId="270"/>
-            <ac:spMk id="2" creationId="{E94E064B-C271-D942-847D-C57AA49309EB}"/>
-          </ac:spMkLst>
-        </pc:spChg>
-        <pc:spChg chg="mod">
-          <ac:chgData name="Tristan Plasse" userId="13c698b9-43c4-4271-b359-faaadca0774b" providerId="ADAL" clId="{FE460185-D4AE-4375-BA71-CD1D7F2341F0}" dt="2026-04-17T02:34:17.176" v="5488" actId="20577"/>
-          <ac:spMkLst>
-            <pc:docMk/>
-            <pc:sldMk cId="960806995" sldId="270"/>
-            <ac:spMk id="3" creationId="{985811B9-89CF-1E2E-CD4B-69C7E3D221C2}"/>
-          </ac:spMkLst>
-        </pc:spChg>
-        <pc:spChg chg="add">
-          <ac:chgData name="Tristan Plasse" userId="13c698b9-43c4-4271-b359-faaadca0774b" providerId="ADAL" clId="{FE460185-D4AE-4375-BA71-CD1D7F2341F0}" dt="2026-04-16T02:43:08.632" v="4114" actId="26606"/>
-          <ac:spMkLst>
-            <pc:docMk/>
-            <pc:sldMk cId="960806995" sldId="270"/>
-            <ac:spMk id="8" creationId="{5F710FDB-0919-493E-8539-8240C23F1EB2}"/>
-          </ac:spMkLst>
-        </pc:spChg>
-        <pc:cxnChg chg="add">
-          <ac:chgData name="Tristan Plasse" userId="13c698b9-43c4-4271-b359-faaadca0774b" providerId="ADAL" clId="{FE460185-D4AE-4375-BA71-CD1D7F2341F0}" dt="2026-04-16T02:43:08.632" v="4114" actId="26606"/>
-          <ac:cxnSpMkLst>
-            <pc:docMk/>
-            <pc:sldMk cId="960806995" sldId="270"/>
-            <ac:cxnSpMk id="10" creationId="{0AFF0B6C-73E2-4B40-9280-938C14922C87}"/>
-          </ac:cxnSpMkLst>
-        </pc:cxnChg>
-      </pc:sldChg>
-      <pc:sldChg chg="addSp delSp modSp new mod setBg">
-        <pc:chgData name="Tristan Plasse" userId="13c698b9-43c4-4271-b359-faaadca0774b" providerId="ADAL" clId="{FE460185-D4AE-4375-BA71-CD1D7F2341F0}" dt="2026-04-16T02:43:04.560" v="4113" actId="26606"/>
-        <pc:sldMkLst>
-          <pc:docMk/>
-          <pc:sldMk cId="1896708259" sldId="271"/>
-        </pc:sldMkLst>
-        <pc:spChg chg="mod">
-          <ac:chgData name="Tristan Plasse" userId="13c698b9-43c4-4271-b359-faaadca0774b" providerId="ADAL" clId="{FE460185-D4AE-4375-BA71-CD1D7F2341F0}" dt="2026-04-16T02:43:04.560" v="4113" actId="26606"/>
-          <ac:spMkLst>
-            <pc:docMk/>
-            <pc:sldMk cId="1896708259" sldId="271"/>
-            <ac:spMk id="2" creationId="{8D966DD8-8219-CF1B-134B-3A3C1821891D}"/>
-          </ac:spMkLst>
-        </pc:spChg>
-        <pc:spChg chg="mod">
-          <ac:chgData name="Tristan Plasse" userId="13c698b9-43c4-4271-b359-faaadca0774b" providerId="ADAL" clId="{FE460185-D4AE-4375-BA71-CD1D7F2341F0}" dt="2026-04-16T02:43:04.560" v="4113" actId="26606"/>
-          <ac:spMkLst>
-            <pc:docMk/>
-            <pc:sldMk cId="1896708259" sldId="271"/>
-            <ac:spMk id="3" creationId="{76E70E93-C46E-8BE3-F6AA-2FF55DA44A33}"/>
-          </ac:spMkLst>
-        </pc:spChg>
-        <pc:spChg chg="add del">
-          <ac:chgData name="Tristan Plasse" userId="13c698b9-43c4-4271-b359-faaadca0774b" providerId="ADAL" clId="{FE460185-D4AE-4375-BA71-CD1D7F2341F0}" dt="2026-04-16T02:43:04.560" v="4113" actId="26606"/>
-          <ac:spMkLst>
-            <pc:docMk/>
-            <pc:sldMk cId="1896708259" sldId="271"/>
-            <ac:spMk id="8" creationId="{5F710FDB-0919-493E-8539-8240C23F1EB2}"/>
-          </ac:spMkLst>
-        </pc:spChg>
-        <pc:cxnChg chg="add del">
-          <ac:chgData name="Tristan Plasse" userId="13c698b9-43c4-4271-b359-faaadca0774b" providerId="ADAL" clId="{FE460185-D4AE-4375-BA71-CD1D7F2341F0}" dt="2026-04-16T02:43:04.560" v="4113" actId="26606"/>
-          <ac:cxnSpMkLst>
-            <pc:docMk/>
-            <pc:sldMk cId="1896708259" sldId="271"/>
-            <ac:cxnSpMk id="10" creationId="{0AFF0B6C-73E2-4B40-9280-938C14922C87}"/>
-          </ac:cxnSpMkLst>
-        </pc:cxnChg>
-      </pc:sldChg>
-      <pc:sldChg chg="addSp delSp modSp new mod setBg">
-        <pc:chgData name="Tristan Plasse" userId="13c698b9-43c4-4271-b359-faaadca0774b" providerId="ADAL" clId="{FE460185-D4AE-4375-BA71-CD1D7F2341F0}" dt="2026-04-16T02:42:41.334" v="4108" actId="26606"/>
-        <pc:sldMkLst>
-          <pc:docMk/>
-          <pc:sldMk cId="1681359310" sldId="272"/>
-        </pc:sldMkLst>
-        <pc:spChg chg="mod">
-          <ac:chgData name="Tristan Plasse" userId="13c698b9-43c4-4271-b359-faaadca0774b" providerId="ADAL" clId="{FE460185-D4AE-4375-BA71-CD1D7F2341F0}" dt="2026-04-16T02:42:41.334" v="4108" actId="26606"/>
-          <ac:spMkLst>
-            <pc:docMk/>
-            <pc:sldMk cId="1681359310" sldId="272"/>
-            <ac:spMk id="2" creationId="{C6592201-F93D-A145-140C-4ED4769B3007}"/>
-          </ac:spMkLst>
-        </pc:spChg>
-        <pc:spChg chg="del">
-          <ac:chgData name="Tristan Plasse" userId="13c698b9-43c4-4271-b359-faaadca0774b" providerId="ADAL" clId="{FE460185-D4AE-4375-BA71-CD1D7F2341F0}" dt="2026-04-16T02:42:34.162" v="4107" actId="478"/>
-          <ac:spMkLst>
-            <pc:docMk/>
-            <pc:sldMk cId="1681359310" sldId="272"/>
-            <ac:spMk id="3" creationId="{73F2AA7A-9104-D0E1-A821-0144F482BC91}"/>
-          </ac:spMkLst>
-        </pc:spChg>
-        <pc:spChg chg="add">
-          <ac:chgData name="Tristan Plasse" userId="13c698b9-43c4-4271-b359-faaadca0774b" providerId="ADAL" clId="{FE460185-D4AE-4375-BA71-CD1D7F2341F0}" dt="2026-04-16T02:42:41.334" v="4108" actId="26606"/>
-          <ac:spMkLst>
-            <pc:docMk/>
-            <pc:sldMk cId="1681359310" sldId="272"/>
-            <ac:spMk id="11" creationId="{DEF92653-5D6D-47E6-8744-0DAF76E049C4}"/>
-          </ac:spMkLst>
-        </pc:spChg>
-        <pc:cxnChg chg="add">
-          <ac:chgData name="Tristan Plasse" userId="13c698b9-43c4-4271-b359-faaadca0774b" providerId="ADAL" clId="{FE460185-D4AE-4375-BA71-CD1D7F2341F0}" dt="2026-04-16T02:42:41.334" v="4108" actId="26606"/>
-          <ac:cxnSpMkLst>
-            <pc:docMk/>
-            <pc:sldMk cId="1681359310" sldId="272"/>
-            <ac:cxnSpMk id="7" creationId="{F64F9B95-9045-48D2-B9F3-2927E98F54AA}"/>
-          </ac:cxnSpMkLst>
-        </pc:cxnChg>
-        <pc:cxnChg chg="add">
-          <ac:chgData name="Tristan Plasse" userId="13c698b9-43c4-4271-b359-faaadca0774b" providerId="ADAL" clId="{FE460185-D4AE-4375-BA71-CD1D7F2341F0}" dt="2026-04-16T02:42:41.334" v="4108" actId="26606"/>
-          <ac:cxnSpMkLst>
-            <pc:docMk/>
-            <pc:sldMk cId="1681359310" sldId="272"/>
-            <ac:cxnSpMk id="9" creationId="{085AA86F-6A4D-4BCB-A045-D992CDC2959B}"/>
-          </ac:cxnSpMkLst>
-        </pc:cxnChg>
-        <pc:cxnChg chg="add">
-          <ac:chgData name="Tristan Plasse" userId="13c698b9-43c4-4271-b359-faaadca0774b" providerId="ADAL" clId="{FE460185-D4AE-4375-BA71-CD1D7F2341F0}" dt="2026-04-16T02:42:41.334" v="4108" actId="26606"/>
-          <ac:cxnSpMkLst>
-            <pc:docMk/>
-            <pc:sldMk cId="1681359310" sldId="272"/>
-            <ac:cxnSpMk id="13" creationId="{9CA98CE3-81A7-4FFE-A047-9AA65998D877}"/>
-          </ac:cxnSpMkLst>
-        </pc:cxnChg>
-      </pc:sldChg>
-      <pc:sldChg chg="addSp delSp modSp new mod">
-        <pc:chgData name="Tristan Plasse" userId="13c698b9-43c4-4271-b359-faaadca0774b" providerId="ADAL" clId="{FE460185-D4AE-4375-BA71-CD1D7F2341F0}" dt="2026-04-17T01:04:48.253" v="4499" actId="14100"/>
-        <pc:sldMkLst>
-          <pc:docMk/>
-          <pc:sldMk cId="3744480376" sldId="273"/>
-        </pc:sldMkLst>
-        <pc:spChg chg="mod">
-          <ac:chgData name="Tristan Plasse" userId="13c698b9-43c4-4271-b359-faaadca0774b" providerId="ADAL" clId="{FE460185-D4AE-4375-BA71-CD1D7F2341F0}" dt="2026-04-17T00:44:40.484" v="4141" actId="20577"/>
-          <ac:spMkLst>
-            <pc:docMk/>
-            <pc:sldMk cId="3744480376" sldId="273"/>
-            <ac:spMk id="2" creationId="{0EC2D6A5-520A-776E-E0CF-3651506DA145}"/>
-          </ac:spMkLst>
-        </pc:spChg>
-        <pc:spChg chg="mod">
-          <ac:chgData name="Tristan Plasse" userId="13c698b9-43c4-4271-b359-faaadca0774b" providerId="ADAL" clId="{FE460185-D4AE-4375-BA71-CD1D7F2341F0}" dt="2026-04-17T01:03:16.916" v="4483" actId="2710"/>
-          <ac:spMkLst>
-            <pc:docMk/>
-            <pc:sldMk cId="3744480376" sldId="273"/>
-            <ac:spMk id="3" creationId="{38AAA12E-716D-5899-9938-9C062F7A14B4}"/>
-          </ac:spMkLst>
-        </pc:spChg>
-        <pc:spChg chg="add del mod">
-          <ac:chgData name="Tristan Plasse" userId="13c698b9-43c4-4271-b359-faaadca0774b" providerId="ADAL" clId="{FE460185-D4AE-4375-BA71-CD1D7F2341F0}" dt="2026-04-17T01:04:08.852" v="4491" actId="11529"/>
-          <ac:spMkLst>
-            <pc:docMk/>
-            <pc:sldMk cId="3744480376" sldId="273"/>
-            <ac:spMk id="10" creationId="{D0CF86B7-C7F6-1143-ED5A-D2A3BC154518}"/>
-          </ac:spMkLst>
-        </pc:spChg>
-        <pc:spChg chg="add mod">
-          <ac:chgData name="Tristan Plasse" userId="13c698b9-43c4-4271-b359-faaadca0774b" providerId="ADAL" clId="{FE460185-D4AE-4375-BA71-CD1D7F2341F0}" dt="2026-04-17T01:04:48.253" v="4499" actId="14100"/>
-          <ac:spMkLst>
-            <pc:docMk/>
-            <pc:sldMk cId="3744480376" sldId="273"/>
-            <ac:spMk id="11" creationId="{7548656C-186D-3220-0CDB-0A482B5D9824}"/>
-          </ac:spMkLst>
-        </pc:spChg>
-        <pc:picChg chg="add mod">
-          <ac:chgData name="Tristan Plasse" userId="13c698b9-43c4-4271-b359-faaadca0774b" providerId="ADAL" clId="{FE460185-D4AE-4375-BA71-CD1D7F2341F0}" dt="2026-04-17T01:03:20.603" v="4484" actId="1076"/>
-          <ac:picMkLst>
-            <pc:docMk/>
-            <pc:sldMk cId="3744480376" sldId="273"/>
-            <ac:picMk id="5" creationId="{9685D4F2-40A3-6B20-7AD7-ACCE12A4A00F}"/>
-          </ac:picMkLst>
-        </pc:picChg>
-        <pc:picChg chg="add mod">
-          <ac:chgData name="Tristan Plasse" userId="13c698b9-43c4-4271-b359-faaadca0774b" providerId="ADAL" clId="{FE460185-D4AE-4375-BA71-CD1D7F2341F0}" dt="2026-04-17T01:03:23.337" v="4485" actId="1076"/>
-          <ac:picMkLst>
-            <pc:docMk/>
-            <pc:sldMk cId="3744480376" sldId="273"/>
-            <ac:picMk id="7" creationId="{BB415FDE-9E57-650D-4644-A3CC764FDA45}"/>
-          </ac:picMkLst>
-        </pc:picChg>
-        <pc:cxnChg chg="add del mod">
-          <ac:chgData name="Tristan Plasse" userId="13c698b9-43c4-4271-b359-faaadca0774b" providerId="ADAL" clId="{FE460185-D4AE-4375-BA71-CD1D7F2341F0}" dt="2026-04-17T01:03:45.869" v="4487" actId="478"/>
-          <ac:cxnSpMkLst>
-            <pc:docMk/>
-            <pc:sldMk cId="3744480376" sldId="273"/>
-            <ac:cxnSpMk id="9" creationId="{8BE37D1B-F31A-9D61-8C1D-4BC41C8E9CAF}"/>
-          </ac:cxnSpMkLst>
-        </pc:cxnChg>
-      </pc:sldChg>
-      <pc:sldChg chg="addSp delSp modSp new mod setBg">
-        <pc:chgData name="Tristan Plasse" userId="13c698b9-43c4-4271-b359-faaadca0774b" providerId="ADAL" clId="{FE460185-D4AE-4375-BA71-CD1D7F2341F0}" dt="2026-04-17T02:33:55.725" v="5481" actId="20577"/>
-        <pc:sldMkLst>
-          <pc:docMk/>
-          <pc:sldMk cId="3943359794" sldId="274"/>
-        </pc:sldMkLst>
-        <pc:spChg chg="mod">
-          <ac:chgData name="Tristan Plasse" userId="13c698b9-43c4-4271-b359-faaadca0774b" providerId="ADAL" clId="{FE460185-D4AE-4375-BA71-CD1D7F2341F0}" dt="2026-04-16T22:11:55.941" v="4134" actId="26606"/>
-          <ac:spMkLst>
-            <pc:docMk/>
-            <pc:sldMk cId="3943359794" sldId="274"/>
-            <ac:spMk id="2" creationId="{F3A5A10E-A61E-2445-131F-98F4232F9171}"/>
-          </ac:spMkLst>
-        </pc:spChg>
-        <pc:spChg chg="add mod">
-          <ac:chgData name="Tristan Plasse" userId="13c698b9-43c4-4271-b359-faaadca0774b" providerId="ADAL" clId="{FE460185-D4AE-4375-BA71-CD1D7F2341F0}" dt="2026-04-17T02:33:53.673" v="5479" actId="20577"/>
-          <ac:spMkLst>
-            <pc:docMk/>
-            <pc:sldMk cId="3943359794" sldId="274"/>
-            <ac:spMk id="3" creationId="{76DBA5CA-9694-DA50-372E-DE9E5298136C}"/>
-          </ac:spMkLst>
-        </pc:spChg>
-        <pc:spChg chg="del">
-          <ac:chgData name="Tristan Plasse" userId="13c698b9-43c4-4271-b359-faaadca0774b" providerId="ADAL" clId="{FE460185-D4AE-4375-BA71-CD1D7F2341F0}" dt="2026-04-16T21:59:01.265" v="4124" actId="478"/>
-          <ac:spMkLst>
-            <pc:docMk/>
-            <pc:sldMk cId="3943359794" sldId="274"/>
-            <ac:spMk id="3" creationId="{7D509329-D8E9-DC9D-AA20-8B13EE3B11C5}"/>
-          </ac:spMkLst>
-        </pc:spChg>
-        <pc:spChg chg="add mod">
-          <ac:chgData name="Tristan Plasse" userId="13c698b9-43c4-4271-b359-faaadca0774b" providerId="ADAL" clId="{FE460185-D4AE-4375-BA71-CD1D7F2341F0}" dt="2026-04-17T02:33:55.725" v="5481" actId="20577"/>
-          <ac:spMkLst>
-            <pc:docMk/>
-            <pc:sldMk cId="3943359794" sldId="274"/>
-            <ac:spMk id="4" creationId="{0975B400-8C59-591A-0177-77A6A072BEDE}"/>
-          </ac:spMkLst>
-        </pc:spChg>
-        <pc:spChg chg="add">
-          <ac:chgData name="Tristan Plasse" userId="13c698b9-43c4-4271-b359-faaadca0774b" providerId="ADAL" clId="{FE460185-D4AE-4375-BA71-CD1D7F2341F0}" dt="2026-04-16T21:59:01.625" v="4125"/>
-          <ac:spMkLst>
-            <pc:docMk/>
-            <pc:sldMk cId="3943359794" sldId="274"/>
-            <ac:spMk id="4" creationId="{52175E9E-193B-CABD-0847-D23BEF1F84FC}"/>
-          </ac:spMkLst>
-        </pc:spChg>
-        <pc:spChg chg="add">
-          <ac:chgData name="Tristan Plasse" userId="13c698b9-43c4-4271-b359-faaadca0774b" providerId="ADAL" clId="{FE460185-D4AE-4375-BA71-CD1D7F2341F0}" dt="2026-04-16T21:59:05.947" v="4126"/>
-          <ac:spMkLst>
-            <pc:docMk/>
-            <pc:sldMk cId="3943359794" sldId="274"/>
-            <ac:spMk id="5" creationId="{5C7006F9-8CAE-B5C4-8633-9F7A94BDC7FD}"/>
-          </ac:spMkLst>
-        </pc:spChg>
-        <pc:spChg chg="add">
-          <ac:chgData name="Tristan Plasse" userId="13c698b9-43c4-4271-b359-faaadca0774b" providerId="ADAL" clId="{FE460185-D4AE-4375-BA71-CD1D7F2341F0}" dt="2026-04-16T22:11:50.444" v="4131"/>
-          <ac:spMkLst>
-            <pc:docMk/>
-            <pc:sldMk cId="3943359794" sldId="274"/>
-            <ac:spMk id="8" creationId="{653D6F1D-B915-DB9E-2085-A8CC25F78665}"/>
-          </ac:spMkLst>
-        </pc:spChg>
-        <pc:spChg chg="add">
-          <ac:chgData name="Tristan Plasse" userId="13c698b9-43c4-4271-b359-faaadca0774b" providerId="ADAL" clId="{FE460185-D4AE-4375-BA71-CD1D7F2341F0}" dt="2026-04-16T22:11:55.941" v="4134" actId="26606"/>
-          <ac:spMkLst>
-            <pc:docMk/>
-            <pc:sldMk cId="3943359794" sldId="274"/>
-            <ac:spMk id="19" creationId="{341BFA31-6544-45C2-9DA0-9E1C5E0B1959}"/>
-          </ac:spMkLst>
-        </pc:spChg>
-        <pc:picChg chg="add mod ord">
-          <ac:chgData name="Tristan Plasse" userId="13c698b9-43c4-4271-b359-faaadca0774b" providerId="ADAL" clId="{FE460185-D4AE-4375-BA71-CD1D7F2341F0}" dt="2026-04-17T02:33:28.013" v="5473" actId="1076"/>
-          <ac:picMkLst>
-            <pc:docMk/>
-            <pc:sldMk cId="3943359794" sldId="274"/>
-            <ac:picMk id="7" creationId="{A7047DCF-1E5A-A37A-7B89-E425EBDB3458}"/>
-          </ac:picMkLst>
-        </pc:picChg>
-        <pc:picChg chg="add mod">
-          <ac:chgData name="Tristan Plasse" userId="13c698b9-43c4-4271-b359-faaadca0774b" providerId="ADAL" clId="{FE460185-D4AE-4375-BA71-CD1D7F2341F0}" dt="2026-04-17T02:31:23.145" v="5318" actId="1076"/>
-          <ac:picMkLst>
-            <pc:docMk/>
-            <pc:sldMk cId="3943359794" sldId="274"/>
-            <ac:picMk id="10" creationId="{9D9C65FB-6DB1-A9D5-4232-01BDE010BE4E}"/>
-          </ac:picMkLst>
-        </pc:picChg>
-        <pc:cxnChg chg="add">
-          <ac:chgData name="Tristan Plasse" userId="13c698b9-43c4-4271-b359-faaadca0774b" providerId="ADAL" clId="{FE460185-D4AE-4375-BA71-CD1D7F2341F0}" dt="2026-04-16T22:11:55.941" v="4134" actId="26606"/>
-          <ac:cxnSpMkLst>
-            <pc:docMk/>
-            <pc:sldMk cId="3943359794" sldId="274"/>
-            <ac:cxnSpMk id="15" creationId="{F64F9B95-9045-48D2-B9F3-2927E98F54AA}"/>
-          </ac:cxnSpMkLst>
-        </pc:cxnChg>
-        <pc:cxnChg chg="add">
-          <ac:chgData name="Tristan Plasse" userId="13c698b9-43c4-4271-b359-faaadca0774b" providerId="ADAL" clId="{FE460185-D4AE-4375-BA71-CD1D7F2341F0}" dt="2026-04-16T22:11:55.941" v="4134" actId="26606"/>
-          <ac:cxnSpMkLst>
-            <pc:docMk/>
-            <pc:sldMk cId="3943359794" sldId="274"/>
-            <ac:cxnSpMk id="17" creationId="{085AA86F-6A4D-4BCB-A045-D992CDC2959B}"/>
-          </ac:cxnSpMkLst>
-        </pc:cxnChg>
-        <pc:cxnChg chg="add">
-          <ac:chgData name="Tristan Plasse" userId="13c698b9-43c4-4271-b359-faaadca0774b" providerId="ADAL" clId="{FE460185-D4AE-4375-BA71-CD1D7F2341F0}" dt="2026-04-16T22:11:55.941" v="4134" actId="26606"/>
-          <ac:cxnSpMkLst>
-            <pc:docMk/>
-            <pc:sldMk cId="3943359794" sldId="274"/>
-            <ac:cxnSpMk id="21" creationId="{DC36F877-5419-44C1-A2CD-376BDDDC3E41}"/>
-          </ac:cxnSpMkLst>
-        </pc:cxnChg>
-      </pc:sldChg>
-      <pc:sldChg chg="addSp modSp new mod">
-        <pc:chgData name="Tristan Plasse" userId="13c698b9-43c4-4271-b359-faaadca0774b" providerId="ADAL" clId="{FE460185-D4AE-4375-BA71-CD1D7F2341F0}" dt="2026-04-17T01:03:11.754" v="4482" actId="2710"/>
-        <pc:sldMkLst>
-          <pc:docMk/>
-          <pc:sldMk cId="3710197240" sldId="275"/>
-        </pc:sldMkLst>
-        <pc:spChg chg="mod">
-          <ac:chgData name="Tristan Plasse" userId="13c698b9-43c4-4271-b359-faaadca0774b" providerId="ADAL" clId="{FE460185-D4AE-4375-BA71-CD1D7F2341F0}" dt="2026-04-17T00:59:10.373" v="4380" actId="20577"/>
-          <ac:spMkLst>
-            <pc:docMk/>
-            <pc:sldMk cId="3710197240" sldId="275"/>
-            <ac:spMk id="2" creationId="{A4F1E310-7C7B-1E3D-DBA7-78328792D625}"/>
-          </ac:spMkLst>
-        </pc:spChg>
-        <pc:spChg chg="mod">
-          <ac:chgData name="Tristan Plasse" userId="13c698b9-43c4-4271-b359-faaadca0774b" providerId="ADAL" clId="{FE460185-D4AE-4375-BA71-CD1D7F2341F0}" dt="2026-04-17T01:03:11.754" v="4482" actId="2710"/>
-          <ac:spMkLst>
-            <pc:docMk/>
-            <pc:sldMk cId="3710197240" sldId="275"/>
-            <ac:spMk id="3" creationId="{EE1A390D-8519-2554-2768-18698B2C10FF}"/>
-          </ac:spMkLst>
-        </pc:spChg>
-        <pc:spChg chg="add mod">
-          <ac:chgData name="Tristan Plasse" userId="13c698b9-43c4-4271-b359-faaadca0774b" providerId="ADAL" clId="{FE460185-D4AE-4375-BA71-CD1D7F2341F0}" dt="2026-04-17T01:02:47.762" v="4481" actId="164"/>
-          <ac:spMkLst>
-            <pc:docMk/>
-            <pc:sldMk cId="3710197240" sldId="275"/>
-            <ac:spMk id="4" creationId="{769DBEF4-FBE0-6D7D-A4A1-31856EB49A5B}"/>
-          </ac:spMkLst>
-        </pc:spChg>
-        <pc:spChg chg="add mod">
-          <ac:chgData name="Tristan Plasse" userId="13c698b9-43c4-4271-b359-faaadca0774b" providerId="ADAL" clId="{FE460185-D4AE-4375-BA71-CD1D7F2341F0}" dt="2026-04-17T01:02:47.762" v="4481" actId="164"/>
-          <ac:spMkLst>
-            <pc:docMk/>
-            <pc:sldMk cId="3710197240" sldId="275"/>
-            <ac:spMk id="5" creationId="{584A445A-35A4-5CCD-3E0F-1132280B6EBE}"/>
-          </ac:spMkLst>
-        </pc:spChg>
-        <pc:spChg chg="add mod">
-          <ac:chgData name="Tristan Plasse" userId="13c698b9-43c4-4271-b359-faaadca0774b" providerId="ADAL" clId="{FE460185-D4AE-4375-BA71-CD1D7F2341F0}" dt="2026-04-17T01:02:47.762" v="4481" actId="164"/>
-          <ac:spMkLst>
-            <pc:docMk/>
-            <pc:sldMk cId="3710197240" sldId="275"/>
-            <ac:spMk id="6" creationId="{88AA4DF5-8C2D-2045-0ED6-5A771E6D2A10}"/>
-          </ac:spMkLst>
-        </pc:spChg>
-        <pc:grpChg chg="add mod">
-          <ac:chgData name="Tristan Plasse" userId="13c698b9-43c4-4271-b359-faaadca0774b" providerId="ADAL" clId="{FE460185-D4AE-4375-BA71-CD1D7F2341F0}" dt="2026-04-17T01:02:47.762" v="4481" actId="164"/>
-          <ac:grpSpMkLst>
-            <pc:docMk/>
-            <pc:sldMk cId="3710197240" sldId="275"/>
-            <ac:grpSpMk id="7" creationId="{31604140-0BE4-E83C-1948-7A6E95F7AEB4}"/>
-          </ac:grpSpMkLst>
-        </pc:grpChg>
-      </pc:sldChg>
-      <pc:sldChg chg="modSp new mod">
-        <pc:chgData name="Tristan Plasse" userId="13c698b9-43c4-4271-b359-faaadca0774b" providerId="ADAL" clId="{FE460185-D4AE-4375-BA71-CD1D7F2341F0}" dt="2026-04-17T01:14:19.003" v="4704" actId="20577"/>
-        <pc:sldMkLst>
-          <pc:docMk/>
-          <pc:sldMk cId="1164678962" sldId="276"/>
-        </pc:sldMkLst>
-        <pc:spChg chg="mod">
-          <ac:chgData name="Tristan Plasse" userId="13c698b9-43c4-4271-b359-faaadca0774b" providerId="ADAL" clId="{FE460185-D4AE-4375-BA71-CD1D7F2341F0}" dt="2026-04-17T01:14:04.552" v="4699" actId="20577"/>
-          <ac:spMkLst>
-            <pc:docMk/>
-            <pc:sldMk cId="1164678962" sldId="276"/>
-            <ac:spMk id="2" creationId="{DE69A1AE-572E-D5B4-03BD-F325D0A3E202}"/>
-          </ac:spMkLst>
-        </pc:spChg>
-        <pc:spChg chg="mod">
-          <ac:chgData name="Tristan Plasse" userId="13c698b9-43c4-4271-b359-faaadca0774b" providerId="ADAL" clId="{FE460185-D4AE-4375-BA71-CD1D7F2341F0}" dt="2026-04-17T01:14:19.003" v="4704" actId="20577"/>
-          <ac:spMkLst>
-            <pc:docMk/>
-            <pc:sldMk cId="1164678962" sldId="276"/>
-            <ac:spMk id="3" creationId="{FC01AAB4-81AB-D42D-04AB-96781CB6AC94}"/>
-          </ac:spMkLst>
-        </pc:spChg>
-      </pc:sldChg>
-      <pc:sldChg chg="addSp delSp modSp new mod setBg">
-        <pc:chgData name="Tristan Plasse" userId="13c698b9-43c4-4271-b359-faaadca0774b" providerId="ADAL" clId="{FE460185-D4AE-4375-BA71-CD1D7F2341F0}" dt="2026-04-17T01:25:57.368" v="4728" actId="21"/>
-        <pc:sldMkLst>
-          <pc:docMk/>
-          <pc:sldMk cId="1439899674" sldId="277"/>
-        </pc:sldMkLst>
-        <pc:spChg chg="mod">
-          <ac:chgData name="Tristan Plasse" userId="13c698b9-43c4-4271-b359-faaadca0774b" providerId="ADAL" clId="{FE460185-D4AE-4375-BA71-CD1D7F2341F0}" dt="2026-04-17T01:22:58.783" v="4718" actId="26606"/>
-          <ac:spMkLst>
-            <pc:docMk/>
-            <pc:sldMk cId="1439899674" sldId="277"/>
-            <ac:spMk id="2" creationId="{94F7A99C-0ACF-5557-9578-B80FE0D75B77}"/>
-          </ac:spMkLst>
-        </pc:spChg>
-        <pc:spChg chg="del">
-          <ac:chgData name="Tristan Plasse" userId="13c698b9-43c4-4271-b359-faaadca0774b" providerId="ADAL" clId="{FE460185-D4AE-4375-BA71-CD1D7F2341F0}" dt="2026-04-17T01:22:54.237" v="4716"/>
-          <ac:spMkLst>
-            <pc:docMk/>
-            <pc:sldMk cId="1439899674" sldId="277"/>
-            <ac:spMk id="3" creationId="{F279EAF3-2A2A-BB55-CBFF-6FE1F581B414}"/>
-          </ac:spMkLst>
-        </pc:spChg>
-        <pc:spChg chg="add">
-          <ac:chgData name="Tristan Plasse" userId="13c698b9-43c4-4271-b359-faaadca0774b" providerId="ADAL" clId="{FE460185-D4AE-4375-BA71-CD1D7F2341F0}" dt="2026-04-17T01:22:58.783" v="4718" actId="26606"/>
-          <ac:spMkLst>
-            <pc:docMk/>
-            <pc:sldMk cId="1439899674" sldId="277"/>
-            <ac:spMk id="14" creationId="{33E93247-6229-44AB-A550-739E971E690B}"/>
-          </ac:spMkLst>
-        </pc:spChg>
-        <pc:picChg chg="add mod ord">
-          <ac:chgData name="Tristan Plasse" userId="13c698b9-43c4-4271-b359-faaadca0774b" providerId="ADAL" clId="{FE460185-D4AE-4375-BA71-CD1D7F2341F0}" dt="2026-04-17T01:22:58.783" v="4718" actId="26606"/>
-          <ac:picMkLst>
-            <pc:docMk/>
-            <pc:sldMk cId="1439899674" sldId="277"/>
-            <ac:picMk id="5" creationId="{DEB15709-306B-BF61-202F-0B24322B33AC}"/>
-          </ac:picMkLst>
-        </pc:picChg>
-        <pc:picChg chg="add del mod">
-          <ac:chgData name="Tristan Plasse" userId="13c698b9-43c4-4271-b359-faaadca0774b" providerId="ADAL" clId="{FE460185-D4AE-4375-BA71-CD1D7F2341F0}" dt="2026-04-17T01:23:54.536" v="4721" actId="478"/>
-          <ac:picMkLst>
-            <pc:docMk/>
-            <pc:sldMk cId="1439899674" sldId="277"/>
-            <ac:picMk id="7" creationId="{93FC3CF0-AD0C-8D8A-5F13-561363CD0342}"/>
-          </ac:picMkLst>
-        </pc:picChg>
-        <pc:picChg chg="add del mod">
-          <ac:chgData name="Tristan Plasse" userId="13c698b9-43c4-4271-b359-faaadca0774b" providerId="ADAL" clId="{FE460185-D4AE-4375-BA71-CD1D7F2341F0}" dt="2026-04-17T01:25:57.368" v="4728" actId="21"/>
-          <ac:picMkLst>
-            <pc:docMk/>
-            <pc:sldMk cId="1439899674" sldId="277"/>
-            <ac:picMk id="9" creationId="{CE99E6EA-6C50-A9AF-63F6-B30BF2E36593}"/>
-          </ac:picMkLst>
-        </pc:picChg>
-        <pc:cxnChg chg="add">
-          <ac:chgData name="Tristan Plasse" userId="13c698b9-43c4-4271-b359-faaadca0774b" providerId="ADAL" clId="{FE460185-D4AE-4375-BA71-CD1D7F2341F0}" dt="2026-04-17T01:22:58.783" v="4718" actId="26606"/>
-          <ac:cxnSpMkLst>
-            <pc:docMk/>
-            <pc:sldMk cId="1439899674" sldId="277"/>
-            <ac:cxnSpMk id="10" creationId="{F64F9B95-9045-48D2-B9F3-2927E98F54AA}"/>
-          </ac:cxnSpMkLst>
-        </pc:cxnChg>
-        <pc:cxnChg chg="add">
-          <ac:chgData name="Tristan Plasse" userId="13c698b9-43c4-4271-b359-faaadca0774b" providerId="ADAL" clId="{FE460185-D4AE-4375-BA71-CD1D7F2341F0}" dt="2026-04-17T01:22:58.783" v="4718" actId="26606"/>
-          <ac:cxnSpMkLst>
-            <pc:docMk/>
-            <pc:sldMk cId="1439899674" sldId="277"/>
-            <ac:cxnSpMk id="12" creationId="{085AA86F-6A4D-4BCB-A045-D992CDC2959B}"/>
-          </ac:cxnSpMkLst>
-        </pc:cxnChg>
-        <pc:cxnChg chg="add">
-          <ac:chgData name="Tristan Plasse" userId="13c698b9-43c4-4271-b359-faaadca0774b" providerId="ADAL" clId="{FE460185-D4AE-4375-BA71-CD1D7F2341F0}" dt="2026-04-17T01:22:58.783" v="4718" actId="26606"/>
-          <ac:cxnSpMkLst>
-            <pc:docMk/>
-            <pc:sldMk cId="1439899674" sldId="277"/>
-            <ac:cxnSpMk id="16" creationId="{EE2E603F-4A95-4FE8-BB06-211DFD75DBEF}"/>
-          </ac:cxnSpMkLst>
-        </pc:cxnChg>
-      </pc:sldChg>
-      <pc:sldChg chg="addSp delSp modSp new mod">
-        <pc:chgData name="Tristan Plasse" userId="13c698b9-43c4-4271-b359-faaadca0774b" providerId="ADAL" clId="{FE460185-D4AE-4375-BA71-CD1D7F2341F0}" dt="2026-04-17T02:46:58.779" v="5560" actId="20577"/>
-        <pc:sldMkLst>
-          <pc:docMk/>
-          <pc:sldMk cId="2449617363" sldId="278"/>
-        </pc:sldMkLst>
-        <pc:spChg chg="del">
-          <ac:chgData name="Tristan Plasse" userId="13c698b9-43c4-4271-b359-faaadca0774b" providerId="ADAL" clId="{FE460185-D4AE-4375-BA71-CD1D7F2341F0}" dt="2026-04-17T01:26:13.185" v="4734" actId="478"/>
-          <ac:spMkLst>
-            <pc:docMk/>
-            <pc:sldMk cId="2449617363" sldId="278"/>
-            <ac:spMk id="2" creationId="{E764F047-4C87-EFC0-5081-C3EBD8EDEF6C}"/>
-          </ac:spMkLst>
-        </pc:spChg>
-        <pc:spChg chg="add del mod">
-          <ac:chgData name="Tristan Plasse" userId="13c698b9-43c4-4271-b359-faaadca0774b" providerId="ADAL" clId="{FE460185-D4AE-4375-BA71-CD1D7F2341F0}" dt="2026-04-17T02:44:37.038" v="5491"/>
-          <ac:spMkLst>
-            <pc:docMk/>
-            <pc:sldMk cId="2449617363" sldId="278"/>
-            <ac:spMk id="3" creationId="{735A5396-163A-4614-7FC3-8135E8EC2D82}"/>
-          </ac:spMkLst>
-        </pc:spChg>
-        <pc:spChg chg="del">
-          <ac:chgData name="Tristan Plasse" userId="13c698b9-43c4-4271-b359-faaadca0774b" providerId="ADAL" clId="{FE460185-D4AE-4375-BA71-CD1D7F2341F0}" dt="2026-04-17T01:25:53.221" v="4727"/>
-          <ac:spMkLst>
-            <pc:docMk/>
-            <pc:sldMk cId="2449617363" sldId="278"/>
-            <ac:spMk id="3" creationId="{D7FB8DB0-7535-272B-41AF-7265B7F3A2D1}"/>
-          </ac:spMkLst>
-        </pc:spChg>
-        <pc:spChg chg="add mod">
-          <ac:chgData name="Tristan Plasse" userId="13c698b9-43c4-4271-b359-faaadca0774b" providerId="ADAL" clId="{FE460185-D4AE-4375-BA71-CD1D7F2341F0}" dt="2026-04-17T02:46:58.779" v="5560" actId="20577"/>
-          <ac:spMkLst>
-            <pc:docMk/>
-            <pc:sldMk cId="2449617363" sldId="278"/>
-            <ac:spMk id="8" creationId="{E86FE8AB-8CA2-26C6-1EA0-DD8874CA071A}"/>
-          </ac:spMkLst>
-        </pc:spChg>
-        <pc:picChg chg="add del mod ord">
-          <ac:chgData name="Tristan Plasse" userId="13c698b9-43c4-4271-b359-faaadca0774b" providerId="ADAL" clId="{FE460185-D4AE-4375-BA71-CD1D7F2341F0}" dt="2026-04-17T02:44:36.658" v="5489" actId="478"/>
-          <ac:picMkLst>
-            <pc:docMk/>
-            <pc:sldMk cId="2449617363" sldId="278"/>
-            <ac:picMk id="5" creationId="{2894EE87-C10F-C2AC-44DB-1A002CE45605}"/>
-          </ac:picMkLst>
-        </pc:picChg>
-        <pc:picChg chg="add mod ord">
-          <ac:chgData name="Tristan Plasse" userId="13c698b9-43c4-4271-b359-faaadca0774b" providerId="ADAL" clId="{FE460185-D4AE-4375-BA71-CD1D7F2341F0}" dt="2026-04-17T02:44:51.817" v="5495" actId="1076"/>
-          <ac:picMkLst>
-            <pc:docMk/>
-            <pc:sldMk cId="2449617363" sldId="278"/>
-            <ac:picMk id="6" creationId="{9ED18B4D-9AA2-BAA4-64B2-A725FA232668}"/>
-          </ac:picMkLst>
-        </pc:picChg>
-        <pc:picChg chg="add mod modCrop">
-          <ac:chgData name="Tristan Plasse" userId="13c698b9-43c4-4271-b359-faaadca0774b" providerId="ADAL" clId="{FE460185-D4AE-4375-BA71-CD1D7F2341F0}" dt="2026-04-17T02:45:56.147" v="5503" actId="1076"/>
-          <ac:picMkLst>
-            <pc:docMk/>
-            <pc:sldMk cId="2449617363" sldId="278"/>
-            <ac:picMk id="7" creationId="{F7961088-DAF3-40D1-2014-1BE6DA6821BF}"/>
-          </ac:picMkLst>
-        </pc:picChg>
-      </pc:sldChg>
-      <pc:sldChg chg="addSp delSp modSp new mod">
-        <pc:chgData name="Tristan Plasse" userId="13c698b9-43c4-4271-b359-faaadca0774b" providerId="ADAL" clId="{FE460185-D4AE-4375-BA71-CD1D7F2341F0}" dt="2026-04-17T01:26:07.372" v="4733" actId="1076"/>
-        <pc:sldMkLst>
-          <pc:docMk/>
-          <pc:sldMk cId="422633496" sldId="279"/>
-        </pc:sldMkLst>
-        <pc:spChg chg="del">
-          <ac:chgData name="Tristan Plasse" userId="13c698b9-43c4-4271-b359-faaadca0774b" providerId="ADAL" clId="{FE460185-D4AE-4375-BA71-CD1D7F2341F0}" dt="2026-04-17T01:26:03.213" v="4730" actId="478"/>
-          <ac:spMkLst>
-            <pc:docMk/>
-            <pc:sldMk cId="422633496" sldId="279"/>
-            <ac:spMk id="2" creationId="{2FA227F2-D8A4-A7C2-5991-3DCDFD82DBCF}"/>
-          </ac:spMkLst>
-        </pc:spChg>
-        <pc:spChg chg="del">
-          <ac:chgData name="Tristan Plasse" userId="13c698b9-43c4-4271-b359-faaadca0774b" providerId="ADAL" clId="{FE460185-D4AE-4375-BA71-CD1D7F2341F0}" dt="2026-04-17T01:26:05.148" v="4731" actId="478"/>
-          <ac:spMkLst>
-            <pc:docMk/>
-            <pc:sldMk cId="422633496" sldId="279"/>
-            <ac:spMk id="3" creationId="{13AA5119-EF1F-9E55-8D24-F3DA2F70A6BD}"/>
-          </ac:spMkLst>
-        </pc:spChg>
-        <pc:picChg chg="add mod">
-          <ac:chgData name="Tristan Plasse" userId="13c698b9-43c4-4271-b359-faaadca0774b" providerId="ADAL" clId="{FE460185-D4AE-4375-BA71-CD1D7F2341F0}" dt="2026-04-17T01:26:07.372" v="4733" actId="1076"/>
-          <ac:picMkLst>
-            <pc:docMk/>
-            <pc:sldMk cId="422633496" sldId="279"/>
-            <ac:picMk id="9" creationId="{CE99E6EA-6C50-A9AF-63F6-B30BF2E36593}"/>
-          </ac:picMkLst>
-        </pc:picChg>
-      </pc:sldChg>
-      <pc:sldChg chg="modSp new mod">
-        <pc:chgData name="Tristan Plasse" userId="13c698b9-43c4-4271-b359-faaadca0774b" providerId="ADAL" clId="{FE460185-D4AE-4375-BA71-CD1D7F2341F0}" dt="2026-04-17T03:17:15.395" v="5595" actId="20577"/>
-        <pc:sldMkLst>
-          <pc:docMk/>
-          <pc:sldMk cId="901628721" sldId="280"/>
-        </pc:sldMkLst>
-        <pc:spChg chg="mod">
-          <ac:chgData name="Tristan Plasse" userId="13c698b9-43c4-4271-b359-faaadca0774b" providerId="ADAL" clId="{FE460185-D4AE-4375-BA71-CD1D7F2341F0}" dt="2026-04-17T01:26:26.896" v="4747" actId="20577"/>
-          <ac:spMkLst>
-            <pc:docMk/>
-            <pc:sldMk cId="901628721" sldId="280"/>
-            <ac:spMk id="2" creationId="{AFD15BD0-D23D-BCDB-DC4F-EC9E34FD8E77}"/>
-          </ac:spMkLst>
-        </pc:spChg>
-        <pc:spChg chg="mod">
-          <ac:chgData name="Tristan Plasse" userId="13c698b9-43c4-4271-b359-faaadca0774b" providerId="ADAL" clId="{FE460185-D4AE-4375-BA71-CD1D7F2341F0}" dt="2026-04-17T03:17:15.395" v="5595" actId="20577"/>
-          <ac:spMkLst>
-            <pc:docMk/>
-            <pc:sldMk cId="901628721" sldId="280"/>
-            <ac:spMk id="3" creationId="{7FDDC518-1F1F-76F1-2545-8D01AE3B32C4}"/>
-          </ac:spMkLst>
-        </pc:spChg>
-      </pc:sldChg>
-      <pc:sldChg chg="addSp modSp new mod setBg">
-        <pc:chgData name="Tristan Plasse" userId="13c698b9-43c4-4271-b359-faaadca0774b" providerId="ADAL" clId="{FE460185-D4AE-4375-BA71-CD1D7F2341F0}" dt="2026-04-17T01:29:55.712" v="5038" actId="14100"/>
-        <pc:sldMkLst>
-          <pc:docMk/>
-          <pc:sldMk cId="1209728823" sldId="281"/>
-        </pc:sldMkLst>
-        <pc:spChg chg="mod">
-          <ac:chgData name="Tristan Plasse" userId="13c698b9-43c4-4271-b359-faaadca0774b" providerId="ADAL" clId="{FE460185-D4AE-4375-BA71-CD1D7F2341F0}" dt="2026-04-17T01:29:12.692" v="5030" actId="26606"/>
-          <ac:spMkLst>
-            <pc:docMk/>
-            <pc:sldMk cId="1209728823" sldId="281"/>
-            <ac:spMk id="2" creationId="{A89A0B66-12A9-A560-B2C3-D5DE68D00757}"/>
-          </ac:spMkLst>
-        </pc:spChg>
-        <pc:spChg chg="mod ord">
-          <ac:chgData name="Tristan Plasse" userId="13c698b9-43c4-4271-b359-faaadca0774b" providerId="ADAL" clId="{FE460185-D4AE-4375-BA71-CD1D7F2341F0}" dt="2026-04-17T01:29:12.692" v="5030" actId="26606"/>
-          <ac:spMkLst>
-            <pc:docMk/>
-            <pc:sldMk cId="1209728823" sldId="281"/>
-            <ac:spMk id="3" creationId="{D5F08C3C-2B07-D167-483B-592FFD9479FB}"/>
-          </ac:spMkLst>
-        </pc:spChg>
-        <pc:spChg chg="add mod">
-          <ac:chgData name="Tristan Plasse" userId="13c698b9-43c4-4271-b359-faaadca0774b" providerId="ADAL" clId="{FE460185-D4AE-4375-BA71-CD1D7F2341F0}" dt="2026-04-17T01:29:55.712" v="5038" actId="14100"/>
-          <ac:spMkLst>
-            <pc:docMk/>
-            <pc:sldMk cId="1209728823" sldId="281"/>
-            <ac:spMk id="4" creationId="{4908DAB4-9378-641C-7822-F8FFCB3F9F8A}"/>
-          </ac:spMkLst>
-        </pc:spChg>
-        <pc:spChg chg="add">
-          <ac:chgData name="Tristan Plasse" userId="13c698b9-43c4-4271-b359-faaadca0774b" providerId="ADAL" clId="{FE460185-D4AE-4375-BA71-CD1D7F2341F0}" dt="2026-04-17T01:29:12.692" v="5030" actId="26606"/>
-          <ac:spMkLst>
-            <pc:docMk/>
-            <pc:sldMk cId="1209728823" sldId="281"/>
-            <ac:spMk id="2055" creationId="{E49D7415-2F11-44C2-B6AA-13A25B6814B9}"/>
-          </ac:spMkLst>
-        </pc:spChg>
-        <pc:picChg chg="add mod">
-          <ac:chgData name="Tristan Plasse" userId="13c698b9-43c4-4271-b359-faaadca0774b" providerId="ADAL" clId="{FE460185-D4AE-4375-BA71-CD1D7F2341F0}" dt="2026-04-17T01:29:21.933" v="5031" actId="18131"/>
-          <ac:picMkLst>
-            <pc:docMk/>
-            <pc:sldMk cId="1209728823" sldId="281"/>
-            <ac:picMk id="2050" creationId="{6E929EB8-0E77-8D30-C757-71AEE670B488}"/>
-          </ac:picMkLst>
-        </pc:picChg>
-        <pc:cxnChg chg="add">
-          <ac:chgData name="Tristan Plasse" userId="13c698b9-43c4-4271-b359-faaadca0774b" providerId="ADAL" clId="{FE460185-D4AE-4375-BA71-CD1D7F2341F0}" dt="2026-04-17T01:29:12.692" v="5030" actId="26606"/>
-          <ac:cxnSpMkLst>
-            <pc:docMk/>
-            <pc:sldMk cId="1209728823" sldId="281"/>
-            <ac:cxnSpMk id="2057" creationId="{8E0104E4-99BC-494F-8342-F250828E574F}"/>
-          </ac:cxnSpMkLst>
-        </pc:cxnChg>
-      </pc:sldChg>
-      <pc:sldChg chg="addSp delSp modSp new mod setBg setClrOvrMap">
-        <pc:chgData name="Tristan Plasse" userId="13c698b9-43c4-4271-b359-faaadca0774b" providerId="ADAL" clId="{FE460185-D4AE-4375-BA71-CD1D7F2341F0}" dt="2026-04-17T01:31:13.276" v="5059" actId="1076"/>
-        <pc:sldMkLst>
-          <pc:docMk/>
-          <pc:sldMk cId="784584029" sldId="282"/>
-        </pc:sldMkLst>
-        <pc:spChg chg="mod ord">
-          <ac:chgData name="Tristan Plasse" userId="13c698b9-43c4-4271-b359-faaadca0774b" providerId="ADAL" clId="{FE460185-D4AE-4375-BA71-CD1D7F2341F0}" dt="2026-04-17T01:30:36.101" v="5052" actId="26606"/>
-          <ac:spMkLst>
-            <pc:docMk/>
-            <pc:sldMk cId="784584029" sldId="282"/>
-            <ac:spMk id="2" creationId="{D1DA8DF0-027D-CBFA-F9E4-EA0F931579EF}"/>
-          </ac:spMkLst>
-        </pc:spChg>
-        <pc:spChg chg="del">
-          <ac:chgData name="Tristan Plasse" userId="13c698b9-43c4-4271-b359-faaadca0774b" providerId="ADAL" clId="{FE460185-D4AE-4375-BA71-CD1D7F2341F0}" dt="2026-04-17T01:30:12.348" v="5047" actId="478"/>
-          <ac:spMkLst>
-            <pc:docMk/>
-            <pc:sldMk cId="784584029" sldId="282"/>
-            <ac:spMk id="3" creationId="{275D4D4A-9F9A-E165-9931-AE7EC6F9609B}"/>
-          </ac:spMkLst>
-        </pc:spChg>
-        <pc:spChg chg="add mod">
-          <ac:chgData name="Tristan Plasse" userId="13c698b9-43c4-4271-b359-faaadca0774b" providerId="ADAL" clId="{FE460185-D4AE-4375-BA71-CD1D7F2341F0}" dt="2026-04-17T01:31:13.276" v="5059" actId="1076"/>
-          <ac:spMkLst>
-            <pc:docMk/>
-            <pc:sldMk cId="784584029" sldId="282"/>
-            <ac:spMk id="4" creationId="{80693467-78F2-1B86-B867-3754098C5644}"/>
-          </ac:spMkLst>
-        </pc:spChg>
-        <pc:spChg chg="add">
-          <ac:chgData name="Tristan Plasse" userId="13c698b9-43c4-4271-b359-faaadca0774b" providerId="ADAL" clId="{FE460185-D4AE-4375-BA71-CD1D7F2341F0}" dt="2026-04-17T01:30:36.101" v="5052" actId="26606"/>
-          <ac:spMkLst>
-            <pc:docMk/>
-            <pc:sldMk cId="784584029" sldId="282"/>
-            <ac:spMk id="3083" creationId="{33E93247-6229-44AB-A550-739E971E690B}"/>
-          </ac:spMkLst>
-        </pc:spChg>
-        <pc:spChg chg="add">
-          <ac:chgData name="Tristan Plasse" userId="13c698b9-43c4-4271-b359-faaadca0774b" providerId="ADAL" clId="{FE460185-D4AE-4375-BA71-CD1D7F2341F0}" dt="2026-04-17T01:30:36.101" v="5052" actId="26606"/>
-          <ac:spMkLst>
-            <pc:docMk/>
-            <pc:sldMk cId="784584029" sldId="282"/>
-            <ac:spMk id="3085" creationId="{6BB6B482-ACCA-4938-8AEA-49D525C17221}"/>
-          </ac:spMkLst>
-        </pc:spChg>
-        <pc:picChg chg="add mod">
-          <ac:chgData name="Tristan Plasse" userId="13c698b9-43c4-4271-b359-faaadca0774b" providerId="ADAL" clId="{FE460185-D4AE-4375-BA71-CD1D7F2341F0}" dt="2026-04-17T01:30:42.128" v="5053" actId="18131"/>
-          <ac:picMkLst>
-            <pc:docMk/>
-            <pc:sldMk cId="784584029" sldId="282"/>
-            <ac:picMk id="3074" creationId="{4C00A1DA-6ED6-C7B3-FAC3-90C08EBD5B83}"/>
-          </ac:picMkLst>
-        </pc:picChg>
-        <pc:cxnChg chg="add">
-          <ac:chgData name="Tristan Plasse" userId="13c698b9-43c4-4271-b359-faaadca0774b" providerId="ADAL" clId="{FE460185-D4AE-4375-BA71-CD1D7F2341F0}" dt="2026-04-17T01:30:36.101" v="5052" actId="26606"/>
-          <ac:cxnSpMkLst>
-            <pc:docMk/>
-            <pc:sldMk cId="784584029" sldId="282"/>
-            <ac:cxnSpMk id="3079" creationId="{F64F9B95-9045-48D2-B9F3-2927E98F54AA}"/>
-          </ac:cxnSpMkLst>
-        </pc:cxnChg>
-        <pc:cxnChg chg="add">
-          <ac:chgData name="Tristan Plasse" userId="13c698b9-43c4-4271-b359-faaadca0774b" providerId="ADAL" clId="{FE460185-D4AE-4375-BA71-CD1D7F2341F0}" dt="2026-04-17T01:30:36.101" v="5052" actId="26606"/>
-          <ac:cxnSpMkLst>
-            <pc:docMk/>
-            <pc:sldMk cId="784584029" sldId="282"/>
-            <ac:cxnSpMk id="3081" creationId="{085AA86F-6A4D-4BCB-A045-D992CDC2959B}"/>
-          </ac:cxnSpMkLst>
-        </pc:cxnChg>
-        <pc:cxnChg chg="add">
-          <ac:chgData name="Tristan Plasse" userId="13c698b9-43c4-4271-b359-faaadca0774b" providerId="ADAL" clId="{FE460185-D4AE-4375-BA71-CD1D7F2341F0}" dt="2026-04-17T01:30:36.101" v="5052" actId="26606"/>
-          <ac:cxnSpMkLst>
-            <pc:docMk/>
-            <pc:sldMk cId="784584029" sldId="282"/>
-            <ac:cxnSpMk id="3087" creationId="{EE2E603F-4A95-4FE8-BB06-211DFD75DBEF}"/>
-          </ac:cxnSpMkLst>
-        </pc:cxnChg>
-      </pc:sldChg>
-      <pc:sldChg chg="modSp new mod">
-        <pc:chgData name="Tristan Plasse" userId="13c698b9-43c4-4271-b359-faaadca0774b" providerId="ADAL" clId="{FE460185-D4AE-4375-BA71-CD1D7F2341F0}" dt="2026-04-17T02:26:58.645" v="5086" actId="115"/>
-        <pc:sldMkLst>
-          <pc:docMk/>
-          <pc:sldMk cId="3557562823" sldId="283"/>
-        </pc:sldMkLst>
-        <pc:spChg chg="mod">
-          <ac:chgData name="Tristan Plasse" userId="13c698b9-43c4-4271-b359-faaadca0774b" providerId="ADAL" clId="{FE460185-D4AE-4375-BA71-CD1D7F2341F0}" dt="2026-04-17T02:25:39.922" v="5073" actId="20577"/>
-          <ac:spMkLst>
-            <pc:docMk/>
-            <pc:sldMk cId="3557562823" sldId="283"/>
-            <ac:spMk id="2" creationId="{2755F7A0-20BB-EF74-1658-92294AAB1D89}"/>
-          </ac:spMkLst>
-        </pc:spChg>
-        <pc:spChg chg="mod">
-          <ac:chgData name="Tristan Plasse" userId="13c698b9-43c4-4271-b359-faaadca0774b" providerId="ADAL" clId="{FE460185-D4AE-4375-BA71-CD1D7F2341F0}" dt="2026-04-17T02:26:58.645" v="5086" actId="115"/>
-          <ac:spMkLst>
-            <pc:docMk/>
-            <pc:sldMk cId="3557562823" sldId="283"/>
-            <ac:spMk id="3" creationId="{14515BA2-F5BE-2C2A-D48B-418406D8001B}"/>
-          </ac:spMkLst>
-        </pc:spChg>
-      </pc:sldChg>
-      <pc:sldChg chg="modSp add mod ord">
-        <pc:chgData name="Tristan Plasse" userId="13c698b9-43c4-4271-b359-faaadca0774b" providerId="ADAL" clId="{FE460185-D4AE-4375-BA71-CD1D7F2341F0}" dt="2026-04-17T03:35:32.830" v="5673" actId="20577"/>
-        <pc:sldMkLst>
-          <pc:docMk/>
-          <pc:sldMk cId="2393943690" sldId="284"/>
-        </pc:sldMkLst>
-        <pc:spChg chg="mod">
-          <ac:chgData name="Tristan Plasse" userId="13c698b9-43c4-4271-b359-faaadca0774b" providerId="ADAL" clId="{FE460185-D4AE-4375-BA71-CD1D7F2341F0}" dt="2026-04-17T03:35:32.830" v="5673" actId="20577"/>
-          <ac:spMkLst>
-            <pc:docMk/>
-            <pc:sldMk cId="2393943690" sldId="284"/>
-            <ac:spMk id="2" creationId="{17A7EB5A-FA1F-F440-F699-BDAE13D981A1}"/>
-          </ac:spMkLst>
-        </pc:spChg>
-      </pc:sldChg>
-      <pc:sldMasterChg chg="add addSldLayout">
-        <pc:chgData name="Tristan Plasse" userId="13c698b9-43c4-4271-b359-faaadca0774b" providerId="ADAL" clId="{FE460185-D4AE-4375-BA71-CD1D7F2341F0}" dt="2026-04-15T20:11:02.110" v="50" actId="26606"/>
-        <pc:sldMasterMkLst>
-          <pc:docMk/>
-          <pc:sldMasterMk cId="2367361008" sldId="2147483715"/>
-        </pc:sldMasterMkLst>
-        <pc:sldLayoutChg chg="add">
-          <pc:chgData name="Tristan Plasse" userId="13c698b9-43c4-4271-b359-faaadca0774b" providerId="ADAL" clId="{FE460185-D4AE-4375-BA71-CD1D7F2341F0}" dt="2026-04-15T20:11:02.110" v="50" actId="26606"/>
-          <pc:sldLayoutMkLst>
-            <pc:docMk/>
-            <pc:sldMasterMk cId="2367361008" sldId="2147483715"/>
-            <pc:sldLayoutMk cId="2713428249" sldId="2147483704"/>
-          </pc:sldLayoutMkLst>
-        </pc:sldLayoutChg>
-        <pc:sldLayoutChg chg="add">
-          <pc:chgData name="Tristan Plasse" userId="13c698b9-43c4-4271-b359-faaadca0774b" providerId="ADAL" clId="{FE460185-D4AE-4375-BA71-CD1D7F2341F0}" dt="2026-04-15T20:11:02.110" v="50" actId="26606"/>
-          <pc:sldLayoutMkLst>
-            <pc:docMk/>
-            <pc:sldMasterMk cId="2367361008" sldId="2147483715"/>
-            <pc:sldLayoutMk cId="1283618248" sldId="2147483705"/>
-          </pc:sldLayoutMkLst>
-        </pc:sldLayoutChg>
-        <pc:sldLayoutChg chg="add">
-          <pc:chgData name="Tristan Plasse" userId="13c698b9-43c4-4271-b359-faaadca0774b" providerId="ADAL" clId="{FE460185-D4AE-4375-BA71-CD1D7F2341F0}" dt="2026-04-15T20:11:02.110" v="50" actId="26606"/>
-          <pc:sldLayoutMkLst>
-            <pc:docMk/>
-            <pc:sldMasterMk cId="2367361008" sldId="2147483715"/>
-            <pc:sldLayoutMk cId="3588553032" sldId="2147483706"/>
-          </pc:sldLayoutMkLst>
-        </pc:sldLayoutChg>
-        <pc:sldLayoutChg chg="add">
-          <pc:chgData name="Tristan Plasse" userId="13c698b9-43c4-4271-b359-faaadca0774b" providerId="ADAL" clId="{FE460185-D4AE-4375-BA71-CD1D7F2341F0}" dt="2026-04-15T20:11:02.110" v="50" actId="26606"/>
-          <pc:sldLayoutMkLst>
-            <pc:docMk/>
-            <pc:sldMasterMk cId="2367361008" sldId="2147483715"/>
-            <pc:sldLayoutMk cId="4029147812" sldId="2147483707"/>
-          </pc:sldLayoutMkLst>
-        </pc:sldLayoutChg>
-        <pc:sldLayoutChg chg="add">
-          <pc:chgData name="Tristan Plasse" userId="13c698b9-43c4-4271-b359-faaadca0774b" providerId="ADAL" clId="{FE460185-D4AE-4375-BA71-CD1D7F2341F0}" dt="2026-04-15T20:11:02.110" v="50" actId="26606"/>
-          <pc:sldLayoutMkLst>
-            <pc:docMk/>
-            <pc:sldMasterMk cId="2367361008" sldId="2147483715"/>
-            <pc:sldLayoutMk cId="2925132312" sldId="2147483708"/>
-          </pc:sldLayoutMkLst>
-        </pc:sldLayoutChg>
-        <pc:sldLayoutChg chg="add">
-          <pc:chgData name="Tristan Plasse" userId="13c698b9-43c4-4271-b359-faaadca0774b" providerId="ADAL" clId="{FE460185-D4AE-4375-BA71-CD1D7F2341F0}" dt="2026-04-15T20:11:02.110" v="50" actId="26606"/>
-          <pc:sldLayoutMkLst>
-            <pc:docMk/>
-            <pc:sldMasterMk cId="2367361008" sldId="2147483715"/>
-            <pc:sldLayoutMk cId="842180291" sldId="2147483709"/>
-          </pc:sldLayoutMkLst>
-        </pc:sldLayoutChg>
-        <pc:sldLayoutChg chg="add">
-          <pc:chgData name="Tristan Plasse" userId="13c698b9-43c4-4271-b359-faaadca0774b" providerId="ADAL" clId="{FE460185-D4AE-4375-BA71-CD1D7F2341F0}" dt="2026-04-15T20:11:02.110" v="50" actId="26606"/>
-          <pc:sldLayoutMkLst>
-            <pc:docMk/>
-            <pc:sldMasterMk cId="2367361008" sldId="2147483715"/>
-            <pc:sldLayoutMk cId="650174944" sldId="2147483710"/>
-          </pc:sldLayoutMkLst>
-        </pc:sldLayoutChg>
-        <pc:sldLayoutChg chg="add">
-          <pc:chgData name="Tristan Plasse" userId="13c698b9-43c4-4271-b359-faaadca0774b" providerId="ADAL" clId="{FE460185-D4AE-4375-BA71-CD1D7F2341F0}" dt="2026-04-15T20:11:02.110" v="50" actId="26606"/>
-          <pc:sldLayoutMkLst>
-            <pc:docMk/>
-            <pc:sldMasterMk cId="2367361008" sldId="2147483715"/>
-            <pc:sldLayoutMk cId="182539644" sldId="2147483711"/>
-          </pc:sldLayoutMkLst>
-        </pc:sldLayoutChg>
-        <pc:sldLayoutChg chg="add">
-          <pc:chgData name="Tristan Plasse" userId="13c698b9-43c4-4271-b359-faaadca0774b" providerId="ADAL" clId="{FE460185-D4AE-4375-BA71-CD1D7F2341F0}" dt="2026-04-15T20:11:02.110" v="50" actId="26606"/>
-          <pc:sldLayoutMkLst>
-            <pc:docMk/>
-            <pc:sldMasterMk cId="2367361008" sldId="2147483715"/>
-            <pc:sldLayoutMk cId="13408493" sldId="2147483712"/>
-          </pc:sldLayoutMkLst>
-        </pc:sldLayoutChg>
-        <pc:sldLayoutChg chg="add">
-          <pc:chgData name="Tristan Plasse" userId="13c698b9-43c4-4271-b359-faaadca0774b" providerId="ADAL" clId="{FE460185-D4AE-4375-BA71-CD1D7F2341F0}" dt="2026-04-15T20:11:02.110" v="50" actId="26606"/>
-          <pc:sldLayoutMkLst>
-            <pc:docMk/>
-            <pc:sldMasterMk cId="2367361008" sldId="2147483715"/>
-            <pc:sldLayoutMk cId="2240675757" sldId="2147483713"/>
-          </pc:sldLayoutMkLst>
-        </pc:sldLayoutChg>
-        <pc:sldLayoutChg chg="add">
-          <pc:chgData name="Tristan Plasse" userId="13c698b9-43c4-4271-b359-faaadca0774b" providerId="ADAL" clId="{FE460185-D4AE-4375-BA71-CD1D7F2341F0}" dt="2026-04-15T20:11:02.110" v="50" actId="26606"/>
-          <pc:sldLayoutMkLst>
-            <pc:docMk/>
-            <pc:sldMasterMk cId="2367361008" sldId="2147483715"/>
-            <pc:sldLayoutMk cId="2875551220" sldId="2147483714"/>
-          </pc:sldLayoutMkLst>
-        </pc:sldLayoutChg>
-      </pc:sldMasterChg>
-    </pc:docChg>
-  </pc:docChgLst>
-  <pc:docChgLst>
     <pc:chgData name="Yohan Wegener" userId="S::wegy1101@usherbrooke.ca::153c22c7-a944-4d63-a1e0-3418d5558bb3" providerId="AD" clId="Web-{1630DD41-0FF5-535A-0B19-7E7866333F2B}"/>
     <pc:docChg chg="modSld">
-      <pc:chgData name="Yohan Wegener" userId="S::wegy1101@usherbrooke.ca::153c22c7-a944-4d63-a1e0-3418d5558bb3" providerId="AD" clId="Web-{1630DD41-0FF5-535A-0B19-7E7866333F2B}" dt="2026-04-17T03:37:46.198" v="671" actId="20577"/>
+      <pc:chgData name="Yohan Wegener" userId="S::wegy1101@usherbrooke.ca::153c22c7-a944-4d63-a1e0-3418d5558bb3" providerId="AD" clId="Web-{1630DD41-0FF5-535A-0B19-7E7866333F2B}" dt="2026-04-17T03:46:39.059" v="676" actId="20577"/>
       <pc:docMkLst>
         <pc:docMk/>
       </pc:docMkLst>
@@ -1665,6 +172,21 @@
             <pc:docMk/>
             <pc:sldMk cId="400772557" sldId="266"/>
             <ac:spMk id="3" creationId="{7C8FECE2-37AA-AFF5-7D1E-A6F3BA91F380}"/>
+          </ac:spMkLst>
+        </pc:spChg>
+      </pc:sldChg>
+      <pc:sldChg chg="modSp">
+        <pc:chgData name="Yohan Wegener" userId="S::wegy1101@usherbrooke.ca::153c22c7-a944-4d63-a1e0-3418d5558bb3" providerId="AD" clId="Web-{1630DD41-0FF5-535A-0B19-7E7866333F2B}" dt="2026-04-17T03:46:39.059" v="676" actId="20577"/>
+        <pc:sldMkLst>
+          <pc:docMk/>
+          <pc:sldMk cId="1896708259" sldId="271"/>
+        </pc:sldMkLst>
+        <pc:spChg chg="mod">
+          <ac:chgData name="Yohan Wegener" userId="S::wegy1101@usherbrooke.ca::153c22c7-a944-4d63-a1e0-3418d5558bb3" providerId="AD" clId="Web-{1630DD41-0FF5-535A-0B19-7E7866333F2B}" dt="2026-04-17T03:46:39.059" v="676" actId="20577"/>
+          <ac:spMkLst>
+            <pc:docMk/>
+            <pc:sldMk cId="1896708259" sldId="271"/>
+            <ac:spMk id="3" creationId="{76E70E93-C46E-8BE3-F6AA-2FF55DA44A33}"/>
           </ac:spMkLst>
         </pc:spChg>
       </pc:sldChg>
@@ -1830,6 +352,1504 @@
           </ac:spMkLst>
         </pc:spChg>
       </pc:sldChg>
+    </pc:docChg>
+  </pc:docChgLst>
+  <pc:docChgLst>
+    <pc:chgData name="Tristan Plasse" userId="13c698b9-43c4-4271-b359-faaadca0774b" providerId="ADAL" clId="{FE460185-D4AE-4375-BA71-CD1D7F2341F0}"/>
+    <pc:docChg chg="undo custSel addSld delSld modSld sldOrd addMainMaster delMainMaster">
+      <pc:chgData name="Tristan Plasse" userId="13c698b9-43c4-4271-b359-faaadca0774b" providerId="ADAL" clId="{FE460185-D4AE-4375-BA71-CD1D7F2341F0}" dt="2026-04-17T03:52:44.575" v="5859" actId="20577"/>
+      <pc:docMkLst>
+        <pc:docMk/>
+      </pc:docMkLst>
+      <pc:sldChg chg="addSp delSp modSp mod setBg modClrScheme setClrOvrMap chgLayout modNotesTx">
+        <pc:chgData name="Tristan Plasse" userId="13c698b9-43c4-4271-b359-faaadca0774b" providerId="ADAL" clId="{FE460185-D4AE-4375-BA71-CD1D7F2341F0}" dt="2026-04-17T03:46:17.030" v="5680" actId="20577"/>
+        <pc:sldMkLst>
+          <pc:docMk/>
+          <pc:sldMk cId="3055694646" sldId="256"/>
+        </pc:sldMkLst>
+        <pc:spChg chg="add del mod ord">
+          <ac:chgData name="Tristan Plasse" userId="13c698b9-43c4-4271-b359-faaadca0774b" providerId="ADAL" clId="{FE460185-D4AE-4375-BA71-CD1D7F2341F0}" dt="2026-04-15T20:11:02.110" v="50" actId="26606"/>
+          <ac:spMkLst>
+            <pc:docMk/>
+            <pc:sldMk cId="3055694646" sldId="256"/>
+            <ac:spMk id="2" creationId="{0CE52AE1-F528-9ADC-1794-EB43A5F9C6EB}"/>
+          </ac:spMkLst>
+        </pc:spChg>
+        <pc:spChg chg="add mod">
+          <ac:chgData name="Tristan Plasse" userId="13c698b9-43c4-4271-b359-faaadca0774b" providerId="ADAL" clId="{FE460185-D4AE-4375-BA71-CD1D7F2341F0}" dt="2026-04-15T20:11:43.034" v="71" actId="1076"/>
+          <ac:spMkLst>
+            <pc:docMk/>
+            <pc:sldMk cId="3055694646" sldId="256"/>
+            <ac:spMk id="6" creationId="{600198B9-2037-B1E5-2DF2-16A96F60CC76}"/>
+          </ac:spMkLst>
+        </pc:spChg>
+        <pc:spChg chg="add">
+          <ac:chgData name="Tristan Plasse" userId="13c698b9-43c4-4271-b359-faaadca0774b" providerId="ADAL" clId="{FE460185-D4AE-4375-BA71-CD1D7F2341F0}" dt="2026-04-15T20:11:02.110" v="50" actId="26606"/>
+          <ac:spMkLst>
+            <pc:docMk/>
+            <pc:sldMk cId="3055694646" sldId="256"/>
+            <ac:spMk id="1036" creationId="{0EECA69B-4C2A-7F31-8019-E90DB3BD49CB}"/>
+          </ac:spMkLst>
+        </pc:spChg>
+        <pc:spChg chg="add">
+          <ac:chgData name="Tristan Plasse" userId="13c698b9-43c4-4271-b359-faaadca0774b" providerId="ADAL" clId="{FE460185-D4AE-4375-BA71-CD1D7F2341F0}" dt="2026-04-15T20:11:02.110" v="50" actId="26606"/>
+          <ac:spMkLst>
+            <pc:docMk/>
+            <pc:sldMk cId="3055694646" sldId="256"/>
+            <ac:spMk id="1038" creationId="{857DEAC1-B3AA-6569-0A44-A191DF2F3C67}"/>
+          </ac:spMkLst>
+        </pc:spChg>
+        <pc:picChg chg="mod">
+          <ac:chgData name="Tristan Plasse" userId="13c698b9-43c4-4271-b359-faaadca0774b" providerId="ADAL" clId="{FE460185-D4AE-4375-BA71-CD1D7F2341F0}" dt="2026-04-15T20:11:02.110" v="50" actId="26606"/>
+          <ac:picMkLst>
+            <pc:docMk/>
+            <pc:sldMk cId="3055694646" sldId="256"/>
+            <ac:picMk id="1026" creationId="{0CB3B93C-FECB-E6B1-0F9A-DA4D100674A8}"/>
+          </ac:picMkLst>
+        </pc:picChg>
+      </pc:sldChg>
+      <pc:sldChg chg="addSp delSp modSp new mod setBg modNotesTx">
+        <pc:chgData name="Tristan Plasse" userId="13c698b9-43c4-4271-b359-faaadca0774b" providerId="ADAL" clId="{FE460185-D4AE-4375-BA71-CD1D7F2341F0}" dt="2026-04-17T03:46:22.950" v="5691" actId="20577"/>
+        <pc:sldMkLst>
+          <pc:docMk/>
+          <pc:sldMk cId="1391683424" sldId="257"/>
+        </pc:sldMkLst>
+        <pc:spChg chg="mod">
+          <ac:chgData name="Tristan Plasse" userId="13c698b9-43c4-4271-b359-faaadca0774b" providerId="ADAL" clId="{FE460185-D4AE-4375-BA71-CD1D7F2341F0}" dt="2026-04-15T20:15:07.032" v="106" actId="26606"/>
+          <ac:spMkLst>
+            <pc:docMk/>
+            <pc:sldMk cId="1391683424" sldId="257"/>
+            <ac:spMk id="2" creationId="{3966A9B0-B00E-6660-A54E-CFEC48403854}"/>
+          </ac:spMkLst>
+        </pc:spChg>
+        <pc:spChg chg="add mod">
+          <ac:chgData name="Tristan Plasse" userId="13c698b9-43c4-4271-b359-faaadca0774b" providerId="ADAL" clId="{FE460185-D4AE-4375-BA71-CD1D7F2341F0}" dt="2026-04-15T20:39:46.867" v="256" actId="20577"/>
+          <ac:spMkLst>
+            <pc:docMk/>
+            <pc:sldMk cId="1391683424" sldId="257"/>
+            <ac:spMk id="6" creationId="{124E7EEB-9B05-0948-3014-4C918A1E1AF7}"/>
+          </ac:spMkLst>
+        </pc:spChg>
+        <pc:spChg chg="add">
+          <ac:chgData name="Tristan Plasse" userId="13c698b9-43c4-4271-b359-faaadca0774b" providerId="ADAL" clId="{FE460185-D4AE-4375-BA71-CD1D7F2341F0}" dt="2026-04-15T20:15:07.032" v="106" actId="26606"/>
+          <ac:spMkLst>
+            <pc:docMk/>
+            <pc:sldMk cId="1391683424" sldId="257"/>
+            <ac:spMk id="14" creationId="{33E93247-6229-44AB-A550-739E971E690B}"/>
+          </ac:spMkLst>
+        </pc:spChg>
+        <pc:picChg chg="add mod">
+          <ac:chgData name="Tristan Plasse" userId="13c698b9-43c4-4271-b359-faaadca0774b" providerId="ADAL" clId="{FE460185-D4AE-4375-BA71-CD1D7F2341F0}" dt="2026-04-15T20:15:07.032" v="106" actId="26606"/>
+          <ac:picMkLst>
+            <pc:docMk/>
+            <pc:sldMk cId="1391683424" sldId="257"/>
+            <ac:picMk id="5" creationId="{65DA162E-E9CE-5AEB-BBA2-D5769AD0C527}"/>
+          </ac:picMkLst>
+        </pc:picChg>
+        <pc:cxnChg chg="add">
+          <ac:chgData name="Tristan Plasse" userId="13c698b9-43c4-4271-b359-faaadca0774b" providerId="ADAL" clId="{FE460185-D4AE-4375-BA71-CD1D7F2341F0}" dt="2026-04-15T20:15:07.032" v="106" actId="26606"/>
+          <ac:cxnSpMkLst>
+            <pc:docMk/>
+            <pc:sldMk cId="1391683424" sldId="257"/>
+            <ac:cxnSpMk id="10" creationId="{F64F9B95-9045-48D2-B9F3-2927E98F54AA}"/>
+          </ac:cxnSpMkLst>
+        </pc:cxnChg>
+        <pc:cxnChg chg="add">
+          <ac:chgData name="Tristan Plasse" userId="13c698b9-43c4-4271-b359-faaadca0774b" providerId="ADAL" clId="{FE460185-D4AE-4375-BA71-CD1D7F2341F0}" dt="2026-04-15T20:15:07.032" v="106" actId="26606"/>
+          <ac:cxnSpMkLst>
+            <pc:docMk/>
+            <pc:sldMk cId="1391683424" sldId="257"/>
+            <ac:cxnSpMk id="12" creationId="{085AA86F-6A4D-4BCB-A045-D992CDC2959B}"/>
+          </ac:cxnSpMkLst>
+        </pc:cxnChg>
+        <pc:cxnChg chg="add">
+          <ac:chgData name="Tristan Plasse" userId="13c698b9-43c4-4271-b359-faaadca0774b" providerId="ADAL" clId="{FE460185-D4AE-4375-BA71-CD1D7F2341F0}" dt="2026-04-15T20:15:07.032" v="106" actId="26606"/>
+          <ac:cxnSpMkLst>
+            <pc:docMk/>
+            <pc:sldMk cId="1391683424" sldId="257"/>
+            <ac:cxnSpMk id="16" creationId="{EE2E603F-4A95-4FE8-BB06-211DFD75DBEF}"/>
+          </ac:cxnSpMkLst>
+        </pc:cxnChg>
+      </pc:sldChg>
+      <pc:sldChg chg="addSp delSp modSp new mod modNotesTx">
+        <pc:chgData name="Tristan Plasse" userId="13c698b9-43c4-4271-b359-faaadca0774b" providerId="ADAL" clId="{FE460185-D4AE-4375-BA71-CD1D7F2341F0}" dt="2026-04-17T03:46:29.588" v="5704" actId="20577"/>
+        <pc:sldMkLst>
+          <pc:docMk/>
+          <pc:sldMk cId="2350281507" sldId="258"/>
+        </pc:sldMkLst>
+        <pc:spChg chg="mod">
+          <ac:chgData name="Tristan Plasse" userId="13c698b9-43c4-4271-b359-faaadca0774b" providerId="ADAL" clId="{FE460185-D4AE-4375-BA71-CD1D7F2341F0}" dt="2026-04-15T20:40:14.005" v="282" actId="20577"/>
+          <ac:spMkLst>
+            <pc:docMk/>
+            <pc:sldMk cId="2350281507" sldId="258"/>
+            <ac:spMk id="2" creationId="{85F7DF9E-5635-E99D-49EF-F09E563F0FE1}"/>
+          </ac:spMkLst>
+        </pc:spChg>
+        <pc:spChg chg="del mod">
+          <ac:chgData name="Tristan Plasse" userId="13c698b9-43c4-4271-b359-faaadca0774b" providerId="ADAL" clId="{FE460185-D4AE-4375-BA71-CD1D7F2341F0}" dt="2026-04-17T03:31:41.256" v="5597" actId="26606"/>
+          <ac:spMkLst>
+            <pc:docMk/>
+            <pc:sldMk cId="2350281507" sldId="258"/>
+            <ac:spMk id="3" creationId="{08F967FB-148E-F4FA-95FA-17BCCB19C653}"/>
+          </ac:spMkLst>
+        </pc:spChg>
+        <pc:spChg chg="add mod">
+          <ac:chgData name="Tristan Plasse" userId="13c698b9-43c4-4271-b359-faaadca0774b" providerId="ADAL" clId="{FE460185-D4AE-4375-BA71-CD1D7F2341F0}" dt="2026-04-15T21:49:45.861" v="709" actId="1076"/>
+          <ac:spMkLst>
+            <pc:docMk/>
+            <pc:sldMk cId="2350281507" sldId="258"/>
+            <ac:spMk id="4" creationId="{3C84EBBA-709C-4ACC-BEB0-09511221D222}"/>
+          </ac:spMkLst>
+        </pc:spChg>
+        <pc:graphicFrameChg chg="add">
+          <ac:chgData name="Tristan Plasse" userId="13c698b9-43c4-4271-b359-faaadca0774b" providerId="ADAL" clId="{FE460185-D4AE-4375-BA71-CD1D7F2341F0}" dt="2026-04-17T03:31:41.256" v="5597" actId="26606"/>
+          <ac:graphicFrameMkLst>
+            <pc:docMk/>
+            <pc:sldMk cId="2350281507" sldId="258"/>
+            <ac:graphicFrameMk id="6" creationId="{5A794BAE-EB09-B02E-F77D-B89EA998F569}"/>
+          </ac:graphicFrameMkLst>
+        </pc:graphicFrameChg>
+      </pc:sldChg>
+      <pc:sldChg chg="addSp delSp modSp new mod setBg modNotesTx">
+        <pc:chgData name="Tristan Plasse" userId="13c698b9-43c4-4271-b359-faaadca0774b" providerId="ADAL" clId="{FE460185-D4AE-4375-BA71-CD1D7F2341F0}" dt="2026-04-17T03:46:33.294" v="5709" actId="20577"/>
+        <pc:sldMkLst>
+          <pc:docMk/>
+          <pc:sldMk cId="2325527580" sldId="259"/>
+        </pc:sldMkLst>
+        <pc:spChg chg="mod">
+          <ac:chgData name="Tristan Plasse" userId="13c698b9-43c4-4271-b359-faaadca0774b" providerId="ADAL" clId="{FE460185-D4AE-4375-BA71-CD1D7F2341F0}" dt="2026-04-15T21:43:10.126" v="527" actId="26606"/>
+          <ac:spMkLst>
+            <pc:docMk/>
+            <pc:sldMk cId="2325527580" sldId="259"/>
+            <ac:spMk id="2" creationId="{99FA08C0-86C6-2EC3-99EB-1F5428E7314C}"/>
+          </ac:spMkLst>
+        </pc:spChg>
+        <pc:spChg chg="mod ord">
+          <ac:chgData name="Tristan Plasse" userId="13c698b9-43c4-4271-b359-faaadca0774b" providerId="ADAL" clId="{FE460185-D4AE-4375-BA71-CD1D7F2341F0}" dt="2026-04-15T21:43:10.126" v="527" actId="26606"/>
+          <ac:spMkLst>
+            <pc:docMk/>
+            <pc:sldMk cId="2325527580" sldId="259"/>
+            <ac:spMk id="3" creationId="{7BB24C08-EB63-95EB-768C-99638678B5F8}"/>
+          </ac:spMkLst>
+        </pc:spChg>
+        <pc:picChg chg="add mod modCrop">
+          <ac:chgData name="Tristan Plasse" userId="13c698b9-43c4-4271-b359-faaadca0774b" providerId="ADAL" clId="{FE460185-D4AE-4375-BA71-CD1D7F2341F0}" dt="2026-04-15T21:44:19.349" v="540" actId="1076"/>
+          <ac:picMkLst>
+            <pc:docMk/>
+            <pc:sldMk cId="2325527580" sldId="259"/>
+            <ac:picMk id="7" creationId="{AF1EF429-633A-7988-D1D5-91EBC3583ADA}"/>
+          </ac:picMkLst>
+        </pc:picChg>
+      </pc:sldChg>
+      <pc:sldChg chg="addSp modSp new mod modNotesTx">
+        <pc:chgData name="Tristan Plasse" userId="13c698b9-43c4-4271-b359-faaadca0774b" providerId="ADAL" clId="{FE460185-D4AE-4375-BA71-CD1D7F2341F0}" dt="2026-04-17T03:46:36.647" v="5714" actId="20577"/>
+        <pc:sldMkLst>
+          <pc:docMk/>
+          <pc:sldMk cId="1599520098" sldId="260"/>
+        </pc:sldMkLst>
+        <pc:spChg chg="mod">
+          <ac:chgData name="Tristan Plasse" userId="13c698b9-43c4-4271-b359-faaadca0774b" providerId="ADAL" clId="{FE460185-D4AE-4375-BA71-CD1D7F2341F0}" dt="2026-04-15T21:45:24.613" v="548" actId="20577"/>
+          <ac:spMkLst>
+            <pc:docMk/>
+            <pc:sldMk cId="1599520098" sldId="260"/>
+            <ac:spMk id="2" creationId="{E7C3E5AF-0986-10C7-5B5A-31AFD32351E0}"/>
+          </ac:spMkLst>
+        </pc:spChg>
+        <pc:spChg chg="mod">
+          <ac:chgData name="Tristan Plasse" userId="13c698b9-43c4-4271-b359-faaadca0774b" providerId="ADAL" clId="{FE460185-D4AE-4375-BA71-CD1D7F2341F0}" dt="2026-04-15T21:48:26.450" v="701" actId="2710"/>
+          <ac:spMkLst>
+            <pc:docMk/>
+            <pc:sldMk cId="1599520098" sldId="260"/>
+            <ac:spMk id="3" creationId="{F6627DAA-C04C-19E3-39BE-69C18BACE455}"/>
+          </ac:spMkLst>
+        </pc:spChg>
+        <pc:spChg chg="add mod">
+          <ac:chgData name="Tristan Plasse" userId="13c698b9-43c4-4271-b359-faaadca0774b" providerId="ADAL" clId="{FE460185-D4AE-4375-BA71-CD1D7F2341F0}" dt="2026-04-15T21:49:40.774" v="708" actId="1076"/>
+          <ac:spMkLst>
+            <pc:docMk/>
+            <pc:sldMk cId="1599520098" sldId="260"/>
+            <ac:spMk id="4" creationId="{33A4A1E8-3978-9829-02B8-61A4FC6F24CA}"/>
+          </ac:spMkLst>
+        </pc:spChg>
+      </pc:sldChg>
+      <pc:sldChg chg="addSp modSp new mod modNotesTx">
+        <pc:chgData name="Tristan Plasse" userId="13c698b9-43c4-4271-b359-faaadca0774b" providerId="ADAL" clId="{FE460185-D4AE-4375-BA71-CD1D7F2341F0}" dt="2026-04-17T03:46:39.533" v="5719" actId="20577"/>
+        <pc:sldMkLst>
+          <pc:docMk/>
+          <pc:sldMk cId="168328588" sldId="261"/>
+        </pc:sldMkLst>
+        <pc:spChg chg="mod">
+          <ac:chgData name="Tristan Plasse" userId="13c698b9-43c4-4271-b359-faaadca0774b" providerId="ADAL" clId="{FE460185-D4AE-4375-BA71-CD1D7F2341F0}" dt="2026-04-15T21:50:55.598" v="726" actId="20577"/>
+          <ac:spMkLst>
+            <pc:docMk/>
+            <pc:sldMk cId="168328588" sldId="261"/>
+            <ac:spMk id="2" creationId="{AEE04216-6D2E-A2C1-A5AA-428D85FBE4CC}"/>
+          </ac:spMkLst>
+        </pc:spChg>
+        <pc:spChg chg="mod">
+          <ac:chgData name="Tristan Plasse" userId="13c698b9-43c4-4271-b359-faaadca0774b" providerId="ADAL" clId="{FE460185-D4AE-4375-BA71-CD1D7F2341F0}" dt="2026-04-15T21:54:55.805" v="895" actId="2710"/>
+          <ac:spMkLst>
+            <pc:docMk/>
+            <pc:sldMk cId="168328588" sldId="261"/>
+            <ac:spMk id="3" creationId="{A014C97A-8C97-1B8C-F372-DA9FF8D7DB66}"/>
+          </ac:spMkLst>
+        </pc:spChg>
+        <pc:spChg chg="add mod">
+          <ac:chgData name="Tristan Plasse" userId="13c698b9-43c4-4271-b359-faaadca0774b" providerId="ADAL" clId="{FE460185-D4AE-4375-BA71-CD1D7F2341F0}" dt="2026-04-15T21:54:48.029" v="894" actId="1076"/>
+          <ac:spMkLst>
+            <pc:docMk/>
+            <pc:sldMk cId="168328588" sldId="261"/>
+            <ac:spMk id="4" creationId="{8087E245-C941-CE6D-30E8-F3BF687A91FC}"/>
+          </ac:spMkLst>
+        </pc:spChg>
+      </pc:sldChg>
+      <pc:sldChg chg="addSp delSp modSp new mod setBg modNotesTx">
+        <pc:chgData name="Tristan Plasse" userId="13c698b9-43c4-4271-b359-faaadca0774b" providerId="ADAL" clId="{FE460185-D4AE-4375-BA71-CD1D7F2341F0}" dt="2026-04-15T23:11:54.897" v="1052" actId="20577"/>
+        <pc:sldMkLst>
+          <pc:docMk/>
+          <pc:sldMk cId="1893348209" sldId="262"/>
+        </pc:sldMkLst>
+        <pc:spChg chg="mod">
+          <ac:chgData name="Tristan Plasse" userId="13c698b9-43c4-4271-b359-faaadca0774b" providerId="ADAL" clId="{FE460185-D4AE-4375-BA71-CD1D7F2341F0}" dt="2026-04-15T23:11:02.708" v="973" actId="26606"/>
+          <ac:spMkLst>
+            <pc:docMk/>
+            <pc:sldMk cId="1893348209" sldId="262"/>
+            <ac:spMk id="2" creationId="{F6B467CA-0C42-6E0A-98D0-B6F643A87434}"/>
+          </ac:spMkLst>
+        </pc:spChg>
+        <pc:spChg chg="add">
+          <ac:chgData name="Tristan Plasse" userId="13c698b9-43c4-4271-b359-faaadca0774b" providerId="ADAL" clId="{FE460185-D4AE-4375-BA71-CD1D7F2341F0}" dt="2026-04-15T23:11:02.708" v="973" actId="26606"/>
+          <ac:spMkLst>
+            <pc:docMk/>
+            <pc:sldMk cId="1893348209" sldId="262"/>
+            <ac:spMk id="11" creationId="{DEF92653-5D6D-47E6-8744-0DAF76E049C4}"/>
+          </ac:spMkLst>
+        </pc:spChg>
+        <pc:cxnChg chg="add">
+          <ac:chgData name="Tristan Plasse" userId="13c698b9-43c4-4271-b359-faaadca0774b" providerId="ADAL" clId="{FE460185-D4AE-4375-BA71-CD1D7F2341F0}" dt="2026-04-15T23:11:02.708" v="973" actId="26606"/>
+          <ac:cxnSpMkLst>
+            <pc:docMk/>
+            <pc:sldMk cId="1893348209" sldId="262"/>
+            <ac:cxnSpMk id="7" creationId="{F64F9B95-9045-48D2-B9F3-2927E98F54AA}"/>
+          </ac:cxnSpMkLst>
+        </pc:cxnChg>
+        <pc:cxnChg chg="add">
+          <ac:chgData name="Tristan Plasse" userId="13c698b9-43c4-4271-b359-faaadca0774b" providerId="ADAL" clId="{FE460185-D4AE-4375-BA71-CD1D7F2341F0}" dt="2026-04-15T23:11:02.708" v="973" actId="26606"/>
+          <ac:cxnSpMkLst>
+            <pc:docMk/>
+            <pc:sldMk cId="1893348209" sldId="262"/>
+            <ac:cxnSpMk id="9" creationId="{085AA86F-6A4D-4BCB-A045-D992CDC2959B}"/>
+          </ac:cxnSpMkLst>
+        </pc:cxnChg>
+        <pc:cxnChg chg="add">
+          <ac:chgData name="Tristan Plasse" userId="13c698b9-43c4-4271-b359-faaadca0774b" providerId="ADAL" clId="{FE460185-D4AE-4375-BA71-CD1D7F2341F0}" dt="2026-04-15T23:11:02.708" v="973" actId="26606"/>
+          <ac:cxnSpMkLst>
+            <pc:docMk/>
+            <pc:sldMk cId="1893348209" sldId="262"/>
+            <ac:cxnSpMk id="13" creationId="{9CA98CE3-81A7-4FFE-A047-9AA65998D877}"/>
+          </ac:cxnSpMkLst>
+        </pc:cxnChg>
+      </pc:sldChg>
+      <pc:sldChg chg="addSp delSp modSp new mod setBg modNotesTx">
+        <pc:chgData name="Tristan Plasse" userId="13c698b9-43c4-4271-b359-faaadca0774b" providerId="ADAL" clId="{FE460185-D4AE-4375-BA71-CD1D7F2341F0}" dt="2026-04-17T03:46:44.119" v="5726" actId="20577"/>
+        <pc:sldMkLst>
+          <pc:docMk/>
+          <pc:sldMk cId="853938190" sldId="263"/>
+        </pc:sldMkLst>
+        <pc:spChg chg="mod">
+          <ac:chgData name="Tristan Plasse" userId="13c698b9-43c4-4271-b359-faaadca0774b" providerId="ADAL" clId="{FE460185-D4AE-4375-BA71-CD1D7F2341F0}" dt="2026-04-15T23:32:55.314" v="1202" actId="26606"/>
+          <ac:spMkLst>
+            <pc:docMk/>
+            <pc:sldMk cId="853938190" sldId="263"/>
+            <ac:spMk id="2" creationId="{0A9A72B5-C255-D953-264E-8350AB3C15D2}"/>
+          </ac:spMkLst>
+        </pc:spChg>
+        <pc:spChg chg="add">
+          <ac:chgData name="Tristan Plasse" userId="13c698b9-43c4-4271-b359-faaadca0774b" providerId="ADAL" clId="{FE460185-D4AE-4375-BA71-CD1D7F2341F0}" dt="2026-04-15T23:32:55.314" v="1202" actId="26606"/>
+          <ac:spMkLst>
+            <pc:docMk/>
+            <pc:sldMk cId="853938190" sldId="263"/>
+            <ac:spMk id="15" creationId="{F68B2C62-7648-4430-90D5-AE0F252AF113}"/>
+          </ac:spMkLst>
+        </pc:spChg>
+        <pc:graphicFrameChg chg="add">
+          <ac:chgData name="Tristan Plasse" userId="13c698b9-43c4-4271-b359-faaadca0774b" providerId="ADAL" clId="{FE460185-D4AE-4375-BA71-CD1D7F2341F0}" dt="2026-04-15T23:32:55.314" v="1202" actId="26606"/>
+          <ac:graphicFrameMkLst>
+            <pc:docMk/>
+            <pc:sldMk cId="853938190" sldId="263"/>
+            <ac:graphicFrameMk id="18" creationId="{9D7866D5-6B49-9FA4-11A1-2FCBB87311CC}"/>
+          </ac:graphicFrameMkLst>
+        </pc:graphicFrameChg>
+        <pc:cxnChg chg="add">
+          <ac:chgData name="Tristan Plasse" userId="13c698b9-43c4-4271-b359-faaadca0774b" providerId="ADAL" clId="{FE460185-D4AE-4375-BA71-CD1D7F2341F0}" dt="2026-04-15T23:32:55.314" v="1202" actId="26606"/>
+          <ac:cxnSpMkLst>
+            <pc:docMk/>
+            <pc:sldMk cId="853938190" sldId="263"/>
+            <ac:cxnSpMk id="16" creationId="{AAD0195E-7F27-4D06-9427-0C121D721A14}"/>
+          </ac:cxnSpMkLst>
+        </pc:cxnChg>
+        <pc:cxnChg chg="add">
+          <ac:chgData name="Tristan Plasse" userId="13c698b9-43c4-4271-b359-faaadca0774b" providerId="ADAL" clId="{FE460185-D4AE-4375-BA71-CD1D7F2341F0}" dt="2026-04-15T23:32:55.314" v="1202" actId="26606"/>
+          <ac:cxnSpMkLst>
+            <pc:docMk/>
+            <pc:sldMk cId="853938190" sldId="263"/>
+            <ac:cxnSpMk id="17" creationId="{9D74C2FC-3228-4FC1-B97B-87AD35508D91}"/>
+          </ac:cxnSpMkLst>
+        </pc:cxnChg>
+      </pc:sldChg>
+      <pc:sldChg chg="addSp delSp modSp new mod setBg modNotesTx">
+        <pc:chgData name="Tristan Plasse" userId="13c698b9-43c4-4271-b359-faaadca0774b" providerId="ADAL" clId="{FE460185-D4AE-4375-BA71-CD1D7F2341F0}" dt="2026-04-17T03:46:48.563" v="5735" actId="20577"/>
+        <pc:sldMkLst>
+          <pc:docMk/>
+          <pc:sldMk cId="1986804065" sldId="264"/>
+        </pc:sldMkLst>
+        <pc:spChg chg="mod">
+          <ac:chgData name="Tristan Plasse" userId="13c698b9-43c4-4271-b359-faaadca0774b" providerId="ADAL" clId="{FE460185-D4AE-4375-BA71-CD1D7F2341F0}" dt="2026-04-16T00:29:44.509" v="1419" actId="26606"/>
+          <ac:spMkLst>
+            <pc:docMk/>
+            <pc:sldMk cId="1986804065" sldId="264"/>
+            <ac:spMk id="2" creationId="{DF3B35E5-60C7-1A5E-189B-80DD3CF8C49C}"/>
+          </ac:spMkLst>
+        </pc:spChg>
+        <pc:spChg chg="mod">
+          <ac:chgData name="Tristan Plasse" userId="13c698b9-43c4-4271-b359-faaadca0774b" providerId="ADAL" clId="{FE460185-D4AE-4375-BA71-CD1D7F2341F0}" dt="2026-04-16T00:37:23.329" v="1596" actId="20577"/>
+          <ac:spMkLst>
+            <pc:docMk/>
+            <pc:sldMk cId="1986804065" sldId="264"/>
+            <ac:spMk id="3" creationId="{948D2D04-6AA7-999B-92B0-8A9D5A8E52BD}"/>
+          </ac:spMkLst>
+        </pc:spChg>
+        <pc:spChg chg="add mod">
+          <ac:chgData name="Tristan Plasse" userId="13c698b9-43c4-4271-b359-faaadca0774b" providerId="ADAL" clId="{FE460185-D4AE-4375-BA71-CD1D7F2341F0}" dt="2026-04-16T00:33:45.498" v="1503" actId="1076"/>
+          <ac:spMkLst>
+            <pc:docMk/>
+            <pc:sldMk cId="1986804065" sldId="264"/>
+            <ac:spMk id="6" creationId="{6375CB8C-208E-349E-7561-A0A695BD91BD}"/>
+          </ac:spMkLst>
+        </pc:spChg>
+        <pc:spChg chg="add del">
+          <ac:chgData name="Tristan Plasse" userId="13c698b9-43c4-4271-b359-faaadca0774b" providerId="ADAL" clId="{FE460185-D4AE-4375-BA71-CD1D7F2341F0}" dt="2026-04-16T00:29:44.509" v="1419" actId="26606"/>
+          <ac:spMkLst>
+            <pc:docMk/>
+            <pc:sldMk cId="1986804065" sldId="264"/>
+            <ac:spMk id="8" creationId="{EEF92585-7A99-6108-9663-8C59032742EC}"/>
+          </ac:spMkLst>
+        </pc:spChg>
+        <pc:spChg chg="add">
+          <ac:chgData name="Tristan Plasse" userId="13c698b9-43c4-4271-b359-faaadca0774b" providerId="ADAL" clId="{FE460185-D4AE-4375-BA71-CD1D7F2341F0}" dt="2026-04-16T00:29:44.509" v="1419" actId="26606"/>
+          <ac:spMkLst>
+            <pc:docMk/>
+            <pc:sldMk cId="1986804065" sldId="264"/>
+            <ac:spMk id="15" creationId="{E49D7415-2F11-44C2-B6AA-13A25B6814B9}"/>
+          </ac:spMkLst>
+        </pc:spChg>
+        <pc:picChg chg="add mod">
+          <ac:chgData name="Tristan Plasse" userId="13c698b9-43c4-4271-b359-faaadca0774b" providerId="ADAL" clId="{FE460185-D4AE-4375-BA71-CD1D7F2341F0}" dt="2026-04-16T00:30:02.948" v="1422" actId="1076"/>
+          <ac:picMkLst>
+            <pc:docMk/>
+            <pc:sldMk cId="1986804065" sldId="264"/>
+            <ac:picMk id="5" creationId="{F5E6D3CC-F1EF-27B3-F856-FF38AC72410C}"/>
+          </ac:picMkLst>
+        </pc:picChg>
+        <pc:cxnChg chg="add del">
+          <ac:chgData name="Tristan Plasse" userId="13c698b9-43c4-4271-b359-faaadca0774b" providerId="ADAL" clId="{FE460185-D4AE-4375-BA71-CD1D7F2341F0}" dt="2026-04-16T00:29:44.509" v="1419" actId="26606"/>
+          <ac:cxnSpMkLst>
+            <pc:docMk/>
+            <pc:sldMk cId="1986804065" sldId="264"/>
+            <ac:cxnSpMk id="10" creationId="{78F0A063-5253-8DF5-3B7B-12FE096705F1}"/>
+          </ac:cxnSpMkLst>
+        </pc:cxnChg>
+        <pc:cxnChg chg="add">
+          <ac:chgData name="Tristan Plasse" userId="13c698b9-43c4-4271-b359-faaadca0774b" providerId="ADAL" clId="{FE460185-D4AE-4375-BA71-CD1D7F2341F0}" dt="2026-04-16T00:29:44.509" v="1419" actId="26606"/>
+          <ac:cxnSpMkLst>
+            <pc:docMk/>
+            <pc:sldMk cId="1986804065" sldId="264"/>
+            <ac:cxnSpMk id="17" creationId="{4583FD9E-C5A7-96F7-951D-7D292013CD58}"/>
+          </ac:cxnSpMkLst>
+        </pc:cxnChg>
+      </pc:sldChg>
+      <pc:sldChg chg="addSp delSp modSp new mod modNotesTx">
+        <pc:chgData name="Tristan Plasse" userId="13c698b9-43c4-4271-b359-faaadca0774b" providerId="ADAL" clId="{FE460185-D4AE-4375-BA71-CD1D7F2341F0}" dt="2026-04-17T03:46:56.450" v="5749" actId="20577"/>
+        <pc:sldMkLst>
+          <pc:docMk/>
+          <pc:sldMk cId="444677078" sldId="265"/>
+        </pc:sldMkLst>
+        <pc:spChg chg="mod">
+          <ac:chgData name="Tristan Plasse" userId="13c698b9-43c4-4271-b359-faaadca0774b" providerId="ADAL" clId="{FE460185-D4AE-4375-BA71-CD1D7F2341F0}" dt="2026-04-16T00:37:51.243" v="1605" actId="20577"/>
+          <ac:spMkLst>
+            <pc:docMk/>
+            <pc:sldMk cId="444677078" sldId="265"/>
+            <ac:spMk id="2" creationId="{FFF627C6-6D47-1F1B-D2BE-90211DF917C7}"/>
+          </ac:spMkLst>
+        </pc:spChg>
+        <pc:spChg chg="del">
+          <ac:chgData name="Tristan Plasse" userId="13c698b9-43c4-4271-b359-faaadca0774b" providerId="ADAL" clId="{FE460185-D4AE-4375-BA71-CD1D7F2341F0}" dt="2026-04-16T00:52:04.908" v="1606" actId="478"/>
+          <ac:spMkLst>
+            <pc:docMk/>
+            <pc:sldMk cId="444677078" sldId="265"/>
+            <ac:spMk id="3" creationId="{DC799142-257A-3168-9C81-800A7BA7F93E}"/>
+          </ac:spMkLst>
+        </pc:spChg>
+        <pc:spChg chg="add mod">
+          <ac:chgData name="Tristan Plasse" userId="13c698b9-43c4-4271-b359-faaadca0774b" providerId="ADAL" clId="{FE460185-D4AE-4375-BA71-CD1D7F2341F0}" dt="2026-04-17T02:33:59.954" v="5483" actId="20577"/>
+          <ac:spMkLst>
+            <pc:docMk/>
+            <pc:sldMk cId="444677078" sldId="265"/>
+            <ac:spMk id="12" creationId="{3A09E5BF-F72A-1A2E-E135-EC770726F1C8}"/>
+          </ac:spMkLst>
+        </pc:spChg>
+        <pc:picChg chg="add del mod">
+          <ac:chgData name="Tristan Plasse" userId="13c698b9-43c4-4271-b359-faaadca0774b" providerId="ADAL" clId="{FE460185-D4AE-4375-BA71-CD1D7F2341F0}" dt="2026-04-16T01:00:17.358" v="1621" actId="478"/>
+          <ac:picMkLst>
+            <pc:docMk/>
+            <pc:sldMk cId="444677078" sldId="265"/>
+            <ac:picMk id="5" creationId="{20B0F317-66BD-A5E6-A014-CDA777F9CFE0}"/>
+          </ac:picMkLst>
+        </pc:picChg>
+        <pc:picChg chg="add mod">
+          <ac:chgData name="Tristan Plasse" userId="13c698b9-43c4-4271-b359-faaadca0774b" providerId="ADAL" clId="{FE460185-D4AE-4375-BA71-CD1D7F2341F0}" dt="2026-04-16T01:03:00.381" v="1636" actId="1076"/>
+          <ac:picMkLst>
+            <pc:docMk/>
+            <pc:sldMk cId="444677078" sldId="265"/>
+            <ac:picMk id="7" creationId="{E414B00F-B7F2-AE14-2AD2-468F405D93D9}"/>
+          </ac:picMkLst>
+        </pc:picChg>
+        <pc:picChg chg="add del mod">
+          <ac:chgData name="Tristan Plasse" userId="13c698b9-43c4-4271-b359-faaadca0774b" providerId="ADAL" clId="{FE460185-D4AE-4375-BA71-CD1D7F2341F0}" dt="2026-04-16T01:02:35.265" v="1629" actId="478"/>
+          <ac:picMkLst>
+            <pc:docMk/>
+            <pc:sldMk cId="444677078" sldId="265"/>
+            <ac:picMk id="9" creationId="{AA70A428-69E9-1A63-4881-73DC5E2E3A92}"/>
+          </ac:picMkLst>
+        </pc:picChg>
+        <pc:picChg chg="add mod">
+          <ac:chgData name="Tristan Plasse" userId="13c698b9-43c4-4271-b359-faaadca0774b" providerId="ADAL" clId="{FE460185-D4AE-4375-BA71-CD1D7F2341F0}" dt="2026-04-16T01:10:19.476" v="2226" actId="1076"/>
+          <ac:picMkLst>
+            <pc:docMk/>
+            <pc:sldMk cId="444677078" sldId="265"/>
+            <ac:picMk id="11" creationId="{D1417A4E-6B8F-61D8-4975-C6885ADDFC9B}"/>
+          </ac:picMkLst>
+        </pc:picChg>
+      </pc:sldChg>
+      <pc:sldChg chg="modSp new mod modNotesTx">
+        <pc:chgData name="Tristan Plasse" userId="13c698b9-43c4-4271-b359-faaadca0774b" providerId="ADAL" clId="{FE460185-D4AE-4375-BA71-CD1D7F2341F0}" dt="2026-04-17T03:51:40.902" v="5776" actId="20577"/>
+        <pc:sldMkLst>
+          <pc:docMk/>
+          <pc:sldMk cId="400772557" sldId="266"/>
+        </pc:sldMkLst>
+        <pc:spChg chg="mod">
+          <ac:chgData name="Tristan Plasse" userId="13c698b9-43c4-4271-b359-faaadca0774b" providerId="ADAL" clId="{FE460185-D4AE-4375-BA71-CD1D7F2341F0}" dt="2026-04-16T01:36:18.826" v="3023" actId="20577"/>
+          <ac:spMkLst>
+            <pc:docMk/>
+            <pc:sldMk cId="400772557" sldId="266"/>
+            <ac:spMk id="2" creationId="{B602546B-6E81-B2EF-AF4D-70A2BABCE52E}"/>
+          </ac:spMkLst>
+        </pc:spChg>
+        <pc:spChg chg="mod">
+          <ac:chgData name="Tristan Plasse" userId="13c698b9-43c4-4271-b359-faaadca0774b" providerId="ADAL" clId="{FE460185-D4AE-4375-BA71-CD1D7F2341F0}" dt="2026-04-16T02:27:57.490" v="3588"/>
+          <ac:spMkLst>
+            <pc:docMk/>
+            <pc:sldMk cId="400772557" sldId="266"/>
+            <ac:spMk id="3" creationId="{7C8FECE2-37AA-AFF5-7D1E-A6F3BA91F380}"/>
+          </ac:spMkLst>
+        </pc:spChg>
+      </pc:sldChg>
+      <pc:sldChg chg="addSp delSp modSp add mod modNotesTx">
+        <pc:chgData name="Tristan Plasse" userId="13c698b9-43c4-4271-b359-faaadca0774b" providerId="ADAL" clId="{FE460185-D4AE-4375-BA71-CD1D7F2341F0}" dt="2026-04-17T03:46:59.767" v="5754" actId="20577"/>
+        <pc:sldMkLst>
+          <pc:docMk/>
+          <pc:sldMk cId="1162506719" sldId="267"/>
+        </pc:sldMkLst>
+        <pc:spChg chg="del">
+          <ac:chgData name="Tristan Plasse" userId="13c698b9-43c4-4271-b359-faaadca0774b" providerId="ADAL" clId="{FE460185-D4AE-4375-BA71-CD1D7F2341F0}" dt="2026-04-16T01:18:10.170" v="2262" actId="478"/>
+          <ac:spMkLst>
+            <pc:docMk/>
+            <pc:sldMk cId="1162506719" sldId="267"/>
+            <ac:spMk id="2" creationId="{996E97C5-B6B8-AC6F-B841-CDDD941E1848}"/>
+          </ac:spMkLst>
+        </pc:spChg>
+        <pc:spChg chg="add del mod">
+          <ac:chgData name="Tristan Plasse" userId="13c698b9-43c4-4271-b359-faaadca0774b" providerId="ADAL" clId="{FE460185-D4AE-4375-BA71-CD1D7F2341F0}" dt="2026-04-16T01:18:12.112" v="2263" actId="478"/>
+          <ac:spMkLst>
+            <pc:docMk/>
+            <pc:sldMk cId="1162506719" sldId="267"/>
+            <ac:spMk id="9" creationId="{DACFA005-2A1C-5693-B364-5DC1828017A0}"/>
+          </ac:spMkLst>
+        </pc:spChg>
+        <pc:spChg chg="mod">
+          <ac:chgData name="Tristan Plasse" userId="13c698b9-43c4-4271-b359-faaadca0774b" providerId="ADAL" clId="{FE460185-D4AE-4375-BA71-CD1D7F2341F0}" dt="2026-04-17T02:34:03.567" v="5485" actId="20577"/>
+          <ac:spMkLst>
+            <pc:docMk/>
+            <pc:sldMk cId="1162506719" sldId="267"/>
+            <ac:spMk id="12" creationId="{1E7DC136-65ED-D17F-5DEC-2F90924CF09D}"/>
+          </ac:spMkLst>
+        </pc:spChg>
+        <pc:picChg chg="add mod">
+          <ac:chgData name="Tristan Plasse" userId="13c698b9-43c4-4271-b359-faaadca0774b" providerId="ADAL" clId="{FE460185-D4AE-4375-BA71-CD1D7F2341F0}" dt="2026-04-16T01:21:28.624" v="2589" actId="14100"/>
+          <ac:picMkLst>
+            <pc:docMk/>
+            <pc:sldMk cId="1162506719" sldId="267"/>
+            <ac:picMk id="4" creationId="{C3B9B1F3-DBD8-3F0B-E141-48009D6B0142}"/>
+          </ac:picMkLst>
+        </pc:picChg>
+        <pc:picChg chg="add del mod modCrop">
+          <ac:chgData name="Tristan Plasse" userId="13c698b9-43c4-4271-b359-faaadca0774b" providerId="ADAL" clId="{FE460185-D4AE-4375-BA71-CD1D7F2341F0}" dt="2026-04-16T01:21:45.395" v="2590" actId="478"/>
+          <ac:picMkLst>
+            <pc:docMk/>
+            <pc:sldMk cId="1162506719" sldId="267"/>
+            <ac:picMk id="6" creationId="{239E3CC3-05C6-1C0D-925A-F3CFDBB3CCBC}"/>
+          </ac:picMkLst>
+        </pc:picChg>
+        <pc:picChg chg="del">
+          <ac:chgData name="Tristan Plasse" userId="13c698b9-43c4-4271-b359-faaadca0774b" providerId="ADAL" clId="{FE460185-D4AE-4375-BA71-CD1D7F2341F0}" dt="2026-04-16T01:17:06.011" v="2249" actId="478"/>
+          <ac:picMkLst>
+            <pc:docMk/>
+            <pc:sldMk cId="1162506719" sldId="267"/>
+            <ac:picMk id="7" creationId="{362CD478-FEA5-8845-C2F6-99CF702C9B93}"/>
+          </ac:picMkLst>
+        </pc:picChg>
+        <pc:picChg chg="del">
+          <ac:chgData name="Tristan Plasse" userId="13c698b9-43c4-4271-b359-faaadca0774b" providerId="ADAL" clId="{FE460185-D4AE-4375-BA71-CD1D7F2341F0}" dt="2026-04-16T01:14:05.799" v="2242" actId="478"/>
+          <ac:picMkLst>
+            <pc:docMk/>
+            <pc:sldMk cId="1162506719" sldId="267"/>
+            <ac:picMk id="11" creationId="{BB926E12-AE6F-B487-5484-F28319FF13A2}"/>
+          </ac:picMkLst>
+        </pc:picChg>
+        <pc:picChg chg="add mod">
+          <ac:chgData name="Tristan Plasse" userId="13c698b9-43c4-4271-b359-faaadca0774b" providerId="ADAL" clId="{FE460185-D4AE-4375-BA71-CD1D7F2341F0}" dt="2026-04-16T01:21:56.262" v="2594" actId="14100"/>
+          <ac:picMkLst>
+            <pc:docMk/>
+            <pc:sldMk cId="1162506719" sldId="267"/>
+            <ac:picMk id="13" creationId="{C705A886-BFDB-824D-0E37-7B8094A21002}"/>
+          </ac:picMkLst>
+        </pc:picChg>
+      </pc:sldChg>
+      <pc:sldChg chg="add del">
+        <pc:chgData name="Tristan Plasse" userId="13c698b9-43c4-4271-b359-faaadca0774b" providerId="ADAL" clId="{FE460185-D4AE-4375-BA71-CD1D7F2341F0}" dt="2026-04-16T01:28:21.210" v="2598" actId="2696"/>
+        <pc:sldMkLst>
+          <pc:docMk/>
+          <pc:sldMk cId="3071220066" sldId="268"/>
+        </pc:sldMkLst>
+      </pc:sldChg>
+      <pc:sldChg chg="new del">
+        <pc:chgData name="Tristan Plasse" userId="13c698b9-43c4-4271-b359-faaadca0774b" providerId="ADAL" clId="{FE460185-D4AE-4375-BA71-CD1D7F2341F0}" dt="2026-04-16T01:28:16.570" v="2596" actId="680"/>
+        <pc:sldMkLst>
+          <pc:docMk/>
+          <pc:sldMk cId="1698036767" sldId="269"/>
+        </pc:sldMkLst>
+      </pc:sldChg>
+      <pc:sldChg chg="addSp delSp modSp add mod modNotesTx">
+        <pc:chgData name="Tristan Plasse" userId="13c698b9-43c4-4271-b359-faaadca0774b" providerId="ADAL" clId="{FE460185-D4AE-4375-BA71-CD1D7F2341F0}" dt="2026-04-17T03:47:02.560" v="5759" actId="20577"/>
+        <pc:sldMkLst>
+          <pc:docMk/>
+          <pc:sldMk cId="4073645163" sldId="269"/>
+        </pc:sldMkLst>
+        <pc:spChg chg="mod">
+          <ac:chgData name="Tristan Plasse" userId="13c698b9-43c4-4271-b359-faaadca0774b" providerId="ADAL" clId="{FE460185-D4AE-4375-BA71-CD1D7F2341F0}" dt="2026-04-17T02:34:06.531" v="5487" actId="20577"/>
+          <ac:spMkLst>
+            <pc:docMk/>
+            <pc:sldMk cId="4073645163" sldId="269"/>
+            <ac:spMk id="12" creationId="{C9FAF4E8-FBA0-C1B3-18B7-2833B15C2E5C}"/>
+          </ac:spMkLst>
+        </pc:spChg>
+        <pc:picChg chg="add del mod">
+          <ac:chgData name="Tristan Plasse" userId="13c698b9-43c4-4271-b359-faaadca0774b" providerId="ADAL" clId="{FE460185-D4AE-4375-BA71-CD1D7F2341F0}" dt="2026-04-16T01:31:08.732" v="2614" actId="478"/>
+          <ac:picMkLst>
+            <pc:docMk/>
+            <pc:sldMk cId="4073645163" sldId="269"/>
+            <ac:picMk id="3" creationId="{2E5DD771-C94F-58CD-D9B5-D8BE4032FB62}"/>
+          </ac:picMkLst>
+        </pc:picChg>
+        <pc:picChg chg="del">
+          <ac:chgData name="Tristan Plasse" userId="13c698b9-43c4-4271-b359-faaadca0774b" providerId="ADAL" clId="{FE460185-D4AE-4375-BA71-CD1D7F2341F0}" dt="2026-04-16T01:28:23" v="2599" actId="478"/>
+          <ac:picMkLst>
+            <pc:docMk/>
+            <pc:sldMk cId="4073645163" sldId="269"/>
+            <ac:picMk id="4" creationId="{F7435F9E-1B68-EADE-849E-E3EDCCD07560}"/>
+          </ac:picMkLst>
+        </pc:picChg>
+        <pc:picChg chg="add mod">
+          <ac:chgData name="Tristan Plasse" userId="13c698b9-43c4-4271-b359-faaadca0774b" providerId="ADAL" clId="{FE460185-D4AE-4375-BA71-CD1D7F2341F0}" dt="2026-04-16T01:33:17.443" v="2633" actId="14100"/>
+          <ac:picMkLst>
+            <pc:docMk/>
+            <pc:sldMk cId="4073645163" sldId="269"/>
+            <ac:picMk id="6" creationId="{57A977B4-F0B7-1A94-5F50-6DB61D43BE7B}"/>
+          </ac:picMkLst>
+        </pc:picChg>
+        <pc:picChg chg="add del mod">
+          <ac:chgData name="Tristan Plasse" userId="13c698b9-43c4-4271-b359-faaadca0774b" providerId="ADAL" clId="{FE460185-D4AE-4375-BA71-CD1D7F2341F0}" dt="2026-04-16T01:32:08.871" v="2619" actId="478"/>
+          <ac:picMkLst>
+            <pc:docMk/>
+            <pc:sldMk cId="4073645163" sldId="269"/>
+            <ac:picMk id="8" creationId="{3D9401CE-DFEB-73AD-1B71-D0EE61988BBC}"/>
+          </ac:picMkLst>
+        </pc:picChg>
+        <pc:picChg chg="add mod modCrop">
+          <ac:chgData name="Tristan Plasse" userId="13c698b9-43c4-4271-b359-faaadca0774b" providerId="ADAL" clId="{FE460185-D4AE-4375-BA71-CD1D7F2341F0}" dt="2026-04-16T01:33:01.343" v="2631" actId="14100"/>
+          <ac:picMkLst>
+            <pc:docMk/>
+            <pc:sldMk cId="4073645163" sldId="269"/>
+            <ac:picMk id="10" creationId="{8F3BD6FE-B164-B9F2-09BB-32BB144C5117}"/>
+          </ac:picMkLst>
+        </pc:picChg>
+        <pc:picChg chg="del">
+          <ac:chgData name="Tristan Plasse" userId="13c698b9-43c4-4271-b359-faaadca0774b" providerId="ADAL" clId="{FE460185-D4AE-4375-BA71-CD1D7F2341F0}" dt="2026-04-16T01:28:39.115" v="2606" actId="478"/>
+          <ac:picMkLst>
+            <pc:docMk/>
+            <pc:sldMk cId="4073645163" sldId="269"/>
+            <ac:picMk id="13" creationId="{6B8210D3-7887-C695-A074-8C993699513C}"/>
+          </ac:picMkLst>
+        </pc:picChg>
+      </pc:sldChg>
+      <pc:sldChg chg="addSp modSp new mod setBg modNotesTx">
+        <pc:chgData name="Tristan Plasse" userId="13c698b9-43c4-4271-b359-faaadca0774b" providerId="ADAL" clId="{FE460185-D4AE-4375-BA71-CD1D7F2341F0}" dt="2026-04-17T03:51:34.162" v="5768" actId="20577"/>
+        <pc:sldMkLst>
+          <pc:docMk/>
+          <pc:sldMk cId="960806995" sldId="270"/>
+        </pc:sldMkLst>
+        <pc:spChg chg="mod">
+          <ac:chgData name="Tristan Plasse" userId="13c698b9-43c4-4271-b359-faaadca0774b" providerId="ADAL" clId="{FE460185-D4AE-4375-BA71-CD1D7F2341F0}" dt="2026-04-16T02:43:08.632" v="4114" actId="26606"/>
+          <ac:spMkLst>
+            <pc:docMk/>
+            <pc:sldMk cId="960806995" sldId="270"/>
+            <ac:spMk id="2" creationId="{E94E064B-C271-D942-847D-C57AA49309EB}"/>
+          </ac:spMkLst>
+        </pc:spChg>
+        <pc:spChg chg="mod">
+          <ac:chgData name="Tristan Plasse" userId="13c698b9-43c4-4271-b359-faaadca0774b" providerId="ADAL" clId="{FE460185-D4AE-4375-BA71-CD1D7F2341F0}" dt="2026-04-17T02:34:17.176" v="5488" actId="20577"/>
+          <ac:spMkLst>
+            <pc:docMk/>
+            <pc:sldMk cId="960806995" sldId="270"/>
+            <ac:spMk id="3" creationId="{985811B9-89CF-1E2E-CD4B-69C7E3D221C2}"/>
+          </ac:spMkLst>
+        </pc:spChg>
+        <pc:spChg chg="add">
+          <ac:chgData name="Tristan Plasse" userId="13c698b9-43c4-4271-b359-faaadca0774b" providerId="ADAL" clId="{FE460185-D4AE-4375-BA71-CD1D7F2341F0}" dt="2026-04-16T02:43:08.632" v="4114" actId="26606"/>
+          <ac:spMkLst>
+            <pc:docMk/>
+            <pc:sldMk cId="960806995" sldId="270"/>
+            <ac:spMk id="8" creationId="{5F710FDB-0919-493E-8539-8240C23F1EB2}"/>
+          </ac:spMkLst>
+        </pc:spChg>
+        <pc:cxnChg chg="add">
+          <ac:chgData name="Tristan Plasse" userId="13c698b9-43c4-4271-b359-faaadca0774b" providerId="ADAL" clId="{FE460185-D4AE-4375-BA71-CD1D7F2341F0}" dt="2026-04-16T02:43:08.632" v="4114" actId="26606"/>
+          <ac:cxnSpMkLst>
+            <pc:docMk/>
+            <pc:sldMk cId="960806995" sldId="270"/>
+            <ac:cxnSpMk id="10" creationId="{0AFF0B6C-73E2-4B40-9280-938C14922C87}"/>
+          </ac:cxnSpMkLst>
+        </pc:cxnChg>
+      </pc:sldChg>
+      <pc:sldChg chg="addSp delSp modSp new mod setBg modNotesTx">
+        <pc:chgData name="Tristan Plasse" userId="13c698b9-43c4-4271-b359-faaadca0774b" providerId="ADAL" clId="{FE460185-D4AE-4375-BA71-CD1D7F2341F0}" dt="2026-04-17T03:51:45.552" v="5785" actId="20577"/>
+        <pc:sldMkLst>
+          <pc:docMk/>
+          <pc:sldMk cId="1896708259" sldId="271"/>
+        </pc:sldMkLst>
+        <pc:spChg chg="mod">
+          <ac:chgData name="Tristan Plasse" userId="13c698b9-43c4-4271-b359-faaadca0774b" providerId="ADAL" clId="{FE460185-D4AE-4375-BA71-CD1D7F2341F0}" dt="2026-04-16T02:43:04.560" v="4113" actId="26606"/>
+          <ac:spMkLst>
+            <pc:docMk/>
+            <pc:sldMk cId="1896708259" sldId="271"/>
+            <ac:spMk id="2" creationId="{8D966DD8-8219-CF1B-134B-3A3C1821891D}"/>
+          </ac:spMkLst>
+        </pc:spChg>
+        <pc:spChg chg="mod">
+          <ac:chgData name="Tristan Plasse" userId="13c698b9-43c4-4271-b359-faaadca0774b" providerId="ADAL" clId="{FE460185-D4AE-4375-BA71-CD1D7F2341F0}" dt="2026-04-16T02:43:04.560" v="4113" actId="26606"/>
+          <ac:spMkLst>
+            <pc:docMk/>
+            <pc:sldMk cId="1896708259" sldId="271"/>
+            <ac:spMk id="3" creationId="{76E70E93-C46E-8BE3-F6AA-2FF55DA44A33}"/>
+          </ac:spMkLst>
+        </pc:spChg>
+        <pc:spChg chg="add del">
+          <ac:chgData name="Tristan Plasse" userId="13c698b9-43c4-4271-b359-faaadca0774b" providerId="ADAL" clId="{FE460185-D4AE-4375-BA71-CD1D7F2341F0}" dt="2026-04-16T02:43:04.560" v="4113" actId="26606"/>
+          <ac:spMkLst>
+            <pc:docMk/>
+            <pc:sldMk cId="1896708259" sldId="271"/>
+            <ac:spMk id="8" creationId="{5F710FDB-0919-493E-8539-8240C23F1EB2}"/>
+          </ac:spMkLst>
+        </pc:spChg>
+        <pc:cxnChg chg="add del">
+          <ac:chgData name="Tristan Plasse" userId="13c698b9-43c4-4271-b359-faaadca0774b" providerId="ADAL" clId="{FE460185-D4AE-4375-BA71-CD1D7F2341F0}" dt="2026-04-16T02:43:04.560" v="4113" actId="26606"/>
+          <ac:cxnSpMkLst>
+            <pc:docMk/>
+            <pc:sldMk cId="1896708259" sldId="271"/>
+            <ac:cxnSpMk id="10" creationId="{0AFF0B6C-73E2-4B40-9280-938C14922C87}"/>
+          </ac:cxnSpMkLst>
+        </pc:cxnChg>
+      </pc:sldChg>
+      <pc:sldChg chg="addSp delSp modSp new mod setBg modNotesTx">
+        <pc:chgData name="Tristan Plasse" userId="13c698b9-43c4-4271-b359-faaadca0774b" providerId="ADAL" clId="{FE460185-D4AE-4375-BA71-CD1D7F2341F0}" dt="2026-04-17T03:51:48.914" v="5790" actId="20577"/>
+        <pc:sldMkLst>
+          <pc:docMk/>
+          <pc:sldMk cId="1681359310" sldId="272"/>
+        </pc:sldMkLst>
+        <pc:spChg chg="mod">
+          <ac:chgData name="Tristan Plasse" userId="13c698b9-43c4-4271-b359-faaadca0774b" providerId="ADAL" clId="{FE460185-D4AE-4375-BA71-CD1D7F2341F0}" dt="2026-04-16T02:42:41.334" v="4108" actId="26606"/>
+          <ac:spMkLst>
+            <pc:docMk/>
+            <pc:sldMk cId="1681359310" sldId="272"/>
+            <ac:spMk id="2" creationId="{C6592201-F93D-A145-140C-4ED4769B3007}"/>
+          </ac:spMkLst>
+        </pc:spChg>
+        <pc:spChg chg="del">
+          <ac:chgData name="Tristan Plasse" userId="13c698b9-43c4-4271-b359-faaadca0774b" providerId="ADAL" clId="{FE460185-D4AE-4375-BA71-CD1D7F2341F0}" dt="2026-04-16T02:42:34.162" v="4107" actId="478"/>
+          <ac:spMkLst>
+            <pc:docMk/>
+            <pc:sldMk cId="1681359310" sldId="272"/>
+            <ac:spMk id="3" creationId="{73F2AA7A-9104-D0E1-A821-0144F482BC91}"/>
+          </ac:spMkLst>
+        </pc:spChg>
+        <pc:spChg chg="add">
+          <ac:chgData name="Tristan Plasse" userId="13c698b9-43c4-4271-b359-faaadca0774b" providerId="ADAL" clId="{FE460185-D4AE-4375-BA71-CD1D7F2341F0}" dt="2026-04-16T02:42:41.334" v="4108" actId="26606"/>
+          <ac:spMkLst>
+            <pc:docMk/>
+            <pc:sldMk cId="1681359310" sldId="272"/>
+            <ac:spMk id="11" creationId="{DEF92653-5D6D-47E6-8744-0DAF76E049C4}"/>
+          </ac:spMkLst>
+        </pc:spChg>
+        <pc:cxnChg chg="add">
+          <ac:chgData name="Tristan Plasse" userId="13c698b9-43c4-4271-b359-faaadca0774b" providerId="ADAL" clId="{FE460185-D4AE-4375-BA71-CD1D7F2341F0}" dt="2026-04-16T02:42:41.334" v="4108" actId="26606"/>
+          <ac:cxnSpMkLst>
+            <pc:docMk/>
+            <pc:sldMk cId="1681359310" sldId="272"/>
+            <ac:cxnSpMk id="7" creationId="{F64F9B95-9045-48D2-B9F3-2927E98F54AA}"/>
+          </ac:cxnSpMkLst>
+        </pc:cxnChg>
+        <pc:cxnChg chg="add">
+          <ac:chgData name="Tristan Plasse" userId="13c698b9-43c4-4271-b359-faaadca0774b" providerId="ADAL" clId="{FE460185-D4AE-4375-BA71-CD1D7F2341F0}" dt="2026-04-16T02:42:41.334" v="4108" actId="26606"/>
+          <ac:cxnSpMkLst>
+            <pc:docMk/>
+            <pc:sldMk cId="1681359310" sldId="272"/>
+            <ac:cxnSpMk id="9" creationId="{085AA86F-6A4D-4BCB-A045-D992CDC2959B}"/>
+          </ac:cxnSpMkLst>
+        </pc:cxnChg>
+        <pc:cxnChg chg="add">
+          <ac:chgData name="Tristan Plasse" userId="13c698b9-43c4-4271-b359-faaadca0774b" providerId="ADAL" clId="{FE460185-D4AE-4375-BA71-CD1D7F2341F0}" dt="2026-04-16T02:42:41.334" v="4108" actId="26606"/>
+          <ac:cxnSpMkLst>
+            <pc:docMk/>
+            <pc:sldMk cId="1681359310" sldId="272"/>
+            <ac:cxnSpMk id="13" creationId="{9CA98CE3-81A7-4FFE-A047-9AA65998D877}"/>
+          </ac:cxnSpMkLst>
+        </pc:cxnChg>
+      </pc:sldChg>
+      <pc:sldChg chg="addSp delSp modSp new mod modNotesTx">
+        <pc:chgData name="Tristan Plasse" userId="13c698b9-43c4-4271-b359-faaadca0774b" providerId="ADAL" clId="{FE460185-D4AE-4375-BA71-CD1D7F2341F0}" dt="2026-04-17T03:52:07.685" v="5810" actId="20577"/>
+        <pc:sldMkLst>
+          <pc:docMk/>
+          <pc:sldMk cId="3744480376" sldId="273"/>
+        </pc:sldMkLst>
+        <pc:spChg chg="mod">
+          <ac:chgData name="Tristan Plasse" userId="13c698b9-43c4-4271-b359-faaadca0774b" providerId="ADAL" clId="{FE460185-D4AE-4375-BA71-CD1D7F2341F0}" dt="2026-04-17T00:44:40.484" v="4141" actId="20577"/>
+          <ac:spMkLst>
+            <pc:docMk/>
+            <pc:sldMk cId="3744480376" sldId="273"/>
+            <ac:spMk id="2" creationId="{0EC2D6A5-520A-776E-E0CF-3651506DA145}"/>
+          </ac:spMkLst>
+        </pc:spChg>
+        <pc:spChg chg="mod">
+          <ac:chgData name="Tristan Plasse" userId="13c698b9-43c4-4271-b359-faaadca0774b" providerId="ADAL" clId="{FE460185-D4AE-4375-BA71-CD1D7F2341F0}" dt="2026-04-17T01:03:16.916" v="4483" actId="2710"/>
+          <ac:spMkLst>
+            <pc:docMk/>
+            <pc:sldMk cId="3744480376" sldId="273"/>
+            <ac:spMk id="3" creationId="{38AAA12E-716D-5899-9938-9C062F7A14B4}"/>
+          </ac:spMkLst>
+        </pc:spChg>
+        <pc:spChg chg="add del mod">
+          <ac:chgData name="Tristan Plasse" userId="13c698b9-43c4-4271-b359-faaadca0774b" providerId="ADAL" clId="{FE460185-D4AE-4375-BA71-CD1D7F2341F0}" dt="2026-04-17T01:04:08.852" v="4491" actId="11529"/>
+          <ac:spMkLst>
+            <pc:docMk/>
+            <pc:sldMk cId="3744480376" sldId="273"/>
+            <ac:spMk id="10" creationId="{D0CF86B7-C7F6-1143-ED5A-D2A3BC154518}"/>
+          </ac:spMkLst>
+        </pc:spChg>
+        <pc:spChg chg="add mod">
+          <ac:chgData name="Tristan Plasse" userId="13c698b9-43c4-4271-b359-faaadca0774b" providerId="ADAL" clId="{FE460185-D4AE-4375-BA71-CD1D7F2341F0}" dt="2026-04-17T01:04:48.253" v="4499" actId="14100"/>
+          <ac:spMkLst>
+            <pc:docMk/>
+            <pc:sldMk cId="3744480376" sldId="273"/>
+            <ac:spMk id="11" creationId="{7548656C-186D-3220-0CDB-0A482B5D9824}"/>
+          </ac:spMkLst>
+        </pc:spChg>
+        <pc:picChg chg="add mod">
+          <ac:chgData name="Tristan Plasse" userId="13c698b9-43c4-4271-b359-faaadca0774b" providerId="ADAL" clId="{FE460185-D4AE-4375-BA71-CD1D7F2341F0}" dt="2026-04-17T01:03:20.603" v="4484" actId="1076"/>
+          <ac:picMkLst>
+            <pc:docMk/>
+            <pc:sldMk cId="3744480376" sldId="273"/>
+            <ac:picMk id="5" creationId="{9685D4F2-40A3-6B20-7AD7-ACCE12A4A00F}"/>
+          </ac:picMkLst>
+        </pc:picChg>
+        <pc:picChg chg="add mod">
+          <ac:chgData name="Tristan Plasse" userId="13c698b9-43c4-4271-b359-faaadca0774b" providerId="ADAL" clId="{FE460185-D4AE-4375-BA71-CD1D7F2341F0}" dt="2026-04-17T01:03:23.337" v="4485" actId="1076"/>
+          <ac:picMkLst>
+            <pc:docMk/>
+            <pc:sldMk cId="3744480376" sldId="273"/>
+            <ac:picMk id="7" creationId="{BB415FDE-9E57-650D-4644-A3CC764FDA45}"/>
+          </ac:picMkLst>
+        </pc:picChg>
+        <pc:cxnChg chg="add del mod">
+          <ac:chgData name="Tristan Plasse" userId="13c698b9-43c4-4271-b359-faaadca0774b" providerId="ADAL" clId="{FE460185-D4AE-4375-BA71-CD1D7F2341F0}" dt="2026-04-17T01:03:45.869" v="4487" actId="478"/>
+          <ac:cxnSpMkLst>
+            <pc:docMk/>
+            <pc:sldMk cId="3744480376" sldId="273"/>
+            <ac:cxnSpMk id="9" creationId="{8BE37D1B-F31A-9D61-8C1D-4BC41C8E9CAF}"/>
+          </ac:cxnSpMkLst>
+        </pc:cxnChg>
+      </pc:sldChg>
+      <pc:sldChg chg="addSp delSp modSp new mod setBg modNotesTx">
+        <pc:chgData name="Tristan Plasse" userId="13c698b9-43c4-4271-b359-faaadca0774b" providerId="ADAL" clId="{FE460185-D4AE-4375-BA71-CD1D7F2341F0}" dt="2026-04-17T03:46:52.008" v="5742" actId="20577"/>
+        <pc:sldMkLst>
+          <pc:docMk/>
+          <pc:sldMk cId="3943359794" sldId="274"/>
+        </pc:sldMkLst>
+        <pc:spChg chg="mod">
+          <ac:chgData name="Tristan Plasse" userId="13c698b9-43c4-4271-b359-faaadca0774b" providerId="ADAL" clId="{FE460185-D4AE-4375-BA71-CD1D7F2341F0}" dt="2026-04-16T22:11:55.941" v="4134" actId="26606"/>
+          <ac:spMkLst>
+            <pc:docMk/>
+            <pc:sldMk cId="3943359794" sldId="274"/>
+            <ac:spMk id="2" creationId="{F3A5A10E-A61E-2445-131F-98F4232F9171}"/>
+          </ac:spMkLst>
+        </pc:spChg>
+        <pc:spChg chg="add mod">
+          <ac:chgData name="Tristan Plasse" userId="13c698b9-43c4-4271-b359-faaadca0774b" providerId="ADAL" clId="{FE460185-D4AE-4375-BA71-CD1D7F2341F0}" dt="2026-04-17T02:33:53.673" v="5479" actId="20577"/>
+          <ac:spMkLst>
+            <pc:docMk/>
+            <pc:sldMk cId="3943359794" sldId="274"/>
+            <ac:spMk id="3" creationId="{76DBA5CA-9694-DA50-372E-DE9E5298136C}"/>
+          </ac:spMkLst>
+        </pc:spChg>
+        <pc:spChg chg="del">
+          <ac:chgData name="Tristan Plasse" userId="13c698b9-43c4-4271-b359-faaadca0774b" providerId="ADAL" clId="{FE460185-D4AE-4375-BA71-CD1D7F2341F0}" dt="2026-04-16T21:59:01.265" v="4124" actId="478"/>
+          <ac:spMkLst>
+            <pc:docMk/>
+            <pc:sldMk cId="3943359794" sldId="274"/>
+            <ac:spMk id="3" creationId="{7D509329-D8E9-DC9D-AA20-8B13EE3B11C5}"/>
+          </ac:spMkLst>
+        </pc:spChg>
+        <pc:spChg chg="add mod">
+          <ac:chgData name="Tristan Plasse" userId="13c698b9-43c4-4271-b359-faaadca0774b" providerId="ADAL" clId="{FE460185-D4AE-4375-BA71-CD1D7F2341F0}" dt="2026-04-17T02:33:55.725" v="5481" actId="20577"/>
+          <ac:spMkLst>
+            <pc:docMk/>
+            <pc:sldMk cId="3943359794" sldId="274"/>
+            <ac:spMk id="4" creationId="{0975B400-8C59-591A-0177-77A6A072BEDE}"/>
+          </ac:spMkLst>
+        </pc:spChg>
+        <pc:spChg chg="add">
+          <ac:chgData name="Tristan Plasse" userId="13c698b9-43c4-4271-b359-faaadca0774b" providerId="ADAL" clId="{FE460185-D4AE-4375-BA71-CD1D7F2341F0}" dt="2026-04-16T21:59:01.625" v="4125"/>
+          <ac:spMkLst>
+            <pc:docMk/>
+            <pc:sldMk cId="3943359794" sldId="274"/>
+            <ac:spMk id="4" creationId="{52175E9E-193B-CABD-0847-D23BEF1F84FC}"/>
+          </ac:spMkLst>
+        </pc:spChg>
+        <pc:spChg chg="add">
+          <ac:chgData name="Tristan Plasse" userId="13c698b9-43c4-4271-b359-faaadca0774b" providerId="ADAL" clId="{FE460185-D4AE-4375-BA71-CD1D7F2341F0}" dt="2026-04-16T21:59:05.947" v="4126"/>
+          <ac:spMkLst>
+            <pc:docMk/>
+            <pc:sldMk cId="3943359794" sldId="274"/>
+            <ac:spMk id="5" creationId="{5C7006F9-8CAE-B5C4-8633-9F7A94BDC7FD}"/>
+          </ac:spMkLst>
+        </pc:spChg>
+        <pc:spChg chg="add">
+          <ac:chgData name="Tristan Plasse" userId="13c698b9-43c4-4271-b359-faaadca0774b" providerId="ADAL" clId="{FE460185-D4AE-4375-BA71-CD1D7F2341F0}" dt="2026-04-16T22:11:50.444" v="4131"/>
+          <ac:spMkLst>
+            <pc:docMk/>
+            <pc:sldMk cId="3943359794" sldId="274"/>
+            <ac:spMk id="8" creationId="{653D6F1D-B915-DB9E-2085-A8CC25F78665}"/>
+          </ac:spMkLst>
+        </pc:spChg>
+        <pc:spChg chg="add">
+          <ac:chgData name="Tristan Plasse" userId="13c698b9-43c4-4271-b359-faaadca0774b" providerId="ADAL" clId="{FE460185-D4AE-4375-BA71-CD1D7F2341F0}" dt="2026-04-16T22:11:55.941" v="4134" actId="26606"/>
+          <ac:spMkLst>
+            <pc:docMk/>
+            <pc:sldMk cId="3943359794" sldId="274"/>
+            <ac:spMk id="19" creationId="{341BFA31-6544-45C2-9DA0-9E1C5E0B1959}"/>
+          </ac:spMkLst>
+        </pc:spChg>
+        <pc:picChg chg="add mod ord">
+          <ac:chgData name="Tristan Plasse" userId="13c698b9-43c4-4271-b359-faaadca0774b" providerId="ADAL" clId="{FE460185-D4AE-4375-BA71-CD1D7F2341F0}" dt="2026-04-17T02:33:28.013" v="5473" actId="1076"/>
+          <ac:picMkLst>
+            <pc:docMk/>
+            <pc:sldMk cId="3943359794" sldId="274"/>
+            <ac:picMk id="7" creationId="{A7047DCF-1E5A-A37A-7B89-E425EBDB3458}"/>
+          </ac:picMkLst>
+        </pc:picChg>
+        <pc:picChg chg="add mod">
+          <ac:chgData name="Tristan Plasse" userId="13c698b9-43c4-4271-b359-faaadca0774b" providerId="ADAL" clId="{FE460185-D4AE-4375-BA71-CD1D7F2341F0}" dt="2026-04-17T02:31:23.145" v="5318" actId="1076"/>
+          <ac:picMkLst>
+            <pc:docMk/>
+            <pc:sldMk cId="3943359794" sldId="274"/>
+            <ac:picMk id="10" creationId="{9D9C65FB-6DB1-A9D5-4232-01BDE010BE4E}"/>
+          </ac:picMkLst>
+        </pc:picChg>
+        <pc:cxnChg chg="add">
+          <ac:chgData name="Tristan Plasse" userId="13c698b9-43c4-4271-b359-faaadca0774b" providerId="ADAL" clId="{FE460185-D4AE-4375-BA71-CD1D7F2341F0}" dt="2026-04-16T22:11:55.941" v="4134" actId="26606"/>
+          <ac:cxnSpMkLst>
+            <pc:docMk/>
+            <pc:sldMk cId="3943359794" sldId="274"/>
+            <ac:cxnSpMk id="15" creationId="{F64F9B95-9045-48D2-B9F3-2927E98F54AA}"/>
+          </ac:cxnSpMkLst>
+        </pc:cxnChg>
+        <pc:cxnChg chg="add">
+          <ac:chgData name="Tristan Plasse" userId="13c698b9-43c4-4271-b359-faaadca0774b" providerId="ADAL" clId="{FE460185-D4AE-4375-BA71-CD1D7F2341F0}" dt="2026-04-16T22:11:55.941" v="4134" actId="26606"/>
+          <ac:cxnSpMkLst>
+            <pc:docMk/>
+            <pc:sldMk cId="3943359794" sldId="274"/>
+            <ac:cxnSpMk id="17" creationId="{085AA86F-6A4D-4BCB-A045-D992CDC2959B}"/>
+          </ac:cxnSpMkLst>
+        </pc:cxnChg>
+        <pc:cxnChg chg="add">
+          <ac:chgData name="Tristan Plasse" userId="13c698b9-43c4-4271-b359-faaadca0774b" providerId="ADAL" clId="{FE460185-D4AE-4375-BA71-CD1D7F2341F0}" dt="2026-04-16T22:11:55.941" v="4134" actId="26606"/>
+          <ac:cxnSpMkLst>
+            <pc:docMk/>
+            <pc:sldMk cId="3943359794" sldId="274"/>
+            <ac:cxnSpMk id="21" creationId="{DC36F877-5419-44C1-A2CD-376BDDDC3E41}"/>
+          </ac:cxnSpMkLst>
+        </pc:cxnChg>
+      </pc:sldChg>
+      <pc:sldChg chg="addSp modSp new mod modNotesTx">
+        <pc:chgData name="Tristan Plasse" userId="13c698b9-43c4-4271-b359-faaadca0774b" providerId="ADAL" clId="{FE460185-D4AE-4375-BA71-CD1D7F2341F0}" dt="2026-04-17T03:52:11.209" v="5817" actId="20577"/>
+        <pc:sldMkLst>
+          <pc:docMk/>
+          <pc:sldMk cId="3710197240" sldId="275"/>
+        </pc:sldMkLst>
+        <pc:spChg chg="mod">
+          <ac:chgData name="Tristan Plasse" userId="13c698b9-43c4-4271-b359-faaadca0774b" providerId="ADAL" clId="{FE460185-D4AE-4375-BA71-CD1D7F2341F0}" dt="2026-04-17T00:59:10.373" v="4380" actId="20577"/>
+          <ac:spMkLst>
+            <pc:docMk/>
+            <pc:sldMk cId="3710197240" sldId="275"/>
+            <ac:spMk id="2" creationId="{A4F1E310-7C7B-1E3D-DBA7-78328792D625}"/>
+          </ac:spMkLst>
+        </pc:spChg>
+        <pc:spChg chg="mod">
+          <ac:chgData name="Tristan Plasse" userId="13c698b9-43c4-4271-b359-faaadca0774b" providerId="ADAL" clId="{FE460185-D4AE-4375-BA71-CD1D7F2341F0}" dt="2026-04-17T01:03:11.754" v="4482" actId="2710"/>
+          <ac:spMkLst>
+            <pc:docMk/>
+            <pc:sldMk cId="3710197240" sldId="275"/>
+            <ac:spMk id="3" creationId="{EE1A390D-8519-2554-2768-18698B2C10FF}"/>
+          </ac:spMkLst>
+        </pc:spChg>
+        <pc:spChg chg="add mod">
+          <ac:chgData name="Tristan Plasse" userId="13c698b9-43c4-4271-b359-faaadca0774b" providerId="ADAL" clId="{FE460185-D4AE-4375-BA71-CD1D7F2341F0}" dt="2026-04-17T01:02:47.762" v="4481" actId="164"/>
+          <ac:spMkLst>
+            <pc:docMk/>
+            <pc:sldMk cId="3710197240" sldId="275"/>
+            <ac:spMk id="4" creationId="{769DBEF4-FBE0-6D7D-A4A1-31856EB49A5B}"/>
+          </ac:spMkLst>
+        </pc:spChg>
+        <pc:spChg chg="add mod">
+          <ac:chgData name="Tristan Plasse" userId="13c698b9-43c4-4271-b359-faaadca0774b" providerId="ADAL" clId="{FE460185-D4AE-4375-BA71-CD1D7F2341F0}" dt="2026-04-17T01:02:47.762" v="4481" actId="164"/>
+          <ac:spMkLst>
+            <pc:docMk/>
+            <pc:sldMk cId="3710197240" sldId="275"/>
+            <ac:spMk id="5" creationId="{584A445A-35A4-5CCD-3E0F-1132280B6EBE}"/>
+          </ac:spMkLst>
+        </pc:spChg>
+        <pc:spChg chg="add mod">
+          <ac:chgData name="Tristan Plasse" userId="13c698b9-43c4-4271-b359-faaadca0774b" providerId="ADAL" clId="{FE460185-D4AE-4375-BA71-CD1D7F2341F0}" dt="2026-04-17T01:02:47.762" v="4481" actId="164"/>
+          <ac:spMkLst>
+            <pc:docMk/>
+            <pc:sldMk cId="3710197240" sldId="275"/>
+            <ac:spMk id="6" creationId="{88AA4DF5-8C2D-2045-0ED6-5A771E6D2A10}"/>
+          </ac:spMkLst>
+        </pc:spChg>
+        <pc:grpChg chg="add mod">
+          <ac:chgData name="Tristan Plasse" userId="13c698b9-43c4-4271-b359-faaadca0774b" providerId="ADAL" clId="{FE460185-D4AE-4375-BA71-CD1D7F2341F0}" dt="2026-04-17T01:02:47.762" v="4481" actId="164"/>
+          <ac:grpSpMkLst>
+            <pc:docMk/>
+            <pc:sldMk cId="3710197240" sldId="275"/>
+            <ac:grpSpMk id="7" creationId="{31604140-0BE4-E83C-1948-7A6E95F7AEB4}"/>
+          </ac:grpSpMkLst>
+        </pc:grpChg>
+      </pc:sldChg>
+      <pc:sldChg chg="modSp new mod modNotesTx">
+        <pc:chgData name="Tristan Plasse" userId="13c698b9-43c4-4271-b359-faaadca0774b" providerId="ADAL" clId="{FE460185-D4AE-4375-BA71-CD1D7F2341F0}" dt="2026-04-17T03:52:44.575" v="5859" actId="20577"/>
+        <pc:sldMkLst>
+          <pc:docMk/>
+          <pc:sldMk cId="1164678962" sldId="276"/>
+        </pc:sldMkLst>
+        <pc:spChg chg="mod">
+          <ac:chgData name="Tristan Plasse" userId="13c698b9-43c4-4271-b359-faaadca0774b" providerId="ADAL" clId="{FE460185-D4AE-4375-BA71-CD1D7F2341F0}" dt="2026-04-17T01:14:04.552" v="4699" actId="20577"/>
+          <ac:spMkLst>
+            <pc:docMk/>
+            <pc:sldMk cId="1164678962" sldId="276"/>
+            <ac:spMk id="2" creationId="{DE69A1AE-572E-D5B4-03BD-F325D0A3E202}"/>
+          </ac:spMkLst>
+        </pc:spChg>
+        <pc:spChg chg="mod">
+          <ac:chgData name="Tristan Plasse" userId="13c698b9-43c4-4271-b359-faaadca0774b" providerId="ADAL" clId="{FE460185-D4AE-4375-BA71-CD1D7F2341F0}" dt="2026-04-17T01:14:19.003" v="4704" actId="20577"/>
+          <ac:spMkLst>
+            <pc:docMk/>
+            <pc:sldMk cId="1164678962" sldId="276"/>
+            <ac:spMk id="3" creationId="{FC01AAB4-81AB-D42D-04AB-96781CB6AC94}"/>
+          </ac:spMkLst>
+        </pc:spChg>
+      </pc:sldChg>
+      <pc:sldChg chg="addSp delSp modSp new mod setBg modNotesTx">
+        <pc:chgData name="Tristan Plasse" userId="13c698b9-43c4-4271-b359-faaadca0774b" providerId="ADAL" clId="{FE460185-D4AE-4375-BA71-CD1D7F2341F0}" dt="2026-04-17T03:52:23.461" v="5836" actId="20577"/>
+        <pc:sldMkLst>
+          <pc:docMk/>
+          <pc:sldMk cId="1439899674" sldId="277"/>
+        </pc:sldMkLst>
+        <pc:spChg chg="mod">
+          <ac:chgData name="Tristan Plasse" userId="13c698b9-43c4-4271-b359-faaadca0774b" providerId="ADAL" clId="{FE460185-D4AE-4375-BA71-CD1D7F2341F0}" dt="2026-04-17T01:22:58.783" v="4718" actId="26606"/>
+          <ac:spMkLst>
+            <pc:docMk/>
+            <pc:sldMk cId="1439899674" sldId="277"/>
+            <ac:spMk id="2" creationId="{94F7A99C-0ACF-5557-9578-B80FE0D75B77}"/>
+          </ac:spMkLst>
+        </pc:spChg>
+        <pc:spChg chg="del">
+          <ac:chgData name="Tristan Plasse" userId="13c698b9-43c4-4271-b359-faaadca0774b" providerId="ADAL" clId="{FE460185-D4AE-4375-BA71-CD1D7F2341F0}" dt="2026-04-17T01:22:54.237" v="4716"/>
+          <ac:spMkLst>
+            <pc:docMk/>
+            <pc:sldMk cId="1439899674" sldId="277"/>
+            <ac:spMk id="3" creationId="{F279EAF3-2A2A-BB55-CBFF-6FE1F581B414}"/>
+          </ac:spMkLst>
+        </pc:spChg>
+        <pc:spChg chg="add">
+          <ac:chgData name="Tristan Plasse" userId="13c698b9-43c4-4271-b359-faaadca0774b" providerId="ADAL" clId="{FE460185-D4AE-4375-BA71-CD1D7F2341F0}" dt="2026-04-17T01:22:58.783" v="4718" actId="26606"/>
+          <ac:spMkLst>
+            <pc:docMk/>
+            <pc:sldMk cId="1439899674" sldId="277"/>
+            <ac:spMk id="14" creationId="{33E93247-6229-44AB-A550-739E971E690B}"/>
+          </ac:spMkLst>
+        </pc:spChg>
+        <pc:picChg chg="add mod ord">
+          <ac:chgData name="Tristan Plasse" userId="13c698b9-43c4-4271-b359-faaadca0774b" providerId="ADAL" clId="{FE460185-D4AE-4375-BA71-CD1D7F2341F0}" dt="2026-04-17T01:22:58.783" v="4718" actId="26606"/>
+          <ac:picMkLst>
+            <pc:docMk/>
+            <pc:sldMk cId="1439899674" sldId="277"/>
+            <ac:picMk id="5" creationId="{DEB15709-306B-BF61-202F-0B24322B33AC}"/>
+          </ac:picMkLst>
+        </pc:picChg>
+        <pc:picChg chg="add del mod">
+          <ac:chgData name="Tristan Plasse" userId="13c698b9-43c4-4271-b359-faaadca0774b" providerId="ADAL" clId="{FE460185-D4AE-4375-BA71-CD1D7F2341F0}" dt="2026-04-17T01:23:54.536" v="4721" actId="478"/>
+          <ac:picMkLst>
+            <pc:docMk/>
+            <pc:sldMk cId="1439899674" sldId="277"/>
+            <ac:picMk id="7" creationId="{93FC3CF0-AD0C-8D8A-5F13-561363CD0342}"/>
+          </ac:picMkLst>
+        </pc:picChg>
+        <pc:picChg chg="add del mod">
+          <ac:chgData name="Tristan Plasse" userId="13c698b9-43c4-4271-b359-faaadca0774b" providerId="ADAL" clId="{FE460185-D4AE-4375-BA71-CD1D7F2341F0}" dt="2026-04-17T01:25:57.368" v="4728" actId="21"/>
+          <ac:picMkLst>
+            <pc:docMk/>
+            <pc:sldMk cId="1439899674" sldId="277"/>
+            <ac:picMk id="9" creationId="{CE99E6EA-6C50-A9AF-63F6-B30BF2E36593}"/>
+          </ac:picMkLst>
+        </pc:picChg>
+        <pc:cxnChg chg="add">
+          <ac:chgData name="Tristan Plasse" userId="13c698b9-43c4-4271-b359-faaadca0774b" providerId="ADAL" clId="{FE460185-D4AE-4375-BA71-CD1D7F2341F0}" dt="2026-04-17T01:22:58.783" v="4718" actId="26606"/>
+          <ac:cxnSpMkLst>
+            <pc:docMk/>
+            <pc:sldMk cId="1439899674" sldId="277"/>
+            <ac:cxnSpMk id="10" creationId="{F64F9B95-9045-48D2-B9F3-2927E98F54AA}"/>
+          </ac:cxnSpMkLst>
+        </pc:cxnChg>
+        <pc:cxnChg chg="add">
+          <ac:chgData name="Tristan Plasse" userId="13c698b9-43c4-4271-b359-faaadca0774b" providerId="ADAL" clId="{FE460185-D4AE-4375-BA71-CD1D7F2341F0}" dt="2026-04-17T01:22:58.783" v="4718" actId="26606"/>
+          <ac:cxnSpMkLst>
+            <pc:docMk/>
+            <pc:sldMk cId="1439899674" sldId="277"/>
+            <ac:cxnSpMk id="12" creationId="{085AA86F-6A4D-4BCB-A045-D992CDC2959B}"/>
+          </ac:cxnSpMkLst>
+        </pc:cxnChg>
+        <pc:cxnChg chg="add">
+          <ac:chgData name="Tristan Plasse" userId="13c698b9-43c4-4271-b359-faaadca0774b" providerId="ADAL" clId="{FE460185-D4AE-4375-BA71-CD1D7F2341F0}" dt="2026-04-17T01:22:58.783" v="4718" actId="26606"/>
+          <ac:cxnSpMkLst>
+            <pc:docMk/>
+            <pc:sldMk cId="1439899674" sldId="277"/>
+            <ac:cxnSpMk id="16" creationId="{EE2E603F-4A95-4FE8-BB06-211DFD75DBEF}"/>
+          </ac:cxnSpMkLst>
+        </pc:cxnChg>
+      </pc:sldChg>
+      <pc:sldChg chg="addSp delSp modSp new mod modNotesTx">
+        <pc:chgData name="Tristan Plasse" userId="13c698b9-43c4-4271-b359-faaadca0774b" providerId="ADAL" clId="{FE460185-D4AE-4375-BA71-CD1D7F2341F0}" dt="2026-04-17T03:52:28.934" v="5846" actId="20577"/>
+        <pc:sldMkLst>
+          <pc:docMk/>
+          <pc:sldMk cId="2449617363" sldId="278"/>
+        </pc:sldMkLst>
+        <pc:spChg chg="del">
+          <ac:chgData name="Tristan Plasse" userId="13c698b9-43c4-4271-b359-faaadca0774b" providerId="ADAL" clId="{FE460185-D4AE-4375-BA71-CD1D7F2341F0}" dt="2026-04-17T01:26:13.185" v="4734" actId="478"/>
+          <ac:spMkLst>
+            <pc:docMk/>
+            <pc:sldMk cId="2449617363" sldId="278"/>
+            <ac:spMk id="2" creationId="{E764F047-4C87-EFC0-5081-C3EBD8EDEF6C}"/>
+          </ac:spMkLst>
+        </pc:spChg>
+        <pc:spChg chg="add del mod">
+          <ac:chgData name="Tristan Plasse" userId="13c698b9-43c4-4271-b359-faaadca0774b" providerId="ADAL" clId="{FE460185-D4AE-4375-BA71-CD1D7F2341F0}" dt="2026-04-17T02:44:37.038" v="5491"/>
+          <ac:spMkLst>
+            <pc:docMk/>
+            <pc:sldMk cId="2449617363" sldId="278"/>
+            <ac:spMk id="3" creationId="{735A5396-163A-4614-7FC3-8135E8EC2D82}"/>
+          </ac:spMkLst>
+        </pc:spChg>
+        <pc:spChg chg="del">
+          <ac:chgData name="Tristan Plasse" userId="13c698b9-43c4-4271-b359-faaadca0774b" providerId="ADAL" clId="{FE460185-D4AE-4375-BA71-CD1D7F2341F0}" dt="2026-04-17T01:25:53.221" v="4727"/>
+          <ac:spMkLst>
+            <pc:docMk/>
+            <pc:sldMk cId="2449617363" sldId="278"/>
+            <ac:spMk id="3" creationId="{D7FB8DB0-7535-272B-41AF-7265B7F3A2D1}"/>
+          </ac:spMkLst>
+        </pc:spChg>
+        <pc:spChg chg="add mod">
+          <ac:chgData name="Tristan Plasse" userId="13c698b9-43c4-4271-b359-faaadca0774b" providerId="ADAL" clId="{FE460185-D4AE-4375-BA71-CD1D7F2341F0}" dt="2026-04-17T02:46:58.779" v="5560" actId="20577"/>
+          <ac:spMkLst>
+            <pc:docMk/>
+            <pc:sldMk cId="2449617363" sldId="278"/>
+            <ac:spMk id="8" creationId="{E86FE8AB-8CA2-26C6-1EA0-DD8874CA071A}"/>
+          </ac:spMkLst>
+        </pc:spChg>
+        <pc:picChg chg="add del mod ord">
+          <ac:chgData name="Tristan Plasse" userId="13c698b9-43c4-4271-b359-faaadca0774b" providerId="ADAL" clId="{FE460185-D4AE-4375-BA71-CD1D7F2341F0}" dt="2026-04-17T02:44:36.658" v="5489" actId="478"/>
+          <ac:picMkLst>
+            <pc:docMk/>
+            <pc:sldMk cId="2449617363" sldId="278"/>
+            <ac:picMk id="5" creationId="{2894EE87-C10F-C2AC-44DB-1A002CE45605}"/>
+          </ac:picMkLst>
+        </pc:picChg>
+        <pc:picChg chg="add mod ord">
+          <ac:chgData name="Tristan Plasse" userId="13c698b9-43c4-4271-b359-faaadca0774b" providerId="ADAL" clId="{FE460185-D4AE-4375-BA71-CD1D7F2341F0}" dt="2026-04-17T02:44:51.817" v="5495" actId="1076"/>
+          <ac:picMkLst>
+            <pc:docMk/>
+            <pc:sldMk cId="2449617363" sldId="278"/>
+            <ac:picMk id="6" creationId="{9ED18B4D-9AA2-BAA4-64B2-A725FA232668}"/>
+          </ac:picMkLst>
+        </pc:picChg>
+        <pc:picChg chg="add mod modCrop">
+          <ac:chgData name="Tristan Plasse" userId="13c698b9-43c4-4271-b359-faaadca0774b" providerId="ADAL" clId="{FE460185-D4AE-4375-BA71-CD1D7F2341F0}" dt="2026-04-17T02:45:56.147" v="5503" actId="1076"/>
+          <ac:picMkLst>
+            <pc:docMk/>
+            <pc:sldMk cId="2449617363" sldId="278"/>
+            <ac:picMk id="7" creationId="{F7961088-DAF3-40D1-2014-1BE6DA6821BF}"/>
+          </ac:picMkLst>
+        </pc:picChg>
+      </pc:sldChg>
+      <pc:sldChg chg="addSp delSp modSp new mod modNotesTx">
+        <pc:chgData name="Tristan Plasse" userId="13c698b9-43c4-4271-b359-faaadca0774b" providerId="ADAL" clId="{FE460185-D4AE-4375-BA71-CD1D7F2341F0}" dt="2026-04-17T03:52:26.395" v="5841" actId="20577"/>
+        <pc:sldMkLst>
+          <pc:docMk/>
+          <pc:sldMk cId="422633496" sldId="279"/>
+        </pc:sldMkLst>
+        <pc:spChg chg="del">
+          <ac:chgData name="Tristan Plasse" userId="13c698b9-43c4-4271-b359-faaadca0774b" providerId="ADAL" clId="{FE460185-D4AE-4375-BA71-CD1D7F2341F0}" dt="2026-04-17T01:26:03.213" v="4730" actId="478"/>
+          <ac:spMkLst>
+            <pc:docMk/>
+            <pc:sldMk cId="422633496" sldId="279"/>
+            <ac:spMk id="2" creationId="{2FA227F2-D8A4-A7C2-5991-3DCDFD82DBCF}"/>
+          </ac:spMkLst>
+        </pc:spChg>
+        <pc:spChg chg="del">
+          <ac:chgData name="Tristan Plasse" userId="13c698b9-43c4-4271-b359-faaadca0774b" providerId="ADAL" clId="{FE460185-D4AE-4375-BA71-CD1D7F2341F0}" dt="2026-04-17T01:26:05.148" v="4731" actId="478"/>
+          <ac:spMkLst>
+            <pc:docMk/>
+            <pc:sldMk cId="422633496" sldId="279"/>
+            <ac:spMk id="3" creationId="{13AA5119-EF1F-9E55-8D24-F3DA2F70A6BD}"/>
+          </ac:spMkLst>
+        </pc:spChg>
+        <pc:picChg chg="add mod">
+          <ac:chgData name="Tristan Plasse" userId="13c698b9-43c4-4271-b359-faaadca0774b" providerId="ADAL" clId="{FE460185-D4AE-4375-BA71-CD1D7F2341F0}" dt="2026-04-17T01:26:07.372" v="4733" actId="1076"/>
+          <ac:picMkLst>
+            <pc:docMk/>
+            <pc:sldMk cId="422633496" sldId="279"/>
+            <ac:picMk id="9" creationId="{CE99E6EA-6C50-A9AF-63F6-B30BF2E36593}"/>
+          </ac:picMkLst>
+        </pc:picChg>
+      </pc:sldChg>
+      <pc:sldChg chg="modSp new mod modNotesTx">
+        <pc:chgData name="Tristan Plasse" userId="13c698b9-43c4-4271-b359-faaadca0774b" providerId="ADAL" clId="{FE460185-D4AE-4375-BA71-CD1D7F2341F0}" dt="2026-04-17T03:52:32.431" v="5851" actId="20577"/>
+        <pc:sldMkLst>
+          <pc:docMk/>
+          <pc:sldMk cId="901628721" sldId="280"/>
+        </pc:sldMkLst>
+        <pc:spChg chg="mod">
+          <ac:chgData name="Tristan Plasse" userId="13c698b9-43c4-4271-b359-faaadca0774b" providerId="ADAL" clId="{FE460185-D4AE-4375-BA71-CD1D7F2341F0}" dt="2026-04-17T01:26:26.896" v="4747" actId="20577"/>
+          <ac:spMkLst>
+            <pc:docMk/>
+            <pc:sldMk cId="901628721" sldId="280"/>
+            <ac:spMk id="2" creationId="{AFD15BD0-D23D-BCDB-DC4F-EC9E34FD8E77}"/>
+          </ac:spMkLst>
+        </pc:spChg>
+        <pc:spChg chg="mod">
+          <ac:chgData name="Tristan Plasse" userId="13c698b9-43c4-4271-b359-faaadca0774b" providerId="ADAL" clId="{FE460185-D4AE-4375-BA71-CD1D7F2341F0}" dt="2026-04-17T03:17:15.395" v="5595" actId="20577"/>
+          <ac:spMkLst>
+            <pc:docMk/>
+            <pc:sldMk cId="901628721" sldId="280"/>
+            <ac:spMk id="3" creationId="{7FDDC518-1F1F-76F1-2545-8D01AE3B32C4}"/>
+          </ac:spMkLst>
+        </pc:spChg>
+      </pc:sldChg>
+      <pc:sldChg chg="addSp modSp new mod setBg modNotesTx">
+        <pc:chgData name="Tristan Plasse" userId="13c698b9-43c4-4271-b359-faaadca0774b" providerId="ADAL" clId="{FE460185-D4AE-4375-BA71-CD1D7F2341F0}" dt="2026-04-17T03:52:35.687" v="5858" actId="20577"/>
+        <pc:sldMkLst>
+          <pc:docMk/>
+          <pc:sldMk cId="1209728823" sldId="281"/>
+        </pc:sldMkLst>
+        <pc:spChg chg="mod">
+          <ac:chgData name="Tristan Plasse" userId="13c698b9-43c4-4271-b359-faaadca0774b" providerId="ADAL" clId="{FE460185-D4AE-4375-BA71-CD1D7F2341F0}" dt="2026-04-17T01:29:12.692" v="5030" actId="26606"/>
+          <ac:spMkLst>
+            <pc:docMk/>
+            <pc:sldMk cId="1209728823" sldId="281"/>
+            <ac:spMk id="2" creationId="{A89A0B66-12A9-A560-B2C3-D5DE68D00757}"/>
+          </ac:spMkLst>
+        </pc:spChg>
+        <pc:spChg chg="mod ord">
+          <ac:chgData name="Tristan Plasse" userId="13c698b9-43c4-4271-b359-faaadca0774b" providerId="ADAL" clId="{FE460185-D4AE-4375-BA71-CD1D7F2341F0}" dt="2026-04-17T01:29:12.692" v="5030" actId="26606"/>
+          <ac:spMkLst>
+            <pc:docMk/>
+            <pc:sldMk cId="1209728823" sldId="281"/>
+            <ac:spMk id="3" creationId="{D5F08C3C-2B07-D167-483B-592FFD9479FB}"/>
+          </ac:spMkLst>
+        </pc:spChg>
+        <pc:spChg chg="add mod">
+          <ac:chgData name="Tristan Plasse" userId="13c698b9-43c4-4271-b359-faaadca0774b" providerId="ADAL" clId="{FE460185-D4AE-4375-BA71-CD1D7F2341F0}" dt="2026-04-17T01:29:55.712" v="5038" actId="14100"/>
+          <ac:spMkLst>
+            <pc:docMk/>
+            <pc:sldMk cId="1209728823" sldId="281"/>
+            <ac:spMk id="4" creationId="{4908DAB4-9378-641C-7822-F8FFCB3F9F8A}"/>
+          </ac:spMkLst>
+        </pc:spChg>
+        <pc:spChg chg="add">
+          <ac:chgData name="Tristan Plasse" userId="13c698b9-43c4-4271-b359-faaadca0774b" providerId="ADAL" clId="{FE460185-D4AE-4375-BA71-CD1D7F2341F0}" dt="2026-04-17T01:29:12.692" v="5030" actId="26606"/>
+          <ac:spMkLst>
+            <pc:docMk/>
+            <pc:sldMk cId="1209728823" sldId="281"/>
+            <ac:spMk id="2055" creationId="{E49D7415-2F11-44C2-B6AA-13A25B6814B9}"/>
+          </ac:spMkLst>
+        </pc:spChg>
+        <pc:picChg chg="add mod">
+          <ac:chgData name="Tristan Plasse" userId="13c698b9-43c4-4271-b359-faaadca0774b" providerId="ADAL" clId="{FE460185-D4AE-4375-BA71-CD1D7F2341F0}" dt="2026-04-17T01:29:21.933" v="5031" actId="18131"/>
+          <ac:picMkLst>
+            <pc:docMk/>
+            <pc:sldMk cId="1209728823" sldId="281"/>
+            <ac:picMk id="2050" creationId="{6E929EB8-0E77-8D30-C757-71AEE670B488}"/>
+          </ac:picMkLst>
+        </pc:picChg>
+        <pc:cxnChg chg="add">
+          <ac:chgData name="Tristan Plasse" userId="13c698b9-43c4-4271-b359-faaadca0774b" providerId="ADAL" clId="{FE460185-D4AE-4375-BA71-CD1D7F2341F0}" dt="2026-04-17T01:29:12.692" v="5030" actId="26606"/>
+          <ac:cxnSpMkLst>
+            <pc:docMk/>
+            <pc:sldMk cId="1209728823" sldId="281"/>
+            <ac:cxnSpMk id="2057" creationId="{8E0104E4-99BC-494F-8342-F250828E574F}"/>
+          </ac:cxnSpMkLst>
+        </pc:cxnChg>
+      </pc:sldChg>
+      <pc:sldChg chg="addSp delSp modSp new mod setBg setClrOvrMap">
+        <pc:chgData name="Tristan Plasse" userId="13c698b9-43c4-4271-b359-faaadca0774b" providerId="ADAL" clId="{FE460185-D4AE-4375-BA71-CD1D7F2341F0}" dt="2026-04-17T01:31:13.276" v="5059" actId="1076"/>
+        <pc:sldMkLst>
+          <pc:docMk/>
+          <pc:sldMk cId="784584029" sldId="282"/>
+        </pc:sldMkLst>
+        <pc:spChg chg="mod ord">
+          <ac:chgData name="Tristan Plasse" userId="13c698b9-43c4-4271-b359-faaadca0774b" providerId="ADAL" clId="{FE460185-D4AE-4375-BA71-CD1D7F2341F0}" dt="2026-04-17T01:30:36.101" v="5052" actId="26606"/>
+          <ac:spMkLst>
+            <pc:docMk/>
+            <pc:sldMk cId="784584029" sldId="282"/>
+            <ac:spMk id="2" creationId="{D1DA8DF0-027D-CBFA-F9E4-EA0F931579EF}"/>
+          </ac:spMkLst>
+        </pc:spChg>
+        <pc:spChg chg="del">
+          <ac:chgData name="Tristan Plasse" userId="13c698b9-43c4-4271-b359-faaadca0774b" providerId="ADAL" clId="{FE460185-D4AE-4375-BA71-CD1D7F2341F0}" dt="2026-04-17T01:30:12.348" v="5047" actId="478"/>
+          <ac:spMkLst>
+            <pc:docMk/>
+            <pc:sldMk cId="784584029" sldId="282"/>
+            <ac:spMk id="3" creationId="{275D4D4A-9F9A-E165-9931-AE7EC6F9609B}"/>
+          </ac:spMkLst>
+        </pc:spChg>
+        <pc:spChg chg="add mod">
+          <ac:chgData name="Tristan Plasse" userId="13c698b9-43c4-4271-b359-faaadca0774b" providerId="ADAL" clId="{FE460185-D4AE-4375-BA71-CD1D7F2341F0}" dt="2026-04-17T01:31:13.276" v="5059" actId="1076"/>
+          <ac:spMkLst>
+            <pc:docMk/>
+            <pc:sldMk cId="784584029" sldId="282"/>
+            <ac:spMk id="4" creationId="{80693467-78F2-1B86-B867-3754098C5644}"/>
+          </ac:spMkLst>
+        </pc:spChg>
+        <pc:spChg chg="add">
+          <ac:chgData name="Tristan Plasse" userId="13c698b9-43c4-4271-b359-faaadca0774b" providerId="ADAL" clId="{FE460185-D4AE-4375-BA71-CD1D7F2341F0}" dt="2026-04-17T01:30:36.101" v="5052" actId="26606"/>
+          <ac:spMkLst>
+            <pc:docMk/>
+            <pc:sldMk cId="784584029" sldId="282"/>
+            <ac:spMk id="3083" creationId="{33E93247-6229-44AB-A550-739E971E690B}"/>
+          </ac:spMkLst>
+        </pc:spChg>
+        <pc:spChg chg="add">
+          <ac:chgData name="Tristan Plasse" userId="13c698b9-43c4-4271-b359-faaadca0774b" providerId="ADAL" clId="{FE460185-D4AE-4375-BA71-CD1D7F2341F0}" dt="2026-04-17T01:30:36.101" v="5052" actId="26606"/>
+          <ac:spMkLst>
+            <pc:docMk/>
+            <pc:sldMk cId="784584029" sldId="282"/>
+            <ac:spMk id="3085" creationId="{6BB6B482-ACCA-4938-8AEA-49D525C17221}"/>
+          </ac:spMkLst>
+        </pc:spChg>
+        <pc:picChg chg="add mod">
+          <ac:chgData name="Tristan Plasse" userId="13c698b9-43c4-4271-b359-faaadca0774b" providerId="ADAL" clId="{FE460185-D4AE-4375-BA71-CD1D7F2341F0}" dt="2026-04-17T01:30:42.128" v="5053" actId="18131"/>
+          <ac:picMkLst>
+            <pc:docMk/>
+            <pc:sldMk cId="784584029" sldId="282"/>
+            <ac:picMk id="3074" creationId="{4C00A1DA-6ED6-C7B3-FAC3-90C08EBD5B83}"/>
+          </ac:picMkLst>
+        </pc:picChg>
+        <pc:cxnChg chg="add">
+          <ac:chgData name="Tristan Plasse" userId="13c698b9-43c4-4271-b359-faaadca0774b" providerId="ADAL" clId="{FE460185-D4AE-4375-BA71-CD1D7F2341F0}" dt="2026-04-17T01:30:36.101" v="5052" actId="26606"/>
+          <ac:cxnSpMkLst>
+            <pc:docMk/>
+            <pc:sldMk cId="784584029" sldId="282"/>
+            <ac:cxnSpMk id="3079" creationId="{F64F9B95-9045-48D2-B9F3-2927E98F54AA}"/>
+          </ac:cxnSpMkLst>
+        </pc:cxnChg>
+        <pc:cxnChg chg="add">
+          <ac:chgData name="Tristan Plasse" userId="13c698b9-43c4-4271-b359-faaadca0774b" providerId="ADAL" clId="{FE460185-D4AE-4375-BA71-CD1D7F2341F0}" dt="2026-04-17T01:30:36.101" v="5052" actId="26606"/>
+          <ac:cxnSpMkLst>
+            <pc:docMk/>
+            <pc:sldMk cId="784584029" sldId="282"/>
+            <ac:cxnSpMk id="3081" creationId="{085AA86F-6A4D-4BCB-A045-D992CDC2959B}"/>
+          </ac:cxnSpMkLst>
+        </pc:cxnChg>
+        <pc:cxnChg chg="add">
+          <ac:chgData name="Tristan Plasse" userId="13c698b9-43c4-4271-b359-faaadca0774b" providerId="ADAL" clId="{FE460185-D4AE-4375-BA71-CD1D7F2341F0}" dt="2026-04-17T01:30:36.101" v="5052" actId="26606"/>
+          <ac:cxnSpMkLst>
+            <pc:docMk/>
+            <pc:sldMk cId="784584029" sldId="282"/>
+            <ac:cxnSpMk id="3087" creationId="{EE2E603F-4A95-4FE8-BB06-211DFD75DBEF}"/>
+          </ac:cxnSpMkLst>
+        </pc:cxnChg>
+      </pc:sldChg>
+      <pc:sldChg chg="modSp new mod">
+        <pc:chgData name="Tristan Plasse" userId="13c698b9-43c4-4271-b359-faaadca0774b" providerId="ADAL" clId="{FE460185-D4AE-4375-BA71-CD1D7F2341F0}" dt="2026-04-17T02:26:58.645" v="5086" actId="115"/>
+        <pc:sldMkLst>
+          <pc:docMk/>
+          <pc:sldMk cId="3557562823" sldId="283"/>
+        </pc:sldMkLst>
+        <pc:spChg chg="mod">
+          <ac:chgData name="Tristan Plasse" userId="13c698b9-43c4-4271-b359-faaadca0774b" providerId="ADAL" clId="{FE460185-D4AE-4375-BA71-CD1D7F2341F0}" dt="2026-04-17T02:25:39.922" v="5073" actId="20577"/>
+          <ac:spMkLst>
+            <pc:docMk/>
+            <pc:sldMk cId="3557562823" sldId="283"/>
+            <ac:spMk id="2" creationId="{2755F7A0-20BB-EF74-1658-92294AAB1D89}"/>
+          </ac:spMkLst>
+        </pc:spChg>
+        <pc:spChg chg="mod">
+          <ac:chgData name="Tristan Plasse" userId="13c698b9-43c4-4271-b359-faaadca0774b" providerId="ADAL" clId="{FE460185-D4AE-4375-BA71-CD1D7F2341F0}" dt="2026-04-17T02:26:58.645" v="5086" actId="115"/>
+          <ac:spMkLst>
+            <pc:docMk/>
+            <pc:sldMk cId="3557562823" sldId="283"/>
+            <ac:spMk id="3" creationId="{14515BA2-F5BE-2C2A-D48B-418406D8001B}"/>
+          </ac:spMkLst>
+        </pc:spChg>
+      </pc:sldChg>
+      <pc:sldChg chg="modSp add mod ord modNotesTx">
+        <pc:chgData name="Tristan Plasse" userId="13c698b9-43c4-4271-b359-faaadca0774b" providerId="ADAL" clId="{FE460185-D4AE-4375-BA71-CD1D7F2341F0}" dt="2026-04-17T03:51:58.108" v="5797" actId="20577"/>
+        <pc:sldMkLst>
+          <pc:docMk/>
+          <pc:sldMk cId="2393943690" sldId="284"/>
+        </pc:sldMkLst>
+        <pc:spChg chg="mod">
+          <ac:chgData name="Tristan Plasse" userId="13c698b9-43c4-4271-b359-faaadca0774b" providerId="ADAL" clId="{FE460185-D4AE-4375-BA71-CD1D7F2341F0}" dt="2026-04-17T03:35:32.830" v="5673" actId="20577"/>
+          <ac:spMkLst>
+            <pc:docMk/>
+            <pc:sldMk cId="2393943690" sldId="284"/>
+            <ac:spMk id="2" creationId="{17A7EB5A-FA1F-F440-F699-BDAE13D981A1}"/>
+          </ac:spMkLst>
+        </pc:spChg>
+      </pc:sldChg>
+      <pc:sldMasterChg chg="add addSldLayout">
+        <pc:chgData name="Tristan Plasse" userId="13c698b9-43c4-4271-b359-faaadca0774b" providerId="ADAL" clId="{FE460185-D4AE-4375-BA71-CD1D7F2341F0}" dt="2026-04-15T20:11:02.110" v="50" actId="26606"/>
+        <pc:sldMasterMkLst>
+          <pc:docMk/>
+          <pc:sldMasterMk cId="2367361008" sldId="2147483715"/>
+        </pc:sldMasterMkLst>
+        <pc:sldLayoutChg chg="add">
+          <pc:chgData name="Tristan Plasse" userId="13c698b9-43c4-4271-b359-faaadca0774b" providerId="ADAL" clId="{FE460185-D4AE-4375-BA71-CD1D7F2341F0}" dt="2026-04-15T20:11:02.110" v="50" actId="26606"/>
+          <pc:sldLayoutMkLst>
+            <pc:docMk/>
+            <pc:sldMasterMk cId="2367361008" sldId="2147483715"/>
+            <pc:sldLayoutMk cId="2713428249" sldId="2147483704"/>
+          </pc:sldLayoutMkLst>
+        </pc:sldLayoutChg>
+        <pc:sldLayoutChg chg="add">
+          <pc:chgData name="Tristan Plasse" userId="13c698b9-43c4-4271-b359-faaadca0774b" providerId="ADAL" clId="{FE460185-D4AE-4375-BA71-CD1D7F2341F0}" dt="2026-04-15T20:11:02.110" v="50" actId="26606"/>
+          <pc:sldLayoutMkLst>
+            <pc:docMk/>
+            <pc:sldMasterMk cId="2367361008" sldId="2147483715"/>
+            <pc:sldLayoutMk cId="1283618248" sldId="2147483705"/>
+          </pc:sldLayoutMkLst>
+        </pc:sldLayoutChg>
+        <pc:sldLayoutChg chg="add">
+          <pc:chgData name="Tristan Plasse" userId="13c698b9-43c4-4271-b359-faaadca0774b" providerId="ADAL" clId="{FE460185-D4AE-4375-BA71-CD1D7F2341F0}" dt="2026-04-15T20:11:02.110" v="50" actId="26606"/>
+          <pc:sldLayoutMkLst>
+            <pc:docMk/>
+            <pc:sldMasterMk cId="2367361008" sldId="2147483715"/>
+            <pc:sldLayoutMk cId="3588553032" sldId="2147483706"/>
+          </pc:sldLayoutMkLst>
+        </pc:sldLayoutChg>
+        <pc:sldLayoutChg chg="add">
+          <pc:chgData name="Tristan Plasse" userId="13c698b9-43c4-4271-b359-faaadca0774b" providerId="ADAL" clId="{FE460185-D4AE-4375-BA71-CD1D7F2341F0}" dt="2026-04-15T20:11:02.110" v="50" actId="26606"/>
+          <pc:sldLayoutMkLst>
+            <pc:docMk/>
+            <pc:sldMasterMk cId="2367361008" sldId="2147483715"/>
+            <pc:sldLayoutMk cId="4029147812" sldId="2147483707"/>
+          </pc:sldLayoutMkLst>
+        </pc:sldLayoutChg>
+        <pc:sldLayoutChg chg="add">
+          <pc:chgData name="Tristan Plasse" userId="13c698b9-43c4-4271-b359-faaadca0774b" providerId="ADAL" clId="{FE460185-D4AE-4375-BA71-CD1D7F2341F0}" dt="2026-04-15T20:11:02.110" v="50" actId="26606"/>
+          <pc:sldLayoutMkLst>
+            <pc:docMk/>
+            <pc:sldMasterMk cId="2367361008" sldId="2147483715"/>
+            <pc:sldLayoutMk cId="2925132312" sldId="2147483708"/>
+          </pc:sldLayoutMkLst>
+        </pc:sldLayoutChg>
+        <pc:sldLayoutChg chg="add">
+          <pc:chgData name="Tristan Plasse" userId="13c698b9-43c4-4271-b359-faaadca0774b" providerId="ADAL" clId="{FE460185-D4AE-4375-BA71-CD1D7F2341F0}" dt="2026-04-15T20:11:02.110" v="50" actId="26606"/>
+          <pc:sldLayoutMkLst>
+            <pc:docMk/>
+            <pc:sldMasterMk cId="2367361008" sldId="2147483715"/>
+            <pc:sldLayoutMk cId="842180291" sldId="2147483709"/>
+          </pc:sldLayoutMkLst>
+        </pc:sldLayoutChg>
+        <pc:sldLayoutChg chg="add">
+          <pc:chgData name="Tristan Plasse" userId="13c698b9-43c4-4271-b359-faaadca0774b" providerId="ADAL" clId="{FE460185-D4AE-4375-BA71-CD1D7F2341F0}" dt="2026-04-15T20:11:02.110" v="50" actId="26606"/>
+          <pc:sldLayoutMkLst>
+            <pc:docMk/>
+            <pc:sldMasterMk cId="2367361008" sldId="2147483715"/>
+            <pc:sldLayoutMk cId="650174944" sldId="2147483710"/>
+          </pc:sldLayoutMkLst>
+        </pc:sldLayoutChg>
+        <pc:sldLayoutChg chg="add">
+          <pc:chgData name="Tristan Plasse" userId="13c698b9-43c4-4271-b359-faaadca0774b" providerId="ADAL" clId="{FE460185-D4AE-4375-BA71-CD1D7F2341F0}" dt="2026-04-15T20:11:02.110" v="50" actId="26606"/>
+          <pc:sldLayoutMkLst>
+            <pc:docMk/>
+            <pc:sldMasterMk cId="2367361008" sldId="2147483715"/>
+            <pc:sldLayoutMk cId="182539644" sldId="2147483711"/>
+          </pc:sldLayoutMkLst>
+        </pc:sldLayoutChg>
+        <pc:sldLayoutChg chg="add">
+          <pc:chgData name="Tristan Plasse" userId="13c698b9-43c4-4271-b359-faaadca0774b" providerId="ADAL" clId="{FE460185-D4AE-4375-BA71-CD1D7F2341F0}" dt="2026-04-15T20:11:02.110" v="50" actId="26606"/>
+          <pc:sldLayoutMkLst>
+            <pc:docMk/>
+            <pc:sldMasterMk cId="2367361008" sldId="2147483715"/>
+            <pc:sldLayoutMk cId="13408493" sldId="2147483712"/>
+          </pc:sldLayoutMkLst>
+        </pc:sldLayoutChg>
+        <pc:sldLayoutChg chg="add">
+          <pc:chgData name="Tristan Plasse" userId="13c698b9-43c4-4271-b359-faaadca0774b" providerId="ADAL" clId="{FE460185-D4AE-4375-BA71-CD1D7F2341F0}" dt="2026-04-15T20:11:02.110" v="50" actId="26606"/>
+          <pc:sldLayoutMkLst>
+            <pc:docMk/>
+            <pc:sldMasterMk cId="2367361008" sldId="2147483715"/>
+            <pc:sldLayoutMk cId="2240675757" sldId="2147483713"/>
+          </pc:sldLayoutMkLst>
+        </pc:sldLayoutChg>
+        <pc:sldLayoutChg chg="add">
+          <pc:chgData name="Tristan Plasse" userId="13c698b9-43c4-4271-b359-faaadca0774b" providerId="ADAL" clId="{FE460185-D4AE-4375-BA71-CD1D7F2341F0}" dt="2026-04-15T20:11:02.110" v="50" actId="26606"/>
+          <pc:sldLayoutMkLst>
+            <pc:docMk/>
+            <pc:sldMasterMk cId="2367361008" sldId="2147483715"/>
+            <pc:sldLayoutMk cId="2875551220" sldId="2147483714"/>
+          </pc:sldLayoutMkLst>
+        </pc:sldLayoutChg>
+      </pc:sldMasterChg>
     </pc:docChg>
   </pc:docChgLst>
 </pc:chgInfo>
@@ -3739,7 +3759,7 @@
   <dgm:whole/>
   <dgm:extLst>
     <a:ext uri="http://schemas.microsoft.com/office/drawing/2008/diagram">
-      <dsp:dataModelExt xmlns:dsp="http://schemas.microsoft.com/office/drawing/2008/diagram" relId="rId6" minVer="http://schemas.openxmlformats.org/drawingml/2006/diagram"/>
+      <dsp:dataModelExt xmlns:dsp="http://schemas.microsoft.com/office/drawing/2008/diagram" relId="rId7" minVer="http://schemas.openxmlformats.org/drawingml/2006/diagram"/>
     </a:ext>
   </dgm:extLst>
 </dgm:dataModel>
@@ -3978,7 +3998,7 @@
   <dgm:whole/>
   <dgm:extLst>
     <a:ext uri="http://schemas.microsoft.com/office/drawing/2008/diagram">
-      <dsp:dataModelExt xmlns:dsp="http://schemas.microsoft.com/office/drawing/2008/diagram" relId="rId6" minVer="http://schemas.openxmlformats.org/drawingml/2006/diagram"/>
+      <dsp:dataModelExt xmlns:dsp="http://schemas.microsoft.com/office/drawing/2008/diagram" relId="rId7" minVer="http://schemas.openxmlformats.org/drawingml/2006/diagram"/>
     </a:ext>
   </dgm:extLst>
 </dgm:dataModel>
@@ -8905,7 +8925,7 @@
           <a:p>
             <a:fld id="{EA5809C9-D391-499D-8A4B-F46E79386DAE}" type="slidenum">
               <a:rPr lang="fr-CA" smtClean="0"/>
-              <a:t>‹N°›</a:t>
+              <a:t>‹n°›</a:t>
             </a:fld>
             <a:endParaRPr lang="fr-CA"/>
           </a:p>
@@ -9060,7 +9080,7 @@
           <a:p>
             <a:r>
               <a:rPr lang="fr-CA"/>
-              <a:t>Parler du critère du COSEPAC avec les analyses de viabilité pour 100 ans</a:t>
+              <a:t>Tristan</a:t>
             </a:r>
           </a:p>
         </p:txBody>
@@ -9082,7 +9102,7 @@
           <a:p>
             <a:fld id="{EA5809C9-D391-499D-8A4B-F46E79386DAE}" type="slidenum">
               <a:rPr lang="fr-CA" smtClean="0"/>
-              <a:t>7</a:t>
+              <a:t>1</a:t>
             </a:fld>
             <a:endParaRPr lang="fr-CA"/>
           </a:p>
@@ -9091,7 +9111,921 @@
     </p:spTree>
     <p:extLst>
       <p:ext uri="{BB962C8B-B14F-4D97-AF65-F5344CB8AC3E}">
-        <p14:creationId xmlns:p14="http://schemas.microsoft.com/office/powerpoint/2010/main" val="2583923570"/>
+        <p14:creationId xmlns:p14="http://schemas.microsoft.com/office/powerpoint/2010/main" val="3395011462"/>
+      </p:ext>
+    </p:extLst>
+  </p:cSld>
+  <p:clrMapOvr>
+    <a:masterClrMapping/>
+  </p:clrMapOvr>
+</p:notes>
+</file>
+
+<file path=ppt/notesSlides/notesSlide10.xml><?xml version="1.0" encoding="utf-8"?>
+<p:notes xmlns:a="http://schemas.openxmlformats.org/drawingml/2006/main" xmlns:r="http://schemas.openxmlformats.org/officeDocument/2006/relationships" xmlns:p="http://schemas.openxmlformats.org/presentationml/2006/main">
+  <p:cSld>
+    <p:spTree>
+      <p:nvGrpSpPr>
+        <p:cNvPr id="1" name=""/>
+        <p:cNvGrpSpPr/>
+        <p:nvPr/>
+      </p:nvGrpSpPr>
+      <p:grpSpPr>
+        <a:xfrm>
+          <a:off x="0" y="0"/>
+          <a:ext cx="0" cy="0"/>
+          <a:chOff x="0" y="0"/>
+          <a:chExt cx="0" cy="0"/>
+        </a:xfrm>
+      </p:grpSpPr>
+      <p:sp>
+        <p:nvSpPr>
+          <p:cNvPr id="2" name="Espace réservé de l'image des diapositives 1"/>
+          <p:cNvSpPr>
+            <a:spLocks noGrp="1" noRot="1" noChangeAspect="1"/>
+          </p:cNvSpPr>
+          <p:nvPr>
+            <p:ph type="sldImg"/>
+          </p:nvPr>
+        </p:nvSpPr>
+        <p:spPr/>
+      </p:sp>
+      <p:sp>
+        <p:nvSpPr>
+          <p:cNvPr id="3" name="Espace réservé des notes 2"/>
+          <p:cNvSpPr>
+            <a:spLocks noGrp="1"/>
+          </p:cNvSpPr>
+          <p:nvPr>
+            <p:ph type="body" idx="1"/>
+          </p:nvPr>
+        </p:nvSpPr>
+        <p:spPr/>
+        <p:txBody>
+          <a:bodyPr/>
+          <a:lstStyle/>
+          <a:p>
+            <a:r>
+              <a:rPr lang="fr-CA"/>
+              <a:t>Tristan</a:t>
+            </a:r>
+          </a:p>
+        </p:txBody>
+      </p:sp>
+      <p:sp>
+        <p:nvSpPr>
+          <p:cNvPr id="4" name="Espace réservé du numéro de diapositive 3"/>
+          <p:cNvSpPr>
+            <a:spLocks noGrp="1"/>
+          </p:cNvSpPr>
+          <p:nvPr>
+            <p:ph type="sldNum" sz="quarter" idx="5"/>
+          </p:nvPr>
+        </p:nvSpPr>
+        <p:spPr/>
+        <p:txBody>
+          <a:bodyPr/>
+          <a:lstStyle/>
+          <a:p>
+            <a:fld id="{EA5809C9-D391-499D-8A4B-F46E79386DAE}" type="slidenum">
+              <a:rPr lang="fr-CA" smtClean="0"/>
+              <a:t>10</a:t>
+            </a:fld>
+            <a:endParaRPr lang="fr-CA"/>
+          </a:p>
+        </p:txBody>
+      </p:sp>
+    </p:spTree>
+    <p:extLst>
+      <p:ext uri="{BB962C8B-B14F-4D97-AF65-F5344CB8AC3E}">
+        <p14:creationId xmlns:p14="http://schemas.microsoft.com/office/powerpoint/2010/main" val="3146265343"/>
+      </p:ext>
+    </p:extLst>
+  </p:cSld>
+  <p:clrMapOvr>
+    <a:masterClrMapping/>
+  </p:clrMapOvr>
+</p:notes>
+</file>
+
+<file path=ppt/notesSlides/notesSlide11.xml><?xml version="1.0" encoding="utf-8"?>
+<p:notes xmlns:a="http://schemas.openxmlformats.org/drawingml/2006/main" xmlns:r="http://schemas.openxmlformats.org/officeDocument/2006/relationships" xmlns:p="http://schemas.openxmlformats.org/presentationml/2006/main">
+  <p:cSld>
+    <p:spTree>
+      <p:nvGrpSpPr>
+        <p:cNvPr id="1" name=""/>
+        <p:cNvGrpSpPr/>
+        <p:nvPr/>
+      </p:nvGrpSpPr>
+      <p:grpSpPr>
+        <a:xfrm>
+          <a:off x="0" y="0"/>
+          <a:ext cx="0" cy="0"/>
+          <a:chOff x="0" y="0"/>
+          <a:chExt cx="0" cy="0"/>
+        </a:xfrm>
+      </p:grpSpPr>
+      <p:sp>
+        <p:nvSpPr>
+          <p:cNvPr id="2" name="Espace réservé de l'image des diapositives 1"/>
+          <p:cNvSpPr>
+            <a:spLocks noGrp="1" noRot="1" noChangeAspect="1"/>
+          </p:cNvSpPr>
+          <p:nvPr>
+            <p:ph type="sldImg"/>
+          </p:nvPr>
+        </p:nvSpPr>
+        <p:spPr/>
+      </p:sp>
+      <p:sp>
+        <p:nvSpPr>
+          <p:cNvPr id="3" name="Espace réservé des notes 2"/>
+          <p:cNvSpPr>
+            <a:spLocks noGrp="1"/>
+          </p:cNvSpPr>
+          <p:nvPr>
+            <p:ph type="body" idx="1"/>
+          </p:nvPr>
+        </p:nvSpPr>
+        <p:spPr/>
+        <p:txBody>
+          <a:bodyPr/>
+          <a:lstStyle/>
+          <a:p>
+            <a:r>
+              <a:rPr lang="fr-CA"/>
+              <a:t>Tristan</a:t>
+            </a:r>
+          </a:p>
+        </p:txBody>
+      </p:sp>
+      <p:sp>
+        <p:nvSpPr>
+          <p:cNvPr id="4" name="Espace réservé du numéro de diapositive 3"/>
+          <p:cNvSpPr>
+            <a:spLocks noGrp="1"/>
+          </p:cNvSpPr>
+          <p:nvPr>
+            <p:ph type="sldNum" sz="quarter" idx="5"/>
+          </p:nvPr>
+        </p:nvSpPr>
+        <p:spPr/>
+        <p:txBody>
+          <a:bodyPr/>
+          <a:lstStyle/>
+          <a:p>
+            <a:fld id="{EA5809C9-D391-499D-8A4B-F46E79386DAE}" type="slidenum">
+              <a:rPr lang="fr-CA" smtClean="0"/>
+              <a:t>11</a:t>
+            </a:fld>
+            <a:endParaRPr lang="fr-CA"/>
+          </a:p>
+        </p:txBody>
+      </p:sp>
+    </p:spTree>
+    <p:extLst>
+      <p:ext uri="{BB962C8B-B14F-4D97-AF65-F5344CB8AC3E}">
+        <p14:creationId xmlns:p14="http://schemas.microsoft.com/office/powerpoint/2010/main" val="3181969"/>
+      </p:ext>
+    </p:extLst>
+  </p:cSld>
+  <p:clrMapOvr>
+    <a:masterClrMapping/>
+  </p:clrMapOvr>
+</p:notes>
+</file>
+
+<file path=ppt/notesSlides/notesSlide12.xml><?xml version="1.0" encoding="utf-8"?>
+<p:notes xmlns:a="http://schemas.openxmlformats.org/drawingml/2006/main" xmlns:r="http://schemas.openxmlformats.org/officeDocument/2006/relationships" xmlns:p="http://schemas.openxmlformats.org/presentationml/2006/main">
+  <p:cSld>
+    <p:spTree>
+      <p:nvGrpSpPr>
+        <p:cNvPr id="1" name=""/>
+        <p:cNvGrpSpPr/>
+        <p:nvPr/>
+      </p:nvGrpSpPr>
+      <p:grpSpPr>
+        <a:xfrm>
+          <a:off x="0" y="0"/>
+          <a:ext cx="0" cy="0"/>
+          <a:chOff x="0" y="0"/>
+          <a:chExt cx="0" cy="0"/>
+        </a:xfrm>
+      </p:grpSpPr>
+      <p:sp>
+        <p:nvSpPr>
+          <p:cNvPr id="2" name="Espace réservé de l'image des diapositives 1"/>
+          <p:cNvSpPr>
+            <a:spLocks noGrp="1" noRot="1" noChangeAspect="1"/>
+          </p:cNvSpPr>
+          <p:nvPr>
+            <p:ph type="sldImg"/>
+          </p:nvPr>
+        </p:nvSpPr>
+        <p:spPr/>
+      </p:sp>
+      <p:sp>
+        <p:nvSpPr>
+          <p:cNvPr id="3" name="Espace réservé des notes 2"/>
+          <p:cNvSpPr>
+            <a:spLocks noGrp="1"/>
+          </p:cNvSpPr>
+          <p:nvPr>
+            <p:ph type="body" idx="1"/>
+          </p:nvPr>
+        </p:nvSpPr>
+        <p:spPr/>
+        <p:txBody>
+          <a:bodyPr/>
+          <a:lstStyle/>
+          <a:p>
+            <a:r>
+              <a:rPr lang="fr-CA"/>
+              <a:t>Yohan</a:t>
+            </a:r>
+          </a:p>
+        </p:txBody>
+      </p:sp>
+      <p:sp>
+        <p:nvSpPr>
+          <p:cNvPr id="4" name="Espace réservé du numéro de diapositive 3"/>
+          <p:cNvSpPr>
+            <a:spLocks noGrp="1"/>
+          </p:cNvSpPr>
+          <p:nvPr>
+            <p:ph type="sldNum" sz="quarter" idx="5"/>
+          </p:nvPr>
+        </p:nvSpPr>
+        <p:spPr/>
+        <p:txBody>
+          <a:bodyPr/>
+          <a:lstStyle/>
+          <a:p>
+            <a:fld id="{EA5809C9-D391-499D-8A4B-F46E79386DAE}" type="slidenum">
+              <a:rPr lang="fr-CA" smtClean="0"/>
+              <a:t>12</a:t>
+            </a:fld>
+            <a:endParaRPr lang="fr-CA"/>
+          </a:p>
+        </p:txBody>
+      </p:sp>
+    </p:spTree>
+    <p:extLst>
+      <p:ext uri="{BB962C8B-B14F-4D97-AF65-F5344CB8AC3E}">
+        <p14:creationId xmlns:p14="http://schemas.microsoft.com/office/powerpoint/2010/main" val="3720251210"/>
+      </p:ext>
+    </p:extLst>
+  </p:cSld>
+  <p:clrMapOvr>
+    <a:masterClrMapping/>
+  </p:clrMapOvr>
+</p:notes>
+</file>
+
+<file path=ppt/notesSlides/notesSlide13.xml><?xml version="1.0" encoding="utf-8"?>
+<p:notes xmlns:a="http://schemas.openxmlformats.org/drawingml/2006/main" xmlns:r="http://schemas.openxmlformats.org/officeDocument/2006/relationships" xmlns:p="http://schemas.openxmlformats.org/presentationml/2006/main">
+  <p:cSld>
+    <p:spTree>
+      <p:nvGrpSpPr>
+        <p:cNvPr id="1" name=""/>
+        <p:cNvGrpSpPr/>
+        <p:nvPr/>
+      </p:nvGrpSpPr>
+      <p:grpSpPr>
+        <a:xfrm>
+          <a:off x="0" y="0"/>
+          <a:ext cx="0" cy="0"/>
+          <a:chOff x="0" y="0"/>
+          <a:chExt cx="0" cy="0"/>
+        </a:xfrm>
+      </p:grpSpPr>
+      <p:sp>
+        <p:nvSpPr>
+          <p:cNvPr id="2" name="Espace réservé de l'image des diapositives 1"/>
+          <p:cNvSpPr>
+            <a:spLocks noGrp="1" noRot="1" noChangeAspect="1"/>
+          </p:cNvSpPr>
+          <p:nvPr>
+            <p:ph type="sldImg"/>
+          </p:nvPr>
+        </p:nvSpPr>
+        <p:spPr/>
+      </p:sp>
+      <p:sp>
+        <p:nvSpPr>
+          <p:cNvPr id="3" name="Espace réservé des notes 2"/>
+          <p:cNvSpPr>
+            <a:spLocks noGrp="1"/>
+          </p:cNvSpPr>
+          <p:nvPr>
+            <p:ph type="body" idx="1"/>
+          </p:nvPr>
+        </p:nvSpPr>
+        <p:spPr/>
+        <p:txBody>
+          <a:bodyPr/>
+          <a:lstStyle/>
+          <a:p>
+            <a:r>
+              <a:rPr lang="fr-CA"/>
+              <a:t>Yohan</a:t>
+            </a:r>
+          </a:p>
+        </p:txBody>
+      </p:sp>
+      <p:sp>
+        <p:nvSpPr>
+          <p:cNvPr id="4" name="Espace réservé du numéro de diapositive 3"/>
+          <p:cNvSpPr>
+            <a:spLocks noGrp="1"/>
+          </p:cNvSpPr>
+          <p:nvPr>
+            <p:ph type="sldNum" sz="quarter" idx="5"/>
+          </p:nvPr>
+        </p:nvSpPr>
+        <p:spPr/>
+        <p:txBody>
+          <a:bodyPr/>
+          <a:lstStyle/>
+          <a:p>
+            <a:fld id="{EA5809C9-D391-499D-8A4B-F46E79386DAE}" type="slidenum">
+              <a:rPr lang="fr-CA" smtClean="0"/>
+              <a:t>13</a:t>
+            </a:fld>
+            <a:endParaRPr lang="fr-CA"/>
+          </a:p>
+        </p:txBody>
+      </p:sp>
+    </p:spTree>
+    <p:extLst>
+      <p:ext uri="{BB962C8B-B14F-4D97-AF65-F5344CB8AC3E}">
+        <p14:creationId xmlns:p14="http://schemas.microsoft.com/office/powerpoint/2010/main" val="393413745"/>
+      </p:ext>
+    </p:extLst>
+  </p:cSld>
+  <p:clrMapOvr>
+    <a:masterClrMapping/>
+  </p:clrMapOvr>
+</p:notes>
+</file>
+
+<file path=ppt/notesSlides/notesSlide14.xml><?xml version="1.0" encoding="utf-8"?>
+<p:notes xmlns:a="http://schemas.openxmlformats.org/drawingml/2006/main" xmlns:r="http://schemas.openxmlformats.org/officeDocument/2006/relationships" xmlns:p="http://schemas.openxmlformats.org/presentationml/2006/main">
+  <p:cSld>
+    <p:spTree>
+      <p:nvGrpSpPr>
+        <p:cNvPr id="1" name=""/>
+        <p:cNvGrpSpPr/>
+        <p:nvPr/>
+      </p:nvGrpSpPr>
+      <p:grpSpPr>
+        <a:xfrm>
+          <a:off x="0" y="0"/>
+          <a:ext cx="0" cy="0"/>
+          <a:chOff x="0" y="0"/>
+          <a:chExt cx="0" cy="0"/>
+        </a:xfrm>
+      </p:grpSpPr>
+      <p:sp>
+        <p:nvSpPr>
+          <p:cNvPr id="2" name="Espace réservé de l'image des diapositives 1"/>
+          <p:cNvSpPr>
+            <a:spLocks noGrp="1" noRot="1" noChangeAspect="1"/>
+          </p:cNvSpPr>
+          <p:nvPr>
+            <p:ph type="sldImg"/>
+          </p:nvPr>
+        </p:nvSpPr>
+        <p:spPr/>
+        <p:txBody>
+          <a:bodyPr/>
+          <a:lstStyle/>
+          <a:p>
+            <a:endParaRPr lang="fr-CA"/>
+          </a:p>
+        </p:txBody>
+      </p:sp>
+      <p:sp>
+        <p:nvSpPr>
+          <p:cNvPr id="3" name="Espace réservé des notes 2"/>
+          <p:cNvSpPr>
+            <a:spLocks noGrp="1"/>
+          </p:cNvSpPr>
+          <p:nvPr>
+            <p:ph type="body" idx="1"/>
+          </p:nvPr>
+        </p:nvSpPr>
+        <p:spPr/>
+        <p:txBody>
+          <a:bodyPr/>
+          <a:lstStyle/>
+          <a:p>
+            <a:r>
+              <a:rPr lang="fr-CA"/>
+              <a:t>Tristan</a:t>
+            </a:r>
+          </a:p>
+          <a:p>
+            <a:r>
+              <a:rPr lang="fr-CA"/>
+              <a:t>Ex. les individus stockés pourrait ne pas connaître le lieu de fraie</a:t>
+            </a:r>
+          </a:p>
+        </p:txBody>
+      </p:sp>
+      <p:sp>
+        <p:nvSpPr>
+          <p:cNvPr id="4" name="Espace réservé du numéro de diapositive 3"/>
+          <p:cNvSpPr>
+            <a:spLocks noGrp="1"/>
+          </p:cNvSpPr>
+          <p:nvPr>
+            <p:ph type="sldNum" sz="quarter" idx="5"/>
+          </p:nvPr>
+        </p:nvSpPr>
+        <p:spPr/>
+        <p:txBody>
+          <a:bodyPr/>
+          <a:lstStyle/>
+          <a:p>
+            <a:fld id="{EA5809C9-D391-499D-8A4B-F46E79386DAE}" type="slidenum">
+              <a:rPr lang="fr-CA" smtClean="0"/>
+              <a:t>14</a:t>
+            </a:fld>
+            <a:endParaRPr lang="fr-CA"/>
+          </a:p>
+        </p:txBody>
+      </p:sp>
+    </p:spTree>
+    <p:extLst>
+      <p:ext uri="{BB962C8B-B14F-4D97-AF65-F5344CB8AC3E}">
+        <p14:creationId xmlns:p14="http://schemas.microsoft.com/office/powerpoint/2010/main" val="1322109074"/>
+      </p:ext>
+    </p:extLst>
+  </p:cSld>
+  <p:clrMapOvr>
+    <a:masterClrMapping/>
+  </p:clrMapOvr>
+</p:notes>
+</file>
+
+<file path=ppt/notesSlides/notesSlide15.xml><?xml version="1.0" encoding="utf-8"?>
+<p:notes xmlns:a="http://schemas.openxmlformats.org/drawingml/2006/main" xmlns:r="http://schemas.openxmlformats.org/officeDocument/2006/relationships" xmlns:p="http://schemas.openxmlformats.org/presentationml/2006/main">
+  <p:cSld>
+    <p:spTree>
+      <p:nvGrpSpPr>
+        <p:cNvPr id="1" name=""/>
+        <p:cNvGrpSpPr/>
+        <p:nvPr/>
+      </p:nvGrpSpPr>
+      <p:grpSpPr>
+        <a:xfrm>
+          <a:off x="0" y="0"/>
+          <a:ext cx="0" cy="0"/>
+          <a:chOff x="0" y="0"/>
+          <a:chExt cx="0" cy="0"/>
+        </a:xfrm>
+      </p:grpSpPr>
+      <p:sp>
+        <p:nvSpPr>
+          <p:cNvPr id="2" name="Espace réservé de l'image des diapositives 1"/>
+          <p:cNvSpPr>
+            <a:spLocks noGrp="1" noRot="1" noChangeAspect="1"/>
+          </p:cNvSpPr>
+          <p:nvPr>
+            <p:ph type="sldImg"/>
+          </p:nvPr>
+        </p:nvSpPr>
+        <p:spPr/>
+      </p:sp>
+      <p:sp>
+        <p:nvSpPr>
+          <p:cNvPr id="3" name="Espace réservé des notes 2"/>
+          <p:cNvSpPr>
+            <a:spLocks noGrp="1"/>
+          </p:cNvSpPr>
+          <p:nvPr>
+            <p:ph type="body" idx="1"/>
+          </p:nvPr>
+        </p:nvSpPr>
+        <p:spPr/>
+        <p:txBody>
+          <a:bodyPr/>
+          <a:lstStyle/>
+          <a:p>
+            <a:r>
+              <a:rPr lang="fr-CA"/>
+              <a:t>Tristan</a:t>
+            </a:r>
+          </a:p>
+        </p:txBody>
+      </p:sp>
+      <p:sp>
+        <p:nvSpPr>
+          <p:cNvPr id="4" name="Espace réservé du numéro de diapositive 3"/>
+          <p:cNvSpPr>
+            <a:spLocks noGrp="1"/>
+          </p:cNvSpPr>
+          <p:nvPr>
+            <p:ph type="sldNum" sz="quarter" idx="5"/>
+          </p:nvPr>
+        </p:nvSpPr>
+        <p:spPr/>
+        <p:txBody>
+          <a:bodyPr/>
+          <a:lstStyle/>
+          <a:p>
+            <a:fld id="{EA5809C9-D391-499D-8A4B-F46E79386DAE}" type="slidenum">
+              <a:rPr lang="fr-CA" smtClean="0"/>
+              <a:t>15</a:t>
+            </a:fld>
+            <a:endParaRPr lang="fr-CA"/>
+          </a:p>
+        </p:txBody>
+      </p:sp>
+    </p:spTree>
+    <p:extLst>
+      <p:ext uri="{BB962C8B-B14F-4D97-AF65-F5344CB8AC3E}">
+        <p14:creationId xmlns:p14="http://schemas.microsoft.com/office/powerpoint/2010/main" val="2129201193"/>
+      </p:ext>
+    </p:extLst>
+  </p:cSld>
+  <p:clrMapOvr>
+    <a:masterClrMapping/>
+  </p:clrMapOvr>
+</p:notes>
+</file>
+
+<file path=ppt/notesSlides/notesSlide16.xml><?xml version="1.0" encoding="utf-8"?>
+<p:notes xmlns:a="http://schemas.openxmlformats.org/drawingml/2006/main" xmlns:r="http://schemas.openxmlformats.org/officeDocument/2006/relationships" xmlns:p="http://schemas.openxmlformats.org/presentationml/2006/main">
+  <p:cSld>
+    <p:spTree>
+      <p:nvGrpSpPr>
+        <p:cNvPr id="1" name=""/>
+        <p:cNvGrpSpPr/>
+        <p:nvPr/>
+      </p:nvGrpSpPr>
+      <p:grpSpPr>
+        <a:xfrm>
+          <a:off x="0" y="0"/>
+          <a:ext cx="0" cy="0"/>
+          <a:chOff x="0" y="0"/>
+          <a:chExt cx="0" cy="0"/>
+        </a:xfrm>
+      </p:grpSpPr>
+      <p:sp>
+        <p:nvSpPr>
+          <p:cNvPr id="2" name="Espace réservé de l'image des diapositives 1"/>
+          <p:cNvSpPr>
+            <a:spLocks noGrp="1" noRot="1" noChangeAspect="1"/>
+          </p:cNvSpPr>
+          <p:nvPr>
+            <p:ph type="sldImg"/>
+          </p:nvPr>
+        </p:nvSpPr>
+        <p:spPr/>
+      </p:sp>
+      <p:sp>
+        <p:nvSpPr>
+          <p:cNvPr id="3" name="Espace réservé des notes 2"/>
+          <p:cNvSpPr>
+            <a:spLocks noGrp="1"/>
+          </p:cNvSpPr>
+          <p:nvPr>
+            <p:ph type="body" idx="1"/>
+          </p:nvPr>
+        </p:nvSpPr>
+        <p:spPr/>
+        <p:txBody>
+          <a:bodyPr/>
+          <a:lstStyle/>
+          <a:p>
+            <a:r>
+              <a:rPr lang="fr-CA"/>
+              <a:t>Yohan</a:t>
+            </a:r>
+          </a:p>
+        </p:txBody>
+      </p:sp>
+      <p:sp>
+        <p:nvSpPr>
+          <p:cNvPr id="4" name="Espace réservé du numéro de diapositive 3"/>
+          <p:cNvSpPr>
+            <a:spLocks noGrp="1"/>
+          </p:cNvSpPr>
+          <p:nvPr>
+            <p:ph type="sldNum" sz="quarter" idx="5"/>
+          </p:nvPr>
+        </p:nvSpPr>
+        <p:spPr/>
+        <p:txBody>
+          <a:bodyPr/>
+          <a:lstStyle/>
+          <a:p>
+            <a:fld id="{EA5809C9-D391-499D-8A4B-F46E79386DAE}" type="slidenum">
+              <a:rPr lang="fr-CA" smtClean="0"/>
+              <a:t>16</a:t>
+            </a:fld>
+            <a:endParaRPr lang="fr-CA"/>
+          </a:p>
+        </p:txBody>
+      </p:sp>
+    </p:spTree>
+    <p:extLst>
+      <p:ext uri="{BB962C8B-B14F-4D97-AF65-F5344CB8AC3E}">
+        <p14:creationId xmlns:p14="http://schemas.microsoft.com/office/powerpoint/2010/main" val="37143156"/>
+      </p:ext>
+    </p:extLst>
+  </p:cSld>
+  <p:clrMapOvr>
+    <a:masterClrMapping/>
+  </p:clrMapOvr>
+</p:notes>
+</file>
+
+<file path=ppt/notesSlides/notesSlide17.xml><?xml version="1.0" encoding="utf-8"?>
+<p:notes xmlns:a="http://schemas.openxmlformats.org/drawingml/2006/main" xmlns:r="http://schemas.openxmlformats.org/officeDocument/2006/relationships" xmlns:p="http://schemas.openxmlformats.org/presentationml/2006/main">
+  <p:cSld>
+    <p:spTree>
+      <p:nvGrpSpPr>
+        <p:cNvPr id="1" name=""/>
+        <p:cNvGrpSpPr/>
+        <p:nvPr/>
+      </p:nvGrpSpPr>
+      <p:grpSpPr>
+        <a:xfrm>
+          <a:off x="0" y="0"/>
+          <a:ext cx="0" cy="0"/>
+          <a:chOff x="0" y="0"/>
+          <a:chExt cx="0" cy="0"/>
+        </a:xfrm>
+      </p:grpSpPr>
+      <p:sp>
+        <p:nvSpPr>
+          <p:cNvPr id="2" name="Espace réservé de l'image des diapositives 1"/>
+          <p:cNvSpPr>
+            <a:spLocks noGrp="1" noRot="1" noChangeAspect="1"/>
+          </p:cNvSpPr>
+          <p:nvPr>
+            <p:ph type="sldImg"/>
+          </p:nvPr>
+        </p:nvSpPr>
+        <p:spPr/>
+      </p:sp>
+      <p:sp>
+        <p:nvSpPr>
+          <p:cNvPr id="3" name="Espace réservé des notes 2"/>
+          <p:cNvSpPr>
+            <a:spLocks noGrp="1"/>
+          </p:cNvSpPr>
+          <p:nvPr>
+            <p:ph type="body" idx="1"/>
+          </p:nvPr>
+        </p:nvSpPr>
+        <p:spPr/>
+        <p:txBody>
+          <a:bodyPr/>
+          <a:lstStyle/>
+          <a:p>
+            <a:r>
+              <a:rPr lang="fr-CA"/>
+              <a:t>Yohan</a:t>
+            </a:r>
+          </a:p>
+        </p:txBody>
+      </p:sp>
+      <p:sp>
+        <p:nvSpPr>
+          <p:cNvPr id="4" name="Espace réservé du numéro de diapositive 3"/>
+          <p:cNvSpPr>
+            <a:spLocks noGrp="1"/>
+          </p:cNvSpPr>
+          <p:nvPr>
+            <p:ph type="sldNum" sz="quarter" idx="5"/>
+          </p:nvPr>
+        </p:nvSpPr>
+        <p:spPr/>
+        <p:txBody>
+          <a:bodyPr/>
+          <a:lstStyle/>
+          <a:p>
+            <a:fld id="{EA5809C9-D391-499D-8A4B-F46E79386DAE}" type="slidenum">
+              <a:rPr lang="fr-CA" smtClean="0"/>
+              <a:t>17</a:t>
+            </a:fld>
+            <a:endParaRPr lang="fr-CA"/>
+          </a:p>
+        </p:txBody>
+      </p:sp>
+    </p:spTree>
+    <p:extLst>
+      <p:ext uri="{BB962C8B-B14F-4D97-AF65-F5344CB8AC3E}">
+        <p14:creationId xmlns:p14="http://schemas.microsoft.com/office/powerpoint/2010/main" val="652235860"/>
+      </p:ext>
+    </p:extLst>
+  </p:cSld>
+  <p:clrMapOvr>
+    <a:masterClrMapping/>
+  </p:clrMapOvr>
+</p:notes>
+</file>
+
+<file path=ppt/notesSlides/notesSlide18.xml><?xml version="1.0" encoding="utf-8"?>
+<p:notes xmlns:a="http://schemas.openxmlformats.org/drawingml/2006/main" xmlns:r="http://schemas.openxmlformats.org/officeDocument/2006/relationships" xmlns:p="http://schemas.openxmlformats.org/presentationml/2006/main">
+  <p:cSld>
+    <p:spTree>
+      <p:nvGrpSpPr>
+        <p:cNvPr id="1" name="">
+          <a:extLst>
+            <a:ext uri="{FF2B5EF4-FFF2-40B4-BE49-F238E27FC236}">
+              <a16:creationId xmlns:a16="http://schemas.microsoft.com/office/drawing/2014/main" id="{1B19D15B-114A-3505-8E5F-15BA8B48C21E}"/>
+            </a:ext>
+          </a:extLst>
+        </p:cNvPr>
+        <p:cNvGrpSpPr/>
+        <p:nvPr/>
+      </p:nvGrpSpPr>
+      <p:grpSpPr>
+        <a:xfrm>
+          <a:off x="0" y="0"/>
+          <a:ext cx="0" cy="0"/>
+          <a:chOff x="0" y="0"/>
+          <a:chExt cx="0" cy="0"/>
+        </a:xfrm>
+      </p:grpSpPr>
+      <p:sp>
+        <p:nvSpPr>
+          <p:cNvPr id="2" name="Espace réservé de l'image des diapositives 1">
+            <a:extLst>
+              <a:ext uri="{FF2B5EF4-FFF2-40B4-BE49-F238E27FC236}">
+                <a16:creationId xmlns:a16="http://schemas.microsoft.com/office/drawing/2014/main" id="{F57BFEFD-5229-4463-8239-9870EE864B6B}"/>
+              </a:ext>
+            </a:extLst>
+          </p:cNvPr>
+          <p:cNvSpPr>
+            <a:spLocks noGrp="1" noRot="1" noChangeAspect="1"/>
+          </p:cNvSpPr>
+          <p:nvPr>
+            <p:ph type="sldImg"/>
+          </p:nvPr>
+        </p:nvSpPr>
+        <p:spPr/>
+        <p:txBody>
+          <a:bodyPr/>
+          <a:lstStyle/>
+          <a:p>
+            <a:endParaRPr lang="fr-CA"/>
+          </a:p>
+        </p:txBody>
+      </p:sp>
+      <p:sp>
+        <p:nvSpPr>
+          <p:cNvPr id="3" name="Espace réservé des notes 2">
+            <a:extLst>
+              <a:ext uri="{FF2B5EF4-FFF2-40B4-BE49-F238E27FC236}">
+                <a16:creationId xmlns:a16="http://schemas.microsoft.com/office/drawing/2014/main" id="{864C426F-8D61-023B-4BEE-F0F2B01F5A8C}"/>
+              </a:ext>
+            </a:extLst>
+          </p:cNvPr>
+          <p:cNvSpPr>
+            <a:spLocks noGrp="1"/>
+          </p:cNvSpPr>
+          <p:nvPr>
+            <p:ph type="body" idx="1"/>
+          </p:nvPr>
+        </p:nvSpPr>
+        <p:spPr/>
+        <p:txBody>
+          <a:bodyPr/>
+          <a:lstStyle/>
+          <a:p>
+            <a:r>
+              <a:rPr lang="fr-CA"/>
+              <a:t>Yohan</a:t>
+            </a:r>
+          </a:p>
+        </p:txBody>
+      </p:sp>
+      <p:sp>
+        <p:nvSpPr>
+          <p:cNvPr id="4" name="Espace réservé du numéro de diapositive 3">
+            <a:extLst>
+              <a:ext uri="{FF2B5EF4-FFF2-40B4-BE49-F238E27FC236}">
+                <a16:creationId xmlns:a16="http://schemas.microsoft.com/office/drawing/2014/main" id="{646BE399-D1BF-B6D7-C969-EE318936F089}"/>
+              </a:ext>
+            </a:extLst>
+          </p:cNvPr>
+          <p:cNvSpPr>
+            <a:spLocks noGrp="1"/>
+          </p:cNvSpPr>
+          <p:nvPr>
+            <p:ph type="sldNum" sz="quarter" idx="5"/>
+          </p:nvPr>
+        </p:nvSpPr>
+        <p:spPr/>
+        <p:txBody>
+          <a:bodyPr/>
+          <a:lstStyle/>
+          <a:p>
+            <a:fld id="{EA5809C9-D391-499D-8A4B-F46E79386DAE}" type="slidenum">
+              <a:rPr lang="fr-CA" smtClean="0"/>
+              <a:t>8</a:t>
+            </a:fld>
+            <a:endParaRPr lang="fr-CA"/>
+          </a:p>
+        </p:txBody>
+      </p:sp>
+    </p:spTree>
+    <p:extLst>
+      <p:ext uri="{BB962C8B-B14F-4D97-AF65-F5344CB8AC3E}">
+        <p14:creationId xmlns:p14="http://schemas.microsoft.com/office/powerpoint/2010/main" val="1380242359"/>
+      </p:ext>
+    </p:extLst>
+  </p:cSld>
+  <p:clrMapOvr>
+    <a:masterClrMapping/>
+  </p:clrMapOvr>
+</p:notes>
+</file>
+
+<file path=ppt/notesSlides/notesSlide19.xml><?xml version="1.0" encoding="utf-8"?>
+<p:notes xmlns:a="http://schemas.openxmlformats.org/drawingml/2006/main" xmlns:r="http://schemas.openxmlformats.org/officeDocument/2006/relationships" xmlns:p="http://schemas.openxmlformats.org/presentationml/2006/main">
+  <p:cSld>
+    <p:spTree>
+      <p:nvGrpSpPr>
+        <p:cNvPr id="1" name=""/>
+        <p:cNvGrpSpPr/>
+        <p:nvPr/>
+      </p:nvGrpSpPr>
+      <p:grpSpPr>
+        <a:xfrm>
+          <a:off x="0" y="0"/>
+          <a:ext cx="0" cy="0"/>
+          <a:chOff x="0" y="0"/>
+          <a:chExt cx="0" cy="0"/>
+        </a:xfrm>
+      </p:grpSpPr>
+      <p:sp>
+        <p:nvSpPr>
+          <p:cNvPr id="2" name="Espace réservé de l'image des diapositives 1"/>
+          <p:cNvSpPr>
+            <a:spLocks noGrp="1" noRot="1" noChangeAspect="1"/>
+          </p:cNvSpPr>
+          <p:nvPr>
+            <p:ph type="sldImg"/>
+          </p:nvPr>
+        </p:nvSpPr>
+        <p:spPr/>
+      </p:sp>
+      <p:sp>
+        <p:nvSpPr>
+          <p:cNvPr id="3" name="Espace réservé des notes 2"/>
+          <p:cNvSpPr>
+            <a:spLocks noGrp="1"/>
+          </p:cNvSpPr>
+          <p:nvPr>
+            <p:ph type="body" idx="1"/>
+          </p:nvPr>
+        </p:nvSpPr>
+        <p:spPr/>
+        <p:txBody>
+          <a:bodyPr/>
+          <a:lstStyle/>
+          <a:p>
+            <a:r>
+              <a:rPr lang="fr-CA"/>
+              <a:t>Tristan</a:t>
+            </a:r>
+          </a:p>
+        </p:txBody>
+      </p:sp>
+      <p:sp>
+        <p:nvSpPr>
+          <p:cNvPr id="4" name="Espace réservé du numéro de diapositive 3"/>
+          <p:cNvSpPr>
+            <a:spLocks noGrp="1"/>
+          </p:cNvSpPr>
+          <p:nvPr>
+            <p:ph type="sldNum" sz="quarter" idx="5"/>
+          </p:nvPr>
+        </p:nvSpPr>
+        <p:spPr/>
+        <p:txBody>
+          <a:bodyPr/>
+          <a:lstStyle/>
+          <a:p>
+            <a:fld id="{EA5809C9-D391-499D-8A4B-F46E79386DAE}" type="slidenum">
+              <a:rPr lang="fr-CA" smtClean="0"/>
+              <a:t>19</a:t>
+            </a:fld>
+            <a:endParaRPr lang="fr-CA"/>
+          </a:p>
+        </p:txBody>
+      </p:sp>
+    </p:spTree>
+    <p:extLst>
+      <p:ext uri="{BB962C8B-B14F-4D97-AF65-F5344CB8AC3E}">
+        <p14:creationId xmlns:p14="http://schemas.microsoft.com/office/powerpoint/2010/main" val="2772695189"/>
       </p:ext>
     </p:extLst>
   </p:cSld>
@@ -9147,7 +10081,7 @@
           <a:p>
             <a:r>
               <a:rPr lang="fr-CA"/>
-              <a:t>Ex. les individus stockés pourrait ne pas connaître le lieu de fraie</a:t>
+              <a:t>Tristan</a:t>
             </a:r>
           </a:p>
         </p:txBody>
@@ -9169,7 +10103,7 @@
           <a:p>
             <a:fld id="{EA5809C9-D391-499D-8A4B-F46E79386DAE}" type="slidenum">
               <a:rPr lang="fr-CA" smtClean="0"/>
-              <a:t>14</a:t>
+              <a:t>2</a:t>
             </a:fld>
             <a:endParaRPr lang="fr-CA"/>
           </a:p>
@@ -9178,7 +10112,616 @@
     </p:spTree>
     <p:extLst>
       <p:ext uri="{BB962C8B-B14F-4D97-AF65-F5344CB8AC3E}">
-        <p14:creationId xmlns:p14="http://schemas.microsoft.com/office/powerpoint/2010/main" val="1322109074"/>
+        <p14:creationId xmlns:p14="http://schemas.microsoft.com/office/powerpoint/2010/main" val="2963607241"/>
+      </p:ext>
+    </p:extLst>
+  </p:cSld>
+  <p:clrMapOvr>
+    <a:masterClrMapping/>
+  </p:clrMapOvr>
+</p:notes>
+</file>
+
+<file path=ppt/notesSlides/notesSlide20.xml><?xml version="1.0" encoding="utf-8"?>
+<p:notes xmlns:a="http://schemas.openxmlformats.org/drawingml/2006/main" xmlns:r="http://schemas.openxmlformats.org/officeDocument/2006/relationships" xmlns:p="http://schemas.openxmlformats.org/presentationml/2006/main">
+  <p:cSld>
+    <p:spTree>
+      <p:nvGrpSpPr>
+        <p:cNvPr id="1" name=""/>
+        <p:cNvGrpSpPr/>
+        <p:nvPr/>
+      </p:nvGrpSpPr>
+      <p:grpSpPr>
+        <a:xfrm>
+          <a:off x="0" y="0"/>
+          <a:ext cx="0" cy="0"/>
+          <a:chOff x="0" y="0"/>
+          <a:chExt cx="0" cy="0"/>
+        </a:xfrm>
+      </p:grpSpPr>
+      <p:sp>
+        <p:nvSpPr>
+          <p:cNvPr id="2" name="Espace réservé de l'image des diapositives 1"/>
+          <p:cNvSpPr>
+            <a:spLocks noGrp="1" noRot="1" noChangeAspect="1"/>
+          </p:cNvSpPr>
+          <p:nvPr>
+            <p:ph type="sldImg"/>
+          </p:nvPr>
+        </p:nvSpPr>
+        <p:spPr/>
+      </p:sp>
+      <p:sp>
+        <p:nvSpPr>
+          <p:cNvPr id="3" name="Espace réservé des notes 2"/>
+          <p:cNvSpPr>
+            <a:spLocks noGrp="1"/>
+          </p:cNvSpPr>
+          <p:nvPr>
+            <p:ph type="body" idx="1"/>
+          </p:nvPr>
+        </p:nvSpPr>
+        <p:spPr/>
+        <p:txBody>
+          <a:bodyPr/>
+          <a:lstStyle/>
+          <a:p>
+            <a:r>
+              <a:rPr lang="fr-CA"/>
+              <a:t>Tristan</a:t>
+            </a:r>
+          </a:p>
+        </p:txBody>
+      </p:sp>
+      <p:sp>
+        <p:nvSpPr>
+          <p:cNvPr id="4" name="Espace réservé du numéro de diapositive 3"/>
+          <p:cNvSpPr>
+            <a:spLocks noGrp="1"/>
+          </p:cNvSpPr>
+          <p:nvPr>
+            <p:ph type="sldNum" sz="quarter" idx="5"/>
+          </p:nvPr>
+        </p:nvSpPr>
+        <p:spPr/>
+        <p:txBody>
+          <a:bodyPr/>
+          <a:lstStyle/>
+          <a:p>
+            <a:fld id="{EA5809C9-D391-499D-8A4B-F46E79386DAE}" type="slidenum">
+              <a:rPr lang="fr-CA" smtClean="0"/>
+              <a:t>20</a:t>
+            </a:fld>
+            <a:endParaRPr lang="fr-CA"/>
+          </a:p>
+        </p:txBody>
+      </p:sp>
+    </p:spTree>
+    <p:extLst>
+      <p:ext uri="{BB962C8B-B14F-4D97-AF65-F5344CB8AC3E}">
+        <p14:creationId xmlns:p14="http://schemas.microsoft.com/office/powerpoint/2010/main" val="501229522"/>
+      </p:ext>
+    </p:extLst>
+  </p:cSld>
+  <p:clrMapOvr>
+    <a:masterClrMapping/>
+  </p:clrMapOvr>
+</p:notes>
+</file>
+
+<file path=ppt/notesSlides/notesSlide21.xml><?xml version="1.0" encoding="utf-8"?>
+<p:notes xmlns:a="http://schemas.openxmlformats.org/drawingml/2006/main" xmlns:r="http://schemas.openxmlformats.org/officeDocument/2006/relationships" xmlns:p="http://schemas.openxmlformats.org/presentationml/2006/main">
+  <p:cSld>
+    <p:spTree>
+      <p:nvGrpSpPr>
+        <p:cNvPr id="1" name=""/>
+        <p:cNvGrpSpPr/>
+        <p:nvPr/>
+      </p:nvGrpSpPr>
+      <p:grpSpPr>
+        <a:xfrm>
+          <a:off x="0" y="0"/>
+          <a:ext cx="0" cy="0"/>
+          <a:chOff x="0" y="0"/>
+          <a:chExt cx="0" cy="0"/>
+        </a:xfrm>
+      </p:grpSpPr>
+      <p:sp>
+        <p:nvSpPr>
+          <p:cNvPr id="2" name="Espace réservé de l'image des diapositives 1"/>
+          <p:cNvSpPr>
+            <a:spLocks noGrp="1" noRot="1" noChangeAspect="1"/>
+          </p:cNvSpPr>
+          <p:nvPr>
+            <p:ph type="sldImg"/>
+          </p:nvPr>
+        </p:nvSpPr>
+        <p:spPr/>
+      </p:sp>
+      <p:sp>
+        <p:nvSpPr>
+          <p:cNvPr id="3" name="Espace réservé des notes 2"/>
+          <p:cNvSpPr>
+            <a:spLocks noGrp="1"/>
+          </p:cNvSpPr>
+          <p:nvPr>
+            <p:ph type="body" idx="1"/>
+          </p:nvPr>
+        </p:nvSpPr>
+        <p:spPr/>
+        <p:txBody>
+          <a:bodyPr/>
+          <a:lstStyle/>
+          <a:p>
+            <a:r>
+              <a:rPr lang="fr-CA"/>
+              <a:t>Tristan</a:t>
+            </a:r>
+          </a:p>
+        </p:txBody>
+      </p:sp>
+      <p:sp>
+        <p:nvSpPr>
+          <p:cNvPr id="4" name="Espace réservé du numéro de diapositive 3"/>
+          <p:cNvSpPr>
+            <a:spLocks noGrp="1"/>
+          </p:cNvSpPr>
+          <p:nvPr>
+            <p:ph type="sldNum" sz="quarter" idx="5"/>
+          </p:nvPr>
+        </p:nvSpPr>
+        <p:spPr/>
+        <p:txBody>
+          <a:bodyPr/>
+          <a:lstStyle/>
+          <a:p>
+            <a:fld id="{EA5809C9-D391-499D-8A4B-F46E79386DAE}" type="slidenum">
+              <a:rPr lang="fr-CA" smtClean="0"/>
+              <a:t>21</a:t>
+            </a:fld>
+            <a:endParaRPr lang="fr-CA"/>
+          </a:p>
+        </p:txBody>
+      </p:sp>
+    </p:spTree>
+    <p:extLst>
+      <p:ext uri="{BB962C8B-B14F-4D97-AF65-F5344CB8AC3E}">
+        <p14:creationId xmlns:p14="http://schemas.microsoft.com/office/powerpoint/2010/main" val="3105995799"/>
+      </p:ext>
+    </p:extLst>
+  </p:cSld>
+  <p:clrMapOvr>
+    <a:masterClrMapping/>
+  </p:clrMapOvr>
+</p:notes>
+</file>
+
+<file path=ppt/notesSlides/notesSlide22.xml><?xml version="1.0" encoding="utf-8"?>
+<p:notes xmlns:a="http://schemas.openxmlformats.org/drawingml/2006/main" xmlns:r="http://schemas.openxmlformats.org/officeDocument/2006/relationships" xmlns:p="http://schemas.openxmlformats.org/presentationml/2006/main">
+  <p:cSld>
+    <p:spTree>
+      <p:nvGrpSpPr>
+        <p:cNvPr id="1" name=""/>
+        <p:cNvGrpSpPr/>
+        <p:nvPr/>
+      </p:nvGrpSpPr>
+      <p:grpSpPr>
+        <a:xfrm>
+          <a:off x="0" y="0"/>
+          <a:ext cx="0" cy="0"/>
+          <a:chOff x="0" y="0"/>
+          <a:chExt cx="0" cy="0"/>
+        </a:xfrm>
+      </p:grpSpPr>
+      <p:sp>
+        <p:nvSpPr>
+          <p:cNvPr id="2" name="Espace réservé de l'image des diapositives 1"/>
+          <p:cNvSpPr>
+            <a:spLocks noGrp="1" noRot="1" noChangeAspect="1"/>
+          </p:cNvSpPr>
+          <p:nvPr>
+            <p:ph type="sldImg"/>
+          </p:nvPr>
+        </p:nvSpPr>
+        <p:spPr/>
+      </p:sp>
+      <p:sp>
+        <p:nvSpPr>
+          <p:cNvPr id="3" name="Espace réservé des notes 2"/>
+          <p:cNvSpPr>
+            <a:spLocks noGrp="1"/>
+          </p:cNvSpPr>
+          <p:nvPr>
+            <p:ph type="body" idx="1"/>
+          </p:nvPr>
+        </p:nvSpPr>
+        <p:spPr/>
+        <p:txBody>
+          <a:bodyPr/>
+          <a:lstStyle/>
+          <a:p>
+            <a:r>
+              <a:rPr lang="fr-CA"/>
+              <a:t>Tristan</a:t>
+            </a:r>
+          </a:p>
+        </p:txBody>
+      </p:sp>
+      <p:sp>
+        <p:nvSpPr>
+          <p:cNvPr id="4" name="Espace réservé du numéro de diapositive 3"/>
+          <p:cNvSpPr>
+            <a:spLocks noGrp="1"/>
+          </p:cNvSpPr>
+          <p:nvPr>
+            <p:ph type="sldNum" sz="quarter" idx="5"/>
+          </p:nvPr>
+        </p:nvSpPr>
+        <p:spPr/>
+        <p:txBody>
+          <a:bodyPr/>
+          <a:lstStyle/>
+          <a:p>
+            <a:fld id="{EA5809C9-D391-499D-8A4B-F46E79386DAE}" type="slidenum">
+              <a:rPr lang="fr-CA" smtClean="0"/>
+              <a:t>22</a:t>
+            </a:fld>
+            <a:endParaRPr lang="fr-CA"/>
+          </a:p>
+        </p:txBody>
+      </p:sp>
+    </p:spTree>
+    <p:extLst>
+      <p:ext uri="{BB962C8B-B14F-4D97-AF65-F5344CB8AC3E}">
+        <p14:creationId xmlns:p14="http://schemas.microsoft.com/office/powerpoint/2010/main" val="123118160"/>
+      </p:ext>
+    </p:extLst>
+  </p:cSld>
+  <p:clrMapOvr>
+    <a:masterClrMapping/>
+  </p:clrMapOvr>
+</p:notes>
+</file>
+
+<file path=ppt/notesSlides/notesSlide23.xml><?xml version="1.0" encoding="utf-8"?>
+<p:notes xmlns:a="http://schemas.openxmlformats.org/drawingml/2006/main" xmlns:r="http://schemas.openxmlformats.org/officeDocument/2006/relationships" xmlns:p="http://schemas.openxmlformats.org/presentationml/2006/main">
+  <p:cSld>
+    <p:spTree>
+      <p:nvGrpSpPr>
+        <p:cNvPr id="1" name=""/>
+        <p:cNvGrpSpPr/>
+        <p:nvPr/>
+      </p:nvGrpSpPr>
+      <p:grpSpPr>
+        <a:xfrm>
+          <a:off x="0" y="0"/>
+          <a:ext cx="0" cy="0"/>
+          <a:chOff x="0" y="0"/>
+          <a:chExt cx="0" cy="0"/>
+        </a:xfrm>
+      </p:grpSpPr>
+      <p:sp>
+        <p:nvSpPr>
+          <p:cNvPr id="2" name="Espace réservé de l'image des diapositives 1"/>
+          <p:cNvSpPr>
+            <a:spLocks noGrp="1" noRot="1" noChangeAspect="1"/>
+          </p:cNvSpPr>
+          <p:nvPr>
+            <p:ph type="sldImg"/>
+          </p:nvPr>
+        </p:nvSpPr>
+        <p:spPr/>
+      </p:sp>
+      <p:sp>
+        <p:nvSpPr>
+          <p:cNvPr id="3" name="Espace réservé des notes 2"/>
+          <p:cNvSpPr>
+            <a:spLocks noGrp="1"/>
+          </p:cNvSpPr>
+          <p:nvPr>
+            <p:ph type="body" idx="1"/>
+          </p:nvPr>
+        </p:nvSpPr>
+        <p:spPr/>
+        <p:txBody>
+          <a:bodyPr/>
+          <a:lstStyle/>
+          <a:p>
+            <a:r>
+              <a:rPr lang="fr-CA"/>
+              <a:t>Yohan</a:t>
+            </a:r>
+          </a:p>
+        </p:txBody>
+      </p:sp>
+      <p:sp>
+        <p:nvSpPr>
+          <p:cNvPr id="4" name="Espace réservé du numéro de diapositive 3"/>
+          <p:cNvSpPr>
+            <a:spLocks noGrp="1"/>
+          </p:cNvSpPr>
+          <p:nvPr>
+            <p:ph type="sldNum" sz="quarter" idx="5"/>
+          </p:nvPr>
+        </p:nvSpPr>
+        <p:spPr/>
+        <p:txBody>
+          <a:bodyPr/>
+          <a:lstStyle/>
+          <a:p>
+            <a:fld id="{EA5809C9-D391-499D-8A4B-F46E79386DAE}" type="slidenum">
+              <a:rPr lang="fr-CA" smtClean="0"/>
+              <a:t>23</a:t>
+            </a:fld>
+            <a:endParaRPr lang="fr-CA"/>
+          </a:p>
+        </p:txBody>
+      </p:sp>
+    </p:spTree>
+    <p:extLst>
+      <p:ext uri="{BB962C8B-B14F-4D97-AF65-F5344CB8AC3E}">
+        <p14:creationId xmlns:p14="http://schemas.microsoft.com/office/powerpoint/2010/main" val="163569825"/>
+      </p:ext>
+    </p:extLst>
+  </p:cSld>
+  <p:clrMapOvr>
+    <a:masterClrMapping/>
+  </p:clrMapOvr>
+</p:notes>
+</file>
+
+<file path=ppt/notesSlides/notesSlide24.xml><?xml version="1.0" encoding="utf-8"?>
+<p:notes xmlns:a="http://schemas.openxmlformats.org/drawingml/2006/main" xmlns:r="http://schemas.openxmlformats.org/officeDocument/2006/relationships" xmlns:p="http://schemas.openxmlformats.org/presentationml/2006/main">
+  <p:cSld>
+    <p:spTree>
+      <p:nvGrpSpPr>
+        <p:cNvPr id="1" name=""/>
+        <p:cNvGrpSpPr/>
+        <p:nvPr/>
+      </p:nvGrpSpPr>
+      <p:grpSpPr>
+        <a:xfrm>
+          <a:off x="0" y="0"/>
+          <a:ext cx="0" cy="0"/>
+          <a:chOff x="0" y="0"/>
+          <a:chExt cx="0" cy="0"/>
+        </a:xfrm>
+      </p:grpSpPr>
+      <p:sp>
+        <p:nvSpPr>
+          <p:cNvPr id="2" name="Espace réservé de l'image des diapositives 1"/>
+          <p:cNvSpPr>
+            <a:spLocks noGrp="1" noRot="1" noChangeAspect="1"/>
+          </p:cNvSpPr>
+          <p:nvPr>
+            <p:ph type="sldImg"/>
+          </p:nvPr>
+        </p:nvSpPr>
+        <p:spPr/>
+      </p:sp>
+      <p:sp>
+        <p:nvSpPr>
+          <p:cNvPr id="3" name="Espace réservé des notes 2"/>
+          <p:cNvSpPr>
+            <a:spLocks noGrp="1"/>
+          </p:cNvSpPr>
+          <p:nvPr>
+            <p:ph type="body" idx="1"/>
+          </p:nvPr>
+        </p:nvSpPr>
+        <p:spPr/>
+        <p:txBody>
+          <a:bodyPr/>
+          <a:lstStyle/>
+          <a:p>
+            <a:r>
+              <a:rPr lang="fr-CA"/>
+              <a:t>Yohan</a:t>
+            </a:r>
+          </a:p>
+        </p:txBody>
+      </p:sp>
+      <p:sp>
+        <p:nvSpPr>
+          <p:cNvPr id="4" name="Espace réservé du numéro de diapositive 3"/>
+          <p:cNvSpPr>
+            <a:spLocks noGrp="1"/>
+          </p:cNvSpPr>
+          <p:nvPr>
+            <p:ph type="sldNum" sz="quarter" idx="5"/>
+          </p:nvPr>
+        </p:nvSpPr>
+        <p:spPr/>
+        <p:txBody>
+          <a:bodyPr/>
+          <a:lstStyle/>
+          <a:p>
+            <a:fld id="{EA5809C9-D391-499D-8A4B-F46E79386DAE}" type="slidenum">
+              <a:rPr lang="fr-CA" smtClean="0"/>
+              <a:t>24</a:t>
+            </a:fld>
+            <a:endParaRPr lang="fr-CA"/>
+          </a:p>
+        </p:txBody>
+      </p:sp>
+    </p:spTree>
+    <p:extLst>
+      <p:ext uri="{BB962C8B-B14F-4D97-AF65-F5344CB8AC3E}">
+        <p14:creationId xmlns:p14="http://schemas.microsoft.com/office/powerpoint/2010/main" val="2840922198"/>
+      </p:ext>
+    </p:extLst>
+  </p:cSld>
+  <p:clrMapOvr>
+    <a:masterClrMapping/>
+  </p:clrMapOvr>
+</p:notes>
+</file>
+
+<file path=ppt/notesSlides/notesSlide25.xml><?xml version="1.0" encoding="utf-8"?>
+<p:notes xmlns:a="http://schemas.openxmlformats.org/drawingml/2006/main" xmlns:r="http://schemas.openxmlformats.org/officeDocument/2006/relationships" xmlns:p="http://schemas.openxmlformats.org/presentationml/2006/main">
+  <p:cSld>
+    <p:spTree>
+      <p:nvGrpSpPr>
+        <p:cNvPr id="1" name=""/>
+        <p:cNvGrpSpPr/>
+        <p:nvPr/>
+      </p:nvGrpSpPr>
+      <p:grpSpPr>
+        <a:xfrm>
+          <a:off x="0" y="0"/>
+          <a:ext cx="0" cy="0"/>
+          <a:chOff x="0" y="0"/>
+          <a:chExt cx="0" cy="0"/>
+        </a:xfrm>
+      </p:grpSpPr>
+      <p:sp>
+        <p:nvSpPr>
+          <p:cNvPr id="2" name="Espace réservé de l'image des diapositives 1"/>
+          <p:cNvSpPr>
+            <a:spLocks noGrp="1" noRot="1" noChangeAspect="1"/>
+          </p:cNvSpPr>
+          <p:nvPr>
+            <p:ph type="sldImg"/>
+          </p:nvPr>
+        </p:nvSpPr>
+        <p:spPr/>
+      </p:sp>
+      <p:sp>
+        <p:nvSpPr>
+          <p:cNvPr id="3" name="Espace réservé des notes 2"/>
+          <p:cNvSpPr>
+            <a:spLocks noGrp="1"/>
+          </p:cNvSpPr>
+          <p:nvPr>
+            <p:ph type="body" idx="1"/>
+          </p:nvPr>
+        </p:nvSpPr>
+        <p:spPr/>
+        <p:txBody>
+          <a:bodyPr/>
+          <a:lstStyle/>
+          <a:p>
+            <a:r>
+              <a:rPr lang="fr-CA"/>
+              <a:t>Yohan</a:t>
+            </a:r>
+          </a:p>
+        </p:txBody>
+      </p:sp>
+      <p:sp>
+        <p:nvSpPr>
+          <p:cNvPr id="4" name="Espace réservé du numéro de diapositive 3"/>
+          <p:cNvSpPr>
+            <a:spLocks noGrp="1"/>
+          </p:cNvSpPr>
+          <p:nvPr>
+            <p:ph type="sldNum" sz="quarter" idx="5"/>
+          </p:nvPr>
+        </p:nvSpPr>
+        <p:spPr/>
+        <p:txBody>
+          <a:bodyPr/>
+          <a:lstStyle/>
+          <a:p>
+            <a:fld id="{EA5809C9-D391-499D-8A4B-F46E79386DAE}" type="slidenum">
+              <a:rPr lang="fr-CA" smtClean="0"/>
+              <a:t>25</a:t>
+            </a:fld>
+            <a:endParaRPr lang="fr-CA"/>
+          </a:p>
+        </p:txBody>
+      </p:sp>
+    </p:spTree>
+    <p:extLst>
+      <p:ext uri="{BB962C8B-B14F-4D97-AF65-F5344CB8AC3E}">
+        <p14:creationId xmlns:p14="http://schemas.microsoft.com/office/powerpoint/2010/main" val="67789111"/>
+      </p:ext>
+    </p:extLst>
+  </p:cSld>
+  <p:clrMapOvr>
+    <a:masterClrMapping/>
+  </p:clrMapOvr>
+</p:notes>
+</file>
+
+<file path=ppt/notesSlides/notesSlide26.xml><?xml version="1.0" encoding="utf-8"?>
+<p:notes xmlns:a="http://schemas.openxmlformats.org/drawingml/2006/main" xmlns:r="http://schemas.openxmlformats.org/officeDocument/2006/relationships" xmlns:p="http://schemas.openxmlformats.org/presentationml/2006/main">
+  <p:cSld>
+    <p:spTree>
+      <p:nvGrpSpPr>
+        <p:cNvPr id="1" name=""/>
+        <p:cNvGrpSpPr/>
+        <p:nvPr/>
+      </p:nvGrpSpPr>
+      <p:grpSpPr>
+        <a:xfrm>
+          <a:off x="0" y="0"/>
+          <a:ext cx="0" cy="0"/>
+          <a:chOff x="0" y="0"/>
+          <a:chExt cx="0" cy="0"/>
+        </a:xfrm>
+      </p:grpSpPr>
+      <p:sp>
+        <p:nvSpPr>
+          <p:cNvPr id="2" name="Espace réservé de l'image des diapositives 1"/>
+          <p:cNvSpPr>
+            <a:spLocks noGrp="1" noRot="1" noChangeAspect="1"/>
+          </p:cNvSpPr>
+          <p:nvPr>
+            <p:ph type="sldImg"/>
+          </p:nvPr>
+        </p:nvSpPr>
+        <p:spPr/>
+      </p:sp>
+      <p:sp>
+        <p:nvSpPr>
+          <p:cNvPr id="3" name="Espace réservé des notes 2"/>
+          <p:cNvSpPr>
+            <a:spLocks noGrp="1"/>
+          </p:cNvSpPr>
+          <p:nvPr>
+            <p:ph type="body" idx="1"/>
+          </p:nvPr>
+        </p:nvSpPr>
+        <p:spPr/>
+        <p:txBody>
+          <a:bodyPr/>
+          <a:lstStyle/>
+          <a:p>
+            <a:r>
+              <a:rPr lang="fr-CA"/>
+              <a:t>Tristan</a:t>
+            </a:r>
+          </a:p>
+        </p:txBody>
+      </p:sp>
+      <p:sp>
+        <p:nvSpPr>
+          <p:cNvPr id="4" name="Espace réservé du numéro de diapositive 3"/>
+          <p:cNvSpPr>
+            <a:spLocks noGrp="1"/>
+          </p:cNvSpPr>
+          <p:nvPr>
+            <p:ph type="sldNum" sz="quarter" idx="5"/>
+          </p:nvPr>
+        </p:nvSpPr>
+        <p:spPr/>
+        <p:txBody>
+          <a:bodyPr/>
+          <a:lstStyle/>
+          <a:p>
+            <a:fld id="{EA5809C9-D391-499D-8A4B-F46E79386DAE}" type="slidenum">
+              <a:rPr lang="fr-CA" smtClean="0"/>
+              <a:t>26</a:t>
+            </a:fld>
+            <a:endParaRPr lang="fr-CA"/>
+          </a:p>
+        </p:txBody>
+      </p:sp>
+    </p:spTree>
+    <p:extLst>
+      <p:ext uri="{BB962C8B-B14F-4D97-AF65-F5344CB8AC3E}">
+        <p14:creationId xmlns:p14="http://schemas.microsoft.com/office/powerpoint/2010/main" val="3172264520"/>
       </p:ext>
     </p:extLst>
   </p:cSld>
@@ -9193,13 +10736,7 @@
   <p:cSld>
     <p:spTree>
       <p:nvGrpSpPr>
-        <p:cNvPr id="1" name="">
-          <a:extLst>
-            <a:ext uri="{FF2B5EF4-FFF2-40B4-BE49-F238E27FC236}">
-              <a16:creationId xmlns:a16="http://schemas.microsoft.com/office/drawing/2014/main" id="{1B19D15B-114A-3505-8E5F-15BA8B48C21E}"/>
-            </a:ext>
-          </a:extLst>
-        </p:cNvPr>
+        <p:cNvPr id="1" name=""/>
         <p:cNvGrpSpPr/>
         <p:nvPr/>
       </p:nvGrpSpPr>
@@ -9213,13 +10750,7 @@
       </p:grpSpPr>
       <p:sp>
         <p:nvSpPr>
-          <p:cNvPr id="2" name="Espace réservé de l'image des diapositives 1">
-            <a:extLst>
-              <a:ext uri="{FF2B5EF4-FFF2-40B4-BE49-F238E27FC236}">
-                <a16:creationId xmlns:a16="http://schemas.microsoft.com/office/drawing/2014/main" id="{F57BFEFD-5229-4463-8239-9870EE864B6B}"/>
-              </a:ext>
-            </a:extLst>
-          </p:cNvPr>
+          <p:cNvPr id="2" name="Espace réservé de l'image des diapositives 1"/>
           <p:cNvSpPr>
             <a:spLocks noGrp="1" noRot="1" noChangeAspect="1"/>
           </p:cNvSpPr>
@@ -9228,23 +10759,10 @@
           </p:nvPr>
         </p:nvSpPr>
         <p:spPr/>
-        <p:txBody>
-          <a:bodyPr/>
-          <a:lstStyle/>
-          <a:p>
-            <a:endParaRPr lang="fr-CA"/>
-          </a:p>
-        </p:txBody>
       </p:sp>
       <p:sp>
         <p:nvSpPr>
-          <p:cNvPr id="3" name="Espace réservé des notes 2">
-            <a:extLst>
-              <a:ext uri="{FF2B5EF4-FFF2-40B4-BE49-F238E27FC236}">
-                <a16:creationId xmlns:a16="http://schemas.microsoft.com/office/drawing/2014/main" id="{864C426F-8D61-023B-4BEE-F0F2B01F5A8C}"/>
-              </a:ext>
-            </a:extLst>
-          </p:cNvPr>
+          <p:cNvPr id="3" name="Espace réservé des notes 2"/>
           <p:cNvSpPr>
             <a:spLocks noGrp="1"/>
           </p:cNvSpPr>
@@ -9259,20 +10777,14 @@
           <a:p>
             <a:r>
               <a:rPr lang="fr-CA"/>
-              <a:t>Parler du critère du COSEPAC avec les analyses de viabilité pour 100 ans</a:t>
+              <a:t>Tristan</a:t>
             </a:r>
           </a:p>
         </p:txBody>
       </p:sp>
       <p:sp>
         <p:nvSpPr>
-          <p:cNvPr id="4" name="Espace réservé du numéro de diapositive 3">
-            <a:extLst>
-              <a:ext uri="{FF2B5EF4-FFF2-40B4-BE49-F238E27FC236}">
-                <a16:creationId xmlns:a16="http://schemas.microsoft.com/office/drawing/2014/main" id="{646BE399-D1BF-B6D7-C969-EE318936F089}"/>
-              </a:ext>
-            </a:extLst>
-          </p:cNvPr>
+          <p:cNvPr id="4" name="Espace réservé du numéro de diapositive 3"/>
           <p:cNvSpPr>
             <a:spLocks noGrp="1"/>
           </p:cNvSpPr>
@@ -9287,7 +10799,7 @@
           <a:p>
             <a:fld id="{EA5809C9-D391-499D-8A4B-F46E79386DAE}" type="slidenum">
               <a:rPr lang="fr-CA" smtClean="0"/>
-              <a:t>18</a:t>
+              <a:t>3</a:t>
             </a:fld>
             <a:endParaRPr lang="fr-CA"/>
           </a:p>
@@ -9296,7 +10808,529 @@
     </p:spTree>
     <p:extLst>
       <p:ext uri="{BB962C8B-B14F-4D97-AF65-F5344CB8AC3E}">
-        <p14:creationId xmlns:p14="http://schemas.microsoft.com/office/powerpoint/2010/main" val="1380242359"/>
+        <p14:creationId xmlns:p14="http://schemas.microsoft.com/office/powerpoint/2010/main" val="2956874470"/>
+      </p:ext>
+    </p:extLst>
+  </p:cSld>
+  <p:clrMapOvr>
+    <a:masterClrMapping/>
+  </p:clrMapOvr>
+</p:notes>
+</file>
+
+<file path=ppt/notesSlides/notesSlide4.xml><?xml version="1.0" encoding="utf-8"?>
+<p:notes xmlns:a="http://schemas.openxmlformats.org/drawingml/2006/main" xmlns:r="http://schemas.openxmlformats.org/officeDocument/2006/relationships" xmlns:p="http://schemas.openxmlformats.org/presentationml/2006/main">
+  <p:cSld>
+    <p:spTree>
+      <p:nvGrpSpPr>
+        <p:cNvPr id="1" name=""/>
+        <p:cNvGrpSpPr/>
+        <p:nvPr/>
+      </p:nvGrpSpPr>
+      <p:grpSpPr>
+        <a:xfrm>
+          <a:off x="0" y="0"/>
+          <a:ext cx="0" cy="0"/>
+          <a:chOff x="0" y="0"/>
+          <a:chExt cx="0" cy="0"/>
+        </a:xfrm>
+      </p:grpSpPr>
+      <p:sp>
+        <p:nvSpPr>
+          <p:cNvPr id="2" name="Espace réservé de l'image des diapositives 1"/>
+          <p:cNvSpPr>
+            <a:spLocks noGrp="1" noRot="1" noChangeAspect="1"/>
+          </p:cNvSpPr>
+          <p:nvPr>
+            <p:ph type="sldImg"/>
+          </p:nvPr>
+        </p:nvSpPr>
+        <p:spPr/>
+      </p:sp>
+      <p:sp>
+        <p:nvSpPr>
+          <p:cNvPr id="3" name="Espace réservé des notes 2"/>
+          <p:cNvSpPr>
+            <a:spLocks noGrp="1"/>
+          </p:cNvSpPr>
+          <p:nvPr>
+            <p:ph type="body" idx="1"/>
+          </p:nvPr>
+        </p:nvSpPr>
+        <p:spPr/>
+        <p:txBody>
+          <a:bodyPr/>
+          <a:lstStyle/>
+          <a:p>
+            <a:r>
+              <a:rPr lang="fr-CA"/>
+              <a:t>Yohan</a:t>
+            </a:r>
+          </a:p>
+        </p:txBody>
+      </p:sp>
+      <p:sp>
+        <p:nvSpPr>
+          <p:cNvPr id="4" name="Espace réservé du numéro de diapositive 3"/>
+          <p:cNvSpPr>
+            <a:spLocks noGrp="1"/>
+          </p:cNvSpPr>
+          <p:nvPr>
+            <p:ph type="sldNum" sz="quarter" idx="5"/>
+          </p:nvPr>
+        </p:nvSpPr>
+        <p:spPr/>
+        <p:txBody>
+          <a:bodyPr/>
+          <a:lstStyle/>
+          <a:p>
+            <a:fld id="{EA5809C9-D391-499D-8A4B-F46E79386DAE}" type="slidenum">
+              <a:rPr lang="fr-CA" smtClean="0"/>
+              <a:t>4</a:t>
+            </a:fld>
+            <a:endParaRPr lang="fr-CA"/>
+          </a:p>
+        </p:txBody>
+      </p:sp>
+    </p:spTree>
+    <p:extLst>
+      <p:ext uri="{BB962C8B-B14F-4D97-AF65-F5344CB8AC3E}">
+        <p14:creationId xmlns:p14="http://schemas.microsoft.com/office/powerpoint/2010/main" val="1382262050"/>
+      </p:ext>
+    </p:extLst>
+  </p:cSld>
+  <p:clrMapOvr>
+    <a:masterClrMapping/>
+  </p:clrMapOvr>
+</p:notes>
+</file>
+
+<file path=ppt/notesSlides/notesSlide5.xml><?xml version="1.0" encoding="utf-8"?>
+<p:notes xmlns:a="http://schemas.openxmlformats.org/drawingml/2006/main" xmlns:r="http://schemas.openxmlformats.org/officeDocument/2006/relationships" xmlns:p="http://schemas.openxmlformats.org/presentationml/2006/main">
+  <p:cSld>
+    <p:spTree>
+      <p:nvGrpSpPr>
+        <p:cNvPr id="1" name=""/>
+        <p:cNvGrpSpPr/>
+        <p:nvPr/>
+      </p:nvGrpSpPr>
+      <p:grpSpPr>
+        <a:xfrm>
+          <a:off x="0" y="0"/>
+          <a:ext cx="0" cy="0"/>
+          <a:chOff x="0" y="0"/>
+          <a:chExt cx="0" cy="0"/>
+        </a:xfrm>
+      </p:grpSpPr>
+      <p:sp>
+        <p:nvSpPr>
+          <p:cNvPr id="2" name="Espace réservé de l'image des diapositives 1"/>
+          <p:cNvSpPr>
+            <a:spLocks noGrp="1" noRot="1" noChangeAspect="1"/>
+          </p:cNvSpPr>
+          <p:nvPr>
+            <p:ph type="sldImg"/>
+          </p:nvPr>
+        </p:nvSpPr>
+        <p:spPr/>
+      </p:sp>
+      <p:sp>
+        <p:nvSpPr>
+          <p:cNvPr id="3" name="Espace réservé des notes 2"/>
+          <p:cNvSpPr>
+            <a:spLocks noGrp="1"/>
+          </p:cNvSpPr>
+          <p:nvPr>
+            <p:ph type="body" idx="1"/>
+          </p:nvPr>
+        </p:nvSpPr>
+        <p:spPr/>
+        <p:txBody>
+          <a:bodyPr/>
+          <a:lstStyle/>
+          <a:p>
+            <a:r>
+              <a:rPr lang="fr-CA"/>
+              <a:t>Yohan</a:t>
+            </a:r>
+          </a:p>
+        </p:txBody>
+      </p:sp>
+      <p:sp>
+        <p:nvSpPr>
+          <p:cNvPr id="4" name="Espace réservé du numéro de diapositive 3"/>
+          <p:cNvSpPr>
+            <a:spLocks noGrp="1"/>
+          </p:cNvSpPr>
+          <p:nvPr>
+            <p:ph type="sldNum" sz="quarter" idx="5"/>
+          </p:nvPr>
+        </p:nvSpPr>
+        <p:spPr/>
+        <p:txBody>
+          <a:bodyPr/>
+          <a:lstStyle/>
+          <a:p>
+            <a:fld id="{EA5809C9-D391-499D-8A4B-F46E79386DAE}" type="slidenum">
+              <a:rPr lang="fr-CA" smtClean="0"/>
+              <a:t>5</a:t>
+            </a:fld>
+            <a:endParaRPr lang="fr-CA"/>
+          </a:p>
+        </p:txBody>
+      </p:sp>
+    </p:spTree>
+    <p:extLst>
+      <p:ext uri="{BB962C8B-B14F-4D97-AF65-F5344CB8AC3E}">
+        <p14:creationId xmlns:p14="http://schemas.microsoft.com/office/powerpoint/2010/main" val="922962514"/>
+      </p:ext>
+    </p:extLst>
+  </p:cSld>
+  <p:clrMapOvr>
+    <a:masterClrMapping/>
+  </p:clrMapOvr>
+</p:notes>
+</file>
+
+<file path=ppt/notesSlides/notesSlide6.xml><?xml version="1.0" encoding="utf-8"?>
+<p:notes xmlns:a="http://schemas.openxmlformats.org/drawingml/2006/main" xmlns:r="http://schemas.openxmlformats.org/officeDocument/2006/relationships" xmlns:p="http://schemas.openxmlformats.org/presentationml/2006/main">
+  <p:cSld>
+    <p:spTree>
+      <p:nvGrpSpPr>
+        <p:cNvPr id="1" name=""/>
+        <p:cNvGrpSpPr/>
+        <p:nvPr/>
+      </p:nvGrpSpPr>
+      <p:grpSpPr>
+        <a:xfrm>
+          <a:off x="0" y="0"/>
+          <a:ext cx="0" cy="0"/>
+          <a:chOff x="0" y="0"/>
+          <a:chExt cx="0" cy="0"/>
+        </a:xfrm>
+      </p:grpSpPr>
+      <p:sp>
+        <p:nvSpPr>
+          <p:cNvPr id="2" name="Espace réservé de l'image des diapositives 1"/>
+          <p:cNvSpPr>
+            <a:spLocks noGrp="1" noRot="1" noChangeAspect="1"/>
+          </p:cNvSpPr>
+          <p:nvPr>
+            <p:ph type="sldImg"/>
+          </p:nvPr>
+        </p:nvSpPr>
+        <p:spPr/>
+      </p:sp>
+      <p:sp>
+        <p:nvSpPr>
+          <p:cNvPr id="3" name="Espace réservé des notes 2"/>
+          <p:cNvSpPr>
+            <a:spLocks noGrp="1"/>
+          </p:cNvSpPr>
+          <p:nvPr>
+            <p:ph type="body" idx="1"/>
+          </p:nvPr>
+        </p:nvSpPr>
+        <p:spPr/>
+        <p:txBody>
+          <a:bodyPr/>
+          <a:lstStyle/>
+          <a:p>
+            <a:r>
+              <a:rPr lang="fr-CA"/>
+              <a:t>Yohan</a:t>
+            </a:r>
+          </a:p>
+        </p:txBody>
+      </p:sp>
+      <p:sp>
+        <p:nvSpPr>
+          <p:cNvPr id="4" name="Espace réservé du numéro de diapositive 3"/>
+          <p:cNvSpPr>
+            <a:spLocks noGrp="1"/>
+          </p:cNvSpPr>
+          <p:nvPr>
+            <p:ph type="sldNum" sz="quarter" idx="5"/>
+          </p:nvPr>
+        </p:nvSpPr>
+        <p:spPr/>
+        <p:txBody>
+          <a:bodyPr/>
+          <a:lstStyle/>
+          <a:p>
+            <a:fld id="{EA5809C9-D391-499D-8A4B-F46E79386DAE}" type="slidenum">
+              <a:rPr lang="fr-CA" smtClean="0"/>
+              <a:t>6</a:t>
+            </a:fld>
+            <a:endParaRPr lang="fr-CA"/>
+          </a:p>
+        </p:txBody>
+      </p:sp>
+    </p:spTree>
+    <p:extLst>
+      <p:ext uri="{BB962C8B-B14F-4D97-AF65-F5344CB8AC3E}">
+        <p14:creationId xmlns:p14="http://schemas.microsoft.com/office/powerpoint/2010/main" val="3553039716"/>
+      </p:ext>
+    </p:extLst>
+  </p:cSld>
+  <p:clrMapOvr>
+    <a:masterClrMapping/>
+  </p:clrMapOvr>
+</p:notes>
+</file>
+
+<file path=ppt/notesSlides/notesSlide7.xml><?xml version="1.0" encoding="utf-8"?>
+<p:notes xmlns:a="http://schemas.openxmlformats.org/drawingml/2006/main" xmlns:r="http://schemas.openxmlformats.org/officeDocument/2006/relationships" xmlns:p="http://schemas.openxmlformats.org/presentationml/2006/main">
+  <p:cSld>
+    <p:spTree>
+      <p:nvGrpSpPr>
+        <p:cNvPr id="1" name=""/>
+        <p:cNvGrpSpPr/>
+        <p:nvPr/>
+      </p:nvGrpSpPr>
+      <p:grpSpPr>
+        <a:xfrm>
+          <a:off x="0" y="0"/>
+          <a:ext cx="0" cy="0"/>
+          <a:chOff x="0" y="0"/>
+          <a:chExt cx="0" cy="0"/>
+        </a:xfrm>
+      </p:grpSpPr>
+      <p:sp>
+        <p:nvSpPr>
+          <p:cNvPr id="2" name="Espace réservé de l'image des diapositives 1"/>
+          <p:cNvSpPr>
+            <a:spLocks noGrp="1" noRot="1" noChangeAspect="1"/>
+          </p:cNvSpPr>
+          <p:nvPr>
+            <p:ph type="sldImg"/>
+          </p:nvPr>
+        </p:nvSpPr>
+        <p:spPr/>
+      </p:sp>
+      <p:sp>
+        <p:nvSpPr>
+          <p:cNvPr id="3" name="Espace réservé des notes 2"/>
+          <p:cNvSpPr>
+            <a:spLocks noGrp="1"/>
+          </p:cNvSpPr>
+          <p:nvPr>
+            <p:ph type="body" idx="1"/>
+          </p:nvPr>
+        </p:nvSpPr>
+        <p:spPr/>
+        <p:txBody>
+          <a:bodyPr/>
+          <a:lstStyle/>
+          <a:p>
+            <a:r>
+              <a:rPr lang="fr-CA" dirty="0"/>
+              <a:t>Parler du critère du COSEPAC avec les analyses de viabilité pour 100 ans</a:t>
+            </a:r>
+          </a:p>
+        </p:txBody>
+      </p:sp>
+      <p:sp>
+        <p:nvSpPr>
+          <p:cNvPr id="4" name="Espace réservé du numéro de diapositive 3"/>
+          <p:cNvSpPr>
+            <a:spLocks noGrp="1"/>
+          </p:cNvSpPr>
+          <p:nvPr>
+            <p:ph type="sldNum" sz="quarter" idx="5"/>
+          </p:nvPr>
+        </p:nvSpPr>
+        <p:spPr/>
+        <p:txBody>
+          <a:bodyPr/>
+          <a:lstStyle/>
+          <a:p>
+            <a:fld id="{EA5809C9-D391-499D-8A4B-F46E79386DAE}" type="slidenum">
+              <a:rPr lang="fr-CA" smtClean="0"/>
+              <a:t>7</a:t>
+            </a:fld>
+            <a:endParaRPr lang="fr-CA"/>
+          </a:p>
+        </p:txBody>
+      </p:sp>
+    </p:spTree>
+    <p:extLst>
+      <p:ext uri="{BB962C8B-B14F-4D97-AF65-F5344CB8AC3E}">
+        <p14:creationId xmlns:p14="http://schemas.microsoft.com/office/powerpoint/2010/main" val="2583923570"/>
+      </p:ext>
+    </p:extLst>
+  </p:cSld>
+  <p:clrMapOvr>
+    <a:masterClrMapping/>
+  </p:clrMapOvr>
+</p:notes>
+</file>
+
+<file path=ppt/notesSlides/notesSlide8.xml><?xml version="1.0" encoding="utf-8"?>
+<p:notes xmlns:a="http://schemas.openxmlformats.org/drawingml/2006/main" xmlns:r="http://schemas.openxmlformats.org/officeDocument/2006/relationships" xmlns:p="http://schemas.openxmlformats.org/presentationml/2006/main">
+  <p:cSld>
+    <p:spTree>
+      <p:nvGrpSpPr>
+        <p:cNvPr id="1" name=""/>
+        <p:cNvGrpSpPr/>
+        <p:nvPr/>
+      </p:nvGrpSpPr>
+      <p:grpSpPr>
+        <a:xfrm>
+          <a:off x="0" y="0"/>
+          <a:ext cx="0" cy="0"/>
+          <a:chOff x="0" y="0"/>
+          <a:chExt cx="0" cy="0"/>
+        </a:xfrm>
+      </p:grpSpPr>
+      <p:sp>
+        <p:nvSpPr>
+          <p:cNvPr id="2" name="Espace réservé de l'image des diapositives 1"/>
+          <p:cNvSpPr>
+            <a:spLocks noGrp="1" noRot="1" noChangeAspect="1"/>
+          </p:cNvSpPr>
+          <p:nvPr>
+            <p:ph type="sldImg"/>
+          </p:nvPr>
+        </p:nvSpPr>
+        <p:spPr/>
+      </p:sp>
+      <p:sp>
+        <p:nvSpPr>
+          <p:cNvPr id="3" name="Espace réservé des notes 2"/>
+          <p:cNvSpPr>
+            <a:spLocks noGrp="1"/>
+          </p:cNvSpPr>
+          <p:nvPr>
+            <p:ph type="body" idx="1"/>
+          </p:nvPr>
+        </p:nvSpPr>
+        <p:spPr/>
+        <p:txBody>
+          <a:bodyPr/>
+          <a:lstStyle/>
+          <a:p>
+            <a:r>
+              <a:rPr lang="fr-CA"/>
+              <a:t>Tristan</a:t>
+            </a:r>
+          </a:p>
+        </p:txBody>
+      </p:sp>
+      <p:sp>
+        <p:nvSpPr>
+          <p:cNvPr id="4" name="Espace réservé du numéro de diapositive 3"/>
+          <p:cNvSpPr>
+            <a:spLocks noGrp="1"/>
+          </p:cNvSpPr>
+          <p:nvPr>
+            <p:ph type="sldNum" sz="quarter" idx="5"/>
+          </p:nvPr>
+        </p:nvSpPr>
+        <p:spPr/>
+        <p:txBody>
+          <a:bodyPr/>
+          <a:lstStyle/>
+          <a:p>
+            <a:fld id="{EA5809C9-D391-499D-8A4B-F46E79386DAE}" type="slidenum">
+              <a:rPr lang="fr-CA" smtClean="0"/>
+              <a:t>8</a:t>
+            </a:fld>
+            <a:endParaRPr lang="fr-CA"/>
+          </a:p>
+        </p:txBody>
+      </p:sp>
+    </p:spTree>
+    <p:extLst>
+      <p:ext uri="{BB962C8B-B14F-4D97-AF65-F5344CB8AC3E}">
+        <p14:creationId xmlns:p14="http://schemas.microsoft.com/office/powerpoint/2010/main" val="2508808863"/>
+      </p:ext>
+    </p:extLst>
+  </p:cSld>
+  <p:clrMapOvr>
+    <a:masterClrMapping/>
+  </p:clrMapOvr>
+</p:notes>
+</file>
+
+<file path=ppt/notesSlides/notesSlide9.xml><?xml version="1.0" encoding="utf-8"?>
+<p:notes xmlns:a="http://schemas.openxmlformats.org/drawingml/2006/main" xmlns:r="http://schemas.openxmlformats.org/officeDocument/2006/relationships" xmlns:p="http://schemas.openxmlformats.org/presentationml/2006/main">
+  <p:cSld>
+    <p:spTree>
+      <p:nvGrpSpPr>
+        <p:cNvPr id="1" name=""/>
+        <p:cNvGrpSpPr/>
+        <p:nvPr/>
+      </p:nvGrpSpPr>
+      <p:grpSpPr>
+        <a:xfrm>
+          <a:off x="0" y="0"/>
+          <a:ext cx="0" cy="0"/>
+          <a:chOff x="0" y="0"/>
+          <a:chExt cx="0" cy="0"/>
+        </a:xfrm>
+      </p:grpSpPr>
+      <p:sp>
+        <p:nvSpPr>
+          <p:cNvPr id="2" name="Espace réservé de l'image des diapositives 1"/>
+          <p:cNvSpPr>
+            <a:spLocks noGrp="1" noRot="1" noChangeAspect="1"/>
+          </p:cNvSpPr>
+          <p:nvPr>
+            <p:ph type="sldImg"/>
+          </p:nvPr>
+        </p:nvSpPr>
+        <p:spPr/>
+      </p:sp>
+      <p:sp>
+        <p:nvSpPr>
+          <p:cNvPr id="3" name="Espace réservé des notes 2"/>
+          <p:cNvSpPr>
+            <a:spLocks noGrp="1"/>
+          </p:cNvSpPr>
+          <p:nvPr>
+            <p:ph type="body" idx="1"/>
+          </p:nvPr>
+        </p:nvSpPr>
+        <p:spPr/>
+        <p:txBody>
+          <a:bodyPr/>
+          <a:lstStyle/>
+          <a:p>
+            <a:r>
+              <a:rPr lang="fr-CA"/>
+              <a:t>Tristan</a:t>
+            </a:r>
+          </a:p>
+        </p:txBody>
+      </p:sp>
+      <p:sp>
+        <p:nvSpPr>
+          <p:cNvPr id="4" name="Espace réservé du numéro de diapositive 3"/>
+          <p:cNvSpPr>
+            <a:spLocks noGrp="1"/>
+          </p:cNvSpPr>
+          <p:nvPr>
+            <p:ph type="sldNum" sz="quarter" idx="5"/>
+          </p:nvPr>
+        </p:nvSpPr>
+        <p:spPr/>
+        <p:txBody>
+          <a:bodyPr/>
+          <a:lstStyle/>
+          <a:p>
+            <a:fld id="{EA5809C9-D391-499D-8A4B-F46E79386DAE}" type="slidenum">
+              <a:rPr lang="fr-CA" smtClean="0"/>
+              <a:t>9</a:t>
+            </a:fld>
+            <a:endParaRPr lang="fr-CA"/>
+          </a:p>
+        </p:txBody>
+      </p:sp>
+    </p:spTree>
+    <p:extLst>
+      <p:ext uri="{BB962C8B-B14F-4D97-AF65-F5344CB8AC3E}">
+        <p14:creationId xmlns:p14="http://schemas.microsoft.com/office/powerpoint/2010/main" val="965959656"/>
       </p:ext>
     </p:extLst>
   </p:cSld>
@@ -9359,6 +11393,7 @@
               <a:rPr lang="en-US"/>
               <a:t>Click to edit Master title style</a:t>
             </a:r>
+            <a:endParaRPr lang="en-US" dirty="0"/>
           </a:p>
         </p:txBody>
       </p:sp>
@@ -9431,6 +11466,7 @@
               <a:rPr lang="en-US"/>
               <a:t>Click to edit Master subtitle style</a:t>
             </a:r>
+            <a:endParaRPr lang="en-US" dirty="0"/>
           </a:p>
         </p:txBody>
       </p:sp>
@@ -9484,7 +11520,7 @@
           <a:bodyPr/>
           <a:lstStyle/>
           <a:p>
-            <a:endParaRPr lang="en-US"/>
+            <a:endParaRPr lang="en-US" dirty="0"/>
           </a:p>
         </p:txBody>
       </p:sp>
@@ -9511,7 +11547,7 @@
           <a:p>
             <a:fld id="{87E7843D-FF13-4365-9478-9625B70A2705}" type="slidenum">
               <a:rPr lang="en-US" smtClean="0"/>
-              <a:t>‹N°›</a:t>
+              <a:t>‹n°›</a:t>
             </a:fld>
             <a:endParaRPr lang="en-US"/>
           </a:p>
@@ -9572,6 +11608,7 @@
               <a:rPr lang="en-US"/>
               <a:t>Click to edit Master title style</a:t>
             </a:r>
+            <a:endParaRPr lang="en-US" dirty="0"/>
           </a:p>
         </p:txBody>
       </p:sp>
@@ -9629,6 +11666,7 @@
               <a:rPr lang="en-US"/>
               <a:t>Fifth level</a:t>
             </a:r>
+            <a:endParaRPr lang="en-US" dirty="0"/>
           </a:p>
         </p:txBody>
       </p:sp>
@@ -9682,7 +11720,7 @@
           <a:bodyPr/>
           <a:lstStyle/>
           <a:p>
-            <a:endParaRPr lang="en-US"/>
+            <a:endParaRPr lang="en-US" dirty="0"/>
           </a:p>
         </p:txBody>
       </p:sp>
@@ -9709,7 +11747,7 @@
           <a:p>
             <a:fld id="{87E7843D-FF13-4365-9478-9625B70A2705}" type="slidenum">
               <a:rPr lang="en-US" smtClean="0"/>
-              <a:t>‹N°›</a:t>
+              <a:t>‹n°›</a:t>
             </a:fld>
             <a:endParaRPr lang="en-US"/>
           </a:p>
@@ -9775,6 +11813,7 @@
               <a:rPr lang="en-US"/>
               <a:t>Click to edit Master title style</a:t>
             </a:r>
+            <a:endParaRPr lang="en-US" dirty="0"/>
           </a:p>
         </p:txBody>
       </p:sp>
@@ -9837,6 +11876,7 @@
               <a:rPr lang="en-US"/>
               <a:t>Fifth level</a:t>
             </a:r>
+            <a:endParaRPr lang="en-US" dirty="0"/>
           </a:p>
         </p:txBody>
       </p:sp>
@@ -9890,7 +11930,7 @@
           <a:bodyPr/>
           <a:lstStyle/>
           <a:p>
-            <a:endParaRPr lang="en-US"/>
+            <a:endParaRPr lang="en-US" dirty="0"/>
           </a:p>
         </p:txBody>
       </p:sp>
@@ -9917,7 +11957,7 @@
           <a:p>
             <a:fld id="{87E7843D-FF13-4365-9478-9625B70A2705}" type="slidenum">
               <a:rPr lang="en-US" smtClean="0"/>
-              <a:t>‹N°›</a:t>
+              <a:t>‹n°›</a:t>
             </a:fld>
             <a:endParaRPr lang="en-US"/>
           </a:p>
@@ -9978,6 +12018,7 @@
               <a:rPr lang="en-US"/>
               <a:t>Click to edit Master title style</a:t>
             </a:r>
+            <a:endParaRPr lang="en-US" dirty="0"/>
           </a:p>
         </p:txBody>
       </p:sp>
@@ -10035,6 +12076,7 @@
               <a:rPr lang="en-US"/>
               <a:t>Fifth level</a:t>
             </a:r>
+            <a:endParaRPr lang="en-US" dirty="0"/>
           </a:p>
         </p:txBody>
       </p:sp>
@@ -10088,7 +12130,7 @@
           <a:bodyPr/>
           <a:lstStyle/>
           <a:p>
-            <a:endParaRPr lang="en-US"/>
+            <a:endParaRPr lang="en-US" dirty="0"/>
           </a:p>
         </p:txBody>
       </p:sp>
@@ -10115,7 +12157,7 @@
           <a:p>
             <a:fld id="{87E7843D-FF13-4365-9478-9625B70A2705}" type="slidenum">
               <a:rPr lang="en-US" smtClean="0"/>
-              <a:t>‹N°›</a:t>
+              <a:t>‹n°›</a:t>
             </a:fld>
             <a:endParaRPr lang="en-US"/>
           </a:p>
@@ -10185,6 +12227,7 @@
               <a:rPr lang="en-US"/>
               <a:t>Click to edit Master title style</a:t>
             </a:r>
+            <a:endParaRPr lang="en-US" dirty="0"/>
           </a:p>
         </p:txBody>
       </p:sp>
@@ -10363,7 +12406,7 @@
           <a:bodyPr/>
           <a:lstStyle/>
           <a:p>
-            <a:endParaRPr lang="en-US"/>
+            <a:endParaRPr lang="en-US" dirty="0"/>
           </a:p>
         </p:txBody>
       </p:sp>
@@ -10390,7 +12433,7 @@
           <a:p>
             <a:fld id="{87E7843D-FF13-4365-9478-9625B70A2705}" type="slidenum">
               <a:rPr lang="en-US" smtClean="0"/>
-              <a:t>‹N°›</a:t>
+              <a:t>‹n°›</a:t>
             </a:fld>
             <a:endParaRPr lang="en-US"/>
           </a:p>
@@ -10456,6 +12499,7 @@
               <a:rPr lang="en-US"/>
               <a:t>Click to edit Master title style</a:t>
             </a:r>
+            <a:endParaRPr lang="en-US" dirty="0"/>
           </a:p>
         </p:txBody>
       </p:sp>
@@ -10518,6 +12562,7 @@
               <a:rPr lang="en-US"/>
               <a:t>Fifth level</a:t>
             </a:r>
+            <a:endParaRPr lang="en-US" dirty="0"/>
           </a:p>
         </p:txBody>
       </p:sp>
@@ -10580,6 +12625,7 @@
               <a:rPr lang="en-US"/>
               <a:t>Fifth level</a:t>
             </a:r>
+            <a:endParaRPr lang="en-US" dirty="0"/>
           </a:p>
         </p:txBody>
       </p:sp>
@@ -10633,7 +12679,7 @@
           <a:bodyPr/>
           <a:lstStyle/>
           <a:p>
-            <a:endParaRPr lang="en-US"/>
+            <a:endParaRPr lang="en-US" dirty="0"/>
           </a:p>
         </p:txBody>
       </p:sp>
@@ -10660,7 +12706,7 @@
           <a:p>
             <a:fld id="{87E7843D-FF13-4365-9478-9625B70A2705}" type="slidenum">
               <a:rPr lang="en-US" smtClean="0"/>
-              <a:t>‹N°›</a:t>
+              <a:t>‹n°›</a:t>
             </a:fld>
             <a:endParaRPr lang="en-US"/>
           </a:p>
@@ -10726,6 +12772,7 @@
               <a:rPr lang="en-US"/>
               <a:t>Click to edit Master title style</a:t>
             </a:r>
+            <a:endParaRPr lang="en-US" dirty="0"/>
           </a:p>
         </p:txBody>
       </p:sp>
@@ -10863,6 +12910,7 @@
               <a:rPr lang="en-US"/>
               <a:t>Fifth level</a:t>
             </a:r>
+            <a:endParaRPr lang="en-US" dirty="0"/>
           </a:p>
         </p:txBody>
       </p:sp>
@@ -11000,6 +13048,7 @@
               <a:rPr lang="en-US"/>
               <a:t>Fifth level</a:t>
             </a:r>
+            <a:endParaRPr lang="en-US" dirty="0"/>
           </a:p>
         </p:txBody>
       </p:sp>
@@ -11053,7 +13102,7 @@
           <a:bodyPr/>
           <a:lstStyle/>
           <a:p>
-            <a:endParaRPr lang="en-US"/>
+            <a:endParaRPr lang="en-US" dirty="0"/>
           </a:p>
         </p:txBody>
       </p:sp>
@@ -11080,7 +13129,7 @@
           <a:p>
             <a:fld id="{87E7843D-FF13-4365-9478-9625B70A2705}" type="slidenum">
               <a:rPr lang="en-US" smtClean="0"/>
-              <a:t>‹N°›</a:t>
+              <a:t>‹n°›</a:t>
             </a:fld>
             <a:endParaRPr lang="en-US"/>
           </a:p>
@@ -11141,6 +13190,7 @@
               <a:rPr lang="en-US"/>
               <a:t>Click to edit Master title style</a:t>
             </a:r>
+            <a:endParaRPr lang="en-US" dirty="0"/>
           </a:p>
         </p:txBody>
       </p:sp>
@@ -11194,7 +13244,7 @@
           <a:bodyPr/>
           <a:lstStyle/>
           <a:p>
-            <a:endParaRPr lang="en-US"/>
+            <a:endParaRPr lang="en-US" dirty="0"/>
           </a:p>
         </p:txBody>
       </p:sp>
@@ -11221,7 +13271,7 @@
           <a:p>
             <a:fld id="{87E7843D-FF13-4365-9478-9625B70A2705}" type="slidenum">
               <a:rPr lang="en-US" smtClean="0"/>
-              <a:t>‹N°›</a:t>
+              <a:t>‹n°›</a:t>
             </a:fld>
             <a:endParaRPr lang="en-US"/>
           </a:p>
@@ -11307,7 +13357,7 @@
           <a:bodyPr/>
           <a:lstStyle/>
           <a:p>
-            <a:endParaRPr lang="en-US"/>
+            <a:endParaRPr lang="en-US" dirty="0"/>
           </a:p>
         </p:txBody>
       </p:sp>
@@ -11334,7 +13384,7 @@
           <a:p>
             <a:fld id="{87E7843D-FF13-4365-9478-9625B70A2705}" type="slidenum">
               <a:rPr lang="en-US" smtClean="0"/>
-              <a:t>‹N°›</a:t>
+              <a:t>‹n°›</a:t>
             </a:fld>
             <a:endParaRPr lang="en-US"/>
           </a:p>
@@ -11404,6 +13454,7 @@
               <a:rPr lang="en-US"/>
               <a:t>Click to edit Master title style</a:t>
             </a:r>
+            <a:endParaRPr lang="en-US" dirty="0"/>
           </a:p>
         </p:txBody>
       </p:sp>
@@ -11494,6 +13545,7 @@
               <a:rPr lang="en-US"/>
               <a:t>Fifth level</a:t>
             </a:r>
+            <a:endParaRPr lang="en-US" dirty="0"/>
           </a:p>
         </p:txBody>
       </p:sp>
@@ -11618,7 +13670,7 @@
           <a:bodyPr/>
           <a:lstStyle/>
           <a:p>
-            <a:endParaRPr lang="en-US"/>
+            <a:endParaRPr lang="en-US" dirty="0"/>
           </a:p>
         </p:txBody>
       </p:sp>
@@ -11645,7 +13697,7 @@
           <a:p>
             <a:fld id="{87E7843D-FF13-4365-9478-9625B70A2705}" type="slidenum">
               <a:rPr lang="en-US" smtClean="0"/>
-              <a:t>‹N°›</a:t>
+              <a:t>‹n°›</a:t>
             </a:fld>
             <a:endParaRPr lang="en-US"/>
           </a:p>
@@ -11715,6 +13767,7 @@
               <a:rPr lang="en-US"/>
               <a:t>Click to edit Master title style</a:t>
             </a:r>
+            <a:endParaRPr lang="en-US" dirty="0"/>
           </a:p>
         </p:txBody>
       </p:sp>
@@ -11785,6 +13838,7 @@
               <a:rPr lang="en-US"/>
               <a:t>Click icon to add picture</a:t>
             </a:r>
+            <a:endParaRPr lang="en-US" dirty="0"/>
           </a:p>
         </p:txBody>
       </p:sp>
@@ -11909,7 +13963,7 @@
           <a:bodyPr/>
           <a:lstStyle/>
           <a:p>
-            <a:endParaRPr lang="en-US"/>
+            <a:endParaRPr lang="en-US" dirty="0"/>
           </a:p>
         </p:txBody>
       </p:sp>
@@ -11936,7 +13990,7 @@
           <a:p>
             <a:fld id="{87E7843D-FF13-4365-9478-9625B70A2705}" type="slidenum">
               <a:rPr lang="en-US" smtClean="0"/>
-              <a:t>‹N°›</a:t>
+              <a:t>‹n°›</a:t>
             </a:fld>
             <a:endParaRPr lang="en-US"/>
           </a:p>
@@ -12012,6 +14066,7 @@
               <a:rPr lang="en-US"/>
               <a:t>Click to edit Master title style</a:t>
             </a:r>
+            <a:endParaRPr lang="en-US" dirty="0"/>
           </a:p>
         </p:txBody>
       </p:sp>
@@ -12079,6 +14134,7 @@
               <a:rPr lang="en-US"/>
               <a:t>Fifth level</a:t>
             </a:r>
+            <a:endParaRPr lang="en-US" dirty="0"/>
           </a:p>
         </p:txBody>
       </p:sp>
@@ -12166,7 +14222,7 @@
             </a:lvl1pPr>
           </a:lstStyle>
           <a:p>
-            <a:endParaRPr lang="en-US"/>
+            <a:endParaRPr lang="en-US" dirty="0"/>
           </a:p>
         </p:txBody>
       </p:sp>
@@ -12209,7 +14265,7 @@
           <a:p>
             <a:fld id="{87E7843D-FF13-4365-9478-9625B70A2705}" type="slidenum">
               <a:rPr lang="en-US" smtClean="0"/>
-              <a:t>‹N°›</a:t>
+              <a:t>‹n°›</a:t>
             </a:fld>
             <a:endParaRPr lang="en-US"/>
           </a:p>
@@ -12754,7 +14810,7 @@
           <p:nvPr/>
         </p:nvPicPr>
         <p:blipFill>
-          <a:blip r:embed="rId2">
+          <a:blip r:embed="rId3">
             <a:extLst>
               <a:ext uri="{28A0092B-C50C-407E-A947-70E740481C1C}">
                 <a14:useLocalDpi xmlns:a14="http://schemas.microsoft.com/office/drawing/2010/main" val="0"/>
@@ -12917,7 +14973,7 @@
               </a:lnSpc>
             </a:pPr>
             <a:r>
-              <a:rPr lang="fr-CA" sz="3100"/>
+              <a:rPr lang="fr-CA" sz="3100" dirty="0"/>
               <a:t>État de la situation du chevalier cuivré </a:t>
             </a:r>
           </a:p>
@@ -12953,7 +15009,7 @@
           <a:p>
             <a:pPr algn="r"/>
             <a:r>
-              <a:rPr lang="fr-CA" sz="600"/>
+              <a:rPr lang="fr-CA" sz="600" dirty="0"/>
               <a:t>https://www.quebec.ca/agriculture-environnement-et-ressources-naturelles/faune/animaux-sauvages-quebec/fiches-especes-fauniques/chevalier-cuivre</a:t>
             </a:r>
           </a:p>
@@ -13227,7 +15283,7 @@
           <p:nvPr/>
         </p:nvPicPr>
         <p:blipFill>
-          <a:blip r:embed="rId2"/>
+          <a:blip r:embed="rId3"/>
           <a:stretch>
             <a:fillRect/>
           </a:stretch>
@@ -13257,7 +15313,7 @@
           <p:nvPr/>
         </p:nvPicPr>
         <p:blipFill>
-          <a:blip r:embed="rId3"/>
+          <a:blip r:embed="rId4"/>
           <a:stretch>
             <a:fillRect/>
           </a:stretch>
@@ -13479,7 +15535,7 @@
           <a:lstStyle/>
           <a:p>
             <a:r>
-              <a:rPr lang="fr-CA"/>
+              <a:rPr lang="fr-CA" dirty="0"/>
               <a:t>Résultats</a:t>
             </a:r>
           </a:p>
@@ -13500,7 +15556,7 @@
           <p:nvPr/>
         </p:nvPicPr>
         <p:blipFill>
-          <a:blip r:embed="rId2"/>
+          <a:blip r:embed="rId3"/>
           <a:stretch>
             <a:fillRect/>
           </a:stretch>
@@ -13530,7 +15586,7 @@
           <p:nvPr/>
         </p:nvPicPr>
         <p:blipFill>
-          <a:blip r:embed="rId3">
+          <a:blip r:embed="rId4">
             <a:extLst>
               <a:ext uri="{28A0092B-C50C-407E-A947-70E740481C1C}">
                 <a14:useLocalDpi xmlns:a14="http://schemas.microsoft.com/office/drawing/2010/main" val="0"/>
@@ -13581,7 +15637,7 @@
           <a:p>
             <a:pPr algn="just"/>
             <a:r>
-              <a:rPr lang="fr-CA" sz="1600" noProof="0"/>
+              <a:rPr lang="fr-CA" sz="1600" noProof="0" dirty="0"/>
               <a:t>Figure </a:t>
             </a:r>
             <a:r>
@@ -13589,15 +15645,15 @@
               <a:t>4</a:t>
             </a:r>
             <a:r>
-              <a:rPr lang="fr-CA" sz="1600" noProof="0"/>
+              <a:rPr lang="fr-CA" sz="1600" noProof="0" dirty="0"/>
               <a:t> : À gauche, résultats de l’étude de </a:t>
             </a:r>
             <a:r>
-              <a:rPr lang="fr-CA" sz="1600" noProof="0" err="1"/>
+              <a:rPr lang="fr-CA" sz="1600" noProof="0" dirty="0" err="1"/>
               <a:t>Bannester</a:t>
             </a:r>
             <a:r>
-              <a:rPr lang="fr-CA" sz="1600" noProof="0"/>
+              <a:rPr lang="fr-CA" sz="1600" noProof="0" dirty="0"/>
               <a:t>-Marchand et al. (2025), à droite, résultats de notre analyse. Est représenté : Abondance médiane de chevaliers cuivrés, basées sur 5000 itérations stochastiques pour les scénarios (a) nulle, (b) menace, (c) mesurée de notre modèle dynamique. Les enveloppes colorées représentent les intervalles de confiance à 95% ; les lignes pleines les abondances médianes d’individus matures</a:t>
             </a:r>
           </a:p>
@@ -13669,22 +15725,30 @@
           <a:p>
             <a:pPr algn="just"/>
             <a:r>
+              <a:rPr lang="fr-CA" sz="1600" noProof="0" dirty="0"/>
+              <a:t>Figure </a:t>
+            </a:r>
+            <a:r>
               <a:rPr lang="fr-CA" sz="1600" noProof="0"/>
-              <a:t>Figure 5 : À gauche, résultats de l’étude de </a:t>
-            </a:r>
-            <a:r>
-              <a:rPr lang="fr-CA" sz="1600" noProof="0" err="1"/>
+              <a:t>5</a:t>
+            </a:r>
+            <a:r>
+              <a:rPr lang="fr-CA" sz="1600" noProof="0" dirty="0"/>
+              <a:t> : À gauche, résultats de l’étude de </a:t>
+            </a:r>
+            <a:r>
+              <a:rPr lang="fr-CA" sz="1600" noProof="0" dirty="0" err="1"/>
               <a:t>Bannester</a:t>
             </a:r>
             <a:r>
-              <a:rPr lang="fr-CA" sz="1600" noProof="0"/>
+              <a:rPr lang="fr-CA" sz="1600" noProof="0" dirty="0"/>
               <a:t>-Marchand et al. (2025), à droite, résultats de notre analyse. Est représenté : Les probabilités que les chevaliers cuivrés tombent sous un seuil de population dans les prochaines 100 ans, basé sur nos scénarios dynamique stochastiques de population. Lignes : médiane de 5000 itérations; enveloppes colorées : 70% </a:t>
             </a:r>
             <a:r>
-              <a:rPr lang="fr-CA" sz="1600" noProof="0" err="1"/>
+              <a:rPr lang="fr-CA" sz="1600" noProof="0" dirty="0" err="1"/>
               <a:t>ICs</a:t>
             </a:r>
-            <a:endParaRPr lang="fr-CA" sz="1600" noProof="0"/>
+            <a:endParaRPr lang="fr-CA" sz="1600" noProof="0" dirty="0"/>
           </a:p>
         </p:txBody>
       </p:sp>
@@ -13703,7 +15767,7 @@
           <p:nvPr/>
         </p:nvPicPr>
         <p:blipFill>
-          <a:blip r:embed="rId2">
+          <a:blip r:embed="rId3">
             <a:extLst>
               <a:ext uri="{28A0092B-C50C-407E-A947-70E740481C1C}">
                 <a14:useLocalDpi xmlns:a14="http://schemas.microsoft.com/office/drawing/2010/main" val="0"/>
@@ -13739,7 +15803,7 @@
           <p:nvPr/>
         </p:nvPicPr>
         <p:blipFill>
-          <a:blip r:embed="rId3"/>
+          <a:blip r:embed="rId4"/>
           <a:stretch>
             <a:fillRect/>
           </a:stretch>
@@ -13820,19 +15884,27 @@
           <a:p>
             <a:pPr algn="just"/>
             <a:r>
+              <a:rPr lang="fr-CA" sz="1600" noProof="0" dirty="0"/>
+              <a:t>Figure </a:t>
+            </a:r>
+            <a:r>
               <a:rPr lang="fr-CA" sz="1600" noProof="0"/>
-              <a:t>Figure 6 : À gauche, résultats de l’étude de </a:t>
-            </a:r>
-            <a:r>
-              <a:rPr lang="fr-CA" sz="1600" noProof="0" err="1"/>
+              <a:t>6</a:t>
+            </a:r>
+            <a:r>
+              <a:rPr lang="fr-CA" sz="1600" noProof="0" dirty="0"/>
+              <a:t> : À gauche, résultats de l’étude de </a:t>
+            </a:r>
+            <a:r>
+              <a:rPr lang="fr-CA" sz="1600" noProof="0" dirty="0" err="1"/>
               <a:t>Bannester</a:t>
             </a:r>
             <a:r>
-              <a:rPr lang="fr-CA" sz="1600" noProof="0"/>
+              <a:rPr lang="fr-CA" sz="1600" noProof="0" dirty="0"/>
               <a:t>-Marchand et al. (2025), à droite, résultats de notre analyse. Est représenté :</a:t>
             </a:r>
             <a:r>
-              <a:rPr lang="fr-CA" sz="1600"/>
+              <a:rPr lang="fr-CA" sz="1600" dirty="0"/>
               <a:t> L’effet d’augmenter l’ensemencement de larves, alevins, individus d’âges 1, et individus matures (âge 10) sur l’abondance de chevaliers matures sur 100 ans dans notre scénario mesuré. Lors de l’application aux scénarios nulles et menacés, les résultats étaient indistinguables de ceux présentés.</a:t>
             </a:r>
           </a:p>
@@ -13853,7 +15925,7 @@
           <p:nvPr/>
         </p:nvPicPr>
         <p:blipFill>
-          <a:blip r:embed="rId2"/>
+          <a:blip r:embed="rId3"/>
           <a:stretch>
             <a:fillRect/>
           </a:stretch>
@@ -13883,7 +15955,7 @@
           <p:nvPr/>
         </p:nvPicPr>
         <p:blipFill>
-          <a:blip r:embed="rId3">
+          <a:blip r:embed="rId4">
             <a:extLst>
               <a:ext uri="{28A0092B-C50C-407E-A947-70E740481C1C}">
                 <a14:useLocalDpi xmlns:a14="http://schemas.microsoft.com/office/drawing/2010/main" val="0"/>
@@ -14218,8 +16290,16 @@
               </a:lnSpc>
             </a:pPr>
             <a:r>
+              <a:rPr lang="fr-CA" dirty="0"/>
+              <a:t>Ensemencement encore nécessaire pour l’instant (Figure </a:t>
+            </a:r>
+            <a:r>
               <a:rPr lang="fr-CA"/>
-              <a:t>Ensemencement encore nécessaire pour l’instant (Figure 4)</a:t>
+              <a:t>4</a:t>
+            </a:r>
+            <a:r>
+              <a:rPr lang="fr-CA" dirty="0"/>
+              <a:t>)</a:t>
             </a:r>
           </a:p>
           <a:p>
@@ -14229,7 +16309,7 @@
               </a:lnSpc>
               <a:buNone/>
             </a:pPr>
-            <a:endParaRPr lang="fr-CA"/>
+            <a:endParaRPr lang="fr-CA" dirty="0"/>
           </a:p>
           <a:p>
             <a:pPr>
@@ -14238,7 +16318,7 @@
               </a:lnSpc>
             </a:pPr>
             <a:r>
-              <a:rPr lang="fr-CA"/>
+              <a:rPr lang="fr-CA" dirty="0"/>
               <a:t>Déclin potentiel de 80% selon nos résultats donc confirme statut en voie de disparition</a:t>
             </a:r>
           </a:p>
@@ -14249,7 +16329,7 @@
               </a:lnSpc>
             </a:pPr>
             <a:r>
-              <a:rPr lang="fr-CA" sz="2000"/>
+              <a:rPr lang="fr-CA" sz="2000" dirty="0"/>
               <a:t>Donc action nécessaire</a:t>
             </a:r>
           </a:p>
@@ -14362,6 +16442,7 @@
               <a:rPr lang="fr-CA"/>
               <a:t>Limitations de l’étude</a:t>
             </a:r>
+            <a:endParaRPr lang="fr-CA" dirty="0"/>
           </a:p>
         </p:txBody>
       </p:sp>
@@ -14383,7 +16464,9 @@
         </p:nvSpPr>
         <p:spPr/>
         <p:txBody>
-          <a:bodyPr/>
+          <a:bodyPr vert="horz" lIns="91440" tIns="45720" rIns="91440" bIns="45720" rtlCol="0" anchor="t">
+            <a:normAutofit/>
+          </a:bodyPr>
           <a:lstStyle/>
           <a:p>
             <a:pPr>
@@ -14403,23 +16486,35 @@
               </a:lnSpc>
             </a:pPr>
             <a:r>
-              <a:rPr lang="fr-CA"/>
-              <a:t>Valeurs stades juvéniles tirées de Dahlberg (1979) = pas des </a:t>
-            </a:r>
-            <a:r>
-              <a:rPr lang="fr-CA" i="1"/>
+              <a:rPr lang="fr-CA" dirty="0"/>
+              <a:t>Valeurs stades juvéniles tirées de </a:t>
+            </a:r>
+            <a:r>
+              <a:rPr lang="fr-CA" dirty="0" err="1"/>
+              <a:t>Dahlberg</a:t>
+            </a:r>
+            <a:r>
+              <a:rPr lang="fr-CA" dirty="0"/>
+              <a:t> (1979) = pas des </a:t>
+            </a:r>
+            <a:r>
+              <a:rPr lang="fr-CA" i="1" dirty="0"/>
               <a:t>M.</a:t>
             </a:r>
             <a:r>
-              <a:rPr lang="fr-CA"/>
+              <a:rPr lang="fr-CA" dirty="0"/>
               <a:t> </a:t>
             </a:r>
             <a:r>
-              <a:rPr lang="fr-CA" i="1"/>
-              <a:t>hubbsi </a:t>
-            </a:r>
-            <a:r>
-              <a:rPr lang="fr-CA"/>
+              <a:rPr lang="fr-CA" i="1" dirty="0" err="1"/>
+              <a:t>hubbsi</a:t>
+            </a:r>
+            <a:r>
+              <a:rPr lang="fr-CA" i="1" dirty="0"/>
+              <a:t> </a:t>
+            </a:r>
+            <a:r>
+              <a:rPr lang="fr-CA" dirty="0"/>
               <a:t>(surestimation possible)</a:t>
             </a:r>
           </a:p>
@@ -14455,6 +16550,7 @@
               <a:rPr lang="fr-CA"/>
               <a:t>Pas d’impact de la génétique</a:t>
             </a:r>
+            <a:endParaRPr lang="fr-CA" dirty="0"/>
           </a:p>
         </p:txBody>
       </p:sp>
@@ -15018,31 +17114,39 @@
           <a:p>
             <a:pPr algn="r"/>
             <a:r>
-              <a:rPr lang="en-US" sz="6000"/>
+              <a:rPr lang="en-US" sz="6000" dirty="0"/>
               <a:t>Un </a:t>
             </a:r>
             <a:r>
+              <a:rPr lang="en-US" sz="6000" dirty="0" err="1"/>
+              <a:t>modèle</a:t>
+            </a:r>
+            <a:r>
+              <a:rPr lang="en-US" sz="6000" dirty="0"/>
+              <a:t> plus simple </a:t>
+            </a:r>
+            <a:r>
+              <a:rPr lang="en-US" sz="6000" dirty="0" err="1"/>
+              <a:t>peut</a:t>
+            </a:r>
+            <a:r>
+              <a:rPr lang="en-US" sz="6000" dirty="0"/>
+              <a:t>-il </a:t>
+            </a:r>
+            <a:r>
               <a:rPr lang="en-US" sz="6000" err="1"/>
-              <a:t>modèle</a:t>
-            </a:r>
-            <a:r>
-              <a:rPr lang="en-US" sz="6000"/>
-              <a:t> plus simple </a:t>
-            </a:r>
-            <a:r>
-              <a:rPr lang="en-US" sz="6000" err="1"/>
-              <a:t>peut</a:t>
-            </a:r>
-            <a:r>
-              <a:rPr lang="en-US" sz="6000"/>
-              <a:t>-il représenter la </a:t>
-            </a:r>
-            <a:r>
-              <a:rPr lang="en-US" sz="6000" err="1"/>
+              <a:t>représenter</a:t>
+            </a:r>
+            <a:r>
+              <a:rPr lang="en-US" sz="6000" dirty="0"/>
+              <a:t> la </a:t>
+            </a:r>
+            <a:r>
+              <a:rPr lang="en-US" sz="6000" dirty="0" err="1"/>
               <a:t>réalité</a:t>
             </a:r>
             <a:r>
-              <a:rPr lang="en-US" sz="6000"/>
+              <a:rPr lang="en-US" sz="6000" dirty="0"/>
               <a:t>?</a:t>
             </a:r>
           </a:p>
@@ -15258,7 +17362,7 @@
           <p:nvPr/>
         </p:nvPicPr>
         <p:blipFill>
-          <a:blip r:embed="rId2"/>
+          <a:blip r:embed="rId3"/>
           <a:stretch>
             <a:fillRect/>
           </a:stretch>
@@ -15288,7 +17392,7 @@
           <p:nvPr/>
         </p:nvPicPr>
         <p:blipFill>
-          <a:blip r:embed="rId3"/>
+          <a:blip r:embed="rId4"/>
           <a:stretch>
             <a:fillRect/>
           </a:stretch>
@@ -15696,7 +17800,7 @@
           <p:nvPr/>
         </p:nvPicPr>
         <p:blipFill>
-          <a:blip r:embed="rId2"/>
+          <a:blip r:embed="rId3"/>
           <a:stretch>
             <a:fillRect/>
           </a:stretch>
@@ -15740,31 +17844,31 @@
           <a:lstStyle/>
           <a:p>
             <a:r>
-              <a:rPr lang="fr-CA" sz="1200"/>
+              <a:rPr lang="fr-CA" sz="1200" dirty="0"/>
               <a:t>Figure 1 : Distribution courante et historique du chevalier cuivré (</a:t>
             </a:r>
             <a:r>
-              <a:rPr lang="fr-CA" sz="1200" i="1" err="1"/>
+              <a:rPr lang="fr-CA" sz="1200" i="1" dirty="0" err="1"/>
               <a:t>Moxostoma</a:t>
             </a:r>
             <a:r>
-              <a:rPr lang="fr-CA" sz="1200" i="1"/>
+              <a:rPr lang="fr-CA" sz="1200" i="1" dirty="0"/>
               <a:t> </a:t>
             </a:r>
             <a:r>
-              <a:rPr lang="fr-CA" sz="1200" i="1" err="1"/>
+              <a:rPr lang="fr-CA" sz="1200" i="1" dirty="0" err="1"/>
               <a:t>hubbsi</a:t>
             </a:r>
             <a:r>
-              <a:rPr lang="fr-CA" sz="1200"/>
+              <a:rPr lang="fr-CA" sz="1200" dirty="0"/>
               <a:t>) au Québec, Canada ; tiré de </a:t>
             </a:r>
             <a:r>
-              <a:rPr lang="fr-CA" sz="1200" err="1"/>
+              <a:rPr lang="fr-CA" sz="1200" dirty="0" err="1"/>
               <a:t>Bannester</a:t>
             </a:r>
             <a:r>
-              <a:rPr lang="fr-CA" sz="1200"/>
+              <a:rPr lang="fr-CA" sz="1200" dirty="0"/>
               <a:t>-Marchand et al. (2025). </a:t>
             </a:r>
           </a:p>
@@ -16531,7 +18635,7 @@
           </p:nvPr>
         </p:nvPicPr>
         <p:blipFill>
-          <a:blip r:embed="rId2">
+          <a:blip r:embed="rId3">
             <a:extLst>
               <a:ext uri="{28A0092B-C50C-407E-A947-70E740481C1C}">
                 <a14:useLocalDpi xmlns:a14="http://schemas.microsoft.com/office/drawing/2010/main" val="0"/>
@@ -16567,7 +18671,7 @@
           <p:nvPr/>
         </p:nvPicPr>
         <p:blipFill>
-          <a:blip r:embed="rId3">
+          <a:blip r:embed="rId4">
             <a:extLst>
               <a:ext uri="{28A0092B-C50C-407E-A947-70E740481C1C}">
                 <a14:useLocalDpi xmlns:a14="http://schemas.microsoft.com/office/drawing/2010/main" val="0"/>
@@ -16675,7 +18779,11 @@
             </a:r>
             <a:r>
               <a:rPr lang="fr-CA" sz="1600" noProof="0"/>
-              <a:t>Est représenté : Abondance médiane de chevaliers cuivrés, basées sur 5000 itérations stochastiques pour les scénarios (a) nulle, (b) menace, (c) mesurée de notre modèle dynamique. Les enveloppes colorées représentent les intervalles de confiance à 95% ; les lignes pleines les abondances médianes d’individus matures</a:t>
+              <a:t>Est </a:t>
+            </a:r>
+            <a:r>
+              <a:rPr lang="fr-CA" sz="1600" noProof="0" dirty="0"/>
+              <a:t>représenté : Abondance médiane de chevaliers cuivrés, basées sur 5000 itérations stochastiques pour les scénarios (a) nulle, (b) menace, (c) mesurée de notre modèle dynamique. Les enveloppes colorées représentent les intervalles de confiance à 95% ; les lignes pleines les abondances médianes d’individus matures</a:t>
             </a:r>
           </a:p>
         </p:txBody>
@@ -16725,7 +18833,7 @@
           <p:nvPr/>
         </p:nvPicPr>
         <p:blipFill>
-          <a:blip r:embed="rId2">
+          <a:blip r:embed="rId3">
             <a:extLst>
               <a:ext uri="{28A0092B-C50C-407E-A947-70E740481C1C}">
                 <a14:useLocalDpi xmlns:a14="http://schemas.microsoft.com/office/drawing/2010/main" val="0"/>
@@ -16776,46 +18884,46 @@
           <a:p>
             <a:pPr algn="just"/>
             <a:r>
-              <a:rPr lang="fr-CA" sz="1600" noProof="0"/>
+              <a:rPr lang="fr-CA" sz="1600" noProof="0" dirty="0"/>
               <a:t>Figure </a:t>
             </a:r>
             <a:r>
-              <a:rPr lang="fr-CA" sz="1600"/>
+              <a:rPr lang="fr-CA" sz="1600" dirty="0"/>
               <a:t>8 </a:t>
             </a:r>
             <a:r>
-              <a:rPr lang="fr-CA" sz="1600" noProof="0"/>
+              <a:rPr lang="fr-CA" sz="1600" noProof="0" dirty="0"/>
               <a:t>: À gauche, résultats </a:t>
             </a:r>
             <a:r>
-              <a:rPr lang="fr-CA" sz="1600"/>
+              <a:rPr lang="fr-CA" sz="1600" dirty="0"/>
               <a:t>obtenus à l'aide de la matrice à 33 stades, </a:t>
             </a:r>
             <a:r>
-              <a:rPr lang="fr-CA" sz="1600" noProof="0"/>
+              <a:rPr lang="fr-CA" sz="1600" noProof="0" dirty="0"/>
               <a:t>à droite, résultats </a:t>
             </a:r>
             <a:r>
-              <a:rPr lang="fr-CA" sz="1600"/>
+              <a:rPr lang="fr-CA" sz="1600" dirty="0"/>
               <a:t>obtenus à l’aide </a:t>
             </a:r>
             <a:r>
-              <a:rPr lang="fr-CA" sz="1600" noProof="0"/>
+              <a:rPr lang="fr-CA" sz="1600" noProof="0" dirty="0"/>
               <a:t>de </a:t>
             </a:r>
             <a:r>
-              <a:rPr lang="fr-CA" sz="1600"/>
+              <a:rPr lang="fr-CA" sz="1600" dirty="0"/>
               <a:t>la matrice mesurée à 3 stades. </a:t>
             </a:r>
             <a:r>
-              <a:rPr lang="fr-CA" sz="1600" noProof="0"/>
+              <a:rPr lang="fr-CA" sz="1600" noProof="0" dirty="0"/>
               <a:t>Est représenté : Les probabilités que les chevaliers cuivrés tombent sous un seuil de population dans les prochaines 100 ans, basé sur nos scénarios dynamique stochastiques de population. Lignes : médiane de 5000 itérations; enveloppes colorées : 70% </a:t>
             </a:r>
             <a:r>
-              <a:rPr lang="fr-CA" sz="1600" noProof="0" err="1"/>
+              <a:rPr lang="fr-CA" sz="1600" noProof="0" dirty="0" err="1"/>
               <a:t>ICs</a:t>
             </a:r>
-            <a:endParaRPr lang="fr-CA" sz="1600" noProof="0"/>
+            <a:endParaRPr lang="fr-CA" sz="1600" noProof="0" dirty="0"/>
           </a:p>
         </p:txBody>
       </p:sp>
@@ -16834,7 +18942,7 @@
           <p:nvPr/>
         </p:nvPicPr>
         <p:blipFill>
-          <a:blip r:embed="rId3">
+          <a:blip r:embed="rId4">
             <a:extLst>
               <a:ext uri="{28A0092B-C50C-407E-A947-70E740481C1C}">
                 <a14:useLocalDpi xmlns:a14="http://schemas.microsoft.com/office/drawing/2010/main" val="0"/>
@@ -16902,7 +19010,7 @@
           </p:nvPr>
         </p:nvPicPr>
         <p:blipFill>
-          <a:blip r:embed="rId2">
+          <a:blip r:embed="rId3">
             <a:extLst>
               <a:ext uri="{28A0092B-C50C-407E-A947-70E740481C1C}">
                 <a14:useLocalDpi xmlns:a14="http://schemas.microsoft.com/office/drawing/2010/main" val="0"/>
@@ -16938,7 +19046,7 @@
           <p:nvPr/>
         </p:nvPicPr>
         <p:blipFill>
-          <a:blip r:embed="rId3">
+          <a:blip r:embed="rId4">
             <a:extLst>
               <a:ext uri="{28A0092B-C50C-407E-A947-70E740481C1C}">
                 <a14:useLocalDpi xmlns:a14="http://schemas.microsoft.com/office/drawing/2010/main" val="0"/>
@@ -16990,16 +19098,20 @@
           <a:p>
             <a:pPr algn="just"/>
             <a:r>
+              <a:rPr lang="fr-CA" sz="1600" noProof="0" dirty="0"/>
+              <a:t>Figure </a:t>
+            </a:r>
+            <a:r>
+              <a:rPr lang="fr-CA" sz="1600" dirty="0"/>
+              <a:t>9 </a:t>
+            </a:r>
+            <a:r>
+              <a:rPr lang="fr-CA" sz="1600" noProof="0" dirty="0"/>
+              <a:t>: À gauche, résultats obtenus à l’aide </a:t>
+            </a:r>
+            <a:r>
               <a:rPr lang="fr-CA" sz="1600" noProof="0"/>
-              <a:t>Figure </a:t>
-            </a:r>
-            <a:r>
-              <a:rPr lang="fr-CA" sz="1600"/>
-              <a:t>9 </a:t>
-            </a:r>
-            <a:r>
-              <a:rPr lang="fr-CA" sz="1600" noProof="0"/>
-              <a:t>: À gauche, résultats obtenus à l’aide de </a:t>
+              <a:t>de </a:t>
             </a:r>
             <a:r>
               <a:rPr lang="fr-CA" sz="1600"/>
@@ -17011,14 +19123,18 @@
             </a:r>
             <a:r>
               <a:rPr lang="fr-CA" sz="1600"/>
-              <a:t>résultats obtenus à l’aide de la matrice mesurée à 3 stades</a:t>
-            </a:r>
-            <a:r>
-              <a:rPr lang="fr-CA" sz="1600" noProof="0"/>
+              <a:t>résultats obtenus à </a:t>
+            </a:r>
+            <a:r>
+              <a:rPr lang="fr-CA" sz="1600" dirty="0"/>
+              <a:t>l’aide de la matrice mesurée à 3 stades</a:t>
+            </a:r>
+            <a:r>
+              <a:rPr lang="fr-CA" sz="1600" noProof="0" dirty="0"/>
               <a:t>. Est représenté :</a:t>
             </a:r>
             <a:r>
-              <a:rPr lang="fr-CA" sz="1600"/>
+              <a:rPr lang="fr-CA" sz="1600" dirty="0"/>
               <a:t> L’effet d’augmenter l’ensemencement de larves, alevins, individus d’âges 1, et individus matures (âge 10) sur l’abondance de chevaliers matures sur 100 ans dans notre scénario mesuré. Lors de l’application aux scénarios nulles et menacés, les résultats étaient indistinguables de ceux présentés.</a:t>
             </a:r>
           </a:p>
@@ -17138,15 +19254,15 @@
               </a:lnSpc>
             </a:pPr>
             <a:r>
-              <a:rPr lang="fr-FR"/>
+              <a:rPr lang="fr-FR" dirty="0"/>
               <a:t>Paramètres de </a:t>
             </a:r>
             <a:r>
-              <a:rPr lang="fr-FR" err="1"/>
+              <a:rPr lang="fr-FR" dirty="0" err="1"/>
               <a:t>stochasticité</a:t>
             </a:r>
             <a:r>
-              <a:rPr lang="fr-FR"/>
+              <a:rPr lang="fr-FR" dirty="0"/>
               <a:t> difficiles à intégrer</a:t>
             </a:r>
           </a:p>
@@ -17158,10 +19274,22 @@
             </a:pPr>
             <a:r>
               <a:rPr lang="fr-FR"/>
-              <a:t>Plus petits intervalles de confiance</a:t>
+              <a:t>Plus</a:t>
+            </a:r>
+            <a:r>
+              <a:rPr lang="fr-FR" dirty="0"/>
+              <a:t> petits </a:t>
+            </a:r>
+            <a:r>
+              <a:rPr lang="fr-FR"/>
+              <a:t>intervalles</a:t>
+            </a:r>
+            <a:r>
+              <a:rPr lang="fr-FR" dirty="0"/>
+              <a:t> de confiance</a:t>
             </a:r>
             <a:br>
-              <a:rPr lang="fr-FR"/>
+              <a:rPr lang="fr-FR" dirty="0"/>
             </a:br>
             <a:endParaRPr lang="fr-FR"/>
           </a:p>
@@ -17173,8 +19301,13 @@
             </a:pPr>
             <a:r>
               <a:rPr lang="fr-FR"/>
-              <a:t>Dans ce contexte, une matrice complète donne des résultats plus fiables: </a:t>
-            </a:r>
+              <a:t>Dans ce contexte, une matrice complète donne des résul</a:t>
+            </a:r>
+            <a:r>
+              <a:rPr lang="fr-FR" dirty="0"/>
+              <a:t>tats plus fiables: </a:t>
+            </a:r>
+            <a:endParaRPr lang="fr-FR"/>
           </a:p>
           <a:p>
             <a:pPr lvl="1">
@@ -17194,7 +19327,7 @@
               </a:lnSpc>
             </a:pPr>
             <a:r>
-              <a:rPr lang="fr-FR" err="1">
+              <a:rPr lang="fr-FR" dirty="0" err="1">
                 <a:solidFill>
                   <a:srgbClr val="000000"/>
                 </a:solidFill>
@@ -17204,7 +19337,7 @@
               <a:t>Stochasticité</a:t>
             </a:r>
             <a:r>
-              <a:rPr lang="fr-FR"/>
+              <a:rPr lang="fr-FR" dirty="0"/>
               <a:t> plus réaliste</a:t>
             </a:r>
           </a:p>
@@ -17385,7 +19518,7 @@
           <p:nvPr/>
         </p:nvPicPr>
         <p:blipFill rotWithShape="1">
-          <a:blip r:embed="rId2">
+          <a:blip r:embed="rId3">
             <a:extLst>
               <a:ext uri="{28A0092B-C50C-407E-A947-70E740481C1C}">
                 <a14:useLocalDpi xmlns:a14="http://schemas.microsoft.com/office/drawing/2010/main" val="0"/>
@@ -17498,7 +19631,7 @@
           <a:lstStyle/>
           <a:p>
             <a:r>
-              <a:rPr lang="fr-CA"/>
+              <a:rPr lang="fr-CA" dirty="0"/>
               <a:t>Important de continuer à faire des efforts</a:t>
             </a:r>
           </a:p>
@@ -17514,7 +19647,7 @@
               <a:t>Informations supplémentaires et autres études à faire,</a:t>
             </a:r>
             <a:br>
-              <a:rPr lang="fr-CA"/>
+              <a:rPr lang="fr-CA" dirty="0"/>
             </a:br>
             <a:r>
               <a:rPr lang="fr-CA"/>
@@ -19103,7 +21236,7 @@
           <a:lstStyle/>
           <a:p>
             <a:r>
-              <a:rPr lang="fr-CA"/>
+              <a:rPr lang="fr-CA" dirty="0"/>
               <a:t>Traits d’histoire de vie</a:t>
             </a:r>
           </a:p>
@@ -19131,7 +21264,7 @@
         </p:xfrm>
         <a:graphic>
           <a:graphicData uri="http://schemas.openxmlformats.org/drawingml/2006/diagram">
-            <dgm:relIds xmlns:dgm="http://schemas.openxmlformats.org/drawingml/2006/diagram" xmlns:r="http://schemas.openxmlformats.org/officeDocument/2006/relationships" r:dm="rId2" r:lo="rId3" r:qs="rId4" r:cs="rId5"/>
+            <dgm:relIds xmlns:dgm="http://schemas.openxmlformats.org/drawingml/2006/diagram" xmlns:r="http://schemas.openxmlformats.org/officeDocument/2006/relationships" r:dm="rId3" r:lo="rId4" r:qs="rId5" r:cs="rId6"/>
           </a:graphicData>
         </a:graphic>
       </p:graphicFrame>
@@ -19165,15 +21298,15 @@
           <a:p>
             <a:pPr algn="r"/>
             <a:r>
-              <a:rPr lang="fr-CA" sz="1200"/>
+              <a:rPr lang="fr-CA" sz="1200" dirty="0"/>
               <a:t>(</a:t>
             </a:r>
             <a:r>
-              <a:rPr lang="fr-CA" sz="1200" err="1"/>
+              <a:rPr lang="fr-CA" sz="1200" dirty="0" err="1"/>
               <a:t>Mongeau</a:t>
             </a:r>
             <a:r>
-              <a:rPr lang="fr-CA" sz="1200"/>
+              <a:rPr lang="fr-CA" sz="1200" dirty="0"/>
               <a:t> et al., 1992)</a:t>
             </a:r>
           </a:p>
@@ -19231,7 +21364,7 @@
           <a:lstStyle/>
           <a:p>
             <a:r>
-              <a:rPr lang="fr-CA"/>
+              <a:rPr lang="fr-CA" dirty="0"/>
               <a:t>État Légal</a:t>
             </a:r>
           </a:p>
@@ -19297,6 +21430,7 @@
               <a:rPr lang="fr-CA"/>
               <a:t>Menacée (IUCN) (NatureServe, 2014)</a:t>
             </a:r>
+            <a:endParaRPr lang="fr-CA" dirty="0"/>
           </a:p>
         </p:txBody>
       </p:sp>
@@ -19315,7 +21449,7 @@
           <p:nvPr/>
         </p:nvPicPr>
         <p:blipFill>
-          <a:blip r:embed="rId2"/>
+          <a:blip r:embed="rId3"/>
           <a:srcRect l="5370" t="8415" r="8116" b="4567"/>
           <a:stretch>
             <a:fillRect/>
@@ -19383,7 +21517,7 @@
           <a:lstStyle/>
           <a:p>
             <a:r>
-              <a:rPr lang="fr-CA"/>
+              <a:rPr lang="fr-CA" dirty="0"/>
               <a:t>Menaces</a:t>
             </a:r>
           </a:p>
@@ -19416,7 +21550,7 @@
               </a:lnSpc>
             </a:pPr>
             <a:r>
-              <a:rPr lang="fr-CA"/>
+              <a:rPr lang="fr-CA" dirty="0"/>
               <a:t>Fragmentation de l’habitat</a:t>
             </a:r>
           </a:p>
@@ -19427,7 +21561,7 @@
               </a:lnSpc>
             </a:pPr>
             <a:r>
-              <a:rPr lang="fr-CA"/>
+              <a:rPr lang="fr-CA" dirty="0"/>
               <a:t>Pollution</a:t>
             </a:r>
           </a:p>
@@ -19438,7 +21572,7 @@
               </a:lnSpc>
             </a:pPr>
             <a:r>
-              <a:rPr lang="fr-CA"/>
+              <a:rPr lang="fr-CA" dirty="0"/>
               <a:t>Espèces envahissantes (Tanche et Gobie à taches noires) </a:t>
             </a:r>
           </a:p>
@@ -19449,7 +21583,7 @@
               </a:lnSpc>
             </a:pPr>
             <a:r>
-              <a:rPr lang="fr-CA"/>
+              <a:rPr lang="fr-CA" dirty="0"/>
               <a:t>Changements climatiques</a:t>
             </a:r>
           </a:p>
@@ -19459,7 +21593,7 @@
                 <a:spcPct val="200000"/>
               </a:lnSpc>
             </a:pPr>
-            <a:endParaRPr lang="fr-CA"/>
+            <a:endParaRPr lang="fr-CA" dirty="0"/>
           </a:p>
         </p:txBody>
       </p:sp>
@@ -19493,7 +21627,7 @@
           <a:p>
             <a:pPr algn="r"/>
             <a:r>
-              <a:rPr lang="fr-CA" sz="1200"/>
+              <a:rPr lang="fr-CA" sz="1200" dirty="0"/>
               <a:t>(COSEPAC, 2014)</a:t>
             </a:r>
           </a:p>
@@ -19551,7 +21685,7 @@
           <a:lstStyle/>
           <a:p>
             <a:r>
-              <a:rPr lang="fr-CA"/>
+              <a:rPr lang="fr-CA" dirty="0"/>
               <a:t>Mesures établies</a:t>
             </a:r>
           </a:p>
@@ -19584,7 +21718,7 @@
               </a:lnSpc>
             </a:pPr>
             <a:r>
-              <a:rPr lang="fr-CA"/>
+              <a:rPr lang="fr-CA" dirty="0"/>
               <a:t>Passe à poisson au Canal Saint-Ours</a:t>
             </a:r>
           </a:p>
@@ -19595,7 +21729,7 @@
               </a:lnSpc>
             </a:pPr>
             <a:r>
-              <a:rPr lang="fr-CA"/>
+              <a:rPr lang="fr-CA" dirty="0"/>
               <a:t>Protection du site de fraie de Chambly</a:t>
             </a:r>
           </a:p>
@@ -19606,7 +21740,7 @@
               </a:lnSpc>
             </a:pPr>
             <a:r>
-              <a:rPr lang="fr-CA"/>
+              <a:rPr lang="fr-CA" dirty="0"/>
               <a:t>Changement à la loi sur la pêche</a:t>
             </a:r>
           </a:p>
@@ -19617,7 +21751,7 @@
               </a:lnSpc>
             </a:pPr>
             <a:r>
-              <a:rPr lang="fr-CA"/>
+              <a:rPr lang="fr-CA" dirty="0"/>
               <a:t>Reproduction assistée</a:t>
             </a:r>
           </a:p>
@@ -19653,7 +21787,7 @@
           <a:p>
             <a:pPr algn="r"/>
             <a:r>
-              <a:rPr lang="fr-CA" sz="1200"/>
+              <a:rPr lang="fr-CA" sz="1200" dirty="0"/>
               <a:t>( COSEPAC, 2014 ;Vachon, 2010) </a:t>
             </a:r>
           </a:p>
@@ -20115,7 +22249,7 @@
           <a:lstStyle/>
           <a:p>
             <a:r>
-              <a:rPr lang="fr-CA"/>
+              <a:rPr lang="fr-CA" dirty="0"/>
               <a:t>Méthode</a:t>
             </a:r>
           </a:p>
@@ -20252,7 +22386,7 @@
         </p:xfrm>
         <a:graphic>
           <a:graphicData uri="http://schemas.openxmlformats.org/drawingml/2006/diagram">
-            <dgm:relIds xmlns:dgm="http://schemas.openxmlformats.org/drawingml/2006/diagram" xmlns:r="http://schemas.openxmlformats.org/officeDocument/2006/relationships" r:dm="rId2" r:lo="rId3" r:qs="rId4" r:cs="rId5"/>
+            <dgm:relIds xmlns:dgm="http://schemas.openxmlformats.org/drawingml/2006/diagram" xmlns:r="http://schemas.openxmlformats.org/officeDocument/2006/relationships" r:dm="rId3" r:lo="rId4" r:qs="rId5" r:cs="rId6"/>
           </a:graphicData>
         </a:graphic>
       </p:graphicFrame>
@@ -20399,7 +22533,7 @@
           <a:lstStyle/>
           <a:p>
             <a:r>
-              <a:rPr lang="fr-CA"/>
+              <a:rPr lang="fr-CA" dirty="0"/>
               <a:t>Données </a:t>
             </a:r>
           </a:p>
@@ -20486,88 +22620,88 @@
           <a:lstStyle/>
           <a:p>
             <a:r>
-              <a:rPr lang="fr-CA"/>
+              <a:rPr lang="fr-CA" dirty="0"/>
               <a:t>Adultes : Étude avec tailles et fécondités (</a:t>
             </a:r>
             <a:r>
-              <a:rPr lang="fr-CA" err="1"/>
+              <a:rPr lang="fr-CA" dirty="0" err="1"/>
               <a:t>Mongeau</a:t>
             </a:r>
             <a:r>
-              <a:rPr lang="fr-CA"/>
+              <a:rPr lang="fr-CA" dirty="0"/>
               <a:t> et al., 1986 ; </a:t>
             </a:r>
             <a:r>
-              <a:rPr lang="fr-CA" err="1"/>
+              <a:rPr lang="fr-CA" dirty="0" err="1"/>
               <a:t>Mongeau</a:t>
             </a:r>
             <a:r>
-              <a:rPr lang="fr-CA"/>
+              <a:rPr lang="fr-CA" dirty="0"/>
               <a:t> et al., 1992)</a:t>
             </a:r>
           </a:p>
           <a:p>
             <a:r>
-              <a:rPr lang="fr-CA"/>
+              <a:rPr lang="fr-CA" dirty="0"/>
               <a:t>Subadultes : Proviennent des chevaliers élevés en captivité (Vachon 2020, 2021b,c)</a:t>
             </a:r>
           </a:p>
           <a:p>
             <a:pPr lvl="1"/>
-            <a:endParaRPr lang="fr-CA"/>
+            <a:endParaRPr lang="fr-CA" dirty="0"/>
           </a:p>
           <a:p>
             <a:pPr lvl="1"/>
-            <a:endParaRPr lang="fr-CA"/>
-          </a:p>
-          <a:p>
-            <a:r>
-              <a:rPr lang="fr-CA"/>
+            <a:endParaRPr lang="fr-CA" dirty="0"/>
+          </a:p>
+          <a:p>
+            <a:r>
+              <a:rPr lang="fr-CA" dirty="0"/>
               <a:t>Résultat : 3 Matrice de Leslie</a:t>
             </a:r>
           </a:p>
           <a:p>
             <a:pPr lvl="1"/>
             <a:r>
-              <a:rPr lang="fr-CA"/>
+              <a:rPr lang="fr-CA" dirty="0"/>
               <a:t>Mesurée (</a:t>
             </a:r>
             <a:r>
-              <a:rPr lang="el-GR"/>
+              <a:rPr lang="el-GR" dirty="0"/>
               <a:t>λ </a:t>
             </a:r>
             <a:r>
-              <a:rPr lang="fr-CA"/>
+              <a:rPr lang="fr-CA" dirty="0"/>
               <a:t>= 0.957)</a:t>
             </a:r>
           </a:p>
           <a:p>
             <a:pPr lvl="1"/>
             <a:r>
-              <a:rPr lang="fr-CA"/>
+              <a:rPr lang="fr-CA" dirty="0"/>
               <a:t>Menacée (</a:t>
             </a:r>
             <a:r>
-              <a:rPr lang="el-GR"/>
+              <a:rPr lang="el-GR" dirty="0"/>
               <a:t>λ </a:t>
             </a:r>
             <a:r>
-              <a:rPr lang="fr-CA"/>
+              <a:rPr lang="fr-CA" dirty="0"/>
               <a:t>= 0.984)</a:t>
             </a:r>
           </a:p>
           <a:p>
             <a:pPr lvl="1"/>
             <a:r>
-              <a:rPr lang="fr-CA"/>
+              <a:rPr lang="fr-CA" dirty="0"/>
               <a:t>Nulle (</a:t>
             </a:r>
             <a:r>
-              <a:rPr lang="el-GR"/>
+              <a:rPr lang="el-GR" dirty="0"/>
               <a:t>λ </a:t>
             </a:r>
             <a:r>
-              <a:rPr lang="fr-CA"/>
+              <a:rPr lang="fr-CA" dirty="0"/>
               <a:t>= 1)</a:t>
             </a:r>
           </a:p>
@@ -20588,7 +22722,7 @@
           <p:nvPr/>
         </p:nvPicPr>
         <p:blipFill>
-          <a:blip r:embed="rId2">
+          <a:blip r:embed="rId3">
             <a:extLst>
               <a:ext uri="{28A0092B-C50C-407E-A947-70E740481C1C}">
                 <a14:useLocalDpi xmlns:a14="http://schemas.microsoft.com/office/drawing/2010/main" val="0"/>
@@ -20638,15 +22772,15 @@
           <a:lstStyle/>
           <a:p>
             <a:r>
-              <a:rPr lang="fr-CA" sz="1200"/>
+              <a:rPr lang="fr-CA" sz="1200" dirty="0"/>
               <a:t>Tableau 1 : Valeurs de la matrice de Leslie mesurées. Tiré de </a:t>
             </a:r>
             <a:r>
-              <a:rPr lang="fr-CA" sz="1200" err="1"/>
+              <a:rPr lang="fr-CA" sz="1200" dirty="0" err="1"/>
               <a:t>Bannester</a:t>
             </a:r>
             <a:r>
-              <a:rPr lang="fr-CA" sz="1200"/>
+              <a:rPr lang="fr-CA" sz="1200" dirty="0"/>
               <a:t>-Marchand et al. (2025). </a:t>
             </a:r>
           </a:p>
